--- a/Bases de Datos II/Clases/Clase 11 - Avance del proyecto final/Presentacion.pptx
+++ b/Bases de Datos II/Clases/Clase 11 - Avance del proyecto final/Presentacion.pptx
@@ -34,6 +34,7 @@
     <p:sldId id="282" r:id="rId33"/>
     <p:sldId id="283" r:id="rId34"/>
     <p:sldId id="284" r:id="rId35"/>
+    <p:sldId id="285" r:id="rId36"/>
   </p:sldIdLst>
   <p:sldSz cx="12191695" cy="6858000" type="screen4x3"/>
   <p:notesSz cx="6858000" cy="9144000"/>
@@ -3673,7 +3674,7 @@
                 </a:solidFill>
                 <a:latin typeface="Calibri"/>
               </a:rPr>
-              <a:t>–   Verificacion cuatro, optimizacion.</a:t>
+              <a:t>–   Si el estudiante no puede mostrar la segunda ejecucion, el procedimiento no tiene manejo de errores y eso resta puntos en los 25 de objetos programables.</a:t>
             </a:r>
           </a:p>
           <a:p>
@@ -3690,22 +3691,6 @@
                 <a:latin typeface="Calibri"/>
               </a:rPr>
               <a:t>–   Un informe de optimizacion sin medicion no es optimizacion, es una opinion.</a:t>
-            </a:r>
-          </a:p>
-          <a:p>
-            <a:pPr>
-              <a:spcAft>
-                <a:spcPts val="800"/>
-              </a:spcAft>
-            </a:pPr>
-            <a:r>
-              <a:rPr sz="2000" b="0" i="0">
-                <a:solidFill>
-                  <a:srgbClr val="333333"/>
-                </a:solidFill>
-                <a:latin typeface="Calibri"/>
-              </a:rPr>
-              <a:t>–   Se exige la consulta original, el plan de ejecucion que la acompanaba, el cambio aplicado (indice creado o consulta reescrita) y el plan despues, mostrando que el motor paso de recorrido completo de tabla a acceso por indice.</a:t>
             </a:r>
           </a:p>
           <a:p>
@@ -3992,22 +3977,6 @@
               <a:t>–   Un estudiante que llega con quince entidades porque agrego proveedores, inventario multialmacen, portal para duenos y notificaciones no esta adelantado: esta repartiendo el mismo esfuerzo en el doble de superficie</a:t>
             </a:r>
           </a:p>
-          <a:p>
-            <a:pPr>
-              <a:spcAft>
-                <a:spcPts val="800"/>
-              </a:spcAft>
-            </a:pPr>
-            <a:r>
-              <a:rPr sz="2000" b="0" i="0">
-                <a:solidFill>
-                  <a:srgbClr val="333333"/>
-                </a:solidFill>
-                <a:latin typeface="Calibri"/>
-              </a:rPr>
-              <a:t>–   Y termina con quince tablas vacias en vez de siete tablas con procedimientos probados.</a:t>
-            </a:r>
-          </a:p>
         </p:txBody>
       </p:sp>
       <p:sp>
@@ -4225,7 +4194,7 @@
                 </a:solidFill>
                 <a:latin typeface="Calibri"/>
               </a:rPr>
-              <a:t>–   La rubrica no da puntos por cantidad de tablas: da 20 por modelo coherente y 25 por objetos programables con casos de prueba.</a:t>
+              <a:t>–   Y termina con quince tablas vacias en vez de siete tablas con procedimientos probados.</a:t>
             </a:r>
           </a:p>
           <a:p>
@@ -4241,7 +4210,7 @@
                 </a:solidFill>
                 <a:latin typeface="Calibri"/>
               </a:rPr>
-              <a:t>–   La accion correctiva es explicita y se registra en el acta: las entidades que sobran se mueven a una seccion de alcance futuro del informe, con una frase que diga por que quedaron fuera.</a:t>
+              <a:t>–   La rubrica no da puntos por cantidad de tablas: da 20 por modelo coherente y 25 por objetos programables con casos de prueba.</a:t>
             </a:r>
           </a:p>
           <a:p>
@@ -4257,7 +4226,7 @@
                 </a:solidFill>
                 <a:latin typeface="Calibri"/>
               </a:rPr>
-              <a:t>–   Eso no resta puntos, al contrario, declarar el limite es una senal de madurez que se valora en la sustentacion.</a:t>
+              <a:t>–   La accion correctiva es explicita y se registra en el acta: las entidades que sobran se mueven a una seccion de alcance futuro del informe, con una frase que diga por que quedaron fuera.</a:t>
             </a:r>
           </a:p>
           <a:p>
@@ -4525,22 +4494,6 @@
                 </a:solidFill>
                 <a:latin typeface="Calibri"/>
               </a:rPr>
-              <a:t>–   Comparense los dos extremos.</a:t>
-            </a:r>
-          </a:p>
-          <a:p>
-            <a:pPr>
-              <a:spcAft>
-                <a:spcPts val="800"/>
-              </a:spcAft>
-            </a:pPr>
-            <a:r>
-              <a:rPr sz="2000" b="0" i="0">
-                <a:solidFill>
-                  <a:srgbClr val="333333"/>
-                </a:solidFill>
-                <a:latin typeface="Calibri"/>
-              </a:rPr>
               <a:t>–   Retroalimentacion inutil: «el modelo esta flojo, mejorenlo»; no dice que mirar ni como saber cuando esta resuelto.</a:t>
             </a:r>
           </a:p>
@@ -4825,22 +4778,6 @@
                 </a:solidFill>
                 <a:latin typeface="Calibri"/>
               </a:rPr>
-              <a:t>–   Responsable: Carlos.</a:t>
-            </a:r>
-          </a:p>
-          <a:p>
-            <a:pPr>
-              <a:spcAft>
-                <a:spcPts val="800"/>
-              </a:spcAft>
-            </a:pPr>
-            <a:r>
-              <a:rPr sz="2000" b="0" i="0">
-                <a:solidFill>
-                  <a:srgbClr val="333333"/>
-                </a:solidFill>
-                <a:latin typeface="Calibri"/>
-              </a:rPr>
               <a:t>–   Fecha: antes de la Clase 12.» La diferencia entre las dos no es cortesia, es verificabilidad: el segundo hallazgo se puede cerrar y cualquiera puede comprobar que se cerro.</a:t>
             </a:r>
           </a:p>
@@ -5038,7 +4975,7 @@
                 </a:solidFill>
                 <a:latin typeface="Calibri"/>
               </a:rPr>
-              <a:t>La aritmetica del calendario, dicha en voz alta (1/2)</a:t>
+              <a:t>La aritmetica del calendario, dicha en voz alta (1/3)</a:t>
             </a:r>
           </a:p>
         </p:txBody>
@@ -5126,38 +5063,6 @@
                 <a:latin typeface="Calibri"/>
               </a:rPr>
               <a:t>–   Que es autonoma por festivo y el estudiante hace solo; luego el Parcial 3, que es solo evaluacion; y finalmente la sesion de cierre, que es la sustentacion en vivo del proyecto.</a:t>
-            </a:r>
-          </a:p>
-          <a:p>
-            <a:pPr>
-              <a:spcAft>
-                <a:spcPts val="800"/>
-              </a:spcAft>
-            </a:pPr>
-            <a:r>
-              <a:rPr sz="2000" b="0" i="0">
-                <a:solidFill>
-                  <a:srgbClr val="333333"/>
-                </a:solidFill>
-                <a:latin typeface="Calibri"/>
-              </a:rPr>
-              <a:t>–   Dicho de frente al grupo: hoy es la ultima vez que el docente revisa el proyecto con ellos delante, y lo que salga mal de aqui en adelante se corrige por cuenta propia, con retroalimentacion escrita entre sesiones.</a:t>
-            </a:r>
-          </a:p>
-          <a:p>
-            <a:pPr>
-              <a:spcAft>
-                <a:spcPts val="800"/>
-              </a:spcAft>
-            </a:pPr>
-            <a:r>
-              <a:rPr sz="2000" b="0" i="0">
-                <a:solidFill>
-                  <a:srgbClr val="333333"/>
-                </a:solidFill>
-                <a:latin typeface="Calibri"/>
-              </a:rPr>
-              <a:t>–   Con ese dato, el umbral razonable a esta altura es tener cerrados los 20 puntos de modelo mas DDL y los 15 de seguridad y respaldo, o sea 35 de los 100</a:t>
             </a:r>
           </a:p>
         </p:txBody>
@@ -5338,7 +5243,7 @@
                 </a:solidFill>
                 <a:latin typeface="Calibri"/>
               </a:rPr>
-              <a:t>La aritmetica del calendario, dicha en voz alta (2/2)</a:t>
+              <a:t>La aritmetica del calendario, dicha en voz alta (2/3)</a:t>
             </a:r>
           </a:p>
         </p:txBody>
@@ -5377,7 +5282,7 @@
                 </a:solidFill>
                 <a:latin typeface="Calibri"/>
               </a:rPr>
-              <a:t>–   Y tener al menos la mitad de los 25 de objetos programables: dos procedimientos, uno de ellos probado con su caso invalido.</a:t>
+              <a:t>–   Dicho de frente al grupo: hoy es la ultima vez que el docente revisa el proyecto con ellos delante, y lo que salga mal de aqui en adelante se corrige por cuenta propia, con retroalimentacion escrita entre sesiones.</a:t>
             </a:r>
           </a:p>
           <a:p>
@@ -5393,7 +5298,7 @@
                 </a:solidFill>
                 <a:latin typeface="Calibri"/>
               </a:rPr>
-              <a:t>–   Con ese criterio el semaforo es objetivo y se puede decir a la cara sin que suene arbitrario.</a:t>
+              <a:t>–   Con ese dato, el umbral razonable a esta altura es tener cerrados los 20 puntos de modelo mas DDL y los 15 de seguridad y respaldo, o sea 35 de los 100</a:t>
             </a:r>
           </a:p>
           <a:p>
@@ -5409,7 +5314,7 @@
                 </a:solidFill>
                 <a:latin typeface="Calibri"/>
               </a:rPr>
-              <a:t>–   Verde: modelo cerrado, roles definidos, dos procedimientos que ejecutan y una consulta optimizada con medicion.</a:t>
+              <a:t>–   Y tener al menos la mitad de los 25 de objetos programables: dos procedimientos, uno de ellos probado con su caso invalido.</a:t>
             </a:r>
           </a:p>
           <a:p>
@@ -5425,7 +5330,7 @@
                 </a:solidFill>
                 <a:latin typeface="Calibri"/>
               </a:rPr>
-              <a:t>–   Amarillo: modelo cerrado pero procedimientos que compilan sin pruebas, o roles que solo existen en papel.</a:t>
+              <a:t>–   Con ese criterio el semaforo es objetivo y se puede decir a la cara sin que suene arbitrario.</a:t>
             </a:r>
           </a:p>
           <a:p>
@@ -5441,23 +5346,7 @@
                 </a:solidFill>
                 <a:latin typeface="Calibri"/>
               </a:rPr>
-              <a:t>–   Rojo: ER que aun cambia semana a semana, o DDL que no ejecuta de principio a fin en un entorno limpio.</a:t>
-            </a:r>
-          </a:p>
-          <a:p>
-            <a:pPr>
-              <a:spcAft>
-                <a:spcPts val="800"/>
-              </a:spcAft>
-            </a:pPr>
-            <a:r>
-              <a:rPr sz="2000" b="0" i="0">
-                <a:solidFill>
-                  <a:srgbClr val="333333"/>
-                </a:solidFill>
-                <a:latin typeface="Calibri"/>
-              </a:rPr>
-              <a:t>–   A un estudiante en rojo no se le pide que avance; se le pide que congele el alcance hoy mismo y dedique la semana a cerrar el DDL, porque sin una base ejecutable no hay nada sobre lo que montar procedimientos, disparadores ni optimizacion.</a:t>
+              <a:t>–   Verde: modelo cerrado, roles definidos, dos procedimientos que ejecutan y una consulta optimizada con medicion.</a:t>
             </a:r>
           </a:p>
         </p:txBody>
@@ -5638,7 +5527,7 @@
                 </a:solidFill>
                 <a:latin typeface="Calibri"/>
               </a:rPr>
-              <a:t>Un checkpoint sin hallazgos concretos es un checkpoint desperdiciado (1/2)</a:t>
+              <a:t>La aritmetica del calendario, dicha en voz alta (3/3)</a:t>
             </a:r>
           </a:p>
         </p:txBody>
@@ -5677,7 +5566,7 @@
                 </a:solidFill>
                 <a:latin typeface="Calibri"/>
               </a:rPr>
-              <a:t>–   Un checkpoint sin hallazgos concretos es un checkpoint desperdiciado, y esa afirmacion merece justificacion porque suena severa.</a:t>
+              <a:t>–   Amarillo: modelo cerrado pero procedimientos que compilan sin pruebas, o roles que solo existen en papel.</a:t>
             </a:r>
           </a:p>
           <a:p>
@@ -5693,7 +5582,7 @@
                 </a:solidFill>
                 <a:latin typeface="Calibri"/>
               </a:rPr>
-              <a:t>–   El unico valor de un punto de control intermedio es que todavia existe tiempo para corregir, y ese valor se realiza solo si de la sesion sale una lista escrita de cosas por corregir.</a:t>
+              <a:t>–   Rojo: ER que aun cambia semana a semana, o DDL que no ejecuta de principio a fin en un entorno limpio.</a:t>
             </a:r>
           </a:p>
           <a:p>
@@ -5709,71 +5598,7 @@
                 </a:solidFill>
                 <a:latin typeface="Calibri"/>
               </a:rPr>
-              <a:t>–   Cuando el docente dice «todo bien, sigan asi», el estudiante interpreta legitimamente que su trabajo esta aprobado, deja de revisarlo, y el defecto reaparece en la entrega final cuando ya no hay clases para arreglarlo: es un costo diferido, no un ahorro.</a:t>
-            </a:r>
-          </a:p>
-          <a:p>
-            <a:pPr>
-              <a:spcAft>
-                <a:spcPts val="800"/>
-              </a:spcAft>
-            </a:pPr>
-            <a:r>
-              <a:rPr sz="2000" b="0" i="0">
-                <a:solidFill>
-                  <a:srgbClr val="333333"/>
-                </a:solidFill>
-                <a:latin typeface="Calibri"/>
-              </a:rPr>
-              <a:t>–   Aqui aparecen las dos preguntas previsibles del estudiante.</a:t>
-            </a:r>
-          </a:p>
-          <a:p>
-            <a:pPr>
-              <a:spcAft>
-                <a:spcPts val="800"/>
-              </a:spcAft>
-            </a:pPr>
-            <a:r>
-              <a:rPr sz="2000" b="0" i="0">
-                <a:solidFill>
-                  <a:srgbClr val="333333"/>
-                </a:solidFill>
-                <a:latin typeface="Calibri"/>
-              </a:rPr>
-              <a:t>–   La primera: «esto tiene nota?».</a:t>
-            </a:r>
-          </a:p>
-          <a:p>
-            <a:pPr>
-              <a:spcAft>
-                <a:spcPts val="800"/>
-              </a:spcAft>
-            </a:pPr>
-            <a:r>
-              <a:rPr sz="2000" b="0" i="0">
-                <a:solidFill>
-                  <a:srgbClr val="333333"/>
-                </a:solidFill>
-                <a:latin typeface="Calibri"/>
-              </a:rPr>
-              <a:t>–   La respuesta es que el checkpoint en si no califica el producto, pero es la ultima oportunidad de mover puntos de la rubrica antes de la entrega</a:t>
-            </a:r>
-          </a:p>
-          <a:p>
-            <a:pPr>
-              <a:spcAft>
-                <a:spcPts val="800"/>
-              </a:spcAft>
-            </a:pPr>
-            <a:r>
-              <a:rPr sz="2000" b="0" i="0">
-                <a:solidFill>
-                  <a:srgbClr val="333333"/>
-                </a:solidFill>
-                <a:latin typeface="Calibri"/>
-              </a:rPr>
-              <a:t>–   Y por eso conviene llegar con lo peor y no con lo mejor: un estudiante que esconde su parte floja para no verse mal pierde justamente la revision que la habria arreglado.</a:t>
+              <a:t>–   A un estudiante en rojo no se le pide que avance; se le pide que congele el alcance hoy mismo y dedique la semana a cerrar el DDL, porque sin una base ejecutable no hay nada sobre lo que montar procedimientos, disparadores ni optimizacion.</a:t>
             </a:r>
           </a:p>
         </p:txBody>
@@ -5954,7 +5779,7 @@
                 </a:solidFill>
                 <a:latin typeface="Calibri"/>
               </a:rPr>
-              <a:t>Un checkpoint sin hallazgos concretos es un checkpoint desperdiciado (2/2)</a:t>
+              <a:t>Un checkpoint sin hallazgos concretos es un checkpoint desperdiciado (1/2)</a:t>
             </a:r>
           </a:p>
         </p:txBody>
@@ -5993,7 +5818,7 @@
                 </a:solidFill>
                 <a:latin typeface="Calibri"/>
               </a:rPr>
-              <a:t>–   La segunda: «si quien me audita encuentra fallas, me baja la nota?».</a:t>
+              <a:t>–   Un checkpoint sin hallazgos concretos es un checkpoint desperdiciado, y esa afirmacion merece justificacion porque suena severa.</a:t>
             </a:r>
           </a:p>
           <a:p>
@@ -6009,7 +5834,7 @@
                 </a:solidFill>
                 <a:latin typeface="Calibri"/>
               </a:rPr>
-              <a:t>–   No, porque el auditor par no califica.</a:t>
+              <a:t>–   El unico valor de un punto de control intermedio es que todavia existe tiempo para corregir, y ese valor se realiza solo si de la sesion sale una lista escrita de cosas por corregir.</a:t>
             </a:r>
           </a:p>
           <a:p>
@@ -6025,7 +5850,7 @@
                 </a:solidFill>
                 <a:latin typeface="Calibri"/>
               </a:rPr>
-              <a:t>–   Y revisar el trabajo de otro tiene un beneficio propio bien documentado: los defectos ajenos se ven mucho mas rapido que los propios, y casi siempre quien audita vuelve a su carpeta y arregla en silencio el mismo problema que acaba de senalar.</a:t>
+              <a:t>–   Cuando el docente dice «todo bien, sigan asi», el estudiante interpreta legitimamente que su trabajo esta aprobado, deja de revisarlo, y el defecto reaparece en la entrega final cuando ya no hay clases para arreglarlo: es un costo diferido, no un ahorro.</a:t>
             </a:r>
           </a:p>
           <a:p>
@@ -6041,7 +5866,7 @@
                 </a:solidFill>
                 <a:latin typeface="Calibri"/>
               </a:rPr>
-              <a:t>–   Todo esto se apoya en lo hecho hasta la Clase 10 (el informe de escenarios de concurrencia es una de las evidencias que hoy se audita) y alimenta directamente la Clase 12</a:t>
+              <a:t>–   La primera: «esto tiene nota?».</a:t>
             </a:r>
           </a:p>
           <a:p>
@@ -6057,7 +5882,7 @@
                 </a:solidFill>
                 <a:latin typeface="Calibri"/>
               </a:rPr>
-              <a:t>–   Donde el contrato de operaciones solo puede escribirse sobre procedimientos que existan y funcionen, y la Clase 15, donde se sustenta.</a:t>
+              <a:t>–   La segunda: «si quien me audita encuentra fallas, me baja la nota?».</a:t>
             </a:r>
           </a:p>
         </p:txBody>
@@ -6238,7 +6063,7 @@
                 </a:solidFill>
                 <a:latin typeface="Calibri"/>
               </a:rPr>
-              <a:t>Demo del dia</a:t>
+              <a:t>Un checkpoint sin hallazgos concretos es un checkpoint desperdiciado (2/2)</a:t>
             </a:r>
           </a:p>
         </p:txBody>
@@ -6277,25 +6102,7 @@
                 </a:solidFill>
                 <a:latin typeface="Calibri"/>
               </a:rPr>
-              <a:t>–   </a:t>
-            </a:r>
-            <a:r>
-              <a:rPr sz="2000" b="1" i="0">
-                <a:solidFill>
-                  <a:srgbClr val="333333"/>
-                </a:solidFill>
-                <a:latin typeface="Calibri"/>
-              </a:rPr>
-              <a:t>Herramienta:</a:t>
-            </a:r>
-            <a:r>
-              <a:rPr sz="2000" b="0" i="0">
-                <a:solidFill>
-                  <a:srgbClr val="333333"/>
-                </a:solidFill>
-                <a:latin typeface="Calibri"/>
-              </a:rPr>
-              <a:t> Live SQL / DB Fiddle + draw.io + la plataforma del curso</a:t>
+              <a:t>–   Y revisar el trabajo de otro tiene un beneficio propio bien documentado: los defectos ajenos se ven mucho mas rapido que los propios, y casi siempre quien audita vuelve a su carpeta y arregla en silencio el mismo problema que acaba de senalar.</a:t>
             </a:r>
           </a:p>
           <a:p>
@@ -6311,25 +6118,7 @@
                 </a:solidFill>
                 <a:latin typeface="Calibri"/>
               </a:rPr>
-              <a:t>–   </a:t>
-            </a:r>
-            <a:r>
-              <a:rPr sz="2000" b="1" i="0">
-                <a:solidFill>
-                  <a:srgbClr val="333333"/>
-                </a:solidFill>
-                <a:latin typeface="Calibri"/>
-              </a:rPr>
-              <a:t>Demo:</a:t>
-            </a:r>
-            <a:r>
-              <a:rPr sz="2000" b="0" i="0">
-                <a:solidFill>
-                  <a:srgbClr val="333333"/>
-                </a:solidFill>
-                <a:latin typeface="Calibri"/>
-              </a:rPr>
-              <a:t> Recorrido de checklist + ejemplo demo de 3 min.</a:t>
+              <a:t>–   Todo esto se apoya en lo hecho hasta la Clase 10 (el informe de escenarios de concurrencia es una de las evidencias que hoy se audita) y alimenta directamente la Clase 12</a:t>
             </a:r>
           </a:p>
           <a:p>
@@ -6345,23 +6134,7 @@
                 </a:solidFill>
                 <a:latin typeface="Calibri"/>
               </a:rPr>
-              <a:t>–   Sigan el mismo dominio VetCare (no inventen otro caso).</a:t>
-            </a:r>
-          </a:p>
-          <a:p>
-            <a:pPr>
-              <a:spcAft>
-                <a:spcPts val="800"/>
-              </a:spcAft>
-            </a:pPr>
-            <a:r>
-              <a:rPr sz="2000" b="0" i="0">
-                <a:solidFill>
-                  <a:srgbClr val="333333"/>
-                </a:solidFill>
-                <a:latin typeface="Calibri"/>
-              </a:rPr>
-              <a:t>–   Al final de la demo: dejar enlace/script compartible al grupo.</a:t>
+              <a:t>–   Donde el contrato de operaciones solo puede escribirse sobre procedimientos que existan y funcionen, y la Clase 15, donde se sustenta.</a:t>
             </a:r>
           </a:p>
         </p:txBody>
@@ -6808,7 +6581,7 @@
         <p:spPr>
           <a:xfrm>
             <a:off x="0" y="0"/>
-            <a:ext cx="12191695" cy="1170432"/>
+            <a:ext cx="12191695" cy="960120"/>
           </a:xfrm>
           <a:prstGeom prst="rect">
             <a:avLst/>
@@ -6850,7 +6623,7 @@
         </p:nvSpPr>
         <p:spPr>
           <a:xfrm>
-            <a:off x="0" y="1170432"/>
+            <a:off x="0" y="960120"/>
             <a:ext cx="12191695" cy="41148"/>
           </a:xfrm>
           <a:prstGeom prst="rect">
@@ -6894,7 +6667,7 @@
         <p:spPr>
           <a:xfrm>
             <a:off x="457200" y="164592"/>
-            <a:ext cx="11277295" cy="384048"/>
+            <a:ext cx="11277295" cy="502920"/>
           </a:xfrm>
           <a:prstGeom prst="rect">
             <a:avLst/>
@@ -6914,7 +6687,7 @@
                 </a:solidFill>
                 <a:latin typeface="Calibri"/>
               </a:rPr>
-              <a:t>Herramientas de hoy</a:t>
+              <a:t>Demo del dia</a:t>
             </a:r>
           </a:p>
         </p:txBody>
@@ -6927,8 +6700,8 @@
         </p:nvSpPr>
         <p:spPr>
           <a:xfrm>
-            <a:off x="457200" y="566928"/>
-            <a:ext cx="11277295" cy="411480"/>
+            <a:off x="457200" y="1170432"/>
+            <a:ext cx="11277295" cy="5230368"/>
           </a:xfrm>
           <a:prstGeom prst="rect">
             <a:avLst/>
@@ -6941,837 +6714,110 @@
           </a:bodyPr>
           <a:lstStyle/>
           <a:p>
-            <a:r>
-              <a:rPr sz="1400" b="0" i="0">
-                <a:solidFill>
-                  <a:srgbClr val="B8D8EE"/>
-                </a:solidFill>
-                <a:latin typeface="Calibri"/>
-              </a:rPr>
-              <a:t>Gratis · navegador o free tier</a:t>
-            </a:r>
-          </a:p>
-        </p:txBody>
-      </p:sp>
-      <p:sp>
-        <p:nvSpPr>
-          <p:cNvPr id="6" name="Rounded Rectangle 5"/>
-          <p:cNvSpPr/>
-          <p:nvPr/>
-        </p:nvSpPr>
-        <p:spPr>
-          <a:xfrm>
-            <a:off x="457200" y="1591056"/>
-            <a:ext cx="3624986" cy="2299716"/>
-          </a:xfrm>
-          <a:prstGeom prst="roundRect">
-            <a:avLst>
-              <a:gd name="adj" fmla="val 12000"/>
-            </a:avLst>
-          </a:prstGeom>
-          <a:solidFill>
-            <a:srgbClr val="F2F2F2"/>
-          </a:solidFill>
-          <a:ln>
-            <a:noFill/>
-          </a:ln>
-        </p:spPr>
-        <p:style>
-          <a:lnRef idx="1">
-            <a:schemeClr val="accent1"/>
-          </a:lnRef>
-          <a:fillRef idx="3">
-            <a:schemeClr val="accent1"/>
-          </a:fillRef>
-          <a:effectRef idx="2">
-            <a:schemeClr val="accent1"/>
-          </a:effectRef>
-          <a:fontRef idx="minor">
-            <a:schemeClr val="lt1"/>
-          </a:fontRef>
-        </p:style>
-        <p:txBody>
-          <a:bodyPr rtlCol="0" anchor="ctr"/>
-          <a:lstStyle/>
-          <a:p>
-            <a:pPr algn="ctr"/>
-          </a:p>
-        </p:txBody>
-      </p:sp>
-      <p:sp>
-        <p:nvSpPr>
-          <p:cNvPr id="7" name="Rectangle 6"/>
-          <p:cNvSpPr/>
-          <p:nvPr/>
-        </p:nvSpPr>
-        <p:spPr>
-          <a:xfrm>
-            <a:off x="457200" y="1591056"/>
-            <a:ext cx="3624986" cy="64008"/>
-          </a:xfrm>
-          <a:prstGeom prst="rect">
-            <a:avLst/>
-          </a:prstGeom>
-          <a:solidFill>
-            <a:srgbClr val="095292"/>
-          </a:solidFill>
-          <a:ln>
-            <a:noFill/>
-          </a:ln>
-        </p:spPr>
-        <p:style>
-          <a:lnRef idx="1">
-            <a:schemeClr val="accent1"/>
-          </a:lnRef>
-          <a:fillRef idx="3">
-            <a:schemeClr val="accent1"/>
-          </a:fillRef>
-          <a:effectRef idx="2">
-            <a:schemeClr val="accent1"/>
-          </a:effectRef>
-          <a:fontRef idx="minor">
-            <a:schemeClr val="lt1"/>
-          </a:fontRef>
-        </p:style>
-        <p:txBody>
-          <a:bodyPr rtlCol="0" anchor="ctr"/>
-          <a:lstStyle/>
-          <a:p>
-            <a:pPr algn="ctr"/>
-          </a:p>
-        </p:txBody>
-      </p:sp>
-      <p:sp>
-        <p:nvSpPr>
-          <p:cNvPr id="8" name="Rectangle 7"/>
-          <p:cNvSpPr/>
-          <p:nvPr/>
-        </p:nvSpPr>
-        <p:spPr>
-          <a:xfrm>
-            <a:off x="457200" y="1655064"/>
-            <a:ext cx="3624986" cy="27432"/>
-          </a:xfrm>
-          <a:prstGeom prst="rect">
-            <a:avLst/>
-          </a:prstGeom>
-          <a:solidFill>
-            <a:srgbClr val="FFD000"/>
-          </a:solidFill>
-          <a:ln>
-            <a:noFill/>
-          </a:ln>
-        </p:spPr>
-        <p:style>
-          <a:lnRef idx="1">
-            <a:schemeClr val="accent1"/>
-          </a:lnRef>
-          <a:fillRef idx="3">
-            <a:schemeClr val="accent1"/>
-          </a:fillRef>
-          <a:effectRef idx="2">
-            <a:schemeClr val="accent1"/>
-          </a:effectRef>
-          <a:fontRef idx="minor">
-            <a:schemeClr val="lt1"/>
-          </a:fontRef>
-        </p:style>
-        <p:txBody>
-          <a:bodyPr rtlCol="0" anchor="ctr"/>
-          <a:lstStyle/>
-          <a:p>
-            <a:pPr algn="ctr"/>
-          </a:p>
-        </p:txBody>
-      </p:sp>
-      <p:pic>
-        <p:nvPicPr>
-          <p:cNvPr id="9" name="Picture 8" descr="oracle_livesql.png"/>
-          <p:cNvPicPr>
-            <a:picLocks noChangeAspect="1"/>
-          </p:cNvPicPr>
-          <p:nvPr/>
-        </p:nvPicPr>
-        <p:blipFill>
-          <a:blip r:embed="rId2"/>
-          <a:stretch>
-            <a:fillRect/>
-          </a:stretch>
-        </p:blipFill>
-        <p:spPr>
-          <a:xfrm>
-            <a:off x="1659331" y="1847087"/>
-            <a:ext cx="1220724" cy="1220724"/>
-          </a:xfrm>
-          <a:prstGeom prst="rect">
-            <a:avLst/>
-          </a:prstGeom>
-        </p:spPr>
-      </p:pic>
-      <p:sp>
-        <p:nvSpPr>
-          <p:cNvPr id="10" name="TextBox 9"/>
-          <p:cNvSpPr txBox="1"/>
-          <p:nvPr/>
-        </p:nvSpPr>
-        <p:spPr>
-          <a:xfrm>
-            <a:off x="530352" y="3159251"/>
-            <a:ext cx="3478682" cy="621792"/>
-          </a:xfrm>
-          <a:prstGeom prst="rect">
-            <a:avLst/>
-          </a:prstGeom>
-          <a:noFill/>
-        </p:spPr>
-        <p:txBody>
-          <a:bodyPr wrap="square" anchor="t"/>
-          <a:lstStyle/>
-          <a:p>
-            <a:pPr algn="ctr"/>
-            <a:r>
-              <a:rPr sz="1300" b="1" i="0">
-                <a:solidFill>
-                  <a:srgbClr val="095292"/>
-                </a:solidFill>
-                <a:latin typeface="Calibri"/>
-              </a:rPr>
-              <a:t>Oracle Live SQL</a:t>
-            </a:r>
-          </a:p>
-          <a:p>
-            <a:pPr algn="ctr">
-              <a:spcBef>
-                <a:spcPts val="200"/>
-              </a:spcBef>
+            <a:pPr>
+              <a:spcAft>
+                <a:spcPts val="800"/>
+              </a:spcAft>
             </a:pPr>
             <a:r>
-              <a:rPr sz="1000" b="0" i="0">
-                <a:solidFill>
-                  <a:srgbClr val="666666"/>
-                </a:solidFill>
-                <a:latin typeface="Calibri"/>
-              </a:rPr>
-              <a:t>Demo procs</a:t>
-            </a:r>
-          </a:p>
-        </p:txBody>
-      </p:sp>
-      <p:sp>
-        <p:nvSpPr>
-          <p:cNvPr id="11" name="Rounded Rectangle 10"/>
-          <p:cNvSpPr/>
-          <p:nvPr/>
-        </p:nvSpPr>
-        <p:spPr>
-          <a:xfrm>
-            <a:off x="4283354" y="1591056"/>
-            <a:ext cx="3624986" cy="2299716"/>
-          </a:xfrm>
-          <a:prstGeom prst="roundRect">
-            <a:avLst>
-              <a:gd name="adj" fmla="val 12000"/>
-            </a:avLst>
-          </a:prstGeom>
-          <a:solidFill>
-            <a:srgbClr val="F2F2F2"/>
-          </a:solidFill>
-          <a:ln>
-            <a:noFill/>
-          </a:ln>
-        </p:spPr>
-        <p:style>
-          <a:lnRef idx="1">
-            <a:schemeClr val="accent1"/>
-          </a:lnRef>
-          <a:fillRef idx="3">
-            <a:schemeClr val="accent1"/>
-          </a:fillRef>
-          <a:effectRef idx="2">
-            <a:schemeClr val="accent1"/>
-          </a:effectRef>
-          <a:fontRef idx="minor">
-            <a:schemeClr val="lt1"/>
-          </a:fontRef>
-        </p:style>
-        <p:txBody>
-          <a:bodyPr rtlCol="0" anchor="ctr"/>
-          <a:lstStyle/>
-          <a:p>
-            <a:pPr algn="ctr"/>
-          </a:p>
-        </p:txBody>
-      </p:sp>
-      <p:sp>
-        <p:nvSpPr>
-          <p:cNvPr id="12" name="Rectangle 11"/>
-          <p:cNvSpPr/>
-          <p:nvPr/>
-        </p:nvSpPr>
-        <p:spPr>
-          <a:xfrm>
-            <a:off x="4283354" y="1591056"/>
-            <a:ext cx="3624986" cy="64008"/>
-          </a:xfrm>
-          <a:prstGeom prst="rect">
-            <a:avLst/>
-          </a:prstGeom>
-          <a:solidFill>
-            <a:srgbClr val="095292"/>
-          </a:solidFill>
-          <a:ln>
-            <a:noFill/>
-          </a:ln>
-        </p:spPr>
-        <p:style>
-          <a:lnRef idx="1">
-            <a:schemeClr val="accent1"/>
-          </a:lnRef>
-          <a:fillRef idx="3">
-            <a:schemeClr val="accent1"/>
-          </a:fillRef>
-          <a:effectRef idx="2">
-            <a:schemeClr val="accent1"/>
-          </a:effectRef>
-          <a:fontRef idx="minor">
-            <a:schemeClr val="lt1"/>
-          </a:fontRef>
-        </p:style>
-        <p:txBody>
-          <a:bodyPr rtlCol="0" anchor="ctr"/>
-          <a:lstStyle/>
-          <a:p>
-            <a:pPr algn="ctr"/>
-          </a:p>
-        </p:txBody>
-      </p:sp>
-      <p:sp>
-        <p:nvSpPr>
-          <p:cNvPr id="13" name="Rectangle 12"/>
-          <p:cNvSpPr/>
-          <p:nvPr/>
-        </p:nvSpPr>
-        <p:spPr>
-          <a:xfrm>
-            <a:off x="4283354" y="1655064"/>
-            <a:ext cx="3624986" cy="27432"/>
-          </a:xfrm>
-          <a:prstGeom prst="rect">
-            <a:avLst/>
-          </a:prstGeom>
-          <a:solidFill>
-            <a:srgbClr val="FFD000"/>
-          </a:solidFill>
-          <a:ln>
-            <a:noFill/>
-          </a:ln>
-        </p:spPr>
-        <p:style>
-          <a:lnRef idx="1">
-            <a:schemeClr val="accent1"/>
-          </a:lnRef>
-          <a:fillRef idx="3">
-            <a:schemeClr val="accent1"/>
-          </a:fillRef>
-          <a:effectRef idx="2">
-            <a:schemeClr val="accent1"/>
-          </a:effectRef>
-          <a:fontRef idx="minor">
-            <a:schemeClr val="lt1"/>
-          </a:fontRef>
-        </p:style>
-        <p:txBody>
-          <a:bodyPr rtlCol="0" anchor="ctr"/>
-          <a:lstStyle/>
-          <a:p>
-            <a:pPr algn="ctr"/>
-          </a:p>
-        </p:txBody>
-      </p:sp>
-      <p:pic>
-        <p:nvPicPr>
-          <p:cNvPr id="14" name="Picture 13" descr="drawio.png"/>
-          <p:cNvPicPr>
-            <a:picLocks noChangeAspect="1"/>
-          </p:cNvPicPr>
-          <p:nvPr/>
-        </p:nvPicPr>
-        <p:blipFill>
-          <a:blip r:embed="rId3"/>
-          <a:stretch>
-            <a:fillRect/>
-          </a:stretch>
-        </p:blipFill>
-        <p:spPr>
-          <a:xfrm>
-            <a:off x="5485485" y="1847087"/>
-            <a:ext cx="1220724" cy="1220724"/>
-          </a:xfrm>
-          <a:prstGeom prst="rect">
-            <a:avLst/>
-          </a:prstGeom>
-        </p:spPr>
-      </p:pic>
-      <p:sp>
-        <p:nvSpPr>
-          <p:cNvPr id="15" name="TextBox 14"/>
-          <p:cNvSpPr txBox="1"/>
-          <p:nvPr/>
-        </p:nvSpPr>
-        <p:spPr>
-          <a:xfrm>
-            <a:off x="4356506" y="3159251"/>
-            <a:ext cx="3478682" cy="621792"/>
-          </a:xfrm>
-          <a:prstGeom prst="rect">
-            <a:avLst/>
-          </a:prstGeom>
-          <a:noFill/>
-        </p:spPr>
-        <p:txBody>
-          <a:bodyPr wrap="square" anchor="t"/>
-          <a:lstStyle/>
-          <a:p>
-            <a:pPr algn="ctr"/>
-            <a:r>
-              <a:rPr sz="1300" b="1" i="0">
-                <a:solidFill>
-                  <a:srgbClr val="095292"/>
-                </a:solidFill>
-                <a:latin typeface="Calibri"/>
-              </a:rPr>
-              <a:t>draw.io</a:t>
-            </a:r>
-          </a:p>
-          <a:p>
-            <a:pPr algn="ctr">
-              <a:spcBef>
-                <a:spcPts val="200"/>
-              </a:spcBef>
+              <a:rPr sz="2000" b="0" i="0">
+                <a:solidFill>
+                  <a:srgbClr val="333333"/>
+                </a:solidFill>
+                <a:latin typeface="Calibri"/>
+              </a:rPr>
+              <a:t>–   </a:t>
+            </a:r>
+            <a:r>
+              <a:rPr sz="2000" b="1" i="0">
+                <a:solidFill>
+                  <a:srgbClr val="333333"/>
+                </a:solidFill>
+                <a:latin typeface="Calibri"/>
+              </a:rPr>
+              <a:t>Herramienta:</a:t>
+            </a:r>
+            <a:r>
+              <a:rPr sz="2000" b="0" i="0">
+                <a:solidFill>
+                  <a:srgbClr val="333333"/>
+                </a:solidFill>
+                <a:latin typeface="Calibri"/>
+              </a:rPr>
+              <a:t> Live SQL / DB Fiddle + draw.io + la plataforma del curso</a:t>
+            </a:r>
+          </a:p>
+          <a:p>
+            <a:pPr>
+              <a:spcAft>
+                <a:spcPts val="800"/>
+              </a:spcAft>
             </a:pPr>
             <a:r>
-              <a:rPr sz="1000" b="0" i="0">
-                <a:solidFill>
-                  <a:srgbClr val="666666"/>
-                </a:solidFill>
-                <a:latin typeface="Calibri"/>
-              </a:rPr>
-              <a:t>ER</a:t>
-            </a:r>
-          </a:p>
-        </p:txBody>
-      </p:sp>
-      <p:sp>
-        <p:nvSpPr>
-          <p:cNvPr id="16" name="Rounded Rectangle 15"/>
-          <p:cNvSpPr/>
-          <p:nvPr/>
-        </p:nvSpPr>
-        <p:spPr>
-          <a:xfrm>
-            <a:off x="8109508" y="1591056"/>
-            <a:ext cx="3624986" cy="2299716"/>
-          </a:xfrm>
-          <a:prstGeom prst="roundRect">
-            <a:avLst>
-              <a:gd name="adj" fmla="val 12000"/>
-            </a:avLst>
-          </a:prstGeom>
-          <a:solidFill>
-            <a:srgbClr val="F2F2F2"/>
-          </a:solidFill>
-          <a:ln>
-            <a:noFill/>
-          </a:ln>
-        </p:spPr>
-        <p:style>
-          <a:lnRef idx="1">
-            <a:schemeClr val="accent1"/>
-          </a:lnRef>
-          <a:fillRef idx="3">
-            <a:schemeClr val="accent1"/>
-          </a:fillRef>
-          <a:effectRef idx="2">
-            <a:schemeClr val="accent1"/>
-          </a:effectRef>
-          <a:fontRef idx="minor">
-            <a:schemeClr val="lt1"/>
-          </a:fontRef>
-        </p:style>
-        <p:txBody>
-          <a:bodyPr rtlCol="0" anchor="ctr"/>
-          <a:lstStyle/>
-          <a:p>
-            <a:pPr algn="ctr"/>
-          </a:p>
-        </p:txBody>
-      </p:sp>
-      <p:sp>
-        <p:nvSpPr>
-          <p:cNvPr id="17" name="Rectangle 16"/>
-          <p:cNvSpPr/>
-          <p:nvPr/>
-        </p:nvSpPr>
-        <p:spPr>
-          <a:xfrm>
-            <a:off x="8109508" y="1591056"/>
-            <a:ext cx="3624986" cy="64008"/>
-          </a:xfrm>
-          <a:prstGeom prst="rect">
-            <a:avLst/>
-          </a:prstGeom>
-          <a:solidFill>
-            <a:srgbClr val="095292"/>
-          </a:solidFill>
-          <a:ln>
-            <a:noFill/>
-          </a:ln>
-        </p:spPr>
-        <p:style>
-          <a:lnRef idx="1">
-            <a:schemeClr val="accent1"/>
-          </a:lnRef>
-          <a:fillRef idx="3">
-            <a:schemeClr val="accent1"/>
-          </a:fillRef>
-          <a:effectRef idx="2">
-            <a:schemeClr val="accent1"/>
-          </a:effectRef>
-          <a:fontRef idx="minor">
-            <a:schemeClr val="lt1"/>
-          </a:fontRef>
-        </p:style>
-        <p:txBody>
-          <a:bodyPr rtlCol="0" anchor="ctr"/>
-          <a:lstStyle/>
-          <a:p>
-            <a:pPr algn="ctr"/>
-          </a:p>
-        </p:txBody>
-      </p:sp>
-      <p:sp>
-        <p:nvSpPr>
-          <p:cNvPr id="18" name="Rectangle 17"/>
-          <p:cNvSpPr/>
-          <p:nvPr/>
-        </p:nvSpPr>
-        <p:spPr>
-          <a:xfrm>
-            <a:off x="8109508" y="1655064"/>
-            <a:ext cx="3624986" cy="27432"/>
-          </a:xfrm>
-          <a:prstGeom prst="rect">
-            <a:avLst/>
-          </a:prstGeom>
-          <a:solidFill>
-            <a:srgbClr val="FFD000"/>
-          </a:solidFill>
-          <a:ln>
-            <a:noFill/>
-          </a:ln>
-        </p:spPr>
-        <p:style>
-          <a:lnRef idx="1">
-            <a:schemeClr val="accent1"/>
-          </a:lnRef>
-          <a:fillRef idx="3">
-            <a:schemeClr val="accent1"/>
-          </a:fillRef>
-          <a:effectRef idx="2">
-            <a:schemeClr val="accent1"/>
-          </a:effectRef>
-          <a:fontRef idx="minor">
-            <a:schemeClr val="lt1"/>
-          </a:fontRef>
-        </p:style>
-        <p:txBody>
-          <a:bodyPr rtlCol="0" anchor="ctr"/>
-          <a:lstStyle/>
-          <a:p>
-            <a:pPr algn="ctr"/>
-          </a:p>
-        </p:txBody>
-      </p:sp>
-      <p:pic>
-        <p:nvPicPr>
-          <p:cNvPr id="19" name="Picture 18" descr="dbfiddle.png"/>
-          <p:cNvPicPr>
-            <a:picLocks noChangeAspect="1"/>
-          </p:cNvPicPr>
-          <p:nvPr/>
-        </p:nvPicPr>
-        <p:blipFill>
-          <a:blip r:embed="rId4"/>
-          <a:stretch>
-            <a:fillRect/>
-          </a:stretch>
-        </p:blipFill>
-        <p:spPr>
-          <a:xfrm>
-            <a:off x="9311640" y="1847087"/>
-            <a:ext cx="1220724" cy="1220724"/>
-          </a:xfrm>
-          <a:prstGeom prst="rect">
-            <a:avLst/>
-          </a:prstGeom>
-        </p:spPr>
-      </p:pic>
-      <p:sp>
-        <p:nvSpPr>
-          <p:cNvPr id="20" name="TextBox 19"/>
-          <p:cNvSpPr txBox="1"/>
-          <p:nvPr/>
-        </p:nvSpPr>
-        <p:spPr>
-          <a:xfrm>
-            <a:off x="8182660" y="3159251"/>
-            <a:ext cx="3478682" cy="621792"/>
-          </a:xfrm>
-          <a:prstGeom prst="rect">
-            <a:avLst/>
-          </a:prstGeom>
-          <a:noFill/>
-        </p:spPr>
-        <p:txBody>
-          <a:bodyPr wrap="square" anchor="t"/>
-          <a:lstStyle/>
-          <a:p>
-            <a:pPr algn="ctr"/>
-            <a:r>
-              <a:rPr sz="1300" b="1" i="0">
-                <a:solidFill>
-                  <a:srgbClr val="095292"/>
-                </a:solidFill>
-                <a:latin typeface="Calibri"/>
-              </a:rPr>
-              <a:t>DB Fiddle</a:t>
-            </a:r>
-          </a:p>
-          <a:p>
-            <a:pPr algn="ctr">
-              <a:spcBef>
-                <a:spcPts val="200"/>
-              </a:spcBef>
+              <a:rPr sz="2000" b="0" i="0">
+                <a:solidFill>
+                  <a:srgbClr val="333333"/>
+                </a:solidFill>
+                <a:latin typeface="Calibri"/>
+              </a:rPr>
+              <a:t>–   </a:t>
+            </a:r>
+            <a:r>
+              <a:rPr sz="2000" b="1" i="0">
+                <a:solidFill>
+                  <a:srgbClr val="333333"/>
+                </a:solidFill>
+                <a:latin typeface="Calibri"/>
+              </a:rPr>
+              <a:t>Demo:</a:t>
+            </a:r>
+            <a:r>
+              <a:rPr sz="2000" b="0" i="0">
+                <a:solidFill>
+                  <a:srgbClr val="333333"/>
+                </a:solidFill>
+                <a:latin typeface="Calibri"/>
+              </a:rPr>
+              <a:t> Recorrido de checklist + ejemplo demo de 3 min.</a:t>
+            </a:r>
+          </a:p>
+          <a:p>
+            <a:pPr>
+              <a:spcAft>
+                <a:spcPts val="800"/>
+              </a:spcAft>
             </a:pPr>
             <a:r>
-              <a:rPr sz="1000" b="0" i="0">
-                <a:solidFill>
-                  <a:srgbClr val="666666"/>
-                </a:solidFill>
-                <a:latin typeface="Calibri"/>
-              </a:rPr>
-              <a:t>DDL</a:t>
-            </a:r>
-          </a:p>
-        </p:txBody>
-      </p:sp>
-      <p:sp>
-        <p:nvSpPr>
-          <p:cNvPr id="21" name="Rounded Rectangle 20"/>
-          <p:cNvSpPr/>
-          <p:nvPr/>
-        </p:nvSpPr>
-        <p:spPr>
-          <a:xfrm>
-            <a:off x="4283354" y="4055364"/>
-            <a:ext cx="3624986" cy="2299716"/>
-          </a:xfrm>
-          <a:prstGeom prst="roundRect">
-            <a:avLst>
-              <a:gd name="adj" fmla="val 12000"/>
-            </a:avLst>
-          </a:prstGeom>
-          <a:solidFill>
-            <a:srgbClr val="F2F2F2"/>
-          </a:solidFill>
-          <a:ln>
-            <a:noFill/>
-          </a:ln>
-        </p:spPr>
-        <p:style>
-          <a:lnRef idx="1">
-            <a:schemeClr val="accent1"/>
-          </a:lnRef>
-          <a:fillRef idx="3">
-            <a:schemeClr val="accent1"/>
-          </a:fillRef>
-          <a:effectRef idx="2">
-            <a:schemeClr val="accent1"/>
-          </a:effectRef>
-          <a:fontRef idx="minor">
-            <a:schemeClr val="lt1"/>
-          </a:fontRef>
-        </p:style>
-        <p:txBody>
-          <a:bodyPr rtlCol="0" anchor="ctr"/>
-          <a:lstStyle/>
-          <a:p>
-            <a:pPr algn="ctr"/>
-          </a:p>
-        </p:txBody>
-      </p:sp>
-      <p:sp>
-        <p:nvSpPr>
-          <p:cNvPr id="22" name="Rectangle 21"/>
-          <p:cNvSpPr/>
-          <p:nvPr/>
-        </p:nvSpPr>
-        <p:spPr>
-          <a:xfrm>
-            <a:off x="4283354" y="4055364"/>
-            <a:ext cx="3624986" cy="64008"/>
-          </a:xfrm>
-          <a:prstGeom prst="rect">
-            <a:avLst/>
-          </a:prstGeom>
-          <a:solidFill>
-            <a:srgbClr val="095292"/>
-          </a:solidFill>
-          <a:ln>
-            <a:noFill/>
-          </a:ln>
-        </p:spPr>
-        <p:style>
-          <a:lnRef idx="1">
-            <a:schemeClr val="accent1"/>
-          </a:lnRef>
-          <a:fillRef idx="3">
-            <a:schemeClr val="accent1"/>
-          </a:fillRef>
-          <a:effectRef idx="2">
-            <a:schemeClr val="accent1"/>
-          </a:effectRef>
-          <a:fontRef idx="minor">
-            <a:schemeClr val="lt1"/>
-          </a:fontRef>
-        </p:style>
-        <p:txBody>
-          <a:bodyPr rtlCol="0" anchor="ctr"/>
-          <a:lstStyle/>
-          <a:p>
-            <a:pPr algn="ctr"/>
-          </a:p>
-        </p:txBody>
-      </p:sp>
-      <p:sp>
-        <p:nvSpPr>
-          <p:cNvPr id="23" name="Rectangle 22"/>
-          <p:cNvSpPr/>
-          <p:nvPr/>
-        </p:nvSpPr>
-        <p:spPr>
-          <a:xfrm>
-            <a:off x="4283354" y="4119372"/>
-            <a:ext cx="3624986" cy="27432"/>
-          </a:xfrm>
-          <a:prstGeom prst="rect">
-            <a:avLst/>
-          </a:prstGeom>
-          <a:solidFill>
-            <a:srgbClr val="FFD000"/>
-          </a:solidFill>
-          <a:ln>
-            <a:noFill/>
-          </a:ln>
-        </p:spPr>
-        <p:style>
-          <a:lnRef idx="1">
-            <a:schemeClr val="accent1"/>
-          </a:lnRef>
-          <a:fillRef idx="3">
-            <a:schemeClr val="accent1"/>
-          </a:fillRef>
-          <a:effectRef idx="2">
-            <a:schemeClr val="accent1"/>
-          </a:effectRef>
-          <a:fontRef idx="minor">
-            <a:schemeClr val="lt1"/>
-          </a:fontRef>
-        </p:style>
-        <p:txBody>
-          <a:bodyPr rtlCol="0" anchor="ctr"/>
-          <a:lstStyle/>
-          <a:p>
-            <a:pPr algn="ctr"/>
-          </a:p>
-        </p:txBody>
-      </p:sp>
-      <p:pic>
-        <p:nvPicPr>
-          <p:cNvPr id="24" name="Picture 23" descr="google_docs.png"/>
-          <p:cNvPicPr>
-            <a:picLocks noChangeAspect="1"/>
-          </p:cNvPicPr>
-          <p:nvPr/>
-        </p:nvPicPr>
-        <p:blipFill>
-          <a:blip r:embed="rId5"/>
-          <a:stretch>
-            <a:fillRect/>
-          </a:stretch>
-        </p:blipFill>
-        <p:spPr>
-          <a:xfrm>
-            <a:off x="5485485" y="4311396"/>
-            <a:ext cx="1220724" cy="1220724"/>
-          </a:xfrm>
-          <a:prstGeom prst="rect">
-            <a:avLst/>
-          </a:prstGeom>
-        </p:spPr>
-      </p:pic>
-      <p:sp>
-        <p:nvSpPr>
-          <p:cNvPr id="25" name="TextBox 24"/>
-          <p:cNvSpPr txBox="1"/>
-          <p:nvPr/>
-        </p:nvSpPr>
-        <p:spPr>
-          <a:xfrm>
-            <a:off x="4356506" y="5623560"/>
-            <a:ext cx="3478682" cy="621792"/>
-          </a:xfrm>
-          <a:prstGeom prst="rect">
-            <a:avLst/>
-          </a:prstGeom>
-          <a:noFill/>
-        </p:spPr>
-        <p:txBody>
-          <a:bodyPr wrap="square" anchor="t"/>
-          <a:lstStyle/>
-          <a:p>
-            <a:pPr algn="ctr"/>
-            <a:r>
-              <a:rPr sz="1300" b="1" i="0">
-                <a:solidFill>
-                  <a:srgbClr val="095292"/>
-                </a:solidFill>
-                <a:latin typeface="Calibri"/>
-              </a:rPr>
-              <a:t>Google Docs</a:t>
-            </a:r>
-          </a:p>
-          <a:p>
-            <a:pPr algn="ctr">
-              <a:spcBef>
-                <a:spcPts val="200"/>
-              </a:spcBef>
+              <a:rPr sz="2000" b="0" i="0">
+                <a:solidFill>
+                  <a:srgbClr val="333333"/>
+                </a:solidFill>
+                <a:latin typeface="Calibri"/>
+              </a:rPr>
+              <a:t>–   Sigan el mismo dominio VetCare (no inventen otro caso).</a:t>
+            </a:r>
+          </a:p>
+          <a:p>
+            <a:pPr>
+              <a:spcAft>
+                <a:spcPts val="800"/>
+              </a:spcAft>
             </a:pPr>
             <a:r>
-              <a:rPr sz="1000" b="0" i="0">
-                <a:solidFill>
-                  <a:srgbClr val="666666"/>
-                </a:solidFill>
-                <a:latin typeface="Calibri"/>
-              </a:rPr>
-              <a:t>Checklist</a:t>
-            </a:r>
-          </a:p>
-        </p:txBody>
-      </p:sp>
-      <p:sp>
-        <p:nvSpPr>
-          <p:cNvPr id="26" name="TextBox 25"/>
+              <a:rPr sz="2000" b="0" i="0">
+                <a:solidFill>
+                  <a:srgbClr val="333333"/>
+                </a:solidFill>
+                <a:latin typeface="Calibri"/>
+              </a:rPr>
+              <a:t>–   Al final de la demo: dejar enlace/script compartible al grupo.</a:t>
+            </a:r>
+          </a:p>
+        </p:txBody>
+      </p:sp>
+      <p:sp>
+        <p:nvSpPr>
+          <p:cNvPr id="6" name="TextBox 5"/>
           <p:cNvSpPr txBox="1"/>
           <p:nvPr/>
         </p:nvSpPr>
@@ -7945,7 +6991,7 @@
                 </a:solidFill>
                 <a:latin typeface="Calibri"/>
               </a:rPr>
-              <a:t>Del boceto a la plataforma del curso (diagrama)</a:t>
+              <a:t>Herramientas de hoy</a:t>
             </a:r>
           </a:p>
         </p:txBody>
@@ -7979,7 +7025,7 @@
                 </a:solidFill>
                 <a:latin typeface="Calibri"/>
               </a:rPr>
-              <a:t>El diagrama se entrega como codigo Mermaid dentro de la plataforma del curso, no como imagen</a:t>
+              <a:t>Gratis · navegador o free tier</a:t>
             </a:r>
           </a:p>
         </p:txBody>
@@ -7992,8 +7038,8 @@
         </p:nvSpPr>
         <p:spPr>
           <a:xfrm>
-            <a:off x="457200" y="1659636"/>
-            <a:ext cx="11277295" cy="1051560"/>
+            <a:off x="457200" y="1591056"/>
+            <a:ext cx="3624986" cy="2299716"/>
           </a:xfrm>
           <a:prstGeom prst="roundRect">
             <a:avLst>
@@ -8031,19 +7077,17 @@
       </p:sp>
       <p:sp>
         <p:nvSpPr>
-          <p:cNvPr id="7" name="Rounded Rectangle 6"/>
+          <p:cNvPr id="7" name="Rectangle 6"/>
           <p:cNvSpPr/>
           <p:nvPr/>
         </p:nvSpPr>
         <p:spPr>
           <a:xfrm>
-            <a:off x="594360" y="1965960"/>
-            <a:ext cx="438912" cy="438912"/>
-          </a:xfrm>
-          <a:prstGeom prst="roundRect">
-            <a:avLst>
-              <a:gd name="adj" fmla="val 12000"/>
-            </a:avLst>
+            <a:off x="457200" y="1591056"/>
+            <a:ext cx="3624986" cy="64008"/>
+          </a:xfrm>
+          <a:prstGeom prst="rect">
+            <a:avLst/>
           </a:prstGeom>
           <a:solidFill>
             <a:srgbClr val="095292"/>
@@ -8076,103 +7120,20 @@
       </p:sp>
       <p:sp>
         <p:nvSpPr>
-          <p:cNvPr id="8" name="TextBox 7"/>
-          <p:cNvSpPr txBox="1"/>
-          <p:nvPr/>
-        </p:nvSpPr>
-        <p:spPr>
-          <a:xfrm>
-            <a:off x="594360" y="1965960"/>
-            <a:ext cx="438912" cy="438912"/>
-          </a:xfrm>
-          <a:prstGeom prst="rect">
-            <a:avLst/>
-          </a:prstGeom>
-          <a:noFill/>
-        </p:spPr>
-        <p:txBody>
-          <a:bodyPr wrap="square" anchor="ctr"/>
-          <a:lstStyle/>
-          <a:p>
-            <a:pPr algn="ctr"/>
-            <a:r>
-              <a:rPr sz="1600" b="1" i="0">
-                <a:solidFill>
-                  <a:srgbClr val="FFFFFF"/>
-                </a:solidFill>
-                <a:latin typeface="Calibri"/>
-              </a:rPr>
-              <a:t>1</a:t>
-            </a:r>
-          </a:p>
-        </p:txBody>
-      </p:sp>
-      <p:sp>
-        <p:nvSpPr>
-          <p:cNvPr id="9" name="TextBox 8"/>
-          <p:cNvSpPr txBox="1"/>
-          <p:nvPr/>
-        </p:nvSpPr>
-        <p:spPr>
-          <a:xfrm>
-            <a:off x="1188720" y="1751076"/>
-            <a:ext cx="10271455" cy="886968"/>
-          </a:xfrm>
-          <a:prstGeom prst="rect">
-            <a:avLst/>
-          </a:prstGeom>
-          <a:noFill/>
-        </p:spPr>
-        <p:txBody>
-          <a:bodyPr wrap="square" anchor="ctr"/>
-          <a:lstStyle/>
-          <a:p>
-            <a:r>
-              <a:rPr sz="1500" b="1" i="0">
-                <a:solidFill>
-                  <a:srgbClr val="095292"/>
-                </a:solidFill>
-                <a:latin typeface="Calibri"/>
-              </a:rPr>
-              <a:t>Disena visual</a:t>
-            </a:r>
-          </a:p>
-          <a:p>
-            <a:pPr>
-              <a:spcBef>
-                <a:spcPts val="200"/>
-              </a:spcBef>
-            </a:pPr>
-            <a:r>
-              <a:rPr sz="1300" b="0" i="0">
-                <a:solidFill>
-                  <a:srgbClr val="333333"/>
-                </a:solidFill>
-                <a:latin typeface="Calibri"/>
-              </a:rPr>
-              <a:t>Dibuja el diagrama como quieras en Excalidraw o draw.io: es mas rapido arrastrar cajas que escribir codigo, y ahi es donde piensas el modelo.</a:t>
-            </a:r>
-          </a:p>
-        </p:txBody>
-      </p:sp>
-      <p:sp>
-        <p:nvSpPr>
-          <p:cNvPr id="10" name="Rounded Rectangle 9"/>
+          <p:cNvPr id="8" name="Rectangle 7"/>
           <p:cNvSpPr/>
           <p:nvPr/>
         </p:nvSpPr>
         <p:spPr>
           <a:xfrm>
-            <a:off x="457200" y="2802636"/>
-            <a:ext cx="11277295" cy="1051560"/>
-          </a:xfrm>
-          <a:prstGeom prst="roundRect">
-            <a:avLst>
-              <a:gd name="adj" fmla="val 12000"/>
-            </a:avLst>
+            <a:off x="457200" y="1655064"/>
+            <a:ext cx="3624986" cy="27432"/>
+          </a:xfrm>
+          <a:prstGeom prst="rect">
+            <a:avLst/>
           </a:prstGeom>
           <a:solidFill>
-            <a:srgbClr val="E8F4FA"/>
+            <a:srgbClr val="FFD000"/>
           </a:solidFill>
           <a:ln>
             <a:noFill/>
@@ -8200,6 +7161,79 @@
           </a:p>
         </p:txBody>
       </p:sp>
+      <p:pic>
+        <p:nvPicPr>
+          <p:cNvPr id="9" name="Picture 8" descr="oracle_livesql.png"/>
+          <p:cNvPicPr>
+            <a:picLocks noChangeAspect="1"/>
+          </p:cNvPicPr>
+          <p:nvPr/>
+        </p:nvPicPr>
+        <p:blipFill>
+          <a:blip r:embed="rId2"/>
+          <a:stretch>
+            <a:fillRect/>
+          </a:stretch>
+        </p:blipFill>
+        <p:spPr>
+          <a:xfrm>
+            <a:off x="1659331" y="1847087"/>
+            <a:ext cx="1220724" cy="1220724"/>
+          </a:xfrm>
+          <a:prstGeom prst="rect">
+            <a:avLst/>
+          </a:prstGeom>
+        </p:spPr>
+      </p:pic>
+      <p:sp>
+        <p:nvSpPr>
+          <p:cNvPr id="10" name="TextBox 9"/>
+          <p:cNvSpPr txBox="1"/>
+          <p:nvPr/>
+        </p:nvSpPr>
+        <p:spPr>
+          <a:xfrm>
+            <a:off x="530352" y="3159251"/>
+            <a:ext cx="3478682" cy="621792"/>
+          </a:xfrm>
+          <a:prstGeom prst="rect">
+            <a:avLst/>
+          </a:prstGeom>
+          <a:noFill/>
+        </p:spPr>
+        <p:txBody>
+          <a:bodyPr wrap="square" anchor="t"/>
+          <a:lstStyle/>
+          <a:p>
+            <a:pPr algn="ctr"/>
+            <a:r>
+              <a:rPr sz="1300" b="1" i="0">
+                <a:solidFill>
+                  <a:srgbClr val="095292"/>
+                </a:solidFill>
+                <a:latin typeface="Calibri"/>
+              </a:rPr>
+              <a:t>Oracle Live SQL</a:t>
+            </a:r>
+          </a:p>
+          <a:p>
+            <a:pPr algn="ctr">
+              <a:spcBef>
+                <a:spcPts val="200"/>
+              </a:spcBef>
+            </a:pPr>
+            <a:r>
+              <a:rPr sz="1000" b="0" i="0">
+                <a:solidFill>
+                  <a:srgbClr val="666666"/>
+                </a:solidFill>
+                <a:latin typeface="Calibri"/>
+              </a:rPr>
+              <a:t>Demo procs</a:t>
+            </a:r>
+          </a:p>
+        </p:txBody>
+      </p:sp>
       <p:sp>
         <p:nvSpPr>
           <p:cNvPr id="11" name="Rounded Rectangle 10"/>
@@ -8208,13 +7242,56 @@
         </p:nvSpPr>
         <p:spPr>
           <a:xfrm>
-            <a:off x="594360" y="3108960"/>
-            <a:ext cx="438912" cy="438912"/>
+            <a:off x="4283354" y="1591056"/>
+            <a:ext cx="3624986" cy="2299716"/>
           </a:xfrm>
           <a:prstGeom prst="roundRect">
             <a:avLst>
               <a:gd name="adj" fmla="val 12000"/>
             </a:avLst>
+          </a:prstGeom>
+          <a:solidFill>
+            <a:srgbClr val="F2F2F2"/>
+          </a:solidFill>
+          <a:ln>
+            <a:noFill/>
+          </a:ln>
+        </p:spPr>
+        <p:style>
+          <a:lnRef idx="1">
+            <a:schemeClr val="accent1"/>
+          </a:lnRef>
+          <a:fillRef idx="3">
+            <a:schemeClr val="accent1"/>
+          </a:fillRef>
+          <a:effectRef idx="2">
+            <a:schemeClr val="accent1"/>
+          </a:effectRef>
+          <a:fontRef idx="minor">
+            <a:schemeClr val="lt1"/>
+          </a:fontRef>
+        </p:style>
+        <p:txBody>
+          <a:bodyPr rtlCol="0" anchor="ctr"/>
+          <a:lstStyle/>
+          <a:p>
+            <a:pPr algn="ctr"/>
+          </a:p>
+        </p:txBody>
+      </p:sp>
+      <p:sp>
+        <p:nvSpPr>
+          <p:cNvPr id="12" name="Rectangle 11"/>
+          <p:cNvSpPr/>
+          <p:nvPr/>
+        </p:nvSpPr>
+        <p:spPr>
+          <a:xfrm>
+            <a:off x="4283354" y="1591056"/>
+            <a:ext cx="3624986" cy="64008"/>
+          </a:xfrm>
+          <a:prstGeom prst="rect">
+            <a:avLst/>
           </a:prstGeom>
           <a:solidFill>
             <a:srgbClr val="095292"/>
@@ -8247,14 +7324,81 @@
       </p:sp>
       <p:sp>
         <p:nvSpPr>
-          <p:cNvPr id="12" name="TextBox 11"/>
+          <p:cNvPr id="13" name="Rectangle 12"/>
+          <p:cNvSpPr/>
+          <p:nvPr/>
+        </p:nvSpPr>
+        <p:spPr>
+          <a:xfrm>
+            <a:off x="4283354" y="1655064"/>
+            <a:ext cx="3624986" cy="27432"/>
+          </a:xfrm>
+          <a:prstGeom prst="rect">
+            <a:avLst/>
+          </a:prstGeom>
+          <a:solidFill>
+            <a:srgbClr val="FFD000"/>
+          </a:solidFill>
+          <a:ln>
+            <a:noFill/>
+          </a:ln>
+        </p:spPr>
+        <p:style>
+          <a:lnRef idx="1">
+            <a:schemeClr val="accent1"/>
+          </a:lnRef>
+          <a:fillRef idx="3">
+            <a:schemeClr val="accent1"/>
+          </a:fillRef>
+          <a:effectRef idx="2">
+            <a:schemeClr val="accent1"/>
+          </a:effectRef>
+          <a:fontRef idx="minor">
+            <a:schemeClr val="lt1"/>
+          </a:fontRef>
+        </p:style>
+        <p:txBody>
+          <a:bodyPr rtlCol="0" anchor="ctr"/>
+          <a:lstStyle/>
+          <a:p>
+            <a:pPr algn="ctr"/>
+          </a:p>
+        </p:txBody>
+      </p:sp>
+      <p:pic>
+        <p:nvPicPr>
+          <p:cNvPr id="14" name="Picture 13" descr="drawio.png"/>
+          <p:cNvPicPr>
+            <a:picLocks noChangeAspect="1"/>
+          </p:cNvPicPr>
+          <p:nvPr/>
+        </p:nvPicPr>
+        <p:blipFill>
+          <a:blip r:embed="rId3"/>
+          <a:stretch>
+            <a:fillRect/>
+          </a:stretch>
+        </p:blipFill>
+        <p:spPr>
+          <a:xfrm>
+            <a:off x="5485485" y="1847087"/>
+            <a:ext cx="1220724" cy="1220724"/>
+          </a:xfrm>
+          <a:prstGeom prst="rect">
+            <a:avLst/>
+          </a:prstGeom>
+        </p:spPr>
+      </p:pic>
+      <p:sp>
+        <p:nvSpPr>
+          <p:cNvPr id="15" name="TextBox 14"/>
           <p:cNvSpPr txBox="1"/>
           <p:nvPr/>
         </p:nvSpPr>
         <p:spPr>
           <a:xfrm>
-            <a:off x="594360" y="3108960"/>
-            <a:ext cx="438912" cy="438912"/>
+            <a:off x="4356506" y="3159251"/>
+            <a:ext cx="3478682" cy="621792"/>
           </a:xfrm>
           <a:prstGeom prst="rect">
             <a:avLst/>
@@ -8262,80 +7406,48 @@
           <a:noFill/>
         </p:spPr>
         <p:txBody>
-          <a:bodyPr wrap="square" anchor="ctr"/>
+          <a:bodyPr wrap="square" anchor="t"/>
           <a:lstStyle/>
           <a:p>
             <a:pPr algn="ctr"/>
             <a:r>
-              <a:rPr sz="1600" b="1" i="0">
-                <a:solidFill>
-                  <a:srgbClr val="FFFFFF"/>
-                </a:solidFill>
-                <a:latin typeface="Calibri"/>
-              </a:rPr>
-              <a:t>2</a:t>
-            </a:r>
-          </a:p>
-        </p:txBody>
-      </p:sp>
-      <p:sp>
-        <p:nvSpPr>
-          <p:cNvPr id="13" name="TextBox 12"/>
-          <p:cNvSpPr txBox="1"/>
-          <p:nvPr/>
-        </p:nvSpPr>
-        <p:spPr>
-          <a:xfrm>
-            <a:off x="1188720" y="2894076"/>
-            <a:ext cx="10271455" cy="886968"/>
-          </a:xfrm>
-          <a:prstGeom prst="rect">
-            <a:avLst/>
-          </a:prstGeom>
-          <a:noFill/>
-        </p:spPr>
-        <p:txBody>
-          <a:bodyPr wrap="square" anchor="ctr"/>
-          <a:lstStyle/>
-          <a:p>
-            <a:r>
-              <a:rPr sz="1500" b="1" i="0">
+              <a:rPr sz="1300" b="1" i="0">
                 <a:solidFill>
                   <a:srgbClr val="095292"/>
                 </a:solidFill>
                 <a:latin typeface="Calibri"/>
               </a:rPr>
-              <a:t>Traduce con IA</a:t>
-            </a:r>
-          </a:p>
-          <a:p>
-            <a:pPr>
+              <a:t>draw.io</a:t>
+            </a:r>
+          </a:p>
+          <a:p>
+            <a:pPr algn="ctr">
               <a:spcBef>
                 <a:spcPts val="200"/>
               </a:spcBef>
             </a:pPr>
             <a:r>
-              <a:rPr sz="1300" b="0" i="0">
-                <a:solidFill>
-                  <a:srgbClr val="333333"/>
-                </a:solidFill>
-                <a:latin typeface="Calibri"/>
-              </a:rPr>
-              <a:t>Copia o describe tu boceto a una IA y pidele el codigo Mermaid: «convierte este diagrama a Mermaid usando erDiagram». Revisa el resultado: la IA acierta la sintaxis, no tu modelo.</a:t>
-            </a:r>
-          </a:p>
-        </p:txBody>
-      </p:sp>
-      <p:sp>
-        <p:nvSpPr>
-          <p:cNvPr id="14" name="Rounded Rectangle 13"/>
+              <a:rPr sz="1000" b="0" i="0">
+                <a:solidFill>
+                  <a:srgbClr val="666666"/>
+                </a:solidFill>
+                <a:latin typeface="Calibri"/>
+              </a:rPr>
+              <a:t>ER</a:t>
+            </a:r>
+          </a:p>
+        </p:txBody>
+      </p:sp>
+      <p:sp>
+        <p:nvSpPr>
+          <p:cNvPr id="16" name="Rounded Rectangle 15"/>
           <p:cNvSpPr/>
           <p:nvPr/>
         </p:nvSpPr>
         <p:spPr>
           <a:xfrm>
-            <a:off x="457200" y="3945636"/>
-            <a:ext cx="11277295" cy="1051560"/>
+            <a:off x="8109508" y="1591056"/>
+            <a:ext cx="3624986" cy="2299716"/>
           </a:xfrm>
           <a:prstGeom prst="roundRect">
             <a:avLst>
@@ -8373,19 +7485,17 @@
       </p:sp>
       <p:sp>
         <p:nvSpPr>
-          <p:cNvPr id="15" name="Rounded Rectangle 14"/>
+          <p:cNvPr id="17" name="Rectangle 16"/>
           <p:cNvSpPr/>
           <p:nvPr/>
         </p:nvSpPr>
         <p:spPr>
           <a:xfrm>
-            <a:off x="594360" y="4251960"/>
-            <a:ext cx="438912" cy="438912"/>
-          </a:xfrm>
-          <a:prstGeom prst="roundRect">
-            <a:avLst>
-              <a:gd name="adj" fmla="val 12000"/>
-            </a:avLst>
+            <a:off x="8109508" y="1591056"/>
+            <a:ext cx="3624986" cy="64008"/>
+          </a:xfrm>
+          <a:prstGeom prst="rect">
+            <a:avLst/>
           </a:prstGeom>
           <a:solidFill>
             <a:srgbClr val="095292"/>
@@ -8418,103 +7528,20 @@
       </p:sp>
       <p:sp>
         <p:nvSpPr>
-          <p:cNvPr id="16" name="TextBox 15"/>
-          <p:cNvSpPr txBox="1"/>
-          <p:nvPr/>
-        </p:nvSpPr>
-        <p:spPr>
-          <a:xfrm>
-            <a:off x="594360" y="4251960"/>
-            <a:ext cx="438912" cy="438912"/>
-          </a:xfrm>
-          <a:prstGeom prst="rect">
-            <a:avLst/>
-          </a:prstGeom>
-          <a:noFill/>
-        </p:spPr>
-        <p:txBody>
-          <a:bodyPr wrap="square" anchor="ctr"/>
-          <a:lstStyle/>
-          <a:p>
-            <a:pPr algn="ctr"/>
-            <a:r>
-              <a:rPr sz="1600" b="1" i="0">
-                <a:solidFill>
-                  <a:srgbClr val="FFFFFF"/>
-                </a:solidFill>
-                <a:latin typeface="Calibri"/>
-              </a:rPr>
-              <a:t>3</a:t>
-            </a:r>
-          </a:p>
-        </p:txBody>
-      </p:sp>
-      <p:sp>
-        <p:nvSpPr>
-          <p:cNvPr id="17" name="TextBox 16"/>
-          <p:cNvSpPr txBox="1"/>
-          <p:nvPr/>
-        </p:nvSpPr>
-        <p:spPr>
-          <a:xfrm>
-            <a:off x="1188720" y="4037076"/>
-            <a:ext cx="10271455" cy="886968"/>
-          </a:xfrm>
-          <a:prstGeom prst="rect">
-            <a:avLst/>
-          </a:prstGeom>
-          <a:noFill/>
-        </p:spPr>
-        <p:txBody>
-          <a:bodyPr wrap="square" anchor="ctr"/>
-          <a:lstStyle/>
-          <a:p>
-            <a:r>
-              <a:rPr sz="1500" b="1" i="0">
-                <a:solidFill>
-                  <a:srgbClr val="095292"/>
-                </a:solidFill>
-                <a:latin typeface="Calibri"/>
-              </a:rPr>
-              <a:t>Pega y renderiza en la plataforma del curso</a:t>
-            </a:r>
-          </a:p>
-          <a:p>
-            <a:pPr>
-              <a:spcBef>
-                <a:spcPts val="200"/>
-              </a:spcBef>
-            </a:pPr>
-            <a:r>
-              <a:rPr sz="1300" b="0" i="0">
-                <a:solidFill>
-                  <a:srgbClr val="333333"/>
-                </a:solidFill>
-                <a:latin typeface="Calibri"/>
-              </a:rPr>
-              <a:t>Pega ese codigo en la caja de texto de la pregunta y mira como lo dibuja la plataforma. Si no renderiza, corrige ahi mismo: lo que se califica es el diagrama renderizado dentro de la plataforma del curso.</a:t>
-            </a:r>
-          </a:p>
-        </p:txBody>
-      </p:sp>
-      <p:sp>
-        <p:nvSpPr>
-          <p:cNvPr id="18" name="Rounded Rectangle 17"/>
+          <p:cNvPr id="18" name="Rectangle 17"/>
           <p:cNvSpPr/>
           <p:nvPr/>
         </p:nvSpPr>
         <p:spPr>
           <a:xfrm>
-            <a:off x="457200" y="5088636"/>
-            <a:ext cx="11277295" cy="1051560"/>
-          </a:xfrm>
-          <a:prstGeom prst="roundRect">
-            <a:avLst>
-              <a:gd name="adj" fmla="val 12000"/>
-            </a:avLst>
+            <a:off x="8109508" y="1655064"/>
+            <a:ext cx="3624986" cy="27432"/>
+          </a:xfrm>
+          <a:prstGeom prst="rect">
+            <a:avLst/>
           </a:prstGeom>
           <a:solidFill>
-            <a:srgbClr val="E8F4FA"/>
+            <a:srgbClr val="FFD000"/>
           </a:solidFill>
           <a:ln>
             <a:noFill/>
@@ -8542,21 +7569,137 @@
           </a:p>
         </p:txBody>
       </p:sp>
-      <p:sp>
-        <p:nvSpPr>
-          <p:cNvPr id="19" name="Rounded Rectangle 18"/>
+      <p:pic>
+        <p:nvPicPr>
+          <p:cNvPr id="19" name="Picture 18" descr="dbfiddle.png"/>
+          <p:cNvPicPr>
+            <a:picLocks noChangeAspect="1"/>
+          </p:cNvPicPr>
+          <p:nvPr/>
+        </p:nvPicPr>
+        <p:blipFill>
+          <a:blip r:embed="rId4"/>
+          <a:stretch>
+            <a:fillRect/>
+          </a:stretch>
+        </p:blipFill>
+        <p:spPr>
+          <a:xfrm>
+            <a:off x="9311640" y="1847087"/>
+            <a:ext cx="1220724" cy="1220724"/>
+          </a:xfrm>
+          <a:prstGeom prst="rect">
+            <a:avLst/>
+          </a:prstGeom>
+        </p:spPr>
+      </p:pic>
+      <p:sp>
+        <p:nvSpPr>
+          <p:cNvPr id="20" name="TextBox 19"/>
+          <p:cNvSpPr txBox="1"/>
+          <p:nvPr/>
+        </p:nvSpPr>
+        <p:spPr>
+          <a:xfrm>
+            <a:off x="8182660" y="3159251"/>
+            <a:ext cx="3478682" cy="621792"/>
+          </a:xfrm>
+          <a:prstGeom prst="rect">
+            <a:avLst/>
+          </a:prstGeom>
+          <a:noFill/>
+        </p:spPr>
+        <p:txBody>
+          <a:bodyPr wrap="square" anchor="t"/>
+          <a:lstStyle/>
+          <a:p>
+            <a:pPr algn="ctr"/>
+            <a:r>
+              <a:rPr sz="1300" b="1" i="0">
+                <a:solidFill>
+                  <a:srgbClr val="095292"/>
+                </a:solidFill>
+                <a:latin typeface="Calibri"/>
+              </a:rPr>
+              <a:t>DB Fiddle</a:t>
+            </a:r>
+          </a:p>
+          <a:p>
+            <a:pPr algn="ctr">
+              <a:spcBef>
+                <a:spcPts val="200"/>
+              </a:spcBef>
+            </a:pPr>
+            <a:r>
+              <a:rPr sz="1000" b="0" i="0">
+                <a:solidFill>
+                  <a:srgbClr val="666666"/>
+                </a:solidFill>
+                <a:latin typeface="Calibri"/>
+              </a:rPr>
+              <a:t>DDL</a:t>
+            </a:r>
+          </a:p>
+        </p:txBody>
+      </p:sp>
+      <p:sp>
+        <p:nvSpPr>
+          <p:cNvPr id="21" name="Rounded Rectangle 20"/>
           <p:cNvSpPr/>
           <p:nvPr/>
         </p:nvSpPr>
         <p:spPr>
           <a:xfrm>
-            <a:off x="594360" y="5394960"/>
-            <a:ext cx="438912" cy="438912"/>
+            <a:off x="4283354" y="4055364"/>
+            <a:ext cx="3624986" cy="2299716"/>
           </a:xfrm>
           <a:prstGeom prst="roundRect">
             <a:avLst>
               <a:gd name="adj" fmla="val 12000"/>
             </a:avLst>
+          </a:prstGeom>
+          <a:solidFill>
+            <a:srgbClr val="F2F2F2"/>
+          </a:solidFill>
+          <a:ln>
+            <a:noFill/>
+          </a:ln>
+        </p:spPr>
+        <p:style>
+          <a:lnRef idx="1">
+            <a:schemeClr val="accent1"/>
+          </a:lnRef>
+          <a:fillRef idx="3">
+            <a:schemeClr val="accent1"/>
+          </a:fillRef>
+          <a:effectRef idx="2">
+            <a:schemeClr val="accent1"/>
+          </a:effectRef>
+          <a:fontRef idx="minor">
+            <a:schemeClr val="lt1"/>
+          </a:fontRef>
+        </p:style>
+        <p:txBody>
+          <a:bodyPr rtlCol="0" anchor="ctr"/>
+          <a:lstStyle/>
+          <a:p>
+            <a:pPr algn="ctr"/>
+          </a:p>
+        </p:txBody>
+      </p:sp>
+      <p:sp>
+        <p:nvSpPr>
+          <p:cNvPr id="22" name="Rectangle 21"/>
+          <p:cNvSpPr/>
+          <p:nvPr/>
+        </p:nvSpPr>
+        <p:spPr>
+          <a:xfrm>
+            <a:off x="4283354" y="4055364"/>
+            <a:ext cx="3624986" cy="64008"/>
+          </a:xfrm>
+          <a:prstGeom prst="rect">
+            <a:avLst/>
           </a:prstGeom>
           <a:solidFill>
             <a:srgbClr val="095292"/>
@@ -8589,14 +7732,81 @@
       </p:sp>
       <p:sp>
         <p:nvSpPr>
-          <p:cNvPr id="20" name="TextBox 19"/>
+          <p:cNvPr id="23" name="Rectangle 22"/>
+          <p:cNvSpPr/>
+          <p:nvPr/>
+        </p:nvSpPr>
+        <p:spPr>
+          <a:xfrm>
+            <a:off x="4283354" y="4119372"/>
+            <a:ext cx="3624986" cy="27432"/>
+          </a:xfrm>
+          <a:prstGeom prst="rect">
+            <a:avLst/>
+          </a:prstGeom>
+          <a:solidFill>
+            <a:srgbClr val="FFD000"/>
+          </a:solidFill>
+          <a:ln>
+            <a:noFill/>
+          </a:ln>
+        </p:spPr>
+        <p:style>
+          <a:lnRef idx="1">
+            <a:schemeClr val="accent1"/>
+          </a:lnRef>
+          <a:fillRef idx="3">
+            <a:schemeClr val="accent1"/>
+          </a:fillRef>
+          <a:effectRef idx="2">
+            <a:schemeClr val="accent1"/>
+          </a:effectRef>
+          <a:fontRef idx="minor">
+            <a:schemeClr val="lt1"/>
+          </a:fontRef>
+        </p:style>
+        <p:txBody>
+          <a:bodyPr rtlCol="0" anchor="ctr"/>
+          <a:lstStyle/>
+          <a:p>
+            <a:pPr algn="ctr"/>
+          </a:p>
+        </p:txBody>
+      </p:sp>
+      <p:pic>
+        <p:nvPicPr>
+          <p:cNvPr id="24" name="Picture 23" descr="google_docs.png"/>
+          <p:cNvPicPr>
+            <a:picLocks noChangeAspect="1"/>
+          </p:cNvPicPr>
+          <p:nvPr/>
+        </p:nvPicPr>
+        <p:blipFill>
+          <a:blip r:embed="rId5"/>
+          <a:stretch>
+            <a:fillRect/>
+          </a:stretch>
+        </p:blipFill>
+        <p:spPr>
+          <a:xfrm>
+            <a:off x="5485485" y="4311396"/>
+            <a:ext cx="1220724" cy="1220724"/>
+          </a:xfrm>
+          <a:prstGeom prst="rect">
+            <a:avLst/>
+          </a:prstGeom>
+        </p:spPr>
+      </p:pic>
+      <p:sp>
+        <p:nvSpPr>
+          <p:cNvPr id="25" name="TextBox 24"/>
           <p:cNvSpPr txBox="1"/>
           <p:nvPr/>
         </p:nvSpPr>
         <p:spPr>
           <a:xfrm>
-            <a:off x="594360" y="5394960"/>
-            <a:ext cx="438912" cy="438912"/>
+            <a:off x="4356506" y="5623560"/>
+            <a:ext cx="3478682" cy="621792"/>
           </a:xfrm>
           <a:prstGeom prst="rect">
             <a:avLst/>
@@ -8604,73 +7814,41 @@
           <a:noFill/>
         </p:spPr>
         <p:txBody>
-          <a:bodyPr wrap="square" anchor="ctr"/>
+          <a:bodyPr wrap="square" anchor="t"/>
           <a:lstStyle/>
           <a:p>
             <a:pPr algn="ctr"/>
             <a:r>
-              <a:rPr sz="1600" b="1" i="0">
-                <a:solidFill>
-                  <a:srgbClr val="FFFFFF"/>
-                </a:solidFill>
-                <a:latin typeface="Calibri"/>
-              </a:rPr>
-              <a:t>4</a:t>
-            </a:r>
-          </a:p>
-        </p:txBody>
-      </p:sp>
-      <p:sp>
-        <p:nvSpPr>
-          <p:cNvPr id="21" name="TextBox 20"/>
-          <p:cNvSpPr txBox="1"/>
-          <p:nvPr/>
-        </p:nvSpPr>
-        <p:spPr>
-          <a:xfrm>
-            <a:off x="1188720" y="5180076"/>
-            <a:ext cx="10271455" cy="886968"/>
-          </a:xfrm>
-          <a:prstGeom prst="rect">
-            <a:avLst/>
-          </a:prstGeom>
-          <a:noFill/>
-        </p:spPr>
-        <p:txBody>
-          <a:bodyPr wrap="square" anchor="ctr"/>
-          <a:lstStyle/>
-          <a:p>
-            <a:r>
-              <a:rPr sz="1500" b="1" i="0">
+              <a:rPr sz="1300" b="1" i="0">
                 <a:solidFill>
                   <a:srgbClr val="095292"/>
                 </a:solidFill>
                 <a:latin typeface="Calibri"/>
               </a:rPr>
-              <a:t>Guarda el PNG para tu PI</a:t>
-            </a:r>
-          </a:p>
-          <a:p>
-            <a:pPr>
+              <a:t>Google Docs</a:t>
+            </a:r>
+          </a:p>
+          <a:p>
+            <a:pPr algn="ctr">
               <a:spcBef>
                 <a:spcPts val="200"/>
               </a:spcBef>
             </a:pPr>
             <a:r>
-              <a:rPr sz="1300" b="0" i="0">
-                <a:solidFill>
-                  <a:srgbClr val="333333"/>
-                </a:solidFill>
-                <a:latin typeface="Calibri"/>
-              </a:rPr>
-              <a:t>Exporta tambien la imagen a la carpeta de tu Proyecto Integrador. Esa copia es para tu informe; no reemplaza la respuesta en la plataforma.</a:t>
-            </a:r>
-          </a:p>
-        </p:txBody>
-      </p:sp>
-      <p:sp>
-        <p:nvSpPr>
-          <p:cNvPr id="22" name="TextBox 21"/>
+              <a:rPr sz="1000" b="0" i="0">
+                <a:solidFill>
+                  <a:srgbClr val="666666"/>
+                </a:solidFill>
+                <a:latin typeface="Calibri"/>
+              </a:rPr>
+              <a:t>Checklist</a:t>
+            </a:r>
+          </a:p>
+        </p:txBody>
+      </p:sp>
+      <p:sp>
+        <p:nvSpPr>
+          <p:cNvPr id="26" name="TextBox 25"/>
           <p:cNvSpPr txBox="1"/>
           <p:nvPr/>
         </p:nvSpPr>
@@ -8738,7 +7916,7 @@
         <p:spPr>
           <a:xfrm>
             <a:off x="0" y="0"/>
-            <a:ext cx="12191695" cy="960120"/>
+            <a:ext cx="12191695" cy="1170432"/>
           </a:xfrm>
           <a:prstGeom prst="rect">
             <a:avLst/>
@@ -8780,7 +7958,7 @@
         </p:nvSpPr>
         <p:spPr>
           <a:xfrm>
-            <a:off x="0" y="960120"/>
+            <a:off x="0" y="1170432"/>
             <a:ext cx="12191695" cy="41148"/>
           </a:xfrm>
           <a:prstGeom prst="rect">
@@ -8824,7 +8002,7 @@
         <p:spPr>
           <a:xfrm>
             <a:off x="457200" y="164592"/>
-            <a:ext cx="11277295" cy="502920"/>
+            <a:ext cx="11277295" cy="384048"/>
           </a:xfrm>
           <a:prstGeom prst="rect">
             <a:avLst/>
@@ -8844,7 +8022,7 @@
                 </a:solidFill>
                 <a:latin typeface="Calibri"/>
               </a:rPr>
-              <a:t>Taller PI VetCare — contexto / por que importa</a:t>
+              <a:t>Del boceto a la plataforma del curso (diagrama)</a:t>
             </a:r>
           </a:p>
         </p:txBody>
@@ -8857,8 +8035,8 @@
         </p:nvSpPr>
         <p:spPr>
           <a:xfrm>
-            <a:off x="457200" y="1170432"/>
-            <a:ext cx="11277295" cy="5230368"/>
+            <a:off x="457200" y="566928"/>
+            <a:ext cx="11277295" cy="411480"/>
           </a:xfrm>
           <a:prstGeom prst="rect">
             <a:avLst/>
@@ -8871,60 +8049,705 @@
           </a:bodyPr>
           <a:lstStyle/>
           <a:p>
+            <a:r>
+              <a:rPr sz="1400" b="0" i="0">
+                <a:solidFill>
+                  <a:srgbClr val="B8D8EE"/>
+                </a:solidFill>
+                <a:latin typeface="Calibri"/>
+              </a:rPr>
+              <a:t>El diagrama se entrega como codigo Mermaid dentro de la plataforma del curso, no como imagen</a:t>
+            </a:r>
+          </a:p>
+        </p:txBody>
+      </p:sp>
+      <p:sp>
+        <p:nvSpPr>
+          <p:cNvPr id="6" name="Rounded Rectangle 5"/>
+          <p:cNvSpPr/>
+          <p:nvPr/>
+        </p:nvSpPr>
+        <p:spPr>
+          <a:xfrm>
+            <a:off x="457200" y="1659636"/>
+            <a:ext cx="11277295" cy="1051560"/>
+          </a:xfrm>
+          <a:prstGeom prst="roundRect">
+            <a:avLst>
+              <a:gd name="adj" fmla="val 12000"/>
+            </a:avLst>
+          </a:prstGeom>
+          <a:solidFill>
+            <a:srgbClr val="F2F2F2"/>
+          </a:solidFill>
+          <a:ln>
+            <a:noFill/>
+          </a:ln>
+        </p:spPr>
+        <p:style>
+          <a:lnRef idx="1">
+            <a:schemeClr val="accent1"/>
+          </a:lnRef>
+          <a:fillRef idx="3">
+            <a:schemeClr val="accent1"/>
+          </a:fillRef>
+          <a:effectRef idx="2">
+            <a:schemeClr val="accent1"/>
+          </a:effectRef>
+          <a:fontRef idx="minor">
+            <a:schemeClr val="lt1"/>
+          </a:fontRef>
+        </p:style>
+        <p:txBody>
+          <a:bodyPr rtlCol="0" anchor="ctr"/>
+          <a:lstStyle/>
+          <a:p>
+            <a:pPr algn="ctr"/>
+          </a:p>
+        </p:txBody>
+      </p:sp>
+      <p:sp>
+        <p:nvSpPr>
+          <p:cNvPr id="7" name="Rounded Rectangle 6"/>
+          <p:cNvSpPr/>
+          <p:nvPr/>
+        </p:nvSpPr>
+        <p:spPr>
+          <a:xfrm>
+            <a:off x="594360" y="1965960"/>
+            <a:ext cx="438912" cy="438912"/>
+          </a:xfrm>
+          <a:prstGeom prst="roundRect">
+            <a:avLst>
+              <a:gd name="adj" fmla="val 12000"/>
+            </a:avLst>
+          </a:prstGeom>
+          <a:solidFill>
+            <a:srgbClr val="095292"/>
+          </a:solidFill>
+          <a:ln>
+            <a:noFill/>
+          </a:ln>
+        </p:spPr>
+        <p:style>
+          <a:lnRef idx="1">
+            <a:schemeClr val="accent1"/>
+          </a:lnRef>
+          <a:fillRef idx="3">
+            <a:schemeClr val="accent1"/>
+          </a:fillRef>
+          <a:effectRef idx="2">
+            <a:schemeClr val="accent1"/>
+          </a:effectRef>
+          <a:fontRef idx="minor">
+            <a:schemeClr val="lt1"/>
+          </a:fontRef>
+        </p:style>
+        <p:txBody>
+          <a:bodyPr rtlCol="0" anchor="ctr"/>
+          <a:lstStyle/>
+          <a:p>
+            <a:pPr algn="ctr"/>
+          </a:p>
+        </p:txBody>
+      </p:sp>
+      <p:sp>
+        <p:nvSpPr>
+          <p:cNvPr id="8" name="TextBox 7"/>
+          <p:cNvSpPr txBox="1"/>
+          <p:nvPr/>
+        </p:nvSpPr>
+        <p:spPr>
+          <a:xfrm>
+            <a:off x="594360" y="1965960"/>
+            <a:ext cx="438912" cy="438912"/>
+          </a:xfrm>
+          <a:prstGeom prst="rect">
+            <a:avLst/>
+          </a:prstGeom>
+          <a:noFill/>
+        </p:spPr>
+        <p:txBody>
+          <a:bodyPr wrap="square" anchor="ctr"/>
+          <a:lstStyle/>
+          <a:p>
+            <a:pPr algn="ctr"/>
+            <a:r>
+              <a:rPr sz="1600" b="1" i="0">
+                <a:solidFill>
+                  <a:srgbClr val="FFFFFF"/>
+                </a:solidFill>
+                <a:latin typeface="Calibri"/>
+              </a:rPr>
+              <a:t>1</a:t>
+            </a:r>
+          </a:p>
+        </p:txBody>
+      </p:sp>
+      <p:sp>
+        <p:nvSpPr>
+          <p:cNvPr id="9" name="TextBox 8"/>
+          <p:cNvSpPr txBox="1"/>
+          <p:nvPr/>
+        </p:nvSpPr>
+        <p:spPr>
+          <a:xfrm>
+            <a:off x="1188720" y="1751076"/>
+            <a:ext cx="10271455" cy="886968"/>
+          </a:xfrm>
+          <a:prstGeom prst="rect">
+            <a:avLst/>
+          </a:prstGeom>
+          <a:noFill/>
+        </p:spPr>
+        <p:txBody>
+          <a:bodyPr wrap="square" anchor="ctr"/>
+          <a:lstStyle/>
+          <a:p>
+            <a:r>
+              <a:rPr sz="1500" b="1" i="0">
+                <a:solidFill>
+                  <a:srgbClr val="095292"/>
+                </a:solidFill>
+                <a:latin typeface="Calibri"/>
+              </a:rPr>
+              <a:t>Disena visual</a:t>
+            </a:r>
+          </a:p>
+          <a:p>
             <a:pPr>
-              <a:spcAft>
-                <a:spcPts val="800"/>
-              </a:spcAft>
+              <a:spcBef>
+                <a:spcPts val="200"/>
+              </a:spcBef>
             </a:pPr>
             <a:r>
-              <a:rPr sz="2000" b="0" i="0">
+              <a:rPr sz="1300" b="0" i="0">
                 <a:solidFill>
                   <a:srgbClr val="333333"/>
                 </a:solidFill>
                 <a:latin typeface="Calibri"/>
               </a:rPr>
-              <a:t>–   </a:t>
-            </a:r>
-            <a:r>
-              <a:rPr sz="2000" b="1" i="0">
+              <a:t>Dibuja el diagrama como quieras en Excalidraw o draw.io: es mas rapido arrastrar cajas que escribir codigo, y ahi es donde piensas el modelo.</a:t>
+            </a:r>
+          </a:p>
+        </p:txBody>
+      </p:sp>
+      <p:sp>
+        <p:nvSpPr>
+          <p:cNvPr id="10" name="Rounded Rectangle 9"/>
+          <p:cNvSpPr/>
+          <p:nvPr/>
+        </p:nvSpPr>
+        <p:spPr>
+          <a:xfrm>
+            <a:off x="457200" y="2802636"/>
+            <a:ext cx="11277295" cy="1051560"/>
+          </a:xfrm>
+          <a:prstGeom prst="roundRect">
+            <a:avLst>
+              <a:gd name="adj" fmla="val 12000"/>
+            </a:avLst>
+          </a:prstGeom>
+          <a:solidFill>
+            <a:srgbClr val="E8F4FA"/>
+          </a:solidFill>
+          <a:ln>
+            <a:noFill/>
+          </a:ln>
+        </p:spPr>
+        <p:style>
+          <a:lnRef idx="1">
+            <a:schemeClr val="accent1"/>
+          </a:lnRef>
+          <a:fillRef idx="3">
+            <a:schemeClr val="accent1"/>
+          </a:fillRef>
+          <a:effectRef idx="2">
+            <a:schemeClr val="accent1"/>
+          </a:effectRef>
+          <a:fontRef idx="minor">
+            <a:schemeClr val="lt1"/>
+          </a:fontRef>
+        </p:style>
+        <p:txBody>
+          <a:bodyPr rtlCol="0" anchor="ctr"/>
+          <a:lstStyle/>
+          <a:p>
+            <a:pPr algn="ctr"/>
+          </a:p>
+        </p:txBody>
+      </p:sp>
+      <p:sp>
+        <p:nvSpPr>
+          <p:cNvPr id="11" name="Rounded Rectangle 10"/>
+          <p:cNvSpPr/>
+          <p:nvPr/>
+        </p:nvSpPr>
+        <p:spPr>
+          <a:xfrm>
+            <a:off x="594360" y="3108960"/>
+            <a:ext cx="438912" cy="438912"/>
+          </a:xfrm>
+          <a:prstGeom prst="roundRect">
+            <a:avLst>
+              <a:gd name="adj" fmla="val 12000"/>
+            </a:avLst>
+          </a:prstGeom>
+          <a:solidFill>
+            <a:srgbClr val="095292"/>
+          </a:solidFill>
+          <a:ln>
+            <a:noFill/>
+          </a:ln>
+        </p:spPr>
+        <p:style>
+          <a:lnRef idx="1">
+            <a:schemeClr val="accent1"/>
+          </a:lnRef>
+          <a:fillRef idx="3">
+            <a:schemeClr val="accent1"/>
+          </a:fillRef>
+          <a:effectRef idx="2">
+            <a:schemeClr val="accent1"/>
+          </a:effectRef>
+          <a:fontRef idx="minor">
+            <a:schemeClr val="lt1"/>
+          </a:fontRef>
+        </p:style>
+        <p:txBody>
+          <a:bodyPr rtlCol="0" anchor="ctr"/>
+          <a:lstStyle/>
+          <a:p>
+            <a:pPr algn="ctr"/>
+          </a:p>
+        </p:txBody>
+      </p:sp>
+      <p:sp>
+        <p:nvSpPr>
+          <p:cNvPr id="12" name="TextBox 11"/>
+          <p:cNvSpPr txBox="1"/>
+          <p:nvPr/>
+        </p:nvSpPr>
+        <p:spPr>
+          <a:xfrm>
+            <a:off x="594360" y="3108960"/>
+            <a:ext cx="438912" cy="438912"/>
+          </a:xfrm>
+          <a:prstGeom prst="rect">
+            <a:avLst/>
+          </a:prstGeom>
+          <a:noFill/>
+        </p:spPr>
+        <p:txBody>
+          <a:bodyPr wrap="square" anchor="ctr"/>
+          <a:lstStyle/>
+          <a:p>
+            <a:pPr algn="ctr"/>
+            <a:r>
+              <a:rPr sz="1600" b="1" i="0">
+                <a:solidFill>
+                  <a:srgbClr val="FFFFFF"/>
+                </a:solidFill>
+                <a:latin typeface="Calibri"/>
+              </a:rPr>
+              <a:t>2</a:t>
+            </a:r>
+          </a:p>
+        </p:txBody>
+      </p:sp>
+      <p:sp>
+        <p:nvSpPr>
+          <p:cNvPr id="13" name="TextBox 12"/>
+          <p:cNvSpPr txBox="1"/>
+          <p:nvPr/>
+        </p:nvSpPr>
+        <p:spPr>
+          <a:xfrm>
+            <a:off x="1188720" y="2894076"/>
+            <a:ext cx="10271455" cy="886968"/>
+          </a:xfrm>
+          <a:prstGeom prst="rect">
+            <a:avLst/>
+          </a:prstGeom>
+          <a:noFill/>
+        </p:spPr>
+        <p:txBody>
+          <a:bodyPr wrap="square" anchor="ctr"/>
+          <a:lstStyle/>
+          <a:p>
+            <a:r>
+              <a:rPr sz="1500" b="1" i="0">
+                <a:solidFill>
+                  <a:srgbClr val="095292"/>
+                </a:solidFill>
+                <a:latin typeface="Calibri"/>
+              </a:rPr>
+              <a:t>Traduce con IA</a:t>
+            </a:r>
+          </a:p>
+          <a:p>
+            <a:pPr>
+              <a:spcBef>
+                <a:spcPts val="200"/>
+              </a:spcBef>
+            </a:pPr>
+            <a:r>
+              <a:rPr sz="1300" b="0" i="0">
                 <a:solidFill>
                   <a:srgbClr val="333333"/>
                 </a:solidFill>
                 <a:latin typeface="Calibri"/>
               </a:rPr>
-              <a:t>Por qué importa al PI:</a:t>
-            </a:r>
-            <a:r>
-              <a:rPr sz="2000" b="0" i="0">
+              <a:t>Copia o describe tu boceto a una IA y pidele el codigo Mermaid: «convierte este diagrama a Mermaid usando erDiagram». Revisa el resultado: la IA acierta la sintaxis, no tu modelo.</a:t>
+            </a:r>
+          </a:p>
+        </p:txBody>
+      </p:sp>
+      <p:sp>
+        <p:nvSpPr>
+          <p:cNvPr id="14" name="Rounded Rectangle 13"/>
+          <p:cNvSpPr/>
+          <p:nvPr/>
+        </p:nvSpPr>
+        <p:spPr>
+          <a:xfrm>
+            <a:off x="457200" y="3945636"/>
+            <a:ext cx="11277295" cy="1051560"/>
+          </a:xfrm>
+          <a:prstGeom prst="roundRect">
+            <a:avLst>
+              <a:gd name="adj" fmla="val 12000"/>
+            </a:avLst>
+          </a:prstGeom>
+          <a:solidFill>
+            <a:srgbClr val="F2F2F2"/>
+          </a:solidFill>
+          <a:ln>
+            <a:noFill/>
+          </a:ln>
+        </p:spPr>
+        <p:style>
+          <a:lnRef idx="1">
+            <a:schemeClr val="accent1"/>
+          </a:lnRef>
+          <a:fillRef idx="3">
+            <a:schemeClr val="accent1"/>
+          </a:fillRef>
+          <a:effectRef idx="2">
+            <a:schemeClr val="accent1"/>
+          </a:effectRef>
+          <a:fontRef idx="minor">
+            <a:schemeClr val="lt1"/>
+          </a:fontRef>
+        </p:style>
+        <p:txBody>
+          <a:bodyPr rtlCol="0" anchor="ctr"/>
+          <a:lstStyle/>
+          <a:p>
+            <a:pPr algn="ctr"/>
+          </a:p>
+        </p:txBody>
+      </p:sp>
+      <p:sp>
+        <p:nvSpPr>
+          <p:cNvPr id="15" name="Rounded Rectangle 14"/>
+          <p:cNvSpPr/>
+          <p:nvPr/>
+        </p:nvSpPr>
+        <p:spPr>
+          <a:xfrm>
+            <a:off x="594360" y="4251960"/>
+            <a:ext cx="438912" cy="438912"/>
+          </a:xfrm>
+          <a:prstGeom prst="roundRect">
+            <a:avLst>
+              <a:gd name="adj" fmla="val 12000"/>
+            </a:avLst>
+          </a:prstGeom>
+          <a:solidFill>
+            <a:srgbClr val="095292"/>
+          </a:solidFill>
+          <a:ln>
+            <a:noFill/>
+          </a:ln>
+        </p:spPr>
+        <p:style>
+          <a:lnRef idx="1">
+            <a:schemeClr val="accent1"/>
+          </a:lnRef>
+          <a:fillRef idx="3">
+            <a:schemeClr val="accent1"/>
+          </a:fillRef>
+          <a:effectRef idx="2">
+            <a:schemeClr val="accent1"/>
+          </a:effectRef>
+          <a:fontRef idx="minor">
+            <a:schemeClr val="lt1"/>
+          </a:fontRef>
+        </p:style>
+        <p:txBody>
+          <a:bodyPr rtlCol="0" anchor="ctr"/>
+          <a:lstStyle/>
+          <a:p>
+            <a:pPr algn="ctr"/>
+          </a:p>
+        </p:txBody>
+      </p:sp>
+      <p:sp>
+        <p:nvSpPr>
+          <p:cNvPr id="16" name="TextBox 15"/>
+          <p:cNvSpPr txBox="1"/>
+          <p:nvPr/>
+        </p:nvSpPr>
+        <p:spPr>
+          <a:xfrm>
+            <a:off x="594360" y="4251960"/>
+            <a:ext cx="438912" cy="438912"/>
+          </a:xfrm>
+          <a:prstGeom prst="rect">
+            <a:avLst/>
+          </a:prstGeom>
+          <a:noFill/>
+        </p:spPr>
+        <p:txBody>
+          <a:bodyPr wrap="square" anchor="ctr"/>
+          <a:lstStyle/>
+          <a:p>
+            <a:pPr algn="ctr"/>
+            <a:r>
+              <a:rPr sz="1600" b="1" i="0">
+                <a:solidFill>
+                  <a:srgbClr val="FFFFFF"/>
+                </a:solidFill>
+                <a:latin typeface="Calibri"/>
+              </a:rPr>
+              <a:t>3</a:t>
+            </a:r>
+          </a:p>
+        </p:txBody>
+      </p:sp>
+      <p:sp>
+        <p:nvSpPr>
+          <p:cNvPr id="17" name="TextBox 16"/>
+          <p:cNvSpPr txBox="1"/>
+          <p:nvPr/>
+        </p:nvSpPr>
+        <p:spPr>
+          <a:xfrm>
+            <a:off x="1188720" y="4037076"/>
+            <a:ext cx="10271455" cy="886968"/>
+          </a:xfrm>
+          <a:prstGeom prst="rect">
+            <a:avLst/>
+          </a:prstGeom>
+          <a:noFill/>
+        </p:spPr>
+        <p:txBody>
+          <a:bodyPr wrap="square" anchor="ctr"/>
+          <a:lstStyle/>
+          <a:p>
+            <a:r>
+              <a:rPr sz="1500" b="1" i="0">
+                <a:solidFill>
+                  <a:srgbClr val="095292"/>
+                </a:solidFill>
+                <a:latin typeface="Calibri"/>
+              </a:rPr>
+              <a:t>Pega y renderiza en la plataforma del curso</a:t>
+            </a:r>
+          </a:p>
+          <a:p>
+            <a:pPr>
+              <a:spcBef>
+                <a:spcPts val="200"/>
+              </a:spcBef>
+            </a:pPr>
+            <a:r>
+              <a:rPr sz="1300" b="0" i="0">
                 <a:solidFill>
                   <a:srgbClr val="333333"/>
                 </a:solidFill>
                 <a:latin typeface="Calibri"/>
               </a:rPr>
-              <a:t> checkpoint vs rúbrica.</a:t>
+              <a:t>Pega ese codigo en la caja de texto de la pregunta y mira como lo dibuja la plataforma. Si no renderiza, corrige ahi mismo: lo que se califica es el diagrama renderizado dentro de la plataforma del curso.</a:t>
+            </a:r>
+          </a:p>
+        </p:txBody>
+      </p:sp>
+      <p:sp>
+        <p:nvSpPr>
+          <p:cNvPr id="18" name="Rounded Rectangle 17"/>
+          <p:cNvSpPr/>
+          <p:nvPr/>
+        </p:nvSpPr>
+        <p:spPr>
+          <a:xfrm>
+            <a:off x="457200" y="5088636"/>
+            <a:ext cx="11277295" cy="1051560"/>
+          </a:xfrm>
+          <a:prstGeom prst="roundRect">
+            <a:avLst>
+              <a:gd name="adj" fmla="val 12000"/>
+            </a:avLst>
+          </a:prstGeom>
+          <a:solidFill>
+            <a:srgbClr val="E8F4FA"/>
+          </a:solidFill>
+          <a:ln>
+            <a:noFill/>
+          </a:ln>
+        </p:spPr>
+        <p:style>
+          <a:lnRef idx="1">
+            <a:schemeClr val="accent1"/>
+          </a:lnRef>
+          <a:fillRef idx="3">
+            <a:schemeClr val="accent1"/>
+          </a:fillRef>
+          <a:effectRef idx="2">
+            <a:schemeClr val="accent1"/>
+          </a:effectRef>
+          <a:fontRef idx="minor">
+            <a:schemeClr val="lt1"/>
+          </a:fontRef>
+        </p:style>
+        <p:txBody>
+          <a:bodyPr rtlCol="0" anchor="ctr"/>
+          <a:lstStyle/>
+          <a:p>
+            <a:pPr algn="ctr"/>
+          </a:p>
+        </p:txBody>
+      </p:sp>
+      <p:sp>
+        <p:nvSpPr>
+          <p:cNvPr id="19" name="Rounded Rectangle 18"/>
+          <p:cNvSpPr/>
+          <p:nvPr/>
+        </p:nvSpPr>
+        <p:spPr>
+          <a:xfrm>
+            <a:off x="594360" y="5394960"/>
+            <a:ext cx="438912" cy="438912"/>
+          </a:xfrm>
+          <a:prstGeom prst="roundRect">
+            <a:avLst>
+              <a:gd name="adj" fmla="val 12000"/>
+            </a:avLst>
+          </a:prstGeom>
+          <a:solidFill>
+            <a:srgbClr val="095292"/>
+          </a:solidFill>
+          <a:ln>
+            <a:noFill/>
+          </a:ln>
+        </p:spPr>
+        <p:style>
+          <a:lnRef idx="1">
+            <a:schemeClr val="accent1"/>
+          </a:lnRef>
+          <a:fillRef idx="3">
+            <a:schemeClr val="accent1"/>
+          </a:fillRef>
+          <a:effectRef idx="2">
+            <a:schemeClr val="accent1"/>
+          </a:effectRef>
+          <a:fontRef idx="minor">
+            <a:schemeClr val="lt1"/>
+          </a:fontRef>
+        </p:style>
+        <p:txBody>
+          <a:bodyPr rtlCol="0" anchor="ctr"/>
+          <a:lstStyle/>
+          <a:p>
+            <a:pPr algn="ctr"/>
+          </a:p>
+        </p:txBody>
+      </p:sp>
+      <p:sp>
+        <p:nvSpPr>
+          <p:cNvPr id="20" name="TextBox 19"/>
+          <p:cNvSpPr txBox="1"/>
+          <p:nvPr/>
+        </p:nvSpPr>
+        <p:spPr>
+          <a:xfrm>
+            <a:off x="594360" y="5394960"/>
+            <a:ext cx="438912" cy="438912"/>
+          </a:xfrm>
+          <a:prstGeom prst="rect">
+            <a:avLst/>
+          </a:prstGeom>
+          <a:noFill/>
+        </p:spPr>
+        <p:txBody>
+          <a:bodyPr wrap="square" anchor="ctr"/>
+          <a:lstStyle/>
+          <a:p>
+            <a:pPr algn="ctr"/>
+            <a:r>
+              <a:rPr sz="1600" b="1" i="0">
+                <a:solidFill>
+                  <a:srgbClr val="FFFFFF"/>
+                </a:solidFill>
+                <a:latin typeface="Calibri"/>
+              </a:rPr>
+              <a:t>4</a:t>
+            </a:r>
+          </a:p>
+        </p:txBody>
+      </p:sp>
+      <p:sp>
+        <p:nvSpPr>
+          <p:cNvPr id="21" name="TextBox 20"/>
+          <p:cNvSpPr txBox="1"/>
+          <p:nvPr/>
+        </p:nvSpPr>
+        <p:spPr>
+          <a:xfrm>
+            <a:off x="1188720" y="5180076"/>
+            <a:ext cx="10271455" cy="886968"/>
+          </a:xfrm>
+          <a:prstGeom prst="rect">
+            <a:avLst/>
+          </a:prstGeom>
+          <a:noFill/>
+        </p:spPr>
+        <p:txBody>
+          <a:bodyPr wrap="square" anchor="ctr"/>
+          <a:lstStyle/>
+          <a:p>
+            <a:r>
+              <a:rPr sz="1500" b="1" i="0">
+                <a:solidFill>
+                  <a:srgbClr val="095292"/>
+                </a:solidFill>
+                <a:latin typeface="Calibri"/>
+              </a:rPr>
+              <a:t>Guarda el PNG para tu PI</a:t>
             </a:r>
           </a:p>
           <a:p>
             <a:pPr>
-              <a:spcAft>
-                <a:spcPts val="800"/>
-              </a:spcAft>
+              <a:spcBef>
+                <a:spcPts val="200"/>
+              </a:spcBef>
             </a:pPr>
             <a:r>
-              <a:rPr sz="2000" b="0" i="0">
+              <a:rPr sz="1300" b="0" i="0">
                 <a:solidFill>
                   <a:srgbClr val="333333"/>
                 </a:solidFill>
                 <a:latin typeface="Calibri"/>
               </a:rPr>
-              <a:t>–   Demo + gaps con responsable.</a:t>
-            </a:r>
-          </a:p>
-        </p:txBody>
-      </p:sp>
-      <p:sp>
-        <p:nvSpPr>
-          <p:cNvPr id="6" name="TextBox 5"/>
+              <a:t>Exporta tambien la imagen a la carpeta de tu Proyecto Integrador. Esa copia es para tu informe; no reemplaza la respuesta en la plataforma.</a:t>
+            </a:r>
+          </a:p>
+        </p:txBody>
+      </p:sp>
+      <p:sp>
+        <p:nvSpPr>
+          <p:cNvPr id="22" name="TextBox 21"/>
           <p:cNvSpPr txBox="1"/>
           <p:nvPr/>
         </p:nvSpPr>
@@ -9098,7 +8921,7 @@
                 </a:solidFill>
                 <a:latin typeface="Calibri"/>
               </a:rPr>
-              <a:t>Taller PI VetCare — objetivo y criterios</a:t>
+              <a:t>Taller PI VetCare — contexto / por que importa</a:t>
             </a:r>
           </a:p>
         </p:txBody>
@@ -9146,7 +8969,7 @@
                 </a:solidFill>
                 <a:latin typeface="Calibri"/>
               </a:rPr>
-              <a:t>Objetivo:</a:t>
+              <a:t>Por qué importa al PI:</a:t>
             </a:r>
             <a:r>
               <a:rPr sz="2000" b="0" i="0">
@@ -9155,7 +8978,7 @@
                 </a:solidFill>
                 <a:latin typeface="Calibri"/>
               </a:rPr>
-              <a:t> Checklist avance + demo 3-5 min.</a:t>
+              <a:t> checkpoint vs rúbrica.</a:t>
             </a:r>
           </a:p>
           <a:p>
@@ -9171,127 +8994,7 @@
                 </a:solidFill>
                 <a:latin typeface="Calibri"/>
               </a:rPr>
-              <a:t>–   </a:t>
-            </a:r>
-            <a:r>
-              <a:rPr sz="2000" b="1" i="0">
-                <a:solidFill>
-                  <a:srgbClr val="333333"/>
-                </a:solidFill>
-                <a:latin typeface="Calibri"/>
-              </a:rPr>
-              <a:t>Exito:</a:t>
-            </a:r>
-            <a:r>
-              <a:rPr sz="2000" b="0" i="0">
-                <a:solidFill>
-                  <a:srgbClr val="333333"/>
-                </a:solidFill>
-                <a:latin typeface="Calibri"/>
-              </a:rPr>
-              <a:t> Checklist evidenciada.</a:t>
-            </a:r>
-          </a:p>
-          <a:p>
-            <a:pPr>
-              <a:spcAft>
-                <a:spcPts val="800"/>
-              </a:spcAft>
-            </a:pPr>
-            <a:r>
-              <a:rPr sz="2000" b="0" i="0">
-                <a:solidFill>
-                  <a:srgbClr val="333333"/>
-                </a:solidFill>
-                <a:latin typeface="Calibri"/>
-              </a:rPr>
-              <a:t>–   </a:t>
-            </a:r>
-            <a:r>
-              <a:rPr sz="2000" b="1" i="0">
-                <a:solidFill>
-                  <a:srgbClr val="333333"/>
-                </a:solidFill>
-                <a:latin typeface="Calibri"/>
-              </a:rPr>
-              <a:t>Exito:</a:t>
-            </a:r>
-            <a:r>
-              <a:rPr sz="2000" b="0" i="0">
-                <a:solidFill>
-                  <a:srgbClr val="333333"/>
-                </a:solidFill>
-                <a:latin typeface="Calibri"/>
-              </a:rPr>
-              <a:t> Demo ER+proc+trigger.</a:t>
-            </a:r>
-          </a:p>
-          <a:p>
-            <a:pPr>
-              <a:spcAft>
-                <a:spcPts val="800"/>
-              </a:spcAft>
-            </a:pPr>
-            <a:r>
-              <a:rPr sz="2000" b="0" i="0">
-                <a:solidFill>
-                  <a:srgbClr val="333333"/>
-                </a:solidFill>
-                <a:latin typeface="Calibri"/>
-              </a:rPr>
-              <a:t>–   </a:t>
-            </a:r>
-            <a:r>
-              <a:rPr sz="2000" b="1" i="0">
-                <a:solidFill>
-                  <a:srgbClr val="333333"/>
-                </a:solidFill>
-                <a:latin typeface="Calibri"/>
-              </a:rPr>
-              <a:t>Exito:</a:t>
-            </a:r>
-            <a:r>
-              <a:rPr sz="2000" b="0" i="0">
-                <a:solidFill>
-                  <a:srgbClr val="333333"/>
-                </a:solidFill>
-                <a:latin typeface="Calibri"/>
-              </a:rPr>
-              <a:t> Gaps.</a:t>
-            </a:r>
-          </a:p>
-          <a:p>
-            <a:pPr>
-              <a:spcAft>
-                <a:spcPts val="800"/>
-              </a:spcAft>
-            </a:pPr>
-            <a:r>
-              <a:rPr sz="2000" b="0" i="0">
-                <a:solidFill>
-                  <a:srgbClr val="333333"/>
-                </a:solidFill>
-                <a:latin typeface="Calibri"/>
-              </a:rPr>
-              <a:t>–   </a:t>
-            </a:r>
-            <a:r>
-              <a:rPr sz="2000" b="1" i="0">
-                <a:solidFill>
-                  <a:srgbClr val="333333"/>
-                </a:solidFill>
-                <a:latin typeface="Calibri"/>
-              </a:rPr>
-              <a:t>Exito:</a:t>
-            </a:r>
-            <a:r>
-              <a:rPr sz="2000" b="0" i="0">
-                <a:solidFill>
-                  <a:srgbClr val="333333"/>
-                </a:solidFill>
-                <a:latin typeface="Calibri"/>
-              </a:rPr>
-              <a:t> Avance subido si aplica.</a:t>
+              <a:t>–   Demo + gaps con responsable.</a:t>
             </a:r>
           </a:p>
         </p:txBody>
@@ -9472,7 +9175,7 @@
                 </a:solidFill>
                 <a:latin typeface="Calibri"/>
               </a:rPr>
-              <a:t>Taller PI VetCare — escenario / datos de partida</a:t>
+              <a:t>Taller PI VetCare — objetivo y criterios</a:t>
             </a:r>
           </a:p>
         </p:txBody>
@@ -9511,7 +9214,161 @@
                 </a:solidFill>
                 <a:latin typeface="Calibri"/>
               </a:rPr>
-              <a:t>–   Evidencias: ER, DDL, roles, procs, fn, triggers, opt.</a:t>
+              <a:t>–   </a:t>
+            </a:r>
+            <a:r>
+              <a:rPr sz="2000" b="1" i="0">
+                <a:solidFill>
+                  <a:srgbClr val="333333"/>
+                </a:solidFill>
+                <a:latin typeface="Calibri"/>
+              </a:rPr>
+              <a:t>Objetivo:</a:t>
+            </a:r>
+            <a:r>
+              <a:rPr sz="2000" b="0" i="0">
+                <a:solidFill>
+                  <a:srgbClr val="333333"/>
+                </a:solidFill>
+                <a:latin typeface="Calibri"/>
+              </a:rPr>
+              <a:t> Checklist avance + demo 3-5 min.</a:t>
+            </a:r>
+          </a:p>
+          <a:p>
+            <a:pPr>
+              <a:spcAft>
+                <a:spcPts val="800"/>
+              </a:spcAft>
+            </a:pPr>
+            <a:r>
+              <a:rPr sz="2000" b="0" i="0">
+                <a:solidFill>
+                  <a:srgbClr val="333333"/>
+                </a:solidFill>
+                <a:latin typeface="Calibri"/>
+              </a:rPr>
+              <a:t>–   </a:t>
+            </a:r>
+            <a:r>
+              <a:rPr sz="2000" b="1" i="0">
+                <a:solidFill>
+                  <a:srgbClr val="333333"/>
+                </a:solidFill>
+                <a:latin typeface="Calibri"/>
+              </a:rPr>
+              <a:t>Exito:</a:t>
+            </a:r>
+            <a:r>
+              <a:rPr sz="2000" b="0" i="0">
+                <a:solidFill>
+                  <a:srgbClr val="333333"/>
+                </a:solidFill>
+                <a:latin typeface="Calibri"/>
+              </a:rPr>
+              <a:t> Checklist evidenciada.</a:t>
+            </a:r>
+          </a:p>
+          <a:p>
+            <a:pPr>
+              <a:spcAft>
+                <a:spcPts val="800"/>
+              </a:spcAft>
+            </a:pPr>
+            <a:r>
+              <a:rPr sz="2000" b="0" i="0">
+                <a:solidFill>
+                  <a:srgbClr val="333333"/>
+                </a:solidFill>
+                <a:latin typeface="Calibri"/>
+              </a:rPr>
+              <a:t>–   </a:t>
+            </a:r>
+            <a:r>
+              <a:rPr sz="2000" b="1" i="0">
+                <a:solidFill>
+                  <a:srgbClr val="333333"/>
+                </a:solidFill>
+                <a:latin typeface="Calibri"/>
+              </a:rPr>
+              <a:t>Exito:</a:t>
+            </a:r>
+            <a:r>
+              <a:rPr sz="2000" b="0" i="0">
+                <a:solidFill>
+                  <a:srgbClr val="333333"/>
+                </a:solidFill>
+                <a:latin typeface="Calibri"/>
+              </a:rPr>
+              <a:t> Demo ER+proc+trigger.</a:t>
+            </a:r>
+          </a:p>
+          <a:p>
+            <a:pPr>
+              <a:spcAft>
+                <a:spcPts val="800"/>
+              </a:spcAft>
+            </a:pPr>
+            <a:r>
+              <a:rPr sz="2000" b="0" i="0">
+                <a:solidFill>
+                  <a:srgbClr val="333333"/>
+                </a:solidFill>
+                <a:latin typeface="Calibri"/>
+              </a:rPr>
+              <a:t>–   </a:t>
+            </a:r>
+            <a:r>
+              <a:rPr sz="2000" b="1" i="0">
+                <a:solidFill>
+                  <a:srgbClr val="333333"/>
+                </a:solidFill>
+                <a:latin typeface="Calibri"/>
+              </a:rPr>
+              <a:t>Exito:</a:t>
+            </a:r>
+            <a:r>
+              <a:rPr sz="2000" b="0" i="0">
+                <a:solidFill>
+                  <a:srgbClr val="333333"/>
+                </a:solidFill>
+                <a:latin typeface="Calibri"/>
+              </a:rPr>
+              <a:t> Gaps.</a:t>
+            </a:r>
+          </a:p>
+          <a:p>
+            <a:pPr>
+              <a:spcAft>
+                <a:spcPts val="800"/>
+              </a:spcAft>
+            </a:pPr>
+            <a:r>
+              <a:rPr sz="2000" b="0" i="0">
+                <a:solidFill>
+                  <a:srgbClr val="333333"/>
+                </a:solidFill>
+                <a:latin typeface="Calibri"/>
+              </a:rPr>
+              <a:t>–   </a:t>
+            </a:r>
+            <a:r>
+              <a:rPr sz="2000" b="1" i="0">
+                <a:solidFill>
+                  <a:srgbClr val="333333"/>
+                </a:solidFill>
+                <a:latin typeface="Calibri"/>
+              </a:rPr>
+              <a:t>Exito:</a:t>
+            </a:r>
+            <a:r>
+              <a:rPr sz="2000" b="0" i="0">
+                <a:solidFill>
+                  <a:srgbClr val="333333"/>
+                </a:solidFill>
+                <a:latin typeface="Calibri"/>
+              </a:rPr>
+              <a:t> Avance subido si aplica.</a:t>
             </a:r>
           </a:p>
         </p:txBody>
@@ -9692,111 +9549,21 @@
                 </a:solidFill>
                 <a:latin typeface="Calibri"/>
               </a:rPr>
-              <a:t>Taller PI VetCare — pasos guiados</a:t>
-            </a:r>
-          </a:p>
-        </p:txBody>
-      </p:sp>
-      <p:sp>
-        <p:nvSpPr>
-          <p:cNvPr id="5" name="Rounded Rectangle 4"/>
-          <p:cNvSpPr/>
-          <p:nvPr/>
-        </p:nvSpPr>
-        <p:spPr>
-          <a:xfrm>
-            <a:off x="457200" y="1554480"/>
-            <a:ext cx="11277295" cy="1051560"/>
-          </a:xfrm>
-          <a:prstGeom prst="roundRect">
-            <a:avLst>
-              <a:gd name="adj" fmla="val 12000"/>
-            </a:avLst>
-          </a:prstGeom>
-          <a:solidFill>
-            <a:srgbClr val="F2F2F2"/>
-          </a:solidFill>
-          <a:ln>
-            <a:noFill/>
-          </a:ln>
-        </p:spPr>
-        <p:style>
-          <a:lnRef idx="1">
-            <a:schemeClr val="accent1"/>
-          </a:lnRef>
-          <a:fillRef idx="3">
-            <a:schemeClr val="accent1"/>
-          </a:fillRef>
-          <a:effectRef idx="2">
-            <a:schemeClr val="accent1"/>
-          </a:effectRef>
-          <a:fontRef idx="minor">
-            <a:schemeClr val="lt1"/>
-          </a:fontRef>
-        </p:style>
-        <p:txBody>
-          <a:bodyPr rtlCol="0" anchor="ctr"/>
-          <a:lstStyle/>
-          <a:p>
-            <a:pPr algn="ctr"/>
-          </a:p>
-        </p:txBody>
-      </p:sp>
-      <p:sp>
-        <p:nvSpPr>
-          <p:cNvPr id="6" name="Rounded Rectangle 5"/>
-          <p:cNvSpPr/>
-          <p:nvPr/>
-        </p:nvSpPr>
-        <p:spPr>
-          <a:xfrm>
-            <a:off x="594360" y="1860804"/>
-            <a:ext cx="438912" cy="438912"/>
-          </a:xfrm>
-          <a:prstGeom prst="roundRect">
-            <a:avLst>
-              <a:gd name="adj" fmla="val 12000"/>
-            </a:avLst>
-          </a:prstGeom>
-          <a:solidFill>
-            <a:srgbClr val="095292"/>
-          </a:solidFill>
-          <a:ln>
-            <a:noFill/>
-          </a:ln>
-        </p:spPr>
-        <p:style>
-          <a:lnRef idx="1">
-            <a:schemeClr val="accent1"/>
-          </a:lnRef>
-          <a:fillRef idx="3">
-            <a:schemeClr val="accent1"/>
-          </a:fillRef>
-          <a:effectRef idx="2">
-            <a:schemeClr val="accent1"/>
-          </a:effectRef>
-          <a:fontRef idx="minor">
-            <a:schemeClr val="lt1"/>
-          </a:fontRef>
-        </p:style>
-        <p:txBody>
-          <a:bodyPr rtlCol="0" anchor="ctr"/>
-          <a:lstStyle/>
-          <a:p>
-            <a:pPr algn="ctr"/>
-          </a:p>
-        </p:txBody>
-      </p:sp>
-      <p:sp>
-        <p:nvSpPr>
-          <p:cNvPr id="7" name="TextBox 6"/>
+              <a:t>Taller PI VetCare — escenario / datos de partida</a:t>
+            </a:r>
+          </a:p>
+        </p:txBody>
+      </p:sp>
+      <p:sp>
+        <p:nvSpPr>
+          <p:cNvPr id="5" name="TextBox 4"/>
           <p:cNvSpPr txBox="1"/>
           <p:nvPr/>
         </p:nvSpPr>
         <p:spPr>
           <a:xfrm>
-            <a:off x="594360" y="1860804"/>
-            <a:ext cx="438912" cy="438912"/>
+            <a:off x="457200" y="1170432"/>
+            <a:ext cx="11277295" cy="5230368"/>
           </a:xfrm>
           <a:prstGeom prst="rect">
             <a:avLst/>
@@ -9804,522 +9571,31 @@
           <a:noFill/>
         </p:spPr>
         <p:txBody>
-          <a:bodyPr wrap="square" anchor="ctr"/>
-          <a:lstStyle/>
-          <a:p>
-            <a:pPr algn="ctr"/>
-            <a:r>
-              <a:rPr sz="1600" b="1" i="0">
-                <a:solidFill>
-                  <a:srgbClr val="FFFFFF"/>
-                </a:solidFill>
-                <a:latin typeface="Calibri"/>
-              </a:rPr>
-              <a:t>1</a:t>
-            </a:r>
-          </a:p>
-        </p:txBody>
-      </p:sp>
-      <p:sp>
-        <p:nvSpPr>
-          <p:cNvPr id="8" name="TextBox 7"/>
-          <p:cNvSpPr txBox="1"/>
-          <p:nvPr/>
-        </p:nvSpPr>
-        <p:spPr>
-          <a:xfrm>
-            <a:off x="1188720" y="1645920"/>
-            <a:ext cx="10271455" cy="886968"/>
-          </a:xfrm>
-          <a:prstGeom prst="rect">
-            <a:avLst/>
-          </a:prstGeom>
-          <a:noFill/>
-        </p:spPr>
-        <p:txBody>
-          <a:bodyPr wrap="square" anchor="ctr"/>
-          <a:lstStyle/>
-          <a:p>
-            <a:r>
-              <a:rPr sz="1500" b="1" i="0">
-                <a:solidFill>
-                  <a:srgbClr val="095292"/>
-                </a:solidFill>
-                <a:latin typeface="Calibri"/>
-              </a:rPr>
-              <a:t>Completar checklist de avance (si/no/parcial).</a:t>
-            </a:r>
-          </a:p>
-        </p:txBody>
-      </p:sp>
-      <p:sp>
-        <p:nvSpPr>
-          <p:cNvPr id="9" name="Rounded Rectangle 8"/>
-          <p:cNvSpPr/>
-          <p:nvPr/>
-        </p:nvSpPr>
-        <p:spPr>
-          <a:xfrm>
-            <a:off x="457200" y="2697480"/>
-            <a:ext cx="11277295" cy="1051560"/>
-          </a:xfrm>
-          <a:prstGeom prst="roundRect">
-            <a:avLst>
-              <a:gd name="adj" fmla="val 12000"/>
-            </a:avLst>
-          </a:prstGeom>
-          <a:solidFill>
-            <a:srgbClr val="E8F4FA"/>
-          </a:solidFill>
-          <a:ln>
-            <a:noFill/>
-          </a:ln>
-        </p:spPr>
-        <p:style>
-          <a:lnRef idx="1">
-            <a:schemeClr val="accent1"/>
-          </a:lnRef>
-          <a:fillRef idx="3">
-            <a:schemeClr val="accent1"/>
-          </a:fillRef>
-          <a:effectRef idx="2">
-            <a:schemeClr val="accent1"/>
-          </a:effectRef>
-          <a:fontRef idx="minor">
-            <a:schemeClr val="lt1"/>
-          </a:fontRef>
-        </p:style>
-        <p:txBody>
-          <a:bodyPr rtlCol="0" anchor="ctr"/>
-          <a:lstStyle/>
-          <a:p>
-            <a:pPr algn="ctr"/>
-          </a:p>
-        </p:txBody>
-      </p:sp>
-      <p:sp>
-        <p:nvSpPr>
-          <p:cNvPr id="10" name="Rounded Rectangle 9"/>
-          <p:cNvSpPr/>
-          <p:nvPr/>
-        </p:nvSpPr>
-        <p:spPr>
-          <a:xfrm>
-            <a:off x="594360" y="3003804"/>
-            <a:ext cx="438912" cy="438912"/>
-          </a:xfrm>
-          <a:prstGeom prst="roundRect">
-            <a:avLst>
-              <a:gd name="adj" fmla="val 12000"/>
-            </a:avLst>
-          </a:prstGeom>
-          <a:solidFill>
-            <a:srgbClr val="095292"/>
-          </a:solidFill>
-          <a:ln>
-            <a:noFill/>
-          </a:ln>
-        </p:spPr>
-        <p:style>
-          <a:lnRef idx="1">
-            <a:schemeClr val="accent1"/>
-          </a:lnRef>
-          <a:fillRef idx="3">
-            <a:schemeClr val="accent1"/>
-          </a:fillRef>
-          <a:effectRef idx="2">
-            <a:schemeClr val="accent1"/>
-          </a:effectRef>
-          <a:fontRef idx="minor">
-            <a:schemeClr val="lt1"/>
-          </a:fontRef>
-        </p:style>
-        <p:txBody>
-          <a:bodyPr rtlCol="0" anchor="ctr"/>
-          <a:lstStyle/>
-          <a:p>
-            <a:pPr algn="ctr"/>
-          </a:p>
-        </p:txBody>
-      </p:sp>
-      <p:sp>
-        <p:nvSpPr>
-          <p:cNvPr id="11" name="TextBox 10"/>
-          <p:cNvSpPr txBox="1"/>
-          <p:nvPr/>
-        </p:nvSpPr>
-        <p:spPr>
-          <a:xfrm>
-            <a:off x="594360" y="3003804"/>
-            <a:ext cx="438912" cy="438912"/>
-          </a:xfrm>
-          <a:prstGeom prst="rect">
-            <a:avLst/>
-          </a:prstGeom>
-          <a:noFill/>
-        </p:spPr>
-        <p:txBody>
-          <a:bodyPr wrap="square" anchor="ctr"/>
-          <a:lstStyle/>
-          <a:p>
-            <a:pPr algn="ctr"/>
-            <a:r>
-              <a:rPr sz="1600" b="1" i="0">
-                <a:solidFill>
-                  <a:srgbClr val="FFFFFF"/>
-                </a:solidFill>
-                <a:latin typeface="Calibri"/>
-              </a:rPr>
-              <a:t>2</a:t>
-            </a:r>
-          </a:p>
-        </p:txBody>
-      </p:sp>
-      <p:sp>
-        <p:nvSpPr>
-          <p:cNvPr id="12" name="TextBox 11"/>
-          <p:cNvSpPr txBox="1"/>
-          <p:nvPr/>
-        </p:nvSpPr>
-        <p:spPr>
-          <a:xfrm>
-            <a:off x="1188720" y="2788920"/>
-            <a:ext cx="10271455" cy="886968"/>
-          </a:xfrm>
-          <a:prstGeom prst="rect">
-            <a:avLst/>
-          </a:prstGeom>
-          <a:noFill/>
-        </p:spPr>
-        <p:txBody>
-          <a:bodyPr wrap="square" anchor="ctr"/>
-          <a:lstStyle/>
-          <a:p>
-            <a:r>
-              <a:rPr sz="1500" b="1" i="0">
-                <a:solidFill>
-                  <a:srgbClr val="095292"/>
-                </a:solidFill>
-                <a:latin typeface="Calibri"/>
-              </a:rPr>
-              <a:t>Demo 3-5 min: ER + 1 proc + 1 trigger.</a:t>
-            </a:r>
-          </a:p>
-        </p:txBody>
-      </p:sp>
-      <p:sp>
-        <p:nvSpPr>
-          <p:cNvPr id="13" name="Rounded Rectangle 12"/>
-          <p:cNvSpPr/>
-          <p:nvPr/>
-        </p:nvSpPr>
-        <p:spPr>
-          <a:xfrm>
-            <a:off x="457200" y="3840480"/>
-            <a:ext cx="11277295" cy="1051560"/>
-          </a:xfrm>
-          <a:prstGeom prst="roundRect">
-            <a:avLst>
-              <a:gd name="adj" fmla="val 12000"/>
-            </a:avLst>
-          </a:prstGeom>
-          <a:solidFill>
-            <a:srgbClr val="F2F2F2"/>
-          </a:solidFill>
-          <a:ln>
-            <a:noFill/>
-          </a:ln>
-        </p:spPr>
-        <p:style>
-          <a:lnRef idx="1">
-            <a:schemeClr val="accent1"/>
-          </a:lnRef>
-          <a:fillRef idx="3">
-            <a:schemeClr val="accent1"/>
-          </a:fillRef>
-          <a:effectRef idx="2">
-            <a:schemeClr val="accent1"/>
-          </a:effectRef>
-          <a:fontRef idx="minor">
-            <a:schemeClr val="lt1"/>
-          </a:fontRef>
-        </p:style>
-        <p:txBody>
-          <a:bodyPr rtlCol="0" anchor="ctr"/>
-          <a:lstStyle/>
-          <a:p>
-            <a:pPr algn="ctr"/>
-          </a:p>
-        </p:txBody>
-      </p:sp>
-      <p:sp>
-        <p:nvSpPr>
-          <p:cNvPr id="14" name="Rounded Rectangle 13"/>
-          <p:cNvSpPr/>
-          <p:nvPr/>
-        </p:nvSpPr>
-        <p:spPr>
-          <a:xfrm>
-            <a:off x="594360" y="4146804"/>
-            <a:ext cx="438912" cy="438912"/>
-          </a:xfrm>
-          <a:prstGeom prst="roundRect">
-            <a:avLst>
-              <a:gd name="adj" fmla="val 12000"/>
-            </a:avLst>
-          </a:prstGeom>
-          <a:solidFill>
-            <a:srgbClr val="095292"/>
-          </a:solidFill>
-          <a:ln>
-            <a:noFill/>
-          </a:ln>
-        </p:spPr>
-        <p:style>
-          <a:lnRef idx="1">
-            <a:schemeClr val="accent1"/>
-          </a:lnRef>
-          <a:fillRef idx="3">
-            <a:schemeClr val="accent1"/>
-          </a:fillRef>
-          <a:effectRef idx="2">
-            <a:schemeClr val="accent1"/>
-          </a:effectRef>
-          <a:fontRef idx="minor">
-            <a:schemeClr val="lt1"/>
-          </a:fontRef>
-        </p:style>
-        <p:txBody>
-          <a:bodyPr rtlCol="0" anchor="ctr"/>
-          <a:lstStyle/>
-          <a:p>
-            <a:pPr algn="ctr"/>
-          </a:p>
-        </p:txBody>
-      </p:sp>
-      <p:sp>
-        <p:nvSpPr>
-          <p:cNvPr id="15" name="TextBox 14"/>
-          <p:cNvSpPr txBox="1"/>
-          <p:nvPr/>
-        </p:nvSpPr>
-        <p:spPr>
-          <a:xfrm>
-            <a:off x="594360" y="4146804"/>
-            <a:ext cx="438912" cy="438912"/>
-          </a:xfrm>
-          <a:prstGeom prst="rect">
-            <a:avLst/>
-          </a:prstGeom>
-          <a:noFill/>
-        </p:spPr>
-        <p:txBody>
-          <a:bodyPr wrap="square" anchor="ctr"/>
-          <a:lstStyle/>
-          <a:p>
-            <a:pPr algn="ctr"/>
-            <a:r>
-              <a:rPr sz="1600" b="1" i="0">
-                <a:solidFill>
-                  <a:srgbClr val="FFFFFF"/>
-                </a:solidFill>
-                <a:latin typeface="Calibri"/>
-              </a:rPr>
-              <a:t>3</a:t>
-            </a:r>
-          </a:p>
-        </p:txBody>
-      </p:sp>
-      <p:sp>
-        <p:nvSpPr>
-          <p:cNvPr id="16" name="TextBox 15"/>
-          <p:cNvSpPr txBox="1"/>
-          <p:nvPr/>
-        </p:nvSpPr>
-        <p:spPr>
-          <a:xfrm>
-            <a:off x="1188720" y="3931920"/>
-            <a:ext cx="10271455" cy="886968"/>
-          </a:xfrm>
-          <a:prstGeom prst="rect">
-            <a:avLst/>
-          </a:prstGeom>
-          <a:noFill/>
-        </p:spPr>
-        <p:txBody>
-          <a:bodyPr wrap="square" anchor="ctr"/>
-          <a:lstStyle/>
-          <a:p>
-            <a:r>
-              <a:rPr sz="1500" b="1" i="0">
-                <a:solidFill>
-                  <a:srgbClr val="095292"/>
-                </a:solidFill>
-                <a:latin typeface="Calibri"/>
-              </a:rPr>
-              <a:t>Lista de gaps con responsable.</a:t>
-            </a:r>
-          </a:p>
-        </p:txBody>
-      </p:sp>
-      <p:sp>
-        <p:nvSpPr>
-          <p:cNvPr id="17" name="Rounded Rectangle 16"/>
-          <p:cNvSpPr/>
-          <p:nvPr/>
-        </p:nvSpPr>
-        <p:spPr>
-          <a:xfrm>
-            <a:off x="457200" y="4983480"/>
-            <a:ext cx="11277295" cy="1051560"/>
-          </a:xfrm>
-          <a:prstGeom prst="roundRect">
-            <a:avLst>
-              <a:gd name="adj" fmla="val 12000"/>
-            </a:avLst>
-          </a:prstGeom>
-          <a:solidFill>
-            <a:srgbClr val="E8F4FA"/>
-          </a:solidFill>
-          <a:ln>
-            <a:noFill/>
-          </a:ln>
-        </p:spPr>
-        <p:style>
-          <a:lnRef idx="1">
-            <a:schemeClr val="accent1"/>
-          </a:lnRef>
-          <a:fillRef idx="3">
-            <a:schemeClr val="accent1"/>
-          </a:fillRef>
-          <a:effectRef idx="2">
-            <a:schemeClr val="accent1"/>
-          </a:effectRef>
-          <a:fontRef idx="minor">
-            <a:schemeClr val="lt1"/>
-          </a:fontRef>
-        </p:style>
-        <p:txBody>
-          <a:bodyPr rtlCol="0" anchor="ctr"/>
-          <a:lstStyle/>
-          <a:p>
-            <a:pPr algn="ctr"/>
-          </a:p>
-        </p:txBody>
-      </p:sp>
-      <p:sp>
-        <p:nvSpPr>
-          <p:cNvPr id="18" name="Rounded Rectangle 17"/>
-          <p:cNvSpPr/>
-          <p:nvPr/>
-        </p:nvSpPr>
-        <p:spPr>
-          <a:xfrm>
-            <a:off x="594360" y="5289804"/>
-            <a:ext cx="438912" cy="438912"/>
-          </a:xfrm>
-          <a:prstGeom prst="roundRect">
-            <a:avLst>
-              <a:gd name="adj" fmla="val 12000"/>
-            </a:avLst>
-          </a:prstGeom>
-          <a:solidFill>
-            <a:srgbClr val="095292"/>
-          </a:solidFill>
-          <a:ln>
-            <a:noFill/>
-          </a:ln>
-        </p:spPr>
-        <p:style>
-          <a:lnRef idx="1">
-            <a:schemeClr val="accent1"/>
-          </a:lnRef>
-          <a:fillRef idx="3">
-            <a:schemeClr val="accent1"/>
-          </a:fillRef>
-          <a:effectRef idx="2">
-            <a:schemeClr val="accent1"/>
-          </a:effectRef>
-          <a:fontRef idx="minor">
-            <a:schemeClr val="lt1"/>
-          </a:fontRef>
-        </p:style>
-        <p:txBody>
-          <a:bodyPr rtlCol="0" anchor="ctr"/>
-          <a:lstStyle/>
-          <a:p>
-            <a:pPr algn="ctr"/>
-          </a:p>
-        </p:txBody>
-      </p:sp>
-      <p:sp>
-        <p:nvSpPr>
-          <p:cNvPr id="19" name="TextBox 18"/>
-          <p:cNvSpPr txBox="1"/>
-          <p:nvPr/>
-        </p:nvSpPr>
-        <p:spPr>
-          <a:xfrm>
-            <a:off x="594360" y="5289804"/>
-            <a:ext cx="438912" cy="438912"/>
-          </a:xfrm>
-          <a:prstGeom prst="rect">
-            <a:avLst/>
-          </a:prstGeom>
-          <a:noFill/>
-        </p:spPr>
-        <p:txBody>
-          <a:bodyPr wrap="square" anchor="ctr"/>
-          <a:lstStyle/>
-          <a:p>
-            <a:pPr algn="ctr"/>
-            <a:r>
-              <a:rPr sz="1600" b="1" i="0">
-                <a:solidFill>
-                  <a:srgbClr val="FFFFFF"/>
-                </a:solidFill>
-                <a:latin typeface="Calibri"/>
-              </a:rPr>
-              <a:t>4</a:t>
-            </a:r>
-          </a:p>
-        </p:txBody>
-      </p:sp>
-      <p:sp>
-        <p:nvSpPr>
-          <p:cNvPr id="20" name="TextBox 19"/>
-          <p:cNvSpPr txBox="1"/>
-          <p:nvPr/>
-        </p:nvSpPr>
-        <p:spPr>
-          <a:xfrm>
-            <a:off x="1188720" y="5074920"/>
-            <a:ext cx="10271455" cy="886968"/>
-          </a:xfrm>
-          <a:prstGeom prst="rect">
-            <a:avLst/>
-          </a:prstGeom>
-          <a:noFill/>
-        </p:spPr>
-        <p:txBody>
-          <a:bodyPr wrap="square" anchor="ctr"/>
-          <a:lstStyle/>
-          <a:p>
-            <a:r>
-              <a:rPr sz="1500" b="1" i="0">
-                <a:solidFill>
-                  <a:srgbClr val="095292"/>
-                </a:solidFill>
-                <a:latin typeface="Calibri"/>
-              </a:rPr>
-              <a:t>Subir avance intermedio a la plataforma del curso (Talleres) si se pide.</a:t>
-            </a:r>
-          </a:p>
-        </p:txBody>
-      </p:sp>
-      <p:sp>
-        <p:nvSpPr>
-          <p:cNvPr id="21" name="TextBox 20"/>
+          <a:bodyPr wrap="square">
+            <a:spAutoFit/>
+          </a:bodyPr>
+          <a:lstStyle/>
+          <a:p>
+            <a:pPr>
+              <a:spcAft>
+                <a:spcPts val="800"/>
+              </a:spcAft>
+            </a:pPr>
+            <a:r>
+              <a:rPr sz="2000" b="0" i="0">
+                <a:solidFill>
+                  <a:srgbClr val="333333"/>
+                </a:solidFill>
+                <a:latin typeface="Calibri"/>
+              </a:rPr>
+              <a:t>–   Evidencias: ER, DDL, roles, procs, fn, triggers, opt.</a:t>
+            </a:r>
+          </a:p>
+        </p:txBody>
+      </p:sp>
+      <p:sp>
+        <p:nvSpPr>
+          <p:cNvPr id="6" name="TextBox 5"/>
           <p:cNvSpPr txBox="1"/>
           <p:nvPr/>
         </p:nvSpPr>
@@ -10493,7 +9769,7 @@
                 </a:solidFill>
                 <a:latin typeface="Calibri"/>
               </a:rPr>
-              <a:t>Taller PI VetCare — pistas (checklist vacio)</a:t>
+              <a:t>Taller PI VetCare — pasos guiados</a:t>
             </a:r>
           </a:p>
         </p:txBody>
@@ -10506,8 +9782,8 @@
         </p:nvSpPr>
         <p:spPr>
           <a:xfrm>
-            <a:off x="457200" y="1261872"/>
-            <a:ext cx="11277295" cy="566928"/>
+            <a:off x="457200" y="1554480"/>
+            <a:ext cx="11277295" cy="1051560"/>
           </a:xfrm>
           <a:prstGeom prst="roundRect">
             <a:avLst>
@@ -10545,25 +9821,25 @@
       </p:sp>
       <p:sp>
         <p:nvSpPr>
-          <p:cNvPr id="6" name="Rectangle 5"/>
+          <p:cNvPr id="6" name="Rounded Rectangle 5"/>
           <p:cNvSpPr/>
           <p:nvPr/>
         </p:nvSpPr>
         <p:spPr>
           <a:xfrm>
-            <a:off x="640080" y="1408175"/>
-            <a:ext cx="274320" cy="274320"/>
-          </a:xfrm>
-          <a:prstGeom prst="rect">
-            <a:avLst/>
+            <a:off x="594360" y="1860804"/>
+            <a:ext cx="438912" cy="438912"/>
+          </a:xfrm>
+          <a:prstGeom prst="roundRect">
+            <a:avLst>
+              <a:gd name="adj" fmla="val 12000"/>
+            </a:avLst>
           </a:prstGeom>
           <a:solidFill>
-            <a:srgbClr val="FFFFFF"/>
+            <a:srgbClr val="095292"/>
           </a:solidFill>
           <a:ln>
-            <a:solidFill>
-              <a:srgbClr val="333333"/>
-            </a:solidFill>
+            <a:noFill/>
           </a:ln>
         </p:spPr>
         <p:style>
@@ -10590,20 +9866,87 @@
       </p:sp>
       <p:sp>
         <p:nvSpPr>
-          <p:cNvPr id="7" name="Rectangle 6"/>
+          <p:cNvPr id="7" name="TextBox 6"/>
+          <p:cNvSpPr txBox="1"/>
+          <p:nvPr/>
+        </p:nvSpPr>
+        <p:spPr>
+          <a:xfrm>
+            <a:off x="594360" y="1860804"/>
+            <a:ext cx="438912" cy="438912"/>
+          </a:xfrm>
+          <a:prstGeom prst="rect">
+            <a:avLst/>
+          </a:prstGeom>
+          <a:noFill/>
+        </p:spPr>
+        <p:txBody>
+          <a:bodyPr wrap="square" anchor="ctr"/>
+          <a:lstStyle/>
+          <a:p>
+            <a:pPr algn="ctr"/>
+            <a:r>
+              <a:rPr sz="1600" b="1" i="0">
+                <a:solidFill>
+                  <a:srgbClr val="FFFFFF"/>
+                </a:solidFill>
+                <a:latin typeface="Calibri"/>
+              </a:rPr>
+              <a:t>1</a:t>
+            </a:r>
+          </a:p>
+        </p:txBody>
+      </p:sp>
+      <p:sp>
+        <p:nvSpPr>
+          <p:cNvPr id="8" name="TextBox 7"/>
+          <p:cNvSpPr txBox="1"/>
+          <p:nvPr/>
+        </p:nvSpPr>
+        <p:spPr>
+          <a:xfrm>
+            <a:off x="1188720" y="1645920"/>
+            <a:ext cx="10271455" cy="886968"/>
+          </a:xfrm>
+          <a:prstGeom prst="rect">
+            <a:avLst/>
+          </a:prstGeom>
+          <a:noFill/>
+        </p:spPr>
+        <p:txBody>
+          <a:bodyPr wrap="square" anchor="ctr"/>
+          <a:lstStyle/>
+          <a:p>
+            <a:r>
+              <a:rPr sz="1500" b="1" i="0">
+                <a:solidFill>
+                  <a:srgbClr val="095292"/>
+                </a:solidFill>
+                <a:latin typeface="Calibri"/>
+              </a:rPr>
+              <a:t>Completar checklist de avance (si/no/parcial).</a:t>
+            </a:r>
+          </a:p>
+        </p:txBody>
+      </p:sp>
+      <p:sp>
+        <p:nvSpPr>
+          <p:cNvPr id="9" name="Rounded Rectangle 8"/>
           <p:cNvSpPr/>
           <p:nvPr/>
         </p:nvSpPr>
         <p:spPr>
           <a:xfrm>
-            <a:off x="640080" y="1408175"/>
-            <a:ext cx="73152" cy="274320"/>
-          </a:xfrm>
-          <a:prstGeom prst="rect">
-            <a:avLst/>
+            <a:off x="457200" y="2697480"/>
+            <a:ext cx="11277295" cy="1051560"/>
+          </a:xfrm>
+          <a:prstGeom prst="roundRect">
+            <a:avLst>
+              <a:gd name="adj" fmla="val 12000"/>
+            </a:avLst>
           </a:prstGeom>
           <a:solidFill>
-            <a:srgbClr val="269CCB"/>
+            <a:srgbClr val="E8F4FA"/>
           </a:solidFill>
           <a:ln>
             <a:noFill/>
@@ -10633,14 +9976,59 @@
       </p:sp>
       <p:sp>
         <p:nvSpPr>
-          <p:cNvPr id="8" name="TextBox 7"/>
+          <p:cNvPr id="10" name="Rounded Rectangle 9"/>
+          <p:cNvSpPr/>
+          <p:nvPr/>
+        </p:nvSpPr>
+        <p:spPr>
+          <a:xfrm>
+            <a:off x="594360" y="3003804"/>
+            <a:ext cx="438912" cy="438912"/>
+          </a:xfrm>
+          <a:prstGeom prst="roundRect">
+            <a:avLst>
+              <a:gd name="adj" fmla="val 12000"/>
+            </a:avLst>
+          </a:prstGeom>
+          <a:solidFill>
+            <a:srgbClr val="095292"/>
+          </a:solidFill>
+          <a:ln>
+            <a:noFill/>
+          </a:ln>
+        </p:spPr>
+        <p:style>
+          <a:lnRef idx="1">
+            <a:schemeClr val="accent1"/>
+          </a:lnRef>
+          <a:fillRef idx="3">
+            <a:schemeClr val="accent1"/>
+          </a:fillRef>
+          <a:effectRef idx="2">
+            <a:schemeClr val="accent1"/>
+          </a:effectRef>
+          <a:fontRef idx="minor">
+            <a:schemeClr val="lt1"/>
+          </a:fontRef>
+        </p:style>
+        <p:txBody>
+          <a:bodyPr rtlCol="0" anchor="ctr"/>
+          <a:lstStyle/>
+          <a:p>
+            <a:pPr algn="ctr"/>
+          </a:p>
+        </p:txBody>
+      </p:sp>
+      <p:sp>
+        <p:nvSpPr>
+          <p:cNvPr id="11" name="TextBox 10"/>
           <p:cNvSpPr txBox="1"/>
           <p:nvPr/>
         </p:nvSpPr>
         <p:spPr>
           <a:xfrm>
-            <a:off x="1097280" y="1353312"/>
-            <a:ext cx="10362895" cy="402336"/>
+            <a:off x="594360" y="3003804"/>
+            <a:ext cx="438912" cy="438912"/>
           </a:xfrm>
           <a:prstGeom prst="rect">
             <a:avLst/>
@@ -10651,28 +10039,61 @@
           <a:bodyPr wrap="square" anchor="ctr"/>
           <a:lstStyle/>
           <a:p>
-            <a:r>
-              <a:rPr sz="1500" b="0" i="0">
-                <a:solidFill>
-                  <a:srgbClr val="333333"/>
-                </a:solidFill>
-                <a:latin typeface="Calibri"/>
-              </a:rPr>
-              <a:t>□ Si con evidencia?</a:t>
-            </a:r>
-          </a:p>
-        </p:txBody>
-      </p:sp>
-      <p:sp>
-        <p:nvSpPr>
-          <p:cNvPr id="9" name="Rounded Rectangle 8"/>
+            <a:pPr algn="ctr"/>
+            <a:r>
+              <a:rPr sz="1600" b="1" i="0">
+                <a:solidFill>
+                  <a:srgbClr val="FFFFFF"/>
+                </a:solidFill>
+                <a:latin typeface="Calibri"/>
+              </a:rPr>
+              <a:t>2</a:t>
+            </a:r>
+          </a:p>
+        </p:txBody>
+      </p:sp>
+      <p:sp>
+        <p:nvSpPr>
+          <p:cNvPr id="12" name="TextBox 11"/>
+          <p:cNvSpPr txBox="1"/>
+          <p:nvPr/>
+        </p:nvSpPr>
+        <p:spPr>
+          <a:xfrm>
+            <a:off x="1188720" y="2788920"/>
+            <a:ext cx="10271455" cy="886968"/>
+          </a:xfrm>
+          <a:prstGeom prst="rect">
+            <a:avLst/>
+          </a:prstGeom>
+          <a:noFill/>
+        </p:spPr>
+        <p:txBody>
+          <a:bodyPr wrap="square" anchor="ctr"/>
+          <a:lstStyle/>
+          <a:p>
+            <a:r>
+              <a:rPr sz="1500" b="1" i="0">
+                <a:solidFill>
+                  <a:srgbClr val="095292"/>
+                </a:solidFill>
+                <a:latin typeface="Calibri"/>
+              </a:rPr>
+              <a:t>Demo 3-5 min: ER + 1 proc + 1 trigger.</a:t>
+            </a:r>
+          </a:p>
+        </p:txBody>
+      </p:sp>
+      <p:sp>
+        <p:nvSpPr>
+          <p:cNvPr id="13" name="Rounded Rectangle 12"/>
           <p:cNvSpPr/>
           <p:nvPr/>
         </p:nvSpPr>
         <p:spPr>
           <a:xfrm>
-            <a:off x="457200" y="1938528"/>
-            <a:ext cx="11277295" cy="566928"/>
+            <a:off x="457200" y="3840480"/>
+            <a:ext cx="11277295" cy="1051560"/>
           </a:xfrm>
           <a:prstGeom prst="roundRect">
             <a:avLst>
@@ -10710,25 +10131,25 @@
       </p:sp>
       <p:sp>
         <p:nvSpPr>
-          <p:cNvPr id="10" name="Rectangle 9"/>
+          <p:cNvPr id="14" name="Rounded Rectangle 13"/>
           <p:cNvSpPr/>
           <p:nvPr/>
         </p:nvSpPr>
         <p:spPr>
           <a:xfrm>
-            <a:off x="640080" y="2084832"/>
-            <a:ext cx="274320" cy="274320"/>
-          </a:xfrm>
-          <a:prstGeom prst="rect">
-            <a:avLst/>
+            <a:off x="594360" y="4146804"/>
+            <a:ext cx="438912" cy="438912"/>
+          </a:xfrm>
+          <a:prstGeom prst="roundRect">
+            <a:avLst>
+              <a:gd name="adj" fmla="val 12000"/>
+            </a:avLst>
           </a:prstGeom>
           <a:solidFill>
-            <a:srgbClr val="FFFFFF"/>
+            <a:srgbClr val="095292"/>
           </a:solidFill>
           <a:ln>
-            <a:solidFill>
-              <a:srgbClr val="333333"/>
-            </a:solidFill>
+            <a:noFill/>
           </a:ln>
         </p:spPr>
         <p:style>
@@ -10755,20 +10176,87 @@
       </p:sp>
       <p:sp>
         <p:nvSpPr>
-          <p:cNvPr id="11" name="Rectangle 10"/>
+          <p:cNvPr id="15" name="TextBox 14"/>
+          <p:cNvSpPr txBox="1"/>
+          <p:nvPr/>
+        </p:nvSpPr>
+        <p:spPr>
+          <a:xfrm>
+            <a:off x="594360" y="4146804"/>
+            <a:ext cx="438912" cy="438912"/>
+          </a:xfrm>
+          <a:prstGeom prst="rect">
+            <a:avLst/>
+          </a:prstGeom>
+          <a:noFill/>
+        </p:spPr>
+        <p:txBody>
+          <a:bodyPr wrap="square" anchor="ctr"/>
+          <a:lstStyle/>
+          <a:p>
+            <a:pPr algn="ctr"/>
+            <a:r>
+              <a:rPr sz="1600" b="1" i="0">
+                <a:solidFill>
+                  <a:srgbClr val="FFFFFF"/>
+                </a:solidFill>
+                <a:latin typeface="Calibri"/>
+              </a:rPr>
+              <a:t>3</a:t>
+            </a:r>
+          </a:p>
+        </p:txBody>
+      </p:sp>
+      <p:sp>
+        <p:nvSpPr>
+          <p:cNvPr id="16" name="TextBox 15"/>
+          <p:cNvSpPr txBox="1"/>
+          <p:nvPr/>
+        </p:nvSpPr>
+        <p:spPr>
+          <a:xfrm>
+            <a:off x="1188720" y="3931920"/>
+            <a:ext cx="10271455" cy="886968"/>
+          </a:xfrm>
+          <a:prstGeom prst="rect">
+            <a:avLst/>
+          </a:prstGeom>
+          <a:noFill/>
+        </p:spPr>
+        <p:txBody>
+          <a:bodyPr wrap="square" anchor="ctr"/>
+          <a:lstStyle/>
+          <a:p>
+            <a:r>
+              <a:rPr sz="1500" b="1" i="0">
+                <a:solidFill>
+                  <a:srgbClr val="095292"/>
+                </a:solidFill>
+                <a:latin typeface="Calibri"/>
+              </a:rPr>
+              <a:t>Lista de gaps con responsable.</a:t>
+            </a:r>
+          </a:p>
+        </p:txBody>
+      </p:sp>
+      <p:sp>
+        <p:nvSpPr>
+          <p:cNvPr id="17" name="Rounded Rectangle 16"/>
           <p:cNvSpPr/>
           <p:nvPr/>
         </p:nvSpPr>
         <p:spPr>
           <a:xfrm>
-            <a:off x="640080" y="2084832"/>
-            <a:ext cx="73152" cy="274320"/>
-          </a:xfrm>
-          <a:prstGeom prst="rect">
-            <a:avLst/>
+            <a:off x="457200" y="4983480"/>
+            <a:ext cx="11277295" cy="1051560"/>
+          </a:xfrm>
+          <a:prstGeom prst="roundRect">
+            <a:avLst>
+              <a:gd name="adj" fmla="val 12000"/>
+            </a:avLst>
           </a:prstGeom>
           <a:solidFill>
-            <a:srgbClr val="269CCB"/>
+            <a:srgbClr val="E8F4FA"/>
           </a:solidFill>
           <a:ln>
             <a:noFill/>
@@ -10798,46 +10286,14 @@
       </p:sp>
       <p:sp>
         <p:nvSpPr>
-          <p:cNvPr id="12" name="TextBox 11"/>
-          <p:cNvSpPr txBox="1"/>
-          <p:nvPr/>
-        </p:nvSpPr>
-        <p:spPr>
-          <a:xfrm>
-            <a:off x="1097280" y="2029968"/>
-            <a:ext cx="10362895" cy="402336"/>
-          </a:xfrm>
-          <a:prstGeom prst="rect">
-            <a:avLst/>
-          </a:prstGeom>
-          <a:noFill/>
-        </p:spPr>
-        <p:txBody>
-          <a:bodyPr wrap="square" anchor="ctr"/>
-          <a:lstStyle/>
-          <a:p>
-            <a:r>
-              <a:rPr sz="1500" b="0" i="0">
-                <a:solidFill>
-                  <a:srgbClr val="333333"/>
-                </a:solidFill>
-                <a:latin typeface="Calibri"/>
-              </a:rPr>
-              <a:t>□ Gaps con dueño?</a:t>
-            </a:r>
-          </a:p>
-        </p:txBody>
-      </p:sp>
-      <p:sp>
-        <p:nvSpPr>
-          <p:cNvPr id="13" name="Rounded Rectangle 12"/>
+          <p:cNvPr id="18" name="Rounded Rectangle 17"/>
           <p:cNvSpPr/>
           <p:nvPr/>
         </p:nvSpPr>
         <p:spPr>
           <a:xfrm>
-            <a:off x="457200" y="2615184"/>
-            <a:ext cx="11277295" cy="566928"/>
+            <a:off x="594360" y="5289804"/>
+            <a:ext cx="438912" cy="438912"/>
           </a:xfrm>
           <a:prstGeom prst="roundRect">
             <a:avLst>
@@ -10845,7 +10301,7 @@
             </a:avLst>
           </a:prstGeom>
           <a:solidFill>
-            <a:srgbClr val="F2F2F2"/>
+            <a:srgbClr val="095292"/>
           </a:solidFill>
           <a:ln>
             <a:noFill/>
@@ -10875,102 +10331,47 @@
       </p:sp>
       <p:sp>
         <p:nvSpPr>
-          <p:cNvPr id="14" name="Rectangle 13"/>
-          <p:cNvSpPr/>
-          <p:nvPr/>
-        </p:nvSpPr>
-        <p:spPr>
-          <a:xfrm>
-            <a:off x="640080" y="2761488"/>
-            <a:ext cx="274320" cy="274320"/>
-          </a:xfrm>
-          <a:prstGeom prst="rect">
-            <a:avLst/>
-          </a:prstGeom>
-          <a:solidFill>
-            <a:srgbClr val="FFFFFF"/>
-          </a:solidFill>
-          <a:ln>
-            <a:solidFill>
-              <a:srgbClr val="333333"/>
-            </a:solidFill>
-          </a:ln>
-        </p:spPr>
-        <p:style>
-          <a:lnRef idx="1">
-            <a:schemeClr val="accent1"/>
-          </a:lnRef>
-          <a:fillRef idx="3">
-            <a:schemeClr val="accent1"/>
-          </a:fillRef>
-          <a:effectRef idx="2">
-            <a:schemeClr val="accent1"/>
-          </a:effectRef>
-          <a:fontRef idx="minor">
-            <a:schemeClr val="lt1"/>
-          </a:fontRef>
-        </p:style>
-        <p:txBody>
-          <a:bodyPr rtlCol="0" anchor="ctr"/>
+          <p:cNvPr id="19" name="TextBox 18"/>
+          <p:cNvSpPr txBox="1"/>
+          <p:nvPr/>
+        </p:nvSpPr>
+        <p:spPr>
+          <a:xfrm>
+            <a:off x="594360" y="5289804"/>
+            <a:ext cx="438912" cy="438912"/>
+          </a:xfrm>
+          <a:prstGeom prst="rect">
+            <a:avLst/>
+          </a:prstGeom>
+          <a:noFill/>
+        </p:spPr>
+        <p:txBody>
+          <a:bodyPr wrap="square" anchor="ctr"/>
           <a:lstStyle/>
           <a:p>
             <a:pPr algn="ctr"/>
-          </a:p>
-        </p:txBody>
-      </p:sp>
-      <p:sp>
-        <p:nvSpPr>
-          <p:cNvPr id="15" name="Rectangle 14"/>
-          <p:cNvSpPr/>
-          <p:nvPr/>
-        </p:nvSpPr>
-        <p:spPr>
-          <a:xfrm>
-            <a:off x="640080" y="2761488"/>
-            <a:ext cx="73152" cy="274320"/>
-          </a:xfrm>
-          <a:prstGeom prst="rect">
-            <a:avLst/>
-          </a:prstGeom>
-          <a:solidFill>
-            <a:srgbClr val="269CCB"/>
-          </a:solidFill>
-          <a:ln>
-            <a:noFill/>
-          </a:ln>
-        </p:spPr>
-        <p:style>
-          <a:lnRef idx="1">
-            <a:schemeClr val="accent1"/>
-          </a:lnRef>
-          <a:fillRef idx="3">
-            <a:schemeClr val="accent1"/>
-          </a:fillRef>
-          <a:effectRef idx="2">
-            <a:schemeClr val="accent1"/>
-          </a:effectRef>
-          <a:fontRef idx="minor">
-            <a:schemeClr val="lt1"/>
-          </a:fontRef>
-        </p:style>
-        <p:txBody>
-          <a:bodyPr rtlCol="0" anchor="ctr"/>
-          <a:lstStyle/>
-          <a:p>
-            <a:pPr algn="ctr"/>
-          </a:p>
-        </p:txBody>
-      </p:sp>
-      <p:sp>
-        <p:nvSpPr>
-          <p:cNvPr id="16" name="TextBox 15"/>
+            <a:r>
+              <a:rPr sz="1600" b="1" i="0">
+                <a:solidFill>
+                  <a:srgbClr val="FFFFFF"/>
+                </a:solidFill>
+                <a:latin typeface="Calibri"/>
+              </a:rPr>
+              <a:t>4</a:t>
+            </a:r>
+          </a:p>
+        </p:txBody>
+      </p:sp>
+      <p:sp>
+        <p:nvSpPr>
+          <p:cNvPr id="20" name="TextBox 19"/>
           <p:cNvSpPr txBox="1"/>
           <p:nvPr/>
         </p:nvSpPr>
         <p:spPr>
           <a:xfrm>
-            <a:off x="1097280" y="2706624"/>
-            <a:ext cx="10362895" cy="402336"/>
+            <a:off x="1188720" y="5074920"/>
+            <a:ext cx="10271455" cy="886968"/>
           </a:xfrm>
           <a:prstGeom prst="rect">
             <a:avLst/>
@@ -10982,20 +10383,20 @@
           <a:lstStyle/>
           <a:p>
             <a:r>
-              <a:rPr sz="1500" b="0" i="0">
-                <a:solidFill>
-                  <a:srgbClr val="333333"/>
-                </a:solidFill>
-                <a:latin typeface="Calibri"/>
-              </a:rPr>
-              <a:t>□ Demo &lt;=5 min?</a:t>
-            </a:r>
-          </a:p>
-        </p:txBody>
-      </p:sp>
-      <p:sp>
-        <p:nvSpPr>
-          <p:cNvPr id="17" name="TextBox 16"/>
+              <a:rPr sz="1500" b="1" i="0">
+                <a:solidFill>
+                  <a:srgbClr val="095292"/>
+                </a:solidFill>
+                <a:latin typeface="Calibri"/>
+              </a:rPr>
+              <a:t>Subir avance intermedio a la plataforma del curso (Talleres) si se pide.</a:t>
+            </a:r>
+          </a:p>
+        </p:txBody>
+      </p:sp>
+      <p:sp>
+        <p:nvSpPr>
+          <p:cNvPr id="21" name="TextBox 20"/>
           <p:cNvSpPr txBox="1"/>
           <p:nvPr/>
         </p:nvSpPr>
@@ -11169,21 +10570,154 @@
                 </a:solidFill>
                 <a:latin typeface="Calibri"/>
               </a:rPr>
-              <a:t>Criterios de exito / entregable</a:t>
-            </a:r>
-          </a:p>
-        </p:txBody>
-      </p:sp>
-      <p:sp>
-        <p:nvSpPr>
-          <p:cNvPr id="5" name="TextBox 4"/>
+              <a:t>Taller PI VetCare — pistas (checklist vacio)</a:t>
+            </a:r>
+          </a:p>
+        </p:txBody>
+      </p:sp>
+      <p:sp>
+        <p:nvSpPr>
+          <p:cNvPr id="5" name="Rounded Rectangle 4"/>
+          <p:cNvSpPr/>
+          <p:nvPr/>
+        </p:nvSpPr>
+        <p:spPr>
+          <a:xfrm>
+            <a:off x="457200" y="1261872"/>
+            <a:ext cx="11277295" cy="566928"/>
+          </a:xfrm>
+          <a:prstGeom prst="roundRect">
+            <a:avLst>
+              <a:gd name="adj" fmla="val 12000"/>
+            </a:avLst>
+          </a:prstGeom>
+          <a:solidFill>
+            <a:srgbClr val="F2F2F2"/>
+          </a:solidFill>
+          <a:ln>
+            <a:noFill/>
+          </a:ln>
+        </p:spPr>
+        <p:style>
+          <a:lnRef idx="1">
+            <a:schemeClr val="accent1"/>
+          </a:lnRef>
+          <a:fillRef idx="3">
+            <a:schemeClr val="accent1"/>
+          </a:fillRef>
+          <a:effectRef idx="2">
+            <a:schemeClr val="accent1"/>
+          </a:effectRef>
+          <a:fontRef idx="minor">
+            <a:schemeClr val="lt1"/>
+          </a:fontRef>
+        </p:style>
+        <p:txBody>
+          <a:bodyPr rtlCol="0" anchor="ctr"/>
+          <a:lstStyle/>
+          <a:p>
+            <a:pPr algn="ctr"/>
+          </a:p>
+        </p:txBody>
+      </p:sp>
+      <p:sp>
+        <p:nvSpPr>
+          <p:cNvPr id="6" name="Rectangle 5"/>
+          <p:cNvSpPr/>
+          <p:nvPr/>
+        </p:nvSpPr>
+        <p:spPr>
+          <a:xfrm>
+            <a:off x="640080" y="1408175"/>
+            <a:ext cx="274320" cy="274320"/>
+          </a:xfrm>
+          <a:prstGeom prst="rect">
+            <a:avLst/>
+          </a:prstGeom>
+          <a:solidFill>
+            <a:srgbClr val="FFFFFF"/>
+          </a:solidFill>
+          <a:ln>
+            <a:solidFill>
+              <a:srgbClr val="333333"/>
+            </a:solidFill>
+          </a:ln>
+        </p:spPr>
+        <p:style>
+          <a:lnRef idx="1">
+            <a:schemeClr val="accent1"/>
+          </a:lnRef>
+          <a:fillRef idx="3">
+            <a:schemeClr val="accent1"/>
+          </a:fillRef>
+          <a:effectRef idx="2">
+            <a:schemeClr val="accent1"/>
+          </a:effectRef>
+          <a:fontRef idx="minor">
+            <a:schemeClr val="lt1"/>
+          </a:fontRef>
+        </p:style>
+        <p:txBody>
+          <a:bodyPr rtlCol="0" anchor="ctr"/>
+          <a:lstStyle/>
+          <a:p>
+            <a:pPr algn="ctr"/>
+          </a:p>
+        </p:txBody>
+      </p:sp>
+      <p:sp>
+        <p:nvSpPr>
+          <p:cNvPr id="7" name="Rectangle 6"/>
+          <p:cNvSpPr/>
+          <p:nvPr/>
+        </p:nvSpPr>
+        <p:spPr>
+          <a:xfrm>
+            <a:off x="640080" y="1408175"/>
+            <a:ext cx="73152" cy="274320"/>
+          </a:xfrm>
+          <a:prstGeom prst="rect">
+            <a:avLst/>
+          </a:prstGeom>
+          <a:solidFill>
+            <a:srgbClr val="269CCB"/>
+          </a:solidFill>
+          <a:ln>
+            <a:noFill/>
+          </a:ln>
+        </p:spPr>
+        <p:style>
+          <a:lnRef idx="1">
+            <a:schemeClr val="accent1"/>
+          </a:lnRef>
+          <a:fillRef idx="3">
+            <a:schemeClr val="accent1"/>
+          </a:fillRef>
+          <a:effectRef idx="2">
+            <a:schemeClr val="accent1"/>
+          </a:effectRef>
+          <a:fontRef idx="minor">
+            <a:schemeClr val="lt1"/>
+          </a:fontRef>
+        </p:style>
+        <p:txBody>
+          <a:bodyPr rtlCol="0" anchor="ctr"/>
+          <a:lstStyle/>
+          <a:p>
+            <a:pPr algn="ctr"/>
+          </a:p>
+        </p:txBody>
+      </p:sp>
+      <p:sp>
+        <p:nvSpPr>
+          <p:cNvPr id="8" name="TextBox 7"/>
           <p:cNvSpPr txBox="1"/>
           <p:nvPr/>
         </p:nvSpPr>
         <p:spPr>
           <a:xfrm>
-            <a:off x="457200" y="1170432"/>
-            <a:ext cx="11277295" cy="5230368"/>
+            <a:off x="1097280" y="1353312"/>
+            <a:ext cx="10362895" cy="402336"/>
           </a:xfrm>
           <a:prstGeom prst="rect">
             <a:avLst/>
@@ -11191,131 +10725,354 @@
           <a:noFill/>
         </p:spPr>
         <p:txBody>
-          <a:bodyPr wrap="square">
-            <a:spAutoFit/>
-          </a:bodyPr>
-          <a:lstStyle/>
-          <a:p>
-            <a:pPr>
-              <a:spcAft>
-                <a:spcPts val="800"/>
-              </a:spcAft>
-            </a:pPr>
-            <a:r>
-              <a:rPr sz="2000" b="0" i="0">
+          <a:bodyPr wrap="square" anchor="ctr"/>
+          <a:lstStyle/>
+          <a:p>
+            <a:r>
+              <a:rPr sz="1500" b="0" i="0">
                 <a:solidFill>
                   <a:srgbClr val="333333"/>
                 </a:solidFill>
                 <a:latin typeface="Calibri"/>
               </a:rPr>
-              <a:t>–   </a:t>
-            </a:r>
-            <a:r>
-              <a:rPr sz="2000" b="1" i="0">
+              <a:t>□ Si con evidencia?</a:t>
+            </a:r>
+          </a:p>
+        </p:txBody>
+      </p:sp>
+      <p:sp>
+        <p:nvSpPr>
+          <p:cNvPr id="9" name="Rounded Rectangle 8"/>
+          <p:cNvSpPr/>
+          <p:nvPr/>
+        </p:nvSpPr>
+        <p:spPr>
+          <a:xfrm>
+            <a:off x="457200" y="1938528"/>
+            <a:ext cx="11277295" cy="566928"/>
+          </a:xfrm>
+          <a:prstGeom prst="roundRect">
+            <a:avLst>
+              <a:gd name="adj" fmla="val 12000"/>
+            </a:avLst>
+          </a:prstGeom>
+          <a:solidFill>
+            <a:srgbClr val="F2F2F2"/>
+          </a:solidFill>
+          <a:ln>
+            <a:noFill/>
+          </a:ln>
+        </p:spPr>
+        <p:style>
+          <a:lnRef idx="1">
+            <a:schemeClr val="accent1"/>
+          </a:lnRef>
+          <a:fillRef idx="3">
+            <a:schemeClr val="accent1"/>
+          </a:fillRef>
+          <a:effectRef idx="2">
+            <a:schemeClr val="accent1"/>
+          </a:effectRef>
+          <a:fontRef idx="minor">
+            <a:schemeClr val="lt1"/>
+          </a:fontRef>
+        </p:style>
+        <p:txBody>
+          <a:bodyPr rtlCol="0" anchor="ctr"/>
+          <a:lstStyle/>
+          <a:p>
+            <a:pPr algn="ctr"/>
+          </a:p>
+        </p:txBody>
+      </p:sp>
+      <p:sp>
+        <p:nvSpPr>
+          <p:cNvPr id="10" name="Rectangle 9"/>
+          <p:cNvSpPr/>
+          <p:nvPr/>
+        </p:nvSpPr>
+        <p:spPr>
+          <a:xfrm>
+            <a:off x="640080" y="2084832"/>
+            <a:ext cx="274320" cy="274320"/>
+          </a:xfrm>
+          <a:prstGeom prst="rect">
+            <a:avLst/>
+          </a:prstGeom>
+          <a:solidFill>
+            <a:srgbClr val="FFFFFF"/>
+          </a:solidFill>
+          <a:ln>
+            <a:solidFill>
+              <a:srgbClr val="333333"/>
+            </a:solidFill>
+          </a:ln>
+        </p:spPr>
+        <p:style>
+          <a:lnRef idx="1">
+            <a:schemeClr val="accent1"/>
+          </a:lnRef>
+          <a:fillRef idx="3">
+            <a:schemeClr val="accent1"/>
+          </a:fillRef>
+          <a:effectRef idx="2">
+            <a:schemeClr val="accent1"/>
+          </a:effectRef>
+          <a:fontRef idx="minor">
+            <a:schemeClr val="lt1"/>
+          </a:fontRef>
+        </p:style>
+        <p:txBody>
+          <a:bodyPr rtlCol="0" anchor="ctr"/>
+          <a:lstStyle/>
+          <a:p>
+            <a:pPr algn="ctr"/>
+          </a:p>
+        </p:txBody>
+      </p:sp>
+      <p:sp>
+        <p:nvSpPr>
+          <p:cNvPr id="11" name="Rectangle 10"/>
+          <p:cNvSpPr/>
+          <p:nvPr/>
+        </p:nvSpPr>
+        <p:spPr>
+          <a:xfrm>
+            <a:off x="640080" y="2084832"/>
+            <a:ext cx="73152" cy="274320"/>
+          </a:xfrm>
+          <a:prstGeom prst="rect">
+            <a:avLst/>
+          </a:prstGeom>
+          <a:solidFill>
+            <a:srgbClr val="269CCB"/>
+          </a:solidFill>
+          <a:ln>
+            <a:noFill/>
+          </a:ln>
+        </p:spPr>
+        <p:style>
+          <a:lnRef idx="1">
+            <a:schemeClr val="accent1"/>
+          </a:lnRef>
+          <a:fillRef idx="3">
+            <a:schemeClr val="accent1"/>
+          </a:fillRef>
+          <a:effectRef idx="2">
+            <a:schemeClr val="accent1"/>
+          </a:effectRef>
+          <a:fontRef idx="minor">
+            <a:schemeClr val="lt1"/>
+          </a:fontRef>
+        </p:style>
+        <p:txBody>
+          <a:bodyPr rtlCol="0" anchor="ctr"/>
+          <a:lstStyle/>
+          <a:p>
+            <a:pPr algn="ctr"/>
+          </a:p>
+        </p:txBody>
+      </p:sp>
+      <p:sp>
+        <p:nvSpPr>
+          <p:cNvPr id="12" name="TextBox 11"/>
+          <p:cNvSpPr txBox="1"/>
+          <p:nvPr/>
+        </p:nvSpPr>
+        <p:spPr>
+          <a:xfrm>
+            <a:off x="1097280" y="2029968"/>
+            <a:ext cx="10362895" cy="402336"/>
+          </a:xfrm>
+          <a:prstGeom prst="rect">
+            <a:avLst/>
+          </a:prstGeom>
+          <a:noFill/>
+        </p:spPr>
+        <p:txBody>
+          <a:bodyPr wrap="square" anchor="ctr"/>
+          <a:lstStyle/>
+          <a:p>
+            <a:r>
+              <a:rPr sz="1500" b="0" i="0">
                 <a:solidFill>
                   <a:srgbClr val="333333"/>
                 </a:solidFill>
                 <a:latin typeface="Calibri"/>
               </a:rPr>
-              <a:t>Entregable:</a:t>
-            </a:r>
-            <a:r>
-              <a:rPr sz="2000" b="0" i="0">
+              <a:t>□ Gaps con dueño?</a:t>
+            </a:r>
+          </a:p>
+        </p:txBody>
+      </p:sp>
+      <p:sp>
+        <p:nvSpPr>
+          <p:cNvPr id="13" name="Rounded Rectangle 12"/>
+          <p:cNvSpPr/>
+          <p:nvPr/>
+        </p:nvSpPr>
+        <p:spPr>
+          <a:xfrm>
+            <a:off x="457200" y="2615184"/>
+            <a:ext cx="11277295" cy="566928"/>
+          </a:xfrm>
+          <a:prstGeom prst="roundRect">
+            <a:avLst>
+              <a:gd name="adj" fmla="val 12000"/>
+            </a:avLst>
+          </a:prstGeom>
+          <a:solidFill>
+            <a:srgbClr val="F2F2F2"/>
+          </a:solidFill>
+          <a:ln>
+            <a:noFill/>
+          </a:ln>
+        </p:spPr>
+        <p:style>
+          <a:lnRef idx="1">
+            <a:schemeClr val="accent1"/>
+          </a:lnRef>
+          <a:fillRef idx="3">
+            <a:schemeClr val="accent1"/>
+          </a:fillRef>
+          <a:effectRef idx="2">
+            <a:schemeClr val="accent1"/>
+          </a:effectRef>
+          <a:fontRef idx="minor">
+            <a:schemeClr val="lt1"/>
+          </a:fontRef>
+        </p:style>
+        <p:txBody>
+          <a:bodyPr rtlCol="0" anchor="ctr"/>
+          <a:lstStyle/>
+          <a:p>
+            <a:pPr algn="ctr"/>
+          </a:p>
+        </p:txBody>
+      </p:sp>
+      <p:sp>
+        <p:nvSpPr>
+          <p:cNvPr id="14" name="Rectangle 13"/>
+          <p:cNvSpPr/>
+          <p:nvPr/>
+        </p:nvSpPr>
+        <p:spPr>
+          <a:xfrm>
+            <a:off x="640080" y="2761488"/>
+            <a:ext cx="274320" cy="274320"/>
+          </a:xfrm>
+          <a:prstGeom prst="rect">
+            <a:avLst/>
+          </a:prstGeom>
+          <a:solidFill>
+            <a:srgbClr val="FFFFFF"/>
+          </a:solidFill>
+          <a:ln>
+            <a:solidFill>
+              <a:srgbClr val="333333"/>
+            </a:solidFill>
+          </a:ln>
+        </p:spPr>
+        <p:style>
+          <a:lnRef idx="1">
+            <a:schemeClr val="accent1"/>
+          </a:lnRef>
+          <a:fillRef idx="3">
+            <a:schemeClr val="accent1"/>
+          </a:fillRef>
+          <a:effectRef idx="2">
+            <a:schemeClr val="accent1"/>
+          </a:effectRef>
+          <a:fontRef idx="minor">
+            <a:schemeClr val="lt1"/>
+          </a:fontRef>
+        </p:style>
+        <p:txBody>
+          <a:bodyPr rtlCol="0" anchor="ctr"/>
+          <a:lstStyle/>
+          <a:p>
+            <a:pPr algn="ctr"/>
+          </a:p>
+        </p:txBody>
+      </p:sp>
+      <p:sp>
+        <p:nvSpPr>
+          <p:cNvPr id="15" name="Rectangle 14"/>
+          <p:cNvSpPr/>
+          <p:nvPr/>
+        </p:nvSpPr>
+        <p:spPr>
+          <a:xfrm>
+            <a:off x="640080" y="2761488"/>
+            <a:ext cx="73152" cy="274320"/>
+          </a:xfrm>
+          <a:prstGeom prst="rect">
+            <a:avLst/>
+          </a:prstGeom>
+          <a:solidFill>
+            <a:srgbClr val="269CCB"/>
+          </a:solidFill>
+          <a:ln>
+            <a:noFill/>
+          </a:ln>
+        </p:spPr>
+        <p:style>
+          <a:lnRef idx="1">
+            <a:schemeClr val="accent1"/>
+          </a:lnRef>
+          <a:fillRef idx="3">
+            <a:schemeClr val="accent1"/>
+          </a:fillRef>
+          <a:effectRef idx="2">
+            <a:schemeClr val="accent1"/>
+          </a:effectRef>
+          <a:fontRef idx="minor">
+            <a:schemeClr val="lt1"/>
+          </a:fontRef>
+        </p:style>
+        <p:txBody>
+          <a:bodyPr rtlCol="0" anchor="ctr"/>
+          <a:lstStyle/>
+          <a:p>
+            <a:pPr algn="ctr"/>
+          </a:p>
+        </p:txBody>
+      </p:sp>
+      <p:sp>
+        <p:nvSpPr>
+          <p:cNvPr id="16" name="TextBox 15"/>
+          <p:cNvSpPr txBox="1"/>
+          <p:nvPr/>
+        </p:nvSpPr>
+        <p:spPr>
+          <a:xfrm>
+            <a:off x="1097280" y="2706624"/>
+            <a:ext cx="10362895" cy="402336"/>
+          </a:xfrm>
+          <a:prstGeom prst="rect">
+            <a:avLst/>
+          </a:prstGeom>
+          <a:noFill/>
+        </p:spPr>
+        <p:txBody>
+          <a:bodyPr wrap="square" anchor="ctr"/>
+          <a:lstStyle/>
+          <a:p>
+            <a:r>
+              <a:rPr sz="1500" b="0" i="0">
                 <a:solidFill>
                   <a:srgbClr val="333333"/>
                 </a:solidFill>
                 <a:latin typeface="Calibri"/>
               </a:rPr>
-              <a:t> Checklist firmada + enlace/ZIP avance (DDL+procs+ER)</a:t>
-            </a:r>
-          </a:p>
-          <a:p>
-            <a:pPr>
-              <a:spcAft>
-                <a:spcPts val="800"/>
-              </a:spcAft>
-            </a:pPr>
-            <a:r>
-              <a:rPr sz="2000" b="0" i="0">
-                <a:solidFill>
-                  <a:srgbClr val="333333"/>
-                </a:solidFill>
-                <a:latin typeface="Calibri"/>
-              </a:rPr>
-              <a:t>–   Evidencia: el SQL y su salida quedan guardados en cada pregunta de la plataforma del curso.</a:t>
-            </a:r>
-          </a:p>
-          <a:p>
-            <a:pPr>
-              <a:spcAft>
-                <a:spcPts val="800"/>
-              </a:spcAft>
-            </a:pPr>
-            <a:r>
-              <a:rPr sz="2000" b="0" i="0">
-                <a:solidFill>
-                  <a:srgbClr val="333333"/>
-                </a:solidFill>
-                <a:latin typeface="Calibri"/>
-              </a:rPr>
-              <a:t>–   Conserva copia en tu carpeta del PI (los .sql que pide el entregable).</a:t>
-            </a:r>
-          </a:p>
-          <a:p>
-            <a:pPr>
-              <a:spcAft>
-                <a:spcPts val="800"/>
-              </a:spcAft>
-            </a:pPr>
-            <a:r>
-              <a:rPr sz="2000" b="0" i="0">
-                <a:solidFill>
-                  <a:srgbClr val="333333"/>
-                </a:solidFill>
-                <a:latin typeface="Calibri"/>
-              </a:rPr>
-              <a:t>–   Actualizar checklist PI (que criterio de rubrica avanzo).</a:t>
-            </a:r>
-          </a:p>
-          <a:p>
-            <a:pPr>
-              <a:spcAft>
-                <a:spcPts val="800"/>
-              </a:spcAft>
-            </a:pPr>
-            <a:r>
-              <a:rPr sz="2000" b="0" i="0">
-                <a:solidFill>
-                  <a:srgbClr val="333333"/>
-                </a:solidFill>
-                <a:latin typeface="Calibri"/>
-              </a:rPr>
-              <a:t>–   </a:t>
-            </a:r>
-            <a:r>
-              <a:rPr sz="2000" b="1" i="0">
-                <a:solidFill>
-                  <a:srgbClr val="333333"/>
-                </a:solidFill>
-                <a:latin typeface="Calibri"/>
-              </a:rPr>
-              <a:t>Entrega en la plataforma del curso</a:t>
-            </a:r>
-            <a:r>
-              <a:rPr sz="2000" b="0" i="0">
-                <a:solidFill>
-                  <a:srgbClr val="333333"/>
-                </a:solidFill>
-                <a:latin typeface="Calibri"/>
-              </a:rPr>
-              <a:t> — en la fecha que indique el docente.</a:t>
-            </a:r>
-          </a:p>
-        </p:txBody>
-      </p:sp>
-      <p:sp>
-        <p:nvSpPr>
-          <p:cNvPr id="6" name="TextBox 5"/>
+              <a:t>□ Demo &lt;=5 min?</a:t>
+            </a:r>
+          </a:p>
+        </p:txBody>
+      </p:sp>
+      <p:sp>
+        <p:nvSpPr>
+          <p:cNvPr id="17" name="TextBox 16"/>
           <p:cNvSpPr txBox="1"/>
           <p:nvPr/>
         </p:nvSpPr>
@@ -11489,109 +11246,21 @@
                 </a:solidFill>
                 <a:latin typeface="Calibri"/>
               </a:rPr>
-              <a:t>Para el PI esta semana</a:t>
-            </a:r>
-          </a:p>
-        </p:txBody>
-      </p:sp>
-      <p:sp>
-        <p:nvSpPr>
-          <p:cNvPr id="5" name="Rounded Rectangle 4"/>
-          <p:cNvSpPr/>
-          <p:nvPr/>
-        </p:nvSpPr>
-        <p:spPr>
-          <a:xfrm>
-            <a:off x="457200" y="1261872"/>
-            <a:ext cx="11277295" cy="1051560"/>
-          </a:xfrm>
-          <a:prstGeom prst="roundRect">
-            <a:avLst>
-              <a:gd name="adj" fmla="val 12000"/>
-            </a:avLst>
-          </a:prstGeom>
-          <a:solidFill>
-            <a:srgbClr val="E8F4FA"/>
-          </a:solidFill>
-          <a:ln>
-            <a:noFill/>
-          </a:ln>
-        </p:spPr>
-        <p:style>
-          <a:lnRef idx="1">
-            <a:schemeClr val="accent1"/>
-          </a:lnRef>
-          <a:fillRef idx="3">
-            <a:schemeClr val="accent1"/>
-          </a:fillRef>
-          <a:effectRef idx="2">
-            <a:schemeClr val="accent1"/>
-          </a:effectRef>
-          <a:fontRef idx="minor">
-            <a:schemeClr val="lt1"/>
-          </a:fontRef>
-        </p:style>
-        <p:txBody>
-          <a:bodyPr rtlCol="0" anchor="ctr"/>
-          <a:lstStyle/>
-          <a:p>
-            <a:pPr algn="ctr"/>
-          </a:p>
-        </p:txBody>
-      </p:sp>
-      <p:sp>
-        <p:nvSpPr>
-          <p:cNvPr id="6" name="Rectangle 5"/>
-          <p:cNvSpPr/>
-          <p:nvPr/>
-        </p:nvSpPr>
-        <p:spPr>
-          <a:xfrm>
-            <a:off x="457200" y="1261872"/>
-            <a:ext cx="128016" cy="1051560"/>
-          </a:xfrm>
-          <a:prstGeom prst="rect">
-            <a:avLst/>
-          </a:prstGeom>
-          <a:solidFill>
-            <a:srgbClr val="269CCB"/>
-          </a:solidFill>
-          <a:ln>
-            <a:noFill/>
-          </a:ln>
-        </p:spPr>
-        <p:style>
-          <a:lnRef idx="1">
-            <a:schemeClr val="accent1"/>
-          </a:lnRef>
-          <a:fillRef idx="3">
-            <a:schemeClr val="accent1"/>
-          </a:fillRef>
-          <a:effectRef idx="2">
-            <a:schemeClr val="accent1"/>
-          </a:effectRef>
-          <a:fontRef idx="minor">
-            <a:schemeClr val="lt1"/>
-          </a:fontRef>
-        </p:style>
-        <p:txBody>
-          <a:bodyPr rtlCol="0" anchor="ctr"/>
-          <a:lstStyle/>
-          <a:p>
-            <a:pPr algn="ctr"/>
-          </a:p>
-        </p:txBody>
-      </p:sp>
-      <p:sp>
-        <p:nvSpPr>
-          <p:cNvPr id="7" name="TextBox 6"/>
+              <a:t>Criterios de exito / entregable</a:t>
+            </a:r>
+          </a:p>
+        </p:txBody>
+      </p:sp>
+      <p:sp>
+        <p:nvSpPr>
+          <p:cNvPr id="5" name="TextBox 4"/>
           <p:cNvSpPr txBox="1"/>
           <p:nvPr/>
         </p:nvSpPr>
         <p:spPr>
           <a:xfrm>
-            <a:off x="777240" y="1399031"/>
-            <a:ext cx="10774375" cy="822959"/>
+            <a:off x="457200" y="1170432"/>
+            <a:ext cx="11277295" cy="5230368"/>
           </a:xfrm>
           <a:prstGeom prst="rect">
             <a:avLst/>
@@ -11604,313 +11273,126 @@
           </a:bodyPr>
           <a:lstStyle/>
           <a:p>
-            <a:r>
-              <a:rPr sz="1200" b="1" i="0">
-                <a:solidFill>
-                  <a:srgbClr val="269CCB"/>
-                </a:solidFill>
-                <a:latin typeface="Calibri"/>
-              </a:rPr>
-              <a:t>Info</a:t>
-            </a:r>
-          </a:p>
-          <a:p>
             <a:pPr>
-              <a:spcBef>
-                <a:spcPts val="400"/>
-              </a:spcBef>
+              <a:spcAft>
+                <a:spcPts val="800"/>
+              </a:spcAft>
             </a:pPr>
             <a:r>
-              <a:rPr sz="1400" b="0" i="0">
+              <a:rPr sz="2000" b="0" i="0">
                 <a:solidFill>
                   <a:srgbClr val="333333"/>
                 </a:solidFill>
                 <a:latin typeface="Calibri"/>
               </a:rPr>
-              <a:t>Hito: Demo parcial + checklist de avance (hito formal PI)</a:t>
-            </a:r>
-          </a:p>
-        </p:txBody>
-      </p:sp>
-      <p:sp>
-        <p:nvSpPr>
-          <p:cNvPr id="8" name="Rounded Rectangle 7"/>
-          <p:cNvSpPr/>
-          <p:nvPr/>
-        </p:nvSpPr>
-        <p:spPr>
-          <a:xfrm>
-            <a:off x="457200" y="2478024"/>
-            <a:ext cx="11277295" cy="1051560"/>
-          </a:xfrm>
-          <a:prstGeom prst="roundRect">
-            <a:avLst>
-              <a:gd name="adj" fmla="val 12000"/>
-            </a:avLst>
-          </a:prstGeom>
-          <a:solidFill>
-            <a:srgbClr val="FFF8E1"/>
-          </a:solidFill>
-          <a:ln>
-            <a:noFill/>
-          </a:ln>
-        </p:spPr>
-        <p:style>
-          <a:lnRef idx="1">
-            <a:schemeClr val="accent1"/>
-          </a:lnRef>
-          <a:fillRef idx="3">
-            <a:schemeClr val="accent1"/>
-          </a:fillRef>
-          <a:effectRef idx="2">
-            <a:schemeClr val="accent1"/>
-          </a:effectRef>
-          <a:fontRef idx="minor">
-            <a:schemeClr val="lt1"/>
-          </a:fontRef>
-        </p:style>
-        <p:txBody>
-          <a:bodyPr rtlCol="0" anchor="ctr"/>
-          <a:lstStyle/>
-          <a:p>
-            <a:pPr algn="ctr"/>
-          </a:p>
-        </p:txBody>
-      </p:sp>
-      <p:sp>
-        <p:nvSpPr>
-          <p:cNvPr id="9" name="Rectangle 8"/>
-          <p:cNvSpPr/>
-          <p:nvPr/>
-        </p:nvSpPr>
-        <p:spPr>
-          <a:xfrm>
-            <a:off x="457200" y="2478024"/>
-            <a:ext cx="128016" cy="1051560"/>
-          </a:xfrm>
-          <a:prstGeom prst="rect">
-            <a:avLst/>
-          </a:prstGeom>
-          <a:solidFill>
-            <a:srgbClr val="FFD000"/>
-          </a:solidFill>
-          <a:ln>
-            <a:noFill/>
-          </a:ln>
-        </p:spPr>
-        <p:style>
-          <a:lnRef idx="1">
-            <a:schemeClr val="accent1"/>
-          </a:lnRef>
-          <a:fillRef idx="3">
-            <a:schemeClr val="accent1"/>
-          </a:fillRef>
-          <a:effectRef idx="2">
-            <a:schemeClr val="accent1"/>
-          </a:effectRef>
-          <a:fontRef idx="minor">
-            <a:schemeClr val="lt1"/>
-          </a:fontRef>
-        </p:style>
-        <p:txBody>
-          <a:bodyPr rtlCol="0" anchor="ctr"/>
-          <a:lstStyle/>
-          <a:p>
-            <a:pPr algn="ctr"/>
-          </a:p>
-        </p:txBody>
-      </p:sp>
-      <p:sp>
-        <p:nvSpPr>
-          <p:cNvPr id="10" name="TextBox 9"/>
-          <p:cNvSpPr txBox="1"/>
-          <p:nvPr/>
-        </p:nvSpPr>
-        <p:spPr>
-          <a:xfrm>
-            <a:off x="777240" y="2615184"/>
-            <a:ext cx="10774375" cy="822959"/>
-          </a:xfrm>
-          <a:prstGeom prst="rect">
-            <a:avLst/>
-          </a:prstGeom>
-          <a:noFill/>
-        </p:spPr>
-        <p:txBody>
-          <a:bodyPr wrap="square">
-            <a:spAutoFit/>
-          </a:bodyPr>
-          <a:lstStyle/>
-          <a:p>
-            <a:r>
-              <a:rPr sz="1200" b="1" i="0">
-                <a:solidFill>
-                  <a:srgbClr val="FFD000"/>
-                </a:solidFill>
-                <a:latin typeface="Calibri"/>
-              </a:rPr>
-              <a:t>Aclaración</a:t>
+              <a:t>–   </a:t>
+            </a:r>
+            <a:r>
+              <a:rPr sz="2000" b="1" i="0">
+                <a:solidFill>
+                  <a:srgbClr val="333333"/>
+                </a:solidFill>
+                <a:latin typeface="Calibri"/>
+              </a:rPr>
+              <a:t>Entregable:</a:t>
+            </a:r>
+            <a:r>
+              <a:rPr sz="2000" b="0" i="0">
+                <a:solidFill>
+                  <a:srgbClr val="333333"/>
+                </a:solidFill>
+                <a:latin typeface="Calibri"/>
+              </a:rPr>
+              <a:t> Checklist firmada + enlace/ZIP avance (DDL+procs+ER)</a:t>
             </a:r>
           </a:p>
           <a:p>
             <a:pPr>
-              <a:spcBef>
-                <a:spcPts val="400"/>
-              </a:spcBef>
+              <a:spcAft>
+                <a:spcPts val="800"/>
+              </a:spcAft>
             </a:pPr>
             <a:r>
-              <a:rPr sz="1400" b="0" i="0">
+              <a:rPr sz="2000" b="0" i="0">
                 <a:solidFill>
                   <a:srgbClr val="333333"/>
                 </a:solidFill>
                 <a:latin typeface="Calibri"/>
               </a:rPr>
-              <a:t>Enunciado completo: Clases/Proyecto Integrador/ (VetCare DB).</a:t>
-            </a:r>
-          </a:p>
-        </p:txBody>
-      </p:sp>
-      <p:sp>
-        <p:nvSpPr>
-          <p:cNvPr id="11" name="Rounded Rectangle 10"/>
-          <p:cNvSpPr/>
-          <p:nvPr/>
-        </p:nvSpPr>
-        <p:spPr>
-          <a:xfrm>
-            <a:off x="457200" y="3694176"/>
-            <a:ext cx="11277295" cy="1051560"/>
-          </a:xfrm>
-          <a:prstGeom prst="roundRect">
-            <a:avLst>
-              <a:gd name="adj" fmla="val 12000"/>
-            </a:avLst>
-          </a:prstGeom>
-          <a:solidFill>
-            <a:srgbClr val="FBE4E4"/>
-          </a:solidFill>
-          <a:ln>
-            <a:noFill/>
-          </a:ln>
-        </p:spPr>
-        <p:style>
-          <a:lnRef idx="1">
-            <a:schemeClr val="accent1"/>
-          </a:lnRef>
-          <a:fillRef idx="3">
-            <a:schemeClr val="accent1"/>
-          </a:fillRef>
-          <a:effectRef idx="2">
-            <a:schemeClr val="accent1"/>
-          </a:effectRef>
-          <a:fontRef idx="minor">
-            <a:schemeClr val="lt1"/>
-          </a:fontRef>
-        </p:style>
-        <p:txBody>
-          <a:bodyPr rtlCol="0" anchor="ctr"/>
-          <a:lstStyle/>
-          <a:p>
-            <a:pPr algn="ctr"/>
-          </a:p>
-        </p:txBody>
-      </p:sp>
-      <p:sp>
-        <p:nvSpPr>
-          <p:cNvPr id="12" name="Rectangle 11"/>
-          <p:cNvSpPr/>
-          <p:nvPr/>
-        </p:nvSpPr>
-        <p:spPr>
-          <a:xfrm>
-            <a:off x="457200" y="3694176"/>
-            <a:ext cx="128016" cy="1051560"/>
-          </a:xfrm>
-          <a:prstGeom prst="rect">
-            <a:avLst/>
-          </a:prstGeom>
-          <a:solidFill>
-            <a:srgbClr val="A02030"/>
-          </a:solidFill>
-          <a:ln>
-            <a:noFill/>
-          </a:ln>
-        </p:spPr>
-        <p:style>
-          <a:lnRef idx="1">
-            <a:schemeClr val="accent1"/>
-          </a:lnRef>
-          <a:fillRef idx="3">
-            <a:schemeClr val="accent1"/>
-          </a:fillRef>
-          <a:effectRef idx="2">
-            <a:schemeClr val="accent1"/>
-          </a:effectRef>
-          <a:fontRef idx="minor">
-            <a:schemeClr val="lt1"/>
-          </a:fontRef>
-        </p:style>
-        <p:txBody>
-          <a:bodyPr rtlCol="0" anchor="ctr"/>
-          <a:lstStyle/>
-          <a:p>
-            <a:pPr algn="ctr"/>
-          </a:p>
-        </p:txBody>
-      </p:sp>
-      <p:sp>
-        <p:nvSpPr>
-          <p:cNvPr id="13" name="TextBox 12"/>
-          <p:cNvSpPr txBox="1"/>
-          <p:nvPr/>
-        </p:nvSpPr>
-        <p:spPr>
-          <a:xfrm>
-            <a:off x="777240" y="3831336"/>
-            <a:ext cx="10774375" cy="822959"/>
-          </a:xfrm>
-          <a:prstGeom prst="rect">
-            <a:avLst/>
-          </a:prstGeom>
-          <a:noFill/>
-        </p:spPr>
-        <p:txBody>
-          <a:bodyPr wrap="square">
-            <a:spAutoFit/>
-          </a:bodyPr>
-          <a:lstStyle/>
-          <a:p>
-            <a:r>
-              <a:rPr sz="1200" b="1" i="0">
-                <a:solidFill>
-                  <a:srgbClr val="A02030"/>
-                </a:solidFill>
-                <a:latin typeface="Calibri"/>
-              </a:rPr>
-              <a:t>Atención</a:t>
+              <a:t>–   Evidencia: el SQL y su salida quedan guardados en cada pregunta de la plataforma del curso.</a:t>
             </a:r>
           </a:p>
           <a:p>
             <a:pPr>
-              <a:spcBef>
-                <a:spcPts val="400"/>
-              </a:spcBef>
+              <a:spcAft>
+                <a:spcPts val="800"/>
+              </a:spcAft>
             </a:pPr>
             <a:r>
-              <a:rPr sz="1400" b="0" i="0">
+              <a:rPr sz="2000" b="0" i="0">
                 <a:solidFill>
                   <a:srgbClr val="333333"/>
                 </a:solidFill>
                 <a:latin typeface="Calibri"/>
               </a:rPr>
-              <a:t>Si el docente asigna taller esta semana, él indica el canal y la fecha.</a:t>
-            </a:r>
-          </a:p>
-        </p:txBody>
-      </p:sp>
-      <p:sp>
-        <p:nvSpPr>
-          <p:cNvPr id="14" name="TextBox 13"/>
+              <a:t>–   Conserva copia en tu carpeta del PI (los .sql que pide el entregable).</a:t>
+            </a:r>
+          </a:p>
+          <a:p>
+            <a:pPr>
+              <a:spcAft>
+                <a:spcPts val="800"/>
+              </a:spcAft>
+            </a:pPr>
+            <a:r>
+              <a:rPr sz="2000" b="0" i="0">
+                <a:solidFill>
+                  <a:srgbClr val="333333"/>
+                </a:solidFill>
+                <a:latin typeface="Calibri"/>
+              </a:rPr>
+              <a:t>–   Actualizar checklist PI (que criterio de rubrica avanzo).</a:t>
+            </a:r>
+          </a:p>
+          <a:p>
+            <a:pPr>
+              <a:spcAft>
+                <a:spcPts val="800"/>
+              </a:spcAft>
+            </a:pPr>
+            <a:r>
+              <a:rPr sz="2000" b="0" i="0">
+                <a:solidFill>
+                  <a:srgbClr val="333333"/>
+                </a:solidFill>
+                <a:latin typeface="Calibri"/>
+              </a:rPr>
+              <a:t>–   </a:t>
+            </a:r>
+            <a:r>
+              <a:rPr sz="2000" b="1" i="0">
+                <a:solidFill>
+                  <a:srgbClr val="333333"/>
+                </a:solidFill>
+                <a:latin typeface="Calibri"/>
+              </a:rPr>
+              <a:t>Entrega en la plataforma del curso</a:t>
+            </a:r>
+            <a:r>
+              <a:rPr sz="2000" b="0" i="0">
+                <a:solidFill>
+                  <a:srgbClr val="333333"/>
+                </a:solidFill>
+                <a:latin typeface="Calibri"/>
+              </a:rPr>
+              <a:t> — en la fecha que indique el docente.</a:t>
+            </a:r>
+          </a:p>
+        </p:txBody>
+      </p:sp>
+      <p:sp>
+        <p:nvSpPr>
+          <p:cNvPr id="6" name="TextBox 5"/>
           <p:cNvSpPr txBox="1"/>
           <p:nvPr/>
         </p:nvSpPr>
@@ -11978,7 +11460,172 @@
         <p:spPr>
           <a:xfrm>
             <a:off x="0" y="0"/>
-            <a:ext cx="12191695" cy="164592"/>
+            <a:ext cx="12191695" cy="960120"/>
+          </a:xfrm>
+          <a:prstGeom prst="rect">
+            <a:avLst/>
+          </a:prstGeom>
+          <a:solidFill>
+            <a:srgbClr val="095292"/>
+          </a:solidFill>
+          <a:ln>
+            <a:noFill/>
+          </a:ln>
+        </p:spPr>
+        <p:style>
+          <a:lnRef idx="1">
+            <a:schemeClr val="accent1"/>
+          </a:lnRef>
+          <a:fillRef idx="3">
+            <a:schemeClr val="accent1"/>
+          </a:fillRef>
+          <a:effectRef idx="2">
+            <a:schemeClr val="accent1"/>
+          </a:effectRef>
+          <a:fontRef idx="minor">
+            <a:schemeClr val="lt1"/>
+          </a:fontRef>
+        </p:style>
+        <p:txBody>
+          <a:bodyPr rtlCol="0" anchor="ctr"/>
+          <a:lstStyle/>
+          <a:p>
+            <a:pPr algn="ctr"/>
+          </a:p>
+        </p:txBody>
+      </p:sp>
+      <p:sp>
+        <p:nvSpPr>
+          <p:cNvPr id="3" name="Rectangle 2"/>
+          <p:cNvSpPr/>
+          <p:nvPr/>
+        </p:nvSpPr>
+        <p:spPr>
+          <a:xfrm>
+            <a:off x="0" y="960120"/>
+            <a:ext cx="12191695" cy="41148"/>
+          </a:xfrm>
+          <a:prstGeom prst="rect">
+            <a:avLst/>
+          </a:prstGeom>
+          <a:solidFill>
+            <a:srgbClr val="FFD000"/>
+          </a:solidFill>
+          <a:ln>
+            <a:noFill/>
+          </a:ln>
+        </p:spPr>
+        <p:style>
+          <a:lnRef idx="1">
+            <a:schemeClr val="accent1"/>
+          </a:lnRef>
+          <a:fillRef idx="3">
+            <a:schemeClr val="accent1"/>
+          </a:fillRef>
+          <a:effectRef idx="2">
+            <a:schemeClr val="accent1"/>
+          </a:effectRef>
+          <a:fontRef idx="minor">
+            <a:schemeClr val="lt1"/>
+          </a:fontRef>
+        </p:style>
+        <p:txBody>
+          <a:bodyPr rtlCol="0" anchor="ctr"/>
+          <a:lstStyle/>
+          <a:p>
+            <a:pPr algn="ctr"/>
+          </a:p>
+        </p:txBody>
+      </p:sp>
+      <p:sp>
+        <p:nvSpPr>
+          <p:cNvPr id="4" name="TextBox 3"/>
+          <p:cNvSpPr txBox="1"/>
+          <p:nvPr/>
+        </p:nvSpPr>
+        <p:spPr>
+          <a:xfrm>
+            <a:off x="457200" y="164592"/>
+            <a:ext cx="11277295" cy="502920"/>
+          </a:xfrm>
+          <a:prstGeom prst="rect">
+            <a:avLst/>
+          </a:prstGeom>
+          <a:noFill/>
+        </p:spPr>
+        <p:txBody>
+          <a:bodyPr wrap="square">
+            <a:spAutoFit/>
+          </a:bodyPr>
+          <a:lstStyle/>
+          <a:p>
+            <a:r>
+              <a:rPr sz="2600" b="1" i="0">
+                <a:solidFill>
+                  <a:srgbClr val="FFFFFF"/>
+                </a:solidFill>
+                <a:latin typeface="Calibri"/>
+              </a:rPr>
+              <a:t>Para el PI esta semana</a:t>
+            </a:r>
+          </a:p>
+        </p:txBody>
+      </p:sp>
+      <p:sp>
+        <p:nvSpPr>
+          <p:cNvPr id="5" name="Rounded Rectangle 4"/>
+          <p:cNvSpPr/>
+          <p:nvPr/>
+        </p:nvSpPr>
+        <p:spPr>
+          <a:xfrm>
+            <a:off x="457200" y="1261872"/>
+            <a:ext cx="11277295" cy="1051560"/>
+          </a:xfrm>
+          <a:prstGeom prst="roundRect">
+            <a:avLst>
+              <a:gd name="adj" fmla="val 12000"/>
+            </a:avLst>
+          </a:prstGeom>
+          <a:solidFill>
+            <a:srgbClr val="E8F4FA"/>
+          </a:solidFill>
+          <a:ln>
+            <a:noFill/>
+          </a:ln>
+        </p:spPr>
+        <p:style>
+          <a:lnRef idx="1">
+            <a:schemeClr val="accent1"/>
+          </a:lnRef>
+          <a:fillRef idx="3">
+            <a:schemeClr val="accent1"/>
+          </a:fillRef>
+          <a:effectRef idx="2">
+            <a:schemeClr val="accent1"/>
+          </a:effectRef>
+          <a:fontRef idx="minor">
+            <a:schemeClr val="lt1"/>
+          </a:fontRef>
+        </p:style>
+        <p:txBody>
+          <a:bodyPr rtlCol="0" anchor="ctr"/>
+          <a:lstStyle/>
+          <a:p>
+            <a:pPr algn="ctr"/>
+          </a:p>
+        </p:txBody>
+      </p:sp>
+      <p:sp>
+        <p:nvSpPr>
+          <p:cNvPr id="6" name="Rectangle 5"/>
+          <p:cNvSpPr/>
+          <p:nvPr/>
+        </p:nvSpPr>
+        <p:spPr>
+          <a:xfrm>
+            <a:off x="457200" y="1261872"/>
+            <a:ext cx="128016" cy="1051560"/>
           </a:xfrm>
           <a:prstGeom prst="rect">
             <a:avLst/>
@@ -12012,73 +11659,16 @@
           </a:p>
         </p:txBody>
       </p:sp>
-      <p:pic>
-        <p:nvPicPr>
-          <p:cNvPr id="3" name="Picture 2" descr="logo_uniajc_color.png"/>
-          <p:cNvPicPr>
-            <a:picLocks noChangeAspect="1"/>
-          </p:cNvPicPr>
-          <p:nvPr/>
-        </p:nvPicPr>
-        <p:blipFill>
-          <a:blip r:embed="rId2"/>
-          <a:stretch>
-            <a:fillRect/>
-          </a:stretch>
-        </p:blipFill>
-        <p:spPr>
-          <a:xfrm>
-            <a:off x="10271455" y="5998464"/>
-            <a:ext cx="1463040" cy="643233"/>
-          </a:xfrm>
-          <a:prstGeom prst="rect">
-            <a:avLst/>
-          </a:prstGeom>
-        </p:spPr>
-      </p:pic>
-      <p:sp>
-        <p:nvSpPr>
-          <p:cNvPr id="4" name="TextBox 3"/>
+      <p:sp>
+        <p:nvSpPr>
+          <p:cNvPr id="7" name="TextBox 6"/>
           <p:cNvSpPr txBox="1"/>
           <p:nvPr/>
         </p:nvSpPr>
         <p:spPr>
           <a:xfrm>
-            <a:off x="457200" y="1737360"/>
-            <a:ext cx="11277295" cy="1097280"/>
-          </a:xfrm>
-          <a:prstGeom prst="rect">
-            <a:avLst/>
-          </a:prstGeom>
-          <a:noFill/>
-        </p:spPr>
-        <p:txBody>
-          <a:bodyPr wrap="square" anchor="ctr"/>
-          <a:lstStyle/>
-          <a:p>
-            <a:pPr algn="ctr"/>
-            <a:r>
-              <a:rPr sz="3400" b="1" i="0">
-                <a:solidFill>
-                  <a:srgbClr val="095292"/>
-                </a:solidFill>
-                <a:latin typeface="Calibri"/>
-              </a:rPr>
-              <a:t>Clase 11 · VetCare avanza</a:t>
-            </a:r>
-          </a:p>
-        </p:txBody>
-      </p:sp>
-      <p:sp>
-        <p:nvSpPr>
-          <p:cNvPr id="5" name="TextBox 4"/>
-          <p:cNvSpPr txBox="1"/>
-          <p:nvPr/>
-        </p:nvSpPr>
-        <p:spPr>
-          <a:xfrm>
-            <a:off x="457200" y="3017520"/>
-            <a:ext cx="11277295" cy="1645920"/>
+            <a:off x="777240" y="1399031"/>
+            <a:ext cx="10774375" cy="822959"/>
           </a:xfrm>
           <a:prstGeom prst="rect">
             <a:avLst/>
@@ -12091,65 +11681,132 @@
           </a:bodyPr>
           <a:lstStyle/>
           <a:p>
-            <a:pPr algn="ctr">
-              <a:spcAft>
-                <a:spcPts val="600"/>
-              </a:spcAft>
+            <a:r>
+              <a:rPr sz="1200" b="1" i="0">
+                <a:solidFill>
+                  <a:srgbClr val="269CCB"/>
+                </a:solidFill>
+                <a:latin typeface="Calibri"/>
+              </a:rPr>
+              <a:t>Info</a:t>
+            </a:r>
+          </a:p>
+          <a:p>
+            <a:pPr>
+              <a:spcBef>
+                <a:spcPts val="400"/>
+              </a:spcBef>
             </a:pPr>
             <a:r>
-              <a:rPr sz="1600" b="0" i="0">
+              <a:rPr sz="1400" b="0" i="0">
                 <a:solidFill>
                   <a:srgbClr val="333333"/>
                 </a:solidFill>
                 <a:latin typeface="Calibri"/>
               </a:rPr>
-              <a:t>Demo parcial + checklist de avance (hito formal PI)</a:t>
-            </a:r>
-          </a:p>
-          <a:p>
-            <a:pPr algn="ctr">
-              <a:spcAft>
-                <a:spcPts val="600"/>
-              </a:spcAft>
-            </a:pPr>
-            <a:r>
-              <a:rPr sz="1600" b="0" i="0">
-                <a:solidFill>
-                  <a:srgbClr val="333333"/>
-                </a:solidFill>
-                <a:latin typeface="Calibri"/>
-              </a:rPr>
-              <a:t>Entregable: Checklist firmada + enlace/ZIP avance (DDL+procs+ER)</a:t>
-            </a:r>
-          </a:p>
-          <a:p>
-            <a:pPr algn="ctr">
-              <a:spcAft>
-                <a:spcPts val="600"/>
-              </a:spcAft>
-            </a:pPr>
-            <a:r>
-              <a:rPr sz="1600" b="0" i="0">
-                <a:solidFill>
-                  <a:srgbClr val="333333"/>
-                </a:solidFill>
-                <a:latin typeface="Calibri"/>
-              </a:rPr>
-              <a:t>Siguiente clase: continuar el hilo del PI segun plan</a:t>
-            </a:r>
-          </a:p>
-        </p:txBody>
-      </p:sp>
-      <p:sp>
-        <p:nvSpPr>
-          <p:cNvPr id="6" name="TextBox 5"/>
+              <a:t>Hito: Demo parcial + checklist de avance (hito formal PI)</a:t>
+            </a:r>
+          </a:p>
+        </p:txBody>
+      </p:sp>
+      <p:sp>
+        <p:nvSpPr>
+          <p:cNvPr id="8" name="Rounded Rectangle 7"/>
+          <p:cNvSpPr/>
+          <p:nvPr/>
+        </p:nvSpPr>
+        <p:spPr>
+          <a:xfrm>
+            <a:off x="457200" y="2478024"/>
+            <a:ext cx="11277295" cy="1051560"/>
+          </a:xfrm>
+          <a:prstGeom prst="roundRect">
+            <a:avLst>
+              <a:gd name="adj" fmla="val 12000"/>
+            </a:avLst>
+          </a:prstGeom>
+          <a:solidFill>
+            <a:srgbClr val="FFF8E1"/>
+          </a:solidFill>
+          <a:ln>
+            <a:noFill/>
+          </a:ln>
+        </p:spPr>
+        <p:style>
+          <a:lnRef idx="1">
+            <a:schemeClr val="accent1"/>
+          </a:lnRef>
+          <a:fillRef idx="3">
+            <a:schemeClr val="accent1"/>
+          </a:fillRef>
+          <a:effectRef idx="2">
+            <a:schemeClr val="accent1"/>
+          </a:effectRef>
+          <a:fontRef idx="minor">
+            <a:schemeClr val="lt1"/>
+          </a:fontRef>
+        </p:style>
+        <p:txBody>
+          <a:bodyPr rtlCol="0" anchor="ctr"/>
+          <a:lstStyle/>
+          <a:p>
+            <a:pPr algn="ctr"/>
+          </a:p>
+        </p:txBody>
+      </p:sp>
+      <p:sp>
+        <p:nvSpPr>
+          <p:cNvPr id="9" name="Rectangle 8"/>
+          <p:cNvSpPr/>
+          <p:nvPr/>
+        </p:nvSpPr>
+        <p:spPr>
+          <a:xfrm>
+            <a:off x="457200" y="2478024"/>
+            <a:ext cx="128016" cy="1051560"/>
+          </a:xfrm>
+          <a:prstGeom prst="rect">
+            <a:avLst/>
+          </a:prstGeom>
+          <a:solidFill>
+            <a:srgbClr val="FFD000"/>
+          </a:solidFill>
+          <a:ln>
+            <a:noFill/>
+          </a:ln>
+        </p:spPr>
+        <p:style>
+          <a:lnRef idx="1">
+            <a:schemeClr val="accent1"/>
+          </a:lnRef>
+          <a:fillRef idx="3">
+            <a:schemeClr val="accent1"/>
+          </a:fillRef>
+          <a:effectRef idx="2">
+            <a:schemeClr val="accent1"/>
+          </a:effectRef>
+          <a:fontRef idx="minor">
+            <a:schemeClr val="lt1"/>
+          </a:fontRef>
+        </p:style>
+        <p:txBody>
+          <a:bodyPr rtlCol="0" anchor="ctr"/>
+          <a:lstStyle/>
+          <a:p>
+            <a:pPr algn="ctr"/>
+          </a:p>
+        </p:txBody>
+      </p:sp>
+      <p:sp>
+        <p:nvSpPr>
+          <p:cNvPr id="10" name="TextBox 9"/>
           <p:cNvSpPr txBox="1"/>
           <p:nvPr/>
         </p:nvSpPr>
         <p:spPr>
           <a:xfrm>
-            <a:off x="457200" y="4754880"/>
-            <a:ext cx="11277295" cy="640080"/>
+            <a:off x="777240" y="2615184"/>
+            <a:ext cx="10774375" cy="822959"/>
           </a:xfrm>
           <a:prstGeom prst="rect">
             <a:avLst/>
@@ -12162,15 +11819,203 @@
           </a:bodyPr>
           <a:lstStyle/>
           <a:p>
+            <a:r>
+              <a:rPr sz="1200" b="1" i="0">
+                <a:solidFill>
+                  <a:srgbClr val="FFD000"/>
+                </a:solidFill>
+                <a:latin typeface="Calibri"/>
+              </a:rPr>
+              <a:t>Aclaración</a:t>
+            </a:r>
+          </a:p>
+          <a:p>
+            <a:pPr>
+              <a:spcBef>
+                <a:spcPts val="400"/>
+              </a:spcBef>
+            </a:pPr>
+            <a:r>
+              <a:rPr sz="1400" b="0" i="0">
+                <a:solidFill>
+                  <a:srgbClr val="333333"/>
+                </a:solidFill>
+                <a:latin typeface="Calibri"/>
+              </a:rPr>
+              <a:t>Enunciado completo: Clases/Proyecto Integrador/ (VetCare DB).</a:t>
+            </a:r>
+          </a:p>
+        </p:txBody>
+      </p:sp>
+      <p:sp>
+        <p:nvSpPr>
+          <p:cNvPr id="11" name="Rounded Rectangle 10"/>
+          <p:cNvSpPr/>
+          <p:nvPr/>
+        </p:nvSpPr>
+        <p:spPr>
+          <a:xfrm>
+            <a:off x="457200" y="3694176"/>
+            <a:ext cx="11277295" cy="1051560"/>
+          </a:xfrm>
+          <a:prstGeom prst="roundRect">
+            <a:avLst>
+              <a:gd name="adj" fmla="val 12000"/>
+            </a:avLst>
+          </a:prstGeom>
+          <a:solidFill>
+            <a:srgbClr val="FBE4E4"/>
+          </a:solidFill>
+          <a:ln>
+            <a:noFill/>
+          </a:ln>
+        </p:spPr>
+        <p:style>
+          <a:lnRef idx="1">
+            <a:schemeClr val="accent1"/>
+          </a:lnRef>
+          <a:fillRef idx="3">
+            <a:schemeClr val="accent1"/>
+          </a:fillRef>
+          <a:effectRef idx="2">
+            <a:schemeClr val="accent1"/>
+          </a:effectRef>
+          <a:fontRef idx="minor">
+            <a:schemeClr val="lt1"/>
+          </a:fontRef>
+        </p:style>
+        <p:txBody>
+          <a:bodyPr rtlCol="0" anchor="ctr"/>
+          <a:lstStyle/>
+          <a:p>
             <a:pPr algn="ctr"/>
-            <a:r>
-              <a:rPr sz="2000" b="1" i="0">
-                <a:solidFill>
-                  <a:srgbClr val="269CCB"/>
-                </a:solidFill>
-                <a:latin typeface="Calibri"/>
-              </a:rPr>
-              <a:t>Teoria breve · practica = PI</a:t>
+          </a:p>
+        </p:txBody>
+      </p:sp>
+      <p:sp>
+        <p:nvSpPr>
+          <p:cNvPr id="12" name="Rectangle 11"/>
+          <p:cNvSpPr/>
+          <p:nvPr/>
+        </p:nvSpPr>
+        <p:spPr>
+          <a:xfrm>
+            <a:off x="457200" y="3694176"/>
+            <a:ext cx="128016" cy="1051560"/>
+          </a:xfrm>
+          <a:prstGeom prst="rect">
+            <a:avLst/>
+          </a:prstGeom>
+          <a:solidFill>
+            <a:srgbClr val="A02030"/>
+          </a:solidFill>
+          <a:ln>
+            <a:noFill/>
+          </a:ln>
+        </p:spPr>
+        <p:style>
+          <a:lnRef idx="1">
+            <a:schemeClr val="accent1"/>
+          </a:lnRef>
+          <a:fillRef idx="3">
+            <a:schemeClr val="accent1"/>
+          </a:fillRef>
+          <a:effectRef idx="2">
+            <a:schemeClr val="accent1"/>
+          </a:effectRef>
+          <a:fontRef idx="minor">
+            <a:schemeClr val="lt1"/>
+          </a:fontRef>
+        </p:style>
+        <p:txBody>
+          <a:bodyPr rtlCol="0" anchor="ctr"/>
+          <a:lstStyle/>
+          <a:p>
+            <a:pPr algn="ctr"/>
+          </a:p>
+        </p:txBody>
+      </p:sp>
+      <p:sp>
+        <p:nvSpPr>
+          <p:cNvPr id="13" name="TextBox 12"/>
+          <p:cNvSpPr txBox="1"/>
+          <p:nvPr/>
+        </p:nvSpPr>
+        <p:spPr>
+          <a:xfrm>
+            <a:off x="777240" y="3831336"/>
+            <a:ext cx="10774375" cy="822959"/>
+          </a:xfrm>
+          <a:prstGeom prst="rect">
+            <a:avLst/>
+          </a:prstGeom>
+          <a:noFill/>
+        </p:spPr>
+        <p:txBody>
+          <a:bodyPr wrap="square">
+            <a:spAutoFit/>
+          </a:bodyPr>
+          <a:lstStyle/>
+          <a:p>
+            <a:r>
+              <a:rPr sz="1200" b="1" i="0">
+                <a:solidFill>
+                  <a:srgbClr val="A02030"/>
+                </a:solidFill>
+                <a:latin typeface="Calibri"/>
+              </a:rPr>
+              <a:t>Atención</a:t>
+            </a:r>
+          </a:p>
+          <a:p>
+            <a:pPr>
+              <a:spcBef>
+                <a:spcPts val="400"/>
+              </a:spcBef>
+            </a:pPr>
+            <a:r>
+              <a:rPr sz="1400" b="0" i="0">
+                <a:solidFill>
+                  <a:srgbClr val="333333"/>
+                </a:solidFill>
+                <a:latin typeface="Calibri"/>
+              </a:rPr>
+              <a:t>Si el docente asigna taller esta semana, él indica el canal y la fecha.</a:t>
+            </a:r>
+          </a:p>
+        </p:txBody>
+      </p:sp>
+      <p:sp>
+        <p:nvSpPr>
+          <p:cNvPr id="14" name="TextBox 13"/>
+          <p:cNvSpPr txBox="1"/>
+          <p:nvPr/>
+        </p:nvSpPr>
+        <p:spPr>
+          <a:xfrm>
+            <a:off x="11185855" y="6473952"/>
+            <a:ext cx="640080" cy="274320"/>
+          </a:xfrm>
+          <a:prstGeom prst="rect">
+            <a:avLst/>
+          </a:prstGeom>
+          <a:noFill/>
+        </p:spPr>
+        <p:txBody>
+          <a:bodyPr wrap="square">
+            <a:spAutoFit/>
+          </a:bodyPr>
+          <a:lstStyle/>
+          <a:p>
+            <a:pPr algn="r"/>
+            <a:r>
+              <a:rPr sz="1100" b="0" i="0">
+                <a:solidFill>
+                  <a:srgbClr val="666666"/>
+                </a:solidFill>
+                <a:latin typeface="Calibri"/>
+              </a:rPr>
+              <a:t>29</a:t>
             </a:r>
           </a:p>
         </p:txBody>
@@ -13035,6 +12880,238 @@
 </p:sld>
 </file>
 
+<file path=ppt/slides/slide30.xml><?xml version="1.0" encoding="utf-8"?>
+<p:sld xmlns:a="http://schemas.openxmlformats.org/drawingml/2006/main" xmlns:p="http://schemas.openxmlformats.org/presentationml/2006/main" xmlns:r="http://schemas.openxmlformats.org/officeDocument/2006/relationships">
+  <p:cSld>
+    <p:bg>
+      <p:bgPr>
+        <a:solidFill>
+          <a:srgbClr val="FFFFFF"/>
+        </a:solidFill>
+        <a:effectLst/>
+      </p:bgPr>
+    </p:bg>
+    <p:spTree>
+      <p:nvGrpSpPr>
+        <p:cNvPr id="1" name=""/>
+        <p:cNvGrpSpPr/>
+        <p:nvPr/>
+      </p:nvGrpSpPr>
+      <p:grpSpPr/>
+      <p:sp>
+        <p:nvSpPr>
+          <p:cNvPr id="2" name="Rectangle 1"/>
+          <p:cNvSpPr/>
+          <p:nvPr/>
+        </p:nvSpPr>
+        <p:spPr>
+          <a:xfrm>
+            <a:off x="0" y="0"/>
+            <a:ext cx="12191695" cy="164592"/>
+          </a:xfrm>
+          <a:prstGeom prst="rect">
+            <a:avLst/>
+          </a:prstGeom>
+          <a:solidFill>
+            <a:srgbClr val="269CCB"/>
+          </a:solidFill>
+          <a:ln>
+            <a:noFill/>
+          </a:ln>
+        </p:spPr>
+        <p:style>
+          <a:lnRef idx="1">
+            <a:schemeClr val="accent1"/>
+          </a:lnRef>
+          <a:fillRef idx="3">
+            <a:schemeClr val="accent1"/>
+          </a:fillRef>
+          <a:effectRef idx="2">
+            <a:schemeClr val="accent1"/>
+          </a:effectRef>
+          <a:fontRef idx="minor">
+            <a:schemeClr val="lt1"/>
+          </a:fontRef>
+        </p:style>
+        <p:txBody>
+          <a:bodyPr rtlCol="0" anchor="ctr"/>
+          <a:lstStyle/>
+          <a:p>
+            <a:pPr algn="ctr"/>
+          </a:p>
+        </p:txBody>
+      </p:sp>
+      <p:pic>
+        <p:nvPicPr>
+          <p:cNvPr id="3" name="Picture 2" descr="logo_uniajc_color.png"/>
+          <p:cNvPicPr>
+            <a:picLocks noChangeAspect="1"/>
+          </p:cNvPicPr>
+          <p:nvPr/>
+        </p:nvPicPr>
+        <p:blipFill>
+          <a:blip r:embed="rId2"/>
+          <a:stretch>
+            <a:fillRect/>
+          </a:stretch>
+        </p:blipFill>
+        <p:spPr>
+          <a:xfrm>
+            <a:off x="10271455" y="5998464"/>
+            <a:ext cx="1463040" cy="643233"/>
+          </a:xfrm>
+          <a:prstGeom prst="rect">
+            <a:avLst/>
+          </a:prstGeom>
+        </p:spPr>
+      </p:pic>
+      <p:sp>
+        <p:nvSpPr>
+          <p:cNvPr id="4" name="TextBox 3"/>
+          <p:cNvSpPr txBox="1"/>
+          <p:nvPr/>
+        </p:nvSpPr>
+        <p:spPr>
+          <a:xfrm>
+            <a:off x="457200" y="1737360"/>
+            <a:ext cx="11277295" cy="1097280"/>
+          </a:xfrm>
+          <a:prstGeom prst="rect">
+            <a:avLst/>
+          </a:prstGeom>
+          <a:noFill/>
+        </p:spPr>
+        <p:txBody>
+          <a:bodyPr wrap="square" anchor="ctr"/>
+          <a:lstStyle/>
+          <a:p>
+            <a:pPr algn="ctr"/>
+            <a:r>
+              <a:rPr sz="3400" b="1" i="0">
+                <a:solidFill>
+                  <a:srgbClr val="095292"/>
+                </a:solidFill>
+                <a:latin typeface="Calibri"/>
+              </a:rPr>
+              <a:t>Clase 11 · VetCare avanza</a:t>
+            </a:r>
+          </a:p>
+        </p:txBody>
+      </p:sp>
+      <p:sp>
+        <p:nvSpPr>
+          <p:cNvPr id="5" name="TextBox 4"/>
+          <p:cNvSpPr txBox="1"/>
+          <p:nvPr/>
+        </p:nvSpPr>
+        <p:spPr>
+          <a:xfrm>
+            <a:off x="457200" y="3017520"/>
+            <a:ext cx="11277295" cy="1645920"/>
+          </a:xfrm>
+          <a:prstGeom prst="rect">
+            <a:avLst/>
+          </a:prstGeom>
+          <a:noFill/>
+        </p:spPr>
+        <p:txBody>
+          <a:bodyPr wrap="square">
+            <a:spAutoFit/>
+          </a:bodyPr>
+          <a:lstStyle/>
+          <a:p>
+            <a:pPr algn="ctr">
+              <a:spcAft>
+                <a:spcPts val="600"/>
+              </a:spcAft>
+            </a:pPr>
+            <a:r>
+              <a:rPr sz="1600" b="0" i="0">
+                <a:solidFill>
+                  <a:srgbClr val="333333"/>
+                </a:solidFill>
+                <a:latin typeface="Calibri"/>
+              </a:rPr>
+              <a:t>Demo parcial + checklist de avance (hito formal PI)</a:t>
+            </a:r>
+          </a:p>
+          <a:p>
+            <a:pPr algn="ctr">
+              <a:spcAft>
+                <a:spcPts val="600"/>
+              </a:spcAft>
+            </a:pPr>
+            <a:r>
+              <a:rPr sz="1600" b="0" i="0">
+                <a:solidFill>
+                  <a:srgbClr val="333333"/>
+                </a:solidFill>
+                <a:latin typeface="Calibri"/>
+              </a:rPr>
+              <a:t>Entregable: Checklist firmada + enlace/ZIP avance (DDL+procs+ER)</a:t>
+            </a:r>
+          </a:p>
+          <a:p>
+            <a:pPr algn="ctr">
+              <a:spcAft>
+                <a:spcPts val="600"/>
+              </a:spcAft>
+            </a:pPr>
+            <a:r>
+              <a:rPr sz="1600" b="0" i="0">
+                <a:solidFill>
+                  <a:srgbClr val="333333"/>
+                </a:solidFill>
+                <a:latin typeface="Calibri"/>
+              </a:rPr>
+              <a:t>Siguiente clase: continuar el hilo del PI segun plan</a:t>
+            </a:r>
+          </a:p>
+        </p:txBody>
+      </p:sp>
+      <p:sp>
+        <p:nvSpPr>
+          <p:cNvPr id="6" name="TextBox 5"/>
+          <p:cNvSpPr txBox="1"/>
+          <p:nvPr/>
+        </p:nvSpPr>
+        <p:spPr>
+          <a:xfrm>
+            <a:off x="457200" y="4754880"/>
+            <a:ext cx="11277295" cy="640080"/>
+          </a:xfrm>
+          <a:prstGeom prst="rect">
+            <a:avLst/>
+          </a:prstGeom>
+          <a:noFill/>
+        </p:spPr>
+        <p:txBody>
+          <a:bodyPr wrap="square">
+            <a:spAutoFit/>
+          </a:bodyPr>
+          <a:lstStyle/>
+          <a:p>
+            <a:pPr algn="ctr"/>
+            <a:r>
+              <a:rPr sz="2000" b="1" i="0">
+                <a:solidFill>
+                  <a:srgbClr val="269CCB"/>
+                </a:solidFill>
+                <a:latin typeface="Calibri"/>
+              </a:rPr>
+              <a:t>Teoria breve · practica = PI</a:t>
+            </a:r>
+          </a:p>
+        </p:txBody>
+      </p:sp>
+    </p:spTree>
+  </p:cSld>
+  <p:clrMapOvr>
+    <a:masterClrMapping/>
+  </p:clrMapOvr>
+</p:sld>
+</file>
+
 <file path=ppt/slides/slide4.xml><?xml version="1.0" encoding="utf-8"?>
 <p:sld xmlns:a="http://schemas.openxmlformats.org/drawingml/2006/main" xmlns:p="http://schemas.openxmlformats.org/presentationml/2006/main" xmlns:r="http://schemas.openxmlformats.org/officeDocument/2006/relationships">
   <p:cSld>
@@ -13240,22 +13317,6 @@
                 <a:latin typeface="Calibri"/>
               </a:rPr>
               <a:t>–   La practica tiene nombres y roles establecidos desde hace decadas en ingenieria de software: el autor presenta, uno o mas revisores buscan defectos, un moderador cuida el tiempo y el tono, y un escriba registra los hallazgos.</a:t>
-            </a:r>
-          </a:p>
-          <a:p>
-            <a:pPr>
-              <a:spcAft>
-                <a:spcPts val="800"/>
-              </a:spcAft>
-            </a:pPr>
-            <a:r>
-              <a:rPr sz="2000" b="0" i="0">
-                <a:solidFill>
-                  <a:srgbClr val="333333"/>
-                </a:solidFill>
-                <a:latin typeface="Calibri"/>
-              </a:rPr>
-              <a:t>–   El estandar clasico, IEEE 1028, distingue la inspeccion (formal, con lista de verificacion y metricas), el walkthrough (el autor guia y explica) y la revision tecnica propiamente dicha (los pares evaluan si el artefacto sirve para su proposito).</a:t>
             </a:r>
           </a:p>
         </p:txBody>
@@ -13475,7 +13536,7 @@
                 </a:solidFill>
                 <a:latin typeface="Calibri"/>
               </a:rPr>
-              <a:t>–   Lo que se hace hoy es una revision tecnica con lista de verificacion, comprimida a diez minutos por estudiante.</a:t>
+              <a:t>–   El estandar clasico, IEEE 1028, distingue la inspeccion (formal, con lista de verificacion y metricas), el walkthrough (el autor guia y explica) y la revision tecnica propiamente dicha (los pares evaluan si el artefacto sirve para su proposito).</a:t>
             </a:r>
           </a:p>
           <a:p>
@@ -13492,22 +13553,6 @@
                 <a:latin typeface="Calibri"/>
               </a:rPr>
               <a:t>–   Dos reglas gobiernan la sesion y hay que decirlas en voz alta antes de empezar: se revisa el artefacto y no la persona, y no se resuelve el problema dentro de la revision, solo se registra.</a:t>
-            </a:r>
-          </a:p>
-          <a:p>
-            <a:pPr>
-              <a:spcAft>
-                <a:spcPts val="800"/>
-              </a:spcAft>
-            </a:pPr>
-            <a:r>
-              <a:rPr sz="2000" b="0" i="0">
-                <a:solidFill>
-                  <a:srgbClr val="333333"/>
-                </a:solidFill>
-                <a:latin typeface="Calibri"/>
-              </a:rPr>
-              <a:t>–   Un estudiante que se pone a corregir el DDL en vivo consume el tiempo de los demas y sale con un hallazgo menos que si hubiera seguido escuchando.</a:t>
             </a:r>
           </a:p>
         </p:txBody>
@@ -13727,7 +13772,7 @@
                 </a:solidFill>
                 <a:latin typeface="Calibri"/>
               </a:rPr>
-              <a:t>–   Lo que se audita en una base de datos no es cada pieza por separado sino la coherencia entre piezas.</a:t>
+              <a:t>–   Un artefacto es cualquier producto de trabajo entregable: el diagrama entidad-relacion, el script DDL, la matriz de roles, los procedimientos, el informe de optimizacion.</a:t>
             </a:r>
           </a:p>
           <a:p>
@@ -13743,7 +13788,7 @@
                 </a:solidFill>
                 <a:latin typeface="Calibri"/>
               </a:rPr>
-              <a:t>–   Un artefacto es cualquier producto de trabajo entregable: el diagrama entidad-relacion, el script DDL, la matriz de roles, los procedimientos, el informe de optimizacion.</a:t>
+              <a:t>–   Es perfectamente posible que un estudiante tenga un ER bien dibujado, un DDL que ejecuta sin errores</a:t>
             </a:r>
           </a:p>
           <a:p>
@@ -13759,55 +13804,7 @@
                 </a:solidFill>
                 <a:latin typeface="Calibri"/>
               </a:rPr>
-              <a:t>–   Coherencia significa que todas esas piezas describen el mismo sistema.</a:t>
-            </a:r>
-          </a:p>
-          <a:p>
-            <a:pPr>
-              <a:spcAft>
-                <a:spcPts val="800"/>
-              </a:spcAft>
-            </a:pPr>
-            <a:r>
-              <a:rPr sz="2000" b="0" i="0">
-                <a:solidFill>
-                  <a:srgbClr val="333333"/>
-                </a:solidFill>
-                <a:latin typeface="Calibri"/>
-              </a:rPr>
-              <a:t>–   Es perfectamente posible que un estudiante tenga un ER bien dibujado, un DDL que ejecuta sin errores</a:t>
-            </a:r>
-          </a:p>
-          <a:p>
-            <a:pPr>
-              <a:spcAft>
-                <a:spcPts val="800"/>
-              </a:spcAft>
-            </a:pPr>
-            <a:r>
-              <a:rPr sz="2000" b="0" i="0">
-                <a:solidFill>
-                  <a:srgbClr val="333333"/>
-                </a:solidFill>
-                <a:latin typeface="Calibri"/>
-              </a:rPr>
               <a:t>–   Y que ambos describan bases de datos distintas, porque el ER se dibujo en la Clase 1 y el DDL se fue parchando en las Clases 3 a 8 sin volver a actualizar el diagrama.</a:t>
-            </a:r>
-          </a:p>
-          <a:p>
-            <a:pPr>
-              <a:spcAft>
-                <a:spcPts val="800"/>
-              </a:spcAft>
-            </a:pPr>
-            <a:r>
-              <a:rPr sz="2000" b="0" i="0">
-                <a:solidFill>
-                  <a:srgbClr val="333333"/>
-                </a:solidFill>
-                <a:latin typeface="Calibri"/>
-              </a:rPr>
-              <a:t>–   Esa divergencia es el hallazgo mas comun del checkpoint y tambien el mas facil de detectar si se sabe donde mirar.</a:t>
             </a:r>
           </a:p>
           <a:p>
@@ -14043,7 +14040,7 @@
                 </a:solidFill>
                 <a:latin typeface="Calibri"/>
               </a:rPr>
-              <a:t>–   Verificacion uno, ER contra DDL.</a:t>
+              <a:t>–   Se recorre el diagrama entidad por entidad y se busca su CREATE TABLE: toda entidad sin tabla es un hallazgo.</a:t>
             </a:r>
           </a:p>
           <a:p>
@@ -14059,39 +14056,7 @@
                 </a:solidFill>
                 <a:latin typeface="Calibri"/>
               </a:rPr>
-              <a:t>–   Se recorre el diagrama entidad por entidad y se busca su CREATE TABLE: toda entidad sin tabla es un hallazgo.</a:t>
-            </a:r>
-          </a:p>
-          <a:p>
-            <a:pPr>
-              <a:spcAft>
-                <a:spcPts val="800"/>
-              </a:spcAft>
-            </a:pPr>
-            <a:r>
-              <a:rPr sz="2000" b="0" i="0">
-                <a:solidFill>
-                  <a:srgbClr val="333333"/>
-                </a:solidFill>
-                <a:latin typeface="Calibri"/>
-              </a:rPr>
               <a:t>–   Luego se recorre en sentido contrario, porque es el que nadie hace: toda tabla sin entidad en el diagrama tambien es un hallazgo, ya que significa que el modelo crecio sin registrarse.</a:t>
-            </a:r>
-          </a:p>
-          <a:p>
-            <a:pPr>
-              <a:spcAft>
-                <a:spcPts val="800"/>
-              </a:spcAft>
-            </a:pPr>
-            <a:r>
-              <a:rPr sz="2000" b="0" i="0">
-                <a:solidFill>
-                  <a:srgbClr val="333333"/>
-                </a:solidFill>
-                <a:latin typeface="Calibri"/>
-              </a:rPr>
-              <a:t>–   Despues se verifican las relaciones.</a:t>
             </a:r>
           </a:p>
           <a:p>
@@ -14359,22 +14324,6 @@
                 </a:solidFill>
                 <a:latin typeface="Calibri"/>
               </a:rPr>
-              <a:t>–   Verificacion dos, roles contra GRANT.</a:t>
-            </a:r>
-          </a:p>
-          <a:p>
-            <a:pPr>
-              <a:spcAft>
-                <a:spcPts val="800"/>
-              </a:spcAft>
-            </a:pPr>
-            <a:r>
-              <a:rPr sz="2000" b="0" i="0">
-                <a:solidFill>
-                  <a:srgbClr val="333333"/>
-                </a:solidFill>
-                <a:latin typeface="Calibri"/>
-              </a:rPr>
               <a:t>–   Se toma la matriz de la Clase 2 y se comprueba que los cuatro roles declarados existan en el script y que las celdas se hayan traducido en sentencias.</a:t>
             </a:r>
           </a:p>
@@ -14611,7 +14560,7 @@
                 </a:solidFill>
                 <a:latin typeface="Calibri"/>
               </a:rPr>
-              <a:t>–   Verificacion tres, procedimientos invocables.</a:t>
+              <a:t>–   La distincion que separa a un estudiante que va bien de uno que va mal es esta: un procedimiento que compila no es un procedimiento que funciona.</a:t>
             </a:r>
           </a:p>
           <a:p>
@@ -14627,7 +14576,7 @@
                 </a:solidFill>
                 <a:latin typeface="Calibri"/>
               </a:rPr>
-              <a:t>–   La distincion que separa a un estudiante que va bien de uno que va mal es esta: un procedimiento que compila no es un procedimiento que funciona.</a:t>
+              <a:t>–   Primero CALL sp_agendar_cita con datos validos, que debe insertar la cita y devolver confirmacion.</a:t>
             </a:r>
           </a:p>
           <a:p>
@@ -14643,55 +14592,7 @@
                 </a:solidFill>
                 <a:latin typeface="Calibri"/>
               </a:rPr>
-              <a:t>–   La prueba de humo dura un minuto y consiste en pedir dos ejecuciones y no una.</a:t>
-            </a:r>
-          </a:p>
-          <a:p>
-            <a:pPr>
-              <a:spcAft>
-                <a:spcPts val="800"/>
-              </a:spcAft>
-            </a:pPr>
-            <a:r>
-              <a:rPr sz="2000" b="0" i="0">
-                <a:solidFill>
-                  <a:srgbClr val="333333"/>
-                </a:solidFill>
-                <a:latin typeface="Calibri"/>
-              </a:rPr>
-              <a:t>–   Primero CALL sp_agendar_cita con datos validos, que debe insertar la cita y devolver confirmacion.</a:t>
-            </a:r>
-          </a:p>
-          <a:p>
-            <a:pPr>
-              <a:spcAft>
-                <a:spcPts val="800"/>
-              </a:spcAft>
-            </a:pPr>
-            <a:r>
-              <a:rPr sz="2000" b="0" i="0">
-                <a:solidFill>
-                  <a:srgbClr val="333333"/>
-                </a:solidFill>
-                <a:latin typeface="Calibri"/>
-              </a:rPr>
               <a:t>–   Segundo, CALL sp_agendar_cita con el caso invalido que el propio estudiante declaro, es decir una mascota inactiva o un horario ya tomado, que debe devolver el mensaje de negocio y no un error crudo del motor.</a:t>
-            </a:r>
-          </a:p>
-          <a:p>
-            <a:pPr>
-              <a:spcAft>
-                <a:spcPts val="800"/>
-              </a:spcAft>
-            </a:pPr>
-            <a:r>
-              <a:rPr sz="2000" b="0" i="0">
-                <a:solidFill>
-                  <a:srgbClr val="333333"/>
-                </a:solidFill>
-                <a:latin typeface="Calibri"/>
-              </a:rPr>
-              <a:t>–   Si el estudiante no puede mostrar la segunda ejecucion, el procedimiento no tiene manejo de errores y eso resta puntos en los 25 de objetos programables.</a:t>
             </a:r>
           </a:p>
         </p:txBody>

--- a/Bases de Datos II/Clases/Clase 11 - Avance del proyecto final/Presentacion.pptx
+++ b/Bases de Datos II/Clases/Clase 11 - Avance del proyecto final/Presentacion.pptx
@@ -35,6 +35,8 @@
     <p:sldId id="283" r:id="rId34"/>
     <p:sldId id="284" r:id="rId35"/>
     <p:sldId id="285" r:id="rId36"/>
+    <p:sldId id="286" r:id="rId37"/>
+    <p:sldId id="287" r:id="rId38"/>
   </p:sldIdLst>
   <p:sldSz cx="12191695" cy="6858000" type="screen4x3"/>
   <p:notesSz cx="6858000" cy="9144000"/>
@@ -6687,21 +6689,141 @@
                 </a:solidFill>
                 <a:latin typeface="Calibri"/>
               </a:rPr>
-              <a:t>Demo del dia</a:t>
-            </a:r>
-          </a:p>
-        </p:txBody>
-      </p:sp>
-      <p:sp>
-        <p:nvSpPr>
-          <p:cNvPr id="5" name="TextBox 4"/>
+              <a:t>La bateria de verificacion del avance</a:t>
+            </a:r>
+          </a:p>
+        </p:txBody>
+      </p:sp>
+      <p:sp>
+        <p:nvSpPr>
+          <p:cNvPr id="5" name="Rounded Rectangle 4"/>
+          <p:cNvSpPr/>
+          <p:nvPr/>
+        </p:nvSpPr>
+        <p:spPr>
+          <a:xfrm>
+            <a:off x="457200" y="1261872"/>
+            <a:ext cx="11277295" cy="5093208"/>
+          </a:xfrm>
+          <a:prstGeom prst="roundRect">
+            <a:avLst>
+              <a:gd name="adj" fmla="val 12000"/>
+            </a:avLst>
+          </a:prstGeom>
+          <a:solidFill>
+            <a:srgbClr val="1E2A38"/>
+          </a:solidFill>
+          <a:ln>
+            <a:noFill/>
+          </a:ln>
+        </p:spPr>
+        <p:style>
+          <a:lnRef idx="1">
+            <a:schemeClr val="accent1"/>
+          </a:lnRef>
+          <a:fillRef idx="3">
+            <a:schemeClr val="accent1"/>
+          </a:fillRef>
+          <a:effectRef idx="2">
+            <a:schemeClr val="accent1"/>
+          </a:effectRef>
+          <a:fontRef idx="minor">
+            <a:schemeClr val="lt1"/>
+          </a:fontRef>
+        </p:style>
+        <p:txBody>
+          <a:bodyPr rtlCol="0" anchor="ctr"/>
+          <a:lstStyle/>
+          <a:p>
+            <a:pPr algn="ctr"/>
+          </a:p>
+        </p:txBody>
+      </p:sp>
+      <p:sp>
+        <p:nvSpPr>
+          <p:cNvPr id="6" name="Rectangle 5"/>
+          <p:cNvSpPr/>
+          <p:nvPr/>
+        </p:nvSpPr>
+        <p:spPr>
+          <a:xfrm>
+            <a:off x="457200" y="1261872"/>
+            <a:ext cx="11277295" cy="320040"/>
+          </a:xfrm>
+          <a:prstGeom prst="rect">
+            <a:avLst/>
+          </a:prstGeom>
+          <a:solidFill>
+            <a:srgbClr val="095292"/>
+          </a:solidFill>
+          <a:ln>
+            <a:noFill/>
+          </a:ln>
+        </p:spPr>
+        <p:style>
+          <a:lnRef idx="1">
+            <a:schemeClr val="accent1"/>
+          </a:lnRef>
+          <a:fillRef idx="3">
+            <a:schemeClr val="accent1"/>
+          </a:fillRef>
+          <a:effectRef idx="2">
+            <a:schemeClr val="accent1"/>
+          </a:effectRef>
+          <a:fontRef idx="minor">
+            <a:schemeClr val="lt1"/>
+          </a:fontRef>
+        </p:style>
+        <p:txBody>
+          <a:bodyPr rtlCol="0" anchor="ctr"/>
+          <a:lstStyle/>
+          <a:p>
+            <a:pPr algn="ctr"/>
+          </a:p>
+        </p:txBody>
+      </p:sp>
+      <p:sp>
+        <p:nvSpPr>
+          <p:cNvPr id="7" name="TextBox 6"/>
           <p:cNvSpPr txBox="1"/>
           <p:nvPr/>
         </p:nvSpPr>
         <p:spPr>
           <a:xfrm>
-            <a:off x="457200" y="1170432"/>
-            <a:ext cx="11277295" cy="5230368"/>
+            <a:off x="685800" y="1307592"/>
+            <a:ext cx="10820095" cy="256032"/>
+          </a:xfrm>
+          <a:prstGeom prst="rect">
+            <a:avLst/>
+          </a:prstGeom>
+          <a:noFill/>
+        </p:spPr>
+        <p:txBody>
+          <a:bodyPr wrap="square" anchor="ctr"/>
+          <a:lstStyle/>
+          <a:p>
+            <a:r>
+              <a:rPr sz="1000" b="1" i="0">
+                <a:solidFill>
+                  <a:srgbClr val="269CCB"/>
+                </a:solidFill>
+                <a:latin typeface="Calibri"/>
+              </a:rPr>
+              <a:t>● ● ●</a:t>
+            </a:r>
+          </a:p>
+        </p:txBody>
+      </p:sp>
+      <p:sp>
+        <p:nvSpPr>
+          <p:cNvPr id="8" name="TextBox 7"/>
+          <p:cNvSpPr txBox="1"/>
+          <p:nvPr/>
+        </p:nvSpPr>
+        <p:spPr>
+          <a:xfrm>
+            <a:off x="777240" y="1719072"/>
+            <a:ext cx="10637215" cy="4453128"/>
           </a:xfrm>
           <a:prstGeom prst="rect">
             <a:avLst/>
@@ -6716,108 +6838,184 @@
           <a:p>
             <a:pPr>
               <a:spcAft>
-                <a:spcPts val="800"/>
+                <a:spcPts val="400"/>
               </a:spcAft>
             </a:pPr>
             <a:r>
-              <a:rPr sz="2000" b="0" i="0">
-                <a:solidFill>
-                  <a:srgbClr val="333333"/>
-                </a:solidFill>
-                <a:latin typeface="Calibri"/>
-              </a:rPr>
-              <a:t>–   </a:t>
-            </a:r>
-            <a:r>
-              <a:rPr sz="2000" b="1" i="0">
-                <a:solidFill>
-                  <a:srgbClr val="333333"/>
-                </a:solidFill>
-                <a:latin typeface="Calibri"/>
-              </a:rPr>
-              <a:t>Herramienta:</a:t>
-            </a:r>
-            <a:r>
-              <a:rPr sz="2000" b="0" i="0">
-                <a:solidFill>
-                  <a:srgbClr val="333333"/>
-                </a:solidFill>
-                <a:latin typeface="Calibri"/>
-              </a:rPr>
-              <a:t> Live SQL / DB Fiddle + draw.io + la plataforma del curso</a:t>
+              <a:rPr sz="1400" b="0" i="0">
+                <a:solidFill>
+                  <a:srgbClr val="FFFFFF"/>
+                </a:solidFill>
+                <a:latin typeface="Calibri"/>
+              </a:rPr>
+              <a:t>-- 1. estan las 8 tablas del modelo?</a:t>
             </a:r>
           </a:p>
           <a:p>
             <a:pPr>
               <a:spcAft>
-                <a:spcPts val="800"/>
+                <a:spcPts val="400"/>
               </a:spcAft>
             </a:pPr>
             <a:r>
-              <a:rPr sz="2000" b="0" i="0">
-                <a:solidFill>
-                  <a:srgbClr val="333333"/>
-                </a:solidFill>
-                <a:latin typeface="Calibri"/>
-              </a:rPr>
-              <a:t>–   </a:t>
-            </a:r>
-            <a:r>
-              <a:rPr sz="2000" b="1" i="0">
-                <a:solidFill>
-                  <a:srgbClr val="333333"/>
-                </a:solidFill>
-                <a:latin typeface="Calibri"/>
-              </a:rPr>
-              <a:t>Demo:</a:t>
-            </a:r>
-            <a:r>
-              <a:rPr sz="2000" b="0" i="0">
-                <a:solidFill>
-                  <a:srgbClr val="333333"/>
-                </a:solidFill>
-                <a:latin typeface="Calibri"/>
-              </a:rPr>
-              <a:t> Recorrido de checklist + ejemplo demo de 3 min.</a:t>
+              <a:rPr sz="1400" b="0" i="0">
+                <a:solidFill>
+                  <a:srgbClr val="FFFFFF"/>
+                </a:solidFill>
+                <a:latin typeface="Calibri"/>
+              </a:rPr>
+              <a:t>SELECT table_name FROM information_schema.tables</a:t>
             </a:r>
           </a:p>
           <a:p>
             <a:pPr>
               <a:spcAft>
-                <a:spcPts val="800"/>
+                <a:spcPts val="400"/>
               </a:spcAft>
             </a:pPr>
             <a:r>
-              <a:rPr sz="2000" b="0" i="0">
-                <a:solidFill>
-                  <a:srgbClr val="333333"/>
-                </a:solidFill>
-                <a:latin typeface="Calibri"/>
-              </a:rPr>
-              <a:t>–   Sigan el mismo dominio VetCare (no inventen otro caso).</a:t>
+              <a:rPr sz="1400" b="0" i="0">
+                <a:solidFill>
+                  <a:srgbClr val="FFFFFF"/>
+                </a:solidFill>
+                <a:latin typeface="Calibri"/>
+              </a:rPr>
+              <a:t>WHERE table_schema = 'public' ORDER BY table_name;</a:t>
             </a:r>
           </a:p>
           <a:p>
             <a:pPr>
               <a:spcAft>
-                <a:spcPts val="800"/>
+                <a:spcPts val="400"/>
               </a:spcAft>
             </a:pPr>
             <a:r>
-              <a:rPr sz="2000" b="0" i="0">
-                <a:solidFill>
-                  <a:srgbClr val="333333"/>
-                </a:solidFill>
-                <a:latin typeface="Calibri"/>
-              </a:rPr>
-              <a:t>–   Al final de la demo: dejar enlace/script compartible al grupo.</a:t>
-            </a:r>
-          </a:p>
-        </p:txBody>
-      </p:sp>
-      <p:sp>
-        <p:nvSpPr>
-          <p:cNvPr id="6" name="TextBox 5"/>
+              <a:rPr sz="1400" b="0" i="0">
+                <a:solidFill>
+                  <a:srgbClr val="FFFFFF"/>
+                </a:solidFill>
+                <a:latin typeface="Calibri"/>
+              </a:rPr>
+              <a:t/>
+            </a:r>
+          </a:p>
+          <a:p>
+            <a:pPr>
+              <a:spcAft>
+                <a:spcPts val="400"/>
+              </a:spcAft>
+            </a:pPr>
+            <a:r>
+              <a:rPr sz="1400" b="0" i="0">
+                <a:solidFill>
+                  <a:srgbClr val="FFFFFF"/>
+                </a:solidFill>
+                <a:latin typeface="Calibri"/>
+              </a:rPr>
+              <a:t>-- 2. tienen todas clave primaria?</a:t>
+            </a:r>
+          </a:p>
+          <a:p>
+            <a:pPr>
+              <a:spcAft>
+                <a:spcPts val="400"/>
+              </a:spcAft>
+            </a:pPr>
+            <a:r>
+              <a:rPr sz="1400" b="0" i="0">
+                <a:solidFill>
+                  <a:srgbClr val="FFFFFF"/>
+                </a:solidFill>
+                <a:latin typeface="Calibri"/>
+              </a:rPr>
+              <a:t>SELECT t.table_name</a:t>
+            </a:r>
+          </a:p>
+          <a:p>
+            <a:pPr>
+              <a:spcAft>
+                <a:spcPts val="400"/>
+              </a:spcAft>
+            </a:pPr>
+            <a:r>
+              <a:rPr sz="1400" b="0" i="0">
+                <a:solidFill>
+                  <a:srgbClr val="FFFFFF"/>
+                </a:solidFill>
+                <a:latin typeface="Calibri"/>
+              </a:rPr>
+              <a:t>FROM information_schema.tables t</a:t>
+            </a:r>
+          </a:p>
+          <a:p>
+            <a:pPr>
+              <a:spcAft>
+                <a:spcPts val="400"/>
+              </a:spcAft>
+            </a:pPr>
+            <a:r>
+              <a:rPr sz="1400" b="0" i="0">
+                <a:solidFill>
+                  <a:srgbClr val="FFFFFF"/>
+                </a:solidFill>
+                <a:latin typeface="Calibri"/>
+              </a:rPr>
+              <a:t>LEFT JOIN information_schema.table_constraints c</a:t>
+            </a:r>
+          </a:p>
+          <a:p>
+            <a:pPr>
+              <a:spcAft>
+                <a:spcPts val="400"/>
+              </a:spcAft>
+            </a:pPr>
+            <a:r>
+              <a:rPr sz="1400" b="0" i="0">
+                <a:solidFill>
+                  <a:srgbClr val="FFFFFF"/>
+                </a:solidFill>
+                <a:latin typeface="Calibri"/>
+              </a:rPr>
+              <a:t>       ON c.table_name = t.table_name AND c.constraint_type = 'PRIMARY KEY'</a:t>
+            </a:r>
+          </a:p>
+          <a:p>
+            <a:pPr>
+              <a:spcAft>
+                <a:spcPts val="400"/>
+              </a:spcAft>
+            </a:pPr>
+            <a:r>
+              <a:rPr sz="1400" b="0" i="0">
+                <a:solidFill>
+                  <a:srgbClr val="FFFFFF"/>
+                </a:solidFill>
+                <a:latin typeface="Calibri"/>
+              </a:rPr>
+              <a:t>WHERE t.table_schema = 'public' AND c.constraint_name IS NULL;</a:t>
+            </a:r>
+          </a:p>
+          <a:p>
+            <a:pPr>
+              <a:spcAft>
+                <a:spcPts val="400"/>
+              </a:spcAft>
+            </a:pPr>
+            <a:r>
+              <a:rPr sz="1400" b="0" i="0">
+                <a:solidFill>
+                  <a:srgbClr val="FFFFFF"/>
+                </a:solidFill>
+                <a:latin typeface="Calibri"/>
+              </a:rPr>
+              <a:t>-- cero filas = todas tienen PK</a:t>
+            </a:r>
+          </a:p>
+        </p:txBody>
+      </p:sp>
+      <p:sp>
+        <p:nvSpPr>
+          <p:cNvPr id="9" name="TextBox 8"/>
           <p:cNvSpPr txBox="1"/>
           <p:nvPr/>
         </p:nvSpPr>
@@ -6885,7 +7083,7 @@
         <p:spPr>
           <a:xfrm>
             <a:off x="0" y="0"/>
-            <a:ext cx="12191695" cy="1170432"/>
+            <a:ext cx="12191695" cy="960120"/>
           </a:xfrm>
           <a:prstGeom prst="rect">
             <a:avLst/>
@@ -6927,7 +7125,7 @@
         </p:nvSpPr>
         <p:spPr>
           <a:xfrm>
-            <a:off x="0" y="1170432"/>
+            <a:off x="0" y="960120"/>
             <a:ext cx="12191695" cy="41148"/>
           </a:xfrm>
           <a:prstGeom prst="rect">
@@ -6971,7 +7169,7 @@
         <p:spPr>
           <a:xfrm>
             <a:off x="457200" y="164592"/>
-            <a:ext cx="11277295" cy="384048"/>
+            <a:ext cx="11277295" cy="502920"/>
           </a:xfrm>
           <a:prstGeom prst="rect">
             <a:avLst/>
@@ -6991,55 +7189,21 @@
                 </a:solidFill>
                 <a:latin typeface="Calibri"/>
               </a:rPr>
-              <a:t>Herramientas de hoy</a:t>
-            </a:r>
-          </a:p>
-        </p:txBody>
-      </p:sp>
-      <p:sp>
-        <p:nvSpPr>
-          <p:cNvPr id="5" name="TextBox 4"/>
-          <p:cNvSpPr txBox="1"/>
-          <p:nvPr/>
-        </p:nvSpPr>
-        <p:spPr>
-          <a:xfrm>
-            <a:off x="457200" y="566928"/>
-            <a:ext cx="11277295" cy="411480"/>
-          </a:xfrm>
-          <a:prstGeom prst="rect">
-            <a:avLst/>
-          </a:prstGeom>
-          <a:noFill/>
-        </p:spPr>
-        <p:txBody>
-          <a:bodyPr wrap="square">
-            <a:spAutoFit/>
-          </a:bodyPr>
-          <a:lstStyle/>
-          <a:p>
-            <a:r>
-              <a:rPr sz="1400" b="0" i="0">
-                <a:solidFill>
-                  <a:srgbClr val="B8D8EE"/>
-                </a:solidFill>
-                <a:latin typeface="Calibri"/>
-              </a:rPr>
-              <a:t>Gratis · navegador o free tier</a:t>
-            </a:r>
-          </a:p>
-        </p:txBody>
-      </p:sp>
-      <p:sp>
-        <p:nvSpPr>
-          <p:cNvPr id="6" name="Rounded Rectangle 5"/>
+              <a:t>Integridad y objetos de negocio, contados</a:t>
+            </a:r>
+          </a:p>
+        </p:txBody>
+      </p:sp>
+      <p:sp>
+        <p:nvSpPr>
+          <p:cNvPr id="5" name="Rounded Rectangle 4"/>
           <p:cNvSpPr/>
           <p:nvPr/>
         </p:nvSpPr>
         <p:spPr>
           <a:xfrm>
-            <a:off x="457200" y="1591056"/>
-            <a:ext cx="3624986" cy="2299716"/>
+            <a:off x="457200" y="1261872"/>
+            <a:ext cx="11277295" cy="5093208"/>
           </a:xfrm>
           <a:prstGeom prst="roundRect">
             <a:avLst>
@@ -7047,7 +7211,7 @@
             </a:avLst>
           </a:prstGeom>
           <a:solidFill>
-            <a:srgbClr val="F2F2F2"/>
+            <a:srgbClr val="1E2A38"/>
           </a:solidFill>
           <a:ln>
             <a:noFill/>
@@ -7077,14 +7241,14 @@
       </p:sp>
       <p:sp>
         <p:nvSpPr>
-          <p:cNvPr id="7" name="Rectangle 6"/>
+          <p:cNvPr id="6" name="Rectangle 5"/>
           <p:cNvSpPr/>
           <p:nvPr/>
         </p:nvSpPr>
         <p:spPr>
           <a:xfrm>
-            <a:off x="457200" y="1591056"/>
-            <a:ext cx="3624986" cy="64008"/>
+            <a:off x="457200" y="1261872"/>
+            <a:ext cx="11277295" cy="320040"/>
           </a:xfrm>
           <a:prstGeom prst="rect">
             <a:avLst/>
@@ -7120,81 +7284,14 @@
       </p:sp>
       <p:sp>
         <p:nvSpPr>
-          <p:cNvPr id="8" name="Rectangle 7"/>
-          <p:cNvSpPr/>
-          <p:nvPr/>
-        </p:nvSpPr>
-        <p:spPr>
-          <a:xfrm>
-            <a:off x="457200" y="1655064"/>
-            <a:ext cx="3624986" cy="27432"/>
-          </a:xfrm>
-          <a:prstGeom prst="rect">
-            <a:avLst/>
-          </a:prstGeom>
-          <a:solidFill>
-            <a:srgbClr val="FFD000"/>
-          </a:solidFill>
-          <a:ln>
-            <a:noFill/>
-          </a:ln>
-        </p:spPr>
-        <p:style>
-          <a:lnRef idx="1">
-            <a:schemeClr val="accent1"/>
-          </a:lnRef>
-          <a:fillRef idx="3">
-            <a:schemeClr val="accent1"/>
-          </a:fillRef>
-          <a:effectRef idx="2">
-            <a:schemeClr val="accent1"/>
-          </a:effectRef>
-          <a:fontRef idx="minor">
-            <a:schemeClr val="lt1"/>
-          </a:fontRef>
-        </p:style>
-        <p:txBody>
-          <a:bodyPr rtlCol="0" anchor="ctr"/>
-          <a:lstStyle/>
-          <a:p>
-            <a:pPr algn="ctr"/>
-          </a:p>
-        </p:txBody>
-      </p:sp>
-      <p:pic>
-        <p:nvPicPr>
-          <p:cNvPr id="9" name="Picture 8" descr="oracle_livesql.png"/>
-          <p:cNvPicPr>
-            <a:picLocks noChangeAspect="1"/>
-          </p:cNvPicPr>
-          <p:nvPr/>
-        </p:nvPicPr>
-        <p:blipFill>
-          <a:blip r:embed="rId2"/>
-          <a:stretch>
-            <a:fillRect/>
-          </a:stretch>
-        </p:blipFill>
-        <p:spPr>
-          <a:xfrm>
-            <a:off x="1659331" y="1847087"/>
-            <a:ext cx="1220724" cy="1220724"/>
-          </a:xfrm>
-          <a:prstGeom prst="rect">
-            <a:avLst/>
-          </a:prstGeom>
-        </p:spPr>
-      </p:pic>
-      <p:sp>
-        <p:nvSpPr>
-          <p:cNvPr id="10" name="TextBox 9"/>
+          <p:cNvPr id="7" name="TextBox 6"/>
           <p:cNvSpPr txBox="1"/>
           <p:nvPr/>
         </p:nvSpPr>
         <p:spPr>
           <a:xfrm>
-            <a:off x="530352" y="3159251"/>
-            <a:ext cx="3478682" cy="621792"/>
+            <a:off x="685800" y="1307592"/>
+            <a:ext cx="10820095" cy="256032"/>
           </a:xfrm>
           <a:prstGeom prst="rect">
             <a:avLst/>
@@ -7202,653 +7299,271 @@
           <a:noFill/>
         </p:spPr>
         <p:txBody>
-          <a:bodyPr wrap="square" anchor="t"/>
-          <a:lstStyle/>
-          <a:p>
-            <a:pPr algn="ctr"/>
-            <a:r>
-              <a:rPr sz="1300" b="1" i="0">
-                <a:solidFill>
-                  <a:srgbClr val="095292"/>
-                </a:solidFill>
-                <a:latin typeface="Calibri"/>
-              </a:rPr>
-              <a:t>Oracle Live SQL</a:t>
-            </a:r>
-          </a:p>
-          <a:p>
-            <a:pPr algn="ctr">
-              <a:spcBef>
-                <a:spcPts val="200"/>
-              </a:spcBef>
+          <a:bodyPr wrap="square" anchor="ctr"/>
+          <a:lstStyle/>
+          <a:p>
+            <a:r>
+              <a:rPr sz="1000" b="1" i="0">
+                <a:solidFill>
+                  <a:srgbClr val="269CCB"/>
+                </a:solidFill>
+                <a:latin typeface="Calibri"/>
+              </a:rPr>
+              <a:t>● ● ●</a:t>
+            </a:r>
+          </a:p>
+        </p:txBody>
+      </p:sp>
+      <p:sp>
+        <p:nvSpPr>
+          <p:cNvPr id="8" name="TextBox 7"/>
+          <p:cNvSpPr txBox="1"/>
+          <p:nvPr/>
+        </p:nvSpPr>
+        <p:spPr>
+          <a:xfrm>
+            <a:off x="777240" y="1719072"/>
+            <a:ext cx="10637215" cy="4453128"/>
+          </a:xfrm>
+          <a:prstGeom prst="rect">
+            <a:avLst/>
+          </a:prstGeom>
+          <a:noFill/>
+        </p:spPr>
+        <p:txBody>
+          <a:bodyPr wrap="square">
+            <a:spAutoFit/>
+          </a:bodyPr>
+          <a:lstStyle/>
+          <a:p>
+            <a:pPr>
+              <a:spcAft>
+                <a:spcPts val="400"/>
+              </a:spcAft>
             </a:pPr>
             <a:r>
-              <a:rPr sz="1000" b="0" i="0">
-                <a:solidFill>
-                  <a:srgbClr val="666666"/>
-                </a:solidFill>
-                <a:latin typeface="Calibri"/>
-              </a:rPr>
-              <a:t>Demo procs</a:t>
-            </a:r>
-          </a:p>
-        </p:txBody>
-      </p:sp>
-      <p:sp>
-        <p:nvSpPr>
-          <p:cNvPr id="11" name="Rounded Rectangle 10"/>
-          <p:cNvSpPr/>
-          <p:nvPr/>
-        </p:nvSpPr>
-        <p:spPr>
-          <a:xfrm>
-            <a:off x="4283354" y="1591056"/>
-            <a:ext cx="3624986" cy="2299716"/>
-          </a:xfrm>
-          <a:prstGeom prst="roundRect">
-            <a:avLst>
-              <a:gd name="adj" fmla="val 12000"/>
-            </a:avLst>
-          </a:prstGeom>
-          <a:solidFill>
-            <a:srgbClr val="F2F2F2"/>
-          </a:solidFill>
-          <a:ln>
-            <a:noFill/>
-          </a:ln>
-        </p:spPr>
-        <p:style>
-          <a:lnRef idx="1">
-            <a:schemeClr val="accent1"/>
-          </a:lnRef>
-          <a:fillRef idx="3">
-            <a:schemeClr val="accent1"/>
-          </a:fillRef>
-          <a:effectRef idx="2">
-            <a:schemeClr val="accent1"/>
-          </a:effectRef>
-          <a:fontRef idx="minor">
-            <a:schemeClr val="lt1"/>
-          </a:fontRef>
-        </p:style>
-        <p:txBody>
-          <a:bodyPr rtlCol="0" anchor="ctr"/>
-          <a:lstStyle/>
-          <a:p>
-            <a:pPr algn="ctr"/>
-          </a:p>
-        </p:txBody>
-      </p:sp>
-      <p:sp>
-        <p:nvSpPr>
-          <p:cNvPr id="12" name="Rectangle 11"/>
-          <p:cNvSpPr/>
-          <p:nvPr/>
-        </p:nvSpPr>
-        <p:spPr>
-          <a:xfrm>
-            <a:off x="4283354" y="1591056"/>
-            <a:ext cx="3624986" cy="64008"/>
-          </a:xfrm>
-          <a:prstGeom prst="rect">
-            <a:avLst/>
-          </a:prstGeom>
-          <a:solidFill>
-            <a:srgbClr val="095292"/>
-          </a:solidFill>
-          <a:ln>
-            <a:noFill/>
-          </a:ln>
-        </p:spPr>
-        <p:style>
-          <a:lnRef idx="1">
-            <a:schemeClr val="accent1"/>
-          </a:lnRef>
-          <a:fillRef idx="3">
-            <a:schemeClr val="accent1"/>
-          </a:fillRef>
-          <a:effectRef idx="2">
-            <a:schemeClr val="accent1"/>
-          </a:effectRef>
-          <a:fontRef idx="minor">
-            <a:schemeClr val="lt1"/>
-          </a:fontRef>
-        </p:style>
-        <p:txBody>
-          <a:bodyPr rtlCol="0" anchor="ctr"/>
-          <a:lstStyle/>
-          <a:p>
-            <a:pPr algn="ctr"/>
-          </a:p>
-        </p:txBody>
-      </p:sp>
-      <p:sp>
-        <p:nvSpPr>
-          <p:cNvPr id="13" name="Rectangle 12"/>
-          <p:cNvSpPr/>
-          <p:nvPr/>
-        </p:nvSpPr>
-        <p:spPr>
-          <a:xfrm>
-            <a:off x="4283354" y="1655064"/>
-            <a:ext cx="3624986" cy="27432"/>
-          </a:xfrm>
-          <a:prstGeom prst="rect">
-            <a:avLst/>
-          </a:prstGeom>
-          <a:solidFill>
-            <a:srgbClr val="FFD000"/>
-          </a:solidFill>
-          <a:ln>
-            <a:noFill/>
-          </a:ln>
-        </p:spPr>
-        <p:style>
-          <a:lnRef idx="1">
-            <a:schemeClr val="accent1"/>
-          </a:lnRef>
-          <a:fillRef idx="3">
-            <a:schemeClr val="accent1"/>
-          </a:fillRef>
-          <a:effectRef idx="2">
-            <a:schemeClr val="accent1"/>
-          </a:effectRef>
-          <a:fontRef idx="minor">
-            <a:schemeClr val="lt1"/>
-          </a:fontRef>
-        </p:style>
-        <p:txBody>
-          <a:bodyPr rtlCol="0" anchor="ctr"/>
-          <a:lstStyle/>
-          <a:p>
-            <a:pPr algn="ctr"/>
-          </a:p>
-        </p:txBody>
-      </p:sp>
-      <p:pic>
-        <p:nvPicPr>
-          <p:cNvPr id="14" name="Picture 13" descr="drawio.png"/>
-          <p:cNvPicPr>
-            <a:picLocks noChangeAspect="1"/>
-          </p:cNvPicPr>
-          <p:nvPr/>
-        </p:nvPicPr>
-        <p:blipFill>
-          <a:blip r:embed="rId3"/>
-          <a:stretch>
-            <a:fillRect/>
-          </a:stretch>
-        </p:blipFill>
-        <p:spPr>
-          <a:xfrm>
-            <a:off x="5485485" y="1847087"/>
-            <a:ext cx="1220724" cy="1220724"/>
-          </a:xfrm>
-          <a:prstGeom prst="rect">
-            <a:avLst/>
-          </a:prstGeom>
-        </p:spPr>
-      </p:pic>
-      <p:sp>
-        <p:nvSpPr>
-          <p:cNvPr id="15" name="TextBox 14"/>
-          <p:cNvSpPr txBox="1"/>
-          <p:nvPr/>
-        </p:nvSpPr>
-        <p:spPr>
-          <a:xfrm>
-            <a:off x="4356506" y="3159251"/>
-            <a:ext cx="3478682" cy="621792"/>
-          </a:xfrm>
-          <a:prstGeom prst="rect">
-            <a:avLst/>
-          </a:prstGeom>
-          <a:noFill/>
-        </p:spPr>
-        <p:txBody>
-          <a:bodyPr wrap="square" anchor="t"/>
-          <a:lstStyle/>
-          <a:p>
-            <a:pPr algn="ctr"/>
-            <a:r>
-              <a:rPr sz="1300" b="1" i="0">
-                <a:solidFill>
-                  <a:srgbClr val="095292"/>
-                </a:solidFill>
-                <a:latin typeface="Calibri"/>
-              </a:rPr>
-              <a:t>draw.io</a:t>
-            </a:r>
-          </a:p>
-          <a:p>
-            <a:pPr algn="ctr">
-              <a:spcBef>
-                <a:spcPts val="200"/>
-              </a:spcBef>
+              <a:rPr sz="1400" b="0" i="0">
+                <a:solidFill>
+                  <a:srgbClr val="FFFFFF"/>
+                </a:solidFill>
+                <a:latin typeface="Calibri"/>
+              </a:rPr>
+              <a:t>-- 3. las claves foraneas declaradas</a:t>
+            </a:r>
+          </a:p>
+          <a:p>
+            <a:pPr>
+              <a:spcAft>
+                <a:spcPts val="400"/>
+              </a:spcAft>
             </a:pPr>
             <a:r>
-              <a:rPr sz="1000" b="0" i="0">
-                <a:solidFill>
-                  <a:srgbClr val="666666"/>
-                </a:solidFill>
-                <a:latin typeface="Calibri"/>
-              </a:rPr>
-              <a:t>ER</a:t>
-            </a:r>
-          </a:p>
-        </p:txBody>
-      </p:sp>
-      <p:sp>
-        <p:nvSpPr>
-          <p:cNvPr id="16" name="Rounded Rectangle 15"/>
-          <p:cNvSpPr/>
-          <p:nvPr/>
-        </p:nvSpPr>
-        <p:spPr>
-          <a:xfrm>
-            <a:off x="8109508" y="1591056"/>
-            <a:ext cx="3624986" cy="2299716"/>
-          </a:xfrm>
-          <a:prstGeom prst="roundRect">
-            <a:avLst>
-              <a:gd name="adj" fmla="val 12000"/>
-            </a:avLst>
-          </a:prstGeom>
-          <a:solidFill>
-            <a:srgbClr val="F2F2F2"/>
-          </a:solidFill>
-          <a:ln>
-            <a:noFill/>
-          </a:ln>
-        </p:spPr>
-        <p:style>
-          <a:lnRef idx="1">
-            <a:schemeClr val="accent1"/>
-          </a:lnRef>
-          <a:fillRef idx="3">
-            <a:schemeClr val="accent1"/>
-          </a:fillRef>
-          <a:effectRef idx="2">
-            <a:schemeClr val="accent1"/>
-          </a:effectRef>
-          <a:fontRef idx="minor">
-            <a:schemeClr val="lt1"/>
-          </a:fontRef>
-        </p:style>
-        <p:txBody>
-          <a:bodyPr rtlCol="0" anchor="ctr"/>
-          <a:lstStyle/>
-          <a:p>
-            <a:pPr algn="ctr"/>
-          </a:p>
-        </p:txBody>
-      </p:sp>
-      <p:sp>
-        <p:nvSpPr>
-          <p:cNvPr id="17" name="Rectangle 16"/>
-          <p:cNvSpPr/>
-          <p:nvPr/>
-        </p:nvSpPr>
-        <p:spPr>
-          <a:xfrm>
-            <a:off x="8109508" y="1591056"/>
-            <a:ext cx="3624986" cy="64008"/>
-          </a:xfrm>
-          <a:prstGeom prst="rect">
-            <a:avLst/>
-          </a:prstGeom>
-          <a:solidFill>
-            <a:srgbClr val="095292"/>
-          </a:solidFill>
-          <a:ln>
-            <a:noFill/>
-          </a:ln>
-        </p:spPr>
-        <p:style>
-          <a:lnRef idx="1">
-            <a:schemeClr val="accent1"/>
-          </a:lnRef>
-          <a:fillRef idx="3">
-            <a:schemeClr val="accent1"/>
-          </a:fillRef>
-          <a:effectRef idx="2">
-            <a:schemeClr val="accent1"/>
-          </a:effectRef>
-          <a:fontRef idx="minor">
-            <a:schemeClr val="lt1"/>
-          </a:fontRef>
-        </p:style>
-        <p:txBody>
-          <a:bodyPr rtlCol="0" anchor="ctr"/>
-          <a:lstStyle/>
-          <a:p>
-            <a:pPr algn="ctr"/>
-          </a:p>
-        </p:txBody>
-      </p:sp>
-      <p:sp>
-        <p:nvSpPr>
-          <p:cNvPr id="18" name="Rectangle 17"/>
-          <p:cNvSpPr/>
-          <p:nvPr/>
-        </p:nvSpPr>
-        <p:spPr>
-          <a:xfrm>
-            <a:off x="8109508" y="1655064"/>
-            <a:ext cx="3624986" cy="27432"/>
-          </a:xfrm>
-          <a:prstGeom prst="rect">
-            <a:avLst/>
-          </a:prstGeom>
-          <a:solidFill>
-            <a:srgbClr val="FFD000"/>
-          </a:solidFill>
-          <a:ln>
-            <a:noFill/>
-          </a:ln>
-        </p:spPr>
-        <p:style>
-          <a:lnRef idx="1">
-            <a:schemeClr val="accent1"/>
-          </a:lnRef>
-          <a:fillRef idx="3">
-            <a:schemeClr val="accent1"/>
-          </a:fillRef>
-          <a:effectRef idx="2">
-            <a:schemeClr val="accent1"/>
-          </a:effectRef>
-          <a:fontRef idx="minor">
-            <a:schemeClr val="lt1"/>
-          </a:fontRef>
-        </p:style>
-        <p:txBody>
-          <a:bodyPr rtlCol="0" anchor="ctr"/>
-          <a:lstStyle/>
-          <a:p>
-            <a:pPr algn="ctr"/>
-          </a:p>
-        </p:txBody>
-      </p:sp>
-      <p:pic>
-        <p:nvPicPr>
-          <p:cNvPr id="19" name="Picture 18" descr="dbfiddle.png"/>
-          <p:cNvPicPr>
-            <a:picLocks noChangeAspect="1"/>
-          </p:cNvPicPr>
-          <p:nvPr/>
-        </p:nvPicPr>
-        <p:blipFill>
-          <a:blip r:embed="rId4"/>
-          <a:stretch>
-            <a:fillRect/>
-          </a:stretch>
-        </p:blipFill>
-        <p:spPr>
-          <a:xfrm>
-            <a:off x="9311640" y="1847087"/>
-            <a:ext cx="1220724" cy="1220724"/>
-          </a:xfrm>
-          <a:prstGeom prst="rect">
-            <a:avLst/>
-          </a:prstGeom>
-        </p:spPr>
-      </p:pic>
-      <p:sp>
-        <p:nvSpPr>
-          <p:cNvPr id="20" name="TextBox 19"/>
-          <p:cNvSpPr txBox="1"/>
-          <p:nvPr/>
-        </p:nvSpPr>
-        <p:spPr>
-          <a:xfrm>
-            <a:off x="8182660" y="3159251"/>
-            <a:ext cx="3478682" cy="621792"/>
-          </a:xfrm>
-          <a:prstGeom prst="rect">
-            <a:avLst/>
-          </a:prstGeom>
-          <a:noFill/>
-        </p:spPr>
-        <p:txBody>
-          <a:bodyPr wrap="square" anchor="t"/>
-          <a:lstStyle/>
-          <a:p>
-            <a:pPr algn="ctr"/>
-            <a:r>
-              <a:rPr sz="1300" b="1" i="0">
-                <a:solidFill>
-                  <a:srgbClr val="095292"/>
-                </a:solidFill>
-                <a:latin typeface="Calibri"/>
-              </a:rPr>
-              <a:t>DB Fiddle</a:t>
-            </a:r>
-          </a:p>
-          <a:p>
-            <a:pPr algn="ctr">
-              <a:spcBef>
-                <a:spcPts val="200"/>
-              </a:spcBef>
+              <a:rPr sz="1400" b="0" i="0">
+                <a:solidFill>
+                  <a:srgbClr val="FFFFFF"/>
+                </a:solidFill>
+                <a:latin typeface="Calibri"/>
+              </a:rPr>
+              <a:t>SELECT tc.table_name, kcu.column_name, ccu.table_name AS referencia</a:t>
+            </a:r>
+          </a:p>
+          <a:p>
+            <a:pPr>
+              <a:spcAft>
+                <a:spcPts val="400"/>
+              </a:spcAft>
             </a:pPr>
             <a:r>
-              <a:rPr sz="1000" b="0" i="0">
-                <a:solidFill>
-                  <a:srgbClr val="666666"/>
-                </a:solidFill>
-                <a:latin typeface="Calibri"/>
-              </a:rPr>
-              <a:t>DDL</a:t>
-            </a:r>
-          </a:p>
-        </p:txBody>
-      </p:sp>
-      <p:sp>
-        <p:nvSpPr>
-          <p:cNvPr id="21" name="Rounded Rectangle 20"/>
-          <p:cNvSpPr/>
-          <p:nvPr/>
-        </p:nvSpPr>
-        <p:spPr>
-          <a:xfrm>
-            <a:off x="4283354" y="4055364"/>
-            <a:ext cx="3624986" cy="2299716"/>
-          </a:xfrm>
-          <a:prstGeom prst="roundRect">
-            <a:avLst>
-              <a:gd name="adj" fmla="val 12000"/>
-            </a:avLst>
-          </a:prstGeom>
-          <a:solidFill>
-            <a:srgbClr val="F2F2F2"/>
-          </a:solidFill>
-          <a:ln>
-            <a:noFill/>
-          </a:ln>
-        </p:spPr>
-        <p:style>
-          <a:lnRef idx="1">
-            <a:schemeClr val="accent1"/>
-          </a:lnRef>
-          <a:fillRef idx="3">
-            <a:schemeClr val="accent1"/>
-          </a:fillRef>
-          <a:effectRef idx="2">
-            <a:schemeClr val="accent1"/>
-          </a:effectRef>
-          <a:fontRef idx="minor">
-            <a:schemeClr val="lt1"/>
-          </a:fontRef>
-        </p:style>
-        <p:txBody>
-          <a:bodyPr rtlCol="0" anchor="ctr"/>
-          <a:lstStyle/>
-          <a:p>
-            <a:pPr algn="ctr"/>
-          </a:p>
-        </p:txBody>
-      </p:sp>
-      <p:sp>
-        <p:nvSpPr>
-          <p:cNvPr id="22" name="Rectangle 21"/>
-          <p:cNvSpPr/>
-          <p:nvPr/>
-        </p:nvSpPr>
-        <p:spPr>
-          <a:xfrm>
-            <a:off x="4283354" y="4055364"/>
-            <a:ext cx="3624986" cy="64008"/>
-          </a:xfrm>
-          <a:prstGeom prst="rect">
-            <a:avLst/>
-          </a:prstGeom>
-          <a:solidFill>
-            <a:srgbClr val="095292"/>
-          </a:solidFill>
-          <a:ln>
-            <a:noFill/>
-          </a:ln>
-        </p:spPr>
-        <p:style>
-          <a:lnRef idx="1">
-            <a:schemeClr val="accent1"/>
-          </a:lnRef>
-          <a:fillRef idx="3">
-            <a:schemeClr val="accent1"/>
-          </a:fillRef>
-          <a:effectRef idx="2">
-            <a:schemeClr val="accent1"/>
-          </a:effectRef>
-          <a:fontRef idx="minor">
-            <a:schemeClr val="lt1"/>
-          </a:fontRef>
-        </p:style>
-        <p:txBody>
-          <a:bodyPr rtlCol="0" anchor="ctr"/>
-          <a:lstStyle/>
-          <a:p>
-            <a:pPr algn="ctr"/>
-          </a:p>
-        </p:txBody>
-      </p:sp>
-      <p:sp>
-        <p:nvSpPr>
-          <p:cNvPr id="23" name="Rectangle 22"/>
-          <p:cNvSpPr/>
-          <p:nvPr/>
-        </p:nvSpPr>
-        <p:spPr>
-          <a:xfrm>
-            <a:off x="4283354" y="4119372"/>
-            <a:ext cx="3624986" cy="27432"/>
-          </a:xfrm>
-          <a:prstGeom prst="rect">
-            <a:avLst/>
-          </a:prstGeom>
-          <a:solidFill>
-            <a:srgbClr val="FFD000"/>
-          </a:solidFill>
-          <a:ln>
-            <a:noFill/>
-          </a:ln>
-        </p:spPr>
-        <p:style>
-          <a:lnRef idx="1">
-            <a:schemeClr val="accent1"/>
-          </a:lnRef>
-          <a:fillRef idx="3">
-            <a:schemeClr val="accent1"/>
-          </a:fillRef>
-          <a:effectRef idx="2">
-            <a:schemeClr val="accent1"/>
-          </a:effectRef>
-          <a:fontRef idx="minor">
-            <a:schemeClr val="lt1"/>
-          </a:fontRef>
-        </p:style>
-        <p:txBody>
-          <a:bodyPr rtlCol="0" anchor="ctr"/>
-          <a:lstStyle/>
-          <a:p>
-            <a:pPr algn="ctr"/>
-          </a:p>
-        </p:txBody>
-      </p:sp>
-      <p:pic>
-        <p:nvPicPr>
-          <p:cNvPr id="24" name="Picture 23" descr="google_docs.png"/>
-          <p:cNvPicPr>
-            <a:picLocks noChangeAspect="1"/>
-          </p:cNvPicPr>
-          <p:nvPr/>
-        </p:nvPicPr>
-        <p:blipFill>
-          <a:blip r:embed="rId5"/>
-          <a:stretch>
-            <a:fillRect/>
-          </a:stretch>
-        </p:blipFill>
-        <p:spPr>
-          <a:xfrm>
-            <a:off x="5485485" y="4311396"/>
-            <a:ext cx="1220724" cy="1220724"/>
-          </a:xfrm>
-          <a:prstGeom prst="rect">
-            <a:avLst/>
-          </a:prstGeom>
-        </p:spPr>
-      </p:pic>
-      <p:sp>
-        <p:nvSpPr>
-          <p:cNvPr id="25" name="TextBox 24"/>
-          <p:cNvSpPr txBox="1"/>
-          <p:nvPr/>
-        </p:nvSpPr>
-        <p:spPr>
-          <a:xfrm>
-            <a:off x="4356506" y="5623560"/>
-            <a:ext cx="3478682" cy="621792"/>
-          </a:xfrm>
-          <a:prstGeom prst="rect">
-            <a:avLst/>
-          </a:prstGeom>
-          <a:noFill/>
-        </p:spPr>
-        <p:txBody>
-          <a:bodyPr wrap="square" anchor="t"/>
-          <a:lstStyle/>
-          <a:p>
-            <a:pPr algn="ctr"/>
-            <a:r>
-              <a:rPr sz="1300" b="1" i="0">
-                <a:solidFill>
-                  <a:srgbClr val="095292"/>
-                </a:solidFill>
-                <a:latin typeface="Calibri"/>
-              </a:rPr>
-              <a:t>Google Docs</a:t>
-            </a:r>
-          </a:p>
-          <a:p>
-            <a:pPr algn="ctr">
-              <a:spcBef>
-                <a:spcPts val="200"/>
-              </a:spcBef>
+              <a:rPr sz="1400" b="0" i="0">
+                <a:solidFill>
+                  <a:srgbClr val="FFFFFF"/>
+                </a:solidFill>
+                <a:latin typeface="Calibri"/>
+              </a:rPr>
+              <a:t>FROM information_schema.table_constraints tc</a:t>
+            </a:r>
+          </a:p>
+          <a:p>
+            <a:pPr>
+              <a:spcAft>
+                <a:spcPts val="400"/>
+              </a:spcAft>
             </a:pPr>
             <a:r>
-              <a:rPr sz="1000" b="0" i="0">
-                <a:solidFill>
-                  <a:srgbClr val="666666"/>
-                </a:solidFill>
-                <a:latin typeface="Calibri"/>
-              </a:rPr>
-              <a:t>Checklist</a:t>
-            </a:r>
-          </a:p>
-        </p:txBody>
-      </p:sp>
-      <p:sp>
-        <p:nvSpPr>
-          <p:cNvPr id="26" name="TextBox 25"/>
+              <a:rPr sz="1400" b="0" i="0">
+                <a:solidFill>
+                  <a:srgbClr val="FFFFFF"/>
+                </a:solidFill>
+                <a:latin typeface="Calibri"/>
+              </a:rPr>
+              <a:t>JOIN information_schema.key_column_usage kcu</a:t>
+            </a:r>
+          </a:p>
+          <a:p>
+            <a:pPr>
+              <a:spcAft>
+                <a:spcPts val="400"/>
+              </a:spcAft>
+            </a:pPr>
+            <a:r>
+              <a:rPr sz="1400" b="0" i="0">
+                <a:solidFill>
+                  <a:srgbClr val="FFFFFF"/>
+                </a:solidFill>
+                <a:latin typeface="Calibri"/>
+              </a:rPr>
+              <a:t>     ON kcu.constraint_name = tc.constraint_name</a:t>
+            </a:r>
+          </a:p>
+          <a:p>
+            <a:pPr>
+              <a:spcAft>
+                <a:spcPts val="400"/>
+              </a:spcAft>
+            </a:pPr>
+            <a:r>
+              <a:rPr sz="1400" b="0" i="0">
+                <a:solidFill>
+                  <a:srgbClr val="FFFFFF"/>
+                </a:solidFill>
+                <a:latin typeface="Calibri"/>
+              </a:rPr>
+              <a:t>JOIN information_schema.constraint_column_usage ccu</a:t>
+            </a:r>
+          </a:p>
+          <a:p>
+            <a:pPr>
+              <a:spcAft>
+                <a:spcPts val="400"/>
+              </a:spcAft>
+            </a:pPr>
+            <a:r>
+              <a:rPr sz="1400" b="0" i="0">
+                <a:solidFill>
+                  <a:srgbClr val="FFFFFF"/>
+                </a:solidFill>
+                <a:latin typeface="Calibri"/>
+              </a:rPr>
+              <a:t>     ON ccu.constraint_name = tc.constraint_name</a:t>
+            </a:r>
+          </a:p>
+          <a:p>
+            <a:pPr>
+              <a:spcAft>
+                <a:spcPts val="400"/>
+              </a:spcAft>
+            </a:pPr>
+            <a:r>
+              <a:rPr sz="1400" b="0" i="0">
+                <a:solidFill>
+                  <a:srgbClr val="FFFFFF"/>
+                </a:solidFill>
+                <a:latin typeface="Calibri"/>
+              </a:rPr>
+              <a:t>WHERE tc.constraint_type = 'FOREIGN KEY'</a:t>
+            </a:r>
+          </a:p>
+          <a:p>
+            <a:pPr>
+              <a:spcAft>
+                <a:spcPts val="400"/>
+              </a:spcAft>
+            </a:pPr>
+            <a:r>
+              <a:rPr sz="1400" b="0" i="0">
+                <a:solidFill>
+                  <a:srgbClr val="FFFFFF"/>
+                </a:solidFill>
+                <a:latin typeface="Calibri"/>
+              </a:rPr>
+              <a:t>ORDER BY tc.table_name;</a:t>
+            </a:r>
+          </a:p>
+          <a:p>
+            <a:pPr>
+              <a:spcAft>
+                <a:spcPts val="400"/>
+              </a:spcAft>
+            </a:pPr>
+            <a:r>
+              <a:rPr sz="1400" b="0" i="0">
+                <a:solidFill>
+                  <a:srgbClr val="FFFFFF"/>
+                </a:solidFill>
+                <a:latin typeface="Calibri"/>
+              </a:rPr>
+              <a:t/>
+            </a:r>
+          </a:p>
+          <a:p>
+            <a:pPr>
+              <a:spcAft>
+                <a:spcPts val="400"/>
+              </a:spcAft>
+            </a:pPr>
+            <a:r>
+              <a:rPr sz="1400" b="0" i="0">
+                <a:solidFill>
+                  <a:srgbClr val="FFFFFF"/>
+                </a:solidFill>
+                <a:latin typeface="Calibri"/>
+              </a:rPr>
+              <a:t>-- 4. procedimientos, funciones y triggers que existen de verdad</a:t>
+            </a:r>
+          </a:p>
+          <a:p>
+            <a:pPr>
+              <a:spcAft>
+                <a:spcPts val="400"/>
+              </a:spcAft>
+            </a:pPr>
+            <a:r>
+              <a:rPr sz="1400" b="0" i="0">
+                <a:solidFill>
+                  <a:srgbClr val="FFFFFF"/>
+                </a:solidFill>
+                <a:latin typeface="Calibri"/>
+              </a:rPr>
+              <a:t>SELECT routine_name, routine_type FROM information_schema.routines</a:t>
+            </a:r>
+          </a:p>
+          <a:p>
+            <a:pPr>
+              <a:spcAft>
+                <a:spcPts val="400"/>
+              </a:spcAft>
+            </a:pPr>
+            <a:r>
+              <a:rPr sz="1400" b="0" i="0">
+                <a:solidFill>
+                  <a:srgbClr val="FFFFFF"/>
+                </a:solidFill>
+                <a:latin typeface="Calibri"/>
+              </a:rPr>
+              <a:t>WHERE routine_schema = 'public' ORDER BY routine_name;</a:t>
+            </a:r>
+          </a:p>
+          <a:p>
+            <a:pPr>
+              <a:spcAft>
+                <a:spcPts val="400"/>
+              </a:spcAft>
+            </a:pPr>
+            <a:r>
+              <a:rPr sz="1400" b="0" i="0">
+                <a:solidFill>
+                  <a:srgbClr val="FFFFFF"/>
+                </a:solidFill>
+                <a:latin typeface="Calibri"/>
+              </a:rPr>
+              <a:t>SELECT trigger_name, event_object_table FROM information_schema.triggers;</a:t>
+            </a:r>
+          </a:p>
+        </p:txBody>
+      </p:sp>
+      <p:sp>
+        <p:nvSpPr>
+          <p:cNvPr id="9" name="TextBox 8"/>
           <p:cNvSpPr txBox="1"/>
           <p:nvPr/>
         </p:nvSpPr>
@@ -7916,7 +7631,7 @@
         <p:spPr>
           <a:xfrm>
             <a:off x="0" y="0"/>
-            <a:ext cx="12191695" cy="1170432"/>
+            <a:ext cx="12191695" cy="960120"/>
           </a:xfrm>
           <a:prstGeom prst="rect">
             <a:avLst/>
@@ -7958,7 +7673,7 @@
         </p:nvSpPr>
         <p:spPr>
           <a:xfrm>
-            <a:off x="0" y="1170432"/>
+            <a:off x="0" y="960120"/>
             <a:ext cx="12191695" cy="41148"/>
           </a:xfrm>
           <a:prstGeom prst="rect">
@@ -8002,7 +7717,7 @@
         <p:spPr>
           <a:xfrm>
             <a:off x="457200" y="164592"/>
-            <a:ext cx="11277295" cy="384048"/>
+            <a:ext cx="11277295" cy="502920"/>
           </a:xfrm>
           <a:prstGeom prst="rect">
             <a:avLst/>
@@ -8022,7 +7737,7 @@
                 </a:solidFill>
                 <a:latin typeface="Calibri"/>
               </a:rPr>
-              <a:t>Del boceto a la plataforma del curso (diagrama)</a:t>
+              <a:t>Demo del dia</a:t>
             </a:r>
           </a:p>
         </p:txBody>
@@ -8035,8 +7750,8 @@
         </p:nvSpPr>
         <p:spPr>
           <a:xfrm>
-            <a:off x="457200" y="566928"/>
-            <a:ext cx="11277295" cy="411480"/>
+            <a:off x="457200" y="1170432"/>
+            <a:ext cx="11277295" cy="5230368"/>
           </a:xfrm>
           <a:prstGeom prst="rect">
             <a:avLst/>
@@ -8049,705 +7764,110 @@
           </a:bodyPr>
           <a:lstStyle/>
           <a:p>
-            <a:r>
-              <a:rPr sz="1400" b="0" i="0">
-                <a:solidFill>
-                  <a:srgbClr val="B8D8EE"/>
-                </a:solidFill>
-                <a:latin typeface="Calibri"/>
-              </a:rPr>
-              <a:t>El diagrama se entrega como codigo Mermaid dentro de la plataforma del curso, no como imagen</a:t>
-            </a:r>
-          </a:p>
-        </p:txBody>
-      </p:sp>
-      <p:sp>
-        <p:nvSpPr>
-          <p:cNvPr id="6" name="Rounded Rectangle 5"/>
-          <p:cNvSpPr/>
-          <p:nvPr/>
-        </p:nvSpPr>
-        <p:spPr>
-          <a:xfrm>
-            <a:off x="457200" y="1659636"/>
-            <a:ext cx="11277295" cy="1051560"/>
-          </a:xfrm>
-          <a:prstGeom prst="roundRect">
-            <a:avLst>
-              <a:gd name="adj" fmla="val 12000"/>
-            </a:avLst>
-          </a:prstGeom>
-          <a:solidFill>
-            <a:srgbClr val="F2F2F2"/>
-          </a:solidFill>
-          <a:ln>
-            <a:noFill/>
-          </a:ln>
-        </p:spPr>
-        <p:style>
-          <a:lnRef idx="1">
-            <a:schemeClr val="accent1"/>
-          </a:lnRef>
-          <a:fillRef idx="3">
-            <a:schemeClr val="accent1"/>
-          </a:fillRef>
-          <a:effectRef idx="2">
-            <a:schemeClr val="accent1"/>
-          </a:effectRef>
-          <a:fontRef idx="minor">
-            <a:schemeClr val="lt1"/>
-          </a:fontRef>
-        </p:style>
-        <p:txBody>
-          <a:bodyPr rtlCol="0" anchor="ctr"/>
-          <a:lstStyle/>
-          <a:p>
-            <a:pPr algn="ctr"/>
-          </a:p>
-        </p:txBody>
-      </p:sp>
-      <p:sp>
-        <p:nvSpPr>
-          <p:cNvPr id="7" name="Rounded Rectangle 6"/>
-          <p:cNvSpPr/>
-          <p:nvPr/>
-        </p:nvSpPr>
-        <p:spPr>
-          <a:xfrm>
-            <a:off x="594360" y="1965960"/>
-            <a:ext cx="438912" cy="438912"/>
-          </a:xfrm>
-          <a:prstGeom prst="roundRect">
-            <a:avLst>
-              <a:gd name="adj" fmla="val 12000"/>
-            </a:avLst>
-          </a:prstGeom>
-          <a:solidFill>
-            <a:srgbClr val="095292"/>
-          </a:solidFill>
-          <a:ln>
-            <a:noFill/>
-          </a:ln>
-        </p:spPr>
-        <p:style>
-          <a:lnRef idx="1">
-            <a:schemeClr val="accent1"/>
-          </a:lnRef>
-          <a:fillRef idx="3">
-            <a:schemeClr val="accent1"/>
-          </a:fillRef>
-          <a:effectRef idx="2">
-            <a:schemeClr val="accent1"/>
-          </a:effectRef>
-          <a:fontRef idx="minor">
-            <a:schemeClr val="lt1"/>
-          </a:fontRef>
-        </p:style>
-        <p:txBody>
-          <a:bodyPr rtlCol="0" anchor="ctr"/>
-          <a:lstStyle/>
-          <a:p>
-            <a:pPr algn="ctr"/>
-          </a:p>
-        </p:txBody>
-      </p:sp>
-      <p:sp>
-        <p:nvSpPr>
-          <p:cNvPr id="8" name="TextBox 7"/>
-          <p:cNvSpPr txBox="1"/>
-          <p:nvPr/>
-        </p:nvSpPr>
-        <p:spPr>
-          <a:xfrm>
-            <a:off x="594360" y="1965960"/>
-            <a:ext cx="438912" cy="438912"/>
-          </a:xfrm>
-          <a:prstGeom prst="rect">
-            <a:avLst/>
-          </a:prstGeom>
-          <a:noFill/>
-        </p:spPr>
-        <p:txBody>
-          <a:bodyPr wrap="square" anchor="ctr"/>
-          <a:lstStyle/>
-          <a:p>
-            <a:pPr algn="ctr"/>
-            <a:r>
-              <a:rPr sz="1600" b="1" i="0">
-                <a:solidFill>
-                  <a:srgbClr val="FFFFFF"/>
-                </a:solidFill>
-                <a:latin typeface="Calibri"/>
-              </a:rPr>
-              <a:t>1</a:t>
-            </a:r>
-          </a:p>
-        </p:txBody>
-      </p:sp>
-      <p:sp>
-        <p:nvSpPr>
-          <p:cNvPr id="9" name="TextBox 8"/>
-          <p:cNvSpPr txBox="1"/>
-          <p:nvPr/>
-        </p:nvSpPr>
-        <p:spPr>
-          <a:xfrm>
-            <a:off x="1188720" y="1751076"/>
-            <a:ext cx="10271455" cy="886968"/>
-          </a:xfrm>
-          <a:prstGeom prst="rect">
-            <a:avLst/>
-          </a:prstGeom>
-          <a:noFill/>
-        </p:spPr>
-        <p:txBody>
-          <a:bodyPr wrap="square" anchor="ctr"/>
-          <a:lstStyle/>
-          <a:p>
-            <a:r>
-              <a:rPr sz="1500" b="1" i="0">
-                <a:solidFill>
-                  <a:srgbClr val="095292"/>
-                </a:solidFill>
-                <a:latin typeface="Calibri"/>
-              </a:rPr>
-              <a:t>Disena visual</a:t>
-            </a:r>
-          </a:p>
-          <a:p>
             <a:pPr>
-              <a:spcBef>
-                <a:spcPts val="200"/>
-              </a:spcBef>
+              <a:spcAft>
+                <a:spcPts val="800"/>
+              </a:spcAft>
             </a:pPr>
             <a:r>
-              <a:rPr sz="1300" b="0" i="0">
+              <a:rPr sz="2000" b="0" i="0">
                 <a:solidFill>
                   <a:srgbClr val="333333"/>
                 </a:solidFill>
                 <a:latin typeface="Calibri"/>
               </a:rPr>
-              <a:t>Dibuja el diagrama como quieras en Excalidraw o draw.io: es mas rapido arrastrar cajas que escribir codigo, y ahi es donde piensas el modelo.</a:t>
-            </a:r>
-          </a:p>
-        </p:txBody>
-      </p:sp>
-      <p:sp>
-        <p:nvSpPr>
-          <p:cNvPr id="10" name="Rounded Rectangle 9"/>
-          <p:cNvSpPr/>
-          <p:nvPr/>
-        </p:nvSpPr>
-        <p:spPr>
-          <a:xfrm>
-            <a:off x="457200" y="2802636"/>
-            <a:ext cx="11277295" cy="1051560"/>
-          </a:xfrm>
-          <a:prstGeom prst="roundRect">
-            <a:avLst>
-              <a:gd name="adj" fmla="val 12000"/>
-            </a:avLst>
-          </a:prstGeom>
-          <a:solidFill>
-            <a:srgbClr val="E8F4FA"/>
-          </a:solidFill>
-          <a:ln>
-            <a:noFill/>
-          </a:ln>
-        </p:spPr>
-        <p:style>
-          <a:lnRef idx="1">
-            <a:schemeClr val="accent1"/>
-          </a:lnRef>
-          <a:fillRef idx="3">
-            <a:schemeClr val="accent1"/>
-          </a:fillRef>
-          <a:effectRef idx="2">
-            <a:schemeClr val="accent1"/>
-          </a:effectRef>
-          <a:fontRef idx="minor">
-            <a:schemeClr val="lt1"/>
-          </a:fontRef>
-        </p:style>
-        <p:txBody>
-          <a:bodyPr rtlCol="0" anchor="ctr"/>
-          <a:lstStyle/>
-          <a:p>
-            <a:pPr algn="ctr"/>
-          </a:p>
-        </p:txBody>
-      </p:sp>
-      <p:sp>
-        <p:nvSpPr>
-          <p:cNvPr id="11" name="Rounded Rectangle 10"/>
-          <p:cNvSpPr/>
-          <p:nvPr/>
-        </p:nvSpPr>
-        <p:spPr>
-          <a:xfrm>
-            <a:off x="594360" y="3108960"/>
-            <a:ext cx="438912" cy="438912"/>
-          </a:xfrm>
-          <a:prstGeom prst="roundRect">
-            <a:avLst>
-              <a:gd name="adj" fmla="val 12000"/>
-            </a:avLst>
-          </a:prstGeom>
-          <a:solidFill>
-            <a:srgbClr val="095292"/>
-          </a:solidFill>
-          <a:ln>
-            <a:noFill/>
-          </a:ln>
-        </p:spPr>
-        <p:style>
-          <a:lnRef idx="1">
-            <a:schemeClr val="accent1"/>
-          </a:lnRef>
-          <a:fillRef idx="3">
-            <a:schemeClr val="accent1"/>
-          </a:fillRef>
-          <a:effectRef idx="2">
-            <a:schemeClr val="accent1"/>
-          </a:effectRef>
-          <a:fontRef idx="minor">
-            <a:schemeClr val="lt1"/>
-          </a:fontRef>
-        </p:style>
-        <p:txBody>
-          <a:bodyPr rtlCol="0" anchor="ctr"/>
-          <a:lstStyle/>
-          <a:p>
-            <a:pPr algn="ctr"/>
-          </a:p>
-        </p:txBody>
-      </p:sp>
-      <p:sp>
-        <p:nvSpPr>
-          <p:cNvPr id="12" name="TextBox 11"/>
-          <p:cNvSpPr txBox="1"/>
-          <p:nvPr/>
-        </p:nvSpPr>
-        <p:spPr>
-          <a:xfrm>
-            <a:off x="594360" y="3108960"/>
-            <a:ext cx="438912" cy="438912"/>
-          </a:xfrm>
-          <a:prstGeom prst="rect">
-            <a:avLst/>
-          </a:prstGeom>
-          <a:noFill/>
-        </p:spPr>
-        <p:txBody>
-          <a:bodyPr wrap="square" anchor="ctr"/>
-          <a:lstStyle/>
-          <a:p>
-            <a:pPr algn="ctr"/>
-            <a:r>
-              <a:rPr sz="1600" b="1" i="0">
-                <a:solidFill>
-                  <a:srgbClr val="FFFFFF"/>
-                </a:solidFill>
-                <a:latin typeface="Calibri"/>
-              </a:rPr>
-              <a:t>2</a:t>
-            </a:r>
-          </a:p>
-        </p:txBody>
-      </p:sp>
-      <p:sp>
-        <p:nvSpPr>
-          <p:cNvPr id="13" name="TextBox 12"/>
-          <p:cNvSpPr txBox="1"/>
-          <p:nvPr/>
-        </p:nvSpPr>
-        <p:spPr>
-          <a:xfrm>
-            <a:off x="1188720" y="2894076"/>
-            <a:ext cx="10271455" cy="886968"/>
-          </a:xfrm>
-          <a:prstGeom prst="rect">
-            <a:avLst/>
-          </a:prstGeom>
-          <a:noFill/>
-        </p:spPr>
-        <p:txBody>
-          <a:bodyPr wrap="square" anchor="ctr"/>
-          <a:lstStyle/>
-          <a:p>
-            <a:r>
-              <a:rPr sz="1500" b="1" i="0">
-                <a:solidFill>
-                  <a:srgbClr val="095292"/>
-                </a:solidFill>
-                <a:latin typeface="Calibri"/>
-              </a:rPr>
-              <a:t>Traduce con IA</a:t>
+              <a:t>–   </a:t>
+            </a:r>
+            <a:r>
+              <a:rPr sz="2000" b="1" i="0">
+                <a:solidFill>
+                  <a:srgbClr val="333333"/>
+                </a:solidFill>
+                <a:latin typeface="Calibri"/>
+              </a:rPr>
+              <a:t>Herramienta:</a:t>
+            </a:r>
+            <a:r>
+              <a:rPr sz="2000" b="0" i="0">
+                <a:solidFill>
+                  <a:srgbClr val="333333"/>
+                </a:solidFill>
+                <a:latin typeface="Calibri"/>
+              </a:rPr>
+              <a:t> Live SQL / DB Fiddle + draw.io + la plataforma del curso</a:t>
             </a:r>
           </a:p>
           <a:p>
             <a:pPr>
-              <a:spcBef>
-                <a:spcPts val="200"/>
-              </a:spcBef>
+              <a:spcAft>
+                <a:spcPts val="800"/>
+              </a:spcAft>
             </a:pPr>
             <a:r>
-              <a:rPr sz="1300" b="0" i="0">
+              <a:rPr sz="2000" b="0" i="0">
                 <a:solidFill>
                   <a:srgbClr val="333333"/>
                 </a:solidFill>
                 <a:latin typeface="Calibri"/>
               </a:rPr>
-              <a:t>Copia o describe tu boceto a una IA y pidele el codigo Mermaid: «convierte este diagrama a Mermaid usando erDiagram». Revisa el resultado: la IA acierta la sintaxis, no tu modelo.</a:t>
-            </a:r>
-          </a:p>
-        </p:txBody>
-      </p:sp>
-      <p:sp>
-        <p:nvSpPr>
-          <p:cNvPr id="14" name="Rounded Rectangle 13"/>
-          <p:cNvSpPr/>
-          <p:nvPr/>
-        </p:nvSpPr>
-        <p:spPr>
-          <a:xfrm>
-            <a:off x="457200" y="3945636"/>
-            <a:ext cx="11277295" cy="1051560"/>
-          </a:xfrm>
-          <a:prstGeom prst="roundRect">
-            <a:avLst>
-              <a:gd name="adj" fmla="val 12000"/>
-            </a:avLst>
-          </a:prstGeom>
-          <a:solidFill>
-            <a:srgbClr val="F2F2F2"/>
-          </a:solidFill>
-          <a:ln>
-            <a:noFill/>
-          </a:ln>
-        </p:spPr>
-        <p:style>
-          <a:lnRef idx="1">
-            <a:schemeClr val="accent1"/>
-          </a:lnRef>
-          <a:fillRef idx="3">
-            <a:schemeClr val="accent1"/>
-          </a:fillRef>
-          <a:effectRef idx="2">
-            <a:schemeClr val="accent1"/>
-          </a:effectRef>
-          <a:fontRef idx="minor">
-            <a:schemeClr val="lt1"/>
-          </a:fontRef>
-        </p:style>
-        <p:txBody>
-          <a:bodyPr rtlCol="0" anchor="ctr"/>
-          <a:lstStyle/>
-          <a:p>
-            <a:pPr algn="ctr"/>
-          </a:p>
-        </p:txBody>
-      </p:sp>
-      <p:sp>
-        <p:nvSpPr>
-          <p:cNvPr id="15" name="Rounded Rectangle 14"/>
-          <p:cNvSpPr/>
-          <p:nvPr/>
-        </p:nvSpPr>
-        <p:spPr>
-          <a:xfrm>
-            <a:off x="594360" y="4251960"/>
-            <a:ext cx="438912" cy="438912"/>
-          </a:xfrm>
-          <a:prstGeom prst="roundRect">
-            <a:avLst>
-              <a:gd name="adj" fmla="val 12000"/>
-            </a:avLst>
-          </a:prstGeom>
-          <a:solidFill>
-            <a:srgbClr val="095292"/>
-          </a:solidFill>
-          <a:ln>
-            <a:noFill/>
-          </a:ln>
-        </p:spPr>
-        <p:style>
-          <a:lnRef idx="1">
-            <a:schemeClr val="accent1"/>
-          </a:lnRef>
-          <a:fillRef idx="3">
-            <a:schemeClr val="accent1"/>
-          </a:fillRef>
-          <a:effectRef idx="2">
-            <a:schemeClr val="accent1"/>
-          </a:effectRef>
-          <a:fontRef idx="minor">
-            <a:schemeClr val="lt1"/>
-          </a:fontRef>
-        </p:style>
-        <p:txBody>
-          <a:bodyPr rtlCol="0" anchor="ctr"/>
-          <a:lstStyle/>
-          <a:p>
-            <a:pPr algn="ctr"/>
-          </a:p>
-        </p:txBody>
-      </p:sp>
-      <p:sp>
-        <p:nvSpPr>
-          <p:cNvPr id="16" name="TextBox 15"/>
-          <p:cNvSpPr txBox="1"/>
-          <p:nvPr/>
-        </p:nvSpPr>
-        <p:spPr>
-          <a:xfrm>
-            <a:off x="594360" y="4251960"/>
-            <a:ext cx="438912" cy="438912"/>
-          </a:xfrm>
-          <a:prstGeom prst="rect">
-            <a:avLst/>
-          </a:prstGeom>
-          <a:noFill/>
-        </p:spPr>
-        <p:txBody>
-          <a:bodyPr wrap="square" anchor="ctr"/>
-          <a:lstStyle/>
-          <a:p>
-            <a:pPr algn="ctr"/>
-            <a:r>
-              <a:rPr sz="1600" b="1" i="0">
-                <a:solidFill>
-                  <a:srgbClr val="FFFFFF"/>
-                </a:solidFill>
-                <a:latin typeface="Calibri"/>
-              </a:rPr>
-              <a:t>3</a:t>
-            </a:r>
-          </a:p>
-        </p:txBody>
-      </p:sp>
-      <p:sp>
-        <p:nvSpPr>
-          <p:cNvPr id="17" name="TextBox 16"/>
-          <p:cNvSpPr txBox="1"/>
-          <p:nvPr/>
-        </p:nvSpPr>
-        <p:spPr>
-          <a:xfrm>
-            <a:off x="1188720" y="4037076"/>
-            <a:ext cx="10271455" cy="886968"/>
-          </a:xfrm>
-          <a:prstGeom prst="rect">
-            <a:avLst/>
-          </a:prstGeom>
-          <a:noFill/>
-        </p:spPr>
-        <p:txBody>
-          <a:bodyPr wrap="square" anchor="ctr"/>
-          <a:lstStyle/>
-          <a:p>
-            <a:r>
-              <a:rPr sz="1500" b="1" i="0">
-                <a:solidFill>
-                  <a:srgbClr val="095292"/>
-                </a:solidFill>
-                <a:latin typeface="Calibri"/>
-              </a:rPr>
-              <a:t>Pega y renderiza en la plataforma del curso</a:t>
+              <a:t>–   </a:t>
+            </a:r>
+            <a:r>
+              <a:rPr sz="2000" b="1" i="0">
+                <a:solidFill>
+                  <a:srgbClr val="333333"/>
+                </a:solidFill>
+                <a:latin typeface="Calibri"/>
+              </a:rPr>
+              <a:t>Demo:</a:t>
+            </a:r>
+            <a:r>
+              <a:rPr sz="2000" b="0" i="0">
+                <a:solidFill>
+                  <a:srgbClr val="333333"/>
+                </a:solidFill>
+                <a:latin typeface="Calibri"/>
+              </a:rPr>
+              <a:t> Recorrido de checklist + ejemplo demo de 3 min.</a:t>
             </a:r>
           </a:p>
           <a:p>
             <a:pPr>
-              <a:spcBef>
-                <a:spcPts val="200"/>
-              </a:spcBef>
+              <a:spcAft>
+                <a:spcPts val="800"/>
+              </a:spcAft>
             </a:pPr>
             <a:r>
-              <a:rPr sz="1300" b="0" i="0">
+              <a:rPr sz="2000" b="0" i="0">
                 <a:solidFill>
                   <a:srgbClr val="333333"/>
                 </a:solidFill>
                 <a:latin typeface="Calibri"/>
               </a:rPr>
-              <a:t>Pega ese codigo en la caja de texto de la pregunta y mira como lo dibuja la plataforma. Si no renderiza, corrige ahi mismo: lo que se califica es el diagrama renderizado dentro de la plataforma del curso.</a:t>
-            </a:r>
-          </a:p>
-        </p:txBody>
-      </p:sp>
-      <p:sp>
-        <p:nvSpPr>
-          <p:cNvPr id="18" name="Rounded Rectangle 17"/>
-          <p:cNvSpPr/>
-          <p:nvPr/>
-        </p:nvSpPr>
-        <p:spPr>
-          <a:xfrm>
-            <a:off x="457200" y="5088636"/>
-            <a:ext cx="11277295" cy="1051560"/>
-          </a:xfrm>
-          <a:prstGeom prst="roundRect">
-            <a:avLst>
-              <a:gd name="adj" fmla="val 12000"/>
-            </a:avLst>
-          </a:prstGeom>
-          <a:solidFill>
-            <a:srgbClr val="E8F4FA"/>
-          </a:solidFill>
-          <a:ln>
-            <a:noFill/>
-          </a:ln>
-        </p:spPr>
-        <p:style>
-          <a:lnRef idx="1">
-            <a:schemeClr val="accent1"/>
-          </a:lnRef>
-          <a:fillRef idx="3">
-            <a:schemeClr val="accent1"/>
-          </a:fillRef>
-          <a:effectRef idx="2">
-            <a:schemeClr val="accent1"/>
-          </a:effectRef>
-          <a:fontRef idx="minor">
-            <a:schemeClr val="lt1"/>
-          </a:fontRef>
-        </p:style>
-        <p:txBody>
-          <a:bodyPr rtlCol="0" anchor="ctr"/>
-          <a:lstStyle/>
-          <a:p>
-            <a:pPr algn="ctr"/>
-          </a:p>
-        </p:txBody>
-      </p:sp>
-      <p:sp>
-        <p:nvSpPr>
-          <p:cNvPr id="19" name="Rounded Rectangle 18"/>
-          <p:cNvSpPr/>
-          <p:nvPr/>
-        </p:nvSpPr>
-        <p:spPr>
-          <a:xfrm>
-            <a:off x="594360" y="5394960"/>
-            <a:ext cx="438912" cy="438912"/>
-          </a:xfrm>
-          <a:prstGeom prst="roundRect">
-            <a:avLst>
-              <a:gd name="adj" fmla="val 12000"/>
-            </a:avLst>
-          </a:prstGeom>
-          <a:solidFill>
-            <a:srgbClr val="095292"/>
-          </a:solidFill>
-          <a:ln>
-            <a:noFill/>
-          </a:ln>
-        </p:spPr>
-        <p:style>
-          <a:lnRef idx="1">
-            <a:schemeClr val="accent1"/>
-          </a:lnRef>
-          <a:fillRef idx="3">
-            <a:schemeClr val="accent1"/>
-          </a:fillRef>
-          <a:effectRef idx="2">
-            <a:schemeClr val="accent1"/>
-          </a:effectRef>
-          <a:fontRef idx="minor">
-            <a:schemeClr val="lt1"/>
-          </a:fontRef>
-        </p:style>
-        <p:txBody>
-          <a:bodyPr rtlCol="0" anchor="ctr"/>
-          <a:lstStyle/>
-          <a:p>
-            <a:pPr algn="ctr"/>
-          </a:p>
-        </p:txBody>
-      </p:sp>
-      <p:sp>
-        <p:nvSpPr>
-          <p:cNvPr id="20" name="TextBox 19"/>
-          <p:cNvSpPr txBox="1"/>
-          <p:nvPr/>
-        </p:nvSpPr>
-        <p:spPr>
-          <a:xfrm>
-            <a:off x="594360" y="5394960"/>
-            <a:ext cx="438912" cy="438912"/>
-          </a:xfrm>
-          <a:prstGeom prst="rect">
-            <a:avLst/>
-          </a:prstGeom>
-          <a:noFill/>
-        </p:spPr>
-        <p:txBody>
-          <a:bodyPr wrap="square" anchor="ctr"/>
-          <a:lstStyle/>
-          <a:p>
-            <a:pPr algn="ctr"/>
-            <a:r>
-              <a:rPr sz="1600" b="1" i="0">
-                <a:solidFill>
-                  <a:srgbClr val="FFFFFF"/>
-                </a:solidFill>
-                <a:latin typeface="Calibri"/>
-              </a:rPr>
-              <a:t>4</a:t>
-            </a:r>
-          </a:p>
-        </p:txBody>
-      </p:sp>
-      <p:sp>
-        <p:nvSpPr>
-          <p:cNvPr id="21" name="TextBox 20"/>
-          <p:cNvSpPr txBox="1"/>
-          <p:nvPr/>
-        </p:nvSpPr>
-        <p:spPr>
-          <a:xfrm>
-            <a:off x="1188720" y="5180076"/>
-            <a:ext cx="10271455" cy="886968"/>
-          </a:xfrm>
-          <a:prstGeom prst="rect">
-            <a:avLst/>
-          </a:prstGeom>
-          <a:noFill/>
-        </p:spPr>
-        <p:txBody>
-          <a:bodyPr wrap="square" anchor="ctr"/>
-          <a:lstStyle/>
-          <a:p>
-            <a:r>
-              <a:rPr sz="1500" b="1" i="0">
-                <a:solidFill>
-                  <a:srgbClr val="095292"/>
-                </a:solidFill>
-                <a:latin typeface="Calibri"/>
-              </a:rPr>
-              <a:t>Guarda el PNG para tu PI</a:t>
+              <a:t>–   Sigan el mismo dominio VetCare (no inventen otro caso).</a:t>
             </a:r>
           </a:p>
           <a:p>
             <a:pPr>
-              <a:spcBef>
-                <a:spcPts val="200"/>
-              </a:spcBef>
+              <a:spcAft>
+                <a:spcPts val="800"/>
+              </a:spcAft>
             </a:pPr>
             <a:r>
-              <a:rPr sz="1300" b="0" i="0">
+              <a:rPr sz="2000" b="0" i="0">
                 <a:solidFill>
                   <a:srgbClr val="333333"/>
                 </a:solidFill>
                 <a:latin typeface="Calibri"/>
               </a:rPr>
-              <a:t>Exporta tambien la imagen a la carpeta de tu Proyecto Integrador. Esa copia es para tu informe; no reemplaza la respuesta en la plataforma.</a:t>
-            </a:r>
-          </a:p>
-        </p:txBody>
-      </p:sp>
-      <p:sp>
-        <p:nvSpPr>
-          <p:cNvPr id="22" name="TextBox 21"/>
+              <a:t>–   Al final de la demo: dejar enlace/script compartible al grupo.</a:t>
+            </a:r>
+          </a:p>
+        </p:txBody>
+      </p:sp>
+      <p:sp>
+        <p:nvSpPr>
+          <p:cNvPr id="6" name="TextBox 5"/>
           <p:cNvSpPr txBox="1"/>
           <p:nvPr/>
         </p:nvSpPr>
@@ -8815,7 +7935,7 @@
         <p:spPr>
           <a:xfrm>
             <a:off x="0" y="0"/>
-            <a:ext cx="12191695" cy="960120"/>
+            <a:ext cx="12191695" cy="1170432"/>
           </a:xfrm>
           <a:prstGeom prst="rect">
             <a:avLst/>
@@ -8857,7 +7977,7 @@
         </p:nvSpPr>
         <p:spPr>
           <a:xfrm>
-            <a:off x="0" y="960120"/>
+            <a:off x="0" y="1170432"/>
             <a:ext cx="12191695" cy="41148"/>
           </a:xfrm>
           <a:prstGeom prst="rect">
@@ -8901,7 +8021,7 @@
         <p:spPr>
           <a:xfrm>
             <a:off x="457200" y="164592"/>
-            <a:ext cx="11277295" cy="502920"/>
+            <a:ext cx="11277295" cy="384048"/>
           </a:xfrm>
           <a:prstGeom prst="rect">
             <a:avLst/>
@@ -8921,7 +8041,7 @@
                 </a:solidFill>
                 <a:latin typeface="Calibri"/>
               </a:rPr>
-              <a:t>Taller PI VetCare — contexto / por que importa</a:t>
+              <a:t>Herramientas de hoy</a:t>
             </a:r>
           </a:p>
         </p:txBody>
@@ -8934,8 +8054,8 @@
         </p:nvSpPr>
         <p:spPr>
           <a:xfrm>
-            <a:off x="457200" y="1170432"/>
-            <a:ext cx="11277295" cy="5230368"/>
+            <a:off x="457200" y="566928"/>
+            <a:ext cx="11277295" cy="411480"/>
           </a:xfrm>
           <a:prstGeom prst="rect">
             <a:avLst/>
@@ -8948,60 +8068,837 @@
           </a:bodyPr>
           <a:lstStyle/>
           <a:p>
-            <a:pPr>
-              <a:spcAft>
-                <a:spcPts val="800"/>
-              </a:spcAft>
+            <a:r>
+              <a:rPr sz="1400" b="0" i="0">
+                <a:solidFill>
+                  <a:srgbClr val="B8D8EE"/>
+                </a:solidFill>
+                <a:latin typeface="Calibri"/>
+              </a:rPr>
+              <a:t>Gratis · navegador o free tier</a:t>
+            </a:r>
+          </a:p>
+        </p:txBody>
+      </p:sp>
+      <p:sp>
+        <p:nvSpPr>
+          <p:cNvPr id="6" name="Rounded Rectangle 5"/>
+          <p:cNvSpPr/>
+          <p:nvPr/>
+        </p:nvSpPr>
+        <p:spPr>
+          <a:xfrm>
+            <a:off x="457200" y="1591056"/>
+            <a:ext cx="3624986" cy="2299716"/>
+          </a:xfrm>
+          <a:prstGeom prst="roundRect">
+            <a:avLst>
+              <a:gd name="adj" fmla="val 12000"/>
+            </a:avLst>
+          </a:prstGeom>
+          <a:solidFill>
+            <a:srgbClr val="F2F2F2"/>
+          </a:solidFill>
+          <a:ln>
+            <a:noFill/>
+          </a:ln>
+        </p:spPr>
+        <p:style>
+          <a:lnRef idx="1">
+            <a:schemeClr val="accent1"/>
+          </a:lnRef>
+          <a:fillRef idx="3">
+            <a:schemeClr val="accent1"/>
+          </a:fillRef>
+          <a:effectRef idx="2">
+            <a:schemeClr val="accent1"/>
+          </a:effectRef>
+          <a:fontRef idx="minor">
+            <a:schemeClr val="lt1"/>
+          </a:fontRef>
+        </p:style>
+        <p:txBody>
+          <a:bodyPr rtlCol="0" anchor="ctr"/>
+          <a:lstStyle/>
+          <a:p>
+            <a:pPr algn="ctr"/>
+          </a:p>
+        </p:txBody>
+      </p:sp>
+      <p:sp>
+        <p:nvSpPr>
+          <p:cNvPr id="7" name="Rectangle 6"/>
+          <p:cNvSpPr/>
+          <p:nvPr/>
+        </p:nvSpPr>
+        <p:spPr>
+          <a:xfrm>
+            <a:off x="457200" y="1591056"/>
+            <a:ext cx="3624986" cy="64008"/>
+          </a:xfrm>
+          <a:prstGeom prst="rect">
+            <a:avLst/>
+          </a:prstGeom>
+          <a:solidFill>
+            <a:srgbClr val="095292"/>
+          </a:solidFill>
+          <a:ln>
+            <a:noFill/>
+          </a:ln>
+        </p:spPr>
+        <p:style>
+          <a:lnRef idx="1">
+            <a:schemeClr val="accent1"/>
+          </a:lnRef>
+          <a:fillRef idx="3">
+            <a:schemeClr val="accent1"/>
+          </a:fillRef>
+          <a:effectRef idx="2">
+            <a:schemeClr val="accent1"/>
+          </a:effectRef>
+          <a:fontRef idx="minor">
+            <a:schemeClr val="lt1"/>
+          </a:fontRef>
+        </p:style>
+        <p:txBody>
+          <a:bodyPr rtlCol="0" anchor="ctr"/>
+          <a:lstStyle/>
+          <a:p>
+            <a:pPr algn="ctr"/>
+          </a:p>
+        </p:txBody>
+      </p:sp>
+      <p:sp>
+        <p:nvSpPr>
+          <p:cNvPr id="8" name="Rectangle 7"/>
+          <p:cNvSpPr/>
+          <p:nvPr/>
+        </p:nvSpPr>
+        <p:spPr>
+          <a:xfrm>
+            <a:off x="457200" y="1655064"/>
+            <a:ext cx="3624986" cy="27432"/>
+          </a:xfrm>
+          <a:prstGeom prst="rect">
+            <a:avLst/>
+          </a:prstGeom>
+          <a:solidFill>
+            <a:srgbClr val="FFD000"/>
+          </a:solidFill>
+          <a:ln>
+            <a:noFill/>
+          </a:ln>
+        </p:spPr>
+        <p:style>
+          <a:lnRef idx="1">
+            <a:schemeClr val="accent1"/>
+          </a:lnRef>
+          <a:fillRef idx="3">
+            <a:schemeClr val="accent1"/>
+          </a:fillRef>
+          <a:effectRef idx="2">
+            <a:schemeClr val="accent1"/>
+          </a:effectRef>
+          <a:fontRef idx="minor">
+            <a:schemeClr val="lt1"/>
+          </a:fontRef>
+        </p:style>
+        <p:txBody>
+          <a:bodyPr rtlCol="0" anchor="ctr"/>
+          <a:lstStyle/>
+          <a:p>
+            <a:pPr algn="ctr"/>
+          </a:p>
+        </p:txBody>
+      </p:sp>
+      <p:pic>
+        <p:nvPicPr>
+          <p:cNvPr id="9" name="Picture 8" descr="oracle_livesql.png"/>
+          <p:cNvPicPr>
+            <a:picLocks noChangeAspect="1"/>
+          </p:cNvPicPr>
+          <p:nvPr/>
+        </p:nvPicPr>
+        <p:blipFill>
+          <a:blip r:embed="rId2"/>
+          <a:stretch>
+            <a:fillRect/>
+          </a:stretch>
+        </p:blipFill>
+        <p:spPr>
+          <a:xfrm>
+            <a:off x="1659331" y="1847087"/>
+            <a:ext cx="1220724" cy="1220724"/>
+          </a:xfrm>
+          <a:prstGeom prst="rect">
+            <a:avLst/>
+          </a:prstGeom>
+        </p:spPr>
+      </p:pic>
+      <p:sp>
+        <p:nvSpPr>
+          <p:cNvPr id="10" name="TextBox 9"/>
+          <p:cNvSpPr txBox="1"/>
+          <p:nvPr/>
+        </p:nvSpPr>
+        <p:spPr>
+          <a:xfrm>
+            <a:off x="530352" y="3159251"/>
+            <a:ext cx="3478682" cy="621792"/>
+          </a:xfrm>
+          <a:prstGeom prst="rect">
+            <a:avLst/>
+          </a:prstGeom>
+          <a:noFill/>
+        </p:spPr>
+        <p:txBody>
+          <a:bodyPr wrap="square" anchor="t"/>
+          <a:lstStyle/>
+          <a:p>
+            <a:pPr algn="ctr"/>
+            <a:r>
+              <a:rPr sz="1300" b="1" i="0">
+                <a:solidFill>
+                  <a:srgbClr val="095292"/>
+                </a:solidFill>
+                <a:latin typeface="Calibri"/>
+              </a:rPr>
+              <a:t>Oracle Live SQL</a:t>
+            </a:r>
+          </a:p>
+          <a:p>
+            <a:pPr algn="ctr">
+              <a:spcBef>
+                <a:spcPts val="200"/>
+              </a:spcBef>
             </a:pPr>
             <a:r>
-              <a:rPr sz="2000" b="0" i="0">
-                <a:solidFill>
-                  <a:srgbClr val="333333"/>
-                </a:solidFill>
-                <a:latin typeface="Calibri"/>
-              </a:rPr>
-              <a:t>–   </a:t>
-            </a:r>
-            <a:r>
-              <a:rPr sz="2000" b="1" i="0">
-                <a:solidFill>
-                  <a:srgbClr val="333333"/>
-                </a:solidFill>
-                <a:latin typeface="Calibri"/>
-              </a:rPr>
-              <a:t>Por qué importa al PI:</a:t>
-            </a:r>
-            <a:r>
-              <a:rPr sz="2000" b="0" i="0">
-                <a:solidFill>
-                  <a:srgbClr val="333333"/>
-                </a:solidFill>
-                <a:latin typeface="Calibri"/>
-              </a:rPr>
-              <a:t> checkpoint vs rúbrica.</a:t>
-            </a:r>
-          </a:p>
-          <a:p>
-            <a:pPr>
-              <a:spcAft>
-                <a:spcPts val="800"/>
-              </a:spcAft>
+              <a:rPr sz="1000" b="0" i="0">
+                <a:solidFill>
+                  <a:srgbClr val="666666"/>
+                </a:solidFill>
+                <a:latin typeface="Calibri"/>
+              </a:rPr>
+              <a:t>Demo procs</a:t>
+            </a:r>
+          </a:p>
+        </p:txBody>
+      </p:sp>
+      <p:sp>
+        <p:nvSpPr>
+          <p:cNvPr id="11" name="Rounded Rectangle 10"/>
+          <p:cNvSpPr/>
+          <p:nvPr/>
+        </p:nvSpPr>
+        <p:spPr>
+          <a:xfrm>
+            <a:off x="4283354" y="1591056"/>
+            <a:ext cx="3624986" cy="2299716"/>
+          </a:xfrm>
+          <a:prstGeom prst="roundRect">
+            <a:avLst>
+              <a:gd name="adj" fmla="val 12000"/>
+            </a:avLst>
+          </a:prstGeom>
+          <a:solidFill>
+            <a:srgbClr val="F2F2F2"/>
+          </a:solidFill>
+          <a:ln>
+            <a:noFill/>
+          </a:ln>
+        </p:spPr>
+        <p:style>
+          <a:lnRef idx="1">
+            <a:schemeClr val="accent1"/>
+          </a:lnRef>
+          <a:fillRef idx="3">
+            <a:schemeClr val="accent1"/>
+          </a:fillRef>
+          <a:effectRef idx="2">
+            <a:schemeClr val="accent1"/>
+          </a:effectRef>
+          <a:fontRef idx="minor">
+            <a:schemeClr val="lt1"/>
+          </a:fontRef>
+        </p:style>
+        <p:txBody>
+          <a:bodyPr rtlCol="0" anchor="ctr"/>
+          <a:lstStyle/>
+          <a:p>
+            <a:pPr algn="ctr"/>
+          </a:p>
+        </p:txBody>
+      </p:sp>
+      <p:sp>
+        <p:nvSpPr>
+          <p:cNvPr id="12" name="Rectangle 11"/>
+          <p:cNvSpPr/>
+          <p:nvPr/>
+        </p:nvSpPr>
+        <p:spPr>
+          <a:xfrm>
+            <a:off x="4283354" y="1591056"/>
+            <a:ext cx="3624986" cy="64008"/>
+          </a:xfrm>
+          <a:prstGeom prst="rect">
+            <a:avLst/>
+          </a:prstGeom>
+          <a:solidFill>
+            <a:srgbClr val="095292"/>
+          </a:solidFill>
+          <a:ln>
+            <a:noFill/>
+          </a:ln>
+        </p:spPr>
+        <p:style>
+          <a:lnRef idx="1">
+            <a:schemeClr val="accent1"/>
+          </a:lnRef>
+          <a:fillRef idx="3">
+            <a:schemeClr val="accent1"/>
+          </a:fillRef>
+          <a:effectRef idx="2">
+            <a:schemeClr val="accent1"/>
+          </a:effectRef>
+          <a:fontRef idx="minor">
+            <a:schemeClr val="lt1"/>
+          </a:fontRef>
+        </p:style>
+        <p:txBody>
+          <a:bodyPr rtlCol="0" anchor="ctr"/>
+          <a:lstStyle/>
+          <a:p>
+            <a:pPr algn="ctr"/>
+          </a:p>
+        </p:txBody>
+      </p:sp>
+      <p:sp>
+        <p:nvSpPr>
+          <p:cNvPr id="13" name="Rectangle 12"/>
+          <p:cNvSpPr/>
+          <p:nvPr/>
+        </p:nvSpPr>
+        <p:spPr>
+          <a:xfrm>
+            <a:off x="4283354" y="1655064"/>
+            <a:ext cx="3624986" cy="27432"/>
+          </a:xfrm>
+          <a:prstGeom prst="rect">
+            <a:avLst/>
+          </a:prstGeom>
+          <a:solidFill>
+            <a:srgbClr val="FFD000"/>
+          </a:solidFill>
+          <a:ln>
+            <a:noFill/>
+          </a:ln>
+        </p:spPr>
+        <p:style>
+          <a:lnRef idx="1">
+            <a:schemeClr val="accent1"/>
+          </a:lnRef>
+          <a:fillRef idx="3">
+            <a:schemeClr val="accent1"/>
+          </a:fillRef>
+          <a:effectRef idx="2">
+            <a:schemeClr val="accent1"/>
+          </a:effectRef>
+          <a:fontRef idx="minor">
+            <a:schemeClr val="lt1"/>
+          </a:fontRef>
+        </p:style>
+        <p:txBody>
+          <a:bodyPr rtlCol="0" anchor="ctr"/>
+          <a:lstStyle/>
+          <a:p>
+            <a:pPr algn="ctr"/>
+          </a:p>
+        </p:txBody>
+      </p:sp>
+      <p:pic>
+        <p:nvPicPr>
+          <p:cNvPr id="14" name="Picture 13" descr="drawio.png"/>
+          <p:cNvPicPr>
+            <a:picLocks noChangeAspect="1"/>
+          </p:cNvPicPr>
+          <p:nvPr/>
+        </p:nvPicPr>
+        <p:blipFill>
+          <a:blip r:embed="rId3"/>
+          <a:stretch>
+            <a:fillRect/>
+          </a:stretch>
+        </p:blipFill>
+        <p:spPr>
+          <a:xfrm>
+            <a:off x="5485485" y="1847087"/>
+            <a:ext cx="1220724" cy="1220724"/>
+          </a:xfrm>
+          <a:prstGeom prst="rect">
+            <a:avLst/>
+          </a:prstGeom>
+        </p:spPr>
+      </p:pic>
+      <p:sp>
+        <p:nvSpPr>
+          <p:cNvPr id="15" name="TextBox 14"/>
+          <p:cNvSpPr txBox="1"/>
+          <p:nvPr/>
+        </p:nvSpPr>
+        <p:spPr>
+          <a:xfrm>
+            <a:off x="4356506" y="3159251"/>
+            <a:ext cx="3478682" cy="621792"/>
+          </a:xfrm>
+          <a:prstGeom prst="rect">
+            <a:avLst/>
+          </a:prstGeom>
+          <a:noFill/>
+        </p:spPr>
+        <p:txBody>
+          <a:bodyPr wrap="square" anchor="t"/>
+          <a:lstStyle/>
+          <a:p>
+            <a:pPr algn="ctr"/>
+            <a:r>
+              <a:rPr sz="1300" b="1" i="0">
+                <a:solidFill>
+                  <a:srgbClr val="095292"/>
+                </a:solidFill>
+                <a:latin typeface="Calibri"/>
+              </a:rPr>
+              <a:t>draw.io</a:t>
+            </a:r>
+          </a:p>
+          <a:p>
+            <a:pPr algn="ctr">
+              <a:spcBef>
+                <a:spcPts val="200"/>
+              </a:spcBef>
             </a:pPr>
             <a:r>
-              <a:rPr sz="2000" b="0" i="0">
-                <a:solidFill>
-                  <a:srgbClr val="333333"/>
-                </a:solidFill>
-                <a:latin typeface="Calibri"/>
-              </a:rPr>
-              <a:t>–   Demo + gaps con responsable.</a:t>
-            </a:r>
-          </a:p>
-        </p:txBody>
-      </p:sp>
-      <p:sp>
-        <p:nvSpPr>
-          <p:cNvPr id="6" name="TextBox 5"/>
+              <a:rPr sz="1000" b="0" i="0">
+                <a:solidFill>
+                  <a:srgbClr val="666666"/>
+                </a:solidFill>
+                <a:latin typeface="Calibri"/>
+              </a:rPr>
+              <a:t>ER</a:t>
+            </a:r>
+          </a:p>
+        </p:txBody>
+      </p:sp>
+      <p:sp>
+        <p:nvSpPr>
+          <p:cNvPr id="16" name="Rounded Rectangle 15"/>
+          <p:cNvSpPr/>
+          <p:nvPr/>
+        </p:nvSpPr>
+        <p:spPr>
+          <a:xfrm>
+            <a:off x="8109508" y="1591056"/>
+            <a:ext cx="3624986" cy="2299716"/>
+          </a:xfrm>
+          <a:prstGeom prst="roundRect">
+            <a:avLst>
+              <a:gd name="adj" fmla="val 12000"/>
+            </a:avLst>
+          </a:prstGeom>
+          <a:solidFill>
+            <a:srgbClr val="F2F2F2"/>
+          </a:solidFill>
+          <a:ln>
+            <a:noFill/>
+          </a:ln>
+        </p:spPr>
+        <p:style>
+          <a:lnRef idx="1">
+            <a:schemeClr val="accent1"/>
+          </a:lnRef>
+          <a:fillRef idx="3">
+            <a:schemeClr val="accent1"/>
+          </a:fillRef>
+          <a:effectRef idx="2">
+            <a:schemeClr val="accent1"/>
+          </a:effectRef>
+          <a:fontRef idx="minor">
+            <a:schemeClr val="lt1"/>
+          </a:fontRef>
+        </p:style>
+        <p:txBody>
+          <a:bodyPr rtlCol="0" anchor="ctr"/>
+          <a:lstStyle/>
+          <a:p>
+            <a:pPr algn="ctr"/>
+          </a:p>
+        </p:txBody>
+      </p:sp>
+      <p:sp>
+        <p:nvSpPr>
+          <p:cNvPr id="17" name="Rectangle 16"/>
+          <p:cNvSpPr/>
+          <p:nvPr/>
+        </p:nvSpPr>
+        <p:spPr>
+          <a:xfrm>
+            <a:off x="8109508" y="1591056"/>
+            <a:ext cx="3624986" cy="64008"/>
+          </a:xfrm>
+          <a:prstGeom prst="rect">
+            <a:avLst/>
+          </a:prstGeom>
+          <a:solidFill>
+            <a:srgbClr val="095292"/>
+          </a:solidFill>
+          <a:ln>
+            <a:noFill/>
+          </a:ln>
+        </p:spPr>
+        <p:style>
+          <a:lnRef idx="1">
+            <a:schemeClr val="accent1"/>
+          </a:lnRef>
+          <a:fillRef idx="3">
+            <a:schemeClr val="accent1"/>
+          </a:fillRef>
+          <a:effectRef idx="2">
+            <a:schemeClr val="accent1"/>
+          </a:effectRef>
+          <a:fontRef idx="minor">
+            <a:schemeClr val="lt1"/>
+          </a:fontRef>
+        </p:style>
+        <p:txBody>
+          <a:bodyPr rtlCol="0" anchor="ctr"/>
+          <a:lstStyle/>
+          <a:p>
+            <a:pPr algn="ctr"/>
+          </a:p>
+        </p:txBody>
+      </p:sp>
+      <p:sp>
+        <p:nvSpPr>
+          <p:cNvPr id="18" name="Rectangle 17"/>
+          <p:cNvSpPr/>
+          <p:nvPr/>
+        </p:nvSpPr>
+        <p:spPr>
+          <a:xfrm>
+            <a:off x="8109508" y="1655064"/>
+            <a:ext cx="3624986" cy="27432"/>
+          </a:xfrm>
+          <a:prstGeom prst="rect">
+            <a:avLst/>
+          </a:prstGeom>
+          <a:solidFill>
+            <a:srgbClr val="FFD000"/>
+          </a:solidFill>
+          <a:ln>
+            <a:noFill/>
+          </a:ln>
+        </p:spPr>
+        <p:style>
+          <a:lnRef idx="1">
+            <a:schemeClr val="accent1"/>
+          </a:lnRef>
+          <a:fillRef idx="3">
+            <a:schemeClr val="accent1"/>
+          </a:fillRef>
+          <a:effectRef idx="2">
+            <a:schemeClr val="accent1"/>
+          </a:effectRef>
+          <a:fontRef idx="minor">
+            <a:schemeClr val="lt1"/>
+          </a:fontRef>
+        </p:style>
+        <p:txBody>
+          <a:bodyPr rtlCol="0" anchor="ctr"/>
+          <a:lstStyle/>
+          <a:p>
+            <a:pPr algn="ctr"/>
+          </a:p>
+        </p:txBody>
+      </p:sp>
+      <p:pic>
+        <p:nvPicPr>
+          <p:cNvPr id="19" name="Picture 18" descr="dbfiddle.png"/>
+          <p:cNvPicPr>
+            <a:picLocks noChangeAspect="1"/>
+          </p:cNvPicPr>
+          <p:nvPr/>
+        </p:nvPicPr>
+        <p:blipFill>
+          <a:blip r:embed="rId4"/>
+          <a:stretch>
+            <a:fillRect/>
+          </a:stretch>
+        </p:blipFill>
+        <p:spPr>
+          <a:xfrm>
+            <a:off x="9311640" y="1847087"/>
+            <a:ext cx="1220724" cy="1220724"/>
+          </a:xfrm>
+          <a:prstGeom prst="rect">
+            <a:avLst/>
+          </a:prstGeom>
+        </p:spPr>
+      </p:pic>
+      <p:sp>
+        <p:nvSpPr>
+          <p:cNvPr id="20" name="TextBox 19"/>
+          <p:cNvSpPr txBox="1"/>
+          <p:nvPr/>
+        </p:nvSpPr>
+        <p:spPr>
+          <a:xfrm>
+            <a:off x="8182660" y="3159251"/>
+            <a:ext cx="3478682" cy="621792"/>
+          </a:xfrm>
+          <a:prstGeom prst="rect">
+            <a:avLst/>
+          </a:prstGeom>
+          <a:noFill/>
+        </p:spPr>
+        <p:txBody>
+          <a:bodyPr wrap="square" anchor="t"/>
+          <a:lstStyle/>
+          <a:p>
+            <a:pPr algn="ctr"/>
+            <a:r>
+              <a:rPr sz="1300" b="1" i="0">
+                <a:solidFill>
+                  <a:srgbClr val="095292"/>
+                </a:solidFill>
+                <a:latin typeface="Calibri"/>
+              </a:rPr>
+              <a:t>DB Fiddle</a:t>
+            </a:r>
+          </a:p>
+          <a:p>
+            <a:pPr algn="ctr">
+              <a:spcBef>
+                <a:spcPts val="200"/>
+              </a:spcBef>
+            </a:pPr>
+            <a:r>
+              <a:rPr sz="1000" b="0" i="0">
+                <a:solidFill>
+                  <a:srgbClr val="666666"/>
+                </a:solidFill>
+                <a:latin typeface="Calibri"/>
+              </a:rPr>
+              <a:t>DDL</a:t>
+            </a:r>
+          </a:p>
+        </p:txBody>
+      </p:sp>
+      <p:sp>
+        <p:nvSpPr>
+          <p:cNvPr id="21" name="Rounded Rectangle 20"/>
+          <p:cNvSpPr/>
+          <p:nvPr/>
+        </p:nvSpPr>
+        <p:spPr>
+          <a:xfrm>
+            <a:off x="4283354" y="4055364"/>
+            <a:ext cx="3624986" cy="2299716"/>
+          </a:xfrm>
+          <a:prstGeom prst="roundRect">
+            <a:avLst>
+              <a:gd name="adj" fmla="val 12000"/>
+            </a:avLst>
+          </a:prstGeom>
+          <a:solidFill>
+            <a:srgbClr val="F2F2F2"/>
+          </a:solidFill>
+          <a:ln>
+            <a:noFill/>
+          </a:ln>
+        </p:spPr>
+        <p:style>
+          <a:lnRef idx="1">
+            <a:schemeClr val="accent1"/>
+          </a:lnRef>
+          <a:fillRef idx="3">
+            <a:schemeClr val="accent1"/>
+          </a:fillRef>
+          <a:effectRef idx="2">
+            <a:schemeClr val="accent1"/>
+          </a:effectRef>
+          <a:fontRef idx="minor">
+            <a:schemeClr val="lt1"/>
+          </a:fontRef>
+        </p:style>
+        <p:txBody>
+          <a:bodyPr rtlCol="0" anchor="ctr"/>
+          <a:lstStyle/>
+          <a:p>
+            <a:pPr algn="ctr"/>
+          </a:p>
+        </p:txBody>
+      </p:sp>
+      <p:sp>
+        <p:nvSpPr>
+          <p:cNvPr id="22" name="Rectangle 21"/>
+          <p:cNvSpPr/>
+          <p:nvPr/>
+        </p:nvSpPr>
+        <p:spPr>
+          <a:xfrm>
+            <a:off x="4283354" y="4055364"/>
+            <a:ext cx="3624986" cy="64008"/>
+          </a:xfrm>
+          <a:prstGeom prst="rect">
+            <a:avLst/>
+          </a:prstGeom>
+          <a:solidFill>
+            <a:srgbClr val="095292"/>
+          </a:solidFill>
+          <a:ln>
+            <a:noFill/>
+          </a:ln>
+        </p:spPr>
+        <p:style>
+          <a:lnRef idx="1">
+            <a:schemeClr val="accent1"/>
+          </a:lnRef>
+          <a:fillRef idx="3">
+            <a:schemeClr val="accent1"/>
+          </a:fillRef>
+          <a:effectRef idx="2">
+            <a:schemeClr val="accent1"/>
+          </a:effectRef>
+          <a:fontRef idx="minor">
+            <a:schemeClr val="lt1"/>
+          </a:fontRef>
+        </p:style>
+        <p:txBody>
+          <a:bodyPr rtlCol="0" anchor="ctr"/>
+          <a:lstStyle/>
+          <a:p>
+            <a:pPr algn="ctr"/>
+          </a:p>
+        </p:txBody>
+      </p:sp>
+      <p:sp>
+        <p:nvSpPr>
+          <p:cNvPr id="23" name="Rectangle 22"/>
+          <p:cNvSpPr/>
+          <p:nvPr/>
+        </p:nvSpPr>
+        <p:spPr>
+          <a:xfrm>
+            <a:off x="4283354" y="4119372"/>
+            <a:ext cx="3624986" cy="27432"/>
+          </a:xfrm>
+          <a:prstGeom prst="rect">
+            <a:avLst/>
+          </a:prstGeom>
+          <a:solidFill>
+            <a:srgbClr val="FFD000"/>
+          </a:solidFill>
+          <a:ln>
+            <a:noFill/>
+          </a:ln>
+        </p:spPr>
+        <p:style>
+          <a:lnRef idx="1">
+            <a:schemeClr val="accent1"/>
+          </a:lnRef>
+          <a:fillRef idx="3">
+            <a:schemeClr val="accent1"/>
+          </a:fillRef>
+          <a:effectRef idx="2">
+            <a:schemeClr val="accent1"/>
+          </a:effectRef>
+          <a:fontRef idx="minor">
+            <a:schemeClr val="lt1"/>
+          </a:fontRef>
+        </p:style>
+        <p:txBody>
+          <a:bodyPr rtlCol="0" anchor="ctr"/>
+          <a:lstStyle/>
+          <a:p>
+            <a:pPr algn="ctr"/>
+          </a:p>
+        </p:txBody>
+      </p:sp>
+      <p:pic>
+        <p:nvPicPr>
+          <p:cNvPr id="24" name="Picture 23" descr="google_docs.png"/>
+          <p:cNvPicPr>
+            <a:picLocks noChangeAspect="1"/>
+          </p:cNvPicPr>
+          <p:nvPr/>
+        </p:nvPicPr>
+        <p:blipFill>
+          <a:blip r:embed="rId5"/>
+          <a:stretch>
+            <a:fillRect/>
+          </a:stretch>
+        </p:blipFill>
+        <p:spPr>
+          <a:xfrm>
+            <a:off x="5485485" y="4311396"/>
+            <a:ext cx="1220724" cy="1220724"/>
+          </a:xfrm>
+          <a:prstGeom prst="rect">
+            <a:avLst/>
+          </a:prstGeom>
+        </p:spPr>
+      </p:pic>
+      <p:sp>
+        <p:nvSpPr>
+          <p:cNvPr id="25" name="TextBox 24"/>
+          <p:cNvSpPr txBox="1"/>
+          <p:nvPr/>
+        </p:nvSpPr>
+        <p:spPr>
+          <a:xfrm>
+            <a:off x="4356506" y="5623560"/>
+            <a:ext cx="3478682" cy="621792"/>
+          </a:xfrm>
+          <a:prstGeom prst="rect">
+            <a:avLst/>
+          </a:prstGeom>
+          <a:noFill/>
+        </p:spPr>
+        <p:txBody>
+          <a:bodyPr wrap="square" anchor="t"/>
+          <a:lstStyle/>
+          <a:p>
+            <a:pPr algn="ctr"/>
+            <a:r>
+              <a:rPr sz="1300" b="1" i="0">
+                <a:solidFill>
+                  <a:srgbClr val="095292"/>
+                </a:solidFill>
+                <a:latin typeface="Calibri"/>
+              </a:rPr>
+              <a:t>Google Docs</a:t>
+            </a:r>
+          </a:p>
+          <a:p>
+            <a:pPr algn="ctr">
+              <a:spcBef>
+                <a:spcPts val="200"/>
+              </a:spcBef>
+            </a:pPr>
+            <a:r>
+              <a:rPr sz="1000" b="0" i="0">
+                <a:solidFill>
+                  <a:srgbClr val="666666"/>
+                </a:solidFill>
+                <a:latin typeface="Calibri"/>
+              </a:rPr>
+              <a:t>Checklist</a:t>
+            </a:r>
+          </a:p>
+        </p:txBody>
+      </p:sp>
+      <p:sp>
+        <p:nvSpPr>
+          <p:cNvPr id="26" name="TextBox 25"/>
           <p:cNvSpPr txBox="1"/>
           <p:nvPr/>
         </p:nvSpPr>
@@ -9069,7 +8966,7 @@
         <p:spPr>
           <a:xfrm>
             <a:off x="0" y="0"/>
-            <a:ext cx="12191695" cy="960120"/>
+            <a:ext cx="12191695" cy="1170432"/>
           </a:xfrm>
           <a:prstGeom prst="rect">
             <a:avLst/>
@@ -9111,7 +9008,7 @@
         </p:nvSpPr>
         <p:spPr>
           <a:xfrm>
-            <a:off x="0" y="960120"/>
+            <a:off x="0" y="1170432"/>
             <a:ext cx="12191695" cy="41148"/>
           </a:xfrm>
           <a:prstGeom prst="rect">
@@ -9155,7 +9052,7 @@
         <p:spPr>
           <a:xfrm>
             <a:off x="457200" y="164592"/>
-            <a:ext cx="11277295" cy="502920"/>
+            <a:ext cx="11277295" cy="384048"/>
           </a:xfrm>
           <a:prstGeom prst="rect">
             <a:avLst/>
@@ -9175,7 +9072,7 @@
                 </a:solidFill>
                 <a:latin typeface="Calibri"/>
               </a:rPr>
-              <a:t>Taller PI VetCare — objetivo y criterios</a:t>
+              <a:t>Del boceto a la plataforma del curso (diagrama)</a:t>
             </a:r>
           </a:p>
         </p:txBody>
@@ -9188,8 +9085,8 @@
         </p:nvSpPr>
         <p:spPr>
           <a:xfrm>
-            <a:off x="457200" y="1170432"/>
-            <a:ext cx="11277295" cy="5230368"/>
+            <a:off x="457200" y="566928"/>
+            <a:ext cx="11277295" cy="411480"/>
           </a:xfrm>
           <a:prstGeom prst="rect">
             <a:avLst/>
@@ -9202,180 +9099,705 @@
           </a:bodyPr>
           <a:lstStyle/>
           <a:p>
+            <a:r>
+              <a:rPr sz="1400" b="0" i="0">
+                <a:solidFill>
+                  <a:srgbClr val="B8D8EE"/>
+                </a:solidFill>
+                <a:latin typeface="Calibri"/>
+              </a:rPr>
+              <a:t>El diagrama se entrega como codigo Mermaid dentro de la plataforma del curso, no como imagen</a:t>
+            </a:r>
+          </a:p>
+        </p:txBody>
+      </p:sp>
+      <p:sp>
+        <p:nvSpPr>
+          <p:cNvPr id="6" name="Rounded Rectangle 5"/>
+          <p:cNvSpPr/>
+          <p:nvPr/>
+        </p:nvSpPr>
+        <p:spPr>
+          <a:xfrm>
+            <a:off x="457200" y="1659636"/>
+            <a:ext cx="11277295" cy="1051560"/>
+          </a:xfrm>
+          <a:prstGeom prst="roundRect">
+            <a:avLst>
+              <a:gd name="adj" fmla="val 12000"/>
+            </a:avLst>
+          </a:prstGeom>
+          <a:solidFill>
+            <a:srgbClr val="F2F2F2"/>
+          </a:solidFill>
+          <a:ln>
+            <a:noFill/>
+          </a:ln>
+        </p:spPr>
+        <p:style>
+          <a:lnRef idx="1">
+            <a:schemeClr val="accent1"/>
+          </a:lnRef>
+          <a:fillRef idx="3">
+            <a:schemeClr val="accent1"/>
+          </a:fillRef>
+          <a:effectRef idx="2">
+            <a:schemeClr val="accent1"/>
+          </a:effectRef>
+          <a:fontRef idx="minor">
+            <a:schemeClr val="lt1"/>
+          </a:fontRef>
+        </p:style>
+        <p:txBody>
+          <a:bodyPr rtlCol="0" anchor="ctr"/>
+          <a:lstStyle/>
+          <a:p>
+            <a:pPr algn="ctr"/>
+          </a:p>
+        </p:txBody>
+      </p:sp>
+      <p:sp>
+        <p:nvSpPr>
+          <p:cNvPr id="7" name="Rounded Rectangle 6"/>
+          <p:cNvSpPr/>
+          <p:nvPr/>
+        </p:nvSpPr>
+        <p:spPr>
+          <a:xfrm>
+            <a:off x="594360" y="1965960"/>
+            <a:ext cx="438912" cy="438912"/>
+          </a:xfrm>
+          <a:prstGeom prst="roundRect">
+            <a:avLst>
+              <a:gd name="adj" fmla="val 12000"/>
+            </a:avLst>
+          </a:prstGeom>
+          <a:solidFill>
+            <a:srgbClr val="095292"/>
+          </a:solidFill>
+          <a:ln>
+            <a:noFill/>
+          </a:ln>
+        </p:spPr>
+        <p:style>
+          <a:lnRef idx="1">
+            <a:schemeClr val="accent1"/>
+          </a:lnRef>
+          <a:fillRef idx="3">
+            <a:schemeClr val="accent1"/>
+          </a:fillRef>
+          <a:effectRef idx="2">
+            <a:schemeClr val="accent1"/>
+          </a:effectRef>
+          <a:fontRef idx="minor">
+            <a:schemeClr val="lt1"/>
+          </a:fontRef>
+        </p:style>
+        <p:txBody>
+          <a:bodyPr rtlCol="0" anchor="ctr"/>
+          <a:lstStyle/>
+          <a:p>
+            <a:pPr algn="ctr"/>
+          </a:p>
+        </p:txBody>
+      </p:sp>
+      <p:sp>
+        <p:nvSpPr>
+          <p:cNvPr id="8" name="TextBox 7"/>
+          <p:cNvSpPr txBox="1"/>
+          <p:nvPr/>
+        </p:nvSpPr>
+        <p:spPr>
+          <a:xfrm>
+            <a:off x="594360" y="1965960"/>
+            <a:ext cx="438912" cy="438912"/>
+          </a:xfrm>
+          <a:prstGeom prst="rect">
+            <a:avLst/>
+          </a:prstGeom>
+          <a:noFill/>
+        </p:spPr>
+        <p:txBody>
+          <a:bodyPr wrap="square" anchor="ctr"/>
+          <a:lstStyle/>
+          <a:p>
+            <a:pPr algn="ctr"/>
+            <a:r>
+              <a:rPr sz="1600" b="1" i="0">
+                <a:solidFill>
+                  <a:srgbClr val="FFFFFF"/>
+                </a:solidFill>
+                <a:latin typeface="Calibri"/>
+              </a:rPr>
+              <a:t>1</a:t>
+            </a:r>
+          </a:p>
+        </p:txBody>
+      </p:sp>
+      <p:sp>
+        <p:nvSpPr>
+          <p:cNvPr id="9" name="TextBox 8"/>
+          <p:cNvSpPr txBox="1"/>
+          <p:nvPr/>
+        </p:nvSpPr>
+        <p:spPr>
+          <a:xfrm>
+            <a:off x="1188720" y="1751076"/>
+            <a:ext cx="10271455" cy="886968"/>
+          </a:xfrm>
+          <a:prstGeom prst="rect">
+            <a:avLst/>
+          </a:prstGeom>
+          <a:noFill/>
+        </p:spPr>
+        <p:txBody>
+          <a:bodyPr wrap="square" anchor="ctr"/>
+          <a:lstStyle/>
+          <a:p>
+            <a:r>
+              <a:rPr sz="1500" b="1" i="0">
+                <a:solidFill>
+                  <a:srgbClr val="095292"/>
+                </a:solidFill>
+                <a:latin typeface="Calibri"/>
+              </a:rPr>
+              <a:t>Disena visual</a:t>
+            </a:r>
+          </a:p>
+          <a:p>
             <a:pPr>
-              <a:spcAft>
-                <a:spcPts val="800"/>
-              </a:spcAft>
+              <a:spcBef>
+                <a:spcPts val="200"/>
+              </a:spcBef>
             </a:pPr>
             <a:r>
-              <a:rPr sz="2000" b="0" i="0">
+              <a:rPr sz="1300" b="0" i="0">
                 <a:solidFill>
                   <a:srgbClr val="333333"/>
                 </a:solidFill>
                 <a:latin typeface="Calibri"/>
               </a:rPr>
-              <a:t>–   </a:t>
-            </a:r>
-            <a:r>
-              <a:rPr sz="2000" b="1" i="0">
+              <a:t>Dibuja el diagrama como quieras en Excalidraw o draw.io: es mas rapido arrastrar cajas que escribir codigo, y ahi es donde piensas el modelo.</a:t>
+            </a:r>
+          </a:p>
+        </p:txBody>
+      </p:sp>
+      <p:sp>
+        <p:nvSpPr>
+          <p:cNvPr id="10" name="Rounded Rectangle 9"/>
+          <p:cNvSpPr/>
+          <p:nvPr/>
+        </p:nvSpPr>
+        <p:spPr>
+          <a:xfrm>
+            <a:off x="457200" y="2802636"/>
+            <a:ext cx="11277295" cy="1051560"/>
+          </a:xfrm>
+          <a:prstGeom prst="roundRect">
+            <a:avLst>
+              <a:gd name="adj" fmla="val 12000"/>
+            </a:avLst>
+          </a:prstGeom>
+          <a:solidFill>
+            <a:srgbClr val="E8F4FA"/>
+          </a:solidFill>
+          <a:ln>
+            <a:noFill/>
+          </a:ln>
+        </p:spPr>
+        <p:style>
+          <a:lnRef idx="1">
+            <a:schemeClr val="accent1"/>
+          </a:lnRef>
+          <a:fillRef idx="3">
+            <a:schemeClr val="accent1"/>
+          </a:fillRef>
+          <a:effectRef idx="2">
+            <a:schemeClr val="accent1"/>
+          </a:effectRef>
+          <a:fontRef idx="minor">
+            <a:schemeClr val="lt1"/>
+          </a:fontRef>
+        </p:style>
+        <p:txBody>
+          <a:bodyPr rtlCol="0" anchor="ctr"/>
+          <a:lstStyle/>
+          <a:p>
+            <a:pPr algn="ctr"/>
+          </a:p>
+        </p:txBody>
+      </p:sp>
+      <p:sp>
+        <p:nvSpPr>
+          <p:cNvPr id="11" name="Rounded Rectangle 10"/>
+          <p:cNvSpPr/>
+          <p:nvPr/>
+        </p:nvSpPr>
+        <p:spPr>
+          <a:xfrm>
+            <a:off x="594360" y="3108960"/>
+            <a:ext cx="438912" cy="438912"/>
+          </a:xfrm>
+          <a:prstGeom prst="roundRect">
+            <a:avLst>
+              <a:gd name="adj" fmla="val 12000"/>
+            </a:avLst>
+          </a:prstGeom>
+          <a:solidFill>
+            <a:srgbClr val="095292"/>
+          </a:solidFill>
+          <a:ln>
+            <a:noFill/>
+          </a:ln>
+        </p:spPr>
+        <p:style>
+          <a:lnRef idx="1">
+            <a:schemeClr val="accent1"/>
+          </a:lnRef>
+          <a:fillRef idx="3">
+            <a:schemeClr val="accent1"/>
+          </a:fillRef>
+          <a:effectRef idx="2">
+            <a:schemeClr val="accent1"/>
+          </a:effectRef>
+          <a:fontRef idx="minor">
+            <a:schemeClr val="lt1"/>
+          </a:fontRef>
+        </p:style>
+        <p:txBody>
+          <a:bodyPr rtlCol="0" anchor="ctr"/>
+          <a:lstStyle/>
+          <a:p>
+            <a:pPr algn="ctr"/>
+          </a:p>
+        </p:txBody>
+      </p:sp>
+      <p:sp>
+        <p:nvSpPr>
+          <p:cNvPr id="12" name="TextBox 11"/>
+          <p:cNvSpPr txBox="1"/>
+          <p:nvPr/>
+        </p:nvSpPr>
+        <p:spPr>
+          <a:xfrm>
+            <a:off x="594360" y="3108960"/>
+            <a:ext cx="438912" cy="438912"/>
+          </a:xfrm>
+          <a:prstGeom prst="rect">
+            <a:avLst/>
+          </a:prstGeom>
+          <a:noFill/>
+        </p:spPr>
+        <p:txBody>
+          <a:bodyPr wrap="square" anchor="ctr"/>
+          <a:lstStyle/>
+          <a:p>
+            <a:pPr algn="ctr"/>
+            <a:r>
+              <a:rPr sz="1600" b="1" i="0">
+                <a:solidFill>
+                  <a:srgbClr val="FFFFFF"/>
+                </a:solidFill>
+                <a:latin typeface="Calibri"/>
+              </a:rPr>
+              <a:t>2</a:t>
+            </a:r>
+          </a:p>
+        </p:txBody>
+      </p:sp>
+      <p:sp>
+        <p:nvSpPr>
+          <p:cNvPr id="13" name="TextBox 12"/>
+          <p:cNvSpPr txBox="1"/>
+          <p:nvPr/>
+        </p:nvSpPr>
+        <p:spPr>
+          <a:xfrm>
+            <a:off x="1188720" y="2894076"/>
+            <a:ext cx="10271455" cy="886968"/>
+          </a:xfrm>
+          <a:prstGeom prst="rect">
+            <a:avLst/>
+          </a:prstGeom>
+          <a:noFill/>
+        </p:spPr>
+        <p:txBody>
+          <a:bodyPr wrap="square" anchor="ctr"/>
+          <a:lstStyle/>
+          <a:p>
+            <a:r>
+              <a:rPr sz="1500" b="1" i="0">
+                <a:solidFill>
+                  <a:srgbClr val="095292"/>
+                </a:solidFill>
+                <a:latin typeface="Calibri"/>
+              </a:rPr>
+              <a:t>Traduce con IA</a:t>
+            </a:r>
+          </a:p>
+          <a:p>
+            <a:pPr>
+              <a:spcBef>
+                <a:spcPts val="200"/>
+              </a:spcBef>
+            </a:pPr>
+            <a:r>
+              <a:rPr sz="1300" b="0" i="0">
                 <a:solidFill>
                   <a:srgbClr val="333333"/>
                 </a:solidFill>
                 <a:latin typeface="Calibri"/>
               </a:rPr>
-              <a:t>Objetivo:</a:t>
-            </a:r>
-            <a:r>
-              <a:rPr sz="2000" b="0" i="0">
+              <a:t>Copia o describe tu boceto a una IA y pidele el codigo Mermaid: «convierte este diagrama a Mermaid usando erDiagram». Revisa el resultado: la IA acierta la sintaxis, no tu modelo.</a:t>
+            </a:r>
+          </a:p>
+        </p:txBody>
+      </p:sp>
+      <p:sp>
+        <p:nvSpPr>
+          <p:cNvPr id="14" name="Rounded Rectangle 13"/>
+          <p:cNvSpPr/>
+          <p:nvPr/>
+        </p:nvSpPr>
+        <p:spPr>
+          <a:xfrm>
+            <a:off x="457200" y="3945636"/>
+            <a:ext cx="11277295" cy="1051560"/>
+          </a:xfrm>
+          <a:prstGeom prst="roundRect">
+            <a:avLst>
+              <a:gd name="adj" fmla="val 12000"/>
+            </a:avLst>
+          </a:prstGeom>
+          <a:solidFill>
+            <a:srgbClr val="F2F2F2"/>
+          </a:solidFill>
+          <a:ln>
+            <a:noFill/>
+          </a:ln>
+        </p:spPr>
+        <p:style>
+          <a:lnRef idx="1">
+            <a:schemeClr val="accent1"/>
+          </a:lnRef>
+          <a:fillRef idx="3">
+            <a:schemeClr val="accent1"/>
+          </a:fillRef>
+          <a:effectRef idx="2">
+            <a:schemeClr val="accent1"/>
+          </a:effectRef>
+          <a:fontRef idx="minor">
+            <a:schemeClr val="lt1"/>
+          </a:fontRef>
+        </p:style>
+        <p:txBody>
+          <a:bodyPr rtlCol="0" anchor="ctr"/>
+          <a:lstStyle/>
+          <a:p>
+            <a:pPr algn="ctr"/>
+          </a:p>
+        </p:txBody>
+      </p:sp>
+      <p:sp>
+        <p:nvSpPr>
+          <p:cNvPr id="15" name="Rounded Rectangle 14"/>
+          <p:cNvSpPr/>
+          <p:nvPr/>
+        </p:nvSpPr>
+        <p:spPr>
+          <a:xfrm>
+            <a:off x="594360" y="4251960"/>
+            <a:ext cx="438912" cy="438912"/>
+          </a:xfrm>
+          <a:prstGeom prst="roundRect">
+            <a:avLst>
+              <a:gd name="adj" fmla="val 12000"/>
+            </a:avLst>
+          </a:prstGeom>
+          <a:solidFill>
+            <a:srgbClr val="095292"/>
+          </a:solidFill>
+          <a:ln>
+            <a:noFill/>
+          </a:ln>
+        </p:spPr>
+        <p:style>
+          <a:lnRef idx="1">
+            <a:schemeClr val="accent1"/>
+          </a:lnRef>
+          <a:fillRef idx="3">
+            <a:schemeClr val="accent1"/>
+          </a:fillRef>
+          <a:effectRef idx="2">
+            <a:schemeClr val="accent1"/>
+          </a:effectRef>
+          <a:fontRef idx="minor">
+            <a:schemeClr val="lt1"/>
+          </a:fontRef>
+        </p:style>
+        <p:txBody>
+          <a:bodyPr rtlCol="0" anchor="ctr"/>
+          <a:lstStyle/>
+          <a:p>
+            <a:pPr algn="ctr"/>
+          </a:p>
+        </p:txBody>
+      </p:sp>
+      <p:sp>
+        <p:nvSpPr>
+          <p:cNvPr id="16" name="TextBox 15"/>
+          <p:cNvSpPr txBox="1"/>
+          <p:nvPr/>
+        </p:nvSpPr>
+        <p:spPr>
+          <a:xfrm>
+            <a:off x="594360" y="4251960"/>
+            <a:ext cx="438912" cy="438912"/>
+          </a:xfrm>
+          <a:prstGeom prst="rect">
+            <a:avLst/>
+          </a:prstGeom>
+          <a:noFill/>
+        </p:spPr>
+        <p:txBody>
+          <a:bodyPr wrap="square" anchor="ctr"/>
+          <a:lstStyle/>
+          <a:p>
+            <a:pPr algn="ctr"/>
+            <a:r>
+              <a:rPr sz="1600" b="1" i="0">
+                <a:solidFill>
+                  <a:srgbClr val="FFFFFF"/>
+                </a:solidFill>
+                <a:latin typeface="Calibri"/>
+              </a:rPr>
+              <a:t>3</a:t>
+            </a:r>
+          </a:p>
+        </p:txBody>
+      </p:sp>
+      <p:sp>
+        <p:nvSpPr>
+          <p:cNvPr id="17" name="TextBox 16"/>
+          <p:cNvSpPr txBox="1"/>
+          <p:nvPr/>
+        </p:nvSpPr>
+        <p:spPr>
+          <a:xfrm>
+            <a:off x="1188720" y="4037076"/>
+            <a:ext cx="10271455" cy="886968"/>
+          </a:xfrm>
+          <a:prstGeom prst="rect">
+            <a:avLst/>
+          </a:prstGeom>
+          <a:noFill/>
+        </p:spPr>
+        <p:txBody>
+          <a:bodyPr wrap="square" anchor="ctr"/>
+          <a:lstStyle/>
+          <a:p>
+            <a:r>
+              <a:rPr sz="1500" b="1" i="0">
+                <a:solidFill>
+                  <a:srgbClr val="095292"/>
+                </a:solidFill>
+                <a:latin typeface="Calibri"/>
+              </a:rPr>
+              <a:t>Pega y renderiza en la plataforma del curso</a:t>
+            </a:r>
+          </a:p>
+          <a:p>
+            <a:pPr>
+              <a:spcBef>
+                <a:spcPts val="200"/>
+              </a:spcBef>
+            </a:pPr>
+            <a:r>
+              <a:rPr sz="1300" b="0" i="0">
                 <a:solidFill>
                   <a:srgbClr val="333333"/>
                 </a:solidFill>
                 <a:latin typeface="Calibri"/>
               </a:rPr>
-              <a:t> Checklist avance + demo 3-5 min.</a:t>
+              <a:t>Pega ese codigo en la caja de texto de la pregunta y mira como lo dibuja la plataforma. Si no renderiza, corrige ahi mismo: lo que se califica es el diagrama renderizado dentro de la plataforma del curso.</a:t>
+            </a:r>
+          </a:p>
+        </p:txBody>
+      </p:sp>
+      <p:sp>
+        <p:nvSpPr>
+          <p:cNvPr id="18" name="Rounded Rectangle 17"/>
+          <p:cNvSpPr/>
+          <p:nvPr/>
+        </p:nvSpPr>
+        <p:spPr>
+          <a:xfrm>
+            <a:off x="457200" y="5088636"/>
+            <a:ext cx="11277295" cy="1051560"/>
+          </a:xfrm>
+          <a:prstGeom prst="roundRect">
+            <a:avLst>
+              <a:gd name="adj" fmla="val 12000"/>
+            </a:avLst>
+          </a:prstGeom>
+          <a:solidFill>
+            <a:srgbClr val="E8F4FA"/>
+          </a:solidFill>
+          <a:ln>
+            <a:noFill/>
+          </a:ln>
+        </p:spPr>
+        <p:style>
+          <a:lnRef idx="1">
+            <a:schemeClr val="accent1"/>
+          </a:lnRef>
+          <a:fillRef idx="3">
+            <a:schemeClr val="accent1"/>
+          </a:fillRef>
+          <a:effectRef idx="2">
+            <a:schemeClr val="accent1"/>
+          </a:effectRef>
+          <a:fontRef idx="minor">
+            <a:schemeClr val="lt1"/>
+          </a:fontRef>
+        </p:style>
+        <p:txBody>
+          <a:bodyPr rtlCol="0" anchor="ctr"/>
+          <a:lstStyle/>
+          <a:p>
+            <a:pPr algn="ctr"/>
+          </a:p>
+        </p:txBody>
+      </p:sp>
+      <p:sp>
+        <p:nvSpPr>
+          <p:cNvPr id="19" name="Rounded Rectangle 18"/>
+          <p:cNvSpPr/>
+          <p:nvPr/>
+        </p:nvSpPr>
+        <p:spPr>
+          <a:xfrm>
+            <a:off x="594360" y="5394960"/>
+            <a:ext cx="438912" cy="438912"/>
+          </a:xfrm>
+          <a:prstGeom prst="roundRect">
+            <a:avLst>
+              <a:gd name="adj" fmla="val 12000"/>
+            </a:avLst>
+          </a:prstGeom>
+          <a:solidFill>
+            <a:srgbClr val="095292"/>
+          </a:solidFill>
+          <a:ln>
+            <a:noFill/>
+          </a:ln>
+        </p:spPr>
+        <p:style>
+          <a:lnRef idx="1">
+            <a:schemeClr val="accent1"/>
+          </a:lnRef>
+          <a:fillRef idx="3">
+            <a:schemeClr val="accent1"/>
+          </a:fillRef>
+          <a:effectRef idx="2">
+            <a:schemeClr val="accent1"/>
+          </a:effectRef>
+          <a:fontRef idx="minor">
+            <a:schemeClr val="lt1"/>
+          </a:fontRef>
+        </p:style>
+        <p:txBody>
+          <a:bodyPr rtlCol="0" anchor="ctr"/>
+          <a:lstStyle/>
+          <a:p>
+            <a:pPr algn="ctr"/>
+          </a:p>
+        </p:txBody>
+      </p:sp>
+      <p:sp>
+        <p:nvSpPr>
+          <p:cNvPr id="20" name="TextBox 19"/>
+          <p:cNvSpPr txBox="1"/>
+          <p:nvPr/>
+        </p:nvSpPr>
+        <p:spPr>
+          <a:xfrm>
+            <a:off x="594360" y="5394960"/>
+            <a:ext cx="438912" cy="438912"/>
+          </a:xfrm>
+          <a:prstGeom prst="rect">
+            <a:avLst/>
+          </a:prstGeom>
+          <a:noFill/>
+        </p:spPr>
+        <p:txBody>
+          <a:bodyPr wrap="square" anchor="ctr"/>
+          <a:lstStyle/>
+          <a:p>
+            <a:pPr algn="ctr"/>
+            <a:r>
+              <a:rPr sz="1600" b="1" i="0">
+                <a:solidFill>
+                  <a:srgbClr val="FFFFFF"/>
+                </a:solidFill>
+                <a:latin typeface="Calibri"/>
+              </a:rPr>
+              <a:t>4</a:t>
+            </a:r>
+          </a:p>
+        </p:txBody>
+      </p:sp>
+      <p:sp>
+        <p:nvSpPr>
+          <p:cNvPr id="21" name="TextBox 20"/>
+          <p:cNvSpPr txBox="1"/>
+          <p:nvPr/>
+        </p:nvSpPr>
+        <p:spPr>
+          <a:xfrm>
+            <a:off x="1188720" y="5180076"/>
+            <a:ext cx="10271455" cy="886968"/>
+          </a:xfrm>
+          <a:prstGeom prst="rect">
+            <a:avLst/>
+          </a:prstGeom>
+          <a:noFill/>
+        </p:spPr>
+        <p:txBody>
+          <a:bodyPr wrap="square" anchor="ctr"/>
+          <a:lstStyle/>
+          <a:p>
+            <a:r>
+              <a:rPr sz="1500" b="1" i="0">
+                <a:solidFill>
+                  <a:srgbClr val="095292"/>
+                </a:solidFill>
+                <a:latin typeface="Calibri"/>
+              </a:rPr>
+              <a:t>Guarda el PNG para tu PI</a:t>
             </a:r>
           </a:p>
           <a:p>
             <a:pPr>
-              <a:spcAft>
-                <a:spcPts val="800"/>
-              </a:spcAft>
+              <a:spcBef>
+                <a:spcPts val="200"/>
+              </a:spcBef>
             </a:pPr>
             <a:r>
-              <a:rPr sz="2000" b="0" i="0">
+              <a:rPr sz="1300" b="0" i="0">
                 <a:solidFill>
                   <a:srgbClr val="333333"/>
                 </a:solidFill>
                 <a:latin typeface="Calibri"/>
               </a:rPr>
-              <a:t>–   </a:t>
-            </a:r>
-            <a:r>
-              <a:rPr sz="2000" b="1" i="0">
-                <a:solidFill>
-                  <a:srgbClr val="333333"/>
-                </a:solidFill>
-                <a:latin typeface="Calibri"/>
-              </a:rPr>
-              <a:t>Exito:</a:t>
-            </a:r>
-            <a:r>
-              <a:rPr sz="2000" b="0" i="0">
-                <a:solidFill>
-                  <a:srgbClr val="333333"/>
-                </a:solidFill>
-                <a:latin typeface="Calibri"/>
-              </a:rPr>
-              <a:t> Checklist evidenciada.</a:t>
-            </a:r>
-          </a:p>
-          <a:p>
-            <a:pPr>
-              <a:spcAft>
-                <a:spcPts val="800"/>
-              </a:spcAft>
-            </a:pPr>
-            <a:r>
-              <a:rPr sz="2000" b="0" i="0">
-                <a:solidFill>
-                  <a:srgbClr val="333333"/>
-                </a:solidFill>
-                <a:latin typeface="Calibri"/>
-              </a:rPr>
-              <a:t>–   </a:t>
-            </a:r>
-            <a:r>
-              <a:rPr sz="2000" b="1" i="0">
-                <a:solidFill>
-                  <a:srgbClr val="333333"/>
-                </a:solidFill>
-                <a:latin typeface="Calibri"/>
-              </a:rPr>
-              <a:t>Exito:</a:t>
-            </a:r>
-            <a:r>
-              <a:rPr sz="2000" b="0" i="0">
-                <a:solidFill>
-                  <a:srgbClr val="333333"/>
-                </a:solidFill>
-                <a:latin typeface="Calibri"/>
-              </a:rPr>
-              <a:t> Demo ER+proc+trigger.</a:t>
-            </a:r>
-          </a:p>
-          <a:p>
-            <a:pPr>
-              <a:spcAft>
-                <a:spcPts val="800"/>
-              </a:spcAft>
-            </a:pPr>
-            <a:r>
-              <a:rPr sz="2000" b="0" i="0">
-                <a:solidFill>
-                  <a:srgbClr val="333333"/>
-                </a:solidFill>
-                <a:latin typeface="Calibri"/>
-              </a:rPr>
-              <a:t>–   </a:t>
-            </a:r>
-            <a:r>
-              <a:rPr sz="2000" b="1" i="0">
-                <a:solidFill>
-                  <a:srgbClr val="333333"/>
-                </a:solidFill>
-                <a:latin typeface="Calibri"/>
-              </a:rPr>
-              <a:t>Exito:</a:t>
-            </a:r>
-            <a:r>
-              <a:rPr sz="2000" b="0" i="0">
-                <a:solidFill>
-                  <a:srgbClr val="333333"/>
-                </a:solidFill>
-                <a:latin typeface="Calibri"/>
-              </a:rPr>
-              <a:t> Gaps.</a:t>
-            </a:r>
-          </a:p>
-          <a:p>
-            <a:pPr>
-              <a:spcAft>
-                <a:spcPts val="800"/>
-              </a:spcAft>
-            </a:pPr>
-            <a:r>
-              <a:rPr sz="2000" b="0" i="0">
-                <a:solidFill>
-                  <a:srgbClr val="333333"/>
-                </a:solidFill>
-                <a:latin typeface="Calibri"/>
-              </a:rPr>
-              <a:t>–   </a:t>
-            </a:r>
-            <a:r>
-              <a:rPr sz="2000" b="1" i="0">
-                <a:solidFill>
-                  <a:srgbClr val="333333"/>
-                </a:solidFill>
-                <a:latin typeface="Calibri"/>
-              </a:rPr>
-              <a:t>Exito:</a:t>
-            </a:r>
-            <a:r>
-              <a:rPr sz="2000" b="0" i="0">
-                <a:solidFill>
-                  <a:srgbClr val="333333"/>
-                </a:solidFill>
-                <a:latin typeface="Calibri"/>
-              </a:rPr>
-              <a:t> Avance subido si aplica.</a:t>
-            </a:r>
-          </a:p>
-        </p:txBody>
-      </p:sp>
-      <p:sp>
-        <p:nvSpPr>
-          <p:cNvPr id="6" name="TextBox 5"/>
+              <a:t>Exporta tambien la imagen a la carpeta de tu Proyecto Integrador. Esa copia es para tu informe; no reemplaza la respuesta en la plataforma.</a:t>
+            </a:r>
+          </a:p>
+        </p:txBody>
+      </p:sp>
+      <p:sp>
+        <p:nvSpPr>
+          <p:cNvPr id="22" name="TextBox 21"/>
           <p:cNvSpPr txBox="1"/>
           <p:nvPr/>
         </p:nvSpPr>
@@ -9549,7 +9971,7 @@
                 </a:solidFill>
                 <a:latin typeface="Calibri"/>
               </a:rPr>
-              <a:t>Taller PI VetCare — escenario / datos de partida</a:t>
+              <a:t>Taller PI VetCare — contexto / por que importa</a:t>
             </a:r>
           </a:p>
         </p:txBody>
@@ -9588,7 +10010,41 @@
                 </a:solidFill>
                 <a:latin typeface="Calibri"/>
               </a:rPr>
-              <a:t>–   Evidencias: ER, DDL, roles, procs, fn, triggers, opt.</a:t>
+              <a:t>–   </a:t>
+            </a:r>
+            <a:r>
+              <a:rPr sz="2000" b="1" i="0">
+                <a:solidFill>
+                  <a:srgbClr val="333333"/>
+                </a:solidFill>
+                <a:latin typeface="Calibri"/>
+              </a:rPr>
+              <a:t>Por qué importa al PI:</a:t>
+            </a:r>
+            <a:r>
+              <a:rPr sz="2000" b="0" i="0">
+                <a:solidFill>
+                  <a:srgbClr val="333333"/>
+                </a:solidFill>
+                <a:latin typeface="Calibri"/>
+              </a:rPr>
+              <a:t> checkpoint vs rúbrica.</a:t>
+            </a:r>
+          </a:p>
+          <a:p>
+            <a:pPr>
+              <a:spcAft>
+                <a:spcPts val="800"/>
+              </a:spcAft>
+            </a:pPr>
+            <a:r>
+              <a:rPr sz="2000" b="0" i="0">
+                <a:solidFill>
+                  <a:srgbClr val="333333"/>
+                </a:solidFill>
+                <a:latin typeface="Calibri"/>
+              </a:rPr>
+              <a:t>–   Demo + gaps con responsable.</a:t>
             </a:r>
           </a:p>
         </p:txBody>
@@ -9769,111 +10225,21 @@
                 </a:solidFill>
                 <a:latin typeface="Calibri"/>
               </a:rPr>
-              <a:t>Taller PI VetCare — pasos guiados</a:t>
-            </a:r>
-          </a:p>
-        </p:txBody>
-      </p:sp>
-      <p:sp>
-        <p:nvSpPr>
-          <p:cNvPr id="5" name="Rounded Rectangle 4"/>
-          <p:cNvSpPr/>
-          <p:nvPr/>
-        </p:nvSpPr>
-        <p:spPr>
-          <a:xfrm>
-            <a:off x="457200" y="1554480"/>
-            <a:ext cx="11277295" cy="1051560"/>
-          </a:xfrm>
-          <a:prstGeom prst="roundRect">
-            <a:avLst>
-              <a:gd name="adj" fmla="val 12000"/>
-            </a:avLst>
-          </a:prstGeom>
-          <a:solidFill>
-            <a:srgbClr val="F2F2F2"/>
-          </a:solidFill>
-          <a:ln>
-            <a:noFill/>
-          </a:ln>
-        </p:spPr>
-        <p:style>
-          <a:lnRef idx="1">
-            <a:schemeClr val="accent1"/>
-          </a:lnRef>
-          <a:fillRef idx="3">
-            <a:schemeClr val="accent1"/>
-          </a:fillRef>
-          <a:effectRef idx="2">
-            <a:schemeClr val="accent1"/>
-          </a:effectRef>
-          <a:fontRef idx="minor">
-            <a:schemeClr val="lt1"/>
-          </a:fontRef>
-        </p:style>
-        <p:txBody>
-          <a:bodyPr rtlCol="0" anchor="ctr"/>
-          <a:lstStyle/>
-          <a:p>
-            <a:pPr algn="ctr"/>
-          </a:p>
-        </p:txBody>
-      </p:sp>
-      <p:sp>
-        <p:nvSpPr>
-          <p:cNvPr id="6" name="Rounded Rectangle 5"/>
-          <p:cNvSpPr/>
-          <p:nvPr/>
-        </p:nvSpPr>
-        <p:spPr>
-          <a:xfrm>
-            <a:off x="594360" y="1860804"/>
-            <a:ext cx="438912" cy="438912"/>
-          </a:xfrm>
-          <a:prstGeom prst="roundRect">
-            <a:avLst>
-              <a:gd name="adj" fmla="val 12000"/>
-            </a:avLst>
-          </a:prstGeom>
-          <a:solidFill>
-            <a:srgbClr val="095292"/>
-          </a:solidFill>
-          <a:ln>
-            <a:noFill/>
-          </a:ln>
-        </p:spPr>
-        <p:style>
-          <a:lnRef idx="1">
-            <a:schemeClr val="accent1"/>
-          </a:lnRef>
-          <a:fillRef idx="3">
-            <a:schemeClr val="accent1"/>
-          </a:fillRef>
-          <a:effectRef idx="2">
-            <a:schemeClr val="accent1"/>
-          </a:effectRef>
-          <a:fontRef idx="minor">
-            <a:schemeClr val="lt1"/>
-          </a:fontRef>
-        </p:style>
-        <p:txBody>
-          <a:bodyPr rtlCol="0" anchor="ctr"/>
-          <a:lstStyle/>
-          <a:p>
-            <a:pPr algn="ctr"/>
-          </a:p>
-        </p:txBody>
-      </p:sp>
-      <p:sp>
-        <p:nvSpPr>
-          <p:cNvPr id="7" name="TextBox 6"/>
+              <a:t>Taller PI VetCare — objetivo y criterios</a:t>
+            </a:r>
+          </a:p>
+        </p:txBody>
+      </p:sp>
+      <p:sp>
+        <p:nvSpPr>
+          <p:cNvPr id="5" name="TextBox 4"/>
           <p:cNvSpPr txBox="1"/>
           <p:nvPr/>
         </p:nvSpPr>
         <p:spPr>
           <a:xfrm>
-            <a:off x="594360" y="1860804"/>
-            <a:ext cx="438912" cy="438912"/>
+            <a:off x="457200" y="1170432"/>
+            <a:ext cx="11277295" cy="5230368"/>
           </a:xfrm>
           <a:prstGeom prst="rect">
             <a:avLst/>
@@ -9881,522 +10247,185 @@
           <a:noFill/>
         </p:spPr>
         <p:txBody>
-          <a:bodyPr wrap="square" anchor="ctr"/>
-          <a:lstStyle/>
-          <a:p>
-            <a:pPr algn="ctr"/>
-            <a:r>
-              <a:rPr sz="1600" b="1" i="0">
-                <a:solidFill>
-                  <a:srgbClr val="FFFFFF"/>
-                </a:solidFill>
-                <a:latin typeface="Calibri"/>
-              </a:rPr>
-              <a:t>1</a:t>
-            </a:r>
-          </a:p>
-        </p:txBody>
-      </p:sp>
-      <p:sp>
-        <p:nvSpPr>
-          <p:cNvPr id="8" name="TextBox 7"/>
-          <p:cNvSpPr txBox="1"/>
-          <p:nvPr/>
-        </p:nvSpPr>
-        <p:spPr>
-          <a:xfrm>
-            <a:off x="1188720" y="1645920"/>
-            <a:ext cx="10271455" cy="886968"/>
-          </a:xfrm>
-          <a:prstGeom prst="rect">
-            <a:avLst/>
-          </a:prstGeom>
-          <a:noFill/>
-        </p:spPr>
-        <p:txBody>
-          <a:bodyPr wrap="square" anchor="ctr"/>
-          <a:lstStyle/>
-          <a:p>
-            <a:r>
-              <a:rPr sz="1500" b="1" i="0">
-                <a:solidFill>
-                  <a:srgbClr val="095292"/>
-                </a:solidFill>
-                <a:latin typeface="Calibri"/>
-              </a:rPr>
-              <a:t>Completar checklist de avance (si/no/parcial).</a:t>
-            </a:r>
-          </a:p>
-        </p:txBody>
-      </p:sp>
-      <p:sp>
-        <p:nvSpPr>
-          <p:cNvPr id="9" name="Rounded Rectangle 8"/>
-          <p:cNvSpPr/>
-          <p:nvPr/>
-        </p:nvSpPr>
-        <p:spPr>
-          <a:xfrm>
-            <a:off x="457200" y="2697480"/>
-            <a:ext cx="11277295" cy="1051560"/>
-          </a:xfrm>
-          <a:prstGeom prst="roundRect">
-            <a:avLst>
-              <a:gd name="adj" fmla="val 12000"/>
-            </a:avLst>
-          </a:prstGeom>
-          <a:solidFill>
-            <a:srgbClr val="E8F4FA"/>
-          </a:solidFill>
-          <a:ln>
-            <a:noFill/>
-          </a:ln>
-        </p:spPr>
-        <p:style>
-          <a:lnRef idx="1">
-            <a:schemeClr val="accent1"/>
-          </a:lnRef>
-          <a:fillRef idx="3">
-            <a:schemeClr val="accent1"/>
-          </a:fillRef>
-          <a:effectRef idx="2">
-            <a:schemeClr val="accent1"/>
-          </a:effectRef>
-          <a:fontRef idx="minor">
-            <a:schemeClr val="lt1"/>
-          </a:fontRef>
-        </p:style>
-        <p:txBody>
-          <a:bodyPr rtlCol="0" anchor="ctr"/>
-          <a:lstStyle/>
-          <a:p>
-            <a:pPr algn="ctr"/>
-          </a:p>
-        </p:txBody>
-      </p:sp>
-      <p:sp>
-        <p:nvSpPr>
-          <p:cNvPr id="10" name="Rounded Rectangle 9"/>
-          <p:cNvSpPr/>
-          <p:nvPr/>
-        </p:nvSpPr>
-        <p:spPr>
-          <a:xfrm>
-            <a:off x="594360" y="3003804"/>
-            <a:ext cx="438912" cy="438912"/>
-          </a:xfrm>
-          <a:prstGeom prst="roundRect">
-            <a:avLst>
-              <a:gd name="adj" fmla="val 12000"/>
-            </a:avLst>
-          </a:prstGeom>
-          <a:solidFill>
-            <a:srgbClr val="095292"/>
-          </a:solidFill>
-          <a:ln>
-            <a:noFill/>
-          </a:ln>
-        </p:spPr>
-        <p:style>
-          <a:lnRef idx="1">
-            <a:schemeClr val="accent1"/>
-          </a:lnRef>
-          <a:fillRef idx="3">
-            <a:schemeClr val="accent1"/>
-          </a:fillRef>
-          <a:effectRef idx="2">
-            <a:schemeClr val="accent1"/>
-          </a:effectRef>
-          <a:fontRef idx="minor">
-            <a:schemeClr val="lt1"/>
-          </a:fontRef>
-        </p:style>
-        <p:txBody>
-          <a:bodyPr rtlCol="0" anchor="ctr"/>
-          <a:lstStyle/>
-          <a:p>
-            <a:pPr algn="ctr"/>
-          </a:p>
-        </p:txBody>
-      </p:sp>
-      <p:sp>
-        <p:nvSpPr>
-          <p:cNvPr id="11" name="TextBox 10"/>
-          <p:cNvSpPr txBox="1"/>
-          <p:nvPr/>
-        </p:nvSpPr>
-        <p:spPr>
-          <a:xfrm>
-            <a:off x="594360" y="3003804"/>
-            <a:ext cx="438912" cy="438912"/>
-          </a:xfrm>
-          <a:prstGeom prst="rect">
-            <a:avLst/>
-          </a:prstGeom>
-          <a:noFill/>
-        </p:spPr>
-        <p:txBody>
-          <a:bodyPr wrap="square" anchor="ctr"/>
-          <a:lstStyle/>
-          <a:p>
-            <a:pPr algn="ctr"/>
-            <a:r>
-              <a:rPr sz="1600" b="1" i="0">
-                <a:solidFill>
-                  <a:srgbClr val="FFFFFF"/>
-                </a:solidFill>
-                <a:latin typeface="Calibri"/>
-              </a:rPr>
-              <a:t>2</a:t>
-            </a:r>
-          </a:p>
-        </p:txBody>
-      </p:sp>
-      <p:sp>
-        <p:nvSpPr>
-          <p:cNvPr id="12" name="TextBox 11"/>
-          <p:cNvSpPr txBox="1"/>
-          <p:nvPr/>
-        </p:nvSpPr>
-        <p:spPr>
-          <a:xfrm>
-            <a:off x="1188720" y="2788920"/>
-            <a:ext cx="10271455" cy="886968"/>
-          </a:xfrm>
-          <a:prstGeom prst="rect">
-            <a:avLst/>
-          </a:prstGeom>
-          <a:noFill/>
-        </p:spPr>
-        <p:txBody>
-          <a:bodyPr wrap="square" anchor="ctr"/>
-          <a:lstStyle/>
-          <a:p>
-            <a:r>
-              <a:rPr sz="1500" b="1" i="0">
-                <a:solidFill>
-                  <a:srgbClr val="095292"/>
-                </a:solidFill>
-                <a:latin typeface="Calibri"/>
-              </a:rPr>
-              <a:t>Demo 3-5 min: ER + 1 proc + 1 trigger.</a:t>
-            </a:r>
-          </a:p>
-        </p:txBody>
-      </p:sp>
-      <p:sp>
-        <p:nvSpPr>
-          <p:cNvPr id="13" name="Rounded Rectangle 12"/>
-          <p:cNvSpPr/>
-          <p:nvPr/>
-        </p:nvSpPr>
-        <p:spPr>
-          <a:xfrm>
-            <a:off x="457200" y="3840480"/>
-            <a:ext cx="11277295" cy="1051560"/>
-          </a:xfrm>
-          <a:prstGeom prst="roundRect">
-            <a:avLst>
-              <a:gd name="adj" fmla="val 12000"/>
-            </a:avLst>
-          </a:prstGeom>
-          <a:solidFill>
-            <a:srgbClr val="F2F2F2"/>
-          </a:solidFill>
-          <a:ln>
-            <a:noFill/>
-          </a:ln>
-        </p:spPr>
-        <p:style>
-          <a:lnRef idx="1">
-            <a:schemeClr val="accent1"/>
-          </a:lnRef>
-          <a:fillRef idx="3">
-            <a:schemeClr val="accent1"/>
-          </a:fillRef>
-          <a:effectRef idx="2">
-            <a:schemeClr val="accent1"/>
-          </a:effectRef>
-          <a:fontRef idx="minor">
-            <a:schemeClr val="lt1"/>
-          </a:fontRef>
-        </p:style>
-        <p:txBody>
-          <a:bodyPr rtlCol="0" anchor="ctr"/>
-          <a:lstStyle/>
-          <a:p>
-            <a:pPr algn="ctr"/>
-          </a:p>
-        </p:txBody>
-      </p:sp>
-      <p:sp>
-        <p:nvSpPr>
-          <p:cNvPr id="14" name="Rounded Rectangle 13"/>
-          <p:cNvSpPr/>
-          <p:nvPr/>
-        </p:nvSpPr>
-        <p:spPr>
-          <a:xfrm>
-            <a:off x="594360" y="4146804"/>
-            <a:ext cx="438912" cy="438912"/>
-          </a:xfrm>
-          <a:prstGeom prst="roundRect">
-            <a:avLst>
-              <a:gd name="adj" fmla="val 12000"/>
-            </a:avLst>
-          </a:prstGeom>
-          <a:solidFill>
-            <a:srgbClr val="095292"/>
-          </a:solidFill>
-          <a:ln>
-            <a:noFill/>
-          </a:ln>
-        </p:spPr>
-        <p:style>
-          <a:lnRef idx="1">
-            <a:schemeClr val="accent1"/>
-          </a:lnRef>
-          <a:fillRef idx="3">
-            <a:schemeClr val="accent1"/>
-          </a:fillRef>
-          <a:effectRef idx="2">
-            <a:schemeClr val="accent1"/>
-          </a:effectRef>
-          <a:fontRef idx="minor">
-            <a:schemeClr val="lt1"/>
-          </a:fontRef>
-        </p:style>
-        <p:txBody>
-          <a:bodyPr rtlCol="0" anchor="ctr"/>
-          <a:lstStyle/>
-          <a:p>
-            <a:pPr algn="ctr"/>
-          </a:p>
-        </p:txBody>
-      </p:sp>
-      <p:sp>
-        <p:nvSpPr>
-          <p:cNvPr id="15" name="TextBox 14"/>
-          <p:cNvSpPr txBox="1"/>
-          <p:nvPr/>
-        </p:nvSpPr>
-        <p:spPr>
-          <a:xfrm>
-            <a:off x="594360" y="4146804"/>
-            <a:ext cx="438912" cy="438912"/>
-          </a:xfrm>
-          <a:prstGeom prst="rect">
-            <a:avLst/>
-          </a:prstGeom>
-          <a:noFill/>
-        </p:spPr>
-        <p:txBody>
-          <a:bodyPr wrap="square" anchor="ctr"/>
-          <a:lstStyle/>
-          <a:p>
-            <a:pPr algn="ctr"/>
-            <a:r>
-              <a:rPr sz="1600" b="1" i="0">
-                <a:solidFill>
-                  <a:srgbClr val="FFFFFF"/>
-                </a:solidFill>
-                <a:latin typeface="Calibri"/>
-              </a:rPr>
-              <a:t>3</a:t>
-            </a:r>
-          </a:p>
-        </p:txBody>
-      </p:sp>
-      <p:sp>
-        <p:nvSpPr>
-          <p:cNvPr id="16" name="TextBox 15"/>
-          <p:cNvSpPr txBox="1"/>
-          <p:nvPr/>
-        </p:nvSpPr>
-        <p:spPr>
-          <a:xfrm>
-            <a:off x="1188720" y="3931920"/>
-            <a:ext cx="10271455" cy="886968"/>
-          </a:xfrm>
-          <a:prstGeom prst="rect">
-            <a:avLst/>
-          </a:prstGeom>
-          <a:noFill/>
-        </p:spPr>
-        <p:txBody>
-          <a:bodyPr wrap="square" anchor="ctr"/>
-          <a:lstStyle/>
-          <a:p>
-            <a:r>
-              <a:rPr sz="1500" b="1" i="0">
-                <a:solidFill>
-                  <a:srgbClr val="095292"/>
-                </a:solidFill>
-                <a:latin typeface="Calibri"/>
-              </a:rPr>
-              <a:t>Lista de gaps con responsable.</a:t>
-            </a:r>
-          </a:p>
-        </p:txBody>
-      </p:sp>
-      <p:sp>
-        <p:nvSpPr>
-          <p:cNvPr id="17" name="Rounded Rectangle 16"/>
-          <p:cNvSpPr/>
-          <p:nvPr/>
-        </p:nvSpPr>
-        <p:spPr>
-          <a:xfrm>
-            <a:off x="457200" y="4983480"/>
-            <a:ext cx="11277295" cy="1051560"/>
-          </a:xfrm>
-          <a:prstGeom prst="roundRect">
-            <a:avLst>
-              <a:gd name="adj" fmla="val 12000"/>
-            </a:avLst>
-          </a:prstGeom>
-          <a:solidFill>
-            <a:srgbClr val="E8F4FA"/>
-          </a:solidFill>
-          <a:ln>
-            <a:noFill/>
-          </a:ln>
-        </p:spPr>
-        <p:style>
-          <a:lnRef idx="1">
-            <a:schemeClr val="accent1"/>
-          </a:lnRef>
-          <a:fillRef idx="3">
-            <a:schemeClr val="accent1"/>
-          </a:fillRef>
-          <a:effectRef idx="2">
-            <a:schemeClr val="accent1"/>
-          </a:effectRef>
-          <a:fontRef idx="minor">
-            <a:schemeClr val="lt1"/>
-          </a:fontRef>
-        </p:style>
-        <p:txBody>
-          <a:bodyPr rtlCol="0" anchor="ctr"/>
-          <a:lstStyle/>
-          <a:p>
-            <a:pPr algn="ctr"/>
-          </a:p>
-        </p:txBody>
-      </p:sp>
-      <p:sp>
-        <p:nvSpPr>
-          <p:cNvPr id="18" name="Rounded Rectangle 17"/>
-          <p:cNvSpPr/>
-          <p:nvPr/>
-        </p:nvSpPr>
-        <p:spPr>
-          <a:xfrm>
-            <a:off x="594360" y="5289804"/>
-            <a:ext cx="438912" cy="438912"/>
-          </a:xfrm>
-          <a:prstGeom prst="roundRect">
-            <a:avLst>
-              <a:gd name="adj" fmla="val 12000"/>
-            </a:avLst>
-          </a:prstGeom>
-          <a:solidFill>
-            <a:srgbClr val="095292"/>
-          </a:solidFill>
-          <a:ln>
-            <a:noFill/>
-          </a:ln>
-        </p:spPr>
-        <p:style>
-          <a:lnRef idx="1">
-            <a:schemeClr val="accent1"/>
-          </a:lnRef>
-          <a:fillRef idx="3">
-            <a:schemeClr val="accent1"/>
-          </a:fillRef>
-          <a:effectRef idx="2">
-            <a:schemeClr val="accent1"/>
-          </a:effectRef>
-          <a:fontRef idx="minor">
-            <a:schemeClr val="lt1"/>
-          </a:fontRef>
-        </p:style>
-        <p:txBody>
-          <a:bodyPr rtlCol="0" anchor="ctr"/>
-          <a:lstStyle/>
-          <a:p>
-            <a:pPr algn="ctr"/>
-          </a:p>
-        </p:txBody>
-      </p:sp>
-      <p:sp>
-        <p:nvSpPr>
-          <p:cNvPr id="19" name="TextBox 18"/>
-          <p:cNvSpPr txBox="1"/>
-          <p:nvPr/>
-        </p:nvSpPr>
-        <p:spPr>
-          <a:xfrm>
-            <a:off x="594360" y="5289804"/>
-            <a:ext cx="438912" cy="438912"/>
-          </a:xfrm>
-          <a:prstGeom prst="rect">
-            <a:avLst/>
-          </a:prstGeom>
-          <a:noFill/>
-        </p:spPr>
-        <p:txBody>
-          <a:bodyPr wrap="square" anchor="ctr"/>
-          <a:lstStyle/>
-          <a:p>
-            <a:pPr algn="ctr"/>
-            <a:r>
-              <a:rPr sz="1600" b="1" i="0">
-                <a:solidFill>
-                  <a:srgbClr val="FFFFFF"/>
-                </a:solidFill>
-                <a:latin typeface="Calibri"/>
-              </a:rPr>
-              <a:t>4</a:t>
-            </a:r>
-          </a:p>
-        </p:txBody>
-      </p:sp>
-      <p:sp>
-        <p:nvSpPr>
-          <p:cNvPr id="20" name="TextBox 19"/>
-          <p:cNvSpPr txBox="1"/>
-          <p:nvPr/>
-        </p:nvSpPr>
-        <p:spPr>
-          <a:xfrm>
-            <a:off x="1188720" y="5074920"/>
-            <a:ext cx="10271455" cy="886968"/>
-          </a:xfrm>
-          <a:prstGeom prst="rect">
-            <a:avLst/>
-          </a:prstGeom>
-          <a:noFill/>
-        </p:spPr>
-        <p:txBody>
-          <a:bodyPr wrap="square" anchor="ctr"/>
-          <a:lstStyle/>
-          <a:p>
-            <a:r>
-              <a:rPr sz="1500" b="1" i="0">
-                <a:solidFill>
-                  <a:srgbClr val="095292"/>
-                </a:solidFill>
-                <a:latin typeface="Calibri"/>
-              </a:rPr>
-              <a:t>Subir avance intermedio a la plataforma del curso (Talleres) si se pide.</a:t>
-            </a:r>
-          </a:p>
-        </p:txBody>
-      </p:sp>
-      <p:sp>
-        <p:nvSpPr>
-          <p:cNvPr id="21" name="TextBox 20"/>
+          <a:bodyPr wrap="square">
+            <a:spAutoFit/>
+          </a:bodyPr>
+          <a:lstStyle/>
+          <a:p>
+            <a:pPr>
+              <a:spcAft>
+                <a:spcPts val="800"/>
+              </a:spcAft>
+            </a:pPr>
+            <a:r>
+              <a:rPr sz="2000" b="0" i="0">
+                <a:solidFill>
+                  <a:srgbClr val="333333"/>
+                </a:solidFill>
+                <a:latin typeface="Calibri"/>
+              </a:rPr>
+              <a:t>–   </a:t>
+            </a:r>
+            <a:r>
+              <a:rPr sz="2000" b="1" i="0">
+                <a:solidFill>
+                  <a:srgbClr val="333333"/>
+                </a:solidFill>
+                <a:latin typeface="Calibri"/>
+              </a:rPr>
+              <a:t>Objetivo:</a:t>
+            </a:r>
+            <a:r>
+              <a:rPr sz="2000" b="0" i="0">
+                <a:solidFill>
+                  <a:srgbClr val="333333"/>
+                </a:solidFill>
+                <a:latin typeface="Calibri"/>
+              </a:rPr>
+              <a:t> Checklist avance + demo 3-5 min.</a:t>
+            </a:r>
+          </a:p>
+          <a:p>
+            <a:pPr>
+              <a:spcAft>
+                <a:spcPts val="800"/>
+              </a:spcAft>
+            </a:pPr>
+            <a:r>
+              <a:rPr sz="2000" b="0" i="0">
+                <a:solidFill>
+                  <a:srgbClr val="333333"/>
+                </a:solidFill>
+                <a:latin typeface="Calibri"/>
+              </a:rPr>
+              <a:t>–   </a:t>
+            </a:r>
+            <a:r>
+              <a:rPr sz="2000" b="1" i="0">
+                <a:solidFill>
+                  <a:srgbClr val="333333"/>
+                </a:solidFill>
+                <a:latin typeface="Calibri"/>
+              </a:rPr>
+              <a:t>Exito:</a:t>
+            </a:r>
+            <a:r>
+              <a:rPr sz="2000" b="0" i="0">
+                <a:solidFill>
+                  <a:srgbClr val="333333"/>
+                </a:solidFill>
+                <a:latin typeface="Calibri"/>
+              </a:rPr>
+              <a:t> Checklist evidenciada.</a:t>
+            </a:r>
+          </a:p>
+          <a:p>
+            <a:pPr>
+              <a:spcAft>
+                <a:spcPts val="800"/>
+              </a:spcAft>
+            </a:pPr>
+            <a:r>
+              <a:rPr sz="2000" b="0" i="0">
+                <a:solidFill>
+                  <a:srgbClr val="333333"/>
+                </a:solidFill>
+                <a:latin typeface="Calibri"/>
+              </a:rPr>
+              <a:t>–   </a:t>
+            </a:r>
+            <a:r>
+              <a:rPr sz="2000" b="1" i="0">
+                <a:solidFill>
+                  <a:srgbClr val="333333"/>
+                </a:solidFill>
+                <a:latin typeface="Calibri"/>
+              </a:rPr>
+              <a:t>Exito:</a:t>
+            </a:r>
+            <a:r>
+              <a:rPr sz="2000" b="0" i="0">
+                <a:solidFill>
+                  <a:srgbClr val="333333"/>
+                </a:solidFill>
+                <a:latin typeface="Calibri"/>
+              </a:rPr>
+              <a:t> Demo ER+proc+trigger.</a:t>
+            </a:r>
+          </a:p>
+          <a:p>
+            <a:pPr>
+              <a:spcAft>
+                <a:spcPts val="800"/>
+              </a:spcAft>
+            </a:pPr>
+            <a:r>
+              <a:rPr sz="2000" b="0" i="0">
+                <a:solidFill>
+                  <a:srgbClr val="333333"/>
+                </a:solidFill>
+                <a:latin typeface="Calibri"/>
+              </a:rPr>
+              <a:t>–   </a:t>
+            </a:r>
+            <a:r>
+              <a:rPr sz="2000" b="1" i="0">
+                <a:solidFill>
+                  <a:srgbClr val="333333"/>
+                </a:solidFill>
+                <a:latin typeface="Calibri"/>
+              </a:rPr>
+              <a:t>Exito:</a:t>
+            </a:r>
+            <a:r>
+              <a:rPr sz="2000" b="0" i="0">
+                <a:solidFill>
+                  <a:srgbClr val="333333"/>
+                </a:solidFill>
+                <a:latin typeface="Calibri"/>
+              </a:rPr>
+              <a:t> Gaps.</a:t>
+            </a:r>
+          </a:p>
+          <a:p>
+            <a:pPr>
+              <a:spcAft>
+                <a:spcPts val="800"/>
+              </a:spcAft>
+            </a:pPr>
+            <a:r>
+              <a:rPr sz="2000" b="0" i="0">
+                <a:solidFill>
+                  <a:srgbClr val="333333"/>
+                </a:solidFill>
+                <a:latin typeface="Calibri"/>
+              </a:rPr>
+              <a:t>–   </a:t>
+            </a:r>
+            <a:r>
+              <a:rPr sz="2000" b="1" i="0">
+                <a:solidFill>
+                  <a:srgbClr val="333333"/>
+                </a:solidFill>
+                <a:latin typeface="Calibri"/>
+              </a:rPr>
+              <a:t>Exito:</a:t>
+            </a:r>
+            <a:r>
+              <a:rPr sz="2000" b="0" i="0">
+                <a:solidFill>
+                  <a:srgbClr val="333333"/>
+                </a:solidFill>
+                <a:latin typeface="Calibri"/>
+              </a:rPr>
+              <a:t> Avance subido si aplica.</a:t>
+            </a:r>
+          </a:p>
+        </p:txBody>
+      </p:sp>
+      <p:sp>
+        <p:nvSpPr>
+          <p:cNvPr id="6" name="TextBox 5"/>
           <p:cNvSpPr txBox="1"/>
           <p:nvPr/>
         </p:nvSpPr>
@@ -10570,154 +10599,21 @@
                 </a:solidFill>
                 <a:latin typeface="Calibri"/>
               </a:rPr>
-              <a:t>Taller PI VetCare — pistas (checklist vacio)</a:t>
-            </a:r>
-          </a:p>
-        </p:txBody>
-      </p:sp>
-      <p:sp>
-        <p:nvSpPr>
-          <p:cNvPr id="5" name="Rounded Rectangle 4"/>
-          <p:cNvSpPr/>
-          <p:nvPr/>
-        </p:nvSpPr>
-        <p:spPr>
-          <a:xfrm>
-            <a:off x="457200" y="1261872"/>
-            <a:ext cx="11277295" cy="566928"/>
-          </a:xfrm>
-          <a:prstGeom prst="roundRect">
-            <a:avLst>
-              <a:gd name="adj" fmla="val 12000"/>
-            </a:avLst>
-          </a:prstGeom>
-          <a:solidFill>
-            <a:srgbClr val="F2F2F2"/>
-          </a:solidFill>
-          <a:ln>
-            <a:noFill/>
-          </a:ln>
-        </p:spPr>
-        <p:style>
-          <a:lnRef idx="1">
-            <a:schemeClr val="accent1"/>
-          </a:lnRef>
-          <a:fillRef idx="3">
-            <a:schemeClr val="accent1"/>
-          </a:fillRef>
-          <a:effectRef idx="2">
-            <a:schemeClr val="accent1"/>
-          </a:effectRef>
-          <a:fontRef idx="minor">
-            <a:schemeClr val="lt1"/>
-          </a:fontRef>
-        </p:style>
-        <p:txBody>
-          <a:bodyPr rtlCol="0" anchor="ctr"/>
-          <a:lstStyle/>
-          <a:p>
-            <a:pPr algn="ctr"/>
-          </a:p>
-        </p:txBody>
-      </p:sp>
-      <p:sp>
-        <p:nvSpPr>
-          <p:cNvPr id="6" name="Rectangle 5"/>
-          <p:cNvSpPr/>
-          <p:nvPr/>
-        </p:nvSpPr>
-        <p:spPr>
-          <a:xfrm>
-            <a:off x="640080" y="1408175"/>
-            <a:ext cx="274320" cy="274320"/>
-          </a:xfrm>
-          <a:prstGeom prst="rect">
-            <a:avLst/>
-          </a:prstGeom>
-          <a:solidFill>
-            <a:srgbClr val="FFFFFF"/>
-          </a:solidFill>
-          <a:ln>
-            <a:solidFill>
-              <a:srgbClr val="333333"/>
-            </a:solidFill>
-          </a:ln>
-        </p:spPr>
-        <p:style>
-          <a:lnRef idx="1">
-            <a:schemeClr val="accent1"/>
-          </a:lnRef>
-          <a:fillRef idx="3">
-            <a:schemeClr val="accent1"/>
-          </a:fillRef>
-          <a:effectRef idx="2">
-            <a:schemeClr val="accent1"/>
-          </a:effectRef>
-          <a:fontRef idx="minor">
-            <a:schemeClr val="lt1"/>
-          </a:fontRef>
-        </p:style>
-        <p:txBody>
-          <a:bodyPr rtlCol="0" anchor="ctr"/>
-          <a:lstStyle/>
-          <a:p>
-            <a:pPr algn="ctr"/>
-          </a:p>
-        </p:txBody>
-      </p:sp>
-      <p:sp>
-        <p:nvSpPr>
-          <p:cNvPr id="7" name="Rectangle 6"/>
-          <p:cNvSpPr/>
-          <p:nvPr/>
-        </p:nvSpPr>
-        <p:spPr>
-          <a:xfrm>
-            <a:off x="640080" y="1408175"/>
-            <a:ext cx="73152" cy="274320"/>
-          </a:xfrm>
-          <a:prstGeom prst="rect">
-            <a:avLst/>
-          </a:prstGeom>
-          <a:solidFill>
-            <a:srgbClr val="269CCB"/>
-          </a:solidFill>
-          <a:ln>
-            <a:noFill/>
-          </a:ln>
-        </p:spPr>
-        <p:style>
-          <a:lnRef idx="1">
-            <a:schemeClr val="accent1"/>
-          </a:lnRef>
-          <a:fillRef idx="3">
-            <a:schemeClr val="accent1"/>
-          </a:fillRef>
-          <a:effectRef idx="2">
-            <a:schemeClr val="accent1"/>
-          </a:effectRef>
-          <a:fontRef idx="minor">
-            <a:schemeClr val="lt1"/>
-          </a:fontRef>
-        </p:style>
-        <p:txBody>
-          <a:bodyPr rtlCol="0" anchor="ctr"/>
-          <a:lstStyle/>
-          <a:p>
-            <a:pPr algn="ctr"/>
-          </a:p>
-        </p:txBody>
-      </p:sp>
-      <p:sp>
-        <p:nvSpPr>
-          <p:cNvPr id="8" name="TextBox 7"/>
+              <a:t>Taller PI VetCare — escenario / datos de partida</a:t>
+            </a:r>
+          </a:p>
+        </p:txBody>
+      </p:sp>
+      <p:sp>
+        <p:nvSpPr>
+          <p:cNvPr id="5" name="TextBox 4"/>
           <p:cNvSpPr txBox="1"/>
           <p:nvPr/>
         </p:nvSpPr>
         <p:spPr>
           <a:xfrm>
-            <a:off x="1097280" y="1353312"/>
-            <a:ext cx="10362895" cy="402336"/>
+            <a:off x="457200" y="1170432"/>
+            <a:ext cx="11277295" cy="5230368"/>
           </a:xfrm>
           <a:prstGeom prst="rect">
             <a:avLst/>
@@ -10725,354 +10621,31 @@
           <a:noFill/>
         </p:spPr>
         <p:txBody>
-          <a:bodyPr wrap="square" anchor="ctr"/>
-          <a:lstStyle/>
-          <a:p>
-            <a:r>
-              <a:rPr sz="1500" b="0" i="0">
+          <a:bodyPr wrap="square">
+            <a:spAutoFit/>
+          </a:bodyPr>
+          <a:lstStyle/>
+          <a:p>
+            <a:pPr>
+              <a:spcAft>
+                <a:spcPts val="800"/>
+              </a:spcAft>
+            </a:pPr>
+            <a:r>
+              <a:rPr sz="2000" b="0" i="0">
                 <a:solidFill>
                   <a:srgbClr val="333333"/>
                 </a:solidFill>
                 <a:latin typeface="Calibri"/>
               </a:rPr>
-              <a:t>□ Si con evidencia?</a:t>
-            </a:r>
-          </a:p>
-        </p:txBody>
-      </p:sp>
-      <p:sp>
-        <p:nvSpPr>
-          <p:cNvPr id="9" name="Rounded Rectangle 8"/>
-          <p:cNvSpPr/>
-          <p:nvPr/>
-        </p:nvSpPr>
-        <p:spPr>
-          <a:xfrm>
-            <a:off x="457200" y="1938528"/>
-            <a:ext cx="11277295" cy="566928"/>
-          </a:xfrm>
-          <a:prstGeom prst="roundRect">
-            <a:avLst>
-              <a:gd name="adj" fmla="val 12000"/>
-            </a:avLst>
-          </a:prstGeom>
-          <a:solidFill>
-            <a:srgbClr val="F2F2F2"/>
-          </a:solidFill>
-          <a:ln>
-            <a:noFill/>
-          </a:ln>
-        </p:spPr>
-        <p:style>
-          <a:lnRef idx="1">
-            <a:schemeClr val="accent1"/>
-          </a:lnRef>
-          <a:fillRef idx="3">
-            <a:schemeClr val="accent1"/>
-          </a:fillRef>
-          <a:effectRef idx="2">
-            <a:schemeClr val="accent1"/>
-          </a:effectRef>
-          <a:fontRef idx="minor">
-            <a:schemeClr val="lt1"/>
-          </a:fontRef>
-        </p:style>
-        <p:txBody>
-          <a:bodyPr rtlCol="0" anchor="ctr"/>
-          <a:lstStyle/>
-          <a:p>
-            <a:pPr algn="ctr"/>
-          </a:p>
-        </p:txBody>
-      </p:sp>
-      <p:sp>
-        <p:nvSpPr>
-          <p:cNvPr id="10" name="Rectangle 9"/>
-          <p:cNvSpPr/>
-          <p:nvPr/>
-        </p:nvSpPr>
-        <p:spPr>
-          <a:xfrm>
-            <a:off x="640080" y="2084832"/>
-            <a:ext cx="274320" cy="274320"/>
-          </a:xfrm>
-          <a:prstGeom prst="rect">
-            <a:avLst/>
-          </a:prstGeom>
-          <a:solidFill>
-            <a:srgbClr val="FFFFFF"/>
-          </a:solidFill>
-          <a:ln>
-            <a:solidFill>
-              <a:srgbClr val="333333"/>
-            </a:solidFill>
-          </a:ln>
-        </p:spPr>
-        <p:style>
-          <a:lnRef idx="1">
-            <a:schemeClr val="accent1"/>
-          </a:lnRef>
-          <a:fillRef idx="3">
-            <a:schemeClr val="accent1"/>
-          </a:fillRef>
-          <a:effectRef idx="2">
-            <a:schemeClr val="accent1"/>
-          </a:effectRef>
-          <a:fontRef idx="minor">
-            <a:schemeClr val="lt1"/>
-          </a:fontRef>
-        </p:style>
-        <p:txBody>
-          <a:bodyPr rtlCol="0" anchor="ctr"/>
-          <a:lstStyle/>
-          <a:p>
-            <a:pPr algn="ctr"/>
-          </a:p>
-        </p:txBody>
-      </p:sp>
-      <p:sp>
-        <p:nvSpPr>
-          <p:cNvPr id="11" name="Rectangle 10"/>
-          <p:cNvSpPr/>
-          <p:nvPr/>
-        </p:nvSpPr>
-        <p:spPr>
-          <a:xfrm>
-            <a:off x="640080" y="2084832"/>
-            <a:ext cx="73152" cy="274320"/>
-          </a:xfrm>
-          <a:prstGeom prst="rect">
-            <a:avLst/>
-          </a:prstGeom>
-          <a:solidFill>
-            <a:srgbClr val="269CCB"/>
-          </a:solidFill>
-          <a:ln>
-            <a:noFill/>
-          </a:ln>
-        </p:spPr>
-        <p:style>
-          <a:lnRef idx="1">
-            <a:schemeClr val="accent1"/>
-          </a:lnRef>
-          <a:fillRef idx="3">
-            <a:schemeClr val="accent1"/>
-          </a:fillRef>
-          <a:effectRef idx="2">
-            <a:schemeClr val="accent1"/>
-          </a:effectRef>
-          <a:fontRef idx="minor">
-            <a:schemeClr val="lt1"/>
-          </a:fontRef>
-        </p:style>
-        <p:txBody>
-          <a:bodyPr rtlCol="0" anchor="ctr"/>
-          <a:lstStyle/>
-          <a:p>
-            <a:pPr algn="ctr"/>
-          </a:p>
-        </p:txBody>
-      </p:sp>
-      <p:sp>
-        <p:nvSpPr>
-          <p:cNvPr id="12" name="TextBox 11"/>
-          <p:cNvSpPr txBox="1"/>
-          <p:nvPr/>
-        </p:nvSpPr>
-        <p:spPr>
-          <a:xfrm>
-            <a:off x="1097280" y="2029968"/>
-            <a:ext cx="10362895" cy="402336"/>
-          </a:xfrm>
-          <a:prstGeom prst="rect">
-            <a:avLst/>
-          </a:prstGeom>
-          <a:noFill/>
-        </p:spPr>
-        <p:txBody>
-          <a:bodyPr wrap="square" anchor="ctr"/>
-          <a:lstStyle/>
-          <a:p>
-            <a:r>
-              <a:rPr sz="1500" b="0" i="0">
-                <a:solidFill>
-                  <a:srgbClr val="333333"/>
-                </a:solidFill>
-                <a:latin typeface="Calibri"/>
-              </a:rPr>
-              <a:t>□ Gaps con dueño?</a:t>
-            </a:r>
-          </a:p>
-        </p:txBody>
-      </p:sp>
-      <p:sp>
-        <p:nvSpPr>
-          <p:cNvPr id="13" name="Rounded Rectangle 12"/>
-          <p:cNvSpPr/>
-          <p:nvPr/>
-        </p:nvSpPr>
-        <p:spPr>
-          <a:xfrm>
-            <a:off x="457200" y="2615184"/>
-            <a:ext cx="11277295" cy="566928"/>
-          </a:xfrm>
-          <a:prstGeom prst="roundRect">
-            <a:avLst>
-              <a:gd name="adj" fmla="val 12000"/>
-            </a:avLst>
-          </a:prstGeom>
-          <a:solidFill>
-            <a:srgbClr val="F2F2F2"/>
-          </a:solidFill>
-          <a:ln>
-            <a:noFill/>
-          </a:ln>
-        </p:spPr>
-        <p:style>
-          <a:lnRef idx="1">
-            <a:schemeClr val="accent1"/>
-          </a:lnRef>
-          <a:fillRef idx="3">
-            <a:schemeClr val="accent1"/>
-          </a:fillRef>
-          <a:effectRef idx="2">
-            <a:schemeClr val="accent1"/>
-          </a:effectRef>
-          <a:fontRef idx="minor">
-            <a:schemeClr val="lt1"/>
-          </a:fontRef>
-        </p:style>
-        <p:txBody>
-          <a:bodyPr rtlCol="0" anchor="ctr"/>
-          <a:lstStyle/>
-          <a:p>
-            <a:pPr algn="ctr"/>
-          </a:p>
-        </p:txBody>
-      </p:sp>
-      <p:sp>
-        <p:nvSpPr>
-          <p:cNvPr id="14" name="Rectangle 13"/>
-          <p:cNvSpPr/>
-          <p:nvPr/>
-        </p:nvSpPr>
-        <p:spPr>
-          <a:xfrm>
-            <a:off x="640080" y="2761488"/>
-            <a:ext cx="274320" cy="274320"/>
-          </a:xfrm>
-          <a:prstGeom prst="rect">
-            <a:avLst/>
-          </a:prstGeom>
-          <a:solidFill>
-            <a:srgbClr val="FFFFFF"/>
-          </a:solidFill>
-          <a:ln>
-            <a:solidFill>
-              <a:srgbClr val="333333"/>
-            </a:solidFill>
-          </a:ln>
-        </p:spPr>
-        <p:style>
-          <a:lnRef idx="1">
-            <a:schemeClr val="accent1"/>
-          </a:lnRef>
-          <a:fillRef idx="3">
-            <a:schemeClr val="accent1"/>
-          </a:fillRef>
-          <a:effectRef idx="2">
-            <a:schemeClr val="accent1"/>
-          </a:effectRef>
-          <a:fontRef idx="minor">
-            <a:schemeClr val="lt1"/>
-          </a:fontRef>
-        </p:style>
-        <p:txBody>
-          <a:bodyPr rtlCol="0" anchor="ctr"/>
-          <a:lstStyle/>
-          <a:p>
-            <a:pPr algn="ctr"/>
-          </a:p>
-        </p:txBody>
-      </p:sp>
-      <p:sp>
-        <p:nvSpPr>
-          <p:cNvPr id="15" name="Rectangle 14"/>
-          <p:cNvSpPr/>
-          <p:nvPr/>
-        </p:nvSpPr>
-        <p:spPr>
-          <a:xfrm>
-            <a:off x="640080" y="2761488"/>
-            <a:ext cx="73152" cy="274320"/>
-          </a:xfrm>
-          <a:prstGeom prst="rect">
-            <a:avLst/>
-          </a:prstGeom>
-          <a:solidFill>
-            <a:srgbClr val="269CCB"/>
-          </a:solidFill>
-          <a:ln>
-            <a:noFill/>
-          </a:ln>
-        </p:spPr>
-        <p:style>
-          <a:lnRef idx="1">
-            <a:schemeClr val="accent1"/>
-          </a:lnRef>
-          <a:fillRef idx="3">
-            <a:schemeClr val="accent1"/>
-          </a:fillRef>
-          <a:effectRef idx="2">
-            <a:schemeClr val="accent1"/>
-          </a:effectRef>
-          <a:fontRef idx="minor">
-            <a:schemeClr val="lt1"/>
-          </a:fontRef>
-        </p:style>
-        <p:txBody>
-          <a:bodyPr rtlCol="0" anchor="ctr"/>
-          <a:lstStyle/>
-          <a:p>
-            <a:pPr algn="ctr"/>
-          </a:p>
-        </p:txBody>
-      </p:sp>
-      <p:sp>
-        <p:nvSpPr>
-          <p:cNvPr id="16" name="TextBox 15"/>
-          <p:cNvSpPr txBox="1"/>
-          <p:nvPr/>
-        </p:nvSpPr>
-        <p:spPr>
-          <a:xfrm>
-            <a:off x="1097280" y="2706624"/>
-            <a:ext cx="10362895" cy="402336"/>
-          </a:xfrm>
-          <a:prstGeom prst="rect">
-            <a:avLst/>
-          </a:prstGeom>
-          <a:noFill/>
-        </p:spPr>
-        <p:txBody>
-          <a:bodyPr wrap="square" anchor="ctr"/>
-          <a:lstStyle/>
-          <a:p>
-            <a:r>
-              <a:rPr sz="1500" b="0" i="0">
-                <a:solidFill>
-                  <a:srgbClr val="333333"/>
-                </a:solidFill>
-                <a:latin typeface="Calibri"/>
-              </a:rPr>
-              <a:t>□ Demo &lt;=5 min?</a:t>
-            </a:r>
-          </a:p>
-        </p:txBody>
-      </p:sp>
-      <p:sp>
-        <p:nvSpPr>
-          <p:cNvPr id="17" name="TextBox 16"/>
+              <a:t>–   Evidencias: ER, DDL, roles, procs, fn, triggers, opt.</a:t>
+            </a:r>
+          </a:p>
+        </p:txBody>
+      </p:sp>
+      <p:sp>
+        <p:nvSpPr>
+          <p:cNvPr id="6" name="TextBox 5"/>
           <p:cNvSpPr txBox="1"/>
           <p:nvPr/>
         </p:nvSpPr>
@@ -11246,21 +10819,111 @@
                 </a:solidFill>
                 <a:latin typeface="Calibri"/>
               </a:rPr>
-              <a:t>Criterios de exito / entregable</a:t>
-            </a:r>
-          </a:p>
-        </p:txBody>
-      </p:sp>
-      <p:sp>
-        <p:nvSpPr>
-          <p:cNvPr id="5" name="TextBox 4"/>
+              <a:t>Taller PI VetCare — pasos guiados</a:t>
+            </a:r>
+          </a:p>
+        </p:txBody>
+      </p:sp>
+      <p:sp>
+        <p:nvSpPr>
+          <p:cNvPr id="5" name="Rounded Rectangle 4"/>
+          <p:cNvSpPr/>
+          <p:nvPr/>
+        </p:nvSpPr>
+        <p:spPr>
+          <a:xfrm>
+            <a:off x="457200" y="1554480"/>
+            <a:ext cx="11277295" cy="1051560"/>
+          </a:xfrm>
+          <a:prstGeom prst="roundRect">
+            <a:avLst>
+              <a:gd name="adj" fmla="val 12000"/>
+            </a:avLst>
+          </a:prstGeom>
+          <a:solidFill>
+            <a:srgbClr val="F2F2F2"/>
+          </a:solidFill>
+          <a:ln>
+            <a:noFill/>
+          </a:ln>
+        </p:spPr>
+        <p:style>
+          <a:lnRef idx="1">
+            <a:schemeClr val="accent1"/>
+          </a:lnRef>
+          <a:fillRef idx="3">
+            <a:schemeClr val="accent1"/>
+          </a:fillRef>
+          <a:effectRef idx="2">
+            <a:schemeClr val="accent1"/>
+          </a:effectRef>
+          <a:fontRef idx="minor">
+            <a:schemeClr val="lt1"/>
+          </a:fontRef>
+        </p:style>
+        <p:txBody>
+          <a:bodyPr rtlCol="0" anchor="ctr"/>
+          <a:lstStyle/>
+          <a:p>
+            <a:pPr algn="ctr"/>
+          </a:p>
+        </p:txBody>
+      </p:sp>
+      <p:sp>
+        <p:nvSpPr>
+          <p:cNvPr id="6" name="Rounded Rectangle 5"/>
+          <p:cNvSpPr/>
+          <p:nvPr/>
+        </p:nvSpPr>
+        <p:spPr>
+          <a:xfrm>
+            <a:off x="594360" y="1860804"/>
+            <a:ext cx="438912" cy="438912"/>
+          </a:xfrm>
+          <a:prstGeom prst="roundRect">
+            <a:avLst>
+              <a:gd name="adj" fmla="val 12000"/>
+            </a:avLst>
+          </a:prstGeom>
+          <a:solidFill>
+            <a:srgbClr val="095292"/>
+          </a:solidFill>
+          <a:ln>
+            <a:noFill/>
+          </a:ln>
+        </p:spPr>
+        <p:style>
+          <a:lnRef idx="1">
+            <a:schemeClr val="accent1"/>
+          </a:lnRef>
+          <a:fillRef idx="3">
+            <a:schemeClr val="accent1"/>
+          </a:fillRef>
+          <a:effectRef idx="2">
+            <a:schemeClr val="accent1"/>
+          </a:effectRef>
+          <a:fontRef idx="minor">
+            <a:schemeClr val="lt1"/>
+          </a:fontRef>
+        </p:style>
+        <p:txBody>
+          <a:bodyPr rtlCol="0" anchor="ctr"/>
+          <a:lstStyle/>
+          <a:p>
+            <a:pPr algn="ctr"/>
+          </a:p>
+        </p:txBody>
+      </p:sp>
+      <p:sp>
+        <p:nvSpPr>
+          <p:cNvPr id="7" name="TextBox 6"/>
           <p:cNvSpPr txBox="1"/>
           <p:nvPr/>
         </p:nvSpPr>
         <p:spPr>
           <a:xfrm>
-            <a:off x="457200" y="1170432"/>
-            <a:ext cx="11277295" cy="5230368"/>
+            <a:off x="594360" y="1860804"/>
+            <a:ext cx="438912" cy="438912"/>
           </a:xfrm>
           <a:prstGeom prst="rect">
             <a:avLst/>
@@ -11268,131 +10931,522 @@
           <a:noFill/>
         </p:spPr>
         <p:txBody>
-          <a:bodyPr wrap="square">
-            <a:spAutoFit/>
-          </a:bodyPr>
-          <a:lstStyle/>
-          <a:p>
-            <a:pPr>
-              <a:spcAft>
-                <a:spcPts val="800"/>
-              </a:spcAft>
-            </a:pPr>
-            <a:r>
-              <a:rPr sz="2000" b="0" i="0">
-                <a:solidFill>
-                  <a:srgbClr val="333333"/>
-                </a:solidFill>
-                <a:latin typeface="Calibri"/>
-              </a:rPr>
-              <a:t>–   </a:t>
-            </a:r>
-            <a:r>
-              <a:rPr sz="2000" b="1" i="0">
-                <a:solidFill>
-                  <a:srgbClr val="333333"/>
-                </a:solidFill>
-                <a:latin typeface="Calibri"/>
-              </a:rPr>
-              <a:t>Entregable:</a:t>
-            </a:r>
-            <a:r>
-              <a:rPr sz="2000" b="0" i="0">
-                <a:solidFill>
-                  <a:srgbClr val="333333"/>
-                </a:solidFill>
-                <a:latin typeface="Calibri"/>
-              </a:rPr>
-              <a:t> Checklist firmada + enlace/ZIP avance (DDL+procs+ER)</a:t>
-            </a:r>
-          </a:p>
-          <a:p>
-            <a:pPr>
-              <a:spcAft>
-                <a:spcPts val="800"/>
-              </a:spcAft>
-            </a:pPr>
-            <a:r>
-              <a:rPr sz="2000" b="0" i="0">
-                <a:solidFill>
-                  <a:srgbClr val="333333"/>
-                </a:solidFill>
-                <a:latin typeface="Calibri"/>
-              </a:rPr>
-              <a:t>–   Evidencia: el SQL y su salida quedan guardados en cada pregunta de la plataforma del curso.</a:t>
-            </a:r>
-          </a:p>
-          <a:p>
-            <a:pPr>
-              <a:spcAft>
-                <a:spcPts val="800"/>
-              </a:spcAft>
-            </a:pPr>
-            <a:r>
-              <a:rPr sz="2000" b="0" i="0">
-                <a:solidFill>
-                  <a:srgbClr val="333333"/>
-                </a:solidFill>
-                <a:latin typeface="Calibri"/>
-              </a:rPr>
-              <a:t>–   Conserva copia en tu carpeta del PI (los .sql que pide el entregable).</a:t>
-            </a:r>
-          </a:p>
-          <a:p>
-            <a:pPr>
-              <a:spcAft>
-                <a:spcPts val="800"/>
-              </a:spcAft>
-            </a:pPr>
-            <a:r>
-              <a:rPr sz="2000" b="0" i="0">
-                <a:solidFill>
-                  <a:srgbClr val="333333"/>
-                </a:solidFill>
-                <a:latin typeface="Calibri"/>
-              </a:rPr>
-              <a:t>–   Actualizar checklist PI (que criterio de rubrica avanzo).</a:t>
-            </a:r>
-          </a:p>
-          <a:p>
-            <a:pPr>
-              <a:spcAft>
-                <a:spcPts val="800"/>
-              </a:spcAft>
-            </a:pPr>
-            <a:r>
-              <a:rPr sz="2000" b="0" i="0">
-                <a:solidFill>
-                  <a:srgbClr val="333333"/>
-                </a:solidFill>
-                <a:latin typeface="Calibri"/>
-              </a:rPr>
-              <a:t>–   </a:t>
-            </a:r>
-            <a:r>
-              <a:rPr sz="2000" b="1" i="0">
-                <a:solidFill>
-                  <a:srgbClr val="333333"/>
-                </a:solidFill>
-                <a:latin typeface="Calibri"/>
-              </a:rPr>
-              <a:t>Entrega en la plataforma del curso</a:t>
-            </a:r>
-            <a:r>
-              <a:rPr sz="2000" b="0" i="0">
-                <a:solidFill>
-                  <a:srgbClr val="333333"/>
-                </a:solidFill>
-                <a:latin typeface="Calibri"/>
-              </a:rPr>
-              <a:t> — en la fecha que indique el docente.</a:t>
-            </a:r>
-          </a:p>
-        </p:txBody>
-      </p:sp>
-      <p:sp>
-        <p:nvSpPr>
-          <p:cNvPr id="6" name="TextBox 5"/>
+          <a:bodyPr wrap="square" anchor="ctr"/>
+          <a:lstStyle/>
+          <a:p>
+            <a:pPr algn="ctr"/>
+            <a:r>
+              <a:rPr sz="1600" b="1" i="0">
+                <a:solidFill>
+                  <a:srgbClr val="FFFFFF"/>
+                </a:solidFill>
+                <a:latin typeface="Calibri"/>
+              </a:rPr>
+              <a:t>1</a:t>
+            </a:r>
+          </a:p>
+        </p:txBody>
+      </p:sp>
+      <p:sp>
+        <p:nvSpPr>
+          <p:cNvPr id="8" name="TextBox 7"/>
+          <p:cNvSpPr txBox="1"/>
+          <p:nvPr/>
+        </p:nvSpPr>
+        <p:spPr>
+          <a:xfrm>
+            <a:off x="1188720" y="1645920"/>
+            <a:ext cx="10271455" cy="886968"/>
+          </a:xfrm>
+          <a:prstGeom prst="rect">
+            <a:avLst/>
+          </a:prstGeom>
+          <a:noFill/>
+        </p:spPr>
+        <p:txBody>
+          <a:bodyPr wrap="square" anchor="ctr"/>
+          <a:lstStyle/>
+          <a:p>
+            <a:r>
+              <a:rPr sz="1500" b="1" i="0">
+                <a:solidFill>
+                  <a:srgbClr val="095292"/>
+                </a:solidFill>
+                <a:latin typeface="Calibri"/>
+              </a:rPr>
+              <a:t>Completar checklist de avance (si/no/parcial).</a:t>
+            </a:r>
+          </a:p>
+        </p:txBody>
+      </p:sp>
+      <p:sp>
+        <p:nvSpPr>
+          <p:cNvPr id="9" name="Rounded Rectangle 8"/>
+          <p:cNvSpPr/>
+          <p:nvPr/>
+        </p:nvSpPr>
+        <p:spPr>
+          <a:xfrm>
+            <a:off x="457200" y="2697480"/>
+            <a:ext cx="11277295" cy="1051560"/>
+          </a:xfrm>
+          <a:prstGeom prst="roundRect">
+            <a:avLst>
+              <a:gd name="adj" fmla="val 12000"/>
+            </a:avLst>
+          </a:prstGeom>
+          <a:solidFill>
+            <a:srgbClr val="E8F4FA"/>
+          </a:solidFill>
+          <a:ln>
+            <a:noFill/>
+          </a:ln>
+        </p:spPr>
+        <p:style>
+          <a:lnRef idx="1">
+            <a:schemeClr val="accent1"/>
+          </a:lnRef>
+          <a:fillRef idx="3">
+            <a:schemeClr val="accent1"/>
+          </a:fillRef>
+          <a:effectRef idx="2">
+            <a:schemeClr val="accent1"/>
+          </a:effectRef>
+          <a:fontRef idx="minor">
+            <a:schemeClr val="lt1"/>
+          </a:fontRef>
+        </p:style>
+        <p:txBody>
+          <a:bodyPr rtlCol="0" anchor="ctr"/>
+          <a:lstStyle/>
+          <a:p>
+            <a:pPr algn="ctr"/>
+          </a:p>
+        </p:txBody>
+      </p:sp>
+      <p:sp>
+        <p:nvSpPr>
+          <p:cNvPr id="10" name="Rounded Rectangle 9"/>
+          <p:cNvSpPr/>
+          <p:nvPr/>
+        </p:nvSpPr>
+        <p:spPr>
+          <a:xfrm>
+            <a:off x="594360" y="3003804"/>
+            <a:ext cx="438912" cy="438912"/>
+          </a:xfrm>
+          <a:prstGeom prst="roundRect">
+            <a:avLst>
+              <a:gd name="adj" fmla="val 12000"/>
+            </a:avLst>
+          </a:prstGeom>
+          <a:solidFill>
+            <a:srgbClr val="095292"/>
+          </a:solidFill>
+          <a:ln>
+            <a:noFill/>
+          </a:ln>
+        </p:spPr>
+        <p:style>
+          <a:lnRef idx="1">
+            <a:schemeClr val="accent1"/>
+          </a:lnRef>
+          <a:fillRef idx="3">
+            <a:schemeClr val="accent1"/>
+          </a:fillRef>
+          <a:effectRef idx="2">
+            <a:schemeClr val="accent1"/>
+          </a:effectRef>
+          <a:fontRef idx="minor">
+            <a:schemeClr val="lt1"/>
+          </a:fontRef>
+        </p:style>
+        <p:txBody>
+          <a:bodyPr rtlCol="0" anchor="ctr"/>
+          <a:lstStyle/>
+          <a:p>
+            <a:pPr algn="ctr"/>
+          </a:p>
+        </p:txBody>
+      </p:sp>
+      <p:sp>
+        <p:nvSpPr>
+          <p:cNvPr id="11" name="TextBox 10"/>
+          <p:cNvSpPr txBox="1"/>
+          <p:nvPr/>
+        </p:nvSpPr>
+        <p:spPr>
+          <a:xfrm>
+            <a:off x="594360" y="3003804"/>
+            <a:ext cx="438912" cy="438912"/>
+          </a:xfrm>
+          <a:prstGeom prst="rect">
+            <a:avLst/>
+          </a:prstGeom>
+          <a:noFill/>
+        </p:spPr>
+        <p:txBody>
+          <a:bodyPr wrap="square" anchor="ctr"/>
+          <a:lstStyle/>
+          <a:p>
+            <a:pPr algn="ctr"/>
+            <a:r>
+              <a:rPr sz="1600" b="1" i="0">
+                <a:solidFill>
+                  <a:srgbClr val="FFFFFF"/>
+                </a:solidFill>
+                <a:latin typeface="Calibri"/>
+              </a:rPr>
+              <a:t>2</a:t>
+            </a:r>
+          </a:p>
+        </p:txBody>
+      </p:sp>
+      <p:sp>
+        <p:nvSpPr>
+          <p:cNvPr id="12" name="TextBox 11"/>
+          <p:cNvSpPr txBox="1"/>
+          <p:nvPr/>
+        </p:nvSpPr>
+        <p:spPr>
+          <a:xfrm>
+            <a:off x="1188720" y="2788920"/>
+            <a:ext cx="10271455" cy="886968"/>
+          </a:xfrm>
+          <a:prstGeom prst="rect">
+            <a:avLst/>
+          </a:prstGeom>
+          <a:noFill/>
+        </p:spPr>
+        <p:txBody>
+          <a:bodyPr wrap="square" anchor="ctr"/>
+          <a:lstStyle/>
+          <a:p>
+            <a:r>
+              <a:rPr sz="1500" b="1" i="0">
+                <a:solidFill>
+                  <a:srgbClr val="095292"/>
+                </a:solidFill>
+                <a:latin typeface="Calibri"/>
+              </a:rPr>
+              <a:t>Demo 3-5 min: ER + 1 proc + 1 trigger.</a:t>
+            </a:r>
+          </a:p>
+        </p:txBody>
+      </p:sp>
+      <p:sp>
+        <p:nvSpPr>
+          <p:cNvPr id="13" name="Rounded Rectangle 12"/>
+          <p:cNvSpPr/>
+          <p:nvPr/>
+        </p:nvSpPr>
+        <p:spPr>
+          <a:xfrm>
+            <a:off x="457200" y="3840480"/>
+            <a:ext cx="11277295" cy="1051560"/>
+          </a:xfrm>
+          <a:prstGeom prst="roundRect">
+            <a:avLst>
+              <a:gd name="adj" fmla="val 12000"/>
+            </a:avLst>
+          </a:prstGeom>
+          <a:solidFill>
+            <a:srgbClr val="F2F2F2"/>
+          </a:solidFill>
+          <a:ln>
+            <a:noFill/>
+          </a:ln>
+        </p:spPr>
+        <p:style>
+          <a:lnRef idx="1">
+            <a:schemeClr val="accent1"/>
+          </a:lnRef>
+          <a:fillRef idx="3">
+            <a:schemeClr val="accent1"/>
+          </a:fillRef>
+          <a:effectRef idx="2">
+            <a:schemeClr val="accent1"/>
+          </a:effectRef>
+          <a:fontRef idx="minor">
+            <a:schemeClr val="lt1"/>
+          </a:fontRef>
+        </p:style>
+        <p:txBody>
+          <a:bodyPr rtlCol="0" anchor="ctr"/>
+          <a:lstStyle/>
+          <a:p>
+            <a:pPr algn="ctr"/>
+          </a:p>
+        </p:txBody>
+      </p:sp>
+      <p:sp>
+        <p:nvSpPr>
+          <p:cNvPr id="14" name="Rounded Rectangle 13"/>
+          <p:cNvSpPr/>
+          <p:nvPr/>
+        </p:nvSpPr>
+        <p:spPr>
+          <a:xfrm>
+            <a:off x="594360" y="4146804"/>
+            <a:ext cx="438912" cy="438912"/>
+          </a:xfrm>
+          <a:prstGeom prst="roundRect">
+            <a:avLst>
+              <a:gd name="adj" fmla="val 12000"/>
+            </a:avLst>
+          </a:prstGeom>
+          <a:solidFill>
+            <a:srgbClr val="095292"/>
+          </a:solidFill>
+          <a:ln>
+            <a:noFill/>
+          </a:ln>
+        </p:spPr>
+        <p:style>
+          <a:lnRef idx="1">
+            <a:schemeClr val="accent1"/>
+          </a:lnRef>
+          <a:fillRef idx="3">
+            <a:schemeClr val="accent1"/>
+          </a:fillRef>
+          <a:effectRef idx="2">
+            <a:schemeClr val="accent1"/>
+          </a:effectRef>
+          <a:fontRef idx="minor">
+            <a:schemeClr val="lt1"/>
+          </a:fontRef>
+        </p:style>
+        <p:txBody>
+          <a:bodyPr rtlCol="0" anchor="ctr"/>
+          <a:lstStyle/>
+          <a:p>
+            <a:pPr algn="ctr"/>
+          </a:p>
+        </p:txBody>
+      </p:sp>
+      <p:sp>
+        <p:nvSpPr>
+          <p:cNvPr id="15" name="TextBox 14"/>
+          <p:cNvSpPr txBox="1"/>
+          <p:nvPr/>
+        </p:nvSpPr>
+        <p:spPr>
+          <a:xfrm>
+            <a:off x="594360" y="4146804"/>
+            <a:ext cx="438912" cy="438912"/>
+          </a:xfrm>
+          <a:prstGeom prst="rect">
+            <a:avLst/>
+          </a:prstGeom>
+          <a:noFill/>
+        </p:spPr>
+        <p:txBody>
+          <a:bodyPr wrap="square" anchor="ctr"/>
+          <a:lstStyle/>
+          <a:p>
+            <a:pPr algn="ctr"/>
+            <a:r>
+              <a:rPr sz="1600" b="1" i="0">
+                <a:solidFill>
+                  <a:srgbClr val="FFFFFF"/>
+                </a:solidFill>
+                <a:latin typeface="Calibri"/>
+              </a:rPr>
+              <a:t>3</a:t>
+            </a:r>
+          </a:p>
+        </p:txBody>
+      </p:sp>
+      <p:sp>
+        <p:nvSpPr>
+          <p:cNvPr id="16" name="TextBox 15"/>
+          <p:cNvSpPr txBox="1"/>
+          <p:nvPr/>
+        </p:nvSpPr>
+        <p:spPr>
+          <a:xfrm>
+            <a:off x="1188720" y="3931920"/>
+            <a:ext cx="10271455" cy="886968"/>
+          </a:xfrm>
+          <a:prstGeom prst="rect">
+            <a:avLst/>
+          </a:prstGeom>
+          <a:noFill/>
+        </p:spPr>
+        <p:txBody>
+          <a:bodyPr wrap="square" anchor="ctr"/>
+          <a:lstStyle/>
+          <a:p>
+            <a:r>
+              <a:rPr sz="1500" b="1" i="0">
+                <a:solidFill>
+                  <a:srgbClr val="095292"/>
+                </a:solidFill>
+                <a:latin typeface="Calibri"/>
+              </a:rPr>
+              <a:t>Lista de gaps con responsable.</a:t>
+            </a:r>
+          </a:p>
+        </p:txBody>
+      </p:sp>
+      <p:sp>
+        <p:nvSpPr>
+          <p:cNvPr id="17" name="Rounded Rectangle 16"/>
+          <p:cNvSpPr/>
+          <p:nvPr/>
+        </p:nvSpPr>
+        <p:spPr>
+          <a:xfrm>
+            <a:off x="457200" y="4983480"/>
+            <a:ext cx="11277295" cy="1051560"/>
+          </a:xfrm>
+          <a:prstGeom prst="roundRect">
+            <a:avLst>
+              <a:gd name="adj" fmla="val 12000"/>
+            </a:avLst>
+          </a:prstGeom>
+          <a:solidFill>
+            <a:srgbClr val="E8F4FA"/>
+          </a:solidFill>
+          <a:ln>
+            <a:noFill/>
+          </a:ln>
+        </p:spPr>
+        <p:style>
+          <a:lnRef idx="1">
+            <a:schemeClr val="accent1"/>
+          </a:lnRef>
+          <a:fillRef idx="3">
+            <a:schemeClr val="accent1"/>
+          </a:fillRef>
+          <a:effectRef idx="2">
+            <a:schemeClr val="accent1"/>
+          </a:effectRef>
+          <a:fontRef idx="minor">
+            <a:schemeClr val="lt1"/>
+          </a:fontRef>
+        </p:style>
+        <p:txBody>
+          <a:bodyPr rtlCol="0" anchor="ctr"/>
+          <a:lstStyle/>
+          <a:p>
+            <a:pPr algn="ctr"/>
+          </a:p>
+        </p:txBody>
+      </p:sp>
+      <p:sp>
+        <p:nvSpPr>
+          <p:cNvPr id="18" name="Rounded Rectangle 17"/>
+          <p:cNvSpPr/>
+          <p:nvPr/>
+        </p:nvSpPr>
+        <p:spPr>
+          <a:xfrm>
+            <a:off x="594360" y="5289804"/>
+            <a:ext cx="438912" cy="438912"/>
+          </a:xfrm>
+          <a:prstGeom prst="roundRect">
+            <a:avLst>
+              <a:gd name="adj" fmla="val 12000"/>
+            </a:avLst>
+          </a:prstGeom>
+          <a:solidFill>
+            <a:srgbClr val="095292"/>
+          </a:solidFill>
+          <a:ln>
+            <a:noFill/>
+          </a:ln>
+        </p:spPr>
+        <p:style>
+          <a:lnRef idx="1">
+            <a:schemeClr val="accent1"/>
+          </a:lnRef>
+          <a:fillRef idx="3">
+            <a:schemeClr val="accent1"/>
+          </a:fillRef>
+          <a:effectRef idx="2">
+            <a:schemeClr val="accent1"/>
+          </a:effectRef>
+          <a:fontRef idx="minor">
+            <a:schemeClr val="lt1"/>
+          </a:fontRef>
+        </p:style>
+        <p:txBody>
+          <a:bodyPr rtlCol="0" anchor="ctr"/>
+          <a:lstStyle/>
+          <a:p>
+            <a:pPr algn="ctr"/>
+          </a:p>
+        </p:txBody>
+      </p:sp>
+      <p:sp>
+        <p:nvSpPr>
+          <p:cNvPr id="19" name="TextBox 18"/>
+          <p:cNvSpPr txBox="1"/>
+          <p:nvPr/>
+        </p:nvSpPr>
+        <p:spPr>
+          <a:xfrm>
+            <a:off x="594360" y="5289804"/>
+            <a:ext cx="438912" cy="438912"/>
+          </a:xfrm>
+          <a:prstGeom prst="rect">
+            <a:avLst/>
+          </a:prstGeom>
+          <a:noFill/>
+        </p:spPr>
+        <p:txBody>
+          <a:bodyPr wrap="square" anchor="ctr"/>
+          <a:lstStyle/>
+          <a:p>
+            <a:pPr algn="ctr"/>
+            <a:r>
+              <a:rPr sz="1600" b="1" i="0">
+                <a:solidFill>
+                  <a:srgbClr val="FFFFFF"/>
+                </a:solidFill>
+                <a:latin typeface="Calibri"/>
+              </a:rPr>
+              <a:t>4</a:t>
+            </a:r>
+          </a:p>
+        </p:txBody>
+      </p:sp>
+      <p:sp>
+        <p:nvSpPr>
+          <p:cNvPr id="20" name="TextBox 19"/>
+          <p:cNvSpPr txBox="1"/>
+          <p:nvPr/>
+        </p:nvSpPr>
+        <p:spPr>
+          <a:xfrm>
+            <a:off x="1188720" y="5074920"/>
+            <a:ext cx="10271455" cy="886968"/>
+          </a:xfrm>
+          <a:prstGeom prst="rect">
+            <a:avLst/>
+          </a:prstGeom>
+          <a:noFill/>
+        </p:spPr>
+        <p:txBody>
+          <a:bodyPr wrap="square" anchor="ctr"/>
+          <a:lstStyle/>
+          <a:p>
+            <a:r>
+              <a:rPr sz="1500" b="1" i="0">
+                <a:solidFill>
+                  <a:srgbClr val="095292"/>
+                </a:solidFill>
+                <a:latin typeface="Calibri"/>
+              </a:rPr>
+              <a:t>Subir avance intermedio a la plataforma del curso (Talleres) si se pide.</a:t>
+            </a:r>
+          </a:p>
+        </p:txBody>
+      </p:sp>
+      <p:sp>
+        <p:nvSpPr>
+          <p:cNvPr id="21" name="TextBox 20"/>
           <p:cNvSpPr txBox="1"/>
           <p:nvPr/>
         </p:nvSpPr>
@@ -11566,7 +11620,7 @@
                 </a:solidFill>
                 <a:latin typeface="Calibri"/>
               </a:rPr>
-              <a:t>Para el PI esta semana</a:t>
+              <a:t>Taller PI VetCare — pistas (checklist vacio)</a:t>
             </a:r>
           </a:p>
         </p:txBody>
@@ -11580,7 +11634,7 @@
         <p:spPr>
           <a:xfrm>
             <a:off x="457200" y="1261872"/>
-            <a:ext cx="11277295" cy="1051560"/>
+            <a:ext cx="11277295" cy="566928"/>
           </a:xfrm>
           <a:prstGeom prst="roundRect">
             <a:avLst>
@@ -11588,7 +11642,7 @@
             </a:avLst>
           </a:prstGeom>
           <a:solidFill>
-            <a:srgbClr val="E8F4FA"/>
+            <a:srgbClr val="F2F2F2"/>
           </a:solidFill>
           <a:ln>
             <a:noFill/>
@@ -11624,8 +11678,53 @@
         </p:nvSpPr>
         <p:spPr>
           <a:xfrm>
-            <a:off x="457200" y="1261872"/>
-            <a:ext cx="128016" cy="1051560"/>
+            <a:off x="640080" y="1408175"/>
+            <a:ext cx="274320" cy="274320"/>
+          </a:xfrm>
+          <a:prstGeom prst="rect">
+            <a:avLst/>
+          </a:prstGeom>
+          <a:solidFill>
+            <a:srgbClr val="FFFFFF"/>
+          </a:solidFill>
+          <a:ln>
+            <a:solidFill>
+              <a:srgbClr val="333333"/>
+            </a:solidFill>
+          </a:ln>
+        </p:spPr>
+        <p:style>
+          <a:lnRef idx="1">
+            <a:schemeClr val="accent1"/>
+          </a:lnRef>
+          <a:fillRef idx="3">
+            <a:schemeClr val="accent1"/>
+          </a:fillRef>
+          <a:effectRef idx="2">
+            <a:schemeClr val="accent1"/>
+          </a:effectRef>
+          <a:fontRef idx="minor">
+            <a:schemeClr val="lt1"/>
+          </a:fontRef>
+        </p:style>
+        <p:txBody>
+          <a:bodyPr rtlCol="0" anchor="ctr"/>
+          <a:lstStyle/>
+          <a:p>
+            <a:pPr algn="ctr"/>
+          </a:p>
+        </p:txBody>
+      </p:sp>
+      <p:sp>
+        <p:nvSpPr>
+          <p:cNvPr id="7" name="Rectangle 6"/>
+          <p:cNvSpPr/>
+          <p:nvPr/>
+        </p:nvSpPr>
+        <p:spPr>
+          <a:xfrm>
+            <a:off x="640080" y="1408175"/>
+            <a:ext cx="73152" cy="274320"/>
           </a:xfrm>
           <a:prstGeom prst="rect">
             <a:avLst/>
@@ -11661,14 +11760,14 @@
       </p:sp>
       <p:sp>
         <p:nvSpPr>
-          <p:cNvPr id="7" name="TextBox 6"/>
+          <p:cNvPr id="8" name="TextBox 7"/>
           <p:cNvSpPr txBox="1"/>
           <p:nvPr/>
         </p:nvSpPr>
         <p:spPr>
           <a:xfrm>
-            <a:off x="777240" y="1399031"/>
-            <a:ext cx="10774375" cy="822959"/>
+            <a:off x="1097280" y="1353312"/>
+            <a:ext cx="10362895" cy="402336"/>
           </a:xfrm>
           <a:prstGeom prst="rect">
             <a:avLst/>
@@ -11676,49 +11775,31 @@
           <a:noFill/>
         </p:spPr>
         <p:txBody>
-          <a:bodyPr wrap="square">
-            <a:spAutoFit/>
-          </a:bodyPr>
-          <a:lstStyle/>
-          <a:p>
-            <a:r>
-              <a:rPr sz="1200" b="1" i="0">
-                <a:solidFill>
-                  <a:srgbClr val="269CCB"/>
-                </a:solidFill>
-                <a:latin typeface="Calibri"/>
-              </a:rPr>
-              <a:t>Info</a:t>
-            </a:r>
-          </a:p>
-          <a:p>
-            <a:pPr>
-              <a:spcBef>
-                <a:spcPts val="400"/>
-              </a:spcBef>
-            </a:pPr>
-            <a:r>
-              <a:rPr sz="1400" b="0" i="0">
+          <a:bodyPr wrap="square" anchor="ctr"/>
+          <a:lstStyle/>
+          <a:p>
+            <a:r>
+              <a:rPr sz="1500" b="0" i="0">
                 <a:solidFill>
                   <a:srgbClr val="333333"/>
                 </a:solidFill>
                 <a:latin typeface="Calibri"/>
               </a:rPr>
-              <a:t>Hito: Demo parcial + checklist de avance (hito formal PI)</a:t>
-            </a:r>
-          </a:p>
-        </p:txBody>
-      </p:sp>
-      <p:sp>
-        <p:nvSpPr>
-          <p:cNvPr id="8" name="Rounded Rectangle 7"/>
+              <a:t>□ Si con evidencia?</a:t>
+            </a:r>
+          </a:p>
+        </p:txBody>
+      </p:sp>
+      <p:sp>
+        <p:nvSpPr>
+          <p:cNvPr id="9" name="Rounded Rectangle 8"/>
           <p:cNvSpPr/>
           <p:nvPr/>
         </p:nvSpPr>
         <p:spPr>
           <a:xfrm>
-            <a:off x="457200" y="2478024"/>
-            <a:ext cx="11277295" cy="1051560"/>
+            <a:off x="457200" y="1938528"/>
+            <a:ext cx="11277295" cy="566928"/>
           </a:xfrm>
           <a:prstGeom prst="roundRect">
             <a:avLst>
@@ -11726,7 +11807,7 @@
             </a:avLst>
           </a:prstGeom>
           <a:solidFill>
-            <a:srgbClr val="FFF8E1"/>
+            <a:srgbClr val="F2F2F2"/>
           </a:solidFill>
           <a:ln>
             <a:noFill/>
@@ -11756,23 +11837,25 @@
       </p:sp>
       <p:sp>
         <p:nvSpPr>
-          <p:cNvPr id="9" name="Rectangle 8"/>
+          <p:cNvPr id="10" name="Rectangle 9"/>
           <p:cNvSpPr/>
           <p:nvPr/>
         </p:nvSpPr>
         <p:spPr>
           <a:xfrm>
-            <a:off x="457200" y="2478024"/>
-            <a:ext cx="128016" cy="1051560"/>
+            <a:off x="640080" y="2084832"/>
+            <a:ext cx="274320" cy="274320"/>
           </a:xfrm>
           <a:prstGeom prst="rect">
             <a:avLst/>
           </a:prstGeom>
           <a:solidFill>
-            <a:srgbClr val="FFD000"/>
+            <a:srgbClr val="FFFFFF"/>
           </a:solidFill>
           <a:ln>
-            <a:noFill/>
+            <a:solidFill>
+              <a:srgbClr val="333333"/>
+            </a:solidFill>
           </a:ln>
         </p:spPr>
         <p:style>
@@ -11799,72 +11882,20 @@
       </p:sp>
       <p:sp>
         <p:nvSpPr>
-          <p:cNvPr id="10" name="TextBox 9"/>
-          <p:cNvSpPr txBox="1"/>
-          <p:nvPr/>
-        </p:nvSpPr>
-        <p:spPr>
-          <a:xfrm>
-            <a:off x="777240" y="2615184"/>
-            <a:ext cx="10774375" cy="822959"/>
-          </a:xfrm>
-          <a:prstGeom prst="rect">
-            <a:avLst/>
-          </a:prstGeom>
-          <a:noFill/>
-        </p:spPr>
-        <p:txBody>
-          <a:bodyPr wrap="square">
-            <a:spAutoFit/>
-          </a:bodyPr>
-          <a:lstStyle/>
-          <a:p>
-            <a:r>
-              <a:rPr sz="1200" b="1" i="0">
-                <a:solidFill>
-                  <a:srgbClr val="FFD000"/>
-                </a:solidFill>
-                <a:latin typeface="Calibri"/>
-              </a:rPr>
-              <a:t>Aclaración</a:t>
-            </a:r>
-          </a:p>
-          <a:p>
-            <a:pPr>
-              <a:spcBef>
-                <a:spcPts val="400"/>
-              </a:spcBef>
-            </a:pPr>
-            <a:r>
-              <a:rPr sz="1400" b="0" i="0">
-                <a:solidFill>
-                  <a:srgbClr val="333333"/>
-                </a:solidFill>
-                <a:latin typeface="Calibri"/>
-              </a:rPr>
-              <a:t>Enunciado completo: Clases/Proyecto Integrador/ (VetCare DB).</a:t>
-            </a:r>
-          </a:p>
-        </p:txBody>
-      </p:sp>
-      <p:sp>
-        <p:nvSpPr>
-          <p:cNvPr id="11" name="Rounded Rectangle 10"/>
+          <p:cNvPr id="11" name="Rectangle 10"/>
           <p:cNvSpPr/>
           <p:nvPr/>
         </p:nvSpPr>
         <p:spPr>
           <a:xfrm>
-            <a:off x="457200" y="3694176"/>
-            <a:ext cx="11277295" cy="1051560"/>
-          </a:xfrm>
-          <a:prstGeom prst="roundRect">
-            <a:avLst>
-              <a:gd name="adj" fmla="val 12000"/>
-            </a:avLst>
+            <a:off x="640080" y="2084832"/>
+            <a:ext cx="73152" cy="274320"/>
+          </a:xfrm>
+          <a:prstGeom prst="rect">
+            <a:avLst/>
           </a:prstGeom>
           <a:solidFill>
-            <a:srgbClr val="FBE4E4"/>
+            <a:srgbClr val="269CCB"/>
           </a:solidFill>
           <a:ln>
             <a:noFill/>
@@ -11894,20 +11925,54 @@
       </p:sp>
       <p:sp>
         <p:nvSpPr>
-          <p:cNvPr id="12" name="Rectangle 11"/>
+          <p:cNvPr id="12" name="TextBox 11"/>
+          <p:cNvSpPr txBox="1"/>
+          <p:nvPr/>
+        </p:nvSpPr>
+        <p:spPr>
+          <a:xfrm>
+            <a:off x="1097280" y="2029968"/>
+            <a:ext cx="10362895" cy="402336"/>
+          </a:xfrm>
+          <a:prstGeom prst="rect">
+            <a:avLst/>
+          </a:prstGeom>
+          <a:noFill/>
+        </p:spPr>
+        <p:txBody>
+          <a:bodyPr wrap="square" anchor="ctr"/>
+          <a:lstStyle/>
+          <a:p>
+            <a:r>
+              <a:rPr sz="1500" b="0" i="0">
+                <a:solidFill>
+                  <a:srgbClr val="333333"/>
+                </a:solidFill>
+                <a:latin typeface="Calibri"/>
+              </a:rPr>
+              <a:t>□ Gaps con dueño?</a:t>
+            </a:r>
+          </a:p>
+        </p:txBody>
+      </p:sp>
+      <p:sp>
+        <p:nvSpPr>
+          <p:cNvPr id="13" name="Rounded Rectangle 12"/>
           <p:cNvSpPr/>
           <p:nvPr/>
         </p:nvSpPr>
         <p:spPr>
           <a:xfrm>
-            <a:off x="457200" y="3694176"/>
-            <a:ext cx="128016" cy="1051560"/>
-          </a:xfrm>
-          <a:prstGeom prst="rect">
-            <a:avLst/>
+            <a:off x="457200" y="2615184"/>
+            <a:ext cx="11277295" cy="566928"/>
+          </a:xfrm>
+          <a:prstGeom prst="roundRect">
+            <a:avLst>
+              <a:gd name="adj" fmla="val 12000"/>
+            </a:avLst>
           </a:prstGeom>
           <a:solidFill>
-            <a:srgbClr val="A02030"/>
+            <a:srgbClr val="F2F2F2"/>
           </a:solidFill>
           <a:ln>
             <a:noFill/>
@@ -11937,14 +12002,102 @@
       </p:sp>
       <p:sp>
         <p:nvSpPr>
-          <p:cNvPr id="13" name="TextBox 12"/>
+          <p:cNvPr id="14" name="Rectangle 13"/>
+          <p:cNvSpPr/>
+          <p:nvPr/>
+        </p:nvSpPr>
+        <p:spPr>
+          <a:xfrm>
+            <a:off x="640080" y="2761488"/>
+            <a:ext cx="274320" cy="274320"/>
+          </a:xfrm>
+          <a:prstGeom prst="rect">
+            <a:avLst/>
+          </a:prstGeom>
+          <a:solidFill>
+            <a:srgbClr val="FFFFFF"/>
+          </a:solidFill>
+          <a:ln>
+            <a:solidFill>
+              <a:srgbClr val="333333"/>
+            </a:solidFill>
+          </a:ln>
+        </p:spPr>
+        <p:style>
+          <a:lnRef idx="1">
+            <a:schemeClr val="accent1"/>
+          </a:lnRef>
+          <a:fillRef idx="3">
+            <a:schemeClr val="accent1"/>
+          </a:fillRef>
+          <a:effectRef idx="2">
+            <a:schemeClr val="accent1"/>
+          </a:effectRef>
+          <a:fontRef idx="minor">
+            <a:schemeClr val="lt1"/>
+          </a:fontRef>
+        </p:style>
+        <p:txBody>
+          <a:bodyPr rtlCol="0" anchor="ctr"/>
+          <a:lstStyle/>
+          <a:p>
+            <a:pPr algn="ctr"/>
+          </a:p>
+        </p:txBody>
+      </p:sp>
+      <p:sp>
+        <p:nvSpPr>
+          <p:cNvPr id="15" name="Rectangle 14"/>
+          <p:cNvSpPr/>
+          <p:nvPr/>
+        </p:nvSpPr>
+        <p:spPr>
+          <a:xfrm>
+            <a:off x="640080" y="2761488"/>
+            <a:ext cx="73152" cy="274320"/>
+          </a:xfrm>
+          <a:prstGeom prst="rect">
+            <a:avLst/>
+          </a:prstGeom>
+          <a:solidFill>
+            <a:srgbClr val="269CCB"/>
+          </a:solidFill>
+          <a:ln>
+            <a:noFill/>
+          </a:ln>
+        </p:spPr>
+        <p:style>
+          <a:lnRef idx="1">
+            <a:schemeClr val="accent1"/>
+          </a:lnRef>
+          <a:fillRef idx="3">
+            <a:schemeClr val="accent1"/>
+          </a:fillRef>
+          <a:effectRef idx="2">
+            <a:schemeClr val="accent1"/>
+          </a:effectRef>
+          <a:fontRef idx="minor">
+            <a:schemeClr val="lt1"/>
+          </a:fontRef>
+        </p:style>
+        <p:txBody>
+          <a:bodyPr rtlCol="0" anchor="ctr"/>
+          <a:lstStyle/>
+          <a:p>
+            <a:pPr algn="ctr"/>
+          </a:p>
+        </p:txBody>
+      </p:sp>
+      <p:sp>
+        <p:nvSpPr>
+          <p:cNvPr id="16" name="TextBox 15"/>
           <p:cNvSpPr txBox="1"/>
           <p:nvPr/>
         </p:nvSpPr>
         <p:spPr>
           <a:xfrm>
-            <a:off x="777240" y="3831336"/>
-            <a:ext cx="10774375" cy="822959"/>
+            <a:off x="1097280" y="2706624"/>
+            <a:ext cx="10362895" cy="402336"/>
           </a:xfrm>
           <a:prstGeom prst="rect">
             <a:avLst/>
@@ -11952,42 +12105,24 @@
           <a:noFill/>
         </p:spPr>
         <p:txBody>
-          <a:bodyPr wrap="square">
-            <a:spAutoFit/>
-          </a:bodyPr>
-          <a:lstStyle/>
-          <a:p>
-            <a:r>
-              <a:rPr sz="1200" b="1" i="0">
-                <a:solidFill>
-                  <a:srgbClr val="A02030"/>
-                </a:solidFill>
-                <a:latin typeface="Calibri"/>
-              </a:rPr>
-              <a:t>Atención</a:t>
-            </a:r>
-          </a:p>
-          <a:p>
-            <a:pPr>
-              <a:spcBef>
-                <a:spcPts val="400"/>
-              </a:spcBef>
-            </a:pPr>
-            <a:r>
-              <a:rPr sz="1400" b="0" i="0">
+          <a:bodyPr wrap="square" anchor="ctr"/>
+          <a:lstStyle/>
+          <a:p>
+            <a:r>
+              <a:rPr sz="1500" b="0" i="0">
                 <a:solidFill>
                   <a:srgbClr val="333333"/>
                 </a:solidFill>
                 <a:latin typeface="Calibri"/>
               </a:rPr>
-              <a:t>Si el docente asigna taller esta semana, él indica el canal y la fecha.</a:t>
-            </a:r>
-          </a:p>
-        </p:txBody>
-      </p:sp>
-      <p:sp>
-        <p:nvSpPr>
-          <p:cNvPr id="14" name="TextBox 13"/>
+              <a:t>□ Demo &lt;=5 min?</a:t>
+            </a:r>
+          </a:p>
+        </p:txBody>
+      </p:sp>
+      <p:sp>
+        <p:nvSpPr>
+          <p:cNvPr id="17" name="TextBox 16"/>
           <p:cNvSpPr txBox="1"/>
           <p:nvPr/>
         </p:nvSpPr>
@@ -12881,6 +13016,921 @@
 </file>
 
 <file path=ppt/slides/slide30.xml><?xml version="1.0" encoding="utf-8"?>
+<p:sld xmlns:a="http://schemas.openxmlformats.org/drawingml/2006/main" xmlns:p="http://schemas.openxmlformats.org/presentationml/2006/main" xmlns:r="http://schemas.openxmlformats.org/officeDocument/2006/relationships">
+  <p:cSld>
+    <p:bg>
+      <p:bgPr>
+        <a:solidFill>
+          <a:srgbClr val="FFFFFF"/>
+        </a:solidFill>
+        <a:effectLst/>
+      </p:bgPr>
+    </p:bg>
+    <p:spTree>
+      <p:nvGrpSpPr>
+        <p:cNvPr id="1" name=""/>
+        <p:cNvGrpSpPr/>
+        <p:nvPr/>
+      </p:nvGrpSpPr>
+      <p:grpSpPr/>
+      <p:sp>
+        <p:nvSpPr>
+          <p:cNvPr id="2" name="Rectangle 1"/>
+          <p:cNvSpPr/>
+          <p:nvPr/>
+        </p:nvSpPr>
+        <p:spPr>
+          <a:xfrm>
+            <a:off x="0" y="0"/>
+            <a:ext cx="12191695" cy="960120"/>
+          </a:xfrm>
+          <a:prstGeom prst="rect">
+            <a:avLst/>
+          </a:prstGeom>
+          <a:solidFill>
+            <a:srgbClr val="095292"/>
+          </a:solidFill>
+          <a:ln>
+            <a:noFill/>
+          </a:ln>
+        </p:spPr>
+        <p:style>
+          <a:lnRef idx="1">
+            <a:schemeClr val="accent1"/>
+          </a:lnRef>
+          <a:fillRef idx="3">
+            <a:schemeClr val="accent1"/>
+          </a:fillRef>
+          <a:effectRef idx="2">
+            <a:schemeClr val="accent1"/>
+          </a:effectRef>
+          <a:fontRef idx="minor">
+            <a:schemeClr val="lt1"/>
+          </a:fontRef>
+        </p:style>
+        <p:txBody>
+          <a:bodyPr rtlCol="0" anchor="ctr"/>
+          <a:lstStyle/>
+          <a:p>
+            <a:pPr algn="ctr"/>
+          </a:p>
+        </p:txBody>
+      </p:sp>
+      <p:sp>
+        <p:nvSpPr>
+          <p:cNvPr id="3" name="Rectangle 2"/>
+          <p:cNvSpPr/>
+          <p:nvPr/>
+        </p:nvSpPr>
+        <p:spPr>
+          <a:xfrm>
+            <a:off x="0" y="960120"/>
+            <a:ext cx="12191695" cy="41148"/>
+          </a:xfrm>
+          <a:prstGeom prst="rect">
+            <a:avLst/>
+          </a:prstGeom>
+          <a:solidFill>
+            <a:srgbClr val="FFD000"/>
+          </a:solidFill>
+          <a:ln>
+            <a:noFill/>
+          </a:ln>
+        </p:spPr>
+        <p:style>
+          <a:lnRef idx="1">
+            <a:schemeClr val="accent1"/>
+          </a:lnRef>
+          <a:fillRef idx="3">
+            <a:schemeClr val="accent1"/>
+          </a:fillRef>
+          <a:effectRef idx="2">
+            <a:schemeClr val="accent1"/>
+          </a:effectRef>
+          <a:fontRef idx="minor">
+            <a:schemeClr val="lt1"/>
+          </a:fontRef>
+        </p:style>
+        <p:txBody>
+          <a:bodyPr rtlCol="0" anchor="ctr"/>
+          <a:lstStyle/>
+          <a:p>
+            <a:pPr algn="ctr"/>
+          </a:p>
+        </p:txBody>
+      </p:sp>
+      <p:sp>
+        <p:nvSpPr>
+          <p:cNvPr id="4" name="TextBox 3"/>
+          <p:cNvSpPr txBox="1"/>
+          <p:nvPr/>
+        </p:nvSpPr>
+        <p:spPr>
+          <a:xfrm>
+            <a:off x="457200" y="164592"/>
+            <a:ext cx="11277295" cy="502920"/>
+          </a:xfrm>
+          <a:prstGeom prst="rect">
+            <a:avLst/>
+          </a:prstGeom>
+          <a:noFill/>
+        </p:spPr>
+        <p:txBody>
+          <a:bodyPr wrap="square">
+            <a:spAutoFit/>
+          </a:bodyPr>
+          <a:lstStyle/>
+          <a:p>
+            <a:r>
+              <a:rPr sz="2600" b="1" i="0">
+                <a:solidFill>
+                  <a:srgbClr val="FFFFFF"/>
+                </a:solidFill>
+                <a:latin typeface="Calibri"/>
+              </a:rPr>
+              <a:t>Criterios de exito / entregable</a:t>
+            </a:r>
+          </a:p>
+        </p:txBody>
+      </p:sp>
+      <p:sp>
+        <p:nvSpPr>
+          <p:cNvPr id="5" name="TextBox 4"/>
+          <p:cNvSpPr txBox="1"/>
+          <p:nvPr/>
+        </p:nvSpPr>
+        <p:spPr>
+          <a:xfrm>
+            <a:off x="457200" y="1170432"/>
+            <a:ext cx="11277295" cy="5230368"/>
+          </a:xfrm>
+          <a:prstGeom prst="rect">
+            <a:avLst/>
+          </a:prstGeom>
+          <a:noFill/>
+        </p:spPr>
+        <p:txBody>
+          <a:bodyPr wrap="square">
+            <a:spAutoFit/>
+          </a:bodyPr>
+          <a:lstStyle/>
+          <a:p>
+            <a:pPr>
+              <a:spcAft>
+                <a:spcPts val="800"/>
+              </a:spcAft>
+            </a:pPr>
+            <a:r>
+              <a:rPr sz="2000" b="0" i="0">
+                <a:solidFill>
+                  <a:srgbClr val="333333"/>
+                </a:solidFill>
+                <a:latin typeface="Calibri"/>
+              </a:rPr>
+              <a:t>–   </a:t>
+            </a:r>
+            <a:r>
+              <a:rPr sz="2000" b="1" i="0">
+                <a:solidFill>
+                  <a:srgbClr val="333333"/>
+                </a:solidFill>
+                <a:latin typeface="Calibri"/>
+              </a:rPr>
+              <a:t>Entregable:</a:t>
+            </a:r>
+            <a:r>
+              <a:rPr sz="2000" b="0" i="0">
+                <a:solidFill>
+                  <a:srgbClr val="333333"/>
+                </a:solidFill>
+                <a:latin typeface="Calibri"/>
+              </a:rPr>
+              <a:t> Checklist firmada + enlace/ZIP avance (DDL+procs+ER)</a:t>
+            </a:r>
+          </a:p>
+          <a:p>
+            <a:pPr>
+              <a:spcAft>
+                <a:spcPts val="800"/>
+              </a:spcAft>
+            </a:pPr>
+            <a:r>
+              <a:rPr sz="2000" b="0" i="0">
+                <a:solidFill>
+                  <a:srgbClr val="333333"/>
+                </a:solidFill>
+                <a:latin typeface="Calibri"/>
+              </a:rPr>
+              <a:t>–   Evidencia: el SQL y su salida quedan guardados en cada pregunta de la plataforma del curso.</a:t>
+            </a:r>
+          </a:p>
+          <a:p>
+            <a:pPr>
+              <a:spcAft>
+                <a:spcPts val="800"/>
+              </a:spcAft>
+            </a:pPr>
+            <a:r>
+              <a:rPr sz="2000" b="0" i="0">
+                <a:solidFill>
+                  <a:srgbClr val="333333"/>
+                </a:solidFill>
+                <a:latin typeface="Calibri"/>
+              </a:rPr>
+              <a:t>–   Conserva copia en tu carpeta del PI (los .sql que pide el entregable).</a:t>
+            </a:r>
+          </a:p>
+          <a:p>
+            <a:pPr>
+              <a:spcAft>
+                <a:spcPts val="800"/>
+              </a:spcAft>
+            </a:pPr>
+            <a:r>
+              <a:rPr sz="2000" b="0" i="0">
+                <a:solidFill>
+                  <a:srgbClr val="333333"/>
+                </a:solidFill>
+                <a:latin typeface="Calibri"/>
+              </a:rPr>
+              <a:t>–   Actualizar checklist PI (que criterio de rubrica avanzo).</a:t>
+            </a:r>
+          </a:p>
+          <a:p>
+            <a:pPr>
+              <a:spcAft>
+                <a:spcPts val="800"/>
+              </a:spcAft>
+            </a:pPr>
+            <a:r>
+              <a:rPr sz="2000" b="0" i="0">
+                <a:solidFill>
+                  <a:srgbClr val="333333"/>
+                </a:solidFill>
+                <a:latin typeface="Calibri"/>
+              </a:rPr>
+              <a:t>–   </a:t>
+            </a:r>
+            <a:r>
+              <a:rPr sz="2000" b="1" i="0">
+                <a:solidFill>
+                  <a:srgbClr val="333333"/>
+                </a:solidFill>
+                <a:latin typeface="Calibri"/>
+              </a:rPr>
+              <a:t>Entrega en la plataforma del curso</a:t>
+            </a:r>
+            <a:r>
+              <a:rPr sz="2000" b="0" i="0">
+                <a:solidFill>
+                  <a:srgbClr val="333333"/>
+                </a:solidFill>
+                <a:latin typeface="Calibri"/>
+              </a:rPr>
+              <a:t> — en la fecha que indique el docente.</a:t>
+            </a:r>
+          </a:p>
+        </p:txBody>
+      </p:sp>
+      <p:sp>
+        <p:nvSpPr>
+          <p:cNvPr id="6" name="TextBox 5"/>
+          <p:cNvSpPr txBox="1"/>
+          <p:nvPr/>
+        </p:nvSpPr>
+        <p:spPr>
+          <a:xfrm>
+            <a:off x="11185855" y="6473952"/>
+            <a:ext cx="640080" cy="274320"/>
+          </a:xfrm>
+          <a:prstGeom prst="rect">
+            <a:avLst/>
+          </a:prstGeom>
+          <a:noFill/>
+        </p:spPr>
+        <p:txBody>
+          <a:bodyPr wrap="square">
+            <a:spAutoFit/>
+          </a:bodyPr>
+          <a:lstStyle/>
+          <a:p>
+            <a:pPr algn="r"/>
+            <a:r>
+              <a:rPr sz="1100" b="0" i="0">
+                <a:solidFill>
+                  <a:srgbClr val="666666"/>
+                </a:solidFill>
+                <a:latin typeface="Calibri"/>
+              </a:rPr>
+              <a:t>30</a:t>
+            </a:r>
+          </a:p>
+        </p:txBody>
+      </p:sp>
+    </p:spTree>
+  </p:cSld>
+  <p:clrMapOvr>
+    <a:masterClrMapping/>
+  </p:clrMapOvr>
+</p:sld>
+</file>
+
+<file path=ppt/slides/slide31.xml><?xml version="1.0" encoding="utf-8"?>
+<p:sld xmlns:a="http://schemas.openxmlformats.org/drawingml/2006/main" xmlns:p="http://schemas.openxmlformats.org/presentationml/2006/main" xmlns:r="http://schemas.openxmlformats.org/officeDocument/2006/relationships">
+  <p:cSld>
+    <p:bg>
+      <p:bgPr>
+        <a:solidFill>
+          <a:srgbClr val="FFFFFF"/>
+        </a:solidFill>
+        <a:effectLst/>
+      </p:bgPr>
+    </p:bg>
+    <p:spTree>
+      <p:nvGrpSpPr>
+        <p:cNvPr id="1" name=""/>
+        <p:cNvGrpSpPr/>
+        <p:nvPr/>
+      </p:nvGrpSpPr>
+      <p:grpSpPr/>
+      <p:sp>
+        <p:nvSpPr>
+          <p:cNvPr id="2" name="Rectangle 1"/>
+          <p:cNvSpPr/>
+          <p:nvPr/>
+        </p:nvSpPr>
+        <p:spPr>
+          <a:xfrm>
+            <a:off x="0" y="0"/>
+            <a:ext cx="12191695" cy="960120"/>
+          </a:xfrm>
+          <a:prstGeom prst="rect">
+            <a:avLst/>
+          </a:prstGeom>
+          <a:solidFill>
+            <a:srgbClr val="095292"/>
+          </a:solidFill>
+          <a:ln>
+            <a:noFill/>
+          </a:ln>
+        </p:spPr>
+        <p:style>
+          <a:lnRef idx="1">
+            <a:schemeClr val="accent1"/>
+          </a:lnRef>
+          <a:fillRef idx="3">
+            <a:schemeClr val="accent1"/>
+          </a:fillRef>
+          <a:effectRef idx="2">
+            <a:schemeClr val="accent1"/>
+          </a:effectRef>
+          <a:fontRef idx="minor">
+            <a:schemeClr val="lt1"/>
+          </a:fontRef>
+        </p:style>
+        <p:txBody>
+          <a:bodyPr rtlCol="0" anchor="ctr"/>
+          <a:lstStyle/>
+          <a:p>
+            <a:pPr algn="ctr"/>
+          </a:p>
+        </p:txBody>
+      </p:sp>
+      <p:sp>
+        <p:nvSpPr>
+          <p:cNvPr id="3" name="Rectangle 2"/>
+          <p:cNvSpPr/>
+          <p:nvPr/>
+        </p:nvSpPr>
+        <p:spPr>
+          <a:xfrm>
+            <a:off x="0" y="960120"/>
+            <a:ext cx="12191695" cy="41148"/>
+          </a:xfrm>
+          <a:prstGeom prst="rect">
+            <a:avLst/>
+          </a:prstGeom>
+          <a:solidFill>
+            <a:srgbClr val="FFD000"/>
+          </a:solidFill>
+          <a:ln>
+            <a:noFill/>
+          </a:ln>
+        </p:spPr>
+        <p:style>
+          <a:lnRef idx="1">
+            <a:schemeClr val="accent1"/>
+          </a:lnRef>
+          <a:fillRef idx="3">
+            <a:schemeClr val="accent1"/>
+          </a:fillRef>
+          <a:effectRef idx="2">
+            <a:schemeClr val="accent1"/>
+          </a:effectRef>
+          <a:fontRef idx="minor">
+            <a:schemeClr val="lt1"/>
+          </a:fontRef>
+        </p:style>
+        <p:txBody>
+          <a:bodyPr rtlCol="0" anchor="ctr"/>
+          <a:lstStyle/>
+          <a:p>
+            <a:pPr algn="ctr"/>
+          </a:p>
+        </p:txBody>
+      </p:sp>
+      <p:sp>
+        <p:nvSpPr>
+          <p:cNvPr id="4" name="TextBox 3"/>
+          <p:cNvSpPr txBox="1"/>
+          <p:nvPr/>
+        </p:nvSpPr>
+        <p:spPr>
+          <a:xfrm>
+            <a:off x="457200" y="164592"/>
+            <a:ext cx="11277295" cy="502920"/>
+          </a:xfrm>
+          <a:prstGeom prst="rect">
+            <a:avLst/>
+          </a:prstGeom>
+          <a:noFill/>
+        </p:spPr>
+        <p:txBody>
+          <a:bodyPr wrap="square">
+            <a:spAutoFit/>
+          </a:bodyPr>
+          <a:lstStyle/>
+          <a:p>
+            <a:r>
+              <a:rPr sz="2600" b="1" i="0">
+                <a:solidFill>
+                  <a:srgbClr val="FFFFFF"/>
+                </a:solidFill>
+                <a:latin typeface="Calibri"/>
+              </a:rPr>
+              <a:t>Para el PI esta semana</a:t>
+            </a:r>
+          </a:p>
+        </p:txBody>
+      </p:sp>
+      <p:sp>
+        <p:nvSpPr>
+          <p:cNvPr id="5" name="Rounded Rectangle 4"/>
+          <p:cNvSpPr/>
+          <p:nvPr/>
+        </p:nvSpPr>
+        <p:spPr>
+          <a:xfrm>
+            <a:off x="457200" y="1261872"/>
+            <a:ext cx="11277295" cy="1051560"/>
+          </a:xfrm>
+          <a:prstGeom prst="roundRect">
+            <a:avLst>
+              <a:gd name="adj" fmla="val 12000"/>
+            </a:avLst>
+          </a:prstGeom>
+          <a:solidFill>
+            <a:srgbClr val="E8F4FA"/>
+          </a:solidFill>
+          <a:ln>
+            <a:noFill/>
+          </a:ln>
+        </p:spPr>
+        <p:style>
+          <a:lnRef idx="1">
+            <a:schemeClr val="accent1"/>
+          </a:lnRef>
+          <a:fillRef idx="3">
+            <a:schemeClr val="accent1"/>
+          </a:fillRef>
+          <a:effectRef idx="2">
+            <a:schemeClr val="accent1"/>
+          </a:effectRef>
+          <a:fontRef idx="minor">
+            <a:schemeClr val="lt1"/>
+          </a:fontRef>
+        </p:style>
+        <p:txBody>
+          <a:bodyPr rtlCol="0" anchor="ctr"/>
+          <a:lstStyle/>
+          <a:p>
+            <a:pPr algn="ctr"/>
+          </a:p>
+        </p:txBody>
+      </p:sp>
+      <p:sp>
+        <p:nvSpPr>
+          <p:cNvPr id="6" name="Rectangle 5"/>
+          <p:cNvSpPr/>
+          <p:nvPr/>
+        </p:nvSpPr>
+        <p:spPr>
+          <a:xfrm>
+            <a:off x="457200" y="1261872"/>
+            <a:ext cx="128016" cy="1051560"/>
+          </a:xfrm>
+          <a:prstGeom prst="rect">
+            <a:avLst/>
+          </a:prstGeom>
+          <a:solidFill>
+            <a:srgbClr val="269CCB"/>
+          </a:solidFill>
+          <a:ln>
+            <a:noFill/>
+          </a:ln>
+        </p:spPr>
+        <p:style>
+          <a:lnRef idx="1">
+            <a:schemeClr val="accent1"/>
+          </a:lnRef>
+          <a:fillRef idx="3">
+            <a:schemeClr val="accent1"/>
+          </a:fillRef>
+          <a:effectRef idx="2">
+            <a:schemeClr val="accent1"/>
+          </a:effectRef>
+          <a:fontRef idx="minor">
+            <a:schemeClr val="lt1"/>
+          </a:fontRef>
+        </p:style>
+        <p:txBody>
+          <a:bodyPr rtlCol="0" anchor="ctr"/>
+          <a:lstStyle/>
+          <a:p>
+            <a:pPr algn="ctr"/>
+          </a:p>
+        </p:txBody>
+      </p:sp>
+      <p:sp>
+        <p:nvSpPr>
+          <p:cNvPr id="7" name="TextBox 6"/>
+          <p:cNvSpPr txBox="1"/>
+          <p:nvPr/>
+        </p:nvSpPr>
+        <p:spPr>
+          <a:xfrm>
+            <a:off x="777240" y="1399031"/>
+            <a:ext cx="10774375" cy="822959"/>
+          </a:xfrm>
+          <a:prstGeom prst="rect">
+            <a:avLst/>
+          </a:prstGeom>
+          <a:noFill/>
+        </p:spPr>
+        <p:txBody>
+          <a:bodyPr wrap="square">
+            <a:spAutoFit/>
+          </a:bodyPr>
+          <a:lstStyle/>
+          <a:p>
+            <a:r>
+              <a:rPr sz="1200" b="1" i="0">
+                <a:solidFill>
+                  <a:srgbClr val="269CCB"/>
+                </a:solidFill>
+                <a:latin typeface="Calibri"/>
+              </a:rPr>
+              <a:t>Info</a:t>
+            </a:r>
+          </a:p>
+          <a:p>
+            <a:pPr>
+              <a:spcBef>
+                <a:spcPts val="400"/>
+              </a:spcBef>
+            </a:pPr>
+            <a:r>
+              <a:rPr sz="1400" b="0" i="0">
+                <a:solidFill>
+                  <a:srgbClr val="333333"/>
+                </a:solidFill>
+                <a:latin typeface="Calibri"/>
+              </a:rPr>
+              <a:t>Hito: Demo parcial + checklist de avance (hito formal PI)</a:t>
+            </a:r>
+          </a:p>
+        </p:txBody>
+      </p:sp>
+      <p:sp>
+        <p:nvSpPr>
+          <p:cNvPr id="8" name="Rounded Rectangle 7"/>
+          <p:cNvSpPr/>
+          <p:nvPr/>
+        </p:nvSpPr>
+        <p:spPr>
+          <a:xfrm>
+            <a:off x="457200" y="2478024"/>
+            <a:ext cx="11277295" cy="1051560"/>
+          </a:xfrm>
+          <a:prstGeom prst="roundRect">
+            <a:avLst>
+              <a:gd name="adj" fmla="val 12000"/>
+            </a:avLst>
+          </a:prstGeom>
+          <a:solidFill>
+            <a:srgbClr val="FFF8E1"/>
+          </a:solidFill>
+          <a:ln>
+            <a:noFill/>
+          </a:ln>
+        </p:spPr>
+        <p:style>
+          <a:lnRef idx="1">
+            <a:schemeClr val="accent1"/>
+          </a:lnRef>
+          <a:fillRef idx="3">
+            <a:schemeClr val="accent1"/>
+          </a:fillRef>
+          <a:effectRef idx="2">
+            <a:schemeClr val="accent1"/>
+          </a:effectRef>
+          <a:fontRef idx="minor">
+            <a:schemeClr val="lt1"/>
+          </a:fontRef>
+        </p:style>
+        <p:txBody>
+          <a:bodyPr rtlCol="0" anchor="ctr"/>
+          <a:lstStyle/>
+          <a:p>
+            <a:pPr algn="ctr"/>
+          </a:p>
+        </p:txBody>
+      </p:sp>
+      <p:sp>
+        <p:nvSpPr>
+          <p:cNvPr id="9" name="Rectangle 8"/>
+          <p:cNvSpPr/>
+          <p:nvPr/>
+        </p:nvSpPr>
+        <p:spPr>
+          <a:xfrm>
+            <a:off x="457200" y="2478024"/>
+            <a:ext cx="128016" cy="1051560"/>
+          </a:xfrm>
+          <a:prstGeom prst="rect">
+            <a:avLst/>
+          </a:prstGeom>
+          <a:solidFill>
+            <a:srgbClr val="FFD000"/>
+          </a:solidFill>
+          <a:ln>
+            <a:noFill/>
+          </a:ln>
+        </p:spPr>
+        <p:style>
+          <a:lnRef idx="1">
+            <a:schemeClr val="accent1"/>
+          </a:lnRef>
+          <a:fillRef idx="3">
+            <a:schemeClr val="accent1"/>
+          </a:fillRef>
+          <a:effectRef idx="2">
+            <a:schemeClr val="accent1"/>
+          </a:effectRef>
+          <a:fontRef idx="minor">
+            <a:schemeClr val="lt1"/>
+          </a:fontRef>
+        </p:style>
+        <p:txBody>
+          <a:bodyPr rtlCol="0" anchor="ctr"/>
+          <a:lstStyle/>
+          <a:p>
+            <a:pPr algn="ctr"/>
+          </a:p>
+        </p:txBody>
+      </p:sp>
+      <p:sp>
+        <p:nvSpPr>
+          <p:cNvPr id="10" name="TextBox 9"/>
+          <p:cNvSpPr txBox="1"/>
+          <p:nvPr/>
+        </p:nvSpPr>
+        <p:spPr>
+          <a:xfrm>
+            <a:off x="777240" y="2615184"/>
+            <a:ext cx="10774375" cy="822959"/>
+          </a:xfrm>
+          <a:prstGeom prst="rect">
+            <a:avLst/>
+          </a:prstGeom>
+          <a:noFill/>
+        </p:spPr>
+        <p:txBody>
+          <a:bodyPr wrap="square">
+            <a:spAutoFit/>
+          </a:bodyPr>
+          <a:lstStyle/>
+          <a:p>
+            <a:r>
+              <a:rPr sz="1200" b="1" i="0">
+                <a:solidFill>
+                  <a:srgbClr val="FFD000"/>
+                </a:solidFill>
+                <a:latin typeface="Calibri"/>
+              </a:rPr>
+              <a:t>Aclaración</a:t>
+            </a:r>
+          </a:p>
+          <a:p>
+            <a:pPr>
+              <a:spcBef>
+                <a:spcPts val="400"/>
+              </a:spcBef>
+            </a:pPr>
+            <a:r>
+              <a:rPr sz="1400" b="0" i="0">
+                <a:solidFill>
+                  <a:srgbClr val="333333"/>
+                </a:solidFill>
+                <a:latin typeface="Calibri"/>
+              </a:rPr>
+              <a:t>Enunciado completo: Clases/Proyecto Integrador/ (VetCare DB).</a:t>
+            </a:r>
+          </a:p>
+        </p:txBody>
+      </p:sp>
+      <p:sp>
+        <p:nvSpPr>
+          <p:cNvPr id="11" name="Rounded Rectangle 10"/>
+          <p:cNvSpPr/>
+          <p:nvPr/>
+        </p:nvSpPr>
+        <p:spPr>
+          <a:xfrm>
+            <a:off x="457200" y="3694176"/>
+            <a:ext cx="11277295" cy="1051560"/>
+          </a:xfrm>
+          <a:prstGeom prst="roundRect">
+            <a:avLst>
+              <a:gd name="adj" fmla="val 12000"/>
+            </a:avLst>
+          </a:prstGeom>
+          <a:solidFill>
+            <a:srgbClr val="FBE4E4"/>
+          </a:solidFill>
+          <a:ln>
+            <a:noFill/>
+          </a:ln>
+        </p:spPr>
+        <p:style>
+          <a:lnRef idx="1">
+            <a:schemeClr val="accent1"/>
+          </a:lnRef>
+          <a:fillRef idx="3">
+            <a:schemeClr val="accent1"/>
+          </a:fillRef>
+          <a:effectRef idx="2">
+            <a:schemeClr val="accent1"/>
+          </a:effectRef>
+          <a:fontRef idx="minor">
+            <a:schemeClr val="lt1"/>
+          </a:fontRef>
+        </p:style>
+        <p:txBody>
+          <a:bodyPr rtlCol="0" anchor="ctr"/>
+          <a:lstStyle/>
+          <a:p>
+            <a:pPr algn="ctr"/>
+          </a:p>
+        </p:txBody>
+      </p:sp>
+      <p:sp>
+        <p:nvSpPr>
+          <p:cNvPr id="12" name="Rectangle 11"/>
+          <p:cNvSpPr/>
+          <p:nvPr/>
+        </p:nvSpPr>
+        <p:spPr>
+          <a:xfrm>
+            <a:off x="457200" y="3694176"/>
+            <a:ext cx="128016" cy="1051560"/>
+          </a:xfrm>
+          <a:prstGeom prst="rect">
+            <a:avLst/>
+          </a:prstGeom>
+          <a:solidFill>
+            <a:srgbClr val="A02030"/>
+          </a:solidFill>
+          <a:ln>
+            <a:noFill/>
+          </a:ln>
+        </p:spPr>
+        <p:style>
+          <a:lnRef idx="1">
+            <a:schemeClr val="accent1"/>
+          </a:lnRef>
+          <a:fillRef idx="3">
+            <a:schemeClr val="accent1"/>
+          </a:fillRef>
+          <a:effectRef idx="2">
+            <a:schemeClr val="accent1"/>
+          </a:effectRef>
+          <a:fontRef idx="minor">
+            <a:schemeClr val="lt1"/>
+          </a:fontRef>
+        </p:style>
+        <p:txBody>
+          <a:bodyPr rtlCol="0" anchor="ctr"/>
+          <a:lstStyle/>
+          <a:p>
+            <a:pPr algn="ctr"/>
+          </a:p>
+        </p:txBody>
+      </p:sp>
+      <p:sp>
+        <p:nvSpPr>
+          <p:cNvPr id="13" name="TextBox 12"/>
+          <p:cNvSpPr txBox="1"/>
+          <p:nvPr/>
+        </p:nvSpPr>
+        <p:spPr>
+          <a:xfrm>
+            <a:off x="777240" y="3831336"/>
+            <a:ext cx="10774375" cy="822959"/>
+          </a:xfrm>
+          <a:prstGeom prst="rect">
+            <a:avLst/>
+          </a:prstGeom>
+          <a:noFill/>
+        </p:spPr>
+        <p:txBody>
+          <a:bodyPr wrap="square">
+            <a:spAutoFit/>
+          </a:bodyPr>
+          <a:lstStyle/>
+          <a:p>
+            <a:r>
+              <a:rPr sz="1200" b="1" i="0">
+                <a:solidFill>
+                  <a:srgbClr val="A02030"/>
+                </a:solidFill>
+                <a:latin typeface="Calibri"/>
+              </a:rPr>
+              <a:t>Atención</a:t>
+            </a:r>
+          </a:p>
+          <a:p>
+            <a:pPr>
+              <a:spcBef>
+                <a:spcPts val="400"/>
+              </a:spcBef>
+            </a:pPr>
+            <a:r>
+              <a:rPr sz="1400" b="0" i="0">
+                <a:solidFill>
+                  <a:srgbClr val="333333"/>
+                </a:solidFill>
+                <a:latin typeface="Calibri"/>
+              </a:rPr>
+              <a:t>Si el docente asigna taller esta semana, él indica el canal y la fecha.</a:t>
+            </a:r>
+          </a:p>
+        </p:txBody>
+      </p:sp>
+      <p:sp>
+        <p:nvSpPr>
+          <p:cNvPr id="14" name="TextBox 13"/>
+          <p:cNvSpPr txBox="1"/>
+          <p:nvPr/>
+        </p:nvSpPr>
+        <p:spPr>
+          <a:xfrm>
+            <a:off x="11185855" y="6473952"/>
+            <a:ext cx="640080" cy="274320"/>
+          </a:xfrm>
+          <a:prstGeom prst="rect">
+            <a:avLst/>
+          </a:prstGeom>
+          <a:noFill/>
+        </p:spPr>
+        <p:txBody>
+          <a:bodyPr wrap="square">
+            <a:spAutoFit/>
+          </a:bodyPr>
+          <a:lstStyle/>
+          <a:p>
+            <a:pPr algn="r"/>
+            <a:r>
+              <a:rPr sz="1100" b="0" i="0">
+                <a:solidFill>
+                  <a:srgbClr val="666666"/>
+                </a:solidFill>
+                <a:latin typeface="Calibri"/>
+              </a:rPr>
+              <a:t>31</a:t>
+            </a:r>
+          </a:p>
+        </p:txBody>
+      </p:sp>
+    </p:spTree>
+  </p:cSld>
+  <p:clrMapOvr>
+    <a:masterClrMapping/>
+  </p:clrMapOvr>
+</p:sld>
+</file>
+
+<file path=ppt/slides/slide32.xml><?xml version="1.0" encoding="utf-8"?>
 <p:sld xmlns:a="http://schemas.openxmlformats.org/drawingml/2006/main" xmlns:p="http://schemas.openxmlformats.org/presentationml/2006/main" xmlns:r="http://schemas.openxmlformats.org/officeDocument/2006/relationships">
   <p:cSld>
     <p:bg>

--- a/Bases de Datos II/Clases/Clase 11 - Avance del proyecto final/Presentacion.pptx
+++ b/Bases de Datos II/Clases/Clase 11 - Avance del proyecto final/Presentacion.pptx
@@ -9,34 +9,23 @@
     <p:sldId id="257" r:id="rId8"/>
     <p:sldId id="258" r:id="rId9"/>
     <p:sldId id="259" r:id="rId10"/>
-    <p:sldId id="260" r:id="rId11"/>
-    <p:sldId id="261" r:id="rId12"/>
-    <p:sldId id="262" r:id="rId13"/>
-    <p:sldId id="263" r:id="rId14"/>
-    <p:sldId id="264" r:id="rId15"/>
-    <p:sldId id="265" r:id="rId16"/>
-    <p:sldId id="266" r:id="rId17"/>
-    <p:sldId id="267" r:id="rId18"/>
-    <p:sldId id="268" r:id="rId19"/>
-    <p:sldId id="269" r:id="rId20"/>
-    <p:sldId id="270" r:id="rId21"/>
-    <p:sldId id="271" r:id="rId22"/>
-    <p:sldId id="272" r:id="rId23"/>
-    <p:sldId id="273" r:id="rId24"/>
-    <p:sldId id="274" r:id="rId25"/>
-    <p:sldId id="275" r:id="rId26"/>
-    <p:sldId id="276" r:id="rId27"/>
-    <p:sldId id="277" r:id="rId28"/>
-    <p:sldId id="278" r:id="rId29"/>
-    <p:sldId id="279" r:id="rId30"/>
-    <p:sldId id="280" r:id="rId31"/>
-    <p:sldId id="281" r:id="rId32"/>
-    <p:sldId id="282" r:id="rId33"/>
-    <p:sldId id="283" r:id="rId34"/>
-    <p:sldId id="284" r:id="rId35"/>
-    <p:sldId id="285" r:id="rId36"/>
-    <p:sldId id="286" r:id="rId37"/>
-    <p:sldId id="287" r:id="rId38"/>
+    <p:sldId id="260" r:id="rId12"/>
+    <p:sldId id="261" r:id="rId13"/>
+    <p:sldId id="262" r:id="rId14"/>
+    <p:sldId id="263" r:id="rId15"/>
+    <p:sldId id="264" r:id="rId16"/>
+    <p:sldId id="265" r:id="rId17"/>
+    <p:sldId id="266" r:id="rId18"/>
+    <p:sldId id="267" r:id="rId19"/>
+    <p:sldId id="268" r:id="rId20"/>
+    <p:sldId id="269" r:id="rId21"/>
+    <p:sldId id="270" r:id="rId22"/>
+    <p:sldId id="271" r:id="rId23"/>
+    <p:sldId id="272" r:id="rId24"/>
+    <p:sldId id="273" r:id="rId25"/>
+    <p:sldId id="274" r:id="rId26"/>
+    <p:sldId id="275" r:id="rId27"/>
+    <p:sldId id="276" r:id="rId28"/>
   </p:sldIdLst>
   <p:sldSz cx="12191695" cy="6858000" type="screen4x3"/>
   <p:notesSz cx="6858000" cy="9144000"/>
@@ -136,6 +125,906 @@
     </a:lvl9pPr>
   </p:defaultTextStyle>
 </p:presentation>
+</file>
+
+<file path=ppt/notesMasters/notesMaster1.xml><?xml version="1.0" encoding="utf-8"?>
+<p:notesMaster xmlns:a="http://schemas.openxmlformats.org/drawingml/2006/main" xmlns:p="http://schemas.openxmlformats.org/presentationml/2006/main" xmlns:r="http://schemas.openxmlformats.org/officeDocument/2006/relationships">
+  <p:cSld>
+    <p:bg>
+      <p:bgRef idx="1001">
+        <a:schemeClr val="bg1"/>
+      </p:bgRef>
+    </p:bg>
+    <p:spTree>
+      <p:nvGrpSpPr>
+        <p:cNvPr id="1" name=""/>
+        <p:cNvGrpSpPr/>
+        <p:nvPr/>
+      </p:nvGrpSpPr>
+      <p:grpSpPr>
+        <a:xfrm>
+          <a:off x="0" y="0"/>
+          <a:ext cx="0" cy="0"/>
+          <a:chOff x="0" y="0"/>
+          <a:chExt cx="0" cy="0"/>
+        </a:xfrm>
+      </p:grpSpPr>
+      <p:sp>
+        <p:nvSpPr>
+          <p:cNvPr id="2" name="Header Placeholder 1"/>
+          <p:cNvSpPr>
+            <a:spLocks noGrp="1"/>
+          </p:cNvSpPr>
+          <p:nvPr>
+            <p:ph type="hdr" sz="quarter"/>
+          </p:nvPr>
+        </p:nvSpPr>
+        <p:spPr>
+          <a:xfrm>
+            <a:off x="0" y="0"/>
+            <a:ext cx="2971800" cy="457200"/>
+          </a:xfrm>
+          <a:prstGeom prst="rect">
+            <a:avLst/>
+          </a:prstGeom>
+        </p:spPr>
+        <p:txBody>
+          <a:bodyPr vert="horz" lIns="91440" tIns="45720" rIns="91440" bIns="45720" rtlCol="0"/>
+          <a:lstStyle>
+            <a:lvl1pPr algn="l">
+              <a:defRPr sz="1200"/>
+            </a:lvl1pPr>
+          </a:lstStyle>
+          <a:p>
+            <a:endParaRPr lang="en-US"/>
+          </a:p>
+        </p:txBody>
+      </p:sp>
+      <p:sp>
+        <p:nvSpPr>
+          <p:cNvPr id="3" name="Date Placeholder 2"/>
+          <p:cNvSpPr>
+            <a:spLocks noGrp="1"/>
+          </p:cNvSpPr>
+          <p:nvPr>
+            <p:ph type="dt" idx="1"/>
+          </p:nvPr>
+        </p:nvSpPr>
+        <p:spPr>
+          <a:xfrm>
+            <a:off x="3884613" y="0"/>
+            <a:ext cx="2971800" cy="457200"/>
+          </a:xfrm>
+          <a:prstGeom prst="rect">
+            <a:avLst/>
+          </a:prstGeom>
+        </p:spPr>
+        <p:txBody>
+          <a:bodyPr vert="horz" lIns="91440" tIns="45720" rIns="91440" bIns="45720" rtlCol="0"/>
+          <a:lstStyle>
+            <a:lvl1pPr algn="r">
+              <a:defRPr sz="1200"/>
+            </a:lvl1pPr>
+          </a:lstStyle>
+          <a:p>
+            <a:fld id="{0F89C1C7-3DCD-1040-A9CF-14679D8B5DDD}" type="datetimeFigureOut">
+              <a:rPr lang="en-US" smtClean="0"/>
+              <a:t>10/17/16</a:t>
+            </a:fld>
+            <a:endParaRPr lang="en-US"/>
+          </a:p>
+        </p:txBody>
+      </p:sp>
+      <p:sp>
+        <p:nvSpPr>
+          <p:cNvPr id="4" name="Slide Image Placeholder 3"/>
+          <p:cNvSpPr>
+            <a:spLocks noGrp="1" noRot="1" noChangeAspect="1"/>
+          </p:cNvSpPr>
+          <p:nvPr>
+            <p:ph type="sldImg" idx="2"/>
+          </p:nvPr>
+        </p:nvSpPr>
+        <p:spPr>
+          <a:xfrm>
+            <a:off x="1143000" y="685800"/>
+            <a:ext cx="4572000" cy="3429000"/>
+          </a:xfrm>
+          <a:prstGeom prst="rect">
+            <a:avLst/>
+          </a:prstGeom>
+          <a:noFill/>
+          <a:ln w="12700">
+            <a:solidFill>
+              <a:prstClr val="black"/>
+            </a:solidFill>
+          </a:ln>
+        </p:spPr>
+        <p:txBody>
+          <a:bodyPr vert="horz" lIns="91440" tIns="45720" rIns="91440" bIns="45720" rtlCol="0" anchor="ctr"/>
+          <a:lstStyle/>
+          <a:p>
+            <a:endParaRPr lang="en-US"/>
+          </a:p>
+        </p:txBody>
+      </p:sp>
+      <p:sp>
+        <p:nvSpPr>
+          <p:cNvPr id="5" name="Notes Placeholder 4"/>
+          <p:cNvSpPr>
+            <a:spLocks noGrp="1"/>
+          </p:cNvSpPr>
+          <p:nvPr>
+            <p:ph type="body" sz="quarter" idx="3"/>
+          </p:nvPr>
+        </p:nvSpPr>
+        <p:spPr>
+          <a:xfrm>
+            <a:off x="685800" y="4343400"/>
+            <a:ext cx="5486400" cy="4114800"/>
+          </a:xfrm>
+          <a:prstGeom prst="rect">
+            <a:avLst/>
+          </a:prstGeom>
+        </p:spPr>
+        <p:txBody>
+          <a:bodyPr vert="horz" lIns="91440" tIns="45720" rIns="91440" bIns="45720" rtlCol="0"/>
+          <a:lstStyle/>
+          <a:p>
+            <a:pPr lvl="0"/>
+            <a:r>
+              <a:rPr lang="en-US" smtClean="0"/>
+              <a:t>Click to edit Master text styles</a:t>
+            </a:r>
+          </a:p>
+          <a:p>
+            <a:pPr lvl="1"/>
+            <a:r>
+              <a:rPr lang="en-US" smtClean="0"/>
+              <a:t>Second level</a:t>
+            </a:r>
+          </a:p>
+          <a:p>
+            <a:pPr lvl="2"/>
+            <a:r>
+              <a:rPr lang="en-US" smtClean="0"/>
+              <a:t>Third level</a:t>
+            </a:r>
+          </a:p>
+          <a:p>
+            <a:pPr lvl="3"/>
+            <a:r>
+              <a:rPr lang="en-US" smtClean="0"/>
+              <a:t>Fourth level</a:t>
+            </a:r>
+          </a:p>
+          <a:p>
+            <a:pPr lvl="4"/>
+            <a:r>
+              <a:rPr lang="en-US" smtClean="0"/>
+              <a:t>Fifth level</a:t>
+            </a:r>
+            <a:endParaRPr lang="en-US"/>
+          </a:p>
+        </p:txBody>
+      </p:sp>
+      <p:sp>
+        <p:nvSpPr>
+          <p:cNvPr id="6" name="Footer Placeholder 5"/>
+          <p:cNvSpPr>
+            <a:spLocks noGrp="1"/>
+          </p:cNvSpPr>
+          <p:nvPr>
+            <p:ph type="ftr" sz="quarter" idx="4"/>
+          </p:nvPr>
+        </p:nvSpPr>
+        <p:spPr>
+          <a:xfrm>
+            <a:off x="0" y="8685213"/>
+            <a:ext cx="2971800" cy="457200"/>
+          </a:xfrm>
+          <a:prstGeom prst="rect">
+            <a:avLst/>
+          </a:prstGeom>
+        </p:spPr>
+        <p:txBody>
+          <a:bodyPr vert="horz" lIns="91440" tIns="45720" rIns="91440" bIns="45720" rtlCol="0" anchor="b"/>
+          <a:lstStyle>
+            <a:lvl1pPr algn="l">
+              <a:defRPr sz="1200"/>
+            </a:lvl1pPr>
+          </a:lstStyle>
+          <a:p>
+            <a:endParaRPr lang="en-US"/>
+          </a:p>
+        </p:txBody>
+      </p:sp>
+      <p:sp>
+        <p:nvSpPr>
+          <p:cNvPr id="7" name="Slide Number Placeholder 6"/>
+          <p:cNvSpPr>
+            <a:spLocks noGrp="1"/>
+          </p:cNvSpPr>
+          <p:nvPr>
+            <p:ph type="sldNum" sz="quarter" idx="5"/>
+          </p:nvPr>
+        </p:nvSpPr>
+        <p:spPr>
+          <a:xfrm>
+            <a:off x="3884613" y="8685213"/>
+            <a:ext cx="2971800" cy="457200"/>
+          </a:xfrm>
+          <a:prstGeom prst="rect">
+            <a:avLst/>
+          </a:prstGeom>
+        </p:spPr>
+        <p:txBody>
+          <a:bodyPr vert="horz" lIns="91440" tIns="45720" rIns="91440" bIns="45720" rtlCol="0" anchor="b"/>
+          <a:lstStyle>
+            <a:lvl1pPr algn="r">
+              <a:defRPr sz="1200"/>
+            </a:lvl1pPr>
+          </a:lstStyle>
+          <a:p>
+            <a:fld id="{BB5E49A5-4136-284D-997B-48E1D791AD67}" type="slidenum">
+              <a:rPr lang="en-US" smtClean="0"/>
+              <a:t>‹#›</a:t>
+            </a:fld>
+            <a:endParaRPr lang="en-US"/>
+          </a:p>
+        </p:txBody>
+      </p:sp>
+    </p:spTree>
+    <p:extLst>
+      <p:ext uri="{BB962C8B-B14F-4D97-AF65-F5344CB8AC3E}">
+        <p14:creationId xmlns:p14="http://schemas.microsoft.com/office/powerpoint/2010/main" val="2623252185"/>
+      </p:ext>
+    </p:extLst>
+  </p:cSld>
+  <p:clrMap bg1="lt1" tx1="dk1" bg2="lt2" tx2="dk2" accent1="accent1" accent2="accent2" accent3="accent3" accent4="accent4" accent5="accent5" accent6="accent6" hlink="hlink" folHlink="folHlink"/>
+  <p:notesStyle>
+    <a:lvl1pPr marL="0" algn="l" defTabSz="457200" rtl="0" eaLnBrk="1" latinLnBrk="0" hangingPunct="1">
+      <a:defRPr sz="1200" kern="1200">
+        <a:solidFill>
+          <a:schemeClr val="tx1"/>
+        </a:solidFill>
+        <a:latin typeface="+mn-lt"/>
+        <a:ea typeface="+mn-ea"/>
+        <a:cs typeface="+mn-cs"/>
+      </a:defRPr>
+    </a:lvl1pPr>
+    <a:lvl2pPr marL="457200" algn="l" defTabSz="457200" rtl="0" eaLnBrk="1" latinLnBrk="0" hangingPunct="1">
+      <a:defRPr sz="1200" kern="1200">
+        <a:solidFill>
+          <a:schemeClr val="tx1"/>
+        </a:solidFill>
+        <a:latin typeface="+mn-lt"/>
+        <a:ea typeface="+mn-ea"/>
+        <a:cs typeface="+mn-cs"/>
+      </a:defRPr>
+    </a:lvl2pPr>
+    <a:lvl3pPr marL="914400" algn="l" defTabSz="457200" rtl="0" eaLnBrk="1" latinLnBrk="0" hangingPunct="1">
+      <a:defRPr sz="1200" kern="1200">
+        <a:solidFill>
+          <a:schemeClr val="tx1"/>
+        </a:solidFill>
+        <a:latin typeface="+mn-lt"/>
+        <a:ea typeface="+mn-ea"/>
+        <a:cs typeface="+mn-cs"/>
+      </a:defRPr>
+    </a:lvl3pPr>
+    <a:lvl4pPr marL="1371600" algn="l" defTabSz="457200" rtl="0" eaLnBrk="1" latinLnBrk="0" hangingPunct="1">
+      <a:defRPr sz="1200" kern="1200">
+        <a:solidFill>
+          <a:schemeClr val="tx1"/>
+        </a:solidFill>
+        <a:latin typeface="+mn-lt"/>
+        <a:ea typeface="+mn-ea"/>
+        <a:cs typeface="+mn-cs"/>
+      </a:defRPr>
+    </a:lvl4pPr>
+    <a:lvl5pPr marL="1828800" algn="l" defTabSz="457200" rtl="0" eaLnBrk="1" latinLnBrk="0" hangingPunct="1">
+      <a:defRPr sz="1200" kern="1200">
+        <a:solidFill>
+          <a:schemeClr val="tx1"/>
+        </a:solidFill>
+        <a:latin typeface="+mn-lt"/>
+        <a:ea typeface="+mn-ea"/>
+        <a:cs typeface="+mn-cs"/>
+      </a:defRPr>
+    </a:lvl5pPr>
+    <a:lvl6pPr marL="2286000" algn="l" defTabSz="457200" rtl="0" eaLnBrk="1" latinLnBrk="0" hangingPunct="1">
+      <a:defRPr sz="1200" kern="1200">
+        <a:solidFill>
+          <a:schemeClr val="tx1"/>
+        </a:solidFill>
+        <a:latin typeface="+mn-lt"/>
+        <a:ea typeface="+mn-ea"/>
+        <a:cs typeface="+mn-cs"/>
+      </a:defRPr>
+    </a:lvl6pPr>
+    <a:lvl7pPr marL="2743200" algn="l" defTabSz="457200" rtl="0" eaLnBrk="1" latinLnBrk="0" hangingPunct="1">
+      <a:defRPr sz="1200" kern="1200">
+        <a:solidFill>
+          <a:schemeClr val="tx1"/>
+        </a:solidFill>
+        <a:latin typeface="+mn-lt"/>
+        <a:ea typeface="+mn-ea"/>
+        <a:cs typeface="+mn-cs"/>
+      </a:defRPr>
+    </a:lvl7pPr>
+    <a:lvl8pPr marL="3200400" algn="l" defTabSz="457200" rtl="0" eaLnBrk="1" latinLnBrk="0" hangingPunct="1">
+      <a:defRPr sz="1200" kern="1200">
+        <a:solidFill>
+          <a:schemeClr val="tx1"/>
+        </a:solidFill>
+        <a:latin typeface="+mn-lt"/>
+        <a:ea typeface="+mn-ea"/>
+        <a:cs typeface="+mn-cs"/>
+      </a:defRPr>
+    </a:lvl8pPr>
+    <a:lvl9pPr marL="3657600" algn="l" defTabSz="457200" rtl="0" eaLnBrk="1" latinLnBrk="0" hangingPunct="1">
+      <a:defRPr sz="1200" kern="1200">
+        <a:solidFill>
+          <a:schemeClr val="tx1"/>
+        </a:solidFill>
+        <a:latin typeface="+mn-lt"/>
+        <a:ea typeface="+mn-ea"/>
+        <a:cs typeface="+mn-cs"/>
+      </a:defRPr>
+    </a:lvl9pPr>
+  </p:notesStyle>
+</p:notesMaster>
+</file>
+
+<file path=ppt/notesSlides/notesSlide1.xml><?xml version="1.0" encoding="utf-8"?>
+<p:notes xmlns:a="http://schemas.openxmlformats.org/drawingml/2006/main" xmlns:p="http://schemas.openxmlformats.org/presentationml/2006/main" xmlns:r="http://schemas.openxmlformats.org/officeDocument/2006/relationships">
+  <p:cSld>
+    <p:spTree>
+      <p:nvGrpSpPr>
+        <p:cNvPr id="1" name=""/>
+        <p:cNvGrpSpPr/>
+        <p:nvPr/>
+      </p:nvGrpSpPr>
+      <p:grpSpPr>
+        <a:xfrm>
+          <a:off x="0" y="0"/>
+          <a:ext cx="0" cy="0"/>
+          <a:chOff x="0" y="0"/>
+          <a:chExt cx="0" cy="0"/>
+        </a:xfrm>
+      </p:grpSpPr>
+      <p:sp>
+        <p:nvSpPr>
+          <p:cNvPr id="2" name="Slide Image Placeholder 1"/>
+          <p:cNvSpPr>
+            <a:spLocks noGrp="1"/>
+          </p:cNvSpPr>
+          <p:nvPr>
+            <p:ph type="sldImg" idx="2"/>
+          </p:nvPr>
+        </p:nvSpPr>
+        <p:spPr/>
+      </p:sp>
+      <p:sp>
+        <p:nvSpPr>
+          <p:cNvPr id="3" name="Notes Placeholder 2"/>
+          <p:cNvSpPr>
+            <a:spLocks noGrp="1"/>
+          </p:cNvSpPr>
+          <p:nvPr>
+            <p:ph type="body" idx="3" sz="quarter"/>
+          </p:nvPr>
+        </p:nvSpPr>
+        <p:spPr/>
+        <p:txBody>
+          <a:bodyPr/>
+          <a:lstStyle/>
+          <a:p>
+            <a:r>
+              <a:t>Lo que se hace hoy es una revision tecnica con lista de verificacion, comprimida a diez minutos por estudiante.</a:t>
+            </a:r>
+          </a:p>
+          <a:p>
+            <a:r>
+              <a:t>Un estudiante que se pone a corregir el DDL en vivo consume el tiempo de los demas y sale con un hallazgo menos que si hubiera seguido escuchando.</a:t>
+            </a:r>
+          </a:p>
+        </p:txBody>
+      </p:sp>
+      <p:sp>
+        <p:nvSpPr>
+          <p:cNvPr id="4" name="Slide Number Placeholder 3"/>
+          <p:cNvSpPr>
+            <a:spLocks noGrp="1"/>
+          </p:cNvSpPr>
+          <p:nvPr>
+            <p:ph type="sldNum" idx="5" sz="quarter"/>
+          </p:nvPr>
+        </p:nvSpPr>
+        <p:spPr/>
+      </p:sp>
+    </p:spTree>
+  </p:cSld>
+  <p:clrMapOvr>
+    <a:masterClrMapping/>
+  </p:clrMapOvr>
+</p:notes>
+</file>
+
+<file path=ppt/notesSlides/notesSlide2.xml><?xml version="1.0" encoding="utf-8"?>
+<p:notes xmlns:a="http://schemas.openxmlformats.org/drawingml/2006/main" xmlns:p="http://schemas.openxmlformats.org/presentationml/2006/main" xmlns:r="http://schemas.openxmlformats.org/officeDocument/2006/relationships">
+  <p:cSld>
+    <p:spTree>
+      <p:nvGrpSpPr>
+        <p:cNvPr id="1" name=""/>
+        <p:cNvGrpSpPr/>
+        <p:nvPr/>
+      </p:nvGrpSpPr>
+      <p:grpSpPr>
+        <a:xfrm>
+          <a:off x="0" y="0"/>
+          <a:ext cx="0" cy="0"/>
+          <a:chOff x="0" y="0"/>
+          <a:chExt cx="0" cy="0"/>
+        </a:xfrm>
+      </p:grpSpPr>
+      <p:sp>
+        <p:nvSpPr>
+          <p:cNvPr id="2" name="Slide Image Placeholder 1"/>
+          <p:cNvSpPr>
+            <a:spLocks noGrp="1"/>
+          </p:cNvSpPr>
+          <p:nvPr>
+            <p:ph type="sldImg" idx="2"/>
+          </p:nvPr>
+        </p:nvSpPr>
+        <p:spPr/>
+      </p:sp>
+      <p:sp>
+        <p:nvSpPr>
+          <p:cNvPr id="3" name="Notes Placeholder 2"/>
+          <p:cNvSpPr>
+            <a:spLocks noGrp="1"/>
+          </p:cNvSpPr>
+          <p:nvPr>
+            <p:ph type="body" idx="3" sz="quarter"/>
+          </p:nvPr>
+        </p:nvSpPr>
+        <p:spPr/>
+        <p:txBody>
+          <a:bodyPr/>
+          <a:lstStyle/>
+          <a:p>
+            <a:r>
+              <a:t>Lo que se audita en una base de datos no es cada pieza por separado sino la coherencia entre piezas.</a:t>
+            </a:r>
+          </a:p>
+          <a:p>
+            <a:r>
+              <a:t>Coherencia significa que todas esas piezas describen el mismo sistema.</a:t>
+            </a:r>
+          </a:p>
+          <a:p>
+            <a:r>
+              <a:t>Esa divergencia es el hallazgo mas comun del checkpoint y tambien el mas facil de detectar si se sabe donde mirar.</a:t>
+            </a:r>
+          </a:p>
+          <a:p>
+            <a:r>
+              <a:t>Las cuatro verificaciones cruzadas que el docente debe correr son: que el DDL corresponda al ER, que los GRANT correspondan a los roles declarados, que los procedimientos listados existan y sean invocables, y que la optimizacion tenga medicion antes y despues.</a:t>
+            </a:r>
+          </a:p>
+        </p:txBody>
+      </p:sp>
+      <p:sp>
+        <p:nvSpPr>
+          <p:cNvPr id="4" name="Slide Number Placeholder 3"/>
+          <p:cNvSpPr>
+            <a:spLocks noGrp="1"/>
+          </p:cNvSpPr>
+          <p:nvPr>
+            <p:ph type="sldNum" idx="5" sz="quarter"/>
+          </p:nvPr>
+        </p:nvSpPr>
+        <p:spPr/>
+      </p:sp>
+    </p:spTree>
+  </p:cSld>
+  <p:clrMapOvr>
+    <a:masterClrMapping/>
+  </p:clrMapOvr>
+</p:notes>
+</file>
+
+<file path=ppt/notesSlides/notesSlide3.xml><?xml version="1.0" encoding="utf-8"?>
+<p:notes xmlns:a="http://schemas.openxmlformats.org/drawingml/2006/main" xmlns:p="http://schemas.openxmlformats.org/presentationml/2006/main" xmlns:r="http://schemas.openxmlformats.org/officeDocument/2006/relationships">
+  <p:cSld>
+    <p:spTree>
+      <p:nvGrpSpPr>
+        <p:cNvPr id="1" name=""/>
+        <p:cNvGrpSpPr/>
+        <p:nvPr/>
+      </p:nvGrpSpPr>
+      <p:grpSpPr>
+        <a:xfrm>
+          <a:off x="0" y="0"/>
+          <a:ext cx="0" cy="0"/>
+          <a:chOff x="0" y="0"/>
+          <a:chExt cx="0" cy="0"/>
+        </a:xfrm>
+      </p:grpSpPr>
+      <p:sp>
+        <p:nvSpPr>
+          <p:cNvPr id="2" name="Slide Image Placeholder 1"/>
+          <p:cNvSpPr>
+            <a:spLocks noGrp="1"/>
+          </p:cNvSpPr>
+          <p:nvPr>
+            <p:ph type="sldImg" idx="2"/>
+          </p:nvPr>
+        </p:nvSpPr>
+        <p:spPr/>
+      </p:sp>
+      <p:sp>
+        <p:nvSpPr>
+          <p:cNvPr id="3" name="Notes Placeholder 2"/>
+          <p:cNvSpPr>
+            <a:spLocks noGrp="1"/>
+          </p:cNvSpPr>
+          <p:nvPr>
+            <p:ph type="body" idx="3" sz="quarter"/>
+          </p:nvPr>
+        </p:nvSpPr>
+        <p:spPr/>
+        <p:txBody>
+          <a:bodyPr/>
+          <a:lstStyle/>
+          <a:p>
+            <a:r>
+              <a:t>Verificacion uno, ER contra DDL.</a:t>
+            </a:r>
+          </a:p>
+          <a:p>
+            <a:r>
+              <a:t>Despues se verifican las relaciones.</a:t>
+            </a:r>
+          </a:p>
+          <a:p>
+            <a:r>
+              <a:t>Verificacion dos, roles contra GRANT.</a:t>
+            </a:r>
+          </a:p>
+        </p:txBody>
+      </p:sp>
+      <p:sp>
+        <p:nvSpPr>
+          <p:cNvPr id="4" name="Slide Number Placeholder 3"/>
+          <p:cNvSpPr>
+            <a:spLocks noGrp="1"/>
+          </p:cNvSpPr>
+          <p:nvPr>
+            <p:ph type="sldNum" idx="5" sz="quarter"/>
+          </p:nvPr>
+        </p:nvSpPr>
+        <p:spPr/>
+      </p:sp>
+    </p:spTree>
+  </p:cSld>
+  <p:clrMapOvr>
+    <a:masterClrMapping/>
+  </p:clrMapOvr>
+</p:notes>
+</file>
+
+<file path=ppt/notesSlides/notesSlide4.xml><?xml version="1.0" encoding="utf-8"?>
+<p:notes xmlns:a="http://schemas.openxmlformats.org/drawingml/2006/main" xmlns:p="http://schemas.openxmlformats.org/presentationml/2006/main" xmlns:r="http://schemas.openxmlformats.org/officeDocument/2006/relationships">
+  <p:cSld>
+    <p:spTree>
+      <p:nvGrpSpPr>
+        <p:cNvPr id="1" name=""/>
+        <p:cNvGrpSpPr/>
+        <p:nvPr/>
+      </p:nvGrpSpPr>
+      <p:grpSpPr>
+        <a:xfrm>
+          <a:off x="0" y="0"/>
+          <a:ext cx="0" cy="0"/>
+          <a:chOff x="0" y="0"/>
+          <a:chExt cx="0" cy="0"/>
+        </a:xfrm>
+      </p:grpSpPr>
+      <p:sp>
+        <p:nvSpPr>
+          <p:cNvPr id="2" name="Slide Image Placeholder 1"/>
+          <p:cNvSpPr>
+            <a:spLocks noGrp="1"/>
+          </p:cNvSpPr>
+          <p:nvPr>
+            <p:ph type="sldImg" idx="2"/>
+          </p:nvPr>
+        </p:nvSpPr>
+        <p:spPr/>
+      </p:sp>
+      <p:sp>
+        <p:nvSpPr>
+          <p:cNvPr id="3" name="Notes Placeholder 2"/>
+          <p:cNvSpPr>
+            <a:spLocks noGrp="1"/>
+          </p:cNvSpPr>
+          <p:nvPr>
+            <p:ph type="body" idx="3" sz="quarter"/>
+          </p:nvPr>
+        </p:nvSpPr>
+        <p:spPr/>
+        <p:txBody>
+          <a:bodyPr/>
+          <a:lstStyle/>
+          <a:p>
+            <a:r>
+              <a:t>Verificacion tres, procedimientos invocables.</a:t>
+            </a:r>
+          </a:p>
+          <a:p>
+            <a:r>
+              <a:t>La prueba de humo dura un minuto y consiste en pedir dos ejecuciones y no una.</a:t>
+            </a:r>
+          </a:p>
+          <a:p>
+            <a:r>
+              <a:t>Verificacion cuatro, optimizacion.</a:t>
+            </a:r>
+          </a:p>
+          <a:p>
+            <a:r>
+              <a:t>Se exige la consulta original, el plan de ejecucion que la acompanaba, el cambio aplicado (indice creado o consulta reescrita) y el plan despues, mostrando que el motor paso de recorrido completo de tabla a acceso por indice.</a:t>
+            </a:r>
+          </a:p>
+        </p:txBody>
+      </p:sp>
+      <p:sp>
+        <p:nvSpPr>
+          <p:cNvPr id="4" name="Slide Number Placeholder 3"/>
+          <p:cNvSpPr>
+            <a:spLocks noGrp="1"/>
+          </p:cNvSpPr>
+          <p:nvPr>
+            <p:ph type="sldNum" idx="5" sz="quarter"/>
+          </p:nvPr>
+        </p:nvSpPr>
+        <p:spPr/>
+      </p:sp>
+    </p:spTree>
+  </p:cSld>
+  <p:clrMapOvr>
+    <a:masterClrMapping/>
+  </p:clrMapOvr>
+</p:notes>
+</file>
+
+<file path=ppt/notesSlides/notesSlide5.xml><?xml version="1.0" encoding="utf-8"?>
+<p:notes xmlns:a="http://schemas.openxmlformats.org/drawingml/2006/main" xmlns:p="http://schemas.openxmlformats.org/presentationml/2006/main" xmlns:r="http://schemas.openxmlformats.org/officeDocument/2006/relationships">
+  <p:cSld>
+    <p:spTree>
+      <p:nvGrpSpPr>
+        <p:cNvPr id="1" name=""/>
+        <p:cNvGrpSpPr/>
+        <p:nvPr/>
+      </p:nvGrpSpPr>
+      <p:grpSpPr>
+        <a:xfrm>
+          <a:off x="0" y="0"/>
+          <a:ext cx="0" cy="0"/>
+          <a:chOff x="0" y="0"/>
+          <a:chExt cx="0" cy="0"/>
+        </a:xfrm>
+      </p:grpSpPr>
+      <p:sp>
+        <p:nvSpPr>
+          <p:cNvPr id="2" name="Slide Image Placeholder 1"/>
+          <p:cNvSpPr>
+            <a:spLocks noGrp="1"/>
+          </p:cNvSpPr>
+          <p:nvPr>
+            <p:ph type="sldImg" idx="2"/>
+          </p:nvPr>
+        </p:nvSpPr>
+        <p:spPr/>
+      </p:sp>
+      <p:sp>
+        <p:nvSpPr>
+          <p:cNvPr id="3" name="Notes Placeholder 2"/>
+          <p:cNvSpPr>
+            <a:spLocks noGrp="1"/>
+          </p:cNvSpPr>
+          <p:nvPr>
+            <p:ph type="body" idx="3" sz="quarter"/>
+          </p:nvPr>
+        </p:nvSpPr>
+        <p:spPr/>
+        <p:txBody>
+          <a:bodyPr/>
+          <a:lstStyle/>
+          <a:p>
+            <a:r>
+              <a:t>Eso no resta puntos, al contrario, declarar el limite es una senal de madurez que se valora en la sustentacion.</a:t>
+            </a:r>
+          </a:p>
+        </p:txBody>
+      </p:sp>
+      <p:sp>
+        <p:nvSpPr>
+          <p:cNvPr id="4" name="Slide Number Placeholder 3"/>
+          <p:cNvSpPr>
+            <a:spLocks noGrp="1"/>
+          </p:cNvSpPr>
+          <p:nvPr>
+            <p:ph type="sldNum" idx="5" sz="quarter"/>
+          </p:nvPr>
+        </p:nvSpPr>
+        <p:spPr/>
+      </p:sp>
+    </p:spTree>
+  </p:cSld>
+  <p:clrMapOvr>
+    <a:masterClrMapping/>
+  </p:clrMapOvr>
+</p:notes>
+</file>
+
+<file path=ppt/notesSlides/notesSlide6.xml><?xml version="1.0" encoding="utf-8"?>
+<p:notes xmlns:a="http://schemas.openxmlformats.org/drawingml/2006/main" xmlns:p="http://schemas.openxmlformats.org/presentationml/2006/main" xmlns:r="http://schemas.openxmlformats.org/officeDocument/2006/relationships">
+  <p:cSld>
+    <p:spTree>
+      <p:nvGrpSpPr>
+        <p:cNvPr id="1" name=""/>
+        <p:cNvGrpSpPr/>
+        <p:nvPr/>
+      </p:nvGrpSpPr>
+      <p:grpSpPr>
+        <a:xfrm>
+          <a:off x="0" y="0"/>
+          <a:ext cx="0" cy="0"/>
+          <a:chOff x="0" y="0"/>
+          <a:chExt cx="0" cy="0"/>
+        </a:xfrm>
+      </p:grpSpPr>
+      <p:sp>
+        <p:nvSpPr>
+          <p:cNvPr id="2" name="Slide Image Placeholder 1"/>
+          <p:cNvSpPr>
+            <a:spLocks noGrp="1"/>
+          </p:cNvSpPr>
+          <p:nvPr>
+            <p:ph type="sldImg" idx="2"/>
+          </p:nvPr>
+        </p:nvSpPr>
+        <p:spPr/>
+      </p:sp>
+      <p:sp>
+        <p:nvSpPr>
+          <p:cNvPr id="3" name="Notes Placeholder 2"/>
+          <p:cNvSpPr>
+            <a:spLocks noGrp="1"/>
+          </p:cNvSpPr>
+          <p:nvPr>
+            <p:ph type="body" idx="3" sz="quarter"/>
+          </p:nvPr>
+        </p:nvSpPr>
+        <p:spPr/>
+        <p:txBody>
+          <a:bodyPr/>
+          <a:lstStyle/>
+          <a:p>
+            <a:r>
+              <a:t>Comparense los dos extremos.</a:t>
+            </a:r>
+          </a:p>
+          <a:p>
+            <a:r>
+              <a:t>Responsable: Carlos.</a:t>
+            </a:r>
+          </a:p>
+        </p:txBody>
+      </p:sp>
+      <p:sp>
+        <p:nvSpPr>
+          <p:cNvPr id="4" name="Slide Number Placeholder 3"/>
+          <p:cNvSpPr>
+            <a:spLocks noGrp="1"/>
+          </p:cNvSpPr>
+          <p:nvPr>
+            <p:ph type="sldNum" idx="5" sz="quarter"/>
+          </p:nvPr>
+        </p:nvSpPr>
+        <p:spPr/>
+      </p:sp>
+    </p:spTree>
+  </p:cSld>
+  <p:clrMapOvr>
+    <a:masterClrMapping/>
+  </p:clrMapOvr>
+</p:notes>
+</file>
+
+<file path=ppt/notesSlides/notesSlide7.xml><?xml version="1.0" encoding="utf-8"?>
+<p:notes xmlns:a="http://schemas.openxmlformats.org/drawingml/2006/main" xmlns:p="http://schemas.openxmlformats.org/presentationml/2006/main" xmlns:r="http://schemas.openxmlformats.org/officeDocument/2006/relationships">
+  <p:cSld>
+    <p:spTree>
+      <p:nvGrpSpPr>
+        <p:cNvPr id="1" name=""/>
+        <p:cNvGrpSpPr/>
+        <p:nvPr/>
+      </p:nvGrpSpPr>
+      <p:grpSpPr>
+        <a:xfrm>
+          <a:off x="0" y="0"/>
+          <a:ext cx="0" cy="0"/>
+          <a:chOff x="0" y="0"/>
+          <a:chExt cx="0" cy="0"/>
+        </a:xfrm>
+      </p:grpSpPr>
+      <p:sp>
+        <p:nvSpPr>
+          <p:cNvPr id="2" name="Slide Image Placeholder 1"/>
+          <p:cNvSpPr>
+            <a:spLocks noGrp="1"/>
+          </p:cNvSpPr>
+          <p:nvPr>
+            <p:ph type="sldImg" idx="2"/>
+          </p:nvPr>
+        </p:nvSpPr>
+        <p:spPr/>
+      </p:sp>
+      <p:sp>
+        <p:nvSpPr>
+          <p:cNvPr id="3" name="Notes Placeholder 2"/>
+          <p:cNvSpPr>
+            <a:spLocks noGrp="1"/>
+          </p:cNvSpPr>
+          <p:nvPr>
+            <p:ph type="body" idx="3" sz="quarter"/>
+          </p:nvPr>
+        </p:nvSpPr>
+        <p:spPr/>
+        <p:txBody>
+          <a:bodyPr/>
+          <a:lstStyle/>
+          <a:p>
+            <a:r>
+              <a:t>Aqui aparecen las dos preguntas previsibles del estudiante.</a:t>
+            </a:r>
+          </a:p>
+          <a:p>
+            <a:r>
+              <a:t>La respuesta es que el checkpoint en si no califica el producto, pero es la ultima oportunidad de mover puntos de la rubrica antes de la entrega, y por eso conviene llegar con lo peor y no con lo mejor: un estudiante que esconde su parte floja para no verse mal pierde justamente la revision que la habria arreglado.</a:t>
+            </a:r>
+          </a:p>
+          <a:p>
+            <a:r>
+              <a:t>No, porque el auditor par no califica.</a:t>
+            </a:r>
+          </a:p>
+        </p:txBody>
+      </p:sp>
+      <p:sp>
+        <p:nvSpPr>
+          <p:cNvPr id="4" name="Slide Number Placeholder 3"/>
+          <p:cNvSpPr>
+            <a:spLocks noGrp="1"/>
+          </p:cNvSpPr>
+          <p:nvPr>
+            <p:ph type="sldNum" idx="5" sz="quarter"/>
+          </p:nvPr>
+        </p:nvSpPr>
+        <p:spPr/>
+      </p:sp>
+    </p:spTree>
+  </p:cSld>
+  <p:clrMapOvr>
+    <a:masterClrMapping/>
+  </p:clrMapOvr>
+</p:notes>
 </file>
 
 <file path=ppt/slideLayouts/slideLayout1.xml><?xml version="1.0" encoding="utf-8"?>
@@ -4977,7 +5866,7 @@
                 </a:solidFill>
                 <a:latin typeface="Calibri"/>
               </a:rPr>
-              <a:t>La aritmetica del calendario, dicha en voz alta (1/3)</a:t>
+              <a:t>Un checkpoint sin hallazgos concretos es un checkpoint desperdiciado (1/2)</a:t>
             </a:r>
           </a:p>
         </p:txBody>
@@ -5016,7 +5905,7 @@
                 </a:solidFill>
                 <a:latin typeface="Calibri"/>
               </a:rPr>
-              <a:t>–   Para decidir si un estudiante va a tiempo hay que hacer la aritmetica del calendario en voz alta, porque los estudiantes casi siempre creen que tienen mas tiempo del que tienen, y este semestre la cuenta es mas dura de lo que parece.</a:t>
+              <a:t>–   Un checkpoint sin hallazgos concretos es un checkpoint desperdiciado, y esa afirmacion merece justificacion porque suena severa.</a:t>
             </a:r>
           </a:p>
           <a:p>
@@ -5032,7 +5921,7 @@
                 </a:solidFill>
                 <a:latin typeface="Calibri"/>
               </a:rPr>
-              <a:t>–   Quedan cuatro Clases de material pero solo tres bloques mas de clase, y ninguno de los tres es de trabajo acompanado.</a:t>
+              <a:t>–   El unico valor de un punto de control intermedio es que todavia existe tiempo para corregir, y ese valor se realiza solo si de la sesion sale una lista escrita de cosas por corregir.</a:t>
             </a:r>
           </a:p>
           <a:p>
@@ -5048,7 +5937,7 @@
                 </a:solidFill>
                 <a:latin typeface="Calibri"/>
               </a:rPr>
-              <a:t>–   La razon: este checkpoint cae en una sesion doble que continua el mismo dia con la Clase 12, la de integracion aplicacion-base de datos; despues viene la Clase 13, de casos reales</a:t>
+              <a:t>–   Cuando el docente dice «todo bien, sigan asi», el estudiante interpreta legitimamente que su trabajo esta aprobado, deja de revisarlo, y el defecto reaparece en la entrega final cuando ya no hay clases para arreglarlo: es un costo diferido, no un ahorro.</a:t>
             </a:r>
           </a:p>
           <a:p>
@@ -5064,7 +5953,23 @@
                 </a:solidFill>
                 <a:latin typeface="Calibri"/>
               </a:rPr>
-              <a:t>–   Que es autonoma por festivo y el estudiante hace solo; luego el Parcial 3, que es solo evaluacion; y finalmente la sesion de cierre, que es la sustentacion en vivo del proyecto.</a:t>
+              <a:t>–   La primera: «esto tiene nota?».</a:t>
+            </a:r>
+          </a:p>
+          <a:p>
+            <a:pPr>
+              <a:spcAft>
+                <a:spcPts val="800"/>
+              </a:spcAft>
+            </a:pPr>
+            <a:r>
+              <a:rPr sz="2000" b="0" i="0">
+                <a:solidFill>
+                  <a:srgbClr val="333333"/>
+                </a:solidFill>
+                <a:latin typeface="Calibri"/>
+              </a:rPr>
+              <a:t>–   La segunda: «si quien me audita encuentra fallas, me baja la nota?».</a:t>
             </a:r>
           </a:p>
         </p:txBody>
@@ -5245,7 +6150,7 @@
                 </a:solidFill>
                 <a:latin typeface="Calibri"/>
               </a:rPr>
-              <a:t>La aritmetica del calendario, dicha en voz alta (2/3)</a:t>
+              <a:t>Un checkpoint sin hallazgos concretos es un checkpoint desperdiciado (2/2)</a:t>
             </a:r>
           </a:p>
         </p:txBody>
@@ -5284,7 +6189,7 @@
                 </a:solidFill>
                 <a:latin typeface="Calibri"/>
               </a:rPr>
-              <a:t>–   Dicho de frente al grupo: hoy es la ultima vez que el docente revisa el proyecto con ellos delante, y lo que salga mal de aqui en adelante se corrige por cuenta propia, con retroalimentacion escrita entre sesiones.</a:t>
+              <a:t>–   Y revisar el trabajo de otro tiene un beneficio propio bien documentado: los defectos ajenos se ven mucho mas rapido que los propios, y casi siempre quien audita vuelve a su carpeta y arregla en silencio el mismo problema que acaba de senalar.</a:t>
             </a:r>
           </a:p>
           <a:p>
@@ -5300,7 +6205,7 @@
                 </a:solidFill>
                 <a:latin typeface="Calibri"/>
               </a:rPr>
-              <a:t>–   Con ese dato, el umbral razonable a esta altura es tener cerrados los 20 puntos de modelo mas DDL y los 15 de seguridad y respaldo, o sea 35 de los 100</a:t>
+              <a:t>–   Todo esto se apoya en lo hecho hasta la Clase 10 (el informe de escenarios de concurrencia es una de las evidencias que hoy se audita) y alimenta directamente la Clase 12</a:t>
             </a:r>
           </a:p>
           <a:p>
@@ -5316,39 +6221,7 @@
                 </a:solidFill>
                 <a:latin typeface="Calibri"/>
               </a:rPr>
-              <a:t>–   Y tener al menos la mitad de los 25 de objetos programables: dos procedimientos, uno de ellos probado con su caso invalido.</a:t>
-            </a:r>
-          </a:p>
-          <a:p>
-            <a:pPr>
-              <a:spcAft>
-                <a:spcPts val="800"/>
-              </a:spcAft>
-            </a:pPr>
-            <a:r>
-              <a:rPr sz="2000" b="0" i="0">
-                <a:solidFill>
-                  <a:srgbClr val="333333"/>
-                </a:solidFill>
-                <a:latin typeface="Calibri"/>
-              </a:rPr>
-              <a:t>–   Con ese criterio el semaforo es objetivo y se puede decir a la cara sin que suene arbitrario.</a:t>
-            </a:r>
-          </a:p>
-          <a:p>
-            <a:pPr>
-              <a:spcAft>
-                <a:spcPts val="800"/>
-              </a:spcAft>
-            </a:pPr>
-            <a:r>
-              <a:rPr sz="2000" b="0" i="0">
-                <a:solidFill>
-                  <a:srgbClr val="333333"/>
-                </a:solidFill>
-                <a:latin typeface="Calibri"/>
-              </a:rPr>
-              <a:t>–   Verde: modelo cerrado, roles definidos, dos procedimientos que ejecutan y una consulta optimizada con medicion.</a:t>
+              <a:t>–   Donde el contrato de operaciones solo puede escribirse sobre procedimientos que existan y funcionen, y la Clase 15, donde se sustenta.</a:t>
             </a:r>
           </a:p>
         </p:txBody>
@@ -5529,21 +6402,141 @@
                 </a:solidFill>
                 <a:latin typeface="Calibri"/>
               </a:rPr>
-              <a:t>La aritmetica del calendario, dicha en voz alta (3/3)</a:t>
-            </a:r>
-          </a:p>
-        </p:txBody>
-      </p:sp>
-      <p:sp>
-        <p:nvSpPr>
-          <p:cNvPr id="5" name="TextBox 4"/>
+              <a:t>La bateria de verificacion del avance</a:t>
+            </a:r>
+          </a:p>
+        </p:txBody>
+      </p:sp>
+      <p:sp>
+        <p:nvSpPr>
+          <p:cNvPr id="5" name="Rounded Rectangle 4"/>
+          <p:cNvSpPr/>
+          <p:nvPr/>
+        </p:nvSpPr>
+        <p:spPr>
+          <a:xfrm>
+            <a:off x="457200" y="1261872"/>
+            <a:ext cx="11277295" cy="5093208"/>
+          </a:xfrm>
+          <a:prstGeom prst="roundRect">
+            <a:avLst>
+              <a:gd name="adj" fmla="val 12000"/>
+            </a:avLst>
+          </a:prstGeom>
+          <a:solidFill>
+            <a:srgbClr val="1E2A38"/>
+          </a:solidFill>
+          <a:ln>
+            <a:noFill/>
+          </a:ln>
+        </p:spPr>
+        <p:style>
+          <a:lnRef idx="1">
+            <a:schemeClr val="accent1"/>
+          </a:lnRef>
+          <a:fillRef idx="3">
+            <a:schemeClr val="accent1"/>
+          </a:fillRef>
+          <a:effectRef idx="2">
+            <a:schemeClr val="accent1"/>
+          </a:effectRef>
+          <a:fontRef idx="minor">
+            <a:schemeClr val="lt1"/>
+          </a:fontRef>
+        </p:style>
+        <p:txBody>
+          <a:bodyPr rtlCol="0" anchor="ctr"/>
+          <a:lstStyle/>
+          <a:p>
+            <a:pPr algn="ctr"/>
+          </a:p>
+        </p:txBody>
+      </p:sp>
+      <p:sp>
+        <p:nvSpPr>
+          <p:cNvPr id="6" name="Rectangle 5"/>
+          <p:cNvSpPr/>
+          <p:nvPr/>
+        </p:nvSpPr>
+        <p:spPr>
+          <a:xfrm>
+            <a:off x="457200" y="1261872"/>
+            <a:ext cx="11277295" cy="320040"/>
+          </a:xfrm>
+          <a:prstGeom prst="rect">
+            <a:avLst/>
+          </a:prstGeom>
+          <a:solidFill>
+            <a:srgbClr val="095292"/>
+          </a:solidFill>
+          <a:ln>
+            <a:noFill/>
+          </a:ln>
+        </p:spPr>
+        <p:style>
+          <a:lnRef idx="1">
+            <a:schemeClr val="accent1"/>
+          </a:lnRef>
+          <a:fillRef idx="3">
+            <a:schemeClr val="accent1"/>
+          </a:fillRef>
+          <a:effectRef idx="2">
+            <a:schemeClr val="accent1"/>
+          </a:effectRef>
+          <a:fontRef idx="minor">
+            <a:schemeClr val="lt1"/>
+          </a:fontRef>
+        </p:style>
+        <p:txBody>
+          <a:bodyPr rtlCol="0" anchor="ctr"/>
+          <a:lstStyle/>
+          <a:p>
+            <a:pPr algn="ctr"/>
+          </a:p>
+        </p:txBody>
+      </p:sp>
+      <p:sp>
+        <p:nvSpPr>
+          <p:cNvPr id="7" name="TextBox 6"/>
           <p:cNvSpPr txBox="1"/>
           <p:nvPr/>
         </p:nvSpPr>
         <p:spPr>
           <a:xfrm>
-            <a:off x="457200" y="1170432"/>
-            <a:ext cx="11277295" cy="5230368"/>
+            <a:off x="685800" y="1307592"/>
+            <a:ext cx="10820095" cy="256032"/>
+          </a:xfrm>
+          <a:prstGeom prst="rect">
+            <a:avLst/>
+          </a:prstGeom>
+          <a:noFill/>
+        </p:spPr>
+        <p:txBody>
+          <a:bodyPr wrap="square" anchor="ctr"/>
+          <a:lstStyle/>
+          <a:p>
+            <a:r>
+              <a:rPr sz="1000" b="1" i="0">
+                <a:solidFill>
+                  <a:srgbClr val="269CCB"/>
+                </a:solidFill>
+                <a:latin typeface="Calibri"/>
+              </a:rPr>
+              <a:t>● ● ●</a:t>
+            </a:r>
+          </a:p>
+        </p:txBody>
+      </p:sp>
+      <p:sp>
+        <p:nvSpPr>
+          <p:cNvPr id="8" name="TextBox 7"/>
+          <p:cNvSpPr txBox="1"/>
+          <p:nvPr/>
+        </p:nvSpPr>
+        <p:spPr>
+          <a:xfrm>
+            <a:off x="777240" y="1719072"/>
+            <a:ext cx="10637215" cy="4453128"/>
           </a:xfrm>
           <a:prstGeom prst="rect">
             <a:avLst/>
@@ -5558,56 +6551,184 @@
           <a:p>
             <a:pPr>
               <a:spcAft>
-                <a:spcPts val="800"/>
+                <a:spcPts val="400"/>
               </a:spcAft>
             </a:pPr>
             <a:r>
-              <a:rPr sz="2000" b="0" i="0">
-                <a:solidFill>
-                  <a:srgbClr val="333333"/>
-                </a:solidFill>
-                <a:latin typeface="Calibri"/>
-              </a:rPr>
-              <a:t>–   Amarillo: modelo cerrado pero procedimientos que compilan sin pruebas, o roles que solo existen en papel.</a:t>
+              <a:rPr sz="1400" b="0" i="0">
+                <a:solidFill>
+                  <a:srgbClr val="FFFFFF"/>
+                </a:solidFill>
+                <a:latin typeface="Calibri"/>
+              </a:rPr>
+              <a:t>-- 1. estan las 8 tablas del modelo?</a:t>
             </a:r>
           </a:p>
           <a:p>
             <a:pPr>
               <a:spcAft>
-                <a:spcPts val="800"/>
+                <a:spcPts val="400"/>
               </a:spcAft>
             </a:pPr>
             <a:r>
-              <a:rPr sz="2000" b="0" i="0">
-                <a:solidFill>
-                  <a:srgbClr val="333333"/>
-                </a:solidFill>
-                <a:latin typeface="Calibri"/>
-              </a:rPr>
-              <a:t>–   Rojo: ER que aun cambia semana a semana, o DDL que no ejecuta de principio a fin en un entorno limpio.</a:t>
+              <a:rPr sz="1400" b="0" i="0">
+                <a:solidFill>
+                  <a:srgbClr val="FFFFFF"/>
+                </a:solidFill>
+                <a:latin typeface="Calibri"/>
+              </a:rPr>
+              <a:t>SELECT table_name FROM information_schema.tables</a:t>
             </a:r>
           </a:p>
           <a:p>
             <a:pPr>
               <a:spcAft>
-                <a:spcPts val="800"/>
+                <a:spcPts val="400"/>
               </a:spcAft>
             </a:pPr>
             <a:r>
-              <a:rPr sz="2000" b="0" i="0">
-                <a:solidFill>
-                  <a:srgbClr val="333333"/>
-                </a:solidFill>
-                <a:latin typeface="Calibri"/>
-              </a:rPr>
-              <a:t>–   A un estudiante en rojo no se le pide que avance; se le pide que congele el alcance hoy mismo y dedique la semana a cerrar el DDL, porque sin una base ejecutable no hay nada sobre lo que montar procedimientos, disparadores ni optimizacion.</a:t>
-            </a:r>
-          </a:p>
-        </p:txBody>
-      </p:sp>
-      <p:sp>
-        <p:nvSpPr>
-          <p:cNvPr id="6" name="TextBox 5"/>
+              <a:rPr sz="1400" b="0" i="0">
+                <a:solidFill>
+                  <a:srgbClr val="FFFFFF"/>
+                </a:solidFill>
+                <a:latin typeface="Calibri"/>
+              </a:rPr>
+              <a:t>WHERE table_schema = 'public' ORDER BY table_name;</a:t>
+            </a:r>
+          </a:p>
+          <a:p>
+            <a:pPr>
+              <a:spcAft>
+                <a:spcPts val="400"/>
+              </a:spcAft>
+            </a:pPr>
+            <a:r>
+              <a:rPr sz="1400" b="0" i="0">
+                <a:solidFill>
+                  <a:srgbClr val="FFFFFF"/>
+                </a:solidFill>
+                <a:latin typeface="Calibri"/>
+              </a:rPr>
+              <a:t/>
+            </a:r>
+          </a:p>
+          <a:p>
+            <a:pPr>
+              <a:spcAft>
+                <a:spcPts val="400"/>
+              </a:spcAft>
+            </a:pPr>
+            <a:r>
+              <a:rPr sz="1400" b="0" i="0">
+                <a:solidFill>
+                  <a:srgbClr val="FFFFFF"/>
+                </a:solidFill>
+                <a:latin typeface="Calibri"/>
+              </a:rPr>
+              <a:t>-- 2. tienen todas clave primaria?</a:t>
+            </a:r>
+          </a:p>
+          <a:p>
+            <a:pPr>
+              <a:spcAft>
+                <a:spcPts val="400"/>
+              </a:spcAft>
+            </a:pPr>
+            <a:r>
+              <a:rPr sz="1400" b="0" i="0">
+                <a:solidFill>
+                  <a:srgbClr val="FFFFFF"/>
+                </a:solidFill>
+                <a:latin typeface="Calibri"/>
+              </a:rPr>
+              <a:t>SELECT t.table_name</a:t>
+            </a:r>
+          </a:p>
+          <a:p>
+            <a:pPr>
+              <a:spcAft>
+                <a:spcPts val="400"/>
+              </a:spcAft>
+            </a:pPr>
+            <a:r>
+              <a:rPr sz="1400" b="0" i="0">
+                <a:solidFill>
+                  <a:srgbClr val="FFFFFF"/>
+                </a:solidFill>
+                <a:latin typeface="Calibri"/>
+              </a:rPr>
+              <a:t>FROM information_schema.tables t</a:t>
+            </a:r>
+          </a:p>
+          <a:p>
+            <a:pPr>
+              <a:spcAft>
+                <a:spcPts val="400"/>
+              </a:spcAft>
+            </a:pPr>
+            <a:r>
+              <a:rPr sz="1400" b="0" i="0">
+                <a:solidFill>
+                  <a:srgbClr val="FFFFFF"/>
+                </a:solidFill>
+                <a:latin typeface="Calibri"/>
+              </a:rPr>
+              <a:t>LEFT JOIN information_schema.table_constraints c</a:t>
+            </a:r>
+          </a:p>
+          <a:p>
+            <a:pPr>
+              <a:spcAft>
+                <a:spcPts val="400"/>
+              </a:spcAft>
+            </a:pPr>
+            <a:r>
+              <a:rPr sz="1400" b="0" i="0">
+                <a:solidFill>
+                  <a:srgbClr val="FFFFFF"/>
+                </a:solidFill>
+                <a:latin typeface="Calibri"/>
+              </a:rPr>
+              <a:t>       ON c.table_name = t.table_name AND c.constraint_type = 'PRIMARY KEY'</a:t>
+            </a:r>
+          </a:p>
+          <a:p>
+            <a:pPr>
+              <a:spcAft>
+                <a:spcPts val="400"/>
+              </a:spcAft>
+            </a:pPr>
+            <a:r>
+              <a:rPr sz="1400" b="0" i="0">
+                <a:solidFill>
+                  <a:srgbClr val="FFFFFF"/>
+                </a:solidFill>
+                <a:latin typeface="Calibri"/>
+              </a:rPr>
+              <a:t>WHERE t.table_schema = 'public' AND c.constraint_name IS NULL;</a:t>
+            </a:r>
+          </a:p>
+          <a:p>
+            <a:pPr>
+              <a:spcAft>
+                <a:spcPts val="400"/>
+              </a:spcAft>
+            </a:pPr>
+            <a:r>
+              <a:rPr sz="1400" b="0" i="0">
+                <a:solidFill>
+                  <a:srgbClr val="FFFFFF"/>
+                </a:solidFill>
+                <a:latin typeface="Calibri"/>
+              </a:rPr>
+              <a:t>-- cero filas = todas tienen PK</a:t>
+            </a:r>
+          </a:p>
+        </p:txBody>
+      </p:sp>
+      <p:sp>
+        <p:nvSpPr>
+          <p:cNvPr id="9" name="TextBox 8"/>
           <p:cNvSpPr txBox="1"/>
           <p:nvPr/>
         </p:nvSpPr>
@@ -5781,21 +6902,141 @@
                 </a:solidFill>
                 <a:latin typeface="Calibri"/>
               </a:rPr>
-              <a:t>Un checkpoint sin hallazgos concretos es un checkpoint desperdiciado (1/2)</a:t>
-            </a:r>
-          </a:p>
-        </p:txBody>
-      </p:sp>
-      <p:sp>
-        <p:nvSpPr>
-          <p:cNvPr id="5" name="TextBox 4"/>
+              <a:t>Integridad y objetos de negocio, contados</a:t>
+            </a:r>
+          </a:p>
+        </p:txBody>
+      </p:sp>
+      <p:sp>
+        <p:nvSpPr>
+          <p:cNvPr id="5" name="Rounded Rectangle 4"/>
+          <p:cNvSpPr/>
+          <p:nvPr/>
+        </p:nvSpPr>
+        <p:spPr>
+          <a:xfrm>
+            <a:off x="457200" y="1261872"/>
+            <a:ext cx="11277295" cy="5093208"/>
+          </a:xfrm>
+          <a:prstGeom prst="roundRect">
+            <a:avLst>
+              <a:gd name="adj" fmla="val 12000"/>
+            </a:avLst>
+          </a:prstGeom>
+          <a:solidFill>
+            <a:srgbClr val="1E2A38"/>
+          </a:solidFill>
+          <a:ln>
+            <a:noFill/>
+          </a:ln>
+        </p:spPr>
+        <p:style>
+          <a:lnRef idx="1">
+            <a:schemeClr val="accent1"/>
+          </a:lnRef>
+          <a:fillRef idx="3">
+            <a:schemeClr val="accent1"/>
+          </a:fillRef>
+          <a:effectRef idx="2">
+            <a:schemeClr val="accent1"/>
+          </a:effectRef>
+          <a:fontRef idx="minor">
+            <a:schemeClr val="lt1"/>
+          </a:fontRef>
+        </p:style>
+        <p:txBody>
+          <a:bodyPr rtlCol="0" anchor="ctr"/>
+          <a:lstStyle/>
+          <a:p>
+            <a:pPr algn="ctr"/>
+          </a:p>
+        </p:txBody>
+      </p:sp>
+      <p:sp>
+        <p:nvSpPr>
+          <p:cNvPr id="6" name="Rectangle 5"/>
+          <p:cNvSpPr/>
+          <p:nvPr/>
+        </p:nvSpPr>
+        <p:spPr>
+          <a:xfrm>
+            <a:off x="457200" y="1261872"/>
+            <a:ext cx="11277295" cy="320040"/>
+          </a:xfrm>
+          <a:prstGeom prst="rect">
+            <a:avLst/>
+          </a:prstGeom>
+          <a:solidFill>
+            <a:srgbClr val="095292"/>
+          </a:solidFill>
+          <a:ln>
+            <a:noFill/>
+          </a:ln>
+        </p:spPr>
+        <p:style>
+          <a:lnRef idx="1">
+            <a:schemeClr val="accent1"/>
+          </a:lnRef>
+          <a:fillRef idx="3">
+            <a:schemeClr val="accent1"/>
+          </a:fillRef>
+          <a:effectRef idx="2">
+            <a:schemeClr val="accent1"/>
+          </a:effectRef>
+          <a:fontRef idx="minor">
+            <a:schemeClr val="lt1"/>
+          </a:fontRef>
+        </p:style>
+        <p:txBody>
+          <a:bodyPr rtlCol="0" anchor="ctr"/>
+          <a:lstStyle/>
+          <a:p>
+            <a:pPr algn="ctr"/>
+          </a:p>
+        </p:txBody>
+      </p:sp>
+      <p:sp>
+        <p:nvSpPr>
+          <p:cNvPr id="7" name="TextBox 6"/>
           <p:cNvSpPr txBox="1"/>
           <p:nvPr/>
         </p:nvSpPr>
         <p:spPr>
           <a:xfrm>
-            <a:off x="457200" y="1170432"/>
-            <a:ext cx="11277295" cy="5230368"/>
+            <a:off x="685800" y="1307592"/>
+            <a:ext cx="10820095" cy="256032"/>
+          </a:xfrm>
+          <a:prstGeom prst="rect">
+            <a:avLst/>
+          </a:prstGeom>
+          <a:noFill/>
+        </p:spPr>
+        <p:txBody>
+          <a:bodyPr wrap="square" anchor="ctr"/>
+          <a:lstStyle/>
+          <a:p>
+            <a:r>
+              <a:rPr sz="1000" b="1" i="0">
+                <a:solidFill>
+                  <a:srgbClr val="269CCB"/>
+                </a:solidFill>
+                <a:latin typeface="Calibri"/>
+              </a:rPr>
+              <a:t>● ● ●</a:t>
+            </a:r>
+          </a:p>
+        </p:txBody>
+      </p:sp>
+      <p:sp>
+        <p:nvSpPr>
+          <p:cNvPr id="8" name="TextBox 7"/>
+          <p:cNvSpPr txBox="1"/>
+          <p:nvPr/>
+        </p:nvSpPr>
+        <p:spPr>
+          <a:xfrm>
+            <a:off x="777240" y="1719072"/>
+            <a:ext cx="10637215" cy="4453128"/>
           </a:xfrm>
           <a:prstGeom prst="rect">
             <a:avLst/>
@@ -5810,88 +7051,232 @@
           <a:p>
             <a:pPr>
               <a:spcAft>
-                <a:spcPts val="800"/>
+                <a:spcPts val="400"/>
               </a:spcAft>
             </a:pPr>
             <a:r>
-              <a:rPr sz="2000" b="0" i="0">
-                <a:solidFill>
-                  <a:srgbClr val="333333"/>
-                </a:solidFill>
-                <a:latin typeface="Calibri"/>
-              </a:rPr>
-              <a:t>–   Un checkpoint sin hallazgos concretos es un checkpoint desperdiciado, y esa afirmacion merece justificacion porque suena severa.</a:t>
+              <a:rPr sz="1400" b="0" i="0">
+                <a:solidFill>
+                  <a:srgbClr val="FFFFFF"/>
+                </a:solidFill>
+                <a:latin typeface="Calibri"/>
+              </a:rPr>
+              <a:t>-- 3. las claves foraneas declaradas</a:t>
             </a:r>
           </a:p>
           <a:p>
             <a:pPr>
               <a:spcAft>
-                <a:spcPts val="800"/>
+                <a:spcPts val="400"/>
               </a:spcAft>
             </a:pPr>
             <a:r>
-              <a:rPr sz="2000" b="0" i="0">
-                <a:solidFill>
-                  <a:srgbClr val="333333"/>
-                </a:solidFill>
-                <a:latin typeface="Calibri"/>
-              </a:rPr>
-              <a:t>–   El unico valor de un punto de control intermedio es que todavia existe tiempo para corregir, y ese valor se realiza solo si de la sesion sale una lista escrita de cosas por corregir.</a:t>
+              <a:rPr sz="1400" b="0" i="0">
+                <a:solidFill>
+                  <a:srgbClr val="FFFFFF"/>
+                </a:solidFill>
+                <a:latin typeface="Calibri"/>
+              </a:rPr>
+              <a:t>SELECT tc.table_name, kcu.column_name, ccu.table_name AS referencia</a:t>
             </a:r>
           </a:p>
           <a:p>
             <a:pPr>
               <a:spcAft>
-                <a:spcPts val="800"/>
+                <a:spcPts val="400"/>
               </a:spcAft>
             </a:pPr>
             <a:r>
-              <a:rPr sz="2000" b="0" i="0">
-                <a:solidFill>
-                  <a:srgbClr val="333333"/>
-                </a:solidFill>
-                <a:latin typeface="Calibri"/>
-              </a:rPr>
-              <a:t>–   Cuando el docente dice «todo bien, sigan asi», el estudiante interpreta legitimamente que su trabajo esta aprobado, deja de revisarlo, y el defecto reaparece en la entrega final cuando ya no hay clases para arreglarlo: es un costo diferido, no un ahorro.</a:t>
+              <a:rPr sz="1400" b="0" i="0">
+                <a:solidFill>
+                  <a:srgbClr val="FFFFFF"/>
+                </a:solidFill>
+                <a:latin typeface="Calibri"/>
+              </a:rPr>
+              <a:t>FROM information_schema.table_constraints tc</a:t>
             </a:r>
           </a:p>
           <a:p>
             <a:pPr>
               <a:spcAft>
-                <a:spcPts val="800"/>
+                <a:spcPts val="400"/>
               </a:spcAft>
             </a:pPr>
             <a:r>
-              <a:rPr sz="2000" b="0" i="0">
-                <a:solidFill>
-                  <a:srgbClr val="333333"/>
-                </a:solidFill>
-                <a:latin typeface="Calibri"/>
-              </a:rPr>
-              <a:t>–   La primera: «esto tiene nota?».</a:t>
+              <a:rPr sz="1400" b="0" i="0">
+                <a:solidFill>
+                  <a:srgbClr val="FFFFFF"/>
+                </a:solidFill>
+                <a:latin typeface="Calibri"/>
+              </a:rPr>
+              <a:t>JOIN information_schema.key_column_usage kcu</a:t>
             </a:r>
           </a:p>
           <a:p>
             <a:pPr>
               <a:spcAft>
-                <a:spcPts val="800"/>
+                <a:spcPts val="400"/>
               </a:spcAft>
             </a:pPr>
             <a:r>
-              <a:rPr sz="2000" b="0" i="0">
-                <a:solidFill>
-                  <a:srgbClr val="333333"/>
-                </a:solidFill>
-                <a:latin typeface="Calibri"/>
-              </a:rPr>
-              <a:t>–   La segunda: «si quien me audita encuentra fallas, me baja la nota?».</a:t>
-            </a:r>
-          </a:p>
-        </p:txBody>
-      </p:sp>
-      <p:sp>
-        <p:nvSpPr>
-          <p:cNvPr id="6" name="TextBox 5"/>
+              <a:rPr sz="1400" b="0" i="0">
+                <a:solidFill>
+                  <a:srgbClr val="FFFFFF"/>
+                </a:solidFill>
+                <a:latin typeface="Calibri"/>
+              </a:rPr>
+              <a:t>     ON kcu.constraint_name = tc.constraint_name</a:t>
+            </a:r>
+          </a:p>
+          <a:p>
+            <a:pPr>
+              <a:spcAft>
+                <a:spcPts val="400"/>
+              </a:spcAft>
+            </a:pPr>
+            <a:r>
+              <a:rPr sz="1400" b="0" i="0">
+                <a:solidFill>
+                  <a:srgbClr val="FFFFFF"/>
+                </a:solidFill>
+                <a:latin typeface="Calibri"/>
+              </a:rPr>
+              <a:t>JOIN information_schema.constraint_column_usage ccu</a:t>
+            </a:r>
+          </a:p>
+          <a:p>
+            <a:pPr>
+              <a:spcAft>
+                <a:spcPts val="400"/>
+              </a:spcAft>
+            </a:pPr>
+            <a:r>
+              <a:rPr sz="1400" b="0" i="0">
+                <a:solidFill>
+                  <a:srgbClr val="FFFFFF"/>
+                </a:solidFill>
+                <a:latin typeface="Calibri"/>
+              </a:rPr>
+              <a:t>     ON ccu.constraint_name = tc.constraint_name</a:t>
+            </a:r>
+          </a:p>
+          <a:p>
+            <a:pPr>
+              <a:spcAft>
+                <a:spcPts val="400"/>
+              </a:spcAft>
+            </a:pPr>
+            <a:r>
+              <a:rPr sz="1400" b="0" i="0">
+                <a:solidFill>
+                  <a:srgbClr val="FFFFFF"/>
+                </a:solidFill>
+                <a:latin typeface="Calibri"/>
+              </a:rPr>
+              <a:t>WHERE tc.constraint_type = 'FOREIGN KEY'</a:t>
+            </a:r>
+          </a:p>
+          <a:p>
+            <a:pPr>
+              <a:spcAft>
+                <a:spcPts val="400"/>
+              </a:spcAft>
+            </a:pPr>
+            <a:r>
+              <a:rPr sz="1400" b="0" i="0">
+                <a:solidFill>
+                  <a:srgbClr val="FFFFFF"/>
+                </a:solidFill>
+                <a:latin typeface="Calibri"/>
+              </a:rPr>
+              <a:t>ORDER BY tc.table_name;</a:t>
+            </a:r>
+          </a:p>
+          <a:p>
+            <a:pPr>
+              <a:spcAft>
+                <a:spcPts val="400"/>
+              </a:spcAft>
+            </a:pPr>
+            <a:r>
+              <a:rPr sz="1400" b="0" i="0">
+                <a:solidFill>
+                  <a:srgbClr val="FFFFFF"/>
+                </a:solidFill>
+                <a:latin typeface="Calibri"/>
+              </a:rPr>
+              <a:t/>
+            </a:r>
+          </a:p>
+          <a:p>
+            <a:pPr>
+              <a:spcAft>
+                <a:spcPts val="400"/>
+              </a:spcAft>
+            </a:pPr>
+            <a:r>
+              <a:rPr sz="1400" b="0" i="0">
+                <a:solidFill>
+                  <a:srgbClr val="FFFFFF"/>
+                </a:solidFill>
+                <a:latin typeface="Calibri"/>
+              </a:rPr>
+              <a:t>-- 4. procedimientos, funciones y triggers que existen de verdad</a:t>
+            </a:r>
+          </a:p>
+          <a:p>
+            <a:pPr>
+              <a:spcAft>
+                <a:spcPts val="400"/>
+              </a:spcAft>
+            </a:pPr>
+            <a:r>
+              <a:rPr sz="1400" b="0" i="0">
+                <a:solidFill>
+                  <a:srgbClr val="FFFFFF"/>
+                </a:solidFill>
+                <a:latin typeface="Calibri"/>
+              </a:rPr>
+              <a:t>SELECT routine_name, routine_type FROM information_schema.routines</a:t>
+            </a:r>
+          </a:p>
+          <a:p>
+            <a:pPr>
+              <a:spcAft>
+                <a:spcPts val="400"/>
+              </a:spcAft>
+            </a:pPr>
+            <a:r>
+              <a:rPr sz="1400" b="0" i="0">
+                <a:solidFill>
+                  <a:srgbClr val="FFFFFF"/>
+                </a:solidFill>
+                <a:latin typeface="Calibri"/>
+              </a:rPr>
+              <a:t>WHERE routine_schema = 'public' ORDER BY routine_name;</a:t>
+            </a:r>
+          </a:p>
+          <a:p>
+            <a:pPr>
+              <a:spcAft>
+                <a:spcPts val="400"/>
+              </a:spcAft>
+            </a:pPr>
+            <a:r>
+              <a:rPr sz="1400" b="0" i="0">
+                <a:solidFill>
+                  <a:srgbClr val="FFFFFF"/>
+                </a:solidFill>
+                <a:latin typeface="Calibri"/>
+              </a:rPr>
+              <a:t>SELECT trigger_name, event_object_table FROM information_schema.triggers;</a:t>
+            </a:r>
+          </a:p>
+        </p:txBody>
+      </p:sp>
+      <p:sp>
+        <p:nvSpPr>
+          <p:cNvPr id="9" name="TextBox 8"/>
           <p:cNvSpPr txBox="1"/>
           <p:nvPr/>
         </p:nvSpPr>
@@ -6065,7 +7450,7 @@
                 </a:solidFill>
                 <a:latin typeface="Calibri"/>
               </a:rPr>
-              <a:t>Un checkpoint sin hallazgos concretos es un checkpoint desperdiciado (2/2)</a:t>
+              <a:t>Demo del dia</a:t>
             </a:r>
           </a:p>
         </p:txBody>
@@ -6104,7 +7489,25 @@
                 </a:solidFill>
                 <a:latin typeface="Calibri"/>
               </a:rPr>
-              <a:t>–   Y revisar el trabajo de otro tiene un beneficio propio bien documentado: los defectos ajenos se ven mucho mas rapido que los propios, y casi siempre quien audita vuelve a su carpeta y arregla en silencio el mismo problema que acaba de senalar.</a:t>
+              <a:t>–   </a:t>
+            </a:r>
+            <a:r>
+              <a:rPr sz="2000" b="1" i="0">
+                <a:solidFill>
+                  <a:srgbClr val="333333"/>
+                </a:solidFill>
+                <a:latin typeface="Calibri"/>
+              </a:rPr>
+              <a:t>Herramienta:</a:t>
+            </a:r>
+            <a:r>
+              <a:rPr sz="2000" b="0" i="0">
+                <a:solidFill>
+                  <a:srgbClr val="333333"/>
+                </a:solidFill>
+                <a:latin typeface="Calibri"/>
+              </a:rPr>
+              <a:t> Live SQL / DB Fiddle + draw.io + la plataforma del curso</a:t>
             </a:r>
           </a:p>
           <a:p>
@@ -6120,7 +7523,25 @@
                 </a:solidFill>
                 <a:latin typeface="Calibri"/>
               </a:rPr>
-              <a:t>–   Todo esto se apoya en lo hecho hasta la Clase 10 (el informe de escenarios de concurrencia es una de las evidencias que hoy se audita) y alimenta directamente la Clase 12</a:t>
+              <a:t>–   </a:t>
+            </a:r>
+            <a:r>
+              <a:rPr sz="2000" b="1" i="0">
+                <a:solidFill>
+                  <a:srgbClr val="333333"/>
+                </a:solidFill>
+                <a:latin typeface="Calibri"/>
+              </a:rPr>
+              <a:t>Demo:</a:t>
+            </a:r>
+            <a:r>
+              <a:rPr sz="2000" b="0" i="0">
+                <a:solidFill>
+                  <a:srgbClr val="333333"/>
+                </a:solidFill>
+                <a:latin typeface="Calibri"/>
+              </a:rPr>
+              <a:t> Recorrido de checklist + ejemplo demo de 3 min.</a:t>
             </a:r>
           </a:p>
           <a:p>
@@ -6136,7 +7557,23 @@
                 </a:solidFill>
                 <a:latin typeface="Calibri"/>
               </a:rPr>
-              <a:t>–   Donde el contrato de operaciones solo puede escribirse sobre procedimientos que existan y funcionen, y la Clase 15, donde se sustenta.</a:t>
+              <a:t>–   Sigan el mismo dominio VetCare (no inventen otro caso).</a:t>
+            </a:r>
+          </a:p>
+          <a:p>
+            <a:pPr>
+              <a:spcAft>
+                <a:spcPts val="800"/>
+              </a:spcAft>
+            </a:pPr>
+            <a:r>
+              <a:rPr sz="2000" b="0" i="0">
+                <a:solidFill>
+                  <a:srgbClr val="333333"/>
+                </a:solidFill>
+                <a:latin typeface="Calibri"/>
+              </a:rPr>
+              <a:t>–   Al final de la demo: dejar enlace/script compartible al grupo.</a:t>
             </a:r>
           </a:p>
         </p:txBody>
@@ -6317,7 +7754,7 @@
                 </a:solidFill>
                 <a:latin typeface="Calibri"/>
               </a:rPr>
-              <a:t>Encuadre de hoy · Objetivo PI</a:t>
+              <a:t>Encuadre de hoy · Tema y objetivo</a:t>
             </a:r>
           </a:p>
         </p:txBody>
@@ -6365,7 +7802,7 @@
                 </a:solidFill>
                 <a:latin typeface="Calibri"/>
               </a:rPr>
-              <a:t>Hoy avanzamos el PI en:</a:t>
+              <a:t>Tema de hoy:</a:t>
             </a:r>
             <a:r>
               <a:rPr sz="2000" b="0" i="0">
@@ -6374,7 +7811,7 @@
                 </a:solidFill>
                 <a:latin typeface="Calibri"/>
               </a:rPr>
-              <a:t> Demo parcial + checklist de avance (hito formal PI)</a:t>
+              <a:t> Avance PI · VetCare DB</a:t>
             </a:r>
           </a:p>
           <a:p>
@@ -6419,15 +7856,6 @@
               </a:rPr>
               <a:t>120 min</a:t>
             </a:r>
-            <a:r>
-              <a:rPr sz="2000" b="0" i="0">
-                <a:solidFill>
-                  <a:srgbClr val="333333"/>
-                </a:solidFill>
-                <a:latin typeface="Calibri"/>
-              </a:rPr>
-              <a:t> · Teoría breve · Taller PI</a:t>
-            </a:r>
           </a:p>
           <a:p>
             <a:pPr>
@@ -6442,25 +7870,7 @@
                 </a:solidFill>
                 <a:latin typeface="Calibri"/>
               </a:rPr>
-              <a:t>–   </a:t>
-            </a:r>
-            <a:r>
-              <a:rPr sz="2000" b="1" i="0">
-                <a:solidFill>
-                  <a:srgbClr val="333333"/>
-                </a:solidFill>
-                <a:latin typeface="Calibri"/>
-              </a:rPr>
-              <a:t>Entregable de hoy:</a:t>
-            </a:r>
-            <a:r>
-              <a:rPr sz="2000" b="0" i="0">
-                <a:solidFill>
-                  <a:srgbClr val="333333"/>
-                </a:solidFill>
-                <a:latin typeface="Calibri"/>
-              </a:rPr>
-              <a:t> Checklist firmada + enlace/ZIP avance (DDL+procs+ER)</a:t>
+              <a:t>–   Gratis + navegador · free tier · sin software de pago obligatorio.</a:t>
             </a:r>
           </a:p>
           <a:p>
@@ -6476,7 +7886,7 @@
                 </a:solidFill>
                 <a:latin typeface="Calibri"/>
               </a:rPr>
-              <a:t>–   Gratis + navegador · free tier · sin software de pago obligatorio.</a:t>
+              <a:t>–   Recorrido: teoría del tema, una lámina por concepto, y demo del docente sobre VetCare DB.</a:t>
             </a:r>
           </a:p>
           <a:p>
@@ -6492,23 +7902,7 @@
                 </a:solidFill>
                 <a:latin typeface="Calibri"/>
               </a:rPr>
-              <a:t>–   La teoría no es un tema aislado: alimenta evidencias de la rúbrica del PI.</a:t>
-            </a:r>
-          </a:p>
-          <a:p>
-            <a:pPr>
-              <a:spcAft>
-                <a:spcPts val="800"/>
-              </a:spcAft>
-            </a:pPr>
-            <a:r>
-              <a:rPr sz="2000" b="0" i="0">
-                <a:solidFill>
-                  <a:srgbClr val="333333"/>
-                </a:solidFill>
-                <a:latin typeface="Calibri"/>
-              </a:rPr>
-              <a:t>–   Al salir: avance concreto en su paquete VetCare.</a:t>
+              <a:t>–   Cada lámina se sostiene sola: sirve para repasar aunque hayas faltado.</a:t>
             </a:r>
           </a:p>
         </p:txBody>
@@ -6583,7 +7977,7 @@
         <p:spPr>
           <a:xfrm>
             <a:off x="0" y="0"/>
-            <a:ext cx="12191695" cy="960120"/>
+            <a:ext cx="12191695" cy="1170432"/>
           </a:xfrm>
           <a:prstGeom prst="rect">
             <a:avLst/>
@@ -6625,7 +8019,7 @@
         </p:nvSpPr>
         <p:spPr>
           <a:xfrm>
-            <a:off x="0" y="960120"/>
+            <a:off x="0" y="1170432"/>
             <a:ext cx="12191695" cy="41148"/>
           </a:xfrm>
           <a:prstGeom prst="rect">
@@ -6669,7 +8063,7 @@
         <p:spPr>
           <a:xfrm>
             <a:off x="457200" y="164592"/>
-            <a:ext cx="11277295" cy="502920"/>
+            <a:ext cx="11277295" cy="384048"/>
           </a:xfrm>
           <a:prstGeom prst="rect">
             <a:avLst/>
@@ -6689,21 +8083,55 @@
                 </a:solidFill>
                 <a:latin typeface="Calibri"/>
               </a:rPr>
-              <a:t>La bateria de verificacion del avance</a:t>
-            </a:r>
-          </a:p>
-        </p:txBody>
-      </p:sp>
-      <p:sp>
-        <p:nvSpPr>
-          <p:cNvPr id="5" name="Rounded Rectangle 4"/>
+              <a:t>Del boceto a la plataforma del curso (diagrama)</a:t>
+            </a:r>
+          </a:p>
+        </p:txBody>
+      </p:sp>
+      <p:sp>
+        <p:nvSpPr>
+          <p:cNvPr id="5" name="TextBox 4"/>
+          <p:cNvSpPr txBox="1"/>
+          <p:nvPr/>
+        </p:nvSpPr>
+        <p:spPr>
+          <a:xfrm>
+            <a:off x="457200" y="566928"/>
+            <a:ext cx="11277295" cy="411480"/>
+          </a:xfrm>
+          <a:prstGeom prst="rect">
+            <a:avLst/>
+          </a:prstGeom>
+          <a:noFill/>
+        </p:spPr>
+        <p:txBody>
+          <a:bodyPr wrap="square">
+            <a:spAutoFit/>
+          </a:bodyPr>
+          <a:lstStyle/>
+          <a:p>
+            <a:r>
+              <a:rPr sz="1400" b="0" i="0">
+                <a:solidFill>
+                  <a:srgbClr val="B8D8EE"/>
+                </a:solidFill>
+                <a:latin typeface="Calibri"/>
+              </a:rPr>
+              <a:t>El diagrama se entrega como codigo Mermaid dentro de la plataforma del curso, no como imagen</a:t>
+            </a:r>
+          </a:p>
+        </p:txBody>
+      </p:sp>
+      <p:sp>
+        <p:nvSpPr>
+          <p:cNvPr id="6" name="Rounded Rectangle 5"/>
           <p:cNvSpPr/>
           <p:nvPr/>
         </p:nvSpPr>
         <p:spPr>
           <a:xfrm>
-            <a:off x="457200" y="1261872"/>
-            <a:ext cx="11277295" cy="5093208"/>
+            <a:off x="457200" y="1659636"/>
+            <a:ext cx="11277295" cy="1051560"/>
           </a:xfrm>
           <a:prstGeom prst="roundRect">
             <a:avLst>
@@ -6711,7 +8139,7 @@
             </a:avLst>
           </a:prstGeom>
           <a:solidFill>
-            <a:srgbClr val="1E2A38"/>
+            <a:srgbClr val="F2F2F2"/>
           </a:solidFill>
           <a:ln>
             <a:noFill/>
@@ -6741,17 +8169,19 @@
       </p:sp>
       <p:sp>
         <p:nvSpPr>
-          <p:cNvPr id="6" name="Rectangle 5"/>
+          <p:cNvPr id="7" name="Rounded Rectangle 6"/>
           <p:cNvSpPr/>
           <p:nvPr/>
         </p:nvSpPr>
         <p:spPr>
           <a:xfrm>
-            <a:off x="457200" y="1261872"/>
-            <a:ext cx="11277295" cy="320040"/>
-          </a:xfrm>
-          <a:prstGeom prst="rect">
-            <a:avLst/>
+            <a:off x="594360" y="1965960"/>
+            <a:ext cx="438912" cy="438912"/>
+          </a:xfrm>
+          <a:prstGeom prst="roundRect">
+            <a:avLst>
+              <a:gd name="adj" fmla="val 12000"/>
+            </a:avLst>
           </a:prstGeom>
           <a:solidFill>
             <a:srgbClr val="095292"/>
@@ -6784,46 +8214,14 @@
       </p:sp>
       <p:sp>
         <p:nvSpPr>
-          <p:cNvPr id="7" name="TextBox 6"/>
-          <p:cNvSpPr txBox="1"/>
-          <p:nvPr/>
-        </p:nvSpPr>
-        <p:spPr>
-          <a:xfrm>
-            <a:off x="685800" y="1307592"/>
-            <a:ext cx="10820095" cy="256032"/>
-          </a:xfrm>
-          <a:prstGeom prst="rect">
-            <a:avLst/>
-          </a:prstGeom>
-          <a:noFill/>
-        </p:spPr>
-        <p:txBody>
-          <a:bodyPr wrap="square" anchor="ctr"/>
-          <a:lstStyle/>
-          <a:p>
-            <a:r>
-              <a:rPr sz="1000" b="1" i="0">
-                <a:solidFill>
-                  <a:srgbClr val="269CCB"/>
-                </a:solidFill>
-                <a:latin typeface="Calibri"/>
-              </a:rPr>
-              <a:t>● ● ●</a:t>
-            </a:r>
-          </a:p>
-        </p:txBody>
-      </p:sp>
-      <p:sp>
-        <p:nvSpPr>
           <p:cNvPr id="8" name="TextBox 7"/>
           <p:cNvSpPr txBox="1"/>
           <p:nvPr/>
         </p:nvSpPr>
         <p:spPr>
           <a:xfrm>
-            <a:off x="777240" y="1719072"/>
-            <a:ext cx="10637215" cy="4453128"/>
+            <a:off x="594360" y="1965960"/>
+            <a:ext cx="438912" cy="438912"/>
           </a:xfrm>
           <a:prstGeom prst="rect">
             <a:avLst/>
@@ -6831,191 +8229,586 @@
           <a:noFill/>
         </p:spPr>
         <p:txBody>
-          <a:bodyPr wrap="square">
-            <a:spAutoFit/>
-          </a:bodyPr>
-          <a:lstStyle/>
+          <a:bodyPr wrap="square" anchor="ctr"/>
+          <a:lstStyle/>
+          <a:p>
+            <a:pPr algn="ctr"/>
+            <a:r>
+              <a:rPr sz="1600" b="1" i="0">
+                <a:solidFill>
+                  <a:srgbClr val="FFFFFF"/>
+                </a:solidFill>
+                <a:latin typeface="Calibri"/>
+              </a:rPr>
+              <a:t>1</a:t>
+            </a:r>
+          </a:p>
+        </p:txBody>
+      </p:sp>
+      <p:sp>
+        <p:nvSpPr>
+          <p:cNvPr id="9" name="TextBox 8"/>
+          <p:cNvSpPr txBox="1"/>
+          <p:nvPr/>
+        </p:nvSpPr>
+        <p:spPr>
+          <a:xfrm>
+            <a:off x="1188720" y="1751076"/>
+            <a:ext cx="10271455" cy="886968"/>
+          </a:xfrm>
+          <a:prstGeom prst="rect">
+            <a:avLst/>
+          </a:prstGeom>
+          <a:noFill/>
+        </p:spPr>
+        <p:txBody>
+          <a:bodyPr wrap="square" anchor="ctr"/>
+          <a:lstStyle/>
+          <a:p>
+            <a:r>
+              <a:rPr sz="1500" b="1" i="0">
+                <a:solidFill>
+                  <a:srgbClr val="095292"/>
+                </a:solidFill>
+                <a:latin typeface="Calibri"/>
+              </a:rPr>
+              <a:t>Disena visual</a:t>
+            </a:r>
+          </a:p>
           <a:p>
             <a:pPr>
-              <a:spcAft>
-                <a:spcPts val="400"/>
-              </a:spcAft>
+              <a:spcBef>
+                <a:spcPts val="200"/>
+              </a:spcBef>
             </a:pPr>
             <a:r>
-              <a:rPr sz="1400" b="0" i="0">
+              <a:rPr sz="1300" b="0" i="0">
+                <a:solidFill>
+                  <a:srgbClr val="333333"/>
+                </a:solidFill>
+                <a:latin typeface="Calibri"/>
+              </a:rPr>
+              <a:t>Dibuja el diagrama como quieras en Excalidraw o draw.io: es mas rapido arrastrar cajas que escribir codigo, y ahi es donde piensas el modelo.</a:t>
+            </a:r>
+          </a:p>
+        </p:txBody>
+      </p:sp>
+      <p:sp>
+        <p:nvSpPr>
+          <p:cNvPr id="10" name="Rounded Rectangle 9"/>
+          <p:cNvSpPr/>
+          <p:nvPr/>
+        </p:nvSpPr>
+        <p:spPr>
+          <a:xfrm>
+            <a:off x="457200" y="2802636"/>
+            <a:ext cx="11277295" cy="1051560"/>
+          </a:xfrm>
+          <a:prstGeom prst="roundRect">
+            <a:avLst>
+              <a:gd name="adj" fmla="val 12000"/>
+            </a:avLst>
+          </a:prstGeom>
+          <a:solidFill>
+            <a:srgbClr val="E8F4FA"/>
+          </a:solidFill>
+          <a:ln>
+            <a:noFill/>
+          </a:ln>
+        </p:spPr>
+        <p:style>
+          <a:lnRef idx="1">
+            <a:schemeClr val="accent1"/>
+          </a:lnRef>
+          <a:fillRef idx="3">
+            <a:schemeClr val="accent1"/>
+          </a:fillRef>
+          <a:effectRef idx="2">
+            <a:schemeClr val="accent1"/>
+          </a:effectRef>
+          <a:fontRef idx="minor">
+            <a:schemeClr val="lt1"/>
+          </a:fontRef>
+        </p:style>
+        <p:txBody>
+          <a:bodyPr rtlCol="0" anchor="ctr"/>
+          <a:lstStyle/>
+          <a:p>
+            <a:pPr algn="ctr"/>
+          </a:p>
+        </p:txBody>
+      </p:sp>
+      <p:sp>
+        <p:nvSpPr>
+          <p:cNvPr id="11" name="Rounded Rectangle 10"/>
+          <p:cNvSpPr/>
+          <p:nvPr/>
+        </p:nvSpPr>
+        <p:spPr>
+          <a:xfrm>
+            <a:off x="594360" y="3108960"/>
+            <a:ext cx="438912" cy="438912"/>
+          </a:xfrm>
+          <a:prstGeom prst="roundRect">
+            <a:avLst>
+              <a:gd name="adj" fmla="val 12000"/>
+            </a:avLst>
+          </a:prstGeom>
+          <a:solidFill>
+            <a:srgbClr val="095292"/>
+          </a:solidFill>
+          <a:ln>
+            <a:noFill/>
+          </a:ln>
+        </p:spPr>
+        <p:style>
+          <a:lnRef idx="1">
+            <a:schemeClr val="accent1"/>
+          </a:lnRef>
+          <a:fillRef idx="3">
+            <a:schemeClr val="accent1"/>
+          </a:fillRef>
+          <a:effectRef idx="2">
+            <a:schemeClr val="accent1"/>
+          </a:effectRef>
+          <a:fontRef idx="minor">
+            <a:schemeClr val="lt1"/>
+          </a:fontRef>
+        </p:style>
+        <p:txBody>
+          <a:bodyPr rtlCol="0" anchor="ctr"/>
+          <a:lstStyle/>
+          <a:p>
+            <a:pPr algn="ctr"/>
+          </a:p>
+        </p:txBody>
+      </p:sp>
+      <p:sp>
+        <p:nvSpPr>
+          <p:cNvPr id="12" name="TextBox 11"/>
+          <p:cNvSpPr txBox="1"/>
+          <p:nvPr/>
+        </p:nvSpPr>
+        <p:spPr>
+          <a:xfrm>
+            <a:off x="594360" y="3108960"/>
+            <a:ext cx="438912" cy="438912"/>
+          </a:xfrm>
+          <a:prstGeom prst="rect">
+            <a:avLst/>
+          </a:prstGeom>
+          <a:noFill/>
+        </p:spPr>
+        <p:txBody>
+          <a:bodyPr wrap="square" anchor="ctr"/>
+          <a:lstStyle/>
+          <a:p>
+            <a:pPr algn="ctr"/>
+            <a:r>
+              <a:rPr sz="1600" b="1" i="0">
                 <a:solidFill>
                   <a:srgbClr val="FFFFFF"/>
                 </a:solidFill>
                 <a:latin typeface="Calibri"/>
               </a:rPr>
-              <a:t>-- 1. estan las 8 tablas del modelo?</a:t>
+              <a:t>2</a:t>
+            </a:r>
+          </a:p>
+        </p:txBody>
+      </p:sp>
+      <p:sp>
+        <p:nvSpPr>
+          <p:cNvPr id="13" name="TextBox 12"/>
+          <p:cNvSpPr txBox="1"/>
+          <p:nvPr/>
+        </p:nvSpPr>
+        <p:spPr>
+          <a:xfrm>
+            <a:off x="1188720" y="2894076"/>
+            <a:ext cx="10271455" cy="886968"/>
+          </a:xfrm>
+          <a:prstGeom prst="rect">
+            <a:avLst/>
+          </a:prstGeom>
+          <a:noFill/>
+        </p:spPr>
+        <p:txBody>
+          <a:bodyPr wrap="square" anchor="ctr"/>
+          <a:lstStyle/>
+          <a:p>
+            <a:r>
+              <a:rPr sz="1500" b="1" i="0">
+                <a:solidFill>
+                  <a:srgbClr val="095292"/>
+                </a:solidFill>
+                <a:latin typeface="Calibri"/>
+              </a:rPr>
+              <a:t>Traduce con IA</a:t>
             </a:r>
           </a:p>
           <a:p>
             <a:pPr>
-              <a:spcAft>
-                <a:spcPts val="400"/>
-              </a:spcAft>
+              <a:spcBef>
+                <a:spcPts val="200"/>
+              </a:spcBef>
             </a:pPr>
             <a:r>
-              <a:rPr sz="1400" b="0" i="0">
+              <a:rPr sz="1300" b="0" i="0">
+                <a:solidFill>
+                  <a:srgbClr val="333333"/>
+                </a:solidFill>
+                <a:latin typeface="Calibri"/>
+              </a:rPr>
+              <a:t>Copia o describe tu boceto a una IA y pidele el codigo Mermaid: «convierte este diagrama a Mermaid usando erDiagram». Revisa el resultado: la IA acierta la sintaxis, no tu modelo.</a:t>
+            </a:r>
+          </a:p>
+        </p:txBody>
+      </p:sp>
+      <p:sp>
+        <p:nvSpPr>
+          <p:cNvPr id="14" name="Rounded Rectangle 13"/>
+          <p:cNvSpPr/>
+          <p:nvPr/>
+        </p:nvSpPr>
+        <p:spPr>
+          <a:xfrm>
+            <a:off x="457200" y="3945636"/>
+            <a:ext cx="11277295" cy="1051560"/>
+          </a:xfrm>
+          <a:prstGeom prst="roundRect">
+            <a:avLst>
+              <a:gd name="adj" fmla="val 12000"/>
+            </a:avLst>
+          </a:prstGeom>
+          <a:solidFill>
+            <a:srgbClr val="F2F2F2"/>
+          </a:solidFill>
+          <a:ln>
+            <a:noFill/>
+          </a:ln>
+        </p:spPr>
+        <p:style>
+          <a:lnRef idx="1">
+            <a:schemeClr val="accent1"/>
+          </a:lnRef>
+          <a:fillRef idx="3">
+            <a:schemeClr val="accent1"/>
+          </a:fillRef>
+          <a:effectRef idx="2">
+            <a:schemeClr val="accent1"/>
+          </a:effectRef>
+          <a:fontRef idx="minor">
+            <a:schemeClr val="lt1"/>
+          </a:fontRef>
+        </p:style>
+        <p:txBody>
+          <a:bodyPr rtlCol="0" anchor="ctr"/>
+          <a:lstStyle/>
+          <a:p>
+            <a:pPr algn="ctr"/>
+          </a:p>
+        </p:txBody>
+      </p:sp>
+      <p:sp>
+        <p:nvSpPr>
+          <p:cNvPr id="15" name="Rounded Rectangle 14"/>
+          <p:cNvSpPr/>
+          <p:nvPr/>
+        </p:nvSpPr>
+        <p:spPr>
+          <a:xfrm>
+            <a:off x="594360" y="4251960"/>
+            <a:ext cx="438912" cy="438912"/>
+          </a:xfrm>
+          <a:prstGeom prst="roundRect">
+            <a:avLst>
+              <a:gd name="adj" fmla="val 12000"/>
+            </a:avLst>
+          </a:prstGeom>
+          <a:solidFill>
+            <a:srgbClr val="095292"/>
+          </a:solidFill>
+          <a:ln>
+            <a:noFill/>
+          </a:ln>
+        </p:spPr>
+        <p:style>
+          <a:lnRef idx="1">
+            <a:schemeClr val="accent1"/>
+          </a:lnRef>
+          <a:fillRef idx="3">
+            <a:schemeClr val="accent1"/>
+          </a:fillRef>
+          <a:effectRef idx="2">
+            <a:schemeClr val="accent1"/>
+          </a:effectRef>
+          <a:fontRef idx="minor">
+            <a:schemeClr val="lt1"/>
+          </a:fontRef>
+        </p:style>
+        <p:txBody>
+          <a:bodyPr rtlCol="0" anchor="ctr"/>
+          <a:lstStyle/>
+          <a:p>
+            <a:pPr algn="ctr"/>
+          </a:p>
+        </p:txBody>
+      </p:sp>
+      <p:sp>
+        <p:nvSpPr>
+          <p:cNvPr id="16" name="TextBox 15"/>
+          <p:cNvSpPr txBox="1"/>
+          <p:nvPr/>
+        </p:nvSpPr>
+        <p:spPr>
+          <a:xfrm>
+            <a:off x="594360" y="4251960"/>
+            <a:ext cx="438912" cy="438912"/>
+          </a:xfrm>
+          <a:prstGeom prst="rect">
+            <a:avLst/>
+          </a:prstGeom>
+          <a:noFill/>
+        </p:spPr>
+        <p:txBody>
+          <a:bodyPr wrap="square" anchor="ctr"/>
+          <a:lstStyle/>
+          <a:p>
+            <a:pPr algn="ctr"/>
+            <a:r>
+              <a:rPr sz="1600" b="1" i="0">
                 <a:solidFill>
                   <a:srgbClr val="FFFFFF"/>
                 </a:solidFill>
                 <a:latin typeface="Calibri"/>
               </a:rPr>
-              <a:t>SELECT table_name FROM information_schema.tables</a:t>
+              <a:t>3</a:t>
+            </a:r>
+          </a:p>
+        </p:txBody>
+      </p:sp>
+      <p:sp>
+        <p:nvSpPr>
+          <p:cNvPr id="17" name="TextBox 16"/>
+          <p:cNvSpPr txBox="1"/>
+          <p:nvPr/>
+        </p:nvSpPr>
+        <p:spPr>
+          <a:xfrm>
+            <a:off x="1188720" y="4037076"/>
+            <a:ext cx="10271455" cy="886968"/>
+          </a:xfrm>
+          <a:prstGeom prst="rect">
+            <a:avLst/>
+          </a:prstGeom>
+          <a:noFill/>
+        </p:spPr>
+        <p:txBody>
+          <a:bodyPr wrap="square" anchor="ctr"/>
+          <a:lstStyle/>
+          <a:p>
+            <a:r>
+              <a:rPr sz="1500" b="1" i="0">
+                <a:solidFill>
+                  <a:srgbClr val="095292"/>
+                </a:solidFill>
+                <a:latin typeface="Calibri"/>
+              </a:rPr>
+              <a:t>Pega y renderiza en la plataforma del curso</a:t>
             </a:r>
           </a:p>
           <a:p>
             <a:pPr>
-              <a:spcAft>
-                <a:spcPts val="400"/>
-              </a:spcAft>
+              <a:spcBef>
+                <a:spcPts val="200"/>
+              </a:spcBef>
             </a:pPr>
             <a:r>
-              <a:rPr sz="1400" b="0" i="0">
+              <a:rPr sz="1300" b="0" i="0">
+                <a:solidFill>
+                  <a:srgbClr val="333333"/>
+                </a:solidFill>
+                <a:latin typeface="Calibri"/>
+              </a:rPr>
+              <a:t>Pega ese codigo en la caja de texto de la pregunta y mira como lo dibuja la plataforma. Si no renderiza, corrige ahi mismo: lo que se califica es el diagrama renderizado dentro de la plataforma del curso.</a:t>
+            </a:r>
+          </a:p>
+        </p:txBody>
+      </p:sp>
+      <p:sp>
+        <p:nvSpPr>
+          <p:cNvPr id="18" name="Rounded Rectangle 17"/>
+          <p:cNvSpPr/>
+          <p:nvPr/>
+        </p:nvSpPr>
+        <p:spPr>
+          <a:xfrm>
+            <a:off x="457200" y="5088636"/>
+            <a:ext cx="11277295" cy="1051560"/>
+          </a:xfrm>
+          <a:prstGeom prst="roundRect">
+            <a:avLst>
+              <a:gd name="adj" fmla="val 12000"/>
+            </a:avLst>
+          </a:prstGeom>
+          <a:solidFill>
+            <a:srgbClr val="E8F4FA"/>
+          </a:solidFill>
+          <a:ln>
+            <a:noFill/>
+          </a:ln>
+        </p:spPr>
+        <p:style>
+          <a:lnRef idx="1">
+            <a:schemeClr val="accent1"/>
+          </a:lnRef>
+          <a:fillRef idx="3">
+            <a:schemeClr val="accent1"/>
+          </a:fillRef>
+          <a:effectRef idx="2">
+            <a:schemeClr val="accent1"/>
+          </a:effectRef>
+          <a:fontRef idx="minor">
+            <a:schemeClr val="lt1"/>
+          </a:fontRef>
+        </p:style>
+        <p:txBody>
+          <a:bodyPr rtlCol="0" anchor="ctr"/>
+          <a:lstStyle/>
+          <a:p>
+            <a:pPr algn="ctr"/>
+          </a:p>
+        </p:txBody>
+      </p:sp>
+      <p:sp>
+        <p:nvSpPr>
+          <p:cNvPr id="19" name="Rounded Rectangle 18"/>
+          <p:cNvSpPr/>
+          <p:nvPr/>
+        </p:nvSpPr>
+        <p:spPr>
+          <a:xfrm>
+            <a:off x="594360" y="5394960"/>
+            <a:ext cx="438912" cy="438912"/>
+          </a:xfrm>
+          <a:prstGeom prst="roundRect">
+            <a:avLst>
+              <a:gd name="adj" fmla="val 12000"/>
+            </a:avLst>
+          </a:prstGeom>
+          <a:solidFill>
+            <a:srgbClr val="095292"/>
+          </a:solidFill>
+          <a:ln>
+            <a:noFill/>
+          </a:ln>
+        </p:spPr>
+        <p:style>
+          <a:lnRef idx="1">
+            <a:schemeClr val="accent1"/>
+          </a:lnRef>
+          <a:fillRef idx="3">
+            <a:schemeClr val="accent1"/>
+          </a:fillRef>
+          <a:effectRef idx="2">
+            <a:schemeClr val="accent1"/>
+          </a:effectRef>
+          <a:fontRef idx="minor">
+            <a:schemeClr val="lt1"/>
+          </a:fontRef>
+        </p:style>
+        <p:txBody>
+          <a:bodyPr rtlCol="0" anchor="ctr"/>
+          <a:lstStyle/>
+          <a:p>
+            <a:pPr algn="ctr"/>
+          </a:p>
+        </p:txBody>
+      </p:sp>
+      <p:sp>
+        <p:nvSpPr>
+          <p:cNvPr id="20" name="TextBox 19"/>
+          <p:cNvSpPr txBox="1"/>
+          <p:nvPr/>
+        </p:nvSpPr>
+        <p:spPr>
+          <a:xfrm>
+            <a:off x="594360" y="5394960"/>
+            <a:ext cx="438912" cy="438912"/>
+          </a:xfrm>
+          <a:prstGeom prst="rect">
+            <a:avLst/>
+          </a:prstGeom>
+          <a:noFill/>
+        </p:spPr>
+        <p:txBody>
+          <a:bodyPr wrap="square" anchor="ctr"/>
+          <a:lstStyle/>
+          <a:p>
+            <a:pPr algn="ctr"/>
+            <a:r>
+              <a:rPr sz="1600" b="1" i="0">
                 <a:solidFill>
                   <a:srgbClr val="FFFFFF"/>
                 </a:solidFill>
                 <a:latin typeface="Calibri"/>
               </a:rPr>
-              <a:t>WHERE table_schema = 'public' ORDER BY table_name;</a:t>
+              <a:t>4</a:t>
+            </a:r>
+          </a:p>
+        </p:txBody>
+      </p:sp>
+      <p:sp>
+        <p:nvSpPr>
+          <p:cNvPr id="21" name="TextBox 20"/>
+          <p:cNvSpPr txBox="1"/>
+          <p:nvPr/>
+        </p:nvSpPr>
+        <p:spPr>
+          <a:xfrm>
+            <a:off x="1188720" y="5180076"/>
+            <a:ext cx="10271455" cy="886968"/>
+          </a:xfrm>
+          <a:prstGeom prst="rect">
+            <a:avLst/>
+          </a:prstGeom>
+          <a:noFill/>
+        </p:spPr>
+        <p:txBody>
+          <a:bodyPr wrap="square" anchor="ctr"/>
+          <a:lstStyle/>
+          <a:p>
+            <a:r>
+              <a:rPr sz="1500" b="1" i="0">
+                <a:solidFill>
+                  <a:srgbClr val="095292"/>
+                </a:solidFill>
+                <a:latin typeface="Calibri"/>
+              </a:rPr>
+              <a:t>Guarda el PNG para tu PI</a:t>
             </a:r>
           </a:p>
           <a:p>
             <a:pPr>
-              <a:spcAft>
-                <a:spcPts val="400"/>
-              </a:spcAft>
+              <a:spcBef>
+                <a:spcPts val="200"/>
+              </a:spcBef>
             </a:pPr>
             <a:r>
-              <a:rPr sz="1400" b="0" i="0">
-                <a:solidFill>
-                  <a:srgbClr val="FFFFFF"/>
-                </a:solidFill>
-                <a:latin typeface="Calibri"/>
-              </a:rPr>
-              <a:t/>
-            </a:r>
-          </a:p>
-          <a:p>
-            <a:pPr>
-              <a:spcAft>
-                <a:spcPts val="400"/>
-              </a:spcAft>
-            </a:pPr>
-            <a:r>
-              <a:rPr sz="1400" b="0" i="0">
-                <a:solidFill>
-                  <a:srgbClr val="FFFFFF"/>
-                </a:solidFill>
-                <a:latin typeface="Calibri"/>
-              </a:rPr>
-              <a:t>-- 2. tienen todas clave primaria?</a:t>
-            </a:r>
-          </a:p>
-          <a:p>
-            <a:pPr>
-              <a:spcAft>
-                <a:spcPts val="400"/>
-              </a:spcAft>
-            </a:pPr>
-            <a:r>
-              <a:rPr sz="1400" b="0" i="0">
-                <a:solidFill>
-                  <a:srgbClr val="FFFFFF"/>
-                </a:solidFill>
-                <a:latin typeface="Calibri"/>
-              </a:rPr>
-              <a:t>SELECT t.table_name</a:t>
-            </a:r>
-          </a:p>
-          <a:p>
-            <a:pPr>
-              <a:spcAft>
-                <a:spcPts val="400"/>
-              </a:spcAft>
-            </a:pPr>
-            <a:r>
-              <a:rPr sz="1400" b="0" i="0">
-                <a:solidFill>
-                  <a:srgbClr val="FFFFFF"/>
-                </a:solidFill>
-                <a:latin typeface="Calibri"/>
-              </a:rPr>
-              <a:t>FROM information_schema.tables t</a:t>
-            </a:r>
-          </a:p>
-          <a:p>
-            <a:pPr>
-              <a:spcAft>
-                <a:spcPts val="400"/>
-              </a:spcAft>
-            </a:pPr>
-            <a:r>
-              <a:rPr sz="1400" b="0" i="0">
-                <a:solidFill>
-                  <a:srgbClr val="FFFFFF"/>
-                </a:solidFill>
-                <a:latin typeface="Calibri"/>
-              </a:rPr>
-              <a:t>LEFT JOIN information_schema.table_constraints c</a:t>
-            </a:r>
-          </a:p>
-          <a:p>
-            <a:pPr>
-              <a:spcAft>
-                <a:spcPts val="400"/>
-              </a:spcAft>
-            </a:pPr>
-            <a:r>
-              <a:rPr sz="1400" b="0" i="0">
-                <a:solidFill>
-                  <a:srgbClr val="FFFFFF"/>
-                </a:solidFill>
-                <a:latin typeface="Calibri"/>
-              </a:rPr>
-              <a:t>       ON c.table_name = t.table_name AND c.constraint_type = 'PRIMARY KEY'</a:t>
-            </a:r>
-          </a:p>
-          <a:p>
-            <a:pPr>
-              <a:spcAft>
-                <a:spcPts val="400"/>
-              </a:spcAft>
-            </a:pPr>
-            <a:r>
-              <a:rPr sz="1400" b="0" i="0">
-                <a:solidFill>
-                  <a:srgbClr val="FFFFFF"/>
-                </a:solidFill>
-                <a:latin typeface="Calibri"/>
-              </a:rPr>
-              <a:t>WHERE t.table_schema = 'public' AND c.constraint_name IS NULL;</a:t>
-            </a:r>
-          </a:p>
-          <a:p>
-            <a:pPr>
-              <a:spcAft>
-                <a:spcPts val="400"/>
-              </a:spcAft>
-            </a:pPr>
-            <a:r>
-              <a:rPr sz="1400" b="0" i="0">
-                <a:solidFill>
-                  <a:srgbClr val="FFFFFF"/>
-                </a:solidFill>
-                <a:latin typeface="Calibri"/>
-              </a:rPr>
-              <a:t>-- cero filas = todas tienen PK</a:t>
-            </a:r>
-          </a:p>
-        </p:txBody>
-      </p:sp>
-      <p:sp>
-        <p:nvSpPr>
-          <p:cNvPr id="9" name="TextBox 8"/>
+              <a:rPr sz="1300" b="0" i="0">
+                <a:solidFill>
+                  <a:srgbClr val="333333"/>
+                </a:solidFill>
+                <a:latin typeface="Calibri"/>
+              </a:rPr>
+              <a:t>Exporta tambien la imagen a la carpeta de tu Proyecto Integrador. Esa copia es para tu informe; no reemplaza la respuesta en la plataforma.</a:t>
+            </a:r>
+          </a:p>
+        </p:txBody>
+      </p:sp>
+      <p:sp>
+        <p:nvSpPr>
+          <p:cNvPr id="22" name="TextBox 21"/>
           <p:cNvSpPr txBox="1"/>
           <p:nvPr/>
         </p:nvSpPr>
@@ -7083,13 +8876,13 @@
         <p:spPr>
           <a:xfrm>
             <a:off x="0" y="0"/>
-            <a:ext cx="12191695" cy="960120"/>
+            <a:ext cx="12191695" cy="164592"/>
           </a:xfrm>
           <a:prstGeom prst="rect">
             <a:avLst/>
           </a:prstGeom>
           <a:solidFill>
-            <a:srgbClr val="095292"/>
+            <a:srgbClr val="269CCB"/>
           </a:solidFill>
           <a:ln>
             <a:noFill/>
@@ -7117,1103 +8910,9 @@
           </a:p>
         </p:txBody>
       </p:sp>
-      <p:sp>
-        <p:nvSpPr>
-          <p:cNvPr id="3" name="Rectangle 2"/>
-          <p:cNvSpPr/>
-          <p:nvPr/>
-        </p:nvSpPr>
-        <p:spPr>
-          <a:xfrm>
-            <a:off x="0" y="960120"/>
-            <a:ext cx="12191695" cy="41148"/>
-          </a:xfrm>
-          <a:prstGeom prst="rect">
-            <a:avLst/>
-          </a:prstGeom>
-          <a:solidFill>
-            <a:srgbClr val="FFD000"/>
-          </a:solidFill>
-          <a:ln>
-            <a:noFill/>
-          </a:ln>
-        </p:spPr>
-        <p:style>
-          <a:lnRef idx="1">
-            <a:schemeClr val="accent1"/>
-          </a:lnRef>
-          <a:fillRef idx="3">
-            <a:schemeClr val="accent1"/>
-          </a:fillRef>
-          <a:effectRef idx="2">
-            <a:schemeClr val="accent1"/>
-          </a:effectRef>
-          <a:fontRef idx="minor">
-            <a:schemeClr val="lt1"/>
-          </a:fontRef>
-        </p:style>
-        <p:txBody>
-          <a:bodyPr rtlCol="0" anchor="ctr"/>
-          <a:lstStyle/>
-          <a:p>
-            <a:pPr algn="ctr"/>
-          </a:p>
-        </p:txBody>
-      </p:sp>
-      <p:sp>
-        <p:nvSpPr>
-          <p:cNvPr id="4" name="TextBox 3"/>
-          <p:cNvSpPr txBox="1"/>
-          <p:nvPr/>
-        </p:nvSpPr>
-        <p:spPr>
-          <a:xfrm>
-            <a:off x="457200" y="164592"/>
-            <a:ext cx="11277295" cy="502920"/>
-          </a:xfrm>
-          <a:prstGeom prst="rect">
-            <a:avLst/>
-          </a:prstGeom>
-          <a:noFill/>
-        </p:spPr>
-        <p:txBody>
-          <a:bodyPr wrap="square">
-            <a:spAutoFit/>
-          </a:bodyPr>
-          <a:lstStyle/>
-          <a:p>
-            <a:r>
-              <a:rPr sz="2600" b="1" i="0">
-                <a:solidFill>
-                  <a:srgbClr val="FFFFFF"/>
-                </a:solidFill>
-                <a:latin typeface="Calibri"/>
-              </a:rPr>
-              <a:t>Integridad y objetos de negocio, contados</a:t>
-            </a:r>
-          </a:p>
-        </p:txBody>
-      </p:sp>
-      <p:sp>
-        <p:nvSpPr>
-          <p:cNvPr id="5" name="Rounded Rectangle 4"/>
-          <p:cNvSpPr/>
-          <p:nvPr/>
-        </p:nvSpPr>
-        <p:spPr>
-          <a:xfrm>
-            <a:off x="457200" y="1261872"/>
-            <a:ext cx="11277295" cy="5093208"/>
-          </a:xfrm>
-          <a:prstGeom prst="roundRect">
-            <a:avLst>
-              <a:gd name="adj" fmla="val 12000"/>
-            </a:avLst>
-          </a:prstGeom>
-          <a:solidFill>
-            <a:srgbClr val="1E2A38"/>
-          </a:solidFill>
-          <a:ln>
-            <a:noFill/>
-          </a:ln>
-        </p:spPr>
-        <p:style>
-          <a:lnRef idx="1">
-            <a:schemeClr val="accent1"/>
-          </a:lnRef>
-          <a:fillRef idx="3">
-            <a:schemeClr val="accent1"/>
-          </a:fillRef>
-          <a:effectRef idx="2">
-            <a:schemeClr val="accent1"/>
-          </a:effectRef>
-          <a:fontRef idx="minor">
-            <a:schemeClr val="lt1"/>
-          </a:fontRef>
-        </p:style>
-        <p:txBody>
-          <a:bodyPr rtlCol="0" anchor="ctr"/>
-          <a:lstStyle/>
-          <a:p>
-            <a:pPr algn="ctr"/>
-          </a:p>
-        </p:txBody>
-      </p:sp>
-      <p:sp>
-        <p:nvSpPr>
-          <p:cNvPr id="6" name="Rectangle 5"/>
-          <p:cNvSpPr/>
-          <p:nvPr/>
-        </p:nvSpPr>
-        <p:spPr>
-          <a:xfrm>
-            <a:off x="457200" y="1261872"/>
-            <a:ext cx="11277295" cy="320040"/>
-          </a:xfrm>
-          <a:prstGeom prst="rect">
-            <a:avLst/>
-          </a:prstGeom>
-          <a:solidFill>
-            <a:srgbClr val="095292"/>
-          </a:solidFill>
-          <a:ln>
-            <a:noFill/>
-          </a:ln>
-        </p:spPr>
-        <p:style>
-          <a:lnRef idx="1">
-            <a:schemeClr val="accent1"/>
-          </a:lnRef>
-          <a:fillRef idx="3">
-            <a:schemeClr val="accent1"/>
-          </a:fillRef>
-          <a:effectRef idx="2">
-            <a:schemeClr val="accent1"/>
-          </a:effectRef>
-          <a:fontRef idx="minor">
-            <a:schemeClr val="lt1"/>
-          </a:fontRef>
-        </p:style>
-        <p:txBody>
-          <a:bodyPr rtlCol="0" anchor="ctr"/>
-          <a:lstStyle/>
-          <a:p>
-            <a:pPr algn="ctr"/>
-          </a:p>
-        </p:txBody>
-      </p:sp>
-      <p:sp>
-        <p:nvSpPr>
-          <p:cNvPr id="7" name="TextBox 6"/>
-          <p:cNvSpPr txBox="1"/>
-          <p:nvPr/>
-        </p:nvSpPr>
-        <p:spPr>
-          <a:xfrm>
-            <a:off x="685800" y="1307592"/>
-            <a:ext cx="10820095" cy="256032"/>
-          </a:xfrm>
-          <a:prstGeom prst="rect">
-            <a:avLst/>
-          </a:prstGeom>
-          <a:noFill/>
-        </p:spPr>
-        <p:txBody>
-          <a:bodyPr wrap="square" anchor="ctr"/>
-          <a:lstStyle/>
-          <a:p>
-            <a:r>
-              <a:rPr sz="1000" b="1" i="0">
-                <a:solidFill>
-                  <a:srgbClr val="269CCB"/>
-                </a:solidFill>
-                <a:latin typeface="Calibri"/>
-              </a:rPr>
-              <a:t>● ● ●</a:t>
-            </a:r>
-          </a:p>
-        </p:txBody>
-      </p:sp>
-      <p:sp>
-        <p:nvSpPr>
-          <p:cNvPr id="8" name="TextBox 7"/>
-          <p:cNvSpPr txBox="1"/>
-          <p:nvPr/>
-        </p:nvSpPr>
-        <p:spPr>
-          <a:xfrm>
-            <a:off x="777240" y="1719072"/>
-            <a:ext cx="10637215" cy="4453128"/>
-          </a:xfrm>
-          <a:prstGeom prst="rect">
-            <a:avLst/>
-          </a:prstGeom>
-          <a:noFill/>
-        </p:spPr>
-        <p:txBody>
-          <a:bodyPr wrap="square">
-            <a:spAutoFit/>
-          </a:bodyPr>
-          <a:lstStyle/>
-          <a:p>
-            <a:pPr>
-              <a:spcAft>
-                <a:spcPts val="400"/>
-              </a:spcAft>
-            </a:pPr>
-            <a:r>
-              <a:rPr sz="1400" b="0" i="0">
-                <a:solidFill>
-                  <a:srgbClr val="FFFFFF"/>
-                </a:solidFill>
-                <a:latin typeface="Calibri"/>
-              </a:rPr>
-              <a:t>-- 3. las claves foraneas declaradas</a:t>
-            </a:r>
-          </a:p>
-          <a:p>
-            <a:pPr>
-              <a:spcAft>
-                <a:spcPts val="400"/>
-              </a:spcAft>
-            </a:pPr>
-            <a:r>
-              <a:rPr sz="1400" b="0" i="0">
-                <a:solidFill>
-                  <a:srgbClr val="FFFFFF"/>
-                </a:solidFill>
-                <a:latin typeface="Calibri"/>
-              </a:rPr>
-              <a:t>SELECT tc.table_name, kcu.column_name, ccu.table_name AS referencia</a:t>
-            </a:r>
-          </a:p>
-          <a:p>
-            <a:pPr>
-              <a:spcAft>
-                <a:spcPts val="400"/>
-              </a:spcAft>
-            </a:pPr>
-            <a:r>
-              <a:rPr sz="1400" b="0" i="0">
-                <a:solidFill>
-                  <a:srgbClr val="FFFFFF"/>
-                </a:solidFill>
-                <a:latin typeface="Calibri"/>
-              </a:rPr>
-              <a:t>FROM information_schema.table_constraints tc</a:t>
-            </a:r>
-          </a:p>
-          <a:p>
-            <a:pPr>
-              <a:spcAft>
-                <a:spcPts val="400"/>
-              </a:spcAft>
-            </a:pPr>
-            <a:r>
-              <a:rPr sz="1400" b="0" i="0">
-                <a:solidFill>
-                  <a:srgbClr val="FFFFFF"/>
-                </a:solidFill>
-                <a:latin typeface="Calibri"/>
-              </a:rPr>
-              <a:t>JOIN information_schema.key_column_usage kcu</a:t>
-            </a:r>
-          </a:p>
-          <a:p>
-            <a:pPr>
-              <a:spcAft>
-                <a:spcPts val="400"/>
-              </a:spcAft>
-            </a:pPr>
-            <a:r>
-              <a:rPr sz="1400" b="0" i="0">
-                <a:solidFill>
-                  <a:srgbClr val="FFFFFF"/>
-                </a:solidFill>
-                <a:latin typeface="Calibri"/>
-              </a:rPr>
-              <a:t>     ON kcu.constraint_name = tc.constraint_name</a:t>
-            </a:r>
-          </a:p>
-          <a:p>
-            <a:pPr>
-              <a:spcAft>
-                <a:spcPts val="400"/>
-              </a:spcAft>
-            </a:pPr>
-            <a:r>
-              <a:rPr sz="1400" b="0" i="0">
-                <a:solidFill>
-                  <a:srgbClr val="FFFFFF"/>
-                </a:solidFill>
-                <a:latin typeface="Calibri"/>
-              </a:rPr>
-              <a:t>JOIN information_schema.constraint_column_usage ccu</a:t>
-            </a:r>
-          </a:p>
-          <a:p>
-            <a:pPr>
-              <a:spcAft>
-                <a:spcPts val="400"/>
-              </a:spcAft>
-            </a:pPr>
-            <a:r>
-              <a:rPr sz="1400" b="0" i="0">
-                <a:solidFill>
-                  <a:srgbClr val="FFFFFF"/>
-                </a:solidFill>
-                <a:latin typeface="Calibri"/>
-              </a:rPr>
-              <a:t>     ON ccu.constraint_name = tc.constraint_name</a:t>
-            </a:r>
-          </a:p>
-          <a:p>
-            <a:pPr>
-              <a:spcAft>
-                <a:spcPts val="400"/>
-              </a:spcAft>
-            </a:pPr>
-            <a:r>
-              <a:rPr sz="1400" b="0" i="0">
-                <a:solidFill>
-                  <a:srgbClr val="FFFFFF"/>
-                </a:solidFill>
-                <a:latin typeface="Calibri"/>
-              </a:rPr>
-              <a:t>WHERE tc.constraint_type = 'FOREIGN KEY'</a:t>
-            </a:r>
-          </a:p>
-          <a:p>
-            <a:pPr>
-              <a:spcAft>
-                <a:spcPts val="400"/>
-              </a:spcAft>
-            </a:pPr>
-            <a:r>
-              <a:rPr sz="1400" b="0" i="0">
-                <a:solidFill>
-                  <a:srgbClr val="FFFFFF"/>
-                </a:solidFill>
-                <a:latin typeface="Calibri"/>
-              </a:rPr>
-              <a:t>ORDER BY tc.table_name;</a:t>
-            </a:r>
-          </a:p>
-          <a:p>
-            <a:pPr>
-              <a:spcAft>
-                <a:spcPts val="400"/>
-              </a:spcAft>
-            </a:pPr>
-            <a:r>
-              <a:rPr sz="1400" b="0" i="0">
-                <a:solidFill>
-                  <a:srgbClr val="FFFFFF"/>
-                </a:solidFill>
-                <a:latin typeface="Calibri"/>
-              </a:rPr>
-              <a:t/>
-            </a:r>
-          </a:p>
-          <a:p>
-            <a:pPr>
-              <a:spcAft>
-                <a:spcPts val="400"/>
-              </a:spcAft>
-            </a:pPr>
-            <a:r>
-              <a:rPr sz="1400" b="0" i="0">
-                <a:solidFill>
-                  <a:srgbClr val="FFFFFF"/>
-                </a:solidFill>
-                <a:latin typeface="Calibri"/>
-              </a:rPr>
-              <a:t>-- 4. procedimientos, funciones y triggers que existen de verdad</a:t>
-            </a:r>
-          </a:p>
-          <a:p>
-            <a:pPr>
-              <a:spcAft>
-                <a:spcPts val="400"/>
-              </a:spcAft>
-            </a:pPr>
-            <a:r>
-              <a:rPr sz="1400" b="0" i="0">
-                <a:solidFill>
-                  <a:srgbClr val="FFFFFF"/>
-                </a:solidFill>
-                <a:latin typeface="Calibri"/>
-              </a:rPr>
-              <a:t>SELECT routine_name, routine_type FROM information_schema.routines</a:t>
-            </a:r>
-          </a:p>
-          <a:p>
-            <a:pPr>
-              <a:spcAft>
-                <a:spcPts val="400"/>
-              </a:spcAft>
-            </a:pPr>
-            <a:r>
-              <a:rPr sz="1400" b="0" i="0">
-                <a:solidFill>
-                  <a:srgbClr val="FFFFFF"/>
-                </a:solidFill>
-                <a:latin typeface="Calibri"/>
-              </a:rPr>
-              <a:t>WHERE routine_schema = 'public' ORDER BY routine_name;</a:t>
-            </a:r>
-          </a:p>
-          <a:p>
-            <a:pPr>
-              <a:spcAft>
-                <a:spcPts val="400"/>
-              </a:spcAft>
-            </a:pPr>
-            <a:r>
-              <a:rPr sz="1400" b="0" i="0">
-                <a:solidFill>
-                  <a:srgbClr val="FFFFFF"/>
-                </a:solidFill>
-                <a:latin typeface="Calibri"/>
-              </a:rPr>
-              <a:t>SELECT trigger_name, event_object_table FROM information_schema.triggers;</a:t>
-            </a:r>
-          </a:p>
-        </p:txBody>
-      </p:sp>
-      <p:sp>
-        <p:nvSpPr>
-          <p:cNvPr id="9" name="TextBox 8"/>
-          <p:cNvSpPr txBox="1"/>
-          <p:nvPr/>
-        </p:nvSpPr>
-        <p:spPr>
-          <a:xfrm>
-            <a:off x="11185855" y="6473952"/>
-            <a:ext cx="640080" cy="274320"/>
-          </a:xfrm>
-          <a:prstGeom prst="rect">
-            <a:avLst/>
-          </a:prstGeom>
-          <a:noFill/>
-        </p:spPr>
-        <p:txBody>
-          <a:bodyPr wrap="square">
-            <a:spAutoFit/>
-          </a:bodyPr>
-          <a:lstStyle/>
-          <a:p>
-            <a:pPr algn="r"/>
-            <a:r>
-              <a:rPr sz="1100" b="0" i="0">
-                <a:solidFill>
-                  <a:srgbClr val="666666"/>
-                </a:solidFill>
-                <a:latin typeface="Calibri"/>
-              </a:rPr>
-              <a:t>21</a:t>
-            </a:r>
-          </a:p>
-        </p:txBody>
-      </p:sp>
-    </p:spTree>
-  </p:cSld>
-  <p:clrMapOvr>
-    <a:masterClrMapping/>
-  </p:clrMapOvr>
-</p:sld>
-</file>
-
-<file path=ppt/slides/slide22.xml><?xml version="1.0" encoding="utf-8"?>
-<p:sld xmlns:a="http://schemas.openxmlformats.org/drawingml/2006/main" xmlns:p="http://schemas.openxmlformats.org/presentationml/2006/main" xmlns:r="http://schemas.openxmlformats.org/officeDocument/2006/relationships">
-  <p:cSld>
-    <p:bg>
-      <p:bgPr>
-        <a:solidFill>
-          <a:srgbClr val="FFFFFF"/>
-        </a:solidFill>
-        <a:effectLst/>
-      </p:bgPr>
-    </p:bg>
-    <p:spTree>
-      <p:nvGrpSpPr>
-        <p:cNvPr id="1" name=""/>
-        <p:cNvGrpSpPr/>
-        <p:nvPr/>
-      </p:nvGrpSpPr>
-      <p:grpSpPr/>
-      <p:sp>
-        <p:nvSpPr>
-          <p:cNvPr id="2" name="Rectangle 1"/>
-          <p:cNvSpPr/>
-          <p:nvPr/>
-        </p:nvSpPr>
-        <p:spPr>
-          <a:xfrm>
-            <a:off x="0" y="0"/>
-            <a:ext cx="12191695" cy="960120"/>
-          </a:xfrm>
-          <a:prstGeom prst="rect">
-            <a:avLst/>
-          </a:prstGeom>
-          <a:solidFill>
-            <a:srgbClr val="095292"/>
-          </a:solidFill>
-          <a:ln>
-            <a:noFill/>
-          </a:ln>
-        </p:spPr>
-        <p:style>
-          <a:lnRef idx="1">
-            <a:schemeClr val="accent1"/>
-          </a:lnRef>
-          <a:fillRef idx="3">
-            <a:schemeClr val="accent1"/>
-          </a:fillRef>
-          <a:effectRef idx="2">
-            <a:schemeClr val="accent1"/>
-          </a:effectRef>
-          <a:fontRef idx="minor">
-            <a:schemeClr val="lt1"/>
-          </a:fontRef>
-        </p:style>
-        <p:txBody>
-          <a:bodyPr rtlCol="0" anchor="ctr"/>
-          <a:lstStyle/>
-          <a:p>
-            <a:pPr algn="ctr"/>
-          </a:p>
-        </p:txBody>
-      </p:sp>
-      <p:sp>
-        <p:nvSpPr>
-          <p:cNvPr id="3" name="Rectangle 2"/>
-          <p:cNvSpPr/>
-          <p:nvPr/>
-        </p:nvSpPr>
-        <p:spPr>
-          <a:xfrm>
-            <a:off x="0" y="960120"/>
-            <a:ext cx="12191695" cy="41148"/>
-          </a:xfrm>
-          <a:prstGeom prst="rect">
-            <a:avLst/>
-          </a:prstGeom>
-          <a:solidFill>
-            <a:srgbClr val="FFD000"/>
-          </a:solidFill>
-          <a:ln>
-            <a:noFill/>
-          </a:ln>
-        </p:spPr>
-        <p:style>
-          <a:lnRef idx="1">
-            <a:schemeClr val="accent1"/>
-          </a:lnRef>
-          <a:fillRef idx="3">
-            <a:schemeClr val="accent1"/>
-          </a:fillRef>
-          <a:effectRef idx="2">
-            <a:schemeClr val="accent1"/>
-          </a:effectRef>
-          <a:fontRef idx="minor">
-            <a:schemeClr val="lt1"/>
-          </a:fontRef>
-        </p:style>
-        <p:txBody>
-          <a:bodyPr rtlCol="0" anchor="ctr"/>
-          <a:lstStyle/>
-          <a:p>
-            <a:pPr algn="ctr"/>
-          </a:p>
-        </p:txBody>
-      </p:sp>
-      <p:sp>
-        <p:nvSpPr>
-          <p:cNvPr id="4" name="TextBox 3"/>
-          <p:cNvSpPr txBox="1"/>
-          <p:nvPr/>
-        </p:nvSpPr>
-        <p:spPr>
-          <a:xfrm>
-            <a:off x="457200" y="164592"/>
-            <a:ext cx="11277295" cy="502920"/>
-          </a:xfrm>
-          <a:prstGeom prst="rect">
-            <a:avLst/>
-          </a:prstGeom>
-          <a:noFill/>
-        </p:spPr>
-        <p:txBody>
-          <a:bodyPr wrap="square">
-            <a:spAutoFit/>
-          </a:bodyPr>
-          <a:lstStyle/>
-          <a:p>
-            <a:r>
-              <a:rPr sz="2600" b="1" i="0">
-                <a:solidFill>
-                  <a:srgbClr val="FFFFFF"/>
-                </a:solidFill>
-                <a:latin typeface="Calibri"/>
-              </a:rPr>
-              <a:t>Demo del dia</a:t>
-            </a:r>
-          </a:p>
-        </p:txBody>
-      </p:sp>
-      <p:sp>
-        <p:nvSpPr>
-          <p:cNvPr id="5" name="TextBox 4"/>
-          <p:cNvSpPr txBox="1"/>
-          <p:nvPr/>
-        </p:nvSpPr>
-        <p:spPr>
-          <a:xfrm>
-            <a:off x="457200" y="1170432"/>
-            <a:ext cx="11277295" cy="5230368"/>
-          </a:xfrm>
-          <a:prstGeom prst="rect">
-            <a:avLst/>
-          </a:prstGeom>
-          <a:noFill/>
-        </p:spPr>
-        <p:txBody>
-          <a:bodyPr wrap="square">
-            <a:spAutoFit/>
-          </a:bodyPr>
-          <a:lstStyle/>
-          <a:p>
-            <a:pPr>
-              <a:spcAft>
-                <a:spcPts val="800"/>
-              </a:spcAft>
-            </a:pPr>
-            <a:r>
-              <a:rPr sz="2000" b="0" i="0">
-                <a:solidFill>
-                  <a:srgbClr val="333333"/>
-                </a:solidFill>
-                <a:latin typeface="Calibri"/>
-              </a:rPr>
-              <a:t>–   </a:t>
-            </a:r>
-            <a:r>
-              <a:rPr sz="2000" b="1" i="0">
-                <a:solidFill>
-                  <a:srgbClr val="333333"/>
-                </a:solidFill>
-                <a:latin typeface="Calibri"/>
-              </a:rPr>
-              <a:t>Herramienta:</a:t>
-            </a:r>
-            <a:r>
-              <a:rPr sz="2000" b="0" i="0">
-                <a:solidFill>
-                  <a:srgbClr val="333333"/>
-                </a:solidFill>
-                <a:latin typeface="Calibri"/>
-              </a:rPr>
-              <a:t> Live SQL / DB Fiddle + draw.io + la plataforma del curso</a:t>
-            </a:r>
-          </a:p>
-          <a:p>
-            <a:pPr>
-              <a:spcAft>
-                <a:spcPts val="800"/>
-              </a:spcAft>
-            </a:pPr>
-            <a:r>
-              <a:rPr sz="2000" b="0" i="0">
-                <a:solidFill>
-                  <a:srgbClr val="333333"/>
-                </a:solidFill>
-                <a:latin typeface="Calibri"/>
-              </a:rPr>
-              <a:t>–   </a:t>
-            </a:r>
-            <a:r>
-              <a:rPr sz="2000" b="1" i="0">
-                <a:solidFill>
-                  <a:srgbClr val="333333"/>
-                </a:solidFill>
-                <a:latin typeface="Calibri"/>
-              </a:rPr>
-              <a:t>Demo:</a:t>
-            </a:r>
-            <a:r>
-              <a:rPr sz="2000" b="0" i="0">
-                <a:solidFill>
-                  <a:srgbClr val="333333"/>
-                </a:solidFill>
-                <a:latin typeface="Calibri"/>
-              </a:rPr>
-              <a:t> Recorrido de checklist + ejemplo demo de 3 min.</a:t>
-            </a:r>
-          </a:p>
-          <a:p>
-            <a:pPr>
-              <a:spcAft>
-                <a:spcPts val="800"/>
-              </a:spcAft>
-            </a:pPr>
-            <a:r>
-              <a:rPr sz="2000" b="0" i="0">
-                <a:solidFill>
-                  <a:srgbClr val="333333"/>
-                </a:solidFill>
-                <a:latin typeface="Calibri"/>
-              </a:rPr>
-              <a:t>–   Sigan el mismo dominio VetCare (no inventen otro caso).</a:t>
-            </a:r>
-          </a:p>
-          <a:p>
-            <a:pPr>
-              <a:spcAft>
-                <a:spcPts val="800"/>
-              </a:spcAft>
-            </a:pPr>
-            <a:r>
-              <a:rPr sz="2000" b="0" i="0">
-                <a:solidFill>
-                  <a:srgbClr val="333333"/>
-                </a:solidFill>
-                <a:latin typeface="Calibri"/>
-              </a:rPr>
-              <a:t>–   Al final de la demo: dejar enlace/script compartible al grupo.</a:t>
-            </a:r>
-          </a:p>
-        </p:txBody>
-      </p:sp>
-      <p:sp>
-        <p:nvSpPr>
-          <p:cNvPr id="6" name="TextBox 5"/>
-          <p:cNvSpPr txBox="1"/>
-          <p:nvPr/>
-        </p:nvSpPr>
-        <p:spPr>
-          <a:xfrm>
-            <a:off x="11185855" y="6473952"/>
-            <a:ext cx="640080" cy="274320"/>
-          </a:xfrm>
-          <a:prstGeom prst="rect">
-            <a:avLst/>
-          </a:prstGeom>
-          <a:noFill/>
-        </p:spPr>
-        <p:txBody>
-          <a:bodyPr wrap="square">
-            <a:spAutoFit/>
-          </a:bodyPr>
-          <a:lstStyle/>
-          <a:p>
-            <a:pPr algn="r"/>
-            <a:r>
-              <a:rPr sz="1100" b="0" i="0">
-                <a:solidFill>
-                  <a:srgbClr val="666666"/>
-                </a:solidFill>
-                <a:latin typeface="Calibri"/>
-              </a:rPr>
-              <a:t>22</a:t>
-            </a:r>
-          </a:p>
-        </p:txBody>
-      </p:sp>
-    </p:spTree>
-  </p:cSld>
-  <p:clrMapOvr>
-    <a:masterClrMapping/>
-  </p:clrMapOvr>
-</p:sld>
-</file>
-
-<file path=ppt/slides/slide23.xml><?xml version="1.0" encoding="utf-8"?>
-<p:sld xmlns:a="http://schemas.openxmlformats.org/drawingml/2006/main" xmlns:p="http://schemas.openxmlformats.org/presentationml/2006/main" xmlns:r="http://schemas.openxmlformats.org/officeDocument/2006/relationships">
-  <p:cSld>
-    <p:bg>
-      <p:bgPr>
-        <a:solidFill>
-          <a:srgbClr val="FFFFFF"/>
-        </a:solidFill>
-        <a:effectLst/>
-      </p:bgPr>
-    </p:bg>
-    <p:spTree>
-      <p:nvGrpSpPr>
-        <p:cNvPr id="1" name=""/>
-        <p:cNvGrpSpPr/>
-        <p:nvPr/>
-      </p:nvGrpSpPr>
-      <p:grpSpPr/>
-      <p:sp>
-        <p:nvSpPr>
-          <p:cNvPr id="2" name="Rectangle 1"/>
-          <p:cNvSpPr/>
-          <p:nvPr/>
-        </p:nvSpPr>
-        <p:spPr>
-          <a:xfrm>
-            <a:off x="0" y="0"/>
-            <a:ext cx="12191695" cy="1170432"/>
-          </a:xfrm>
-          <a:prstGeom prst="rect">
-            <a:avLst/>
-          </a:prstGeom>
-          <a:solidFill>
-            <a:srgbClr val="095292"/>
-          </a:solidFill>
-          <a:ln>
-            <a:noFill/>
-          </a:ln>
-        </p:spPr>
-        <p:style>
-          <a:lnRef idx="1">
-            <a:schemeClr val="accent1"/>
-          </a:lnRef>
-          <a:fillRef idx="3">
-            <a:schemeClr val="accent1"/>
-          </a:fillRef>
-          <a:effectRef idx="2">
-            <a:schemeClr val="accent1"/>
-          </a:effectRef>
-          <a:fontRef idx="minor">
-            <a:schemeClr val="lt1"/>
-          </a:fontRef>
-        </p:style>
-        <p:txBody>
-          <a:bodyPr rtlCol="0" anchor="ctr"/>
-          <a:lstStyle/>
-          <a:p>
-            <a:pPr algn="ctr"/>
-          </a:p>
-        </p:txBody>
-      </p:sp>
-      <p:sp>
-        <p:nvSpPr>
-          <p:cNvPr id="3" name="Rectangle 2"/>
-          <p:cNvSpPr/>
-          <p:nvPr/>
-        </p:nvSpPr>
-        <p:spPr>
-          <a:xfrm>
-            <a:off x="0" y="1170432"/>
-            <a:ext cx="12191695" cy="41148"/>
-          </a:xfrm>
-          <a:prstGeom prst="rect">
-            <a:avLst/>
-          </a:prstGeom>
-          <a:solidFill>
-            <a:srgbClr val="FFD000"/>
-          </a:solidFill>
-          <a:ln>
-            <a:noFill/>
-          </a:ln>
-        </p:spPr>
-        <p:style>
-          <a:lnRef idx="1">
-            <a:schemeClr val="accent1"/>
-          </a:lnRef>
-          <a:fillRef idx="3">
-            <a:schemeClr val="accent1"/>
-          </a:fillRef>
-          <a:effectRef idx="2">
-            <a:schemeClr val="accent1"/>
-          </a:effectRef>
-          <a:fontRef idx="minor">
-            <a:schemeClr val="lt1"/>
-          </a:fontRef>
-        </p:style>
-        <p:txBody>
-          <a:bodyPr rtlCol="0" anchor="ctr"/>
-          <a:lstStyle/>
-          <a:p>
-            <a:pPr algn="ctr"/>
-          </a:p>
-        </p:txBody>
-      </p:sp>
-      <p:sp>
-        <p:nvSpPr>
-          <p:cNvPr id="4" name="TextBox 3"/>
-          <p:cNvSpPr txBox="1"/>
-          <p:nvPr/>
-        </p:nvSpPr>
-        <p:spPr>
-          <a:xfrm>
-            <a:off x="457200" y="164592"/>
-            <a:ext cx="11277295" cy="384048"/>
-          </a:xfrm>
-          <a:prstGeom prst="rect">
-            <a:avLst/>
-          </a:prstGeom>
-          <a:noFill/>
-        </p:spPr>
-        <p:txBody>
-          <a:bodyPr wrap="square">
-            <a:spAutoFit/>
-          </a:bodyPr>
-          <a:lstStyle/>
-          <a:p>
-            <a:r>
-              <a:rPr sz="2600" b="1" i="0">
-                <a:solidFill>
-                  <a:srgbClr val="FFFFFF"/>
-                </a:solidFill>
-                <a:latin typeface="Calibri"/>
-              </a:rPr>
-              <a:t>Herramientas de hoy</a:t>
-            </a:r>
-          </a:p>
-        </p:txBody>
-      </p:sp>
-      <p:sp>
-        <p:nvSpPr>
-          <p:cNvPr id="5" name="TextBox 4"/>
-          <p:cNvSpPr txBox="1"/>
-          <p:nvPr/>
-        </p:nvSpPr>
-        <p:spPr>
-          <a:xfrm>
-            <a:off x="457200" y="566928"/>
-            <a:ext cx="11277295" cy="411480"/>
-          </a:xfrm>
-          <a:prstGeom prst="rect">
-            <a:avLst/>
-          </a:prstGeom>
-          <a:noFill/>
-        </p:spPr>
-        <p:txBody>
-          <a:bodyPr wrap="square">
-            <a:spAutoFit/>
-          </a:bodyPr>
-          <a:lstStyle/>
-          <a:p>
-            <a:r>
-              <a:rPr sz="1400" b="0" i="0">
-                <a:solidFill>
-                  <a:srgbClr val="B8D8EE"/>
-                </a:solidFill>
-                <a:latin typeface="Calibri"/>
-              </a:rPr>
-              <a:t>Gratis · navegador o free tier</a:t>
-            </a:r>
-          </a:p>
-        </p:txBody>
-      </p:sp>
-      <p:sp>
-        <p:nvSpPr>
-          <p:cNvPr id="6" name="Rounded Rectangle 5"/>
-          <p:cNvSpPr/>
-          <p:nvPr/>
-        </p:nvSpPr>
-        <p:spPr>
-          <a:xfrm>
-            <a:off x="457200" y="1591056"/>
-            <a:ext cx="3624986" cy="2299716"/>
-          </a:xfrm>
-          <a:prstGeom prst="roundRect">
-            <a:avLst>
-              <a:gd name="adj" fmla="val 12000"/>
-            </a:avLst>
-          </a:prstGeom>
-          <a:solidFill>
-            <a:srgbClr val="F2F2F2"/>
-          </a:solidFill>
-          <a:ln>
-            <a:noFill/>
-          </a:ln>
-        </p:spPr>
-        <p:style>
-          <a:lnRef idx="1">
-            <a:schemeClr val="accent1"/>
-          </a:lnRef>
-          <a:fillRef idx="3">
-            <a:schemeClr val="accent1"/>
-          </a:fillRef>
-          <a:effectRef idx="2">
-            <a:schemeClr val="accent1"/>
-          </a:effectRef>
-          <a:fontRef idx="minor">
-            <a:schemeClr val="lt1"/>
-          </a:fontRef>
-        </p:style>
-        <p:txBody>
-          <a:bodyPr rtlCol="0" anchor="ctr"/>
-          <a:lstStyle/>
-          <a:p>
-            <a:pPr algn="ctr"/>
-          </a:p>
-        </p:txBody>
-      </p:sp>
-      <p:sp>
-        <p:nvSpPr>
-          <p:cNvPr id="7" name="Rectangle 6"/>
-          <p:cNvSpPr/>
-          <p:nvPr/>
-        </p:nvSpPr>
-        <p:spPr>
-          <a:xfrm>
-            <a:off x="457200" y="1591056"/>
-            <a:ext cx="3624986" cy="64008"/>
-          </a:xfrm>
-          <a:prstGeom prst="rect">
-            <a:avLst/>
-          </a:prstGeom>
-          <a:solidFill>
-            <a:srgbClr val="095292"/>
-          </a:solidFill>
-          <a:ln>
-            <a:noFill/>
-          </a:ln>
-        </p:spPr>
-        <p:style>
-          <a:lnRef idx="1">
-            <a:schemeClr val="accent1"/>
-          </a:lnRef>
-          <a:fillRef idx="3">
-            <a:schemeClr val="accent1"/>
-          </a:fillRef>
-          <a:effectRef idx="2">
-            <a:schemeClr val="accent1"/>
-          </a:effectRef>
-          <a:fontRef idx="minor">
-            <a:schemeClr val="lt1"/>
-          </a:fontRef>
-        </p:style>
-        <p:txBody>
-          <a:bodyPr rtlCol="0" anchor="ctr"/>
-          <a:lstStyle/>
-          <a:p>
-            <a:pPr algn="ctr"/>
-          </a:p>
-        </p:txBody>
-      </p:sp>
-      <p:sp>
-        <p:nvSpPr>
-          <p:cNvPr id="8" name="Rectangle 7"/>
-          <p:cNvSpPr/>
-          <p:nvPr/>
-        </p:nvSpPr>
-        <p:spPr>
-          <a:xfrm>
-            <a:off x="457200" y="1655064"/>
-            <a:ext cx="3624986" cy="27432"/>
-          </a:xfrm>
-          <a:prstGeom prst="rect">
-            <a:avLst/>
-          </a:prstGeom>
-          <a:solidFill>
-            <a:srgbClr val="FFD000"/>
-          </a:solidFill>
-          <a:ln>
-            <a:noFill/>
-          </a:ln>
-        </p:spPr>
-        <p:style>
-          <a:lnRef idx="1">
-            <a:schemeClr val="accent1"/>
-          </a:lnRef>
-          <a:fillRef idx="3">
-            <a:schemeClr val="accent1"/>
-          </a:fillRef>
-          <a:effectRef idx="2">
-            <a:schemeClr val="accent1"/>
-          </a:effectRef>
-          <a:fontRef idx="minor">
-            <a:schemeClr val="lt1"/>
-          </a:fontRef>
-        </p:style>
-        <p:txBody>
-          <a:bodyPr rtlCol="0" anchor="ctr"/>
-          <a:lstStyle/>
-          <a:p>
-            <a:pPr algn="ctr"/>
-          </a:p>
-        </p:txBody>
-      </p:sp>
       <p:pic>
         <p:nvPicPr>
-          <p:cNvPr id="9" name="Picture 8" descr="oracle_livesql.png"/>
+          <p:cNvPr id="3" name="Picture 2" descr="logo_uniajc_color.png"/>
           <p:cNvPicPr>
             <a:picLocks noChangeAspect="1"/>
           </p:cNvPicPr>
@@ -8227,8 +8926,8 @@
         </p:blipFill>
         <p:spPr>
           <a:xfrm>
-            <a:off x="1659331" y="1847087"/>
-            <a:ext cx="1220724" cy="1220724"/>
+            <a:off x="10271455" y="5998464"/>
+            <a:ext cx="1463040" cy="643233"/>
           </a:xfrm>
           <a:prstGeom prst="rect">
             <a:avLst/>
@@ -8237,14 +8936,14 @@
       </p:pic>
       <p:sp>
         <p:nvSpPr>
-          <p:cNvPr id="10" name="TextBox 9"/>
+          <p:cNvPr id="4" name="TextBox 3"/>
           <p:cNvSpPr txBox="1"/>
           <p:nvPr/>
         </p:nvSpPr>
         <p:spPr>
           <a:xfrm>
-            <a:off x="530352" y="3159251"/>
-            <a:ext cx="3478682" cy="621792"/>
+            <a:off x="457200" y="1737360"/>
+            <a:ext cx="11277295" cy="1097280"/>
           </a:xfrm>
           <a:prstGeom prst="rect">
             <a:avLst/>
@@ -8252,660 +8951,32 @@
           <a:noFill/>
         </p:spPr>
         <p:txBody>
-          <a:bodyPr wrap="square" anchor="t"/>
+          <a:bodyPr wrap="square" anchor="ctr"/>
           <a:lstStyle/>
           <a:p>
             <a:pPr algn="ctr"/>
             <a:r>
-              <a:rPr sz="1300" b="1" i="0">
+              <a:rPr sz="3400" b="1" i="0">
                 <a:solidFill>
                   <a:srgbClr val="095292"/>
                 </a:solidFill>
                 <a:latin typeface="Calibri"/>
               </a:rPr>
-              <a:t>Oracle Live SQL</a:t>
-            </a:r>
-          </a:p>
-          <a:p>
-            <a:pPr algn="ctr">
-              <a:spcBef>
-                <a:spcPts val="200"/>
-              </a:spcBef>
-            </a:pPr>
-            <a:r>
-              <a:rPr sz="1000" b="0" i="0">
-                <a:solidFill>
-                  <a:srgbClr val="666666"/>
-                </a:solidFill>
-                <a:latin typeface="Calibri"/>
-              </a:rPr>
-              <a:t>Demo procs</a:t>
-            </a:r>
-          </a:p>
-        </p:txBody>
-      </p:sp>
-      <p:sp>
-        <p:nvSpPr>
-          <p:cNvPr id="11" name="Rounded Rectangle 10"/>
-          <p:cNvSpPr/>
-          <p:nvPr/>
-        </p:nvSpPr>
-        <p:spPr>
-          <a:xfrm>
-            <a:off x="4283354" y="1591056"/>
-            <a:ext cx="3624986" cy="2299716"/>
-          </a:xfrm>
-          <a:prstGeom prst="roundRect">
-            <a:avLst>
-              <a:gd name="adj" fmla="val 12000"/>
-            </a:avLst>
-          </a:prstGeom>
-          <a:solidFill>
-            <a:srgbClr val="F2F2F2"/>
-          </a:solidFill>
-          <a:ln>
-            <a:noFill/>
-          </a:ln>
-        </p:spPr>
-        <p:style>
-          <a:lnRef idx="1">
-            <a:schemeClr val="accent1"/>
-          </a:lnRef>
-          <a:fillRef idx="3">
-            <a:schemeClr val="accent1"/>
-          </a:fillRef>
-          <a:effectRef idx="2">
-            <a:schemeClr val="accent1"/>
-          </a:effectRef>
-          <a:fontRef idx="minor">
-            <a:schemeClr val="lt1"/>
-          </a:fontRef>
-        </p:style>
-        <p:txBody>
-          <a:bodyPr rtlCol="0" anchor="ctr"/>
-          <a:lstStyle/>
-          <a:p>
-            <a:pPr algn="ctr"/>
-          </a:p>
-        </p:txBody>
-      </p:sp>
-      <p:sp>
-        <p:nvSpPr>
-          <p:cNvPr id="12" name="Rectangle 11"/>
-          <p:cNvSpPr/>
-          <p:nvPr/>
-        </p:nvSpPr>
-        <p:spPr>
-          <a:xfrm>
-            <a:off x="4283354" y="1591056"/>
-            <a:ext cx="3624986" cy="64008"/>
-          </a:xfrm>
-          <a:prstGeom prst="rect">
-            <a:avLst/>
-          </a:prstGeom>
-          <a:solidFill>
-            <a:srgbClr val="095292"/>
-          </a:solidFill>
-          <a:ln>
-            <a:noFill/>
-          </a:ln>
-        </p:spPr>
-        <p:style>
-          <a:lnRef idx="1">
-            <a:schemeClr val="accent1"/>
-          </a:lnRef>
-          <a:fillRef idx="3">
-            <a:schemeClr val="accent1"/>
-          </a:fillRef>
-          <a:effectRef idx="2">
-            <a:schemeClr val="accent1"/>
-          </a:effectRef>
-          <a:fontRef idx="minor">
-            <a:schemeClr val="lt1"/>
-          </a:fontRef>
-        </p:style>
-        <p:txBody>
-          <a:bodyPr rtlCol="0" anchor="ctr"/>
-          <a:lstStyle/>
-          <a:p>
-            <a:pPr algn="ctr"/>
-          </a:p>
-        </p:txBody>
-      </p:sp>
-      <p:sp>
-        <p:nvSpPr>
-          <p:cNvPr id="13" name="Rectangle 12"/>
-          <p:cNvSpPr/>
-          <p:nvPr/>
-        </p:nvSpPr>
-        <p:spPr>
-          <a:xfrm>
-            <a:off x="4283354" y="1655064"/>
-            <a:ext cx="3624986" cy="27432"/>
-          </a:xfrm>
-          <a:prstGeom prst="rect">
-            <a:avLst/>
-          </a:prstGeom>
-          <a:solidFill>
-            <a:srgbClr val="FFD000"/>
-          </a:solidFill>
-          <a:ln>
-            <a:noFill/>
-          </a:ln>
-        </p:spPr>
-        <p:style>
-          <a:lnRef idx="1">
-            <a:schemeClr val="accent1"/>
-          </a:lnRef>
-          <a:fillRef idx="3">
-            <a:schemeClr val="accent1"/>
-          </a:fillRef>
-          <a:effectRef idx="2">
-            <a:schemeClr val="accent1"/>
-          </a:effectRef>
-          <a:fontRef idx="minor">
-            <a:schemeClr val="lt1"/>
-          </a:fontRef>
-        </p:style>
-        <p:txBody>
-          <a:bodyPr rtlCol="0" anchor="ctr"/>
-          <a:lstStyle/>
-          <a:p>
-            <a:pPr algn="ctr"/>
-          </a:p>
-        </p:txBody>
-      </p:sp>
-      <p:pic>
-        <p:nvPicPr>
-          <p:cNvPr id="14" name="Picture 13" descr="drawio.png"/>
-          <p:cNvPicPr>
-            <a:picLocks noChangeAspect="1"/>
-          </p:cNvPicPr>
-          <p:nvPr/>
-        </p:nvPicPr>
-        <p:blipFill>
-          <a:blip r:embed="rId3"/>
-          <a:stretch>
-            <a:fillRect/>
-          </a:stretch>
-        </p:blipFill>
-        <p:spPr>
-          <a:xfrm>
-            <a:off x="5485485" y="1847087"/>
-            <a:ext cx="1220724" cy="1220724"/>
-          </a:xfrm>
-          <a:prstGeom prst="rect">
-            <a:avLst/>
-          </a:prstGeom>
-        </p:spPr>
-      </p:pic>
-      <p:sp>
-        <p:nvSpPr>
-          <p:cNvPr id="15" name="TextBox 14"/>
+              <a:t>Clase 11 · Avance PI · VetCare DB</a:t>
+            </a:r>
+          </a:p>
+        </p:txBody>
+      </p:sp>
+      <p:sp>
+        <p:nvSpPr>
+          <p:cNvPr id="5" name="TextBox 4"/>
           <p:cNvSpPr txBox="1"/>
           <p:nvPr/>
         </p:nvSpPr>
         <p:spPr>
           <a:xfrm>
-            <a:off x="4356506" y="3159251"/>
-            <a:ext cx="3478682" cy="621792"/>
-          </a:xfrm>
-          <a:prstGeom prst="rect">
-            <a:avLst/>
-          </a:prstGeom>
-          <a:noFill/>
-        </p:spPr>
-        <p:txBody>
-          <a:bodyPr wrap="square" anchor="t"/>
-          <a:lstStyle/>
-          <a:p>
-            <a:pPr algn="ctr"/>
-            <a:r>
-              <a:rPr sz="1300" b="1" i="0">
-                <a:solidFill>
-                  <a:srgbClr val="095292"/>
-                </a:solidFill>
-                <a:latin typeface="Calibri"/>
-              </a:rPr>
-              <a:t>draw.io</a:t>
-            </a:r>
-          </a:p>
-          <a:p>
-            <a:pPr algn="ctr">
-              <a:spcBef>
-                <a:spcPts val="200"/>
-              </a:spcBef>
-            </a:pPr>
-            <a:r>
-              <a:rPr sz="1000" b="0" i="0">
-                <a:solidFill>
-                  <a:srgbClr val="666666"/>
-                </a:solidFill>
-                <a:latin typeface="Calibri"/>
-              </a:rPr>
-              <a:t>ER</a:t>
-            </a:r>
-          </a:p>
-        </p:txBody>
-      </p:sp>
-      <p:sp>
-        <p:nvSpPr>
-          <p:cNvPr id="16" name="Rounded Rectangle 15"/>
-          <p:cNvSpPr/>
-          <p:nvPr/>
-        </p:nvSpPr>
-        <p:spPr>
-          <a:xfrm>
-            <a:off x="8109508" y="1591056"/>
-            <a:ext cx="3624986" cy="2299716"/>
-          </a:xfrm>
-          <a:prstGeom prst="roundRect">
-            <a:avLst>
-              <a:gd name="adj" fmla="val 12000"/>
-            </a:avLst>
-          </a:prstGeom>
-          <a:solidFill>
-            <a:srgbClr val="F2F2F2"/>
-          </a:solidFill>
-          <a:ln>
-            <a:noFill/>
-          </a:ln>
-        </p:spPr>
-        <p:style>
-          <a:lnRef idx="1">
-            <a:schemeClr val="accent1"/>
-          </a:lnRef>
-          <a:fillRef idx="3">
-            <a:schemeClr val="accent1"/>
-          </a:fillRef>
-          <a:effectRef idx="2">
-            <a:schemeClr val="accent1"/>
-          </a:effectRef>
-          <a:fontRef idx="minor">
-            <a:schemeClr val="lt1"/>
-          </a:fontRef>
-        </p:style>
-        <p:txBody>
-          <a:bodyPr rtlCol="0" anchor="ctr"/>
-          <a:lstStyle/>
-          <a:p>
-            <a:pPr algn="ctr"/>
-          </a:p>
-        </p:txBody>
-      </p:sp>
-      <p:sp>
-        <p:nvSpPr>
-          <p:cNvPr id="17" name="Rectangle 16"/>
-          <p:cNvSpPr/>
-          <p:nvPr/>
-        </p:nvSpPr>
-        <p:spPr>
-          <a:xfrm>
-            <a:off x="8109508" y="1591056"/>
-            <a:ext cx="3624986" cy="64008"/>
-          </a:xfrm>
-          <a:prstGeom prst="rect">
-            <a:avLst/>
-          </a:prstGeom>
-          <a:solidFill>
-            <a:srgbClr val="095292"/>
-          </a:solidFill>
-          <a:ln>
-            <a:noFill/>
-          </a:ln>
-        </p:spPr>
-        <p:style>
-          <a:lnRef idx="1">
-            <a:schemeClr val="accent1"/>
-          </a:lnRef>
-          <a:fillRef idx="3">
-            <a:schemeClr val="accent1"/>
-          </a:fillRef>
-          <a:effectRef idx="2">
-            <a:schemeClr val="accent1"/>
-          </a:effectRef>
-          <a:fontRef idx="minor">
-            <a:schemeClr val="lt1"/>
-          </a:fontRef>
-        </p:style>
-        <p:txBody>
-          <a:bodyPr rtlCol="0" anchor="ctr"/>
-          <a:lstStyle/>
-          <a:p>
-            <a:pPr algn="ctr"/>
-          </a:p>
-        </p:txBody>
-      </p:sp>
-      <p:sp>
-        <p:nvSpPr>
-          <p:cNvPr id="18" name="Rectangle 17"/>
-          <p:cNvSpPr/>
-          <p:nvPr/>
-        </p:nvSpPr>
-        <p:spPr>
-          <a:xfrm>
-            <a:off x="8109508" y="1655064"/>
-            <a:ext cx="3624986" cy="27432"/>
-          </a:xfrm>
-          <a:prstGeom prst="rect">
-            <a:avLst/>
-          </a:prstGeom>
-          <a:solidFill>
-            <a:srgbClr val="FFD000"/>
-          </a:solidFill>
-          <a:ln>
-            <a:noFill/>
-          </a:ln>
-        </p:spPr>
-        <p:style>
-          <a:lnRef idx="1">
-            <a:schemeClr val="accent1"/>
-          </a:lnRef>
-          <a:fillRef idx="3">
-            <a:schemeClr val="accent1"/>
-          </a:fillRef>
-          <a:effectRef idx="2">
-            <a:schemeClr val="accent1"/>
-          </a:effectRef>
-          <a:fontRef idx="minor">
-            <a:schemeClr val="lt1"/>
-          </a:fontRef>
-        </p:style>
-        <p:txBody>
-          <a:bodyPr rtlCol="0" anchor="ctr"/>
-          <a:lstStyle/>
-          <a:p>
-            <a:pPr algn="ctr"/>
-          </a:p>
-        </p:txBody>
-      </p:sp>
-      <p:pic>
-        <p:nvPicPr>
-          <p:cNvPr id="19" name="Picture 18" descr="dbfiddle.png"/>
-          <p:cNvPicPr>
-            <a:picLocks noChangeAspect="1"/>
-          </p:cNvPicPr>
-          <p:nvPr/>
-        </p:nvPicPr>
-        <p:blipFill>
-          <a:blip r:embed="rId4"/>
-          <a:stretch>
-            <a:fillRect/>
-          </a:stretch>
-        </p:blipFill>
-        <p:spPr>
-          <a:xfrm>
-            <a:off x="9311640" y="1847087"/>
-            <a:ext cx="1220724" cy="1220724"/>
-          </a:xfrm>
-          <a:prstGeom prst="rect">
-            <a:avLst/>
-          </a:prstGeom>
-        </p:spPr>
-      </p:pic>
-      <p:sp>
-        <p:nvSpPr>
-          <p:cNvPr id="20" name="TextBox 19"/>
-          <p:cNvSpPr txBox="1"/>
-          <p:nvPr/>
-        </p:nvSpPr>
-        <p:spPr>
-          <a:xfrm>
-            <a:off x="8182660" y="3159251"/>
-            <a:ext cx="3478682" cy="621792"/>
-          </a:xfrm>
-          <a:prstGeom prst="rect">
-            <a:avLst/>
-          </a:prstGeom>
-          <a:noFill/>
-        </p:spPr>
-        <p:txBody>
-          <a:bodyPr wrap="square" anchor="t"/>
-          <a:lstStyle/>
-          <a:p>
-            <a:pPr algn="ctr"/>
-            <a:r>
-              <a:rPr sz="1300" b="1" i="0">
-                <a:solidFill>
-                  <a:srgbClr val="095292"/>
-                </a:solidFill>
-                <a:latin typeface="Calibri"/>
-              </a:rPr>
-              <a:t>DB Fiddle</a:t>
-            </a:r>
-          </a:p>
-          <a:p>
-            <a:pPr algn="ctr">
-              <a:spcBef>
-                <a:spcPts val="200"/>
-              </a:spcBef>
-            </a:pPr>
-            <a:r>
-              <a:rPr sz="1000" b="0" i="0">
-                <a:solidFill>
-                  <a:srgbClr val="666666"/>
-                </a:solidFill>
-                <a:latin typeface="Calibri"/>
-              </a:rPr>
-              <a:t>DDL</a:t>
-            </a:r>
-          </a:p>
-        </p:txBody>
-      </p:sp>
-      <p:sp>
-        <p:nvSpPr>
-          <p:cNvPr id="21" name="Rounded Rectangle 20"/>
-          <p:cNvSpPr/>
-          <p:nvPr/>
-        </p:nvSpPr>
-        <p:spPr>
-          <a:xfrm>
-            <a:off x="4283354" y="4055364"/>
-            <a:ext cx="3624986" cy="2299716"/>
-          </a:xfrm>
-          <a:prstGeom prst="roundRect">
-            <a:avLst>
-              <a:gd name="adj" fmla="val 12000"/>
-            </a:avLst>
-          </a:prstGeom>
-          <a:solidFill>
-            <a:srgbClr val="F2F2F2"/>
-          </a:solidFill>
-          <a:ln>
-            <a:noFill/>
-          </a:ln>
-        </p:spPr>
-        <p:style>
-          <a:lnRef idx="1">
-            <a:schemeClr val="accent1"/>
-          </a:lnRef>
-          <a:fillRef idx="3">
-            <a:schemeClr val="accent1"/>
-          </a:fillRef>
-          <a:effectRef idx="2">
-            <a:schemeClr val="accent1"/>
-          </a:effectRef>
-          <a:fontRef idx="minor">
-            <a:schemeClr val="lt1"/>
-          </a:fontRef>
-        </p:style>
-        <p:txBody>
-          <a:bodyPr rtlCol="0" anchor="ctr"/>
-          <a:lstStyle/>
-          <a:p>
-            <a:pPr algn="ctr"/>
-          </a:p>
-        </p:txBody>
-      </p:sp>
-      <p:sp>
-        <p:nvSpPr>
-          <p:cNvPr id="22" name="Rectangle 21"/>
-          <p:cNvSpPr/>
-          <p:nvPr/>
-        </p:nvSpPr>
-        <p:spPr>
-          <a:xfrm>
-            <a:off x="4283354" y="4055364"/>
-            <a:ext cx="3624986" cy="64008"/>
-          </a:xfrm>
-          <a:prstGeom prst="rect">
-            <a:avLst/>
-          </a:prstGeom>
-          <a:solidFill>
-            <a:srgbClr val="095292"/>
-          </a:solidFill>
-          <a:ln>
-            <a:noFill/>
-          </a:ln>
-        </p:spPr>
-        <p:style>
-          <a:lnRef idx="1">
-            <a:schemeClr val="accent1"/>
-          </a:lnRef>
-          <a:fillRef idx="3">
-            <a:schemeClr val="accent1"/>
-          </a:fillRef>
-          <a:effectRef idx="2">
-            <a:schemeClr val="accent1"/>
-          </a:effectRef>
-          <a:fontRef idx="minor">
-            <a:schemeClr val="lt1"/>
-          </a:fontRef>
-        </p:style>
-        <p:txBody>
-          <a:bodyPr rtlCol="0" anchor="ctr"/>
-          <a:lstStyle/>
-          <a:p>
-            <a:pPr algn="ctr"/>
-          </a:p>
-        </p:txBody>
-      </p:sp>
-      <p:sp>
-        <p:nvSpPr>
-          <p:cNvPr id="23" name="Rectangle 22"/>
-          <p:cNvSpPr/>
-          <p:nvPr/>
-        </p:nvSpPr>
-        <p:spPr>
-          <a:xfrm>
-            <a:off x="4283354" y="4119372"/>
-            <a:ext cx="3624986" cy="27432"/>
-          </a:xfrm>
-          <a:prstGeom prst="rect">
-            <a:avLst/>
-          </a:prstGeom>
-          <a:solidFill>
-            <a:srgbClr val="FFD000"/>
-          </a:solidFill>
-          <a:ln>
-            <a:noFill/>
-          </a:ln>
-        </p:spPr>
-        <p:style>
-          <a:lnRef idx="1">
-            <a:schemeClr val="accent1"/>
-          </a:lnRef>
-          <a:fillRef idx="3">
-            <a:schemeClr val="accent1"/>
-          </a:fillRef>
-          <a:effectRef idx="2">
-            <a:schemeClr val="accent1"/>
-          </a:effectRef>
-          <a:fontRef idx="minor">
-            <a:schemeClr val="lt1"/>
-          </a:fontRef>
-        </p:style>
-        <p:txBody>
-          <a:bodyPr rtlCol="0" anchor="ctr"/>
-          <a:lstStyle/>
-          <a:p>
-            <a:pPr algn="ctr"/>
-          </a:p>
-        </p:txBody>
-      </p:sp>
-      <p:pic>
-        <p:nvPicPr>
-          <p:cNvPr id="24" name="Picture 23" descr="google_docs.png"/>
-          <p:cNvPicPr>
-            <a:picLocks noChangeAspect="1"/>
-          </p:cNvPicPr>
-          <p:nvPr/>
-        </p:nvPicPr>
-        <p:blipFill>
-          <a:blip r:embed="rId5"/>
-          <a:stretch>
-            <a:fillRect/>
-          </a:stretch>
-        </p:blipFill>
-        <p:spPr>
-          <a:xfrm>
-            <a:off x="5485485" y="4311396"/>
-            <a:ext cx="1220724" cy="1220724"/>
-          </a:xfrm>
-          <a:prstGeom prst="rect">
-            <a:avLst/>
-          </a:prstGeom>
-        </p:spPr>
-      </p:pic>
-      <p:sp>
-        <p:nvSpPr>
-          <p:cNvPr id="25" name="TextBox 24"/>
-          <p:cNvSpPr txBox="1"/>
-          <p:nvPr/>
-        </p:nvSpPr>
-        <p:spPr>
-          <a:xfrm>
-            <a:off x="4356506" y="5623560"/>
-            <a:ext cx="3478682" cy="621792"/>
-          </a:xfrm>
-          <a:prstGeom prst="rect">
-            <a:avLst/>
-          </a:prstGeom>
-          <a:noFill/>
-        </p:spPr>
-        <p:txBody>
-          <a:bodyPr wrap="square" anchor="t"/>
-          <a:lstStyle/>
-          <a:p>
-            <a:pPr algn="ctr"/>
-            <a:r>
-              <a:rPr sz="1300" b="1" i="0">
-                <a:solidFill>
-                  <a:srgbClr val="095292"/>
-                </a:solidFill>
-                <a:latin typeface="Calibri"/>
-              </a:rPr>
-              <a:t>Google Docs</a:t>
-            </a:r>
-          </a:p>
-          <a:p>
-            <a:pPr algn="ctr">
-              <a:spcBef>
-                <a:spcPts val="200"/>
-              </a:spcBef>
-            </a:pPr>
-            <a:r>
-              <a:rPr sz="1000" b="0" i="0">
-                <a:solidFill>
-                  <a:srgbClr val="666666"/>
-                </a:solidFill>
-                <a:latin typeface="Calibri"/>
-              </a:rPr>
-              <a:t>Checklist</a:t>
-            </a:r>
-          </a:p>
-        </p:txBody>
-      </p:sp>
-      <p:sp>
-        <p:nvSpPr>
-          <p:cNvPr id="26" name="TextBox 25"/>
-          <p:cNvSpPr txBox="1"/>
-          <p:nvPr/>
-        </p:nvSpPr>
-        <p:spPr>
-          <a:xfrm>
-            <a:off x="11185855" y="6473952"/>
-            <a:ext cx="640080" cy="274320"/>
+            <a:off x="457200" y="3017520"/>
+            <a:ext cx="11277295" cy="1645920"/>
           </a:xfrm>
           <a:prstGeom prst="rect">
             <a:avLst/>
@@ -8918,141 +8989,65 @@
           </a:bodyPr>
           <a:lstStyle/>
           <a:p>
-            <a:pPr algn="r"/>
-            <a:r>
-              <a:rPr sz="1100" b="0" i="0">
-                <a:solidFill>
-                  <a:srgbClr val="666666"/>
-                </a:solidFill>
-                <a:latin typeface="Calibri"/>
-              </a:rPr>
-              <a:t>23</a:t>
-            </a:r>
-          </a:p>
-        </p:txBody>
-      </p:sp>
-    </p:spTree>
-  </p:cSld>
-  <p:clrMapOvr>
-    <a:masterClrMapping/>
-  </p:clrMapOvr>
-</p:sld>
-</file>
-
-<file path=ppt/slides/slide24.xml><?xml version="1.0" encoding="utf-8"?>
-<p:sld xmlns:a="http://schemas.openxmlformats.org/drawingml/2006/main" xmlns:p="http://schemas.openxmlformats.org/presentationml/2006/main" xmlns:r="http://schemas.openxmlformats.org/officeDocument/2006/relationships">
-  <p:cSld>
-    <p:bg>
-      <p:bgPr>
-        <a:solidFill>
-          <a:srgbClr val="FFFFFF"/>
-        </a:solidFill>
-        <a:effectLst/>
-      </p:bgPr>
-    </p:bg>
-    <p:spTree>
-      <p:nvGrpSpPr>
-        <p:cNvPr id="1" name=""/>
-        <p:cNvGrpSpPr/>
-        <p:nvPr/>
-      </p:nvGrpSpPr>
-      <p:grpSpPr/>
-      <p:sp>
-        <p:nvSpPr>
-          <p:cNvPr id="2" name="Rectangle 1"/>
-          <p:cNvSpPr/>
-          <p:nvPr/>
-        </p:nvSpPr>
-        <p:spPr>
-          <a:xfrm>
-            <a:off x="0" y="0"/>
-            <a:ext cx="12191695" cy="1170432"/>
-          </a:xfrm>
-          <a:prstGeom prst="rect">
-            <a:avLst/>
-          </a:prstGeom>
-          <a:solidFill>
-            <a:srgbClr val="095292"/>
-          </a:solidFill>
-          <a:ln>
-            <a:noFill/>
-          </a:ln>
-        </p:spPr>
-        <p:style>
-          <a:lnRef idx="1">
-            <a:schemeClr val="accent1"/>
-          </a:lnRef>
-          <a:fillRef idx="3">
-            <a:schemeClr val="accent1"/>
-          </a:fillRef>
-          <a:effectRef idx="2">
-            <a:schemeClr val="accent1"/>
-          </a:effectRef>
-          <a:fontRef idx="minor">
-            <a:schemeClr val="lt1"/>
-          </a:fontRef>
-        </p:style>
-        <p:txBody>
-          <a:bodyPr rtlCol="0" anchor="ctr"/>
-          <a:lstStyle/>
-          <a:p>
-            <a:pPr algn="ctr"/>
-          </a:p>
-        </p:txBody>
-      </p:sp>
-      <p:sp>
-        <p:nvSpPr>
-          <p:cNvPr id="3" name="Rectangle 2"/>
-          <p:cNvSpPr/>
-          <p:nvPr/>
-        </p:nvSpPr>
-        <p:spPr>
-          <a:xfrm>
-            <a:off x="0" y="1170432"/>
-            <a:ext cx="12191695" cy="41148"/>
-          </a:xfrm>
-          <a:prstGeom prst="rect">
-            <a:avLst/>
-          </a:prstGeom>
-          <a:solidFill>
-            <a:srgbClr val="FFD000"/>
-          </a:solidFill>
-          <a:ln>
-            <a:noFill/>
-          </a:ln>
-        </p:spPr>
-        <p:style>
-          <a:lnRef idx="1">
-            <a:schemeClr val="accent1"/>
-          </a:lnRef>
-          <a:fillRef idx="3">
-            <a:schemeClr val="accent1"/>
-          </a:fillRef>
-          <a:effectRef idx="2">
-            <a:schemeClr val="accent1"/>
-          </a:effectRef>
-          <a:fontRef idx="minor">
-            <a:schemeClr val="lt1"/>
-          </a:fontRef>
-        </p:style>
-        <p:txBody>
-          <a:bodyPr rtlCol="0" anchor="ctr"/>
-          <a:lstStyle/>
-          <a:p>
-            <a:pPr algn="ctr"/>
-          </a:p>
-        </p:txBody>
-      </p:sp>
-      <p:sp>
-        <p:nvSpPr>
-          <p:cNvPr id="4" name="TextBox 3"/>
+            <a:pPr algn="ctr">
+              <a:spcAft>
+                <a:spcPts val="600"/>
+              </a:spcAft>
+            </a:pPr>
+            <a:r>
+              <a:rPr sz="1600" b="0" i="0">
+                <a:solidFill>
+                  <a:srgbClr val="333333"/>
+                </a:solidFill>
+                <a:latin typeface="Calibri"/>
+              </a:rPr>
+              <a:t>Que es una revision tecnica, y con que producto se sale</a:t>
+            </a:r>
+          </a:p>
+          <a:p>
+            <a:pPr algn="ctr">
+              <a:spcAft>
+                <a:spcPts val="600"/>
+              </a:spcAft>
+            </a:pPr>
+            <a:r>
+              <a:rPr sz="1600" b="0" i="0">
+                <a:solidFill>
+                  <a:srgbClr val="333333"/>
+                </a:solidFill>
+                <a:latin typeface="Calibri"/>
+              </a:rPr>
+              <a:t>Lo que se audita es la coherencia entre piezas</a:t>
+            </a:r>
+          </a:p>
+          <a:p>
+            <a:pPr algn="ctr">
+              <a:spcAft>
+                <a:spcPts val="600"/>
+              </a:spcAft>
+            </a:pPr>
+            <a:r>
+              <a:rPr sz="1600" b="0" i="0">
+                <a:solidFill>
+                  <a:srgbClr val="333333"/>
+                </a:solidFill>
+                <a:latin typeface="Calibri"/>
+              </a:rPr>
+              <a:t>Verificaciones uno y dos</a:t>
+            </a:r>
+          </a:p>
+        </p:txBody>
+      </p:sp>
+      <p:sp>
+        <p:nvSpPr>
+          <p:cNvPr id="6" name="TextBox 5"/>
           <p:cNvSpPr txBox="1"/>
           <p:nvPr/>
         </p:nvSpPr>
         <p:spPr>
           <a:xfrm>
-            <a:off x="457200" y="164592"/>
-            <a:ext cx="11277295" cy="384048"/>
+            <a:off x="457200" y="4754880"/>
+            <a:ext cx="11277295" cy="640080"/>
           </a:xfrm>
           <a:prstGeom prst="rect">
             <a:avLst/>
@@ -9065,3092 +9060,15 @@
           </a:bodyPr>
           <a:lstStyle/>
           <a:p>
-            <a:r>
-              <a:rPr sz="2600" b="1" i="0">
-                <a:solidFill>
-                  <a:srgbClr val="FFFFFF"/>
-                </a:solidFill>
-                <a:latin typeface="Calibri"/>
-              </a:rPr>
-              <a:t>Del boceto a la plataforma del curso (diagrama)</a:t>
-            </a:r>
-          </a:p>
-        </p:txBody>
-      </p:sp>
-      <p:sp>
-        <p:nvSpPr>
-          <p:cNvPr id="5" name="TextBox 4"/>
-          <p:cNvSpPr txBox="1"/>
-          <p:nvPr/>
-        </p:nvSpPr>
-        <p:spPr>
-          <a:xfrm>
-            <a:off x="457200" y="566928"/>
-            <a:ext cx="11277295" cy="411480"/>
-          </a:xfrm>
-          <a:prstGeom prst="rect">
-            <a:avLst/>
-          </a:prstGeom>
-          <a:noFill/>
-        </p:spPr>
-        <p:txBody>
-          <a:bodyPr wrap="square">
-            <a:spAutoFit/>
-          </a:bodyPr>
-          <a:lstStyle/>
-          <a:p>
-            <a:r>
-              <a:rPr sz="1400" b="0" i="0">
-                <a:solidFill>
-                  <a:srgbClr val="B8D8EE"/>
-                </a:solidFill>
-                <a:latin typeface="Calibri"/>
-              </a:rPr>
-              <a:t>El diagrama se entrega como codigo Mermaid dentro de la plataforma del curso, no como imagen</a:t>
-            </a:r>
-          </a:p>
-        </p:txBody>
-      </p:sp>
-      <p:sp>
-        <p:nvSpPr>
-          <p:cNvPr id="6" name="Rounded Rectangle 5"/>
-          <p:cNvSpPr/>
-          <p:nvPr/>
-        </p:nvSpPr>
-        <p:spPr>
-          <a:xfrm>
-            <a:off x="457200" y="1659636"/>
-            <a:ext cx="11277295" cy="1051560"/>
-          </a:xfrm>
-          <a:prstGeom prst="roundRect">
-            <a:avLst>
-              <a:gd name="adj" fmla="val 12000"/>
-            </a:avLst>
-          </a:prstGeom>
-          <a:solidFill>
-            <a:srgbClr val="F2F2F2"/>
-          </a:solidFill>
-          <a:ln>
-            <a:noFill/>
-          </a:ln>
-        </p:spPr>
-        <p:style>
-          <a:lnRef idx="1">
-            <a:schemeClr val="accent1"/>
-          </a:lnRef>
-          <a:fillRef idx="3">
-            <a:schemeClr val="accent1"/>
-          </a:fillRef>
-          <a:effectRef idx="2">
-            <a:schemeClr val="accent1"/>
-          </a:effectRef>
-          <a:fontRef idx="minor">
-            <a:schemeClr val="lt1"/>
-          </a:fontRef>
-        </p:style>
-        <p:txBody>
-          <a:bodyPr rtlCol="0" anchor="ctr"/>
-          <a:lstStyle/>
-          <a:p>
             <a:pPr algn="ctr"/>
-          </a:p>
-        </p:txBody>
-      </p:sp>
-      <p:sp>
-        <p:nvSpPr>
-          <p:cNvPr id="7" name="Rounded Rectangle 6"/>
-          <p:cNvSpPr/>
-          <p:nvPr/>
-        </p:nvSpPr>
-        <p:spPr>
-          <a:xfrm>
-            <a:off x="594360" y="1965960"/>
-            <a:ext cx="438912" cy="438912"/>
-          </a:xfrm>
-          <a:prstGeom prst="roundRect">
-            <a:avLst>
-              <a:gd name="adj" fmla="val 12000"/>
-            </a:avLst>
-          </a:prstGeom>
-          <a:solidFill>
-            <a:srgbClr val="095292"/>
-          </a:solidFill>
-          <a:ln>
-            <a:noFill/>
-          </a:ln>
-        </p:spPr>
-        <p:style>
-          <a:lnRef idx="1">
-            <a:schemeClr val="accent1"/>
-          </a:lnRef>
-          <a:fillRef idx="3">
-            <a:schemeClr val="accent1"/>
-          </a:fillRef>
-          <a:effectRef idx="2">
-            <a:schemeClr val="accent1"/>
-          </a:effectRef>
-          <a:fontRef idx="minor">
-            <a:schemeClr val="lt1"/>
-          </a:fontRef>
-        </p:style>
-        <p:txBody>
-          <a:bodyPr rtlCol="0" anchor="ctr"/>
-          <a:lstStyle/>
-          <a:p>
-            <a:pPr algn="ctr"/>
-          </a:p>
-        </p:txBody>
-      </p:sp>
-      <p:sp>
-        <p:nvSpPr>
-          <p:cNvPr id="8" name="TextBox 7"/>
-          <p:cNvSpPr txBox="1"/>
-          <p:nvPr/>
-        </p:nvSpPr>
-        <p:spPr>
-          <a:xfrm>
-            <a:off x="594360" y="1965960"/>
-            <a:ext cx="438912" cy="438912"/>
-          </a:xfrm>
-          <a:prstGeom prst="rect">
-            <a:avLst/>
-          </a:prstGeom>
-          <a:noFill/>
-        </p:spPr>
-        <p:txBody>
-          <a:bodyPr wrap="square" anchor="ctr"/>
-          <a:lstStyle/>
-          <a:p>
-            <a:pPr algn="ctr"/>
-            <a:r>
-              <a:rPr sz="1600" b="1" i="0">
-                <a:solidFill>
-                  <a:srgbClr val="FFFFFF"/>
-                </a:solidFill>
-                <a:latin typeface="Calibri"/>
-              </a:rPr>
-              <a:t>1</a:t>
-            </a:r>
-          </a:p>
-        </p:txBody>
-      </p:sp>
-      <p:sp>
-        <p:nvSpPr>
-          <p:cNvPr id="9" name="TextBox 8"/>
-          <p:cNvSpPr txBox="1"/>
-          <p:nvPr/>
-        </p:nvSpPr>
-        <p:spPr>
-          <a:xfrm>
-            <a:off x="1188720" y="1751076"/>
-            <a:ext cx="10271455" cy="886968"/>
-          </a:xfrm>
-          <a:prstGeom prst="rect">
-            <a:avLst/>
-          </a:prstGeom>
-          <a:noFill/>
-        </p:spPr>
-        <p:txBody>
-          <a:bodyPr wrap="square" anchor="ctr"/>
-          <a:lstStyle/>
-          <a:p>
-            <a:r>
-              <a:rPr sz="1500" b="1" i="0">
-                <a:solidFill>
-                  <a:srgbClr val="095292"/>
-                </a:solidFill>
-                <a:latin typeface="Calibri"/>
-              </a:rPr>
-              <a:t>Disena visual</a:t>
-            </a:r>
-          </a:p>
-          <a:p>
-            <a:pPr>
-              <a:spcBef>
-                <a:spcPts val="200"/>
-              </a:spcBef>
-            </a:pPr>
-            <a:r>
-              <a:rPr sz="1300" b="0" i="0">
-                <a:solidFill>
-                  <a:srgbClr val="333333"/>
-                </a:solidFill>
-                <a:latin typeface="Calibri"/>
-              </a:rPr>
-              <a:t>Dibuja el diagrama como quieras en Excalidraw o draw.io: es mas rapido arrastrar cajas que escribir codigo, y ahi es donde piensas el modelo.</a:t>
-            </a:r>
-          </a:p>
-        </p:txBody>
-      </p:sp>
-      <p:sp>
-        <p:nvSpPr>
-          <p:cNvPr id="10" name="Rounded Rectangle 9"/>
-          <p:cNvSpPr/>
-          <p:nvPr/>
-        </p:nvSpPr>
-        <p:spPr>
-          <a:xfrm>
-            <a:off x="457200" y="2802636"/>
-            <a:ext cx="11277295" cy="1051560"/>
-          </a:xfrm>
-          <a:prstGeom prst="roundRect">
-            <a:avLst>
-              <a:gd name="adj" fmla="val 12000"/>
-            </a:avLst>
-          </a:prstGeom>
-          <a:solidFill>
-            <a:srgbClr val="E8F4FA"/>
-          </a:solidFill>
-          <a:ln>
-            <a:noFill/>
-          </a:ln>
-        </p:spPr>
-        <p:style>
-          <a:lnRef idx="1">
-            <a:schemeClr val="accent1"/>
-          </a:lnRef>
-          <a:fillRef idx="3">
-            <a:schemeClr val="accent1"/>
-          </a:fillRef>
-          <a:effectRef idx="2">
-            <a:schemeClr val="accent1"/>
-          </a:effectRef>
-          <a:fontRef idx="minor">
-            <a:schemeClr val="lt1"/>
-          </a:fontRef>
-        </p:style>
-        <p:txBody>
-          <a:bodyPr rtlCol="0" anchor="ctr"/>
-          <a:lstStyle/>
-          <a:p>
-            <a:pPr algn="ctr"/>
-          </a:p>
-        </p:txBody>
-      </p:sp>
-      <p:sp>
-        <p:nvSpPr>
-          <p:cNvPr id="11" name="Rounded Rectangle 10"/>
-          <p:cNvSpPr/>
-          <p:nvPr/>
-        </p:nvSpPr>
-        <p:spPr>
-          <a:xfrm>
-            <a:off x="594360" y="3108960"/>
-            <a:ext cx="438912" cy="438912"/>
-          </a:xfrm>
-          <a:prstGeom prst="roundRect">
-            <a:avLst>
-              <a:gd name="adj" fmla="val 12000"/>
-            </a:avLst>
-          </a:prstGeom>
-          <a:solidFill>
-            <a:srgbClr val="095292"/>
-          </a:solidFill>
-          <a:ln>
-            <a:noFill/>
-          </a:ln>
-        </p:spPr>
-        <p:style>
-          <a:lnRef idx="1">
-            <a:schemeClr val="accent1"/>
-          </a:lnRef>
-          <a:fillRef idx="3">
-            <a:schemeClr val="accent1"/>
-          </a:fillRef>
-          <a:effectRef idx="2">
-            <a:schemeClr val="accent1"/>
-          </a:effectRef>
-          <a:fontRef idx="minor">
-            <a:schemeClr val="lt1"/>
-          </a:fontRef>
-        </p:style>
-        <p:txBody>
-          <a:bodyPr rtlCol="0" anchor="ctr"/>
-          <a:lstStyle/>
-          <a:p>
-            <a:pPr algn="ctr"/>
-          </a:p>
-        </p:txBody>
-      </p:sp>
-      <p:sp>
-        <p:nvSpPr>
-          <p:cNvPr id="12" name="TextBox 11"/>
-          <p:cNvSpPr txBox="1"/>
-          <p:nvPr/>
-        </p:nvSpPr>
-        <p:spPr>
-          <a:xfrm>
-            <a:off x="594360" y="3108960"/>
-            <a:ext cx="438912" cy="438912"/>
-          </a:xfrm>
-          <a:prstGeom prst="rect">
-            <a:avLst/>
-          </a:prstGeom>
-          <a:noFill/>
-        </p:spPr>
-        <p:txBody>
-          <a:bodyPr wrap="square" anchor="ctr"/>
-          <a:lstStyle/>
-          <a:p>
-            <a:pPr algn="ctr"/>
-            <a:r>
-              <a:rPr sz="1600" b="1" i="0">
-                <a:solidFill>
-                  <a:srgbClr val="FFFFFF"/>
-                </a:solidFill>
-                <a:latin typeface="Calibri"/>
-              </a:rPr>
-              <a:t>2</a:t>
-            </a:r>
-          </a:p>
-        </p:txBody>
-      </p:sp>
-      <p:sp>
-        <p:nvSpPr>
-          <p:cNvPr id="13" name="TextBox 12"/>
-          <p:cNvSpPr txBox="1"/>
-          <p:nvPr/>
-        </p:nvSpPr>
-        <p:spPr>
-          <a:xfrm>
-            <a:off x="1188720" y="2894076"/>
-            <a:ext cx="10271455" cy="886968"/>
-          </a:xfrm>
-          <a:prstGeom prst="rect">
-            <a:avLst/>
-          </a:prstGeom>
-          <a:noFill/>
-        </p:spPr>
-        <p:txBody>
-          <a:bodyPr wrap="square" anchor="ctr"/>
-          <a:lstStyle/>
-          <a:p>
-            <a:r>
-              <a:rPr sz="1500" b="1" i="0">
-                <a:solidFill>
-                  <a:srgbClr val="095292"/>
-                </a:solidFill>
-                <a:latin typeface="Calibri"/>
-              </a:rPr>
-              <a:t>Traduce con IA</a:t>
-            </a:r>
-          </a:p>
-          <a:p>
-            <a:pPr>
-              <a:spcBef>
-                <a:spcPts val="200"/>
-              </a:spcBef>
-            </a:pPr>
-            <a:r>
-              <a:rPr sz="1300" b="0" i="0">
-                <a:solidFill>
-                  <a:srgbClr val="333333"/>
-                </a:solidFill>
-                <a:latin typeface="Calibri"/>
-              </a:rPr>
-              <a:t>Copia o describe tu boceto a una IA y pidele el codigo Mermaid: «convierte este diagrama a Mermaid usando erDiagram». Revisa el resultado: la IA acierta la sintaxis, no tu modelo.</a:t>
-            </a:r>
-          </a:p>
-        </p:txBody>
-      </p:sp>
-      <p:sp>
-        <p:nvSpPr>
-          <p:cNvPr id="14" name="Rounded Rectangle 13"/>
-          <p:cNvSpPr/>
-          <p:nvPr/>
-        </p:nvSpPr>
-        <p:spPr>
-          <a:xfrm>
-            <a:off x="457200" y="3945636"/>
-            <a:ext cx="11277295" cy="1051560"/>
-          </a:xfrm>
-          <a:prstGeom prst="roundRect">
-            <a:avLst>
-              <a:gd name="adj" fmla="val 12000"/>
-            </a:avLst>
-          </a:prstGeom>
-          <a:solidFill>
-            <a:srgbClr val="F2F2F2"/>
-          </a:solidFill>
-          <a:ln>
-            <a:noFill/>
-          </a:ln>
-        </p:spPr>
-        <p:style>
-          <a:lnRef idx="1">
-            <a:schemeClr val="accent1"/>
-          </a:lnRef>
-          <a:fillRef idx="3">
-            <a:schemeClr val="accent1"/>
-          </a:fillRef>
-          <a:effectRef idx="2">
-            <a:schemeClr val="accent1"/>
-          </a:effectRef>
-          <a:fontRef idx="minor">
-            <a:schemeClr val="lt1"/>
-          </a:fontRef>
-        </p:style>
-        <p:txBody>
-          <a:bodyPr rtlCol="0" anchor="ctr"/>
-          <a:lstStyle/>
-          <a:p>
-            <a:pPr algn="ctr"/>
-          </a:p>
-        </p:txBody>
-      </p:sp>
-      <p:sp>
-        <p:nvSpPr>
-          <p:cNvPr id="15" name="Rounded Rectangle 14"/>
-          <p:cNvSpPr/>
-          <p:nvPr/>
-        </p:nvSpPr>
-        <p:spPr>
-          <a:xfrm>
-            <a:off x="594360" y="4251960"/>
-            <a:ext cx="438912" cy="438912"/>
-          </a:xfrm>
-          <a:prstGeom prst="roundRect">
-            <a:avLst>
-              <a:gd name="adj" fmla="val 12000"/>
-            </a:avLst>
-          </a:prstGeom>
-          <a:solidFill>
-            <a:srgbClr val="095292"/>
-          </a:solidFill>
-          <a:ln>
-            <a:noFill/>
-          </a:ln>
-        </p:spPr>
-        <p:style>
-          <a:lnRef idx="1">
-            <a:schemeClr val="accent1"/>
-          </a:lnRef>
-          <a:fillRef idx="3">
-            <a:schemeClr val="accent1"/>
-          </a:fillRef>
-          <a:effectRef idx="2">
-            <a:schemeClr val="accent1"/>
-          </a:effectRef>
-          <a:fontRef idx="minor">
-            <a:schemeClr val="lt1"/>
-          </a:fontRef>
-        </p:style>
-        <p:txBody>
-          <a:bodyPr rtlCol="0" anchor="ctr"/>
-          <a:lstStyle/>
-          <a:p>
-            <a:pPr algn="ctr"/>
-          </a:p>
-        </p:txBody>
-      </p:sp>
-      <p:sp>
-        <p:nvSpPr>
-          <p:cNvPr id="16" name="TextBox 15"/>
-          <p:cNvSpPr txBox="1"/>
-          <p:nvPr/>
-        </p:nvSpPr>
-        <p:spPr>
-          <a:xfrm>
-            <a:off x="594360" y="4251960"/>
-            <a:ext cx="438912" cy="438912"/>
-          </a:xfrm>
-          <a:prstGeom prst="rect">
-            <a:avLst/>
-          </a:prstGeom>
-          <a:noFill/>
-        </p:spPr>
-        <p:txBody>
-          <a:bodyPr wrap="square" anchor="ctr"/>
-          <a:lstStyle/>
-          <a:p>
-            <a:pPr algn="ctr"/>
-            <a:r>
-              <a:rPr sz="1600" b="1" i="0">
-                <a:solidFill>
-                  <a:srgbClr val="FFFFFF"/>
-                </a:solidFill>
-                <a:latin typeface="Calibri"/>
-              </a:rPr>
-              <a:t>3</a:t>
-            </a:r>
-          </a:p>
-        </p:txBody>
-      </p:sp>
-      <p:sp>
-        <p:nvSpPr>
-          <p:cNvPr id="17" name="TextBox 16"/>
-          <p:cNvSpPr txBox="1"/>
-          <p:nvPr/>
-        </p:nvSpPr>
-        <p:spPr>
-          <a:xfrm>
-            <a:off x="1188720" y="4037076"/>
-            <a:ext cx="10271455" cy="886968"/>
-          </a:xfrm>
-          <a:prstGeom prst="rect">
-            <a:avLst/>
-          </a:prstGeom>
-          <a:noFill/>
-        </p:spPr>
-        <p:txBody>
-          <a:bodyPr wrap="square" anchor="ctr"/>
-          <a:lstStyle/>
-          <a:p>
-            <a:r>
-              <a:rPr sz="1500" b="1" i="0">
-                <a:solidFill>
-                  <a:srgbClr val="095292"/>
-                </a:solidFill>
-                <a:latin typeface="Calibri"/>
-              </a:rPr>
-              <a:t>Pega y renderiza en la plataforma del curso</a:t>
-            </a:r>
-          </a:p>
-          <a:p>
-            <a:pPr>
-              <a:spcBef>
-                <a:spcPts val="200"/>
-              </a:spcBef>
-            </a:pPr>
-            <a:r>
-              <a:rPr sz="1300" b="0" i="0">
-                <a:solidFill>
-                  <a:srgbClr val="333333"/>
-                </a:solidFill>
-                <a:latin typeface="Calibri"/>
-              </a:rPr>
-              <a:t>Pega ese codigo en la caja de texto de la pregunta y mira como lo dibuja la plataforma. Si no renderiza, corrige ahi mismo: lo que se califica es el diagrama renderizado dentro de la plataforma del curso.</a:t>
-            </a:r>
-          </a:p>
-        </p:txBody>
-      </p:sp>
-      <p:sp>
-        <p:nvSpPr>
-          <p:cNvPr id="18" name="Rounded Rectangle 17"/>
-          <p:cNvSpPr/>
-          <p:nvPr/>
-        </p:nvSpPr>
-        <p:spPr>
-          <a:xfrm>
-            <a:off x="457200" y="5088636"/>
-            <a:ext cx="11277295" cy="1051560"/>
-          </a:xfrm>
-          <a:prstGeom prst="roundRect">
-            <a:avLst>
-              <a:gd name="adj" fmla="val 12000"/>
-            </a:avLst>
-          </a:prstGeom>
-          <a:solidFill>
-            <a:srgbClr val="E8F4FA"/>
-          </a:solidFill>
-          <a:ln>
-            <a:noFill/>
-          </a:ln>
-        </p:spPr>
-        <p:style>
-          <a:lnRef idx="1">
-            <a:schemeClr val="accent1"/>
-          </a:lnRef>
-          <a:fillRef idx="3">
-            <a:schemeClr val="accent1"/>
-          </a:fillRef>
-          <a:effectRef idx="2">
-            <a:schemeClr val="accent1"/>
-          </a:effectRef>
-          <a:fontRef idx="minor">
-            <a:schemeClr val="lt1"/>
-          </a:fontRef>
-        </p:style>
-        <p:txBody>
-          <a:bodyPr rtlCol="0" anchor="ctr"/>
-          <a:lstStyle/>
-          <a:p>
-            <a:pPr algn="ctr"/>
-          </a:p>
-        </p:txBody>
-      </p:sp>
-      <p:sp>
-        <p:nvSpPr>
-          <p:cNvPr id="19" name="Rounded Rectangle 18"/>
-          <p:cNvSpPr/>
-          <p:nvPr/>
-        </p:nvSpPr>
-        <p:spPr>
-          <a:xfrm>
-            <a:off x="594360" y="5394960"/>
-            <a:ext cx="438912" cy="438912"/>
-          </a:xfrm>
-          <a:prstGeom prst="roundRect">
-            <a:avLst>
-              <a:gd name="adj" fmla="val 12000"/>
-            </a:avLst>
-          </a:prstGeom>
-          <a:solidFill>
-            <a:srgbClr val="095292"/>
-          </a:solidFill>
-          <a:ln>
-            <a:noFill/>
-          </a:ln>
-        </p:spPr>
-        <p:style>
-          <a:lnRef idx="1">
-            <a:schemeClr val="accent1"/>
-          </a:lnRef>
-          <a:fillRef idx="3">
-            <a:schemeClr val="accent1"/>
-          </a:fillRef>
-          <a:effectRef idx="2">
-            <a:schemeClr val="accent1"/>
-          </a:effectRef>
-          <a:fontRef idx="minor">
-            <a:schemeClr val="lt1"/>
-          </a:fontRef>
-        </p:style>
-        <p:txBody>
-          <a:bodyPr rtlCol="0" anchor="ctr"/>
-          <a:lstStyle/>
-          <a:p>
-            <a:pPr algn="ctr"/>
-          </a:p>
-        </p:txBody>
-      </p:sp>
-      <p:sp>
-        <p:nvSpPr>
-          <p:cNvPr id="20" name="TextBox 19"/>
-          <p:cNvSpPr txBox="1"/>
-          <p:nvPr/>
-        </p:nvSpPr>
-        <p:spPr>
-          <a:xfrm>
-            <a:off x="594360" y="5394960"/>
-            <a:ext cx="438912" cy="438912"/>
-          </a:xfrm>
-          <a:prstGeom prst="rect">
-            <a:avLst/>
-          </a:prstGeom>
-          <a:noFill/>
-        </p:spPr>
-        <p:txBody>
-          <a:bodyPr wrap="square" anchor="ctr"/>
-          <a:lstStyle/>
-          <a:p>
-            <a:pPr algn="ctr"/>
-            <a:r>
-              <a:rPr sz="1600" b="1" i="0">
-                <a:solidFill>
-                  <a:srgbClr val="FFFFFF"/>
-                </a:solidFill>
-                <a:latin typeface="Calibri"/>
-              </a:rPr>
-              <a:t>4</a:t>
-            </a:r>
-          </a:p>
-        </p:txBody>
-      </p:sp>
-      <p:sp>
-        <p:nvSpPr>
-          <p:cNvPr id="21" name="TextBox 20"/>
-          <p:cNvSpPr txBox="1"/>
-          <p:nvPr/>
-        </p:nvSpPr>
-        <p:spPr>
-          <a:xfrm>
-            <a:off x="1188720" y="5180076"/>
-            <a:ext cx="10271455" cy="886968"/>
-          </a:xfrm>
-          <a:prstGeom prst="rect">
-            <a:avLst/>
-          </a:prstGeom>
-          <a:noFill/>
-        </p:spPr>
-        <p:txBody>
-          <a:bodyPr wrap="square" anchor="ctr"/>
-          <a:lstStyle/>
-          <a:p>
-            <a:r>
-              <a:rPr sz="1500" b="1" i="0">
-                <a:solidFill>
-                  <a:srgbClr val="095292"/>
-                </a:solidFill>
-                <a:latin typeface="Calibri"/>
-              </a:rPr>
-              <a:t>Guarda el PNG para tu PI</a:t>
-            </a:r>
-          </a:p>
-          <a:p>
-            <a:pPr>
-              <a:spcBef>
-                <a:spcPts val="200"/>
-              </a:spcBef>
-            </a:pPr>
-            <a:r>
-              <a:rPr sz="1300" b="0" i="0">
-                <a:solidFill>
-                  <a:srgbClr val="333333"/>
-                </a:solidFill>
-                <a:latin typeface="Calibri"/>
-              </a:rPr>
-              <a:t>Exporta tambien la imagen a la carpeta de tu Proyecto Integrador. Esa copia es para tu informe; no reemplaza la respuesta en la plataforma.</a:t>
-            </a:r>
-          </a:p>
-        </p:txBody>
-      </p:sp>
-      <p:sp>
-        <p:nvSpPr>
-          <p:cNvPr id="22" name="TextBox 21"/>
-          <p:cNvSpPr txBox="1"/>
-          <p:nvPr/>
-        </p:nvSpPr>
-        <p:spPr>
-          <a:xfrm>
-            <a:off x="11185855" y="6473952"/>
-            <a:ext cx="640080" cy="274320"/>
-          </a:xfrm>
-          <a:prstGeom prst="rect">
-            <a:avLst/>
-          </a:prstGeom>
-          <a:noFill/>
-        </p:spPr>
-        <p:txBody>
-          <a:bodyPr wrap="square">
-            <a:spAutoFit/>
-          </a:bodyPr>
-          <a:lstStyle/>
-          <a:p>
-            <a:pPr algn="r"/>
-            <a:r>
-              <a:rPr sz="1100" b="0" i="0">
-                <a:solidFill>
-                  <a:srgbClr val="666666"/>
-                </a:solidFill>
-                <a:latin typeface="Calibri"/>
-              </a:rPr>
-              <a:t>24</a:t>
-            </a:r>
-          </a:p>
-        </p:txBody>
-      </p:sp>
-    </p:spTree>
-  </p:cSld>
-  <p:clrMapOvr>
-    <a:masterClrMapping/>
-  </p:clrMapOvr>
-</p:sld>
-</file>
-
-<file path=ppt/slides/slide25.xml><?xml version="1.0" encoding="utf-8"?>
-<p:sld xmlns:a="http://schemas.openxmlformats.org/drawingml/2006/main" xmlns:p="http://schemas.openxmlformats.org/presentationml/2006/main" xmlns:r="http://schemas.openxmlformats.org/officeDocument/2006/relationships">
-  <p:cSld>
-    <p:bg>
-      <p:bgPr>
-        <a:solidFill>
-          <a:srgbClr val="FFFFFF"/>
-        </a:solidFill>
-        <a:effectLst/>
-      </p:bgPr>
-    </p:bg>
-    <p:spTree>
-      <p:nvGrpSpPr>
-        <p:cNvPr id="1" name=""/>
-        <p:cNvGrpSpPr/>
-        <p:nvPr/>
-      </p:nvGrpSpPr>
-      <p:grpSpPr/>
-      <p:sp>
-        <p:nvSpPr>
-          <p:cNvPr id="2" name="Rectangle 1"/>
-          <p:cNvSpPr/>
-          <p:nvPr/>
-        </p:nvSpPr>
-        <p:spPr>
-          <a:xfrm>
-            <a:off x="0" y="0"/>
-            <a:ext cx="12191695" cy="960120"/>
-          </a:xfrm>
-          <a:prstGeom prst="rect">
-            <a:avLst/>
-          </a:prstGeom>
-          <a:solidFill>
-            <a:srgbClr val="095292"/>
-          </a:solidFill>
-          <a:ln>
-            <a:noFill/>
-          </a:ln>
-        </p:spPr>
-        <p:style>
-          <a:lnRef idx="1">
-            <a:schemeClr val="accent1"/>
-          </a:lnRef>
-          <a:fillRef idx="3">
-            <a:schemeClr val="accent1"/>
-          </a:fillRef>
-          <a:effectRef idx="2">
-            <a:schemeClr val="accent1"/>
-          </a:effectRef>
-          <a:fontRef idx="minor">
-            <a:schemeClr val="lt1"/>
-          </a:fontRef>
-        </p:style>
-        <p:txBody>
-          <a:bodyPr rtlCol="0" anchor="ctr"/>
-          <a:lstStyle/>
-          <a:p>
-            <a:pPr algn="ctr"/>
-          </a:p>
-        </p:txBody>
-      </p:sp>
-      <p:sp>
-        <p:nvSpPr>
-          <p:cNvPr id="3" name="Rectangle 2"/>
-          <p:cNvSpPr/>
-          <p:nvPr/>
-        </p:nvSpPr>
-        <p:spPr>
-          <a:xfrm>
-            <a:off x="0" y="960120"/>
-            <a:ext cx="12191695" cy="41148"/>
-          </a:xfrm>
-          <a:prstGeom prst="rect">
-            <a:avLst/>
-          </a:prstGeom>
-          <a:solidFill>
-            <a:srgbClr val="FFD000"/>
-          </a:solidFill>
-          <a:ln>
-            <a:noFill/>
-          </a:ln>
-        </p:spPr>
-        <p:style>
-          <a:lnRef idx="1">
-            <a:schemeClr val="accent1"/>
-          </a:lnRef>
-          <a:fillRef idx="3">
-            <a:schemeClr val="accent1"/>
-          </a:fillRef>
-          <a:effectRef idx="2">
-            <a:schemeClr val="accent1"/>
-          </a:effectRef>
-          <a:fontRef idx="minor">
-            <a:schemeClr val="lt1"/>
-          </a:fontRef>
-        </p:style>
-        <p:txBody>
-          <a:bodyPr rtlCol="0" anchor="ctr"/>
-          <a:lstStyle/>
-          <a:p>
-            <a:pPr algn="ctr"/>
-          </a:p>
-        </p:txBody>
-      </p:sp>
-      <p:sp>
-        <p:nvSpPr>
-          <p:cNvPr id="4" name="TextBox 3"/>
-          <p:cNvSpPr txBox="1"/>
-          <p:nvPr/>
-        </p:nvSpPr>
-        <p:spPr>
-          <a:xfrm>
-            <a:off x="457200" y="164592"/>
-            <a:ext cx="11277295" cy="502920"/>
-          </a:xfrm>
-          <a:prstGeom prst="rect">
-            <a:avLst/>
-          </a:prstGeom>
-          <a:noFill/>
-        </p:spPr>
-        <p:txBody>
-          <a:bodyPr wrap="square">
-            <a:spAutoFit/>
-          </a:bodyPr>
-          <a:lstStyle/>
-          <a:p>
-            <a:r>
-              <a:rPr sz="2600" b="1" i="0">
-                <a:solidFill>
-                  <a:srgbClr val="FFFFFF"/>
-                </a:solidFill>
-                <a:latin typeface="Calibri"/>
-              </a:rPr>
-              <a:t>Taller PI VetCare — contexto / por que importa</a:t>
-            </a:r>
-          </a:p>
-        </p:txBody>
-      </p:sp>
-      <p:sp>
-        <p:nvSpPr>
-          <p:cNvPr id="5" name="TextBox 4"/>
-          <p:cNvSpPr txBox="1"/>
-          <p:nvPr/>
-        </p:nvSpPr>
-        <p:spPr>
-          <a:xfrm>
-            <a:off x="457200" y="1170432"/>
-            <a:ext cx="11277295" cy="5230368"/>
-          </a:xfrm>
-          <a:prstGeom prst="rect">
-            <a:avLst/>
-          </a:prstGeom>
-          <a:noFill/>
-        </p:spPr>
-        <p:txBody>
-          <a:bodyPr wrap="square">
-            <a:spAutoFit/>
-          </a:bodyPr>
-          <a:lstStyle/>
-          <a:p>
-            <a:pPr>
-              <a:spcAft>
-                <a:spcPts val="800"/>
-              </a:spcAft>
-            </a:pPr>
-            <a:r>
-              <a:rPr sz="2000" b="0" i="0">
-                <a:solidFill>
-                  <a:srgbClr val="333333"/>
-                </a:solidFill>
-                <a:latin typeface="Calibri"/>
-              </a:rPr>
-              <a:t>–   </a:t>
-            </a:r>
             <a:r>
               <a:rPr sz="2000" b="1" i="0">
                 <a:solidFill>
-                  <a:srgbClr val="333333"/>
-                </a:solidFill>
-                <a:latin typeface="Calibri"/>
-              </a:rPr>
-              <a:t>Por qué importa al PI:</a:t>
-            </a:r>
-            <a:r>
-              <a:rPr sz="2000" b="0" i="0">
-                <a:solidFill>
-                  <a:srgbClr val="333333"/>
-                </a:solidFill>
-                <a:latin typeface="Calibri"/>
-              </a:rPr>
-              <a:t> checkpoint vs rúbrica.</a:t>
-            </a:r>
-          </a:p>
-          <a:p>
-            <a:pPr>
-              <a:spcAft>
-                <a:spcPts val="800"/>
-              </a:spcAft>
-            </a:pPr>
-            <a:r>
-              <a:rPr sz="2000" b="0" i="0">
-                <a:solidFill>
-                  <a:srgbClr val="333333"/>
-                </a:solidFill>
-                <a:latin typeface="Calibri"/>
-              </a:rPr>
-              <a:t>–   Demo + gaps con responsable.</a:t>
-            </a:r>
-          </a:p>
-        </p:txBody>
-      </p:sp>
-      <p:sp>
-        <p:nvSpPr>
-          <p:cNvPr id="6" name="TextBox 5"/>
-          <p:cNvSpPr txBox="1"/>
-          <p:nvPr/>
-        </p:nvSpPr>
-        <p:spPr>
-          <a:xfrm>
-            <a:off x="11185855" y="6473952"/>
-            <a:ext cx="640080" cy="274320"/>
-          </a:xfrm>
-          <a:prstGeom prst="rect">
-            <a:avLst/>
-          </a:prstGeom>
-          <a:noFill/>
-        </p:spPr>
-        <p:txBody>
-          <a:bodyPr wrap="square">
-            <a:spAutoFit/>
-          </a:bodyPr>
-          <a:lstStyle/>
-          <a:p>
-            <a:pPr algn="r"/>
-            <a:r>
-              <a:rPr sz="1100" b="0" i="0">
-                <a:solidFill>
-                  <a:srgbClr val="666666"/>
-                </a:solidFill>
-                <a:latin typeface="Calibri"/>
-              </a:rPr>
-              <a:t>25</a:t>
-            </a:r>
-          </a:p>
-        </p:txBody>
-      </p:sp>
-    </p:spTree>
-  </p:cSld>
-  <p:clrMapOvr>
-    <a:masterClrMapping/>
-  </p:clrMapOvr>
-</p:sld>
-</file>
-
-<file path=ppt/slides/slide26.xml><?xml version="1.0" encoding="utf-8"?>
-<p:sld xmlns:a="http://schemas.openxmlformats.org/drawingml/2006/main" xmlns:p="http://schemas.openxmlformats.org/presentationml/2006/main" xmlns:r="http://schemas.openxmlformats.org/officeDocument/2006/relationships">
-  <p:cSld>
-    <p:bg>
-      <p:bgPr>
-        <a:solidFill>
-          <a:srgbClr val="FFFFFF"/>
-        </a:solidFill>
-        <a:effectLst/>
-      </p:bgPr>
-    </p:bg>
-    <p:spTree>
-      <p:nvGrpSpPr>
-        <p:cNvPr id="1" name=""/>
-        <p:cNvGrpSpPr/>
-        <p:nvPr/>
-      </p:nvGrpSpPr>
-      <p:grpSpPr/>
-      <p:sp>
-        <p:nvSpPr>
-          <p:cNvPr id="2" name="Rectangle 1"/>
-          <p:cNvSpPr/>
-          <p:nvPr/>
-        </p:nvSpPr>
-        <p:spPr>
-          <a:xfrm>
-            <a:off x="0" y="0"/>
-            <a:ext cx="12191695" cy="960120"/>
-          </a:xfrm>
-          <a:prstGeom prst="rect">
-            <a:avLst/>
-          </a:prstGeom>
-          <a:solidFill>
-            <a:srgbClr val="095292"/>
-          </a:solidFill>
-          <a:ln>
-            <a:noFill/>
-          </a:ln>
-        </p:spPr>
-        <p:style>
-          <a:lnRef idx="1">
-            <a:schemeClr val="accent1"/>
-          </a:lnRef>
-          <a:fillRef idx="3">
-            <a:schemeClr val="accent1"/>
-          </a:fillRef>
-          <a:effectRef idx="2">
-            <a:schemeClr val="accent1"/>
-          </a:effectRef>
-          <a:fontRef idx="minor">
-            <a:schemeClr val="lt1"/>
-          </a:fontRef>
-        </p:style>
-        <p:txBody>
-          <a:bodyPr rtlCol="0" anchor="ctr"/>
-          <a:lstStyle/>
-          <a:p>
-            <a:pPr algn="ctr"/>
-          </a:p>
-        </p:txBody>
-      </p:sp>
-      <p:sp>
-        <p:nvSpPr>
-          <p:cNvPr id="3" name="Rectangle 2"/>
-          <p:cNvSpPr/>
-          <p:nvPr/>
-        </p:nvSpPr>
-        <p:spPr>
-          <a:xfrm>
-            <a:off x="0" y="960120"/>
-            <a:ext cx="12191695" cy="41148"/>
-          </a:xfrm>
-          <a:prstGeom prst="rect">
-            <a:avLst/>
-          </a:prstGeom>
-          <a:solidFill>
-            <a:srgbClr val="FFD000"/>
-          </a:solidFill>
-          <a:ln>
-            <a:noFill/>
-          </a:ln>
-        </p:spPr>
-        <p:style>
-          <a:lnRef idx="1">
-            <a:schemeClr val="accent1"/>
-          </a:lnRef>
-          <a:fillRef idx="3">
-            <a:schemeClr val="accent1"/>
-          </a:fillRef>
-          <a:effectRef idx="2">
-            <a:schemeClr val="accent1"/>
-          </a:effectRef>
-          <a:fontRef idx="minor">
-            <a:schemeClr val="lt1"/>
-          </a:fontRef>
-        </p:style>
-        <p:txBody>
-          <a:bodyPr rtlCol="0" anchor="ctr"/>
-          <a:lstStyle/>
-          <a:p>
-            <a:pPr algn="ctr"/>
-          </a:p>
-        </p:txBody>
-      </p:sp>
-      <p:sp>
-        <p:nvSpPr>
-          <p:cNvPr id="4" name="TextBox 3"/>
-          <p:cNvSpPr txBox="1"/>
-          <p:nvPr/>
-        </p:nvSpPr>
-        <p:spPr>
-          <a:xfrm>
-            <a:off x="457200" y="164592"/>
-            <a:ext cx="11277295" cy="502920"/>
-          </a:xfrm>
-          <a:prstGeom prst="rect">
-            <a:avLst/>
-          </a:prstGeom>
-          <a:noFill/>
-        </p:spPr>
-        <p:txBody>
-          <a:bodyPr wrap="square">
-            <a:spAutoFit/>
-          </a:bodyPr>
-          <a:lstStyle/>
-          <a:p>
-            <a:r>
-              <a:rPr sz="2600" b="1" i="0">
-                <a:solidFill>
-                  <a:srgbClr val="FFFFFF"/>
-                </a:solidFill>
-                <a:latin typeface="Calibri"/>
-              </a:rPr>
-              <a:t>Taller PI VetCare — objetivo y criterios</a:t>
-            </a:r>
-          </a:p>
-        </p:txBody>
-      </p:sp>
-      <p:sp>
-        <p:nvSpPr>
-          <p:cNvPr id="5" name="TextBox 4"/>
-          <p:cNvSpPr txBox="1"/>
-          <p:nvPr/>
-        </p:nvSpPr>
-        <p:spPr>
-          <a:xfrm>
-            <a:off x="457200" y="1170432"/>
-            <a:ext cx="11277295" cy="5230368"/>
-          </a:xfrm>
-          <a:prstGeom prst="rect">
-            <a:avLst/>
-          </a:prstGeom>
-          <a:noFill/>
-        </p:spPr>
-        <p:txBody>
-          <a:bodyPr wrap="square">
-            <a:spAutoFit/>
-          </a:bodyPr>
-          <a:lstStyle/>
-          <a:p>
-            <a:pPr>
-              <a:spcAft>
-                <a:spcPts val="800"/>
-              </a:spcAft>
-            </a:pPr>
-            <a:r>
-              <a:rPr sz="2000" b="0" i="0">
-                <a:solidFill>
-                  <a:srgbClr val="333333"/>
-                </a:solidFill>
-                <a:latin typeface="Calibri"/>
-              </a:rPr>
-              <a:t>–   </a:t>
-            </a:r>
-            <a:r>
-              <a:rPr sz="2000" b="1" i="0">
-                <a:solidFill>
-                  <a:srgbClr val="333333"/>
-                </a:solidFill>
-                <a:latin typeface="Calibri"/>
-              </a:rPr>
-              <a:t>Objetivo:</a:t>
-            </a:r>
-            <a:r>
-              <a:rPr sz="2000" b="0" i="0">
-                <a:solidFill>
-                  <a:srgbClr val="333333"/>
-                </a:solidFill>
-                <a:latin typeface="Calibri"/>
-              </a:rPr>
-              <a:t> Checklist avance + demo 3-5 min.</a:t>
-            </a:r>
-          </a:p>
-          <a:p>
-            <a:pPr>
-              <a:spcAft>
-                <a:spcPts val="800"/>
-              </a:spcAft>
-            </a:pPr>
-            <a:r>
-              <a:rPr sz="2000" b="0" i="0">
-                <a:solidFill>
-                  <a:srgbClr val="333333"/>
-                </a:solidFill>
-                <a:latin typeface="Calibri"/>
-              </a:rPr>
-              <a:t>–   </a:t>
-            </a:r>
-            <a:r>
-              <a:rPr sz="2000" b="1" i="0">
-                <a:solidFill>
-                  <a:srgbClr val="333333"/>
-                </a:solidFill>
-                <a:latin typeface="Calibri"/>
-              </a:rPr>
-              <a:t>Exito:</a:t>
-            </a:r>
-            <a:r>
-              <a:rPr sz="2000" b="0" i="0">
-                <a:solidFill>
-                  <a:srgbClr val="333333"/>
-                </a:solidFill>
-                <a:latin typeface="Calibri"/>
-              </a:rPr>
-              <a:t> Checklist evidenciada.</a:t>
-            </a:r>
-          </a:p>
-          <a:p>
-            <a:pPr>
-              <a:spcAft>
-                <a:spcPts val="800"/>
-              </a:spcAft>
-            </a:pPr>
-            <a:r>
-              <a:rPr sz="2000" b="0" i="0">
-                <a:solidFill>
-                  <a:srgbClr val="333333"/>
-                </a:solidFill>
-                <a:latin typeface="Calibri"/>
-              </a:rPr>
-              <a:t>–   </a:t>
-            </a:r>
-            <a:r>
-              <a:rPr sz="2000" b="1" i="0">
-                <a:solidFill>
-                  <a:srgbClr val="333333"/>
-                </a:solidFill>
-                <a:latin typeface="Calibri"/>
-              </a:rPr>
-              <a:t>Exito:</a:t>
-            </a:r>
-            <a:r>
-              <a:rPr sz="2000" b="0" i="0">
-                <a:solidFill>
-                  <a:srgbClr val="333333"/>
-                </a:solidFill>
-                <a:latin typeface="Calibri"/>
-              </a:rPr>
-              <a:t> Demo ER+proc+trigger.</a:t>
-            </a:r>
-          </a:p>
-          <a:p>
-            <a:pPr>
-              <a:spcAft>
-                <a:spcPts val="800"/>
-              </a:spcAft>
-            </a:pPr>
-            <a:r>
-              <a:rPr sz="2000" b="0" i="0">
-                <a:solidFill>
-                  <a:srgbClr val="333333"/>
-                </a:solidFill>
-                <a:latin typeface="Calibri"/>
-              </a:rPr>
-              <a:t>–   </a:t>
-            </a:r>
-            <a:r>
-              <a:rPr sz="2000" b="1" i="0">
-                <a:solidFill>
-                  <a:srgbClr val="333333"/>
-                </a:solidFill>
-                <a:latin typeface="Calibri"/>
-              </a:rPr>
-              <a:t>Exito:</a:t>
-            </a:r>
-            <a:r>
-              <a:rPr sz="2000" b="0" i="0">
-                <a:solidFill>
-                  <a:srgbClr val="333333"/>
-                </a:solidFill>
-                <a:latin typeface="Calibri"/>
-              </a:rPr>
-              <a:t> Gaps.</a:t>
-            </a:r>
-          </a:p>
-          <a:p>
-            <a:pPr>
-              <a:spcAft>
-                <a:spcPts val="800"/>
-              </a:spcAft>
-            </a:pPr>
-            <a:r>
-              <a:rPr sz="2000" b="0" i="0">
-                <a:solidFill>
-                  <a:srgbClr val="333333"/>
-                </a:solidFill>
-                <a:latin typeface="Calibri"/>
-              </a:rPr>
-              <a:t>–   </a:t>
-            </a:r>
-            <a:r>
-              <a:rPr sz="2000" b="1" i="0">
-                <a:solidFill>
-                  <a:srgbClr val="333333"/>
-                </a:solidFill>
-                <a:latin typeface="Calibri"/>
-              </a:rPr>
-              <a:t>Exito:</a:t>
-            </a:r>
-            <a:r>
-              <a:rPr sz="2000" b="0" i="0">
-                <a:solidFill>
-                  <a:srgbClr val="333333"/>
-                </a:solidFill>
-                <a:latin typeface="Calibri"/>
-              </a:rPr>
-              <a:t> Avance subido si aplica.</a:t>
-            </a:r>
-          </a:p>
-        </p:txBody>
-      </p:sp>
-      <p:sp>
-        <p:nvSpPr>
-          <p:cNvPr id="6" name="TextBox 5"/>
-          <p:cNvSpPr txBox="1"/>
-          <p:nvPr/>
-        </p:nvSpPr>
-        <p:spPr>
-          <a:xfrm>
-            <a:off x="11185855" y="6473952"/>
-            <a:ext cx="640080" cy="274320"/>
-          </a:xfrm>
-          <a:prstGeom prst="rect">
-            <a:avLst/>
-          </a:prstGeom>
-          <a:noFill/>
-        </p:spPr>
-        <p:txBody>
-          <a:bodyPr wrap="square">
-            <a:spAutoFit/>
-          </a:bodyPr>
-          <a:lstStyle/>
-          <a:p>
-            <a:pPr algn="r"/>
-            <a:r>
-              <a:rPr sz="1100" b="0" i="0">
-                <a:solidFill>
-                  <a:srgbClr val="666666"/>
-                </a:solidFill>
-                <a:latin typeface="Calibri"/>
-              </a:rPr>
-              <a:t>26</a:t>
-            </a:r>
-          </a:p>
-        </p:txBody>
-      </p:sp>
-    </p:spTree>
-  </p:cSld>
-  <p:clrMapOvr>
-    <a:masterClrMapping/>
-  </p:clrMapOvr>
-</p:sld>
-</file>
-
-<file path=ppt/slides/slide27.xml><?xml version="1.0" encoding="utf-8"?>
-<p:sld xmlns:a="http://schemas.openxmlformats.org/drawingml/2006/main" xmlns:p="http://schemas.openxmlformats.org/presentationml/2006/main" xmlns:r="http://schemas.openxmlformats.org/officeDocument/2006/relationships">
-  <p:cSld>
-    <p:bg>
-      <p:bgPr>
-        <a:solidFill>
-          <a:srgbClr val="FFFFFF"/>
-        </a:solidFill>
-        <a:effectLst/>
-      </p:bgPr>
-    </p:bg>
-    <p:spTree>
-      <p:nvGrpSpPr>
-        <p:cNvPr id="1" name=""/>
-        <p:cNvGrpSpPr/>
-        <p:nvPr/>
-      </p:nvGrpSpPr>
-      <p:grpSpPr/>
-      <p:sp>
-        <p:nvSpPr>
-          <p:cNvPr id="2" name="Rectangle 1"/>
-          <p:cNvSpPr/>
-          <p:nvPr/>
-        </p:nvSpPr>
-        <p:spPr>
-          <a:xfrm>
-            <a:off x="0" y="0"/>
-            <a:ext cx="12191695" cy="960120"/>
-          </a:xfrm>
-          <a:prstGeom prst="rect">
-            <a:avLst/>
-          </a:prstGeom>
-          <a:solidFill>
-            <a:srgbClr val="095292"/>
-          </a:solidFill>
-          <a:ln>
-            <a:noFill/>
-          </a:ln>
-        </p:spPr>
-        <p:style>
-          <a:lnRef idx="1">
-            <a:schemeClr val="accent1"/>
-          </a:lnRef>
-          <a:fillRef idx="3">
-            <a:schemeClr val="accent1"/>
-          </a:fillRef>
-          <a:effectRef idx="2">
-            <a:schemeClr val="accent1"/>
-          </a:effectRef>
-          <a:fontRef idx="minor">
-            <a:schemeClr val="lt1"/>
-          </a:fontRef>
-        </p:style>
-        <p:txBody>
-          <a:bodyPr rtlCol="0" anchor="ctr"/>
-          <a:lstStyle/>
-          <a:p>
-            <a:pPr algn="ctr"/>
-          </a:p>
-        </p:txBody>
-      </p:sp>
-      <p:sp>
-        <p:nvSpPr>
-          <p:cNvPr id="3" name="Rectangle 2"/>
-          <p:cNvSpPr/>
-          <p:nvPr/>
-        </p:nvSpPr>
-        <p:spPr>
-          <a:xfrm>
-            <a:off x="0" y="960120"/>
-            <a:ext cx="12191695" cy="41148"/>
-          </a:xfrm>
-          <a:prstGeom prst="rect">
-            <a:avLst/>
-          </a:prstGeom>
-          <a:solidFill>
-            <a:srgbClr val="FFD000"/>
-          </a:solidFill>
-          <a:ln>
-            <a:noFill/>
-          </a:ln>
-        </p:spPr>
-        <p:style>
-          <a:lnRef idx="1">
-            <a:schemeClr val="accent1"/>
-          </a:lnRef>
-          <a:fillRef idx="3">
-            <a:schemeClr val="accent1"/>
-          </a:fillRef>
-          <a:effectRef idx="2">
-            <a:schemeClr val="accent1"/>
-          </a:effectRef>
-          <a:fontRef idx="minor">
-            <a:schemeClr val="lt1"/>
-          </a:fontRef>
-        </p:style>
-        <p:txBody>
-          <a:bodyPr rtlCol="0" anchor="ctr"/>
-          <a:lstStyle/>
-          <a:p>
-            <a:pPr algn="ctr"/>
-          </a:p>
-        </p:txBody>
-      </p:sp>
-      <p:sp>
-        <p:nvSpPr>
-          <p:cNvPr id="4" name="TextBox 3"/>
-          <p:cNvSpPr txBox="1"/>
-          <p:nvPr/>
-        </p:nvSpPr>
-        <p:spPr>
-          <a:xfrm>
-            <a:off x="457200" y="164592"/>
-            <a:ext cx="11277295" cy="502920"/>
-          </a:xfrm>
-          <a:prstGeom prst="rect">
-            <a:avLst/>
-          </a:prstGeom>
-          <a:noFill/>
-        </p:spPr>
-        <p:txBody>
-          <a:bodyPr wrap="square">
-            <a:spAutoFit/>
-          </a:bodyPr>
-          <a:lstStyle/>
-          <a:p>
-            <a:r>
-              <a:rPr sz="2600" b="1" i="0">
-                <a:solidFill>
-                  <a:srgbClr val="FFFFFF"/>
-                </a:solidFill>
-                <a:latin typeface="Calibri"/>
-              </a:rPr>
-              <a:t>Taller PI VetCare — escenario / datos de partida</a:t>
-            </a:r>
-          </a:p>
-        </p:txBody>
-      </p:sp>
-      <p:sp>
-        <p:nvSpPr>
-          <p:cNvPr id="5" name="TextBox 4"/>
-          <p:cNvSpPr txBox="1"/>
-          <p:nvPr/>
-        </p:nvSpPr>
-        <p:spPr>
-          <a:xfrm>
-            <a:off x="457200" y="1170432"/>
-            <a:ext cx="11277295" cy="5230368"/>
-          </a:xfrm>
-          <a:prstGeom prst="rect">
-            <a:avLst/>
-          </a:prstGeom>
-          <a:noFill/>
-        </p:spPr>
-        <p:txBody>
-          <a:bodyPr wrap="square">
-            <a:spAutoFit/>
-          </a:bodyPr>
-          <a:lstStyle/>
-          <a:p>
-            <a:pPr>
-              <a:spcAft>
-                <a:spcPts val="800"/>
-              </a:spcAft>
-            </a:pPr>
-            <a:r>
-              <a:rPr sz="2000" b="0" i="0">
-                <a:solidFill>
-                  <a:srgbClr val="333333"/>
-                </a:solidFill>
-                <a:latin typeface="Calibri"/>
-              </a:rPr>
-              <a:t>–   Evidencias: ER, DDL, roles, procs, fn, triggers, opt.</a:t>
-            </a:r>
-          </a:p>
-        </p:txBody>
-      </p:sp>
-      <p:sp>
-        <p:nvSpPr>
-          <p:cNvPr id="6" name="TextBox 5"/>
-          <p:cNvSpPr txBox="1"/>
-          <p:nvPr/>
-        </p:nvSpPr>
-        <p:spPr>
-          <a:xfrm>
-            <a:off x="11185855" y="6473952"/>
-            <a:ext cx="640080" cy="274320"/>
-          </a:xfrm>
-          <a:prstGeom prst="rect">
-            <a:avLst/>
-          </a:prstGeom>
-          <a:noFill/>
-        </p:spPr>
-        <p:txBody>
-          <a:bodyPr wrap="square">
-            <a:spAutoFit/>
-          </a:bodyPr>
-          <a:lstStyle/>
-          <a:p>
-            <a:pPr algn="r"/>
-            <a:r>
-              <a:rPr sz="1100" b="0" i="0">
-                <a:solidFill>
-                  <a:srgbClr val="666666"/>
-                </a:solidFill>
-                <a:latin typeface="Calibri"/>
-              </a:rPr>
-              <a:t>27</a:t>
-            </a:r>
-          </a:p>
-        </p:txBody>
-      </p:sp>
-    </p:spTree>
-  </p:cSld>
-  <p:clrMapOvr>
-    <a:masterClrMapping/>
-  </p:clrMapOvr>
-</p:sld>
-</file>
-
-<file path=ppt/slides/slide28.xml><?xml version="1.0" encoding="utf-8"?>
-<p:sld xmlns:a="http://schemas.openxmlformats.org/drawingml/2006/main" xmlns:p="http://schemas.openxmlformats.org/presentationml/2006/main" xmlns:r="http://schemas.openxmlformats.org/officeDocument/2006/relationships">
-  <p:cSld>
-    <p:bg>
-      <p:bgPr>
-        <a:solidFill>
-          <a:srgbClr val="FFFFFF"/>
-        </a:solidFill>
-        <a:effectLst/>
-      </p:bgPr>
-    </p:bg>
-    <p:spTree>
-      <p:nvGrpSpPr>
-        <p:cNvPr id="1" name=""/>
-        <p:cNvGrpSpPr/>
-        <p:nvPr/>
-      </p:nvGrpSpPr>
-      <p:grpSpPr/>
-      <p:sp>
-        <p:nvSpPr>
-          <p:cNvPr id="2" name="Rectangle 1"/>
-          <p:cNvSpPr/>
-          <p:nvPr/>
-        </p:nvSpPr>
-        <p:spPr>
-          <a:xfrm>
-            <a:off x="0" y="0"/>
-            <a:ext cx="12191695" cy="960120"/>
-          </a:xfrm>
-          <a:prstGeom prst="rect">
-            <a:avLst/>
-          </a:prstGeom>
-          <a:solidFill>
-            <a:srgbClr val="095292"/>
-          </a:solidFill>
-          <a:ln>
-            <a:noFill/>
-          </a:ln>
-        </p:spPr>
-        <p:style>
-          <a:lnRef idx="1">
-            <a:schemeClr val="accent1"/>
-          </a:lnRef>
-          <a:fillRef idx="3">
-            <a:schemeClr val="accent1"/>
-          </a:fillRef>
-          <a:effectRef idx="2">
-            <a:schemeClr val="accent1"/>
-          </a:effectRef>
-          <a:fontRef idx="minor">
-            <a:schemeClr val="lt1"/>
-          </a:fontRef>
-        </p:style>
-        <p:txBody>
-          <a:bodyPr rtlCol="0" anchor="ctr"/>
-          <a:lstStyle/>
-          <a:p>
-            <a:pPr algn="ctr"/>
-          </a:p>
-        </p:txBody>
-      </p:sp>
-      <p:sp>
-        <p:nvSpPr>
-          <p:cNvPr id="3" name="Rectangle 2"/>
-          <p:cNvSpPr/>
-          <p:nvPr/>
-        </p:nvSpPr>
-        <p:spPr>
-          <a:xfrm>
-            <a:off x="0" y="960120"/>
-            <a:ext cx="12191695" cy="41148"/>
-          </a:xfrm>
-          <a:prstGeom prst="rect">
-            <a:avLst/>
-          </a:prstGeom>
-          <a:solidFill>
-            <a:srgbClr val="FFD000"/>
-          </a:solidFill>
-          <a:ln>
-            <a:noFill/>
-          </a:ln>
-        </p:spPr>
-        <p:style>
-          <a:lnRef idx="1">
-            <a:schemeClr val="accent1"/>
-          </a:lnRef>
-          <a:fillRef idx="3">
-            <a:schemeClr val="accent1"/>
-          </a:fillRef>
-          <a:effectRef idx="2">
-            <a:schemeClr val="accent1"/>
-          </a:effectRef>
-          <a:fontRef idx="minor">
-            <a:schemeClr val="lt1"/>
-          </a:fontRef>
-        </p:style>
-        <p:txBody>
-          <a:bodyPr rtlCol="0" anchor="ctr"/>
-          <a:lstStyle/>
-          <a:p>
-            <a:pPr algn="ctr"/>
-          </a:p>
-        </p:txBody>
-      </p:sp>
-      <p:sp>
-        <p:nvSpPr>
-          <p:cNvPr id="4" name="TextBox 3"/>
-          <p:cNvSpPr txBox="1"/>
-          <p:nvPr/>
-        </p:nvSpPr>
-        <p:spPr>
-          <a:xfrm>
-            <a:off x="457200" y="164592"/>
-            <a:ext cx="11277295" cy="502920"/>
-          </a:xfrm>
-          <a:prstGeom prst="rect">
-            <a:avLst/>
-          </a:prstGeom>
-          <a:noFill/>
-        </p:spPr>
-        <p:txBody>
-          <a:bodyPr wrap="square">
-            <a:spAutoFit/>
-          </a:bodyPr>
-          <a:lstStyle/>
-          <a:p>
-            <a:r>
-              <a:rPr sz="2600" b="1" i="0">
-                <a:solidFill>
-                  <a:srgbClr val="FFFFFF"/>
-                </a:solidFill>
-                <a:latin typeface="Calibri"/>
-              </a:rPr>
-              <a:t>Taller PI VetCare — pasos guiados</a:t>
-            </a:r>
-          </a:p>
-        </p:txBody>
-      </p:sp>
-      <p:sp>
-        <p:nvSpPr>
-          <p:cNvPr id="5" name="Rounded Rectangle 4"/>
-          <p:cNvSpPr/>
-          <p:nvPr/>
-        </p:nvSpPr>
-        <p:spPr>
-          <a:xfrm>
-            <a:off x="457200" y="1554480"/>
-            <a:ext cx="11277295" cy="1051560"/>
-          </a:xfrm>
-          <a:prstGeom prst="roundRect">
-            <a:avLst>
-              <a:gd name="adj" fmla="val 12000"/>
-            </a:avLst>
-          </a:prstGeom>
-          <a:solidFill>
-            <a:srgbClr val="F2F2F2"/>
-          </a:solidFill>
-          <a:ln>
-            <a:noFill/>
-          </a:ln>
-        </p:spPr>
-        <p:style>
-          <a:lnRef idx="1">
-            <a:schemeClr val="accent1"/>
-          </a:lnRef>
-          <a:fillRef idx="3">
-            <a:schemeClr val="accent1"/>
-          </a:fillRef>
-          <a:effectRef idx="2">
-            <a:schemeClr val="accent1"/>
-          </a:effectRef>
-          <a:fontRef idx="minor">
-            <a:schemeClr val="lt1"/>
-          </a:fontRef>
-        </p:style>
-        <p:txBody>
-          <a:bodyPr rtlCol="0" anchor="ctr"/>
-          <a:lstStyle/>
-          <a:p>
-            <a:pPr algn="ctr"/>
-          </a:p>
-        </p:txBody>
-      </p:sp>
-      <p:sp>
-        <p:nvSpPr>
-          <p:cNvPr id="6" name="Rounded Rectangle 5"/>
-          <p:cNvSpPr/>
-          <p:nvPr/>
-        </p:nvSpPr>
-        <p:spPr>
-          <a:xfrm>
-            <a:off x="594360" y="1860804"/>
-            <a:ext cx="438912" cy="438912"/>
-          </a:xfrm>
-          <a:prstGeom prst="roundRect">
-            <a:avLst>
-              <a:gd name="adj" fmla="val 12000"/>
-            </a:avLst>
-          </a:prstGeom>
-          <a:solidFill>
-            <a:srgbClr val="095292"/>
-          </a:solidFill>
-          <a:ln>
-            <a:noFill/>
-          </a:ln>
-        </p:spPr>
-        <p:style>
-          <a:lnRef idx="1">
-            <a:schemeClr val="accent1"/>
-          </a:lnRef>
-          <a:fillRef idx="3">
-            <a:schemeClr val="accent1"/>
-          </a:fillRef>
-          <a:effectRef idx="2">
-            <a:schemeClr val="accent1"/>
-          </a:effectRef>
-          <a:fontRef idx="minor">
-            <a:schemeClr val="lt1"/>
-          </a:fontRef>
-        </p:style>
-        <p:txBody>
-          <a:bodyPr rtlCol="0" anchor="ctr"/>
-          <a:lstStyle/>
-          <a:p>
-            <a:pPr algn="ctr"/>
-          </a:p>
-        </p:txBody>
-      </p:sp>
-      <p:sp>
-        <p:nvSpPr>
-          <p:cNvPr id="7" name="TextBox 6"/>
-          <p:cNvSpPr txBox="1"/>
-          <p:nvPr/>
-        </p:nvSpPr>
-        <p:spPr>
-          <a:xfrm>
-            <a:off x="594360" y="1860804"/>
-            <a:ext cx="438912" cy="438912"/>
-          </a:xfrm>
-          <a:prstGeom prst="rect">
-            <a:avLst/>
-          </a:prstGeom>
-          <a:noFill/>
-        </p:spPr>
-        <p:txBody>
-          <a:bodyPr wrap="square" anchor="ctr"/>
-          <a:lstStyle/>
-          <a:p>
-            <a:pPr algn="ctr"/>
-            <a:r>
-              <a:rPr sz="1600" b="1" i="0">
-                <a:solidFill>
-                  <a:srgbClr val="FFFFFF"/>
-                </a:solidFill>
-                <a:latin typeface="Calibri"/>
-              </a:rPr>
-              <a:t>1</a:t>
-            </a:r>
-          </a:p>
-        </p:txBody>
-      </p:sp>
-      <p:sp>
-        <p:nvSpPr>
-          <p:cNvPr id="8" name="TextBox 7"/>
-          <p:cNvSpPr txBox="1"/>
-          <p:nvPr/>
-        </p:nvSpPr>
-        <p:spPr>
-          <a:xfrm>
-            <a:off x="1188720" y="1645920"/>
-            <a:ext cx="10271455" cy="886968"/>
-          </a:xfrm>
-          <a:prstGeom prst="rect">
-            <a:avLst/>
-          </a:prstGeom>
-          <a:noFill/>
-        </p:spPr>
-        <p:txBody>
-          <a:bodyPr wrap="square" anchor="ctr"/>
-          <a:lstStyle/>
-          <a:p>
-            <a:r>
-              <a:rPr sz="1500" b="1" i="0">
-                <a:solidFill>
-                  <a:srgbClr val="095292"/>
-                </a:solidFill>
-                <a:latin typeface="Calibri"/>
-              </a:rPr>
-              <a:t>Completar checklist de avance (si/no/parcial).</a:t>
-            </a:r>
-          </a:p>
-        </p:txBody>
-      </p:sp>
-      <p:sp>
-        <p:nvSpPr>
-          <p:cNvPr id="9" name="Rounded Rectangle 8"/>
-          <p:cNvSpPr/>
-          <p:nvPr/>
-        </p:nvSpPr>
-        <p:spPr>
-          <a:xfrm>
-            <a:off x="457200" y="2697480"/>
-            <a:ext cx="11277295" cy="1051560"/>
-          </a:xfrm>
-          <a:prstGeom prst="roundRect">
-            <a:avLst>
-              <a:gd name="adj" fmla="val 12000"/>
-            </a:avLst>
-          </a:prstGeom>
-          <a:solidFill>
-            <a:srgbClr val="E8F4FA"/>
-          </a:solidFill>
-          <a:ln>
-            <a:noFill/>
-          </a:ln>
-        </p:spPr>
-        <p:style>
-          <a:lnRef idx="1">
-            <a:schemeClr val="accent1"/>
-          </a:lnRef>
-          <a:fillRef idx="3">
-            <a:schemeClr val="accent1"/>
-          </a:fillRef>
-          <a:effectRef idx="2">
-            <a:schemeClr val="accent1"/>
-          </a:effectRef>
-          <a:fontRef idx="minor">
-            <a:schemeClr val="lt1"/>
-          </a:fontRef>
-        </p:style>
-        <p:txBody>
-          <a:bodyPr rtlCol="0" anchor="ctr"/>
-          <a:lstStyle/>
-          <a:p>
-            <a:pPr algn="ctr"/>
-          </a:p>
-        </p:txBody>
-      </p:sp>
-      <p:sp>
-        <p:nvSpPr>
-          <p:cNvPr id="10" name="Rounded Rectangle 9"/>
-          <p:cNvSpPr/>
-          <p:nvPr/>
-        </p:nvSpPr>
-        <p:spPr>
-          <a:xfrm>
-            <a:off x="594360" y="3003804"/>
-            <a:ext cx="438912" cy="438912"/>
-          </a:xfrm>
-          <a:prstGeom prst="roundRect">
-            <a:avLst>
-              <a:gd name="adj" fmla="val 12000"/>
-            </a:avLst>
-          </a:prstGeom>
-          <a:solidFill>
-            <a:srgbClr val="095292"/>
-          </a:solidFill>
-          <a:ln>
-            <a:noFill/>
-          </a:ln>
-        </p:spPr>
-        <p:style>
-          <a:lnRef idx="1">
-            <a:schemeClr val="accent1"/>
-          </a:lnRef>
-          <a:fillRef idx="3">
-            <a:schemeClr val="accent1"/>
-          </a:fillRef>
-          <a:effectRef idx="2">
-            <a:schemeClr val="accent1"/>
-          </a:effectRef>
-          <a:fontRef idx="minor">
-            <a:schemeClr val="lt1"/>
-          </a:fontRef>
-        </p:style>
-        <p:txBody>
-          <a:bodyPr rtlCol="0" anchor="ctr"/>
-          <a:lstStyle/>
-          <a:p>
-            <a:pPr algn="ctr"/>
-          </a:p>
-        </p:txBody>
-      </p:sp>
-      <p:sp>
-        <p:nvSpPr>
-          <p:cNvPr id="11" name="TextBox 10"/>
-          <p:cNvSpPr txBox="1"/>
-          <p:nvPr/>
-        </p:nvSpPr>
-        <p:spPr>
-          <a:xfrm>
-            <a:off x="594360" y="3003804"/>
-            <a:ext cx="438912" cy="438912"/>
-          </a:xfrm>
-          <a:prstGeom prst="rect">
-            <a:avLst/>
-          </a:prstGeom>
-          <a:noFill/>
-        </p:spPr>
-        <p:txBody>
-          <a:bodyPr wrap="square" anchor="ctr"/>
-          <a:lstStyle/>
-          <a:p>
-            <a:pPr algn="ctr"/>
-            <a:r>
-              <a:rPr sz="1600" b="1" i="0">
-                <a:solidFill>
-                  <a:srgbClr val="FFFFFF"/>
-                </a:solidFill>
-                <a:latin typeface="Calibri"/>
-              </a:rPr>
-              <a:t>2</a:t>
-            </a:r>
-          </a:p>
-        </p:txBody>
-      </p:sp>
-      <p:sp>
-        <p:nvSpPr>
-          <p:cNvPr id="12" name="TextBox 11"/>
-          <p:cNvSpPr txBox="1"/>
-          <p:nvPr/>
-        </p:nvSpPr>
-        <p:spPr>
-          <a:xfrm>
-            <a:off x="1188720" y="2788920"/>
-            <a:ext cx="10271455" cy="886968"/>
-          </a:xfrm>
-          <a:prstGeom prst="rect">
-            <a:avLst/>
-          </a:prstGeom>
-          <a:noFill/>
-        </p:spPr>
-        <p:txBody>
-          <a:bodyPr wrap="square" anchor="ctr"/>
-          <a:lstStyle/>
-          <a:p>
-            <a:r>
-              <a:rPr sz="1500" b="1" i="0">
-                <a:solidFill>
-                  <a:srgbClr val="095292"/>
-                </a:solidFill>
-                <a:latin typeface="Calibri"/>
-              </a:rPr>
-              <a:t>Demo 3-5 min: ER + 1 proc + 1 trigger.</a:t>
-            </a:r>
-          </a:p>
-        </p:txBody>
-      </p:sp>
-      <p:sp>
-        <p:nvSpPr>
-          <p:cNvPr id="13" name="Rounded Rectangle 12"/>
-          <p:cNvSpPr/>
-          <p:nvPr/>
-        </p:nvSpPr>
-        <p:spPr>
-          <a:xfrm>
-            <a:off x="457200" y="3840480"/>
-            <a:ext cx="11277295" cy="1051560"/>
-          </a:xfrm>
-          <a:prstGeom prst="roundRect">
-            <a:avLst>
-              <a:gd name="adj" fmla="val 12000"/>
-            </a:avLst>
-          </a:prstGeom>
-          <a:solidFill>
-            <a:srgbClr val="F2F2F2"/>
-          </a:solidFill>
-          <a:ln>
-            <a:noFill/>
-          </a:ln>
-        </p:spPr>
-        <p:style>
-          <a:lnRef idx="1">
-            <a:schemeClr val="accent1"/>
-          </a:lnRef>
-          <a:fillRef idx="3">
-            <a:schemeClr val="accent1"/>
-          </a:fillRef>
-          <a:effectRef idx="2">
-            <a:schemeClr val="accent1"/>
-          </a:effectRef>
-          <a:fontRef idx="minor">
-            <a:schemeClr val="lt1"/>
-          </a:fontRef>
-        </p:style>
-        <p:txBody>
-          <a:bodyPr rtlCol="0" anchor="ctr"/>
-          <a:lstStyle/>
-          <a:p>
-            <a:pPr algn="ctr"/>
-          </a:p>
-        </p:txBody>
-      </p:sp>
-      <p:sp>
-        <p:nvSpPr>
-          <p:cNvPr id="14" name="Rounded Rectangle 13"/>
-          <p:cNvSpPr/>
-          <p:nvPr/>
-        </p:nvSpPr>
-        <p:spPr>
-          <a:xfrm>
-            <a:off x="594360" y="4146804"/>
-            <a:ext cx="438912" cy="438912"/>
-          </a:xfrm>
-          <a:prstGeom prst="roundRect">
-            <a:avLst>
-              <a:gd name="adj" fmla="val 12000"/>
-            </a:avLst>
-          </a:prstGeom>
-          <a:solidFill>
-            <a:srgbClr val="095292"/>
-          </a:solidFill>
-          <a:ln>
-            <a:noFill/>
-          </a:ln>
-        </p:spPr>
-        <p:style>
-          <a:lnRef idx="1">
-            <a:schemeClr val="accent1"/>
-          </a:lnRef>
-          <a:fillRef idx="3">
-            <a:schemeClr val="accent1"/>
-          </a:fillRef>
-          <a:effectRef idx="2">
-            <a:schemeClr val="accent1"/>
-          </a:effectRef>
-          <a:fontRef idx="minor">
-            <a:schemeClr val="lt1"/>
-          </a:fontRef>
-        </p:style>
-        <p:txBody>
-          <a:bodyPr rtlCol="0" anchor="ctr"/>
-          <a:lstStyle/>
-          <a:p>
-            <a:pPr algn="ctr"/>
-          </a:p>
-        </p:txBody>
-      </p:sp>
-      <p:sp>
-        <p:nvSpPr>
-          <p:cNvPr id="15" name="TextBox 14"/>
-          <p:cNvSpPr txBox="1"/>
-          <p:nvPr/>
-        </p:nvSpPr>
-        <p:spPr>
-          <a:xfrm>
-            <a:off x="594360" y="4146804"/>
-            <a:ext cx="438912" cy="438912"/>
-          </a:xfrm>
-          <a:prstGeom prst="rect">
-            <a:avLst/>
-          </a:prstGeom>
-          <a:noFill/>
-        </p:spPr>
-        <p:txBody>
-          <a:bodyPr wrap="square" anchor="ctr"/>
-          <a:lstStyle/>
-          <a:p>
-            <a:pPr algn="ctr"/>
-            <a:r>
-              <a:rPr sz="1600" b="1" i="0">
-                <a:solidFill>
-                  <a:srgbClr val="FFFFFF"/>
-                </a:solidFill>
-                <a:latin typeface="Calibri"/>
-              </a:rPr>
-              <a:t>3</a:t>
-            </a:r>
-          </a:p>
-        </p:txBody>
-      </p:sp>
-      <p:sp>
-        <p:nvSpPr>
-          <p:cNvPr id="16" name="TextBox 15"/>
-          <p:cNvSpPr txBox="1"/>
-          <p:nvPr/>
-        </p:nvSpPr>
-        <p:spPr>
-          <a:xfrm>
-            <a:off x="1188720" y="3931920"/>
-            <a:ext cx="10271455" cy="886968"/>
-          </a:xfrm>
-          <a:prstGeom prst="rect">
-            <a:avLst/>
-          </a:prstGeom>
-          <a:noFill/>
-        </p:spPr>
-        <p:txBody>
-          <a:bodyPr wrap="square" anchor="ctr"/>
-          <a:lstStyle/>
-          <a:p>
-            <a:r>
-              <a:rPr sz="1500" b="1" i="0">
-                <a:solidFill>
-                  <a:srgbClr val="095292"/>
-                </a:solidFill>
-                <a:latin typeface="Calibri"/>
-              </a:rPr>
-              <a:t>Lista de gaps con responsable.</a:t>
-            </a:r>
-          </a:p>
-        </p:txBody>
-      </p:sp>
-      <p:sp>
-        <p:nvSpPr>
-          <p:cNvPr id="17" name="Rounded Rectangle 16"/>
-          <p:cNvSpPr/>
-          <p:nvPr/>
-        </p:nvSpPr>
-        <p:spPr>
-          <a:xfrm>
-            <a:off x="457200" y="4983480"/>
-            <a:ext cx="11277295" cy="1051560"/>
-          </a:xfrm>
-          <a:prstGeom prst="roundRect">
-            <a:avLst>
-              <a:gd name="adj" fmla="val 12000"/>
-            </a:avLst>
-          </a:prstGeom>
-          <a:solidFill>
-            <a:srgbClr val="E8F4FA"/>
-          </a:solidFill>
-          <a:ln>
-            <a:noFill/>
-          </a:ln>
-        </p:spPr>
-        <p:style>
-          <a:lnRef idx="1">
-            <a:schemeClr val="accent1"/>
-          </a:lnRef>
-          <a:fillRef idx="3">
-            <a:schemeClr val="accent1"/>
-          </a:fillRef>
-          <a:effectRef idx="2">
-            <a:schemeClr val="accent1"/>
-          </a:effectRef>
-          <a:fontRef idx="minor">
-            <a:schemeClr val="lt1"/>
-          </a:fontRef>
-        </p:style>
-        <p:txBody>
-          <a:bodyPr rtlCol="0" anchor="ctr"/>
-          <a:lstStyle/>
-          <a:p>
-            <a:pPr algn="ctr"/>
-          </a:p>
-        </p:txBody>
-      </p:sp>
-      <p:sp>
-        <p:nvSpPr>
-          <p:cNvPr id="18" name="Rounded Rectangle 17"/>
-          <p:cNvSpPr/>
-          <p:nvPr/>
-        </p:nvSpPr>
-        <p:spPr>
-          <a:xfrm>
-            <a:off x="594360" y="5289804"/>
-            <a:ext cx="438912" cy="438912"/>
-          </a:xfrm>
-          <a:prstGeom prst="roundRect">
-            <a:avLst>
-              <a:gd name="adj" fmla="val 12000"/>
-            </a:avLst>
-          </a:prstGeom>
-          <a:solidFill>
-            <a:srgbClr val="095292"/>
-          </a:solidFill>
-          <a:ln>
-            <a:noFill/>
-          </a:ln>
-        </p:spPr>
-        <p:style>
-          <a:lnRef idx="1">
-            <a:schemeClr val="accent1"/>
-          </a:lnRef>
-          <a:fillRef idx="3">
-            <a:schemeClr val="accent1"/>
-          </a:fillRef>
-          <a:effectRef idx="2">
-            <a:schemeClr val="accent1"/>
-          </a:effectRef>
-          <a:fontRef idx="minor">
-            <a:schemeClr val="lt1"/>
-          </a:fontRef>
-        </p:style>
-        <p:txBody>
-          <a:bodyPr rtlCol="0" anchor="ctr"/>
-          <a:lstStyle/>
-          <a:p>
-            <a:pPr algn="ctr"/>
-          </a:p>
-        </p:txBody>
-      </p:sp>
-      <p:sp>
-        <p:nvSpPr>
-          <p:cNvPr id="19" name="TextBox 18"/>
-          <p:cNvSpPr txBox="1"/>
-          <p:nvPr/>
-        </p:nvSpPr>
-        <p:spPr>
-          <a:xfrm>
-            <a:off x="594360" y="5289804"/>
-            <a:ext cx="438912" cy="438912"/>
-          </a:xfrm>
-          <a:prstGeom prst="rect">
-            <a:avLst/>
-          </a:prstGeom>
-          <a:noFill/>
-        </p:spPr>
-        <p:txBody>
-          <a:bodyPr wrap="square" anchor="ctr"/>
-          <a:lstStyle/>
-          <a:p>
-            <a:pPr algn="ctr"/>
-            <a:r>
-              <a:rPr sz="1600" b="1" i="0">
-                <a:solidFill>
-                  <a:srgbClr val="FFFFFF"/>
-                </a:solidFill>
-                <a:latin typeface="Calibri"/>
-              </a:rPr>
-              <a:t>4</a:t>
-            </a:r>
-          </a:p>
-        </p:txBody>
-      </p:sp>
-      <p:sp>
-        <p:nvSpPr>
-          <p:cNvPr id="20" name="TextBox 19"/>
-          <p:cNvSpPr txBox="1"/>
-          <p:nvPr/>
-        </p:nvSpPr>
-        <p:spPr>
-          <a:xfrm>
-            <a:off x="1188720" y="5074920"/>
-            <a:ext cx="10271455" cy="886968"/>
-          </a:xfrm>
-          <a:prstGeom prst="rect">
-            <a:avLst/>
-          </a:prstGeom>
-          <a:noFill/>
-        </p:spPr>
-        <p:txBody>
-          <a:bodyPr wrap="square" anchor="ctr"/>
-          <a:lstStyle/>
-          <a:p>
-            <a:r>
-              <a:rPr sz="1500" b="1" i="0">
-                <a:solidFill>
-                  <a:srgbClr val="095292"/>
-                </a:solidFill>
-                <a:latin typeface="Calibri"/>
-              </a:rPr>
-              <a:t>Subir avance intermedio a la plataforma del curso (Talleres) si se pide.</a:t>
-            </a:r>
-          </a:p>
-        </p:txBody>
-      </p:sp>
-      <p:sp>
-        <p:nvSpPr>
-          <p:cNvPr id="21" name="TextBox 20"/>
-          <p:cNvSpPr txBox="1"/>
-          <p:nvPr/>
-        </p:nvSpPr>
-        <p:spPr>
-          <a:xfrm>
-            <a:off x="11185855" y="6473952"/>
-            <a:ext cx="640080" cy="274320"/>
-          </a:xfrm>
-          <a:prstGeom prst="rect">
-            <a:avLst/>
-          </a:prstGeom>
-          <a:noFill/>
-        </p:spPr>
-        <p:txBody>
-          <a:bodyPr wrap="square">
-            <a:spAutoFit/>
-          </a:bodyPr>
-          <a:lstStyle/>
-          <a:p>
-            <a:pPr algn="r"/>
-            <a:r>
-              <a:rPr sz="1100" b="0" i="0">
-                <a:solidFill>
-                  <a:srgbClr val="666666"/>
-                </a:solidFill>
-                <a:latin typeface="Calibri"/>
-              </a:rPr>
-              <a:t>28</a:t>
-            </a:r>
-          </a:p>
-        </p:txBody>
-      </p:sp>
-    </p:spTree>
-  </p:cSld>
-  <p:clrMapOvr>
-    <a:masterClrMapping/>
-  </p:clrMapOvr>
-</p:sld>
-</file>
-
-<file path=ppt/slides/slide29.xml><?xml version="1.0" encoding="utf-8"?>
-<p:sld xmlns:a="http://schemas.openxmlformats.org/drawingml/2006/main" xmlns:p="http://schemas.openxmlformats.org/presentationml/2006/main" xmlns:r="http://schemas.openxmlformats.org/officeDocument/2006/relationships">
-  <p:cSld>
-    <p:bg>
-      <p:bgPr>
-        <a:solidFill>
-          <a:srgbClr val="FFFFFF"/>
-        </a:solidFill>
-        <a:effectLst/>
-      </p:bgPr>
-    </p:bg>
-    <p:spTree>
-      <p:nvGrpSpPr>
-        <p:cNvPr id="1" name=""/>
-        <p:cNvGrpSpPr/>
-        <p:nvPr/>
-      </p:nvGrpSpPr>
-      <p:grpSpPr/>
-      <p:sp>
-        <p:nvSpPr>
-          <p:cNvPr id="2" name="Rectangle 1"/>
-          <p:cNvSpPr/>
-          <p:nvPr/>
-        </p:nvSpPr>
-        <p:spPr>
-          <a:xfrm>
-            <a:off x="0" y="0"/>
-            <a:ext cx="12191695" cy="960120"/>
-          </a:xfrm>
-          <a:prstGeom prst="rect">
-            <a:avLst/>
-          </a:prstGeom>
-          <a:solidFill>
-            <a:srgbClr val="095292"/>
-          </a:solidFill>
-          <a:ln>
-            <a:noFill/>
-          </a:ln>
-        </p:spPr>
-        <p:style>
-          <a:lnRef idx="1">
-            <a:schemeClr val="accent1"/>
-          </a:lnRef>
-          <a:fillRef idx="3">
-            <a:schemeClr val="accent1"/>
-          </a:fillRef>
-          <a:effectRef idx="2">
-            <a:schemeClr val="accent1"/>
-          </a:effectRef>
-          <a:fontRef idx="minor">
-            <a:schemeClr val="lt1"/>
-          </a:fontRef>
-        </p:style>
-        <p:txBody>
-          <a:bodyPr rtlCol="0" anchor="ctr"/>
-          <a:lstStyle/>
-          <a:p>
-            <a:pPr algn="ctr"/>
-          </a:p>
-        </p:txBody>
-      </p:sp>
-      <p:sp>
-        <p:nvSpPr>
-          <p:cNvPr id="3" name="Rectangle 2"/>
-          <p:cNvSpPr/>
-          <p:nvPr/>
-        </p:nvSpPr>
-        <p:spPr>
-          <a:xfrm>
-            <a:off x="0" y="960120"/>
-            <a:ext cx="12191695" cy="41148"/>
-          </a:xfrm>
-          <a:prstGeom prst="rect">
-            <a:avLst/>
-          </a:prstGeom>
-          <a:solidFill>
-            <a:srgbClr val="FFD000"/>
-          </a:solidFill>
-          <a:ln>
-            <a:noFill/>
-          </a:ln>
-        </p:spPr>
-        <p:style>
-          <a:lnRef idx="1">
-            <a:schemeClr val="accent1"/>
-          </a:lnRef>
-          <a:fillRef idx="3">
-            <a:schemeClr val="accent1"/>
-          </a:fillRef>
-          <a:effectRef idx="2">
-            <a:schemeClr val="accent1"/>
-          </a:effectRef>
-          <a:fontRef idx="minor">
-            <a:schemeClr val="lt1"/>
-          </a:fontRef>
-        </p:style>
-        <p:txBody>
-          <a:bodyPr rtlCol="0" anchor="ctr"/>
-          <a:lstStyle/>
-          <a:p>
-            <a:pPr algn="ctr"/>
-          </a:p>
-        </p:txBody>
-      </p:sp>
-      <p:sp>
-        <p:nvSpPr>
-          <p:cNvPr id="4" name="TextBox 3"/>
-          <p:cNvSpPr txBox="1"/>
-          <p:nvPr/>
-        </p:nvSpPr>
-        <p:spPr>
-          <a:xfrm>
-            <a:off x="457200" y="164592"/>
-            <a:ext cx="11277295" cy="502920"/>
-          </a:xfrm>
-          <a:prstGeom prst="rect">
-            <a:avLst/>
-          </a:prstGeom>
-          <a:noFill/>
-        </p:spPr>
-        <p:txBody>
-          <a:bodyPr wrap="square">
-            <a:spAutoFit/>
-          </a:bodyPr>
-          <a:lstStyle/>
-          <a:p>
-            <a:r>
-              <a:rPr sz="2600" b="1" i="0">
-                <a:solidFill>
-                  <a:srgbClr val="FFFFFF"/>
-                </a:solidFill>
-                <a:latin typeface="Calibri"/>
-              </a:rPr>
-              <a:t>Taller PI VetCare — pistas (checklist vacio)</a:t>
-            </a:r>
-          </a:p>
-        </p:txBody>
-      </p:sp>
-      <p:sp>
-        <p:nvSpPr>
-          <p:cNvPr id="5" name="Rounded Rectangle 4"/>
-          <p:cNvSpPr/>
-          <p:nvPr/>
-        </p:nvSpPr>
-        <p:spPr>
-          <a:xfrm>
-            <a:off x="457200" y="1261872"/>
-            <a:ext cx="11277295" cy="566928"/>
-          </a:xfrm>
-          <a:prstGeom prst="roundRect">
-            <a:avLst>
-              <a:gd name="adj" fmla="val 12000"/>
-            </a:avLst>
-          </a:prstGeom>
-          <a:solidFill>
-            <a:srgbClr val="F2F2F2"/>
-          </a:solidFill>
-          <a:ln>
-            <a:noFill/>
-          </a:ln>
-        </p:spPr>
-        <p:style>
-          <a:lnRef idx="1">
-            <a:schemeClr val="accent1"/>
-          </a:lnRef>
-          <a:fillRef idx="3">
-            <a:schemeClr val="accent1"/>
-          </a:fillRef>
-          <a:effectRef idx="2">
-            <a:schemeClr val="accent1"/>
-          </a:effectRef>
-          <a:fontRef idx="minor">
-            <a:schemeClr val="lt1"/>
-          </a:fontRef>
-        </p:style>
-        <p:txBody>
-          <a:bodyPr rtlCol="0" anchor="ctr"/>
-          <a:lstStyle/>
-          <a:p>
-            <a:pPr algn="ctr"/>
-          </a:p>
-        </p:txBody>
-      </p:sp>
-      <p:sp>
-        <p:nvSpPr>
-          <p:cNvPr id="6" name="Rectangle 5"/>
-          <p:cNvSpPr/>
-          <p:nvPr/>
-        </p:nvSpPr>
-        <p:spPr>
-          <a:xfrm>
-            <a:off x="640080" y="1408175"/>
-            <a:ext cx="274320" cy="274320"/>
-          </a:xfrm>
-          <a:prstGeom prst="rect">
-            <a:avLst/>
-          </a:prstGeom>
-          <a:solidFill>
-            <a:srgbClr val="FFFFFF"/>
-          </a:solidFill>
-          <a:ln>
-            <a:solidFill>
-              <a:srgbClr val="333333"/>
-            </a:solidFill>
-          </a:ln>
-        </p:spPr>
-        <p:style>
-          <a:lnRef idx="1">
-            <a:schemeClr val="accent1"/>
-          </a:lnRef>
-          <a:fillRef idx="3">
-            <a:schemeClr val="accent1"/>
-          </a:fillRef>
-          <a:effectRef idx="2">
-            <a:schemeClr val="accent1"/>
-          </a:effectRef>
-          <a:fontRef idx="minor">
-            <a:schemeClr val="lt1"/>
-          </a:fontRef>
-        </p:style>
-        <p:txBody>
-          <a:bodyPr rtlCol="0" anchor="ctr"/>
-          <a:lstStyle/>
-          <a:p>
-            <a:pPr algn="ctr"/>
-          </a:p>
-        </p:txBody>
-      </p:sp>
-      <p:sp>
-        <p:nvSpPr>
-          <p:cNvPr id="7" name="Rectangle 6"/>
-          <p:cNvSpPr/>
-          <p:nvPr/>
-        </p:nvSpPr>
-        <p:spPr>
-          <a:xfrm>
-            <a:off x="640080" y="1408175"/>
-            <a:ext cx="73152" cy="274320"/>
-          </a:xfrm>
-          <a:prstGeom prst="rect">
-            <a:avLst/>
-          </a:prstGeom>
-          <a:solidFill>
-            <a:srgbClr val="269CCB"/>
-          </a:solidFill>
-          <a:ln>
-            <a:noFill/>
-          </a:ln>
-        </p:spPr>
-        <p:style>
-          <a:lnRef idx="1">
-            <a:schemeClr val="accent1"/>
-          </a:lnRef>
-          <a:fillRef idx="3">
-            <a:schemeClr val="accent1"/>
-          </a:fillRef>
-          <a:effectRef idx="2">
-            <a:schemeClr val="accent1"/>
-          </a:effectRef>
-          <a:fontRef idx="minor">
-            <a:schemeClr val="lt1"/>
-          </a:fontRef>
-        </p:style>
-        <p:txBody>
-          <a:bodyPr rtlCol="0" anchor="ctr"/>
-          <a:lstStyle/>
-          <a:p>
-            <a:pPr algn="ctr"/>
-          </a:p>
-        </p:txBody>
-      </p:sp>
-      <p:sp>
-        <p:nvSpPr>
-          <p:cNvPr id="8" name="TextBox 7"/>
-          <p:cNvSpPr txBox="1"/>
-          <p:nvPr/>
-        </p:nvSpPr>
-        <p:spPr>
-          <a:xfrm>
-            <a:off x="1097280" y="1353312"/>
-            <a:ext cx="10362895" cy="402336"/>
-          </a:xfrm>
-          <a:prstGeom prst="rect">
-            <a:avLst/>
-          </a:prstGeom>
-          <a:noFill/>
-        </p:spPr>
-        <p:txBody>
-          <a:bodyPr wrap="square" anchor="ctr"/>
-          <a:lstStyle/>
-          <a:p>
-            <a:r>
-              <a:rPr sz="1500" b="0" i="0">
-                <a:solidFill>
-                  <a:srgbClr val="333333"/>
-                </a:solidFill>
-                <a:latin typeface="Calibri"/>
-              </a:rPr>
-              <a:t>□ Si con evidencia?</a:t>
-            </a:r>
-          </a:p>
-        </p:txBody>
-      </p:sp>
-      <p:sp>
-        <p:nvSpPr>
-          <p:cNvPr id="9" name="Rounded Rectangle 8"/>
-          <p:cNvSpPr/>
-          <p:nvPr/>
-        </p:nvSpPr>
-        <p:spPr>
-          <a:xfrm>
-            <a:off x="457200" y="1938528"/>
-            <a:ext cx="11277295" cy="566928"/>
-          </a:xfrm>
-          <a:prstGeom prst="roundRect">
-            <a:avLst>
-              <a:gd name="adj" fmla="val 12000"/>
-            </a:avLst>
-          </a:prstGeom>
-          <a:solidFill>
-            <a:srgbClr val="F2F2F2"/>
-          </a:solidFill>
-          <a:ln>
-            <a:noFill/>
-          </a:ln>
-        </p:spPr>
-        <p:style>
-          <a:lnRef idx="1">
-            <a:schemeClr val="accent1"/>
-          </a:lnRef>
-          <a:fillRef idx="3">
-            <a:schemeClr val="accent1"/>
-          </a:fillRef>
-          <a:effectRef idx="2">
-            <a:schemeClr val="accent1"/>
-          </a:effectRef>
-          <a:fontRef idx="minor">
-            <a:schemeClr val="lt1"/>
-          </a:fontRef>
-        </p:style>
-        <p:txBody>
-          <a:bodyPr rtlCol="0" anchor="ctr"/>
-          <a:lstStyle/>
-          <a:p>
-            <a:pPr algn="ctr"/>
-          </a:p>
-        </p:txBody>
-      </p:sp>
-      <p:sp>
-        <p:nvSpPr>
-          <p:cNvPr id="10" name="Rectangle 9"/>
-          <p:cNvSpPr/>
-          <p:nvPr/>
-        </p:nvSpPr>
-        <p:spPr>
-          <a:xfrm>
-            <a:off x="640080" y="2084832"/>
-            <a:ext cx="274320" cy="274320"/>
-          </a:xfrm>
-          <a:prstGeom prst="rect">
-            <a:avLst/>
-          </a:prstGeom>
-          <a:solidFill>
-            <a:srgbClr val="FFFFFF"/>
-          </a:solidFill>
-          <a:ln>
-            <a:solidFill>
-              <a:srgbClr val="333333"/>
-            </a:solidFill>
-          </a:ln>
-        </p:spPr>
-        <p:style>
-          <a:lnRef idx="1">
-            <a:schemeClr val="accent1"/>
-          </a:lnRef>
-          <a:fillRef idx="3">
-            <a:schemeClr val="accent1"/>
-          </a:fillRef>
-          <a:effectRef idx="2">
-            <a:schemeClr val="accent1"/>
-          </a:effectRef>
-          <a:fontRef idx="minor">
-            <a:schemeClr val="lt1"/>
-          </a:fontRef>
-        </p:style>
-        <p:txBody>
-          <a:bodyPr rtlCol="0" anchor="ctr"/>
-          <a:lstStyle/>
-          <a:p>
-            <a:pPr algn="ctr"/>
-          </a:p>
-        </p:txBody>
-      </p:sp>
-      <p:sp>
-        <p:nvSpPr>
-          <p:cNvPr id="11" name="Rectangle 10"/>
-          <p:cNvSpPr/>
-          <p:nvPr/>
-        </p:nvSpPr>
-        <p:spPr>
-          <a:xfrm>
-            <a:off x="640080" y="2084832"/>
-            <a:ext cx="73152" cy="274320"/>
-          </a:xfrm>
-          <a:prstGeom prst="rect">
-            <a:avLst/>
-          </a:prstGeom>
-          <a:solidFill>
-            <a:srgbClr val="269CCB"/>
-          </a:solidFill>
-          <a:ln>
-            <a:noFill/>
-          </a:ln>
-        </p:spPr>
-        <p:style>
-          <a:lnRef idx="1">
-            <a:schemeClr val="accent1"/>
-          </a:lnRef>
-          <a:fillRef idx="3">
-            <a:schemeClr val="accent1"/>
-          </a:fillRef>
-          <a:effectRef idx="2">
-            <a:schemeClr val="accent1"/>
-          </a:effectRef>
-          <a:fontRef idx="minor">
-            <a:schemeClr val="lt1"/>
-          </a:fontRef>
-        </p:style>
-        <p:txBody>
-          <a:bodyPr rtlCol="0" anchor="ctr"/>
-          <a:lstStyle/>
-          <a:p>
-            <a:pPr algn="ctr"/>
-          </a:p>
-        </p:txBody>
-      </p:sp>
-      <p:sp>
-        <p:nvSpPr>
-          <p:cNvPr id="12" name="TextBox 11"/>
-          <p:cNvSpPr txBox="1"/>
-          <p:nvPr/>
-        </p:nvSpPr>
-        <p:spPr>
-          <a:xfrm>
-            <a:off x="1097280" y="2029968"/>
-            <a:ext cx="10362895" cy="402336"/>
-          </a:xfrm>
-          <a:prstGeom prst="rect">
-            <a:avLst/>
-          </a:prstGeom>
-          <a:noFill/>
-        </p:spPr>
-        <p:txBody>
-          <a:bodyPr wrap="square" anchor="ctr"/>
-          <a:lstStyle/>
-          <a:p>
-            <a:r>
-              <a:rPr sz="1500" b="0" i="0">
-                <a:solidFill>
-                  <a:srgbClr val="333333"/>
-                </a:solidFill>
-                <a:latin typeface="Calibri"/>
-              </a:rPr>
-              <a:t>□ Gaps con dueño?</a:t>
-            </a:r>
-          </a:p>
-        </p:txBody>
-      </p:sp>
-      <p:sp>
-        <p:nvSpPr>
-          <p:cNvPr id="13" name="Rounded Rectangle 12"/>
-          <p:cNvSpPr/>
-          <p:nvPr/>
-        </p:nvSpPr>
-        <p:spPr>
-          <a:xfrm>
-            <a:off x="457200" y="2615184"/>
-            <a:ext cx="11277295" cy="566928"/>
-          </a:xfrm>
-          <a:prstGeom prst="roundRect">
-            <a:avLst>
-              <a:gd name="adj" fmla="val 12000"/>
-            </a:avLst>
-          </a:prstGeom>
-          <a:solidFill>
-            <a:srgbClr val="F2F2F2"/>
-          </a:solidFill>
-          <a:ln>
-            <a:noFill/>
-          </a:ln>
-        </p:spPr>
-        <p:style>
-          <a:lnRef idx="1">
-            <a:schemeClr val="accent1"/>
-          </a:lnRef>
-          <a:fillRef idx="3">
-            <a:schemeClr val="accent1"/>
-          </a:fillRef>
-          <a:effectRef idx="2">
-            <a:schemeClr val="accent1"/>
-          </a:effectRef>
-          <a:fontRef idx="minor">
-            <a:schemeClr val="lt1"/>
-          </a:fontRef>
-        </p:style>
-        <p:txBody>
-          <a:bodyPr rtlCol="0" anchor="ctr"/>
-          <a:lstStyle/>
-          <a:p>
-            <a:pPr algn="ctr"/>
-          </a:p>
-        </p:txBody>
-      </p:sp>
-      <p:sp>
-        <p:nvSpPr>
-          <p:cNvPr id="14" name="Rectangle 13"/>
-          <p:cNvSpPr/>
-          <p:nvPr/>
-        </p:nvSpPr>
-        <p:spPr>
-          <a:xfrm>
-            <a:off x="640080" y="2761488"/>
-            <a:ext cx="274320" cy="274320"/>
-          </a:xfrm>
-          <a:prstGeom prst="rect">
-            <a:avLst/>
-          </a:prstGeom>
-          <a:solidFill>
-            <a:srgbClr val="FFFFFF"/>
-          </a:solidFill>
-          <a:ln>
-            <a:solidFill>
-              <a:srgbClr val="333333"/>
-            </a:solidFill>
-          </a:ln>
-        </p:spPr>
-        <p:style>
-          <a:lnRef idx="1">
-            <a:schemeClr val="accent1"/>
-          </a:lnRef>
-          <a:fillRef idx="3">
-            <a:schemeClr val="accent1"/>
-          </a:fillRef>
-          <a:effectRef idx="2">
-            <a:schemeClr val="accent1"/>
-          </a:effectRef>
-          <a:fontRef idx="minor">
-            <a:schemeClr val="lt1"/>
-          </a:fontRef>
-        </p:style>
-        <p:txBody>
-          <a:bodyPr rtlCol="0" anchor="ctr"/>
-          <a:lstStyle/>
-          <a:p>
-            <a:pPr algn="ctr"/>
-          </a:p>
-        </p:txBody>
-      </p:sp>
-      <p:sp>
-        <p:nvSpPr>
-          <p:cNvPr id="15" name="Rectangle 14"/>
-          <p:cNvSpPr/>
-          <p:nvPr/>
-        </p:nvSpPr>
-        <p:spPr>
-          <a:xfrm>
-            <a:off x="640080" y="2761488"/>
-            <a:ext cx="73152" cy="274320"/>
-          </a:xfrm>
-          <a:prstGeom prst="rect">
-            <a:avLst/>
-          </a:prstGeom>
-          <a:solidFill>
-            <a:srgbClr val="269CCB"/>
-          </a:solidFill>
-          <a:ln>
-            <a:noFill/>
-          </a:ln>
-        </p:spPr>
-        <p:style>
-          <a:lnRef idx="1">
-            <a:schemeClr val="accent1"/>
-          </a:lnRef>
-          <a:fillRef idx="3">
-            <a:schemeClr val="accent1"/>
-          </a:fillRef>
-          <a:effectRef idx="2">
-            <a:schemeClr val="accent1"/>
-          </a:effectRef>
-          <a:fontRef idx="minor">
-            <a:schemeClr val="lt1"/>
-          </a:fontRef>
-        </p:style>
-        <p:txBody>
-          <a:bodyPr rtlCol="0" anchor="ctr"/>
-          <a:lstStyle/>
-          <a:p>
-            <a:pPr algn="ctr"/>
-          </a:p>
-        </p:txBody>
-      </p:sp>
-      <p:sp>
-        <p:nvSpPr>
-          <p:cNvPr id="16" name="TextBox 15"/>
-          <p:cNvSpPr txBox="1"/>
-          <p:nvPr/>
-        </p:nvSpPr>
-        <p:spPr>
-          <a:xfrm>
-            <a:off x="1097280" y="2706624"/>
-            <a:ext cx="10362895" cy="402336"/>
-          </a:xfrm>
-          <a:prstGeom prst="rect">
-            <a:avLst/>
-          </a:prstGeom>
-          <a:noFill/>
-        </p:spPr>
-        <p:txBody>
-          <a:bodyPr wrap="square" anchor="ctr"/>
-          <a:lstStyle/>
-          <a:p>
-            <a:r>
-              <a:rPr sz="1500" b="0" i="0">
-                <a:solidFill>
-                  <a:srgbClr val="333333"/>
-                </a:solidFill>
-                <a:latin typeface="Calibri"/>
-              </a:rPr>
-              <a:t>□ Demo &lt;=5 min?</a:t>
-            </a:r>
-          </a:p>
-        </p:txBody>
-      </p:sp>
-      <p:sp>
-        <p:nvSpPr>
-          <p:cNvPr id="17" name="TextBox 16"/>
-          <p:cNvSpPr txBox="1"/>
-          <p:nvPr/>
-        </p:nvSpPr>
-        <p:spPr>
-          <a:xfrm>
-            <a:off x="11185855" y="6473952"/>
-            <a:ext cx="640080" cy="274320"/>
-          </a:xfrm>
-          <a:prstGeom prst="rect">
-            <a:avLst/>
-          </a:prstGeom>
-          <a:noFill/>
-        </p:spPr>
-        <p:txBody>
-          <a:bodyPr wrap="square">
-            <a:spAutoFit/>
-          </a:bodyPr>
-          <a:lstStyle/>
-          <a:p>
-            <a:pPr algn="r"/>
-            <a:r>
-              <a:rPr sz="1100" b="0" i="0">
-                <a:solidFill>
-                  <a:srgbClr val="666666"/>
-                </a:solidFill>
-                <a:latin typeface="Calibri"/>
-              </a:rPr>
-              <a:t>29</a:t>
+                  <a:srgbClr val="269CCB"/>
+                </a:solidFill>
+                <a:latin typeface="Calibri"/>
+              </a:rPr>
+              <a:t>Todo lo visto queda proyectado para repasar</a:t>
             </a:r>
           </a:p>
         </p:txBody>
@@ -12799,7 +9717,7 @@
                 </a:solidFill>
                 <a:latin typeface="Calibri"/>
               </a:rPr>
-              <a:t>Taller guiado = tarea del PI</a:t>
+              <a:t>Práctica (opcional, guía en la carpeta)</a:t>
             </a:r>
           </a:p>
         </p:txBody>
@@ -12914,7 +9832,7 @@
                 </a:solidFill>
                 <a:latin typeface="Calibri"/>
               </a:rPr>
-              <a:t>Criterios de exito · cierre · dudas del PI</a:t>
+              <a:t>Cierre conceptual · dudas</a:t>
             </a:r>
           </a:p>
         </p:txBody>
@@ -13003,1153 +9921,6 @@
                 <a:latin typeface="Calibri"/>
               </a:rPr>
               <a:t>3</a:t>
-            </a:r>
-          </a:p>
-        </p:txBody>
-      </p:sp>
-    </p:spTree>
-  </p:cSld>
-  <p:clrMapOvr>
-    <a:masterClrMapping/>
-  </p:clrMapOvr>
-</p:sld>
-</file>
-
-<file path=ppt/slides/slide30.xml><?xml version="1.0" encoding="utf-8"?>
-<p:sld xmlns:a="http://schemas.openxmlformats.org/drawingml/2006/main" xmlns:p="http://schemas.openxmlformats.org/presentationml/2006/main" xmlns:r="http://schemas.openxmlformats.org/officeDocument/2006/relationships">
-  <p:cSld>
-    <p:bg>
-      <p:bgPr>
-        <a:solidFill>
-          <a:srgbClr val="FFFFFF"/>
-        </a:solidFill>
-        <a:effectLst/>
-      </p:bgPr>
-    </p:bg>
-    <p:spTree>
-      <p:nvGrpSpPr>
-        <p:cNvPr id="1" name=""/>
-        <p:cNvGrpSpPr/>
-        <p:nvPr/>
-      </p:nvGrpSpPr>
-      <p:grpSpPr/>
-      <p:sp>
-        <p:nvSpPr>
-          <p:cNvPr id="2" name="Rectangle 1"/>
-          <p:cNvSpPr/>
-          <p:nvPr/>
-        </p:nvSpPr>
-        <p:spPr>
-          <a:xfrm>
-            <a:off x="0" y="0"/>
-            <a:ext cx="12191695" cy="960120"/>
-          </a:xfrm>
-          <a:prstGeom prst="rect">
-            <a:avLst/>
-          </a:prstGeom>
-          <a:solidFill>
-            <a:srgbClr val="095292"/>
-          </a:solidFill>
-          <a:ln>
-            <a:noFill/>
-          </a:ln>
-        </p:spPr>
-        <p:style>
-          <a:lnRef idx="1">
-            <a:schemeClr val="accent1"/>
-          </a:lnRef>
-          <a:fillRef idx="3">
-            <a:schemeClr val="accent1"/>
-          </a:fillRef>
-          <a:effectRef idx="2">
-            <a:schemeClr val="accent1"/>
-          </a:effectRef>
-          <a:fontRef idx="minor">
-            <a:schemeClr val="lt1"/>
-          </a:fontRef>
-        </p:style>
-        <p:txBody>
-          <a:bodyPr rtlCol="0" anchor="ctr"/>
-          <a:lstStyle/>
-          <a:p>
-            <a:pPr algn="ctr"/>
-          </a:p>
-        </p:txBody>
-      </p:sp>
-      <p:sp>
-        <p:nvSpPr>
-          <p:cNvPr id="3" name="Rectangle 2"/>
-          <p:cNvSpPr/>
-          <p:nvPr/>
-        </p:nvSpPr>
-        <p:spPr>
-          <a:xfrm>
-            <a:off x="0" y="960120"/>
-            <a:ext cx="12191695" cy="41148"/>
-          </a:xfrm>
-          <a:prstGeom prst="rect">
-            <a:avLst/>
-          </a:prstGeom>
-          <a:solidFill>
-            <a:srgbClr val="FFD000"/>
-          </a:solidFill>
-          <a:ln>
-            <a:noFill/>
-          </a:ln>
-        </p:spPr>
-        <p:style>
-          <a:lnRef idx="1">
-            <a:schemeClr val="accent1"/>
-          </a:lnRef>
-          <a:fillRef idx="3">
-            <a:schemeClr val="accent1"/>
-          </a:fillRef>
-          <a:effectRef idx="2">
-            <a:schemeClr val="accent1"/>
-          </a:effectRef>
-          <a:fontRef idx="minor">
-            <a:schemeClr val="lt1"/>
-          </a:fontRef>
-        </p:style>
-        <p:txBody>
-          <a:bodyPr rtlCol="0" anchor="ctr"/>
-          <a:lstStyle/>
-          <a:p>
-            <a:pPr algn="ctr"/>
-          </a:p>
-        </p:txBody>
-      </p:sp>
-      <p:sp>
-        <p:nvSpPr>
-          <p:cNvPr id="4" name="TextBox 3"/>
-          <p:cNvSpPr txBox="1"/>
-          <p:nvPr/>
-        </p:nvSpPr>
-        <p:spPr>
-          <a:xfrm>
-            <a:off x="457200" y="164592"/>
-            <a:ext cx="11277295" cy="502920"/>
-          </a:xfrm>
-          <a:prstGeom prst="rect">
-            <a:avLst/>
-          </a:prstGeom>
-          <a:noFill/>
-        </p:spPr>
-        <p:txBody>
-          <a:bodyPr wrap="square">
-            <a:spAutoFit/>
-          </a:bodyPr>
-          <a:lstStyle/>
-          <a:p>
-            <a:r>
-              <a:rPr sz="2600" b="1" i="0">
-                <a:solidFill>
-                  <a:srgbClr val="FFFFFF"/>
-                </a:solidFill>
-                <a:latin typeface="Calibri"/>
-              </a:rPr>
-              <a:t>Criterios de exito / entregable</a:t>
-            </a:r>
-          </a:p>
-        </p:txBody>
-      </p:sp>
-      <p:sp>
-        <p:nvSpPr>
-          <p:cNvPr id="5" name="TextBox 4"/>
-          <p:cNvSpPr txBox="1"/>
-          <p:nvPr/>
-        </p:nvSpPr>
-        <p:spPr>
-          <a:xfrm>
-            <a:off x="457200" y="1170432"/>
-            <a:ext cx="11277295" cy="5230368"/>
-          </a:xfrm>
-          <a:prstGeom prst="rect">
-            <a:avLst/>
-          </a:prstGeom>
-          <a:noFill/>
-        </p:spPr>
-        <p:txBody>
-          <a:bodyPr wrap="square">
-            <a:spAutoFit/>
-          </a:bodyPr>
-          <a:lstStyle/>
-          <a:p>
-            <a:pPr>
-              <a:spcAft>
-                <a:spcPts val="800"/>
-              </a:spcAft>
-            </a:pPr>
-            <a:r>
-              <a:rPr sz="2000" b="0" i="0">
-                <a:solidFill>
-                  <a:srgbClr val="333333"/>
-                </a:solidFill>
-                <a:latin typeface="Calibri"/>
-              </a:rPr>
-              <a:t>–   </a:t>
-            </a:r>
-            <a:r>
-              <a:rPr sz="2000" b="1" i="0">
-                <a:solidFill>
-                  <a:srgbClr val="333333"/>
-                </a:solidFill>
-                <a:latin typeface="Calibri"/>
-              </a:rPr>
-              <a:t>Entregable:</a:t>
-            </a:r>
-            <a:r>
-              <a:rPr sz="2000" b="0" i="0">
-                <a:solidFill>
-                  <a:srgbClr val="333333"/>
-                </a:solidFill>
-                <a:latin typeface="Calibri"/>
-              </a:rPr>
-              <a:t> Checklist firmada + enlace/ZIP avance (DDL+procs+ER)</a:t>
-            </a:r>
-          </a:p>
-          <a:p>
-            <a:pPr>
-              <a:spcAft>
-                <a:spcPts val="800"/>
-              </a:spcAft>
-            </a:pPr>
-            <a:r>
-              <a:rPr sz="2000" b="0" i="0">
-                <a:solidFill>
-                  <a:srgbClr val="333333"/>
-                </a:solidFill>
-                <a:latin typeface="Calibri"/>
-              </a:rPr>
-              <a:t>–   Evidencia: el SQL y su salida quedan guardados en cada pregunta de la plataforma del curso.</a:t>
-            </a:r>
-          </a:p>
-          <a:p>
-            <a:pPr>
-              <a:spcAft>
-                <a:spcPts val="800"/>
-              </a:spcAft>
-            </a:pPr>
-            <a:r>
-              <a:rPr sz="2000" b="0" i="0">
-                <a:solidFill>
-                  <a:srgbClr val="333333"/>
-                </a:solidFill>
-                <a:latin typeface="Calibri"/>
-              </a:rPr>
-              <a:t>–   Conserva copia en tu carpeta del PI (los .sql que pide el entregable).</a:t>
-            </a:r>
-          </a:p>
-          <a:p>
-            <a:pPr>
-              <a:spcAft>
-                <a:spcPts val="800"/>
-              </a:spcAft>
-            </a:pPr>
-            <a:r>
-              <a:rPr sz="2000" b="0" i="0">
-                <a:solidFill>
-                  <a:srgbClr val="333333"/>
-                </a:solidFill>
-                <a:latin typeface="Calibri"/>
-              </a:rPr>
-              <a:t>–   Actualizar checklist PI (que criterio de rubrica avanzo).</a:t>
-            </a:r>
-          </a:p>
-          <a:p>
-            <a:pPr>
-              <a:spcAft>
-                <a:spcPts val="800"/>
-              </a:spcAft>
-            </a:pPr>
-            <a:r>
-              <a:rPr sz="2000" b="0" i="0">
-                <a:solidFill>
-                  <a:srgbClr val="333333"/>
-                </a:solidFill>
-                <a:latin typeface="Calibri"/>
-              </a:rPr>
-              <a:t>–   </a:t>
-            </a:r>
-            <a:r>
-              <a:rPr sz="2000" b="1" i="0">
-                <a:solidFill>
-                  <a:srgbClr val="333333"/>
-                </a:solidFill>
-                <a:latin typeface="Calibri"/>
-              </a:rPr>
-              <a:t>Entrega en la plataforma del curso</a:t>
-            </a:r>
-            <a:r>
-              <a:rPr sz="2000" b="0" i="0">
-                <a:solidFill>
-                  <a:srgbClr val="333333"/>
-                </a:solidFill>
-                <a:latin typeface="Calibri"/>
-              </a:rPr>
-              <a:t> — en la fecha que indique el docente.</a:t>
-            </a:r>
-          </a:p>
-        </p:txBody>
-      </p:sp>
-      <p:sp>
-        <p:nvSpPr>
-          <p:cNvPr id="6" name="TextBox 5"/>
-          <p:cNvSpPr txBox="1"/>
-          <p:nvPr/>
-        </p:nvSpPr>
-        <p:spPr>
-          <a:xfrm>
-            <a:off x="11185855" y="6473952"/>
-            <a:ext cx="640080" cy="274320"/>
-          </a:xfrm>
-          <a:prstGeom prst="rect">
-            <a:avLst/>
-          </a:prstGeom>
-          <a:noFill/>
-        </p:spPr>
-        <p:txBody>
-          <a:bodyPr wrap="square">
-            <a:spAutoFit/>
-          </a:bodyPr>
-          <a:lstStyle/>
-          <a:p>
-            <a:pPr algn="r"/>
-            <a:r>
-              <a:rPr sz="1100" b="0" i="0">
-                <a:solidFill>
-                  <a:srgbClr val="666666"/>
-                </a:solidFill>
-                <a:latin typeface="Calibri"/>
-              </a:rPr>
-              <a:t>30</a:t>
-            </a:r>
-          </a:p>
-        </p:txBody>
-      </p:sp>
-    </p:spTree>
-  </p:cSld>
-  <p:clrMapOvr>
-    <a:masterClrMapping/>
-  </p:clrMapOvr>
-</p:sld>
-</file>
-
-<file path=ppt/slides/slide31.xml><?xml version="1.0" encoding="utf-8"?>
-<p:sld xmlns:a="http://schemas.openxmlformats.org/drawingml/2006/main" xmlns:p="http://schemas.openxmlformats.org/presentationml/2006/main" xmlns:r="http://schemas.openxmlformats.org/officeDocument/2006/relationships">
-  <p:cSld>
-    <p:bg>
-      <p:bgPr>
-        <a:solidFill>
-          <a:srgbClr val="FFFFFF"/>
-        </a:solidFill>
-        <a:effectLst/>
-      </p:bgPr>
-    </p:bg>
-    <p:spTree>
-      <p:nvGrpSpPr>
-        <p:cNvPr id="1" name=""/>
-        <p:cNvGrpSpPr/>
-        <p:nvPr/>
-      </p:nvGrpSpPr>
-      <p:grpSpPr/>
-      <p:sp>
-        <p:nvSpPr>
-          <p:cNvPr id="2" name="Rectangle 1"/>
-          <p:cNvSpPr/>
-          <p:nvPr/>
-        </p:nvSpPr>
-        <p:spPr>
-          <a:xfrm>
-            <a:off x="0" y="0"/>
-            <a:ext cx="12191695" cy="960120"/>
-          </a:xfrm>
-          <a:prstGeom prst="rect">
-            <a:avLst/>
-          </a:prstGeom>
-          <a:solidFill>
-            <a:srgbClr val="095292"/>
-          </a:solidFill>
-          <a:ln>
-            <a:noFill/>
-          </a:ln>
-        </p:spPr>
-        <p:style>
-          <a:lnRef idx="1">
-            <a:schemeClr val="accent1"/>
-          </a:lnRef>
-          <a:fillRef idx="3">
-            <a:schemeClr val="accent1"/>
-          </a:fillRef>
-          <a:effectRef idx="2">
-            <a:schemeClr val="accent1"/>
-          </a:effectRef>
-          <a:fontRef idx="minor">
-            <a:schemeClr val="lt1"/>
-          </a:fontRef>
-        </p:style>
-        <p:txBody>
-          <a:bodyPr rtlCol="0" anchor="ctr"/>
-          <a:lstStyle/>
-          <a:p>
-            <a:pPr algn="ctr"/>
-          </a:p>
-        </p:txBody>
-      </p:sp>
-      <p:sp>
-        <p:nvSpPr>
-          <p:cNvPr id="3" name="Rectangle 2"/>
-          <p:cNvSpPr/>
-          <p:nvPr/>
-        </p:nvSpPr>
-        <p:spPr>
-          <a:xfrm>
-            <a:off x="0" y="960120"/>
-            <a:ext cx="12191695" cy="41148"/>
-          </a:xfrm>
-          <a:prstGeom prst="rect">
-            <a:avLst/>
-          </a:prstGeom>
-          <a:solidFill>
-            <a:srgbClr val="FFD000"/>
-          </a:solidFill>
-          <a:ln>
-            <a:noFill/>
-          </a:ln>
-        </p:spPr>
-        <p:style>
-          <a:lnRef idx="1">
-            <a:schemeClr val="accent1"/>
-          </a:lnRef>
-          <a:fillRef idx="3">
-            <a:schemeClr val="accent1"/>
-          </a:fillRef>
-          <a:effectRef idx="2">
-            <a:schemeClr val="accent1"/>
-          </a:effectRef>
-          <a:fontRef idx="minor">
-            <a:schemeClr val="lt1"/>
-          </a:fontRef>
-        </p:style>
-        <p:txBody>
-          <a:bodyPr rtlCol="0" anchor="ctr"/>
-          <a:lstStyle/>
-          <a:p>
-            <a:pPr algn="ctr"/>
-          </a:p>
-        </p:txBody>
-      </p:sp>
-      <p:sp>
-        <p:nvSpPr>
-          <p:cNvPr id="4" name="TextBox 3"/>
-          <p:cNvSpPr txBox="1"/>
-          <p:nvPr/>
-        </p:nvSpPr>
-        <p:spPr>
-          <a:xfrm>
-            <a:off x="457200" y="164592"/>
-            <a:ext cx="11277295" cy="502920"/>
-          </a:xfrm>
-          <a:prstGeom prst="rect">
-            <a:avLst/>
-          </a:prstGeom>
-          <a:noFill/>
-        </p:spPr>
-        <p:txBody>
-          <a:bodyPr wrap="square">
-            <a:spAutoFit/>
-          </a:bodyPr>
-          <a:lstStyle/>
-          <a:p>
-            <a:r>
-              <a:rPr sz="2600" b="1" i="0">
-                <a:solidFill>
-                  <a:srgbClr val="FFFFFF"/>
-                </a:solidFill>
-                <a:latin typeface="Calibri"/>
-              </a:rPr>
-              <a:t>Para el PI esta semana</a:t>
-            </a:r>
-          </a:p>
-        </p:txBody>
-      </p:sp>
-      <p:sp>
-        <p:nvSpPr>
-          <p:cNvPr id="5" name="Rounded Rectangle 4"/>
-          <p:cNvSpPr/>
-          <p:nvPr/>
-        </p:nvSpPr>
-        <p:spPr>
-          <a:xfrm>
-            <a:off x="457200" y="1261872"/>
-            <a:ext cx="11277295" cy="1051560"/>
-          </a:xfrm>
-          <a:prstGeom prst="roundRect">
-            <a:avLst>
-              <a:gd name="adj" fmla="val 12000"/>
-            </a:avLst>
-          </a:prstGeom>
-          <a:solidFill>
-            <a:srgbClr val="E8F4FA"/>
-          </a:solidFill>
-          <a:ln>
-            <a:noFill/>
-          </a:ln>
-        </p:spPr>
-        <p:style>
-          <a:lnRef idx="1">
-            <a:schemeClr val="accent1"/>
-          </a:lnRef>
-          <a:fillRef idx="3">
-            <a:schemeClr val="accent1"/>
-          </a:fillRef>
-          <a:effectRef idx="2">
-            <a:schemeClr val="accent1"/>
-          </a:effectRef>
-          <a:fontRef idx="minor">
-            <a:schemeClr val="lt1"/>
-          </a:fontRef>
-        </p:style>
-        <p:txBody>
-          <a:bodyPr rtlCol="0" anchor="ctr"/>
-          <a:lstStyle/>
-          <a:p>
-            <a:pPr algn="ctr"/>
-          </a:p>
-        </p:txBody>
-      </p:sp>
-      <p:sp>
-        <p:nvSpPr>
-          <p:cNvPr id="6" name="Rectangle 5"/>
-          <p:cNvSpPr/>
-          <p:nvPr/>
-        </p:nvSpPr>
-        <p:spPr>
-          <a:xfrm>
-            <a:off x="457200" y="1261872"/>
-            <a:ext cx="128016" cy="1051560"/>
-          </a:xfrm>
-          <a:prstGeom prst="rect">
-            <a:avLst/>
-          </a:prstGeom>
-          <a:solidFill>
-            <a:srgbClr val="269CCB"/>
-          </a:solidFill>
-          <a:ln>
-            <a:noFill/>
-          </a:ln>
-        </p:spPr>
-        <p:style>
-          <a:lnRef idx="1">
-            <a:schemeClr val="accent1"/>
-          </a:lnRef>
-          <a:fillRef idx="3">
-            <a:schemeClr val="accent1"/>
-          </a:fillRef>
-          <a:effectRef idx="2">
-            <a:schemeClr val="accent1"/>
-          </a:effectRef>
-          <a:fontRef idx="minor">
-            <a:schemeClr val="lt1"/>
-          </a:fontRef>
-        </p:style>
-        <p:txBody>
-          <a:bodyPr rtlCol="0" anchor="ctr"/>
-          <a:lstStyle/>
-          <a:p>
-            <a:pPr algn="ctr"/>
-          </a:p>
-        </p:txBody>
-      </p:sp>
-      <p:sp>
-        <p:nvSpPr>
-          <p:cNvPr id="7" name="TextBox 6"/>
-          <p:cNvSpPr txBox="1"/>
-          <p:nvPr/>
-        </p:nvSpPr>
-        <p:spPr>
-          <a:xfrm>
-            <a:off x="777240" y="1399031"/>
-            <a:ext cx="10774375" cy="822959"/>
-          </a:xfrm>
-          <a:prstGeom prst="rect">
-            <a:avLst/>
-          </a:prstGeom>
-          <a:noFill/>
-        </p:spPr>
-        <p:txBody>
-          <a:bodyPr wrap="square">
-            <a:spAutoFit/>
-          </a:bodyPr>
-          <a:lstStyle/>
-          <a:p>
-            <a:r>
-              <a:rPr sz="1200" b="1" i="0">
-                <a:solidFill>
-                  <a:srgbClr val="269CCB"/>
-                </a:solidFill>
-                <a:latin typeface="Calibri"/>
-              </a:rPr>
-              <a:t>Info</a:t>
-            </a:r>
-          </a:p>
-          <a:p>
-            <a:pPr>
-              <a:spcBef>
-                <a:spcPts val="400"/>
-              </a:spcBef>
-            </a:pPr>
-            <a:r>
-              <a:rPr sz="1400" b="0" i="0">
-                <a:solidFill>
-                  <a:srgbClr val="333333"/>
-                </a:solidFill>
-                <a:latin typeface="Calibri"/>
-              </a:rPr>
-              <a:t>Hito: Demo parcial + checklist de avance (hito formal PI)</a:t>
-            </a:r>
-          </a:p>
-        </p:txBody>
-      </p:sp>
-      <p:sp>
-        <p:nvSpPr>
-          <p:cNvPr id="8" name="Rounded Rectangle 7"/>
-          <p:cNvSpPr/>
-          <p:nvPr/>
-        </p:nvSpPr>
-        <p:spPr>
-          <a:xfrm>
-            <a:off x="457200" y="2478024"/>
-            <a:ext cx="11277295" cy="1051560"/>
-          </a:xfrm>
-          <a:prstGeom prst="roundRect">
-            <a:avLst>
-              <a:gd name="adj" fmla="val 12000"/>
-            </a:avLst>
-          </a:prstGeom>
-          <a:solidFill>
-            <a:srgbClr val="FFF8E1"/>
-          </a:solidFill>
-          <a:ln>
-            <a:noFill/>
-          </a:ln>
-        </p:spPr>
-        <p:style>
-          <a:lnRef idx="1">
-            <a:schemeClr val="accent1"/>
-          </a:lnRef>
-          <a:fillRef idx="3">
-            <a:schemeClr val="accent1"/>
-          </a:fillRef>
-          <a:effectRef idx="2">
-            <a:schemeClr val="accent1"/>
-          </a:effectRef>
-          <a:fontRef idx="minor">
-            <a:schemeClr val="lt1"/>
-          </a:fontRef>
-        </p:style>
-        <p:txBody>
-          <a:bodyPr rtlCol="0" anchor="ctr"/>
-          <a:lstStyle/>
-          <a:p>
-            <a:pPr algn="ctr"/>
-          </a:p>
-        </p:txBody>
-      </p:sp>
-      <p:sp>
-        <p:nvSpPr>
-          <p:cNvPr id="9" name="Rectangle 8"/>
-          <p:cNvSpPr/>
-          <p:nvPr/>
-        </p:nvSpPr>
-        <p:spPr>
-          <a:xfrm>
-            <a:off x="457200" y="2478024"/>
-            <a:ext cx="128016" cy="1051560"/>
-          </a:xfrm>
-          <a:prstGeom prst="rect">
-            <a:avLst/>
-          </a:prstGeom>
-          <a:solidFill>
-            <a:srgbClr val="FFD000"/>
-          </a:solidFill>
-          <a:ln>
-            <a:noFill/>
-          </a:ln>
-        </p:spPr>
-        <p:style>
-          <a:lnRef idx="1">
-            <a:schemeClr val="accent1"/>
-          </a:lnRef>
-          <a:fillRef idx="3">
-            <a:schemeClr val="accent1"/>
-          </a:fillRef>
-          <a:effectRef idx="2">
-            <a:schemeClr val="accent1"/>
-          </a:effectRef>
-          <a:fontRef idx="minor">
-            <a:schemeClr val="lt1"/>
-          </a:fontRef>
-        </p:style>
-        <p:txBody>
-          <a:bodyPr rtlCol="0" anchor="ctr"/>
-          <a:lstStyle/>
-          <a:p>
-            <a:pPr algn="ctr"/>
-          </a:p>
-        </p:txBody>
-      </p:sp>
-      <p:sp>
-        <p:nvSpPr>
-          <p:cNvPr id="10" name="TextBox 9"/>
-          <p:cNvSpPr txBox="1"/>
-          <p:nvPr/>
-        </p:nvSpPr>
-        <p:spPr>
-          <a:xfrm>
-            <a:off x="777240" y="2615184"/>
-            <a:ext cx="10774375" cy="822959"/>
-          </a:xfrm>
-          <a:prstGeom prst="rect">
-            <a:avLst/>
-          </a:prstGeom>
-          <a:noFill/>
-        </p:spPr>
-        <p:txBody>
-          <a:bodyPr wrap="square">
-            <a:spAutoFit/>
-          </a:bodyPr>
-          <a:lstStyle/>
-          <a:p>
-            <a:r>
-              <a:rPr sz="1200" b="1" i="0">
-                <a:solidFill>
-                  <a:srgbClr val="FFD000"/>
-                </a:solidFill>
-                <a:latin typeface="Calibri"/>
-              </a:rPr>
-              <a:t>Aclaración</a:t>
-            </a:r>
-          </a:p>
-          <a:p>
-            <a:pPr>
-              <a:spcBef>
-                <a:spcPts val="400"/>
-              </a:spcBef>
-            </a:pPr>
-            <a:r>
-              <a:rPr sz="1400" b="0" i="0">
-                <a:solidFill>
-                  <a:srgbClr val="333333"/>
-                </a:solidFill>
-                <a:latin typeface="Calibri"/>
-              </a:rPr>
-              <a:t>Enunciado completo: Clases/Proyecto Integrador/ (VetCare DB).</a:t>
-            </a:r>
-          </a:p>
-        </p:txBody>
-      </p:sp>
-      <p:sp>
-        <p:nvSpPr>
-          <p:cNvPr id="11" name="Rounded Rectangle 10"/>
-          <p:cNvSpPr/>
-          <p:nvPr/>
-        </p:nvSpPr>
-        <p:spPr>
-          <a:xfrm>
-            <a:off x="457200" y="3694176"/>
-            <a:ext cx="11277295" cy="1051560"/>
-          </a:xfrm>
-          <a:prstGeom prst="roundRect">
-            <a:avLst>
-              <a:gd name="adj" fmla="val 12000"/>
-            </a:avLst>
-          </a:prstGeom>
-          <a:solidFill>
-            <a:srgbClr val="FBE4E4"/>
-          </a:solidFill>
-          <a:ln>
-            <a:noFill/>
-          </a:ln>
-        </p:spPr>
-        <p:style>
-          <a:lnRef idx="1">
-            <a:schemeClr val="accent1"/>
-          </a:lnRef>
-          <a:fillRef idx="3">
-            <a:schemeClr val="accent1"/>
-          </a:fillRef>
-          <a:effectRef idx="2">
-            <a:schemeClr val="accent1"/>
-          </a:effectRef>
-          <a:fontRef idx="minor">
-            <a:schemeClr val="lt1"/>
-          </a:fontRef>
-        </p:style>
-        <p:txBody>
-          <a:bodyPr rtlCol="0" anchor="ctr"/>
-          <a:lstStyle/>
-          <a:p>
-            <a:pPr algn="ctr"/>
-          </a:p>
-        </p:txBody>
-      </p:sp>
-      <p:sp>
-        <p:nvSpPr>
-          <p:cNvPr id="12" name="Rectangle 11"/>
-          <p:cNvSpPr/>
-          <p:nvPr/>
-        </p:nvSpPr>
-        <p:spPr>
-          <a:xfrm>
-            <a:off x="457200" y="3694176"/>
-            <a:ext cx="128016" cy="1051560"/>
-          </a:xfrm>
-          <a:prstGeom prst="rect">
-            <a:avLst/>
-          </a:prstGeom>
-          <a:solidFill>
-            <a:srgbClr val="A02030"/>
-          </a:solidFill>
-          <a:ln>
-            <a:noFill/>
-          </a:ln>
-        </p:spPr>
-        <p:style>
-          <a:lnRef idx="1">
-            <a:schemeClr val="accent1"/>
-          </a:lnRef>
-          <a:fillRef idx="3">
-            <a:schemeClr val="accent1"/>
-          </a:fillRef>
-          <a:effectRef idx="2">
-            <a:schemeClr val="accent1"/>
-          </a:effectRef>
-          <a:fontRef idx="minor">
-            <a:schemeClr val="lt1"/>
-          </a:fontRef>
-        </p:style>
-        <p:txBody>
-          <a:bodyPr rtlCol="0" anchor="ctr"/>
-          <a:lstStyle/>
-          <a:p>
-            <a:pPr algn="ctr"/>
-          </a:p>
-        </p:txBody>
-      </p:sp>
-      <p:sp>
-        <p:nvSpPr>
-          <p:cNvPr id="13" name="TextBox 12"/>
-          <p:cNvSpPr txBox="1"/>
-          <p:nvPr/>
-        </p:nvSpPr>
-        <p:spPr>
-          <a:xfrm>
-            <a:off x="777240" y="3831336"/>
-            <a:ext cx="10774375" cy="822959"/>
-          </a:xfrm>
-          <a:prstGeom prst="rect">
-            <a:avLst/>
-          </a:prstGeom>
-          <a:noFill/>
-        </p:spPr>
-        <p:txBody>
-          <a:bodyPr wrap="square">
-            <a:spAutoFit/>
-          </a:bodyPr>
-          <a:lstStyle/>
-          <a:p>
-            <a:r>
-              <a:rPr sz="1200" b="1" i="0">
-                <a:solidFill>
-                  <a:srgbClr val="A02030"/>
-                </a:solidFill>
-                <a:latin typeface="Calibri"/>
-              </a:rPr>
-              <a:t>Atención</a:t>
-            </a:r>
-          </a:p>
-          <a:p>
-            <a:pPr>
-              <a:spcBef>
-                <a:spcPts val="400"/>
-              </a:spcBef>
-            </a:pPr>
-            <a:r>
-              <a:rPr sz="1400" b="0" i="0">
-                <a:solidFill>
-                  <a:srgbClr val="333333"/>
-                </a:solidFill>
-                <a:latin typeface="Calibri"/>
-              </a:rPr>
-              <a:t>Si el docente asigna taller esta semana, él indica el canal y la fecha.</a:t>
-            </a:r>
-          </a:p>
-        </p:txBody>
-      </p:sp>
-      <p:sp>
-        <p:nvSpPr>
-          <p:cNvPr id="14" name="TextBox 13"/>
-          <p:cNvSpPr txBox="1"/>
-          <p:nvPr/>
-        </p:nvSpPr>
-        <p:spPr>
-          <a:xfrm>
-            <a:off x="11185855" y="6473952"/>
-            <a:ext cx="640080" cy="274320"/>
-          </a:xfrm>
-          <a:prstGeom prst="rect">
-            <a:avLst/>
-          </a:prstGeom>
-          <a:noFill/>
-        </p:spPr>
-        <p:txBody>
-          <a:bodyPr wrap="square">
-            <a:spAutoFit/>
-          </a:bodyPr>
-          <a:lstStyle/>
-          <a:p>
-            <a:pPr algn="r"/>
-            <a:r>
-              <a:rPr sz="1100" b="0" i="0">
-                <a:solidFill>
-                  <a:srgbClr val="666666"/>
-                </a:solidFill>
-                <a:latin typeface="Calibri"/>
-              </a:rPr>
-              <a:t>31</a:t>
-            </a:r>
-          </a:p>
-        </p:txBody>
-      </p:sp>
-    </p:spTree>
-  </p:cSld>
-  <p:clrMapOvr>
-    <a:masterClrMapping/>
-  </p:clrMapOvr>
-</p:sld>
-</file>
-
-<file path=ppt/slides/slide32.xml><?xml version="1.0" encoding="utf-8"?>
-<p:sld xmlns:a="http://schemas.openxmlformats.org/drawingml/2006/main" xmlns:p="http://schemas.openxmlformats.org/presentationml/2006/main" xmlns:r="http://schemas.openxmlformats.org/officeDocument/2006/relationships">
-  <p:cSld>
-    <p:bg>
-      <p:bgPr>
-        <a:solidFill>
-          <a:srgbClr val="FFFFFF"/>
-        </a:solidFill>
-        <a:effectLst/>
-      </p:bgPr>
-    </p:bg>
-    <p:spTree>
-      <p:nvGrpSpPr>
-        <p:cNvPr id="1" name=""/>
-        <p:cNvGrpSpPr/>
-        <p:nvPr/>
-      </p:nvGrpSpPr>
-      <p:grpSpPr/>
-      <p:sp>
-        <p:nvSpPr>
-          <p:cNvPr id="2" name="Rectangle 1"/>
-          <p:cNvSpPr/>
-          <p:nvPr/>
-        </p:nvSpPr>
-        <p:spPr>
-          <a:xfrm>
-            <a:off x="0" y="0"/>
-            <a:ext cx="12191695" cy="164592"/>
-          </a:xfrm>
-          <a:prstGeom prst="rect">
-            <a:avLst/>
-          </a:prstGeom>
-          <a:solidFill>
-            <a:srgbClr val="269CCB"/>
-          </a:solidFill>
-          <a:ln>
-            <a:noFill/>
-          </a:ln>
-        </p:spPr>
-        <p:style>
-          <a:lnRef idx="1">
-            <a:schemeClr val="accent1"/>
-          </a:lnRef>
-          <a:fillRef idx="3">
-            <a:schemeClr val="accent1"/>
-          </a:fillRef>
-          <a:effectRef idx="2">
-            <a:schemeClr val="accent1"/>
-          </a:effectRef>
-          <a:fontRef idx="minor">
-            <a:schemeClr val="lt1"/>
-          </a:fontRef>
-        </p:style>
-        <p:txBody>
-          <a:bodyPr rtlCol="0" anchor="ctr"/>
-          <a:lstStyle/>
-          <a:p>
-            <a:pPr algn="ctr"/>
-          </a:p>
-        </p:txBody>
-      </p:sp>
-      <p:pic>
-        <p:nvPicPr>
-          <p:cNvPr id="3" name="Picture 2" descr="logo_uniajc_color.png"/>
-          <p:cNvPicPr>
-            <a:picLocks noChangeAspect="1"/>
-          </p:cNvPicPr>
-          <p:nvPr/>
-        </p:nvPicPr>
-        <p:blipFill>
-          <a:blip r:embed="rId2"/>
-          <a:stretch>
-            <a:fillRect/>
-          </a:stretch>
-        </p:blipFill>
-        <p:spPr>
-          <a:xfrm>
-            <a:off x="10271455" y="5998464"/>
-            <a:ext cx="1463040" cy="643233"/>
-          </a:xfrm>
-          <a:prstGeom prst="rect">
-            <a:avLst/>
-          </a:prstGeom>
-        </p:spPr>
-      </p:pic>
-      <p:sp>
-        <p:nvSpPr>
-          <p:cNvPr id="4" name="TextBox 3"/>
-          <p:cNvSpPr txBox="1"/>
-          <p:nvPr/>
-        </p:nvSpPr>
-        <p:spPr>
-          <a:xfrm>
-            <a:off x="457200" y="1737360"/>
-            <a:ext cx="11277295" cy="1097280"/>
-          </a:xfrm>
-          <a:prstGeom prst="rect">
-            <a:avLst/>
-          </a:prstGeom>
-          <a:noFill/>
-        </p:spPr>
-        <p:txBody>
-          <a:bodyPr wrap="square" anchor="ctr"/>
-          <a:lstStyle/>
-          <a:p>
-            <a:pPr algn="ctr"/>
-            <a:r>
-              <a:rPr sz="3400" b="1" i="0">
-                <a:solidFill>
-                  <a:srgbClr val="095292"/>
-                </a:solidFill>
-                <a:latin typeface="Calibri"/>
-              </a:rPr>
-              <a:t>Clase 11 · VetCare avanza</a:t>
-            </a:r>
-          </a:p>
-        </p:txBody>
-      </p:sp>
-      <p:sp>
-        <p:nvSpPr>
-          <p:cNvPr id="5" name="TextBox 4"/>
-          <p:cNvSpPr txBox="1"/>
-          <p:nvPr/>
-        </p:nvSpPr>
-        <p:spPr>
-          <a:xfrm>
-            <a:off x="457200" y="3017520"/>
-            <a:ext cx="11277295" cy="1645920"/>
-          </a:xfrm>
-          <a:prstGeom prst="rect">
-            <a:avLst/>
-          </a:prstGeom>
-          <a:noFill/>
-        </p:spPr>
-        <p:txBody>
-          <a:bodyPr wrap="square">
-            <a:spAutoFit/>
-          </a:bodyPr>
-          <a:lstStyle/>
-          <a:p>
-            <a:pPr algn="ctr">
-              <a:spcAft>
-                <a:spcPts val="600"/>
-              </a:spcAft>
-            </a:pPr>
-            <a:r>
-              <a:rPr sz="1600" b="0" i="0">
-                <a:solidFill>
-                  <a:srgbClr val="333333"/>
-                </a:solidFill>
-                <a:latin typeface="Calibri"/>
-              </a:rPr>
-              <a:t>Demo parcial + checklist de avance (hito formal PI)</a:t>
-            </a:r>
-          </a:p>
-          <a:p>
-            <a:pPr algn="ctr">
-              <a:spcAft>
-                <a:spcPts val="600"/>
-              </a:spcAft>
-            </a:pPr>
-            <a:r>
-              <a:rPr sz="1600" b="0" i="0">
-                <a:solidFill>
-                  <a:srgbClr val="333333"/>
-                </a:solidFill>
-                <a:latin typeface="Calibri"/>
-              </a:rPr>
-              <a:t>Entregable: Checklist firmada + enlace/ZIP avance (DDL+procs+ER)</a:t>
-            </a:r>
-          </a:p>
-          <a:p>
-            <a:pPr algn="ctr">
-              <a:spcAft>
-                <a:spcPts val="600"/>
-              </a:spcAft>
-            </a:pPr>
-            <a:r>
-              <a:rPr sz="1600" b="0" i="0">
-                <a:solidFill>
-                  <a:srgbClr val="333333"/>
-                </a:solidFill>
-                <a:latin typeface="Calibri"/>
-              </a:rPr>
-              <a:t>Siguiente clase: continuar el hilo del PI segun plan</a:t>
-            </a:r>
-          </a:p>
-        </p:txBody>
-      </p:sp>
-      <p:sp>
-        <p:nvSpPr>
-          <p:cNvPr id="6" name="TextBox 5"/>
-          <p:cNvSpPr txBox="1"/>
-          <p:nvPr/>
-        </p:nvSpPr>
-        <p:spPr>
-          <a:xfrm>
-            <a:off x="457200" y="4754880"/>
-            <a:ext cx="11277295" cy="640080"/>
-          </a:xfrm>
-          <a:prstGeom prst="rect">
-            <a:avLst/>
-          </a:prstGeom>
-          <a:noFill/>
-        </p:spPr>
-        <p:txBody>
-          <a:bodyPr wrap="square">
-            <a:spAutoFit/>
-          </a:bodyPr>
-          <a:lstStyle/>
-          <a:p>
-            <a:pPr algn="ctr"/>
-            <a:r>
-              <a:rPr sz="2000" b="1" i="0">
-                <a:solidFill>
-                  <a:srgbClr val="269CCB"/>
-                </a:solidFill>
-                <a:latin typeface="Calibri"/>
-              </a:rPr>
-              <a:t>Teoria breve · practica = PI</a:t>
             </a:r>
           </a:p>
         </p:txBody>
@@ -16008,4 +11779,324 @@
   </a:objectDefaults>
   <a:extraClrSchemeLst/>
 </a:theme>
+</file>
+
+<file path=ppt/theme/theme2.xml><?xml version="1.0" encoding="utf-8"?>
+<a:theme xmlns:a="http://schemas.openxmlformats.org/drawingml/2006/main" name="Office Theme">
+  <a:themeElements>
+    <a:clrScheme name="Office">
+      <a:dk1>
+        <a:sysClr val="windowText" lastClr="000000"/>
+      </a:dk1>
+      <a:lt1>
+        <a:sysClr val="window" lastClr="FFFFFF"/>
+      </a:lt1>
+      <a:dk2>
+        <a:srgbClr val="1F497D"/>
+      </a:dk2>
+      <a:lt2>
+        <a:srgbClr val="EEECE1"/>
+      </a:lt2>
+      <a:accent1>
+        <a:srgbClr val="4F81BD"/>
+      </a:accent1>
+      <a:accent2>
+        <a:srgbClr val="C0504D"/>
+      </a:accent2>
+      <a:accent3>
+        <a:srgbClr val="9BBB59"/>
+      </a:accent3>
+      <a:accent4>
+        <a:srgbClr val="8064A2"/>
+      </a:accent4>
+      <a:accent5>
+        <a:srgbClr val="4BACC6"/>
+      </a:accent5>
+      <a:accent6>
+        <a:srgbClr val="F79646"/>
+      </a:accent6>
+      <a:hlink>
+        <a:srgbClr val="0000FF"/>
+      </a:hlink>
+      <a:folHlink>
+        <a:srgbClr val="800080"/>
+      </a:folHlink>
+    </a:clrScheme>
+    <a:fontScheme name="Office">
+      <a:majorFont>
+        <a:latin typeface="Calibri"/>
+        <a:ea typeface=""/>
+        <a:cs typeface=""/>
+        <a:font script="Jpan" typeface="ＭＳ Ｐゴシック"/>
+        <a:font script="Hang" typeface="맑은 고딕"/>
+        <a:font script="Hans" typeface="宋体"/>
+        <a:font script="Hant" typeface="新細明體"/>
+        <a:font script="Arab" typeface="Times New Roman"/>
+        <a:font script="Hebr" typeface="Times New Roman"/>
+        <a:font script="Thai" typeface="Angsana New"/>
+        <a:font script="Ethi" typeface="Nyala"/>
+        <a:font script="Beng" typeface="Vrinda"/>
+        <a:font script="Gujr" typeface="Shruti"/>
+        <a:font script="Khmr" typeface="MoolBoran"/>
+        <a:font script="Knda" typeface="Tunga"/>
+        <a:font script="Guru" typeface="Raavi"/>
+        <a:font script="Cans" typeface="Euphemia"/>
+        <a:font script="Cher" typeface="Plantagenet Cherokee"/>
+        <a:font script="Yiii" typeface="Microsoft Yi Baiti"/>
+        <a:font script="Tibt" typeface="Microsoft Himalaya"/>
+        <a:font script="Thaa" typeface="MV Boli"/>
+        <a:font script="Deva" typeface="Mangal"/>
+        <a:font script="Telu" typeface="Gautami"/>
+        <a:font script="Taml" typeface="Latha"/>
+        <a:font script="Syrc" typeface="Estrangelo Edessa"/>
+        <a:font script="Orya" typeface="Kalinga"/>
+        <a:font script="Mlym" typeface="Kartika"/>
+        <a:font script="Laoo" typeface="DokChampa"/>
+        <a:font script="Sinh" typeface="Iskoola Pota"/>
+        <a:font script="Mong" typeface="Mongolian Baiti"/>
+        <a:font script="Viet" typeface="Times New Roman"/>
+        <a:font script="Uigh" typeface="Microsoft Uighur"/>
+        <a:font script="Geor" typeface="Sylfaen"/>
+      </a:majorFont>
+      <a:minorFont>
+        <a:latin typeface="Calibri"/>
+        <a:ea typeface=""/>
+        <a:cs typeface=""/>
+        <a:font script="Jpan" typeface="ＭＳ Ｐゴシック"/>
+        <a:font script="Hang" typeface="맑은 고딕"/>
+        <a:font script="Hans" typeface="宋体"/>
+        <a:font script="Hant" typeface="新細明體"/>
+        <a:font script="Arab" typeface="Arial"/>
+        <a:font script="Hebr" typeface="Arial"/>
+        <a:font script="Thai" typeface="Cordia New"/>
+        <a:font script="Ethi" typeface="Nyala"/>
+        <a:font script="Beng" typeface="Vrinda"/>
+        <a:font script="Gujr" typeface="Shruti"/>
+        <a:font script="Khmr" typeface="DaunPenh"/>
+        <a:font script="Knda" typeface="Tunga"/>
+        <a:font script="Guru" typeface="Raavi"/>
+        <a:font script="Cans" typeface="Euphemia"/>
+        <a:font script="Cher" typeface="Plantagenet Cherokee"/>
+        <a:font script="Yiii" typeface="Microsoft Yi Baiti"/>
+        <a:font script="Tibt" typeface="Microsoft Himalaya"/>
+        <a:font script="Thaa" typeface="MV Boli"/>
+        <a:font script="Deva" typeface="Mangal"/>
+        <a:font script="Telu" typeface="Gautami"/>
+        <a:font script="Taml" typeface="Latha"/>
+        <a:font script="Syrc" typeface="Estrangelo Edessa"/>
+        <a:font script="Orya" typeface="Kalinga"/>
+        <a:font script="Mlym" typeface="Kartika"/>
+        <a:font script="Laoo" typeface="DokChampa"/>
+        <a:font script="Sinh" typeface="Iskoola Pota"/>
+        <a:font script="Mong" typeface="Mongolian Baiti"/>
+        <a:font script="Viet" typeface="Arial"/>
+        <a:font script="Uigh" typeface="Microsoft Uighur"/>
+        <a:font script="Geor" typeface="Sylfaen"/>
+      </a:minorFont>
+    </a:fontScheme>
+    <a:fmtScheme name="Office">
+      <a:fillStyleLst>
+        <a:solidFill>
+          <a:schemeClr val="phClr"/>
+        </a:solidFill>
+        <a:gradFill rotWithShape="1">
+          <a:gsLst>
+            <a:gs pos="0">
+              <a:schemeClr val="phClr">
+                <a:tint val="50000"/>
+                <a:satMod val="300000"/>
+              </a:schemeClr>
+            </a:gs>
+            <a:gs pos="35000">
+              <a:schemeClr val="phClr">
+                <a:tint val="37000"/>
+                <a:satMod val="300000"/>
+              </a:schemeClr>
+            </a:gs>
+            <a:gs pos="100000">
+              <a:schemeClr val="phClr">
+                <a:tint val="15000"/>
+                <a:satMod val="350000"/>
+              </a:schemeClr>
+            </a:gs>
+          </a:gsLst>
+          <a:lin ang="16200000" scaled="1"/>
+        </a:gradFill>
+        <a:gradFill rotWithShape="1">
+          <a:gsLst>
+            <a:gs pos="0">
+              <a:schemeClr val="phClr">
+                <a:tint val="100000"/>
+                <a:shade val="100000"/>
+                <a:satMod val="130000"/>
+              </a:schemeClr>
+            </a:gs>
+            <a:gs pos="100000">
+              <a:schemeClr val="phClr">
+                <a:tint val="50000"/>
+                <a:shade val="100000"/>
+                <a:satMod val="350000"/>
+              </a:schemeClr>
+            </a:gs>
+          </a:gsLst>
+          <a:lin ang="16200000" scaled="0"/>
+        </a:gradFill>
+      </a:fillStyleLst>
+      <a:lnStyleLst>
+        <a:ln w="9525" cap="flat" cmpd="sng" algn="ctr">
+          <a:solidFill>
+            <a:schemeClr val="phClr">
+              <a:shade val="95000"/>
+              <a:satMod val="105000"/>
+            </a:schemeClr>
+          </a:solidFill>
+          <a:prstDash val="solid"/>
+        </a:ln>
+        <a:ln w="25400" cap="flat" cmpd="sng" algn="ctr">
+          <a:solidFill>
+            <a:schemeClr val="phClr"/>
+          </a:solidFill>
+          <a:prstDash val="solid"/>
+        </a:ln>
+        <a:ln w="38100" cap="flat" cmpd="sng" algn="ctr">
+          <a:solidFill>
+            <a:schemeClr val="phClr"/>
+          </a:solidFill>
+          <a:prstDash val="solid"/>
+        </a:ln>
+      </a:lnStyleLst>
+      <a:effectStyleLst>
+        <a:effectStyle>
+          <a:effectLst>
+            <a:outerShdw blurRad="40000" dist="20000" dir="5400000" rotWithShape="0">
+              <a:srgbClr val="000000">
+                <a:alpha val="38000"/>
+              </a:srgbClr>
+            </a:outerShdw>
+          </a:effectLst>
+        </a:effectStyle>
+        <a:effectStyle>
+          <a:effectLst>
+            <a:outerShdw blurRad="40000" dist="23000" dir="5400000" rotWithShape="0">
+              <a:srgbClr val="000000">
+                <a:alpha val="35000"/>
+              </a:srgbClr>
+            </a:outerShdw>
+          </a:effectLst>
+        </a:effectStyle>
+        <a:effectStyle>
+          <a:effectLst>
+            <a:outerShdw blurRad="40000" dist="23000" dir="5400000" rotWithShape="0">
+              <a:srgbClr val="000000">
+                <a:alpha val="35000"/>
+              </a:srgbClr>
+            </a:outerShdw>
+          </a:effectLst>
+          <a:scene3d>
+            <a:camera prst="orthographicFront">
+              <a:rot lat="0" lon="0" rev="0"/>
+            </a:camera>
+            <a:lightRig rig="threePt" dir="t">
+              <a:rot lat="0" lon="0" rev="1200000"/>
+            </a:lightRig>
+          </a:scene3d>
+          <a:sp3d>
+            <a:bevelT w="63500" h="25400"/>
+          </a:sp3d>
+        </a:effectStyle>
+      </a:effectStyleLst>
+      <a:bgFillStyleLst>
+        <a:solidFill>
+          <a:schemeClr val="phClr"/>
+        </a:solidFill>
+        <a:gradFill rotWithShape="1">
+          <a:gsLst>
+            <a:gs pos="0">
+              <a:schemeClr val="phClr">
+                <a:tint val="40000"/>
+                <a:satMod val="350000"/>
+              </a:schemeClr>
+            </a:gs>
+            <a:gs pos="40000">
+              <a:schemeClr val="phClr">
+                <a:tint val="45000"/>
+                <a:shade val="99000"/>
+                <a:satMod val="350000"/>
+              </a:schemeClr>
+            </a:gs>
+            <a:gs pos="100000">
+              <a:schemeClr val="phClr">
+                <a:shade val="20000"/>
+                <a:satMod val="255000"/>
+              </a:schemeClr>
+            </a:gs>
+          </a:gsLst>
+          <a:path path="circle">
+            <a:fillToRect l="50000" t="-80000" r="50000" b="180000"/>
+          </a:path>
+        </a:gradFill>
+        <a:gradFill rotWithShape="1">
+          <a:gsLst>
+            <a:gs pos="0">
+              <a:schemeClr val="phClr">
+                <a:tint val="80000"/>
+                <a:satMod val="300000"/>
+              </a:schemeClr>
+            </a:gs>
+            <a:gs pos="100000">
+              <a:schemeClr val="phClr">
+                <a:shade val="30000"/>
+                <a:satMod val="200000"/>
+              </a:schemeClr>
+            </a:gs>
+          </a:gsLst>
+          <a:path path="circle">
+            <a:fillToRect l="50000" t="50000" r="50000" b="50000"/>
+          </a:path>
+        </a:gradFill>
+      </a:bgFillStyleLst>
+    </a:fmtScheme>
+  </a:themeElements>
+  <a:objectDefaults>
+    <a:spDef>
+      <a:spPr/>
+      <a:bodyPr/>
+      <a:lstStyle/>
+      <a:style>
+        <a:lnRef idx="1">
+          <a:schemeClr val="accent1"/>
+        </a:lnRef>
+        <a:fillRef idx="3">
+          <a:schemeClr val="accent1"/>
+        </a:fillRef>
+        <a:effectRef idx="2">
+          <a:schemeClr val="accent1"/>
+        </a:effectRef>
+        <a:fontRef idx="minor">
+          <a:schemeClr val="lt1"/>
+        </a:fontRef>
+      </a:style>
+    </a:spDef>
+    <a:lnDef>
+      <a:spPr/>
+      <a:bodyPr/>
+      <a:lstStyle/>
+      <a:style>
+        <a:lnRef idx="2">
+          <a:schemeClr val="accent1"/>
+        </a:lnRef>
+        <a:fillRef idx="0">
+          <a:schemeClr val="accent1"/>
+        </a:fillRef>
+        <a:effectRef idx="1">
+          <a:schemeClr val="accent1"/>
+        </a:effectRef>
+        <a:fontRef idx="minor">
+          <a:schemeClr val="tx1"/>
+        </a:fontRef>
+      </a:style>
+    </a:lnDef>
+  </a:objectDefaults>
+  <a:extraClrSchemeLst/>
+</a:theme>
 </file>
--- a/Bases de Datos II/Clases/Clase 11 - Avance del proyecto final/Presentacion.pptx
+++ b/Bases de Datos II/Clases/Clase 11 - Avance del proyecto final/Presentacion.pptx
@@ -552,6 +552,86 @@
 </p:notes>
 </file>
 
+<file path=ppt/notesSlides/notesSlide10.xml><?xml version="1.0" encoding="utf-8"?>
+<p:notes xmlns:a="http://schemas.openxmlformats.org/drawingml/2006/main" xmlns:p="http://schemas.openxmlformats.org/presentationml/2006/main" xmlns:r="http://schemas.openxmlformats.org/officeDocument/2006/relationships">
+  <p:cSld>
+    <p:spTree>
+      <p:nvGrpSpPr>
+        <p:cNvPr id="1" name=""/>
+        <p:cNvGrpSpPr/>
+        <p:nvPr/>
+      </p:nvGrpSpPr>
+      <p:grpSpPr>
+        <a:xfrm>
+          <a:off x="0" y="0"/>
+          <a:ext cx="0" cy="0"/>
+          <a:chOff x="0" y="0"/>
+          <a:chExt cx="0" cy="0"/>
+        </a:xfrm>
+      </p:grpSpPr>
+      <p:sp>
+        <p:nvSpPr>
+          <p:cNvPr id="2" name="Slide Image Placeholder 1"/>
+          <p:cNvSpPr>
+            <a:spLocks noGrp="1"/>
+          </p:cNvSpPr>
+          <p:nvPr>
+            <p:ph type="sldImg" idx="2"/>
+          </p:nvPr>
+        </p:nvSpPr>
+        <p:spPr/>
+      </p:sp>
+      <p:sp>
+        <p:nvSpPr>
+          <p:cNvPr id="3" name="Notes Placeholder 2"/>
+          <p:cNvSpPr>
+            <a:spLocks noGrp="1"/>
+          </p:cNvSpPr>
+          <p:nvPr>
+            <p:ph type="body" idx="3" sz="quarter"/>
+          </p:nvPr>
+        </p:nvSpPr>
+        <p:spPr/>
+        <p:txBody>
+          <a:bodyPr/>
+          <a:lstStyle/>
+          <a:p>
+            <a:r>
+              <a:t>Aqui aparecen las dos preguntas previsibles del estudiante.</a:t>
+            </a:r>
+          </a:p>
+          <a:p>
+            <a:r>
+              <a:t>La respuesta es que el checkpoint en si no califica el producto, pero es la ultima oportunidad de mover puntos de la rubrica antes de la entrega, y por eso conviene llegar con lo peor y no con lo mejor: un estudiante que esconde su parte floja para no verse mal pierde justamente la revision que la habria arreglado.</a:t>
+            </a:r>
+          </a:p>
+          <a:p>
+            <a:r>
+              <a:t>No, porque el auditor par no califica.</a:t>
+            </a:r>
+          </a:p>
+        </p:txBody>
+      </p:sp>
+      <p:sp>
+        <p:nvSpPr>
+          <p:cNvPr id="4" name="Slide Number Placeholder 3"/>
+          <p:cNvSpPr>
+            <a:spLocks noGrp="1"/>
+          </p:cNvSpPr>
+          <p:nvPr>
+            <p:ph type="sldNum" idx="5" sz="quarter"/>
+          </p:nvPr>
+        </p:nvSpPr>
+        <p:spPr/>
+      </p:sp>
+    </p:spTree>
+  </p:cSld>
+  <p:clrMapOvr>
+    <a:masterClrMapping/>
+  </p:clrMapOvr>
+</p:notes>
+</file>
+
 <file path=ppt/notesSlides/notesSlide2.xml><?xml version="1.0" encoding="utf-8"?>
 <p:notes xmlns:a="http://schemas.openxmlformats.org/drawingml/2006/main" xmlns:p="http://schemas.openxmlformats.org/presentationml/2006/main" xmlns:r="http://schemas.openxmlformats.org/officeDocument/2006/relationships">
   <p:cSld>
@@ -595,6 +675,17 @@
         <p:txBody>
           <a:bodyPr/>
           <a:lstStyle/>
+          <a:p>
+            <a:r>
+              <a:t>Fuera de la lamina (habla de la practica, no del tema):</a:t>
+            </a:r>
+          </a:p>
+          <a:p>
+            <a:r>
+              <a:t>- Cada una toma dos o tres minutos si se ejecuta con criterio, y juntas cubren los cuatro criterios de rubrica que mas peso tienen.</a:t>
+            </a:r>
+          </a:p>
+          <a:p/>
           <a:p>
             <a:r>
               <a:t>Lo que se audita en una base de datos no es cada pieza por separado sino la coherencia entre piezas.</a:t>
@@ -847,7 +938,12 @@
           <a:lstStyle/>
           <a:p>
             <a:r>
-              <a:t>Eso no resta puntos, al contrario, declarar el limite es una senal de madurez que se valora en la sustentacion.</a:t>
+              <a:t>Fuera de la lamina (habla de la practica, no del tema):</a:t>
+            </a:r>
+          </a:p>
+          <a:p>
+            <a:r>
+              <a:t>- Si el estudiante no puede mostrar la segunda ejecucion, el procedimiento no tiene manejo de errores y eso resta puntos en los 25 de objetos programables.</a:t>
             </a:r>
           </a:p>
         </p:txBody>
@@ -917,12 +1013,7 @@
           <a:lstStyle/>
           <a:p>
             <a:r>
-              <a:t>Comparense los dos extremos.</a:t>
-            </a:r>
-          </a:p>
-          <a:p>
-            <a:r>
-              <a:t>Responsable: Carlos.</a:t>
+              <a:t>Eso no resta puntos, al contrario, declarar el limite es una senal de madurez que se valora en la sustentacion.</a:t>
             </a:r>
           </a:p>
         </p:txBody>
@@ -992,17 +1083,178 @@
           <a:lstStyle/>
           <a:p>
             <a:r>
-              <a:t>Aqui aparecen las dos preguntas previsibles del estudiante.</a:t>
-            </a:r>
-          </a:p>
-          <a:p>
-            <a:r>
-              <a:t>La respuesta es que el checkpoint en si no califica el producto, pero es la ultima oportunidad de mover puntos de la rubrica antes de la entrega, y por eso conviene llegar con lo peor y no con lo mejor: un estudiante que esconde su parte floja para no verse mal pierde justamente la revision que la habria arreglado.</a:t>
-            </a:r>
-          </a:p>
-          <a:p>
-            <a:r>
-              <a:t>No, porque el auditor par no califica.</a:t>
+              <a:t>Fuera de la lamina (habla de la practica, no del tema):</a:t>
+            </a:r>
+          </a:p>
+          <a:p>
+            <a:r>
+              <a:t>- La rubrica no da puntos por cantidad de tablas: da 20 por modelo coherente y 25 por objetos programables con casos de prueba.</a:t>
+            </a:r>
+          </a:p>
+          <a:p>
+            <a:r>
+              <a:t>- Existe tambien el problema inverso y menos visible: el estudiante que recorto tanto que ya no tiene material para los 25 puntos de procedimientos, funciones y disparadores, y ese caso tambien es un hallazgo que hay que escribir.</a:t>
+            </a:r>
+          </a:p>
+        </p:txBody>
+      </p:sp>
+      <p:sp>
+        <p:nvSpPr>
+          <p:cNvPr id="4" name="Slide Number Placeholder 3"/>
+          <p:cNvSpPr>
+            <a:spLocks noGrp="1"/>
+          </p:cNvSpPr>
+          <p:nvPr>
+            <p:ph type="sldNum" idx="5" sz="quarter"/>
+          </p:nvPr>
+        </p:nvSpPr>
+        <p:spPr/>
+      </p:sp>
+    </p:spTree>
+  </p:cSld>
+  <p:clrMapOvr>
+    <a:masterClrMapping/>
+  </p:clrMapOvr>
+</p:notes>
+</file>
+
+<file path=ppt/notesSlides/notesSlide8.xml><?xml version="1.0" encoding="utf-8"?>
+<p:notes xmlns:a="http://schemas.openxmlformats.org/drawingml/2006/main" xmlns:p="http://schemas.openxmlformats.org/presentationml/2006/main" xmlns:r="http://schemas.openxmlformats.org/officeDocument/2006/relationships">
+  <p:cSld>
+    <p:spTree>
+      <p:nvGrpSpPr>
+        <p:cNvPr id="1" name=""/>
+        <p:cNvGrpSpPr/>
+        <p:nvPr/>
+      </p:nvGrpSpPr>
+      <p:grpSpPr>
+        <a:xfrm>
+          <a:off x="0" y="0"/>
+          <a:ext cx="0" cy="0"/>
+          <a:chOff x="0" y="0"/>
+          <a:chExt cx="0" cy="0"/>
+        </a:xfrm>
+      </p:grpSpPr>
+      <p:sp>
+        <p:nvSpPr>
+          <p:cNvPr id="2" name="Slide Image Placeholder 1"/>
+          <p:cNvSpPr>
+            <a:spLocks noGrp="1"/>
+          </p:cNvSpPr>
+          <p:nvPr>
+            <p:ph type="sldImg" idx="2"/>
+          </p:nvPr>
+        </p:nvSpPr>
+        <p:spPr/>
+      </p:sp>
+      <p:sp>
+        <p:nvSpPr>
+          <p:cNvPr id="3" name="Notes Placeholder 2"/>
+          <p:cNvSpPr>
+            <a:spLocks noGrp="1"/>
+          </p:cNvSpPr>
+          <p:nvPr>
+            <p:ph type="body" idx="3" sz="quarter"/>
+          </p:nvPr>
+        </p:nvSpPr>
+        <p:spPr/>
+        <p:txBody>
+          <a:bodyPr/>
+          <a:lstStyle/>
+          <a:p>
+            <a:r>
+              <a:t>Fuera de la lamina (habla de la practica, no del tema):</a:t>
+            </a:r>
+          </a:p>
+          <a:p>
+            <a:r>
+              <a:t>- Impacto: se pueden insertar detalles con insumos que no existen; afecta los 20 puntos de modelo coherente.</a:t>
+            </a:r>
+          </a:p>
+          <a:p/>
+          <a:p>
+            <a:r>
+              <a:t>Comparense los dos extremos.</a:t>
+            </a:r>
+          </a:p>
+          <a:p>
+            <a:r>
+              <a:t>Responsable: Carlos.</a:t>
+            </a:r>
+          </a:p>
+        </p:txBody>
+      </p:sp>
+      <p:sp>
+        <p:nvSpPr>
+          <p:cNvPr id="4" name="Slide Number Placeholder 3"/>
+          <p:cNvSpPr>
+            <a:spLocks noGrp="1"/>
+          </p:cNvSpPr>
+          <p:nvPr>
+            <p:ph type="sldNum" idx="5" sz="quarter"/>
+          </p:nvPr>
+        </p:nvSpPr>
+        <p:spPr/>
+      </p:sp>
+    </p:spTree>
+  </p:cSld>
+  <p:clrMapOvr>
+    <a:masterClrMapping/>
+  </p:clrMapOvr>
+</p:notes>
+</file>
+
+<file path=ppt/notesSlides/notesSlide9.xml><?xml version="1.0" encoding="utf-8"?>
+<p:notes xmlns:a="http://schemas.openxmlformats.org/drawingml/2006/main" xmlns:p="http://schemas.openxmlformats.org/presentationml/2006/main" xmlns:r="http://schemas.openxmlformats.org/officeDocument/2006/relationships">
+  <p:cSld>
+    <p:spTree>
+      <p:nvGrpSpPr>
+        <p:cNvPr id="1" name=""/>
+        <p:cNvGrpSpPr/>
+        <p:nvPr/>
+      </p:nvGrpSpPr>
+      <p:grpSpPr>
+        <a:xfrm>
+          <a:off x="0" y="0"/>
+          <a:ext cx="0" cy="0"/>
+          <a:chOff x="0" y="0"/>
+          <a:chExt cx="0" cy="0"/>
+        </a:xfrm>
+      </p:grpSpPr>
+      <p:sp>
+        <p:nvSpPr>
+          <p:cNvPr id="2" name="Slide Image Placeholder 1"/>
+          <p:cNvSpPr>
+            <a:spLocks noGrp="1"/>
+          </p:cNvSpPr>
+          <p:nvPr>
+            <p:ph type="sldImg" idx="2"/>
+          </p:nvPr>
+        </p:nvSpPr>
+        <p:spPr/>
+      </p:sp>
+      <p:sp>
+        <p:nvSpPr>
+          <p:cNvPr id="3" name="Notes Placeholder 2"/>
+          <p:cNvSpPr>
+            <a:spLocks noGrp="1"/>
+          </p:cNvSpPr>
+          <p:nvPr>
+            <p:ph type="body" idx="3" sz="quarter"/>
+          </p:nvPr>
+        </p:nvSpPr>
+        <p:spPr/>
+        <p:txBody>
+          <a:bodyPr/>
+          <a:lstStyle/>
+          <a:p>
+            <a:r>
+              <a:t>Fuera de la lamina (habla de la practica, no del tema):</a:t>
+            </a:r>
+          </a:p>
+          <a:p>
+            <a:r>
+              <a:t>- La regla de dosificacion es de tres a cinco hallazgos por estudiante, priorizados por puntos de rubrica en riesgo; mas de cinco desmoraliza y nadie los cierra, y menos de tres casi siempre significa que la revision fue superficial.</a:t>
             </a:r>
           </a:p>
         </p:txBody>
@@ -4565,7 +4817,7 @@
                 </a:solidFill>
                 <a:latin typeface="Calibri"/>
               </a:rPr>
-              <a:t>–   Si el estudiante no puede mostrar la segunda ejecucion, el procedimiento no tiene manejo de errores y eso resta puntos en los 25 de objetos programables.</a:t>
+              <a:t>–   Si el estudiante no puede mostrar la segunda ejecucion.</a:t>
             </a:r>
           </a:p>
           <a:p>
@@ -5101,7 +5353,7 @@
                 </a:solidFill>
                 <a:latin typeface="Calibri"/>
               </a:rPr>
-              <a:t>–   La rubrica no da puntos por cantidad de tablas: da 20 por modelo coherente y 25 por objetos programables con casos de prueba.</a:t>
+              <a:t>–   La accion correctiva es explicita y se registra en el acta: las entidades que sobran se mueven a una seccion de alcance futuro del informe, con una frase que diga por que quedaron fuera.</a:t>
             </a:r>
           </a:p>
           <a:p>
@@ -5117,23 +5369,7 @@
                 </a:solidFill>
                 <a:latin typeface="Calibri"/>
               </a:rPr>
-              <a:t>–   La accion correctiva es explicita y se registra en el acta: las entidades que sobran se mueven a una seccion de alcance futuro del informe, con una frase que diga por que quedaron fuera.</a:t>
-            </a:r>
-          </a:p>
-          <a:p>
-            <a:pPr>
-              <a:spcAft>
-                <a:spcPts val="800"/>
-              </a:spcAft>
-            </a:pPr>
-            <a:r>
-              <a:rPr sz="2000" b="0" i="0">
-                <a:solidFill>
-                  <a:srgbClr val="333333"/>
-                </a:solidFill>
-                <a:latin typeface="Calibri"/>
-              </a:rPr>
-              <a:t>–   Existe tambien el problema inverso y menos visible: el estudiante que recorto tanto que ya no tiene material para los 25 puntos de procedimientos, funciones y disparadores, y ese caso tambien es un hallazgo que hay que escribir.</a:t>
+              <a:t>–   Existe tambien el problema inverso y menos visible.</a:t>
             </a:r>
           </a:p>
         </p:txBody>
@@ -5433,7 +5669,7 @@
                 </a:solidFill>
                 <a:latin typeface="Calibri"/>
               </a:rPr>
-              <a:t>–   Impacto: se pueden insertar detalles con insumos que no existen; afecta los 20 puntos de modelo coherente.</a:t>
+              <a:t>–   Impacto: se pueden insertar detalles con insumos que no existen.</a:t>
             </a:r>
           </a:p>
         </p:txBody>
@@ -5685,7 +5921,7 @@
                 </a:solidFill>
                 <a:latin typeface="Calibri"/>
               </a:rPr>
-              <a:t>–   La regla de dosificacion es de tres a cinco hallazgos por estudiante, priorizados por puntos de rubrica en riesgo; mas de cinco desmoraliza y nadie los cierra, y menos de tres casi siempre significa que la revision fue superficial.</a:t>
+              <a:t>–   La regla de dosificacion es de tres a cinco hallazgos por estudiante.</a:t>
             </a:r>
           </a:p>
         </p:txBody>
@@ -7507,7 +7743,7 @@
                 </a:solidFill>
                 <a:latin typeface="Calibri"/>
               </a:rPr>
-              <a:t> Live SQL / DB Fiddle + draw.io + la plataforma del curso</a:t>
+              <a:t> Live SQL / DB Fiddle + draw.io</a:t>
             </a:r>
           </a:p>
           <a:p>
@@ -7836,7 +8072,7 @@
                 </a:solidFill>
                 <a:latin typeface="Calibri"/>
               </a:rPr>
-              <a:t>Live SQL / DB Fiddle + draw.io + la plataforma del curso</a:t>
+              <a:t>Live SQL / DB Fiddle + draw.io</a:t>
             </a:r>
             <a:r>
               <a:rPr sz="2000" b="0" i="0">
@@ -8083,7 +8319,7 @@
                 </a:solidFill>
                 <a:latin typeface="Calibri"/>
               </a:rPr>
-              <a:t>Del boceto a la plataforma del curso (diagrama)</a:t>
+              <a:t>Del boceto al código Mermaid</a:t>
             </a:r>
           </a:p>
         </p:txBody>
@@ -8117,7 +8353,7 @@
                 </a:solidFill>
                 <a:latin typeface="Calibri"/>
               </a:rPr>
-              <a:t>El diagrama se entrega como codigo Mermaid dentro de la plataforma del curso, no como imagen</a:t>
+              <a:t>El diagrama es texto Mermaid: la imagen sale del codigo, no al reves</a:t>
             </a:r>
           </a:p>
         </p:txBody>
@@ -8459,7 +8695,7 @@
                 </a:solidFill>
                 <a:latin typeface="Calibri"/>
               </a:rPr>
-              <a:t>Copia o describe tu boceto a una IA y pidele el codigo Mermaid: «convierte este diagrama a Mermaid usando erDiagram». Revisa el resultado: la IA acierta la sintaxis, no tu modelo.</a:t>
+              <a:t>Copia o describe tu boceto a una IA y pidele el codigo Mermaid usando erDiagram. Revisa el resultado: la IA acierta la sintaxis, no tu modelo.</a:t>
             </a:r>
           </a:p>
         </p:txBody>
@@ -8614,7 +8850,7 @@
                 </a:solidFill>
                 <a:latin typeface="Calibri"/>
               </a:rPr>
-              <a:t>Pega y renderiza en la plataforma del curso</a:t>
+              <a:t>Renderiza y corrige</a:t>
             </a:r>
           </a:p>
           <a:p>
@@ -8630,7 +8866,7 @@
                 </a:solidFill>
                 <a:latin typeface="Calibri"/>
               </a:rPr>
-              <a:t>Pega ese codigo en la caja de texto de la pregunta y mira como lo dibuja la plataforma. Si no renderiza, corrige ahi mismo: lo que se califica es el diagrama renderizado dentro de la plataforma del curso.</a:t>
+              <a:t>Pega el codigo en un visor Mermaid (por ejemplo mermaid.live) y mira como lo dibuja. Si no renderiza, corrige ahi mismo: un diagrama que no renderiza no comunica nada.</a:t>
             </a:r>
           </a:p>
         </p:txBody>
@@ -8785,7 +9021,7 @@
                 </a:solidFill>
                 <a:latin typeface="Calibri"/>
               </a:rPr>
-              <a:t>Guarda el PNG para tu PI</a:t>
+              <a:t>Guarda codigo e imagen</a:t>
             </a:r>
           </a:p>
           <a:p>
@@ -8801,7 +9037,7 @@
                 </a:solidFill>
                 <a:latin typeface="Calibri"/>
               </a:rPr>
-              <a:t>Exporta tambien la imagen a la carpeta de tu Proyecto Integrador. Esa copia es para tu informe; no reemplaza la respuesta en la plataforma.</a:t>
+              <a:t>Conserva el texto Mermaid, que es la fuente, y exporta el PNG para tu informe del Proyecto Integrador.</a:t>
             </a:r>
           </a:p>
         </p:txBody>
@@ -10593,7 +10829,7 @@
                 </a:solidFill>
                 <a:latin typeface="Calibri"/>
               </a:rPr>
-              <a:t>–   Un artefacto es cualquier producto de trabajo entregable: el diagrama entidad-relacion, el script DDL, la matriz de roles, los procedimientos, el informe de optimizacion.</a:t>
+              <a:t>–   Un artefacto es cualquier producto de trabajo: el diagrama entidad-relacion, el script DDL, la matriz de roles, los procedimientos, el informe de optimizacion.</a:t>
             </a:r>
           </a:p>
           <a:p>
@@ -10641,7 +10877,7 @@
                 </a:solidFill>
                 <a:latin typeface="Calibri"/>
               </a:rPr>
-              <a:t>–   Cada una toma dos o tres minutos si se ejecuta con criterio, y juntas cubren los cuatro criterios de rubrica que mas peso tienen.</a:t>
+              <a:t>–   Cada una toma dos o tres minutos si se ejecuta con criterio.</a:t>
             </a:r>
           </a:p>
         </p:txBody>

--- a/Bases de Datos II/Clases/Clase 11 - Avance del proyecto final/Presentacion.pptx
+++ b/Bases de Datos II/Clases/Clase 11 - Avance del proyecto final/Presentacion.pptx
@@ -552,86 +552,6 @@
 </p:notes>
 </file>
 
-<file path=ppt/notesSlides/notesSlide10.xml><?xml version="1.0" encoding="utf-8"?>
-<p:notes xmlns:a="http://schemas.openxmlformats.org/drawingml/2006/main" xmlns:p="http://schemas.openxmlformats.org/presentationml/2006/main" xmlns:r="http://schemas.openxmlformats.org/officeDocument/2006/relationships">
-  <p:cSld>
-    <p:spTree>
-      <p:nvGrpSpPr>
-        <p:cNvPr id="1" name=""/>
-        <p:cNvGrpSpPr/>
-        <p:nvPr/>
-      </p:nvGrpSpPr>
-      <p:grpSpPr>
-        <a:xfrm>
-          <a:off x="0" y="0"/>
-          <a:ext cx="0" cy="0"/>
-          <a:chOff x="0" y="0"/>
-          <a:chExt cx="0" cy="0"/>
-        </a:xfrm>
-      </p:grpSpPr>
-      <p:sp>
-        <p:nvSpPr>
-          <p:cNvPr id="2" name="Slide Image Placeholder 1"/>
-          <p:cNvSpPr>
-            <a:spLocks noGrp="1"/>
-          </p:cNvSpPr>
-          <p:nvPr>
-            <p:ph type="sldImg" idx="2"/>
-          </p:nvPr>
-        </p:nvSpPr>
-        <p:spPr/>
-      </p:sp>
-      <p:sp>
-        <p:nvSpPr>
-          <p:cNvPr id="3" name="Notes Placeholder 2"/>
-          <p:cNvSpPr>
-            <a:spLocks noGrp="1"/>
-          </p:cNvSpPr>
-          <p:nvPr>
-            <p:ph type="body" idx="3" sz="quarter"/>
-          </p:nvPr>
-        </p:nvSpPr>
-        <p:spPr/>
-        <p:txBody>
-          <a:bodyPr/>
-          <a:lstStyle/>
-          <a:p>
-            <a:r>
-              <a:t>Aqui aparecen las dos preguntas previsibles del estudiante.</a:t>
-            </a:r>
-          </a:p>
-          <a:p>
-            <a:r>
-              <a:t>La respuesta es que el checkpoint en si no califica el producto, pero es la ultima oportunidad de mover puntos de la rubrica antes de la entrega, y por eso conviene llegar con lo peor y no con lo mejor: un estudiante que esconde su parte floja para no verse mal pierde justamente la revision que la habria arreglado.</a:t>
-            </a:r>
-          </a:p>
-          <a:p>
-            <a:r>
-              <a:t>No, porque el auditor par no califica.</a:t>
-            </a:r>
-          </a:p>
-        </p:txBody>
-      </p:sp>
-      <p:sp>
-        <p:nvSpPr>
-          <p:cNvPr id="4" name="Slide Number Placeholder 3"/>
-          <p:cNvSpPr>
-            <a:spLocks noGrp="1"/>
-          </p:cNvSpPr>
-          <p:nvPr>
-            <p:ph type="sldNum" idx="5" sz="quarter"/>
-          </p:nvPr>
-        </p:nvSpPr>
-        <p:spPr/>
-      </p:sp>
-    </p:spTree>
-  </p:cSld>
-  <p:clrMapOvr>
-    <a:masterClrMapping/>
-  </p:clrMapOvr>
-</p:notes>
-</file>
-
 <file path=ppt/notesSlides/notesSlide2.xml><?xml version="1.0" encoding="utf-8"?>
 <p:notes xmlns:a="http://schemas.openxmlformats.org/drawingml/2006/main" xmlns:p="http://schemas.openxmlformats.org/presentationml/2006/main" xmlns:r="http://schemas.openxmlformats.org/officeDocument/2006/relationships">
   <p:cSld>
@@ -677,17 +597,6 @@
           <a:lstStyle/>
           <a:p>
             <a:r>
-              <a:t>Fuera de la lamina (habla de la practica, no del tema):</a:t>
-            </a:r>
-          </a:p>
-          <a:p>
-            <a:r>
-              <a:t>- Cada una toma dos o tres minutos si se ejecuta con criterio, y juntas cubren los cuatro criterios de rubrica que mas peso tienen.</a:t>
-            </a:r>
-          </a:p>
-          <a:p/>
-          <a:p>
-            <a:r>
               <a:t>Lo que se audita en una base de datos no es cada pieza por separado sino la coherencia entre piezas.</a:t>
             </a:r>
           </a:p>
@@ -704,6 +613,11 @@
           <a:p>
             <a:r>
               <a:t>Las cuatro verificaciones cruzadas que el docente debe correr son: que el DDL corresponda al ER, que los GRANT correspondan a los roles declarados, que los procedimientos listados existan y sean invocables, y que la optimizacion tenga medicion antes y despues.</a:t>
+            </a:r>
+          </a:p>
+          <a:p>
+            <a:r>
+              <a:t>Fuera de la lamina (habla de la practica): Cada una toma dos o tres minutos si se ejecuta con criterio, y juntas cubren los cuatro criterios de rubrica que mas peso tienen.</a:t>
             </a:r>
           </a:p>
         </p:txBody>
@@ -871,6 +785,11 @@
               <a:t>Se exige la consulta original, el plan de ejecucion que la acompanaba, el cambio aplicado (indice creado o consulta reescrita) y el plan despues, mostrando que el motor paso de recorrido completo de tabla a acceso por indice.</a:t>
             </a:r>
           </a:p>
+          <a:p>
+            <a:r>
+              <a:t>Fuera de la lamina (habla de la practica): Si el estudiante no puede mostrar la segunda ejecucion, el procedimiento no tiene manejo de errores y eso resta puntos en los 25 de objetos programables.</a:t>
+            </a:r>
+          </a:p>
         </p:txBody>
       </p:sp>
       <p:sp>
@@ -938,12 +857,22 @@
           <a:lstStyle/>
           <a:p>
             <a:r>
-              <a:t>Fuera de la lamina (habla de la practica, no del tema):</a:t>
-            </a:r>
-          </a:p>
-          <a:p>
-            <a:r>
-              <a:t>- Si el estudiante no puede mostrar la segunda ejecucion, el procedimiento no tiene manejo de errores y eso resta puntos en los 25 de objetos programables.</a:t>
+              <a:t>Existe tambien el problema inverso y menos visible.</a:t>
+            </a:r>
+          </a:p>
+          <a:p>
+            <a:r>
+              <a:t>Fuera de la lamina (habla de la practica): La rubrica no da puntos por cantidad de tablas: da 20 por modelo coherente y 25 por objetos programables con casos de prueba.</a:t>
+            </a:r>
+          </a:p>
+          <a:p>
+            <a:r>
+              <a:t>Fuera de la lamina (habla de la practica): Eso no resta puntos, al contrario, declarar el limite es una senal de madurez que se valora en la sustentacion.</a:t>
+            </a:r>
+          </a:p>
+          <a:p>
+            <a:r>
+              <a:t>Fuera de la lamina (habla de la practica): Existe tambien el problema inverso y menos visible: el estudiante que recorto tanto que ya no tiene material para los 25 puntos de procedimientos, funciones y disparadores, y ese caso tambien es un hallazgo que hay que escribir.</a:t>
             </a:r>
           </a:p>
         </p:txBody>
@@ -1013,7 +942,22 @@
           <a:lstStyle/>
           <a:p>
             <a:r>
-              <a:t>Eso no resta puntos, al contrario, declarar el limite es una senal de madurez que se valora en la sustentacion.</a:t>
+              <a:t>Comparense los dos extremos.</a:t>
+            </a:r>
+          </a:p>
+          <a:p>
+            <a:r>
+              <a:t>Responsable: Carlos.</a:t>
+            </a:r>
+          </a:p>
+          <a:p>
+            <a:r>
+              <a:t>Fuera de la lamina (habla de la practica): Impacto: se pueden insertar detalles con insumos que no existen; afecta los 20 puntos de modelo coherente.</a:t>
+            </a:r>
+          </a:p>
+          <a:p>
+            <a:r>
+              <a:t>Fuera de la lamina (habla de la practica): La regla de dosificacion es de tres a cinco hallazgos por estudiante, priorizados por puntos de rubrica en riesgo; mas de cinco desmoraliza y nadie los cierra, y menos de tres casi siempre significa que la revision fue superficial.</a:t>
             </a:r>
           </a:p>
         </p:txBody>
@@ -1083,178 +1027,17 @@
           <a:lstStyle/>
           <a:p>
             <a:r>
-              <a:t>Fuera de la lamina (habla de la practica, no del tema):</a:t>
-            </a:r>
-          </a:p>
-          <a:p>
-            <a:r>
-              <a:t>- La rubrica no da puntos por cantidad de tablas: da 20 por modelo coherente y 25 por objetos programables con casos de prueba.</a:t>
-            </a:r>
-          </a:p>
-          <a:p>
-            <a:r>
-              <a:t>- Existe tambien el problema inverso y menos visible: el estudiante que recorto tanto que ya no tiene material para los 25 puntos de procedimientos, funciones y disparadores, y ese caso tambien es un hallazgo que hay que escribir.</a:t>
-            </a:r>
-          </a:p>
-        </p:txBody>
-      </p:sp>
-      <p:sp>
-        <p:nvSpPr>
-          <p:cNvPr id="4" name="Slide Number Placeholder 3"/>
-          <p:cNvSpPr>
-            <a:spLocks noGrp="1"/>
-          </p:cNvSpPr>
-          <p:nvPr>
-            <p:ph type="sldNum" idx="5" sz="quarter"/>
-          </p:nvPr>
-        </p:nvSpPr>
-        <p:spPr/>
-      </p:sp>
-    </p:spTree>
-  </p:cSld>
-  <p:clrMapOvr>
-    <a:masterClrMapping/>
-  </p:clrMapOvr>
-</p:notes>
-</file>
-
-<file path=ppt/notesSlides/notesSlide8.xml><?xml version="1.0" encoding="utf-8"?>
-<p:notes xmlns:a="http://schemas.openxmlformats.org/drawingml/2006/main" xmlns:p="http://schemas.openxmlformats.org/presentationml/2006/main" xmlns:r="http://schemas.openxmlformats.org/officeDocument/2006/relationships">
-  <p:cSld>
-    <p:spTree>
-      <p:nvGrpSpPr>
-        <p:cNvPr id="1" name=""/>
-        <p:cNvGrpSpPr/>
-        <p:nvPr/>
-      </p:nvGrpSpPr>
-      <p:grpSpPr>
-        <a:xfrm>
-          <a:off x="0" y="0"/>
-          <a:ext cx="0" cy="0"/>
-          <a:chOff x="0" y="0"/>
-          <a:chExt cx="0" cy="0"/>
-        </a:xfrm>
-      </p:grpSpPr>
-      <p:sp>
-        <p:nvSpPr>
-          <p:cNvPr id="2" name="Slide Image Placeholder 1"/>
-          <p:cNvSpPr>
-            <a:spLocks noGrp="1"/>
-          </p:cNvSpPr>
-          <p:nvPr>
-            <p:ph type="sldImg" idx="2"/>
-          </p:nvPr>
-        </p:nvSpPr>
-        <p:spPr/>
-      </p:sp>
-      <p:sp>
-        <p:nvSpPr>
-          <p:cNvPr id="3" name="Notes Placeholder 2"/>
-          <p:cNvSpPr>
-            <a:spLocks noGrp="1"/>
-          </p:cNvSpPr>
-          <p:nvPr>
-            <p:ph type="body" idx="3" sz="quarter"/>
-          </p:nvPr>
-        </p:nvSpPr>
-        <p:spPr/>
-        <p:txBody>
-          <a:bodyPr/>
-          <a:lstStyle/>
-          <a:p>
-            <a:r>
-              <a:t>Fuera de la lamina (habla de la practica, no del tema):</a:t>
-            </a:r>
-          </a:p>
-          <a:p>
-            <a:r>
-              <a:t>- Impacto: se pueden insertar detalles con insumos que no existen; afecta los 20 puntos de modelo coherente.</a:t>
-            </a:r>
-          </a:p>
-          <a:p/>
-          <a:p>
-            <a:r>
-              <a:t>Comparense los dos extremos.</a:t>
-            </a:r>
-          </a:p>
-          <a:p>
-            <a:r>
-              <a:t>Responsable: Carlos.</a:t>
-            </a:r>
-          </a:p>
-        </p:txBody>
-      </p:sp>
-      <p:sp>
-        <p:nvSpPr>
-          <p:cNvPr id="4" name="Slide Number Placeholder 3"/>
-          <p:cNvSpPr>
-            <a:spLocks noGrp="1"/>
-          </p:cNvSpPr>
-          <p:nvPr>
-            <p:ph type="sldNum" idx="5" sz="quarter"/>
-          </p:nvPr>
-        </p:nvSpPr>
-        <p:spPr/>
-      </p:sp>
-    </p:spTree>
-  </p:cSld>
-  <p:clrMapOvr>
-    <a:masterClrMapping/>
-  </p:clrMapOvr>
-</p:notes>
-</file>
-
-<file path=ppt/notesSlides/notesSlide9.xml><?xml version="1.0" encoding="utf-8"?>
-<p:notes xmlns:a="http://schemas.openxmlformats.org/drawingml/2006/main" xmlns:p="http://schemas.openxmlformats.org/presentationml/2006/main" xmlns:r="http://schemas.openxmlformats.org/officeDocument/2006/relationships">
-  <p:cSld>
-    <p:spTree>
-      <p:nvGrpSpPr>
-        <p:cNvPr id="1" name=""/>
-        <p:cNvGrpSpPr/>
-        <p:nvPr/>
-      </p:nvGrpSpPr>
-      <p:grpSpPr>
-        <a:xfrm>
-          <a:off x="0" y="0"/>
-          <a:ext cx="0" cy="0"/>
-          <a:chOff x="0" y="0"/>
-          <a:chExt cx="0" cy="0"/>
-        </a:xfrm>
-      </p:grpSpPr>
-      <p:sp>
-        <p:nvSpPr>
-          <p:cNvPr id="2" name="Slide Image Placeholder 1"/>
-          <p:cNvSpPr>
-            <a:spLocks noGrp="1"/>
-          </p:cNvSpPr>
-          <p:nvPr>
-            <p:ph type="sldImg" idx="2"/>
-          </p:nvPr>
-        </p:nvSpPr>
-        <p:spPr/>
-      </p:sp>
-      <p:sp>
-        <p:nvSpPr>
-          <p:cNvPr id="3" name="Notes Placeholder 2"/>
-          <p:cNvSpPr>
-            <a:spLocks noGrp="1"/>
-          </p:cNvSpPr>
-          <p:nvPr>
-            <p:ph type="body" idx="3" sz="quarter"/>
-          </p:nvPr>
-        </p:nvSpPr>
-        <p:spPr/>
-        <p:txBody>
-          <a:bodyPr/>
-          <a:lstStyle/>
-          <a:p>
-            <a:r>
-              <a:t>Fuera de la lamina (habla de la practica, no del tema):</a:t>
-            </a:r>
-          </a:p>
-          <a:p>
-            <a:r>
-              <a:t>- La regla de dosificacion es de tres a cinco hallazgos por estudiante, priorizados por puntos de rubrica en riesgo; mas de cinco desmoraliza y nadie los cierra, y menos de tres casi siempre significa que la revision fue superficial.</a:t>
+              <a:t>Aqui aparecen las dos preguntas previsibles del estudiante.</a:t>
+            </a:r>
+          </a:p>
+          <a:p>
+            <a:r>
+              <a:t>Fuera de la lamina (habla de la practica): La respuesta es que el checkpoint en si no califica el producto, pero es la ultima oportunidad de mover puntos de la rubrica antes de la entrega, y por eso conviene llegar con lo peor y no con lo mejor: un estudiante que esconde su parte floja para no verse mal pierde justamente la revision que la habria arreglado.</a:t>
+            </a:r>
+          </a:p>
+          <a:p>
+            <a:r>
+              <a:t>Fuera de la lamina (habla de la practica): No, porque el auditor par no califica.</a:t>
             </a:r>
           </a:p>
         </p:txBody>
@@ -4817,7 +4600,7 @@
                 </a:solidFill>
                 <a:latin typeface="Calibri"/>
               </a:rPr>
-              <a:t>–   Si el estudiante no puede mostrar la segunda ejecucion.</a:t>
+              <a:t>–   Un informe de optimizacion sin medicion no es optimizacion, es una opinion.</a:t>
             </a:r>
           </a:p>
           <a:p>
@@ -4833,7 +4616,7 @@
                 </a:solidFill>
                 <a:latin typeface="Calibri"/>
               </a:rPr>
-              <a:t>–   Un informe de optimizacion sin medicion no es optimizacion, es una opinion.</a:t>
+              <a:t>–   Si el estudiante creo tres indices y no puede senalar cual consulta aprovecha cada uno, el hallazgo es que indexo por costumbre y no por medicion, que es exactamente el error que se analiza como caso real en la Clase 13.</a:t>
             </a:r>
           </a:p>
           <a:p>
@@ -4849,7 +4632,7 @@
                 </a:solidFill>
                 <a:latin typeface="Calibri"/>
               </a:rPr>
-              <a:t>–   Si el estudiante creo tres indices y no puede senalar cual consulta aprovecha cada uno, el hallazgo es que indexo por costumbre y no por medicion, que es exactamente el error que se analiza como caso real en la Clase 13.</a:t>
+              <a:t>–   Ejemplo: un sp_agendar_cita que compila pero no valida la mascota inactiva pasa la primera ejecucion y falla la segunda, la que deberia haber sido rechazada.</a:t>
             </a:r>
           </a:p>
         </p:txBody>
@@ -5104,22 +4887,6 @@
               <a:t>–   VetCare pide seis entidades minimas (Dueno, Mascota, Veterinario, Cita, Insumo y Factura con su detalle) y el rango sano al llegar a la Clase 11 es de seis a nueve, contando una o dos ampliaciones propias justificadas como Consulta o historial clinico.</a:t>
             </a:r>
           </a:p>
-          <a:p>
-            <a:pPr>
-              <a:spcAft>
-                <a:spcPts val="800"/>
-              </a:spcAft>
-            </a:pPr>
-            <a:r>
-              <a:rPr sz="2000" b="0" i="0">
-                <a:solidFill>
-                  <a:srgbClr val="333333"/>
-                </a:solidFill>
-                <a:latin typeface="Calibri"/>
-              </a:rPr>
-              <a:t>–   Un estudiante que llega con quince entidades porque agrego proveedores, inventario multialmacen, portal para duenos y notificaciones no esta adelantado: esta repartiendo el mismo esfuerzo en el doble de superficie</a:t>
-            </a:r>
-          </a:p>
         </p:txBody>
       </p:sp>
       <p:sp>
@@ -5337,7 +5104,7 @@
                 </a:solidFill>
                 <a:latin typeface="Calibri"/>
               </a:rPr>
-              <a:t>–   Y termina con quince tablas vacias en vez de siete tablas con procedimientos probados.</a:t>
+              <a:t>–   Un estudiante que llega con quince entidades porque agrego proveedores, inventario multialmacen, portal para duenos y notificaciones no esta adelantado: esta repartiendo el mismo esfuerzo en el doble de superficie</a:t>
             </a:r>
           </a:p>
           <a:p>
@@ -5353,7 +5120,7 @@
                 </a:solidFill>
                 <a:latin typeface="Calibri"/>
               </a:rPr>
-              <a:t>–   La accion correctiva es explicita y se registra en el acta: las entidades que sobran se mueven a una seccion de alcance futuro del informe, con una frase que diga por que quedaron fuera.</a:t>
+              <a:t>–   Y termina con quince tablas vacias en vez de siete tablas con procedimientos probados.</a:t>
             </a:r>
           </a:p>
           <a:p>
@@ -5369,7 +5136,7 @@
                 </a:solidFill>
                 <a:latin typeface="Calibri"/>
               </a:rPr>
-              <a:t>–   Existe tambien el problema inverso y menos visible.</a:t>
+              <a:t>–   La accion correctiva es explicita y se registra en el acta: las entidades que sobran se mueven a una seccion de alcance futuro del informe, con una frase que diga por que quedaron fuera.</a:t>
             </a:r>
           </a:p>
         </p:txBody>
@@ -5656,22 +5423,6 @@
               <a:t>–   Observacion: la tabla detalle_factura no tiene FOREIGN KEY hacia insumo, aunque el ER dibuja la relacion.</a:t>
             </a:r>
           </a:p>
-          <a:p>
-            <a:pPr>
-              <a:spcAft>
-                <a:spcPts val="800"/>
-              </a:spcAft>
-            </a:pPr>
-            <a:r>
-              <a:rPr sz="2000" b="0" i="0">
-                <a:solidFill>
-                  <a:srgbClr val="333333"/>
-                </a:solidFill>
-                <a:latin typeface="Calibri"/>
-              </a:rPr>
-              <a:t>–   Impacto: se pueden insertar detalles con insumos que no existen.</a:t>
-            </a:r>
-          </a:p>
         </p:txBody>
       </p:sp>
       <p:sp>
@@ -5889,6 +5640,22 @@
                 </a:solidFill>
                 <a:latin typeface="Calibri"/>
               </a:rPr>
+              <a:t>–   Impacto: se pueden insertar detalles con insumos que no existen.</a:t>
+            </a:r>
+          </a:p>
+          <a:p>
+            <a:pPr>
+              <a:spcAft>
+                <a:spcPts val="800"/>
+              </a:spcAft>
+            </a:pPr>
+            <a:r>
+              <a:rPr sz="2000" b="0" i="0">
+                <a:solidFill>
+                  <a:srgbClr val="333333"/>
+                </a:solidFill>
+                <a:latin typeface="Calibri"/>
+              </a:rPr>
               <a:t>–   Accion: agregar la restriccion y volver a ejecutar el script completo desde cero en un entorno limpio.</a:t>
             </a:r>
           </a:p>
@@ -7809,7 +7576,59 @@
                 </a:solidFill>
                 <a:latin typeface="Calibri"/>
               </a:rPr>
-              <a:t>–   Al final de la demo: dejar enlace/script compartible al grupo.</a:t>
+              <a:t>–   </a:t>
+            </a:r>
+            <a:r>
+              <a:rPr sz="2000" b="1" i="0">
+                <a:solidFill>
+                  <a:srgbClr val="333333"/>
+                </a:solidFill>
+                <a:latin typeface="Calibri"/>
+              </a:rPr>
+              <a:t>Qué observar:</a:t>
+            </a:r>
+            <a:r>
+              <a:rPr sz="2000" b="0" i="0">
+                <a:solidFill>
+                  <a:srgbClr val="333333"/>
+                </a:solidFill>
+                <a:latin typeface="Calibri"/>
+              </a:rPr>
+              <a:t> cada hallazgo se demuestra con una ejecucion: el DDL contra el ER y el procedimiento con un caso valido y uno invalido.</a:t>
+            </a:r>
+          </a:p>
+          <a:p>
+            <a:pPr>
+              <a:spcAft>
+                <a:spcPts val="800"/>
+              </a:spcAft>
+            </a:pPr>
+            <a:r>
+              <a:rPr sz="2000" b="0" i="0">
+                <a:solidFill>
+                  <a:srgbClr val="333333"/>
+                </a:solidFill>
+                <a:latin typeface="Calibri"/>
+              </a:rPr>
+              <a:t>–   </a:t>
+            </a:r>
+            <a:r>
+              <a:rPr sz="2000" b="1" i="0">
+                <a:solidFill>
+                  <a:srgbClr val="333333"/>
+                </a:solidFill>
+                <a:latin typeface="Calibri"/>
+              </a:rPr>
+              <a:t>Qué observar:</a:t>
+            </a:r>
+            <a:r>
+              <a:rPr sz="2000" b="0" i="0">
+                <a:solidFill>
+                  <a:srgbClr val="333333"/>
+                </a:solidFill>
+                <a:latin typeface="Calibri"/>
+              </a:rPr>
+              <a:t> un hallazgo util nombra el artefacto, el problema, su impacto en VetCare y la accion concreta que lo corrige.</a:t>
             </a:r>
           </a:p>
         </p:txBody>
@@ -8141,6 +7960,40 @@
               <a:t>–   Cada lámina se sostiene sola: sirve para repasar aunque hayas faltado.</a:t>
             </a:r>
           </a:p>
+          <a:p>
+            <a:pPr>
+              <a:spcAft>
+                <a:spcPts val="800"/>
+              </a:spcAft>
+            </a:pPr>
+            <a:r>
+              <a:rPr sz="2000" b="0" i="0">
+                <a:solidFill>
+                  <a:srgbClr val="333333"/>
+                </a:solidFill>
+                <a:latin typeface="Calibri"/>
+              </a:rPr>
+              <a:t>–   </a:t>
+            </a:r>
+            <a:r>
+              <a:rPr sz="2000" b="1" i="0">
+                <a:solidFill>
+                  <a:srgbClr val="333333"/>
+                </a:solidFill>
+                <a:latin typeface="Calibri"/>
+              </a:rPr>
+              <a:t>Conceptos de hoy:</a:t>
+            </a:r>
+            <a:r>
+              <a:rPr sz="2000" b="0" i="0">
+                <a:solidFill>
+                  <a:srgbClr val="333333"/>
+                </a:solidFill>
+                <a:latin typeface="Calibri"/>
+              </a:rPr>
+              <a:t> Que es una revision tecnica, y con que producto se sale · Lo que se audita es la coherencia entre piezas · Verificaciones uno y dos · Verificacion tres.</a:t>
+            </a:r>
+          </a:p>
         </p:txBody>
       </p:sp>
       <p:sp>
@@ -11650,6 +11503,22 @@
                 <a:latin typeface="Calibri"/>
               </a:rPr>
               <a:t>–   Segundo, CALL sp_agendar_cita con el caso invalido que el propio estudiante declaro, es decir una mascota inactiva o un horario ya tomado, que debe devolver el mensaje de negocio y no un error crudo del motor.</a:t>
+            </a:r>
+          </a:p>
+          <a:p>
+            <a:pPr>
+              <a:spcAft>
+                <a:spcPts val="800"/>
+              </a:spcAft>
+            </a:pPr>
+            <a:r>
+              <a:rPr sz="2000" b="0" i="0">
+                <a:solidFill>
+                  <a:srgbClr val="333333"/>
+                </a:solidFill>
+                <a:latin typeface="Calibri"/>
+              </a:rPr>
+              <a:t>–   Si el estudiante no puede mostrar la segunda ejecucion.</a:t>
             </a:r>
           </a:p>
         </p:txBody>

--- a/Bases de Datos II/Clases/Clase 11 - Avance del proyecto final/Presentacion.pptx
+++ b/Bases de Datos II/Clases/Clase 11 - Avance del proyecto final/Presentacion.pptx
@@ -4296,13 +4296,13 @@
           <a:p>
             <a:pPr algn="ctr"/>
             <a:r>
-              <a:rPr sz="4000" b="1" i="0">
+              <a:rPr sz="3400" b="1" i="0">
                 <a:solidFill>
                   <a:srgbClr val="FFFFFF"/>
                 </a:solidFill>
                 <a:latin typeface="Calibri"/>
               </a:rPr>
-              <a:t>Avance PI · VetCare DB</a:t>
+              <a:t>Avance proyecto · la base de la clínica</a:t>
             </a:r>
           </a:p>
         </p:txBody>
@@ -4868,7 +4868,7 @@
                 </a:solidFill>
                 <a:latin typeface="Calibri"/>
               </a:rPr>
-              <a:t>–   En un proyecto de base de datos tiene un sintoma cuantificable, que es el numero de entidades.</a:t>
+              <a:t>–   En un proyecto de base de datos tiene un sintoma cuantificable, que es el numero de entidades. la clínica pide seis entidades minimas (Dueno, Mascota, Veterinario, Cita</a:t>
             </a:r>
           </a:p>
           <a:p>
@@ -4884,7 +4884,7 @@
                 </a:solidFill>
                 <a:latin typeface="Calibri"/>
               </a:rPr>
-              <a:t>–   VetCare pide seis entidades minimas (Dueno, Mascota, Veterinario, Cita, Insumo y Factura con su detalle) y el rango sano al llegar a la Clase 11 es de seis a nueve, contando una o dos ampliaciones propias justificadas como Consulta o historial clinico.</a:t>
+              <a:t>–   Insumo y Factura con su detalle) y el rango sano al llegar a la Clase 11 es de seis a nueve, contando una o dos ampliaciones propias justificadas como Consulta o historial clinico.</a:t>
             </a:r>
           </a:p>
         </p:txBody>
@@ -7560,7 +7560,7 @@
                 </a:solidFill>
                 <a:latin typeface="Calibri"/>
               </a:rPr>
-              <a:t>–   Sigan el mismo dominio VetCare (no inventen otro caso).</a:t>
+              <a:t>–   Sigan el mismo dominio de la clínica (no inventen otro caso).</a:t>
             </a:r>
           </a:p>
           <a:p>
@@ -7628,7 +7628,7 @@
                 </a:solidFill>
                 <a:latin typeface="Calibri"/>
               </a:rPr>
-              <a:t> un hallazgo util nombra el artefacto, el problema, su impacto en VetCare y la accion concreta que lo corrige.</a:t>
+              <a:t> un hallazgo util nombra el artefacto, el problema, su impacto en la clínica y la accion concreta que lo corrige.</a:t>
             </a:r>
           </a:p>
         </p:txBody>
@@ -7866,7 +7866,7 @@
                 </a:solidFill>
                 <a:latin typeface="Calibri"/>
               </a:rPr>
-              <a:t> Avance PI · VetCare DB</a:t>
+              <a:t> Avance proyecto · la base de la clínica</a:t>
             </a:r>
           </a:p>
           <a:p>
@@ -7941,7 +7941,7 @@
                 </a:solidFill>
                 <a:latin typeface="Calibri"/>
               </a:rPr>
-              <a:t>–   Recorrido: teoría del tema, una lámina por concepto, y demo del docente sobre VetCare DB.</a:t>
+              <a:t>–   Recorrido: teoría del tema, una lámina por concepto, y demo del docente sobre la base de la clínica.</a:t>
             </a:r>
           </a:p>
           <a:p>
@@ -8890,7 +8890,7 @@
                 </a:solidFill>
                 <a:latin typeface="Calibri"/>
               </a:rPr>
-              <a:t>Conserva el texto Mermaid, que es la fuente, y exporta el PNG para tu informe del Proyecto Integrador.</a:t>
+              <a:t>Conserva el texto Mermaid, que es la fuente, y exporta el PNG para tu informe.</a:t>
             </a:r>
           </a:p>
         </p:txBody>
@@ -9051,7 +9051,7 @@
                 </a:solidFill>
                 <a:latin typeface="Calibri"/>
               </a:rPr>
-              <a:t>Clase 11 · Avance PI · VetCare DB</a:t>
+              <a:t>Clase 11 · Avance proyecto · la base de la clínica</a:t>
             </a:r>
           </a:p>
         </p:txBody>
@@ -9461,7 +9461,7 @@
                 </a:solidFill>
                 <a:latin typeface="Calibri"/>
               </a:rPr>
-              <a:t>Encuadre · clase regular · VetCare</a:t>
+              <a:t>Encuadre · clase regular · la clínica</a:t>
             </a:r>
           </a:p>
         </p:txBody>
@@ -9576,7 +9576,7 @@
                 </a:solidFill>
                 <a:latin typeface="Calibri"/>
               </a:rPr>
-              <a:t>Teoría Core breve (al servicio del PI)</a:t>
+              <a:t>Teoría Core breve (al servicio del proyecto)</a:t>
             </a:r>
           </a:p>
         </p:txBody>

--- a/Bases de Datos II/Clases/Clase 11 - Avance del proyecto final/Presentacion.pptx
+++ b/Bases de Datos II/Clases/Clase 11 - Avance del proyecto final/Presentacion.pptx
@@ -7,8 +7,8 @@
   <p:sldIdLst>
     <p:sldId id="256" r:id="rId7"/>
     <p:sldId id="257" r:id="rId8"/>
-    <p:sldId id="258" r:id="rId10"/>
-    <p:sldId id="259" r:id="rId11"/>
+    <p:sldId id="258" r:id="rId9"/>
+    <p:sldId id="259" r:id="rId10"/>
     <p:sldId id="260" r:id="rId12"/>
     <p:sldId id="261" r:id="rId13"/>
     <p:sldId id="262" r:id="rId14"/>
@@ -516,43 +516,47 @@
           <a:lstStyle/>
           <a:p>
             <a:r>
-              <a:t>TEXTO COMPLETO DE LA LÁMINA (se proyecta resumido):</a:t>
-            </a:r>
-          </a:p>
-          <a:p/>
-          <a:p>
-            <a:r>
-              <a:t>Tema de hoy: Avance proyecto · la base de la clínica</a:t>
-            </a:r>
-          </a:p>
-          <a:p/>
-          <a:p>
-            <a:r>
-              <a:t>Herramienta: Live SQL / DB Fiddle + draw.io · Bloque 120 min</a:t>
-            </a:r>
-          </a:p>
-          <a:p/>
-          <a:p>
-            <a:r>
-              <a:t>Gratis + navegador · free tier · sin software de pago obligatorio.</a:t>
-            </a:r>
-          </a:p>
-          <a:p/>
-          <a:p>
-            <a:r>
-              <a:t>Recorrido: teoría del tema, una lámina por concepto, y demo del docente sobre la base de la clínica.</a:t>
-            </a:r>
-          </a:p>
-          <a:p/>
-          <a:p>
-            <a:r>
-              <a:t>Cada lámina se sostiene sola: sirve para repasar aunque hayas faltado.</a:t>
-            </a:r>
-          </a:p>
-          <a:p/>
-          <a:p>
-            <a:r>
-              <a:t>Conceptos de hoy: Que es una revision tecnica, y con que producto se sale · Lo que se audita es la coherencia entre piezas · Verificaciones uno y dos · Verificacion tres.</a:t>
+              <a:t>DESARROLLO (para explicarlo, no se proyecta):</a:t>
+            </a:r>
+          </a:p>
+          <a:p>
+            <a:r>
+              <a:t>Una revision tecnica es una reunion con un proposito unico: encontrar defectos en un artefacto antes de que cuesten caro, y salir con un producto escrito.</a:t>
+            </a:r>
+          </a:p>
+          <a:p>
+            <a:r>
+              <a:t>No es una reunion de avance, no es una calificacion y no es una demostracion para lucirse.</a:t>
+            </a:r>
+          </a:p>
+          <a:p>
+            <a:r>
+              <a:t>La practica tiene nombres y roles establecidos desde hace decadas en ingenieria de software: el autor presenta, uno o mas revisores buscan defectos, un moderador cuida el tiempo y el tono, y un escriba registra los hallazgos.</a:t>
+            </a:r>
+          </a:p>
+          <a:p>
+            <a:r>
+              <a:t>El estandar clasico, IEEE 1028, distingue la inspeccion (formal, con lista de verificacion y metricas), el walkthrough (el autor guia y explica) y la revision tecnica propiamente dicha (los pares evaluan si el artefacto sirve para su proposito).</a:t>
+            </a:r>
+          </a:p>
+          <a:p>
+            <a:r>
+              <a:t>NOTAS:</a:t>
+            </a:r>
+          </a:p>
+          <a:p>
+            <a:r>
+              <a:t>Lo que se hace hoy es una revision tecnica con lista de verificacion, comprimida a diez minutos por estudiante.</a:t>
+            </a:r>
+          </a:p>
+          <a:p>
+            <a:r>
+              <a:t>Dos reglas gobiernan la sesion y hay que decirlas en voz alta antes de empezar: se revisa el artefacto y no la persona, y no se resuelve el problema dentro de la revision, solo se registra.</a:t>
+            </a:r>
+          </a:p>
+          <a:p>
+            <a:r>
+              <a:t>Un estudiante que se pone a corregir el DDL en vivo consume el tiempo de los demas y sale con un hallazgo menos que si hubiera seguido escuchando.</a:t>
             </a:r>
           </a:p>
         </p:txBody>
@@ -627,22 +631,22 @@
           </a:p>
           <a:p>
             <a:r>
-              <a:t>Una revision tecnica es una reunion con un proposito unico: encontrar defectos en un artefacto antes de que cuesten caro, y salir con un producto escrito.</a:t>
-            </a:r>
-          </a:p>
-          <a:p>
-            <a:r>
-              <a:t>No es una reunion de avance, no es una calificacion y no es una demostracion para lucirse.</a:t>
-            </a:r>
-          </a:p>
-          <a:p>
-            <a:r>
-              <a:t>La practica tiene nombres y roles establecidos desde hace decadas en ingenieria de software: el autor presenta, uno o mas revisores buscan defectos, un moderador cuida el tiempo y el tono, y un escriba registra los hallazgos.</a:t>
-            </a:r>
-          </a:p>
-          <a:p>
-            <a:r>
-              <a:t>El estandar clasico, IEEE 1028, distingue la inspeccion (formal, con lista de verificacion y metricas), el walkthrough (el autor guia y explica) y la revision tecnica propiamente dicha (los pares evaluan si el artefacto sirve para su proposito).</a:t>
+              <a:t>Un artefacto es cualquier producto de trabajo: el diagrama entidad-relacion, el script DDL, la matriz de roles, los procedimientos, el informe de optimizacion.</a:t>
+            </a:r>
+          </a:p>
+          <a:p>
+            <a:r>
+              <a:t>Es perfectamente posible que un estudiante tenga un ER bien dibujado, un DDL que ejecuta sin errores</a:t>
+            </a:r>
+          </a:p>
+          <a:p>
+            <a:r>
+              <a:t>Y que ambos describan bases de datos distintas, porque el ER se dibujo en la Clase 1 y el DDL se fue parchando en las Clases 3 a 8 sin volver a actualizar el diagrama.</a:t>
+            </a:r>
+          </a:p>
+          <a:p>
+            <a:r>
+              <a:t>Cada una toma dos o tres minutos si se ejecuta con criterio.</a:t>
             </a:r>
           </a:p>
           <a:p>
@@ -652,17 +656,27 @@
           </a:p>
           <a:p>
             <a:r>
-              <a:t>Lo que se hace hoy es una revision tecnica con lista de verificacion, comprimida a diez minutos por estudiante.</a:t>
-            </a:r>
-          </a:p>
-          <a:p>
-            <a:r>
-              <a:t>Dos reglas gobiernan la sesion y hay que decirlas en voz alta antes de empezar: se revisa el artefacto y no la persona, y no se resuelve el problema dentro de la revision, solo se registra.</a:t>
-            </a:r>
-          </a:p>
-          <a:p>
-            <a:r>
-              <a:t>Un estudiante que se pone a corregir el DDL en vivo consume el tiempo de los demas y sale con un hallazgo menos que si hubiera seguido escuchando.</a:t>
+              <a:t>Lo que se audita en una base de datos no es cada pieza por separado sino la coherencia entre piezas.</a:t>
+            </a:r>
+          </a:p>
+          <a:p>
+            <a:r>
+              <a:t>Coherencia significa que todas esas piezas describen el mismo sistema.</a:t>
+            </a:r>
+          </a:p>
+          <a:p>
+            <a:r>
+              <a:t>Esa divergencia es el hallazgo mas comun del checkpoint y tambien el mas facil de detectar si se sabe donde mirar.</a:t>
+            </a:r>
+          </a:p>
+          <a:p>
+            <a:r>
+              <a:t>Las cuatro verificaciones cruzadas que el docente debe correr son: que el DDL corresponda al ER, que los GRANT correspondan a los roles declarados, que los procedimientos listados existan y sean invocables, y que la optimizacion tenga medicion antes y despues.</a:t>
+            </a:r>
+          </a:p>
+          <a:p>
+            <a:r>
+              <a:t>Fuera de la lamina (habla de la practica): Cada una toma dos o tres minutos si se ejecuta con criterio, y juntas cubren los cuatro criterios de rubrica que mas peso tienen.</a:t>
             </a:r>
           </a:p>
         </p:txBody>
@@ -737,22 +751,37 @@
           </a:p>
           <a:p>
             <a:r>
-              <a:t>Un artefacto es cualquier producto de trabajo: el diagrama entidad-relacion, el script DDL, la matriz de roles, los procedimientos, el informe de optimizacion.</a:t>
-            </a:r>
-          </a:p>
-          <a:p>
-            <a:r>
-              <a:t>Es perfectamente posible que un estudiante tenga un ER bien dibujado, un DDL que ejecuta sin errores</a:t>
-            </a:r>
-          </a:p>
-          <a:p>
-            <a:r>
-              <a:t>Y que ambos describan bases de datos distintas, porque el ER se dibujo en la Clase 1 y el DDL se fue parchando en las Clases 3 a 8 sin volver a actualizar el diagrama.</a:t>
-            </a:r>
-          </a:p>
-          <a:p>
-            <a:r>
-              <a:t>Cada una toma dos o tres minutos si se ejecuta con criterio.</a:t>
+              <a:t>Se recorre el diagrama entidad por entidad y se busca su CREATE TABLE: toda entidad sin tabla es un hallazgo.</a:t>
+            </a:r>
+          </a:p>
+          <a:p>
+            <a:r>
+              <a:t>Luego se recorre en sentido contrario, porque es el que nadie hace: toda tabla sin entidad en el diagrama tambien es un hallazgo, ya que significa que el modelo crecio sin registrarse.</a:t>
+            </a:r>
+          </a:p>
+          <a:p>
+            <a:r>
+              <a:t>Si el ER dice que una cita pertenece a exactamente una mascota, el DDL debe tener id_mascota con NOT NULL y una FOREIGN KEY hacia Mascota</a:t>
+            </a:r>
+          </a:p>
+          <a:p>
+            <a:r>
+              <a:t>Si dice que un dueno puede tener varias mascotas pero una mascota tiene un solo dueno, la clave foranea vive en Mascota y no en Dueno.</a:t>
+            </a:r>
+          </a:p>
+          <a:p>
+            <a:r>
+              <a:t>Una cardinalidad dibujada que no tiene su restriccion correspondiente en el DDL es decoracion, no modelo.</a:t>
+            </a:r>
+          </a:p>
+          <a:p>
+            <a:r>
+              <a:t>Se toma la matriz de la Clase 2 y se comprueba que los cuatro roles declarados existan en el script y que las celdas se hayan traducido en sentencias.</a:t>
+            </a:r>
+          </a:p>
+          <a:p>
+            <a:r>
+              <a:t>El hallazgo tipico aqui es el rol AUDITOR que en la matriz solo lee y en el script recibio privilegios de escritura, porque alguien copio el bloque de RECEPCION y cambio unicamente el nombre.</a:t>
             </a:r>
           </a:p>
           <a:p>
@@ -762,27 +791,17 @@
           </a:p>
           <a:p>
             <a:r>
-              <a:t>Lo que se audita en una base de datos no es cada pieza por separado sino la coherencia entre piezas.</a:t>
-            </a:r>
-          </a:p>
-          <a:p>
-            <a:r>
-              <a:t>Coherencia significa que todas esas piezas describen el mismo sistema.</a:t>
-            </a:r>
-          </a:p>
-          <a:p>
-            <a:r>
-              <a:t>Esa divergencia es el hallazgo mas comun del checkpoint y tambien el mas facil de detectar si se sabe donde mirar.</a:t>
-            </a:r>
-          </a:p>
-          <a:p>
-            <a:r>
-              <a:t>Las cuatro verificaciones cruzadas que el docente debe correr son: que el DDL corresponda al ER, que los GRANT correspondan a los roles declarados, que los procedimientos listados existan y sean invocables, y que la optimizacion tenga medicion antes y despues.</a:t>
-            </a:r>
-          </a:p>
-          <a:p>
-            <a:r>
-              <a:t>Fuera de la lamina (habla de la practica): Cada una toma dos o tres minutos si se ejecuta con criterio, y juntas cubren los cuatro criterios de rubrica que mas peso tienen.</a:t>
+              <a:t>Verificacion uno, ER contra DDL.</a:t>
+            </a:r>
+          </a:p>
+          <a:p>
+            <a:r>
+              <a:t>Despues se verifican las relaciones.</a:t>
+            </a:r>
+          </a:p>
+          <a:p>
+            <a:r>
+              <a:t>Verificacion dos, roles contra GRANT.</a:t>
             </a:r>
           </a:p>
         </p:txBody>
@@ -857,37 +876,37 @@
           </a:p>
           <a:p>
             <a:r>
-              <a:t>Se recorre el diagrama entidad por entidad y se busca su CREATE TABLE: toda entidad sin tabla es un hallazgo.</a:t>
-            </a:r>
-          </a:p>
-          <a:p>
-            <a:r>
-              <a:t>Luego se recorre en sentido contrario, porque es el que nadie hace: toda tabla sin entidad en el diagrama tambien es un hallazgo, ya que significa que el modelo crecio sin registrarse.</a:t>
-            </a:r>
-          </a:p>
-          <a:p>
-            <a:r>
-              <a:t>Si el ER dice que una cita pertenece a exactamente una mascota, el DDL debe tener id_mascota con NOT NULL y una FOREIGN KEY hacia Mascota</a:t>
-            </a:r>
-          </a:p>
-          <a:p>
-            <a:r>
-              <a:t>Si dice que un dueno puede tener varias mascotas pero una mascota tiene un solo dueno, la clave foranea vive en Mascota y no en Dueno.</a:t>
-            </a:r>
-          </a:p>
-          <a:p>
-            <a:r>
-              <a:t>Una cardinalidad dibujada que no tiene su restriccion correspondiente en el DDL es decoracion, no modelo.</a:t>
-            </a:r>
-          </a:p>
-          <a:p>
-            <a:r>
-              <a:t>Se toma la matriz de la Clase 2 y se comprueba que los cuatro roles declarados existan en el script y que las celdas se hayan traducido en sentencias.</a:t>
-            </a:r>
-          </a:p>
-          <a:p>
-            <a:r>
-              <a:t>El hallazgo tipico aqui es el rol AUDITOR que en la matriz solo lee y en el script recibio privilegios de escritura, porque alguien copio el bloque de RECEPCION y cambio unicamente el nombre.</a:t>
+              <a:t>La distincion que separa a un estudiante que va bien de uno que va mal es esta: un procedimiento que compila no es un procedimiento que funciona.</a:t>
+            </a:r>
+          </a:p>
+          <a:p>
+            <a:r>
+              <a:t>Primero CALL sp_agendar_cita con datos validos, que debe insertar la cita y devolver confirmacion.</a:t>
+            </a:r>
+          </a:p>
+          <a:p>
+            <a:r>
+              <a:t>Segundo, CALL sp_agendar_cita con el caso invalido que el propio estudiante declaro, es decir una mascota inactiva o un horario ya tomado, que debe devolver el mensaje de negocio y no un error crudo del motor.</a:t>
+            </a:r>
+          </a:p>
+          <a:p>
+            <a:r>
+              <a:t>Si el estudiante no puede mostrar la segunda ejecucion.</a:t>
+            </a:r>
+          </a:p>
+          <a:p>
+            <a:r>
+              <a:t>Un informe de optimizacion sin medicion no es optimizacion, es una opinion.</a:t>
+            </a:r>
+          </a:p>
+          <a:p>
+            <a:r>
+              <a:t>Si el estudiante creo tres indices y no puede senalar cual consulta aprovecha cada uno, el hallazgo es que indexo por costumbre y no por medicion, que es exactamente el error que se analiza como caso real en la Clase 13.</a:t>
+            </a:r>
+          </a:p>
+          <a:p>
+            <a:r>
+              <a:t>Ejemplo: un sp_agendar_cita que compila pero no valida la mascota inactiva pasa la primera ejecucion y falla la segunda, la que deberia haber sido rechazada.</a:t>
             </a:r>
           </a:p>
           <a:p>
@@ -897,17 +916,27 @@
           </a:p>
           <a:p>
             <a:r>
-              <a:t>Verificacion uno, ER contra DDL.</a:t>
-            </a:r>
-          </a:p>
-          <a:p>
-            <a:r>
-              <a:t>Despues se verifican las relaciones.</a:t>
-            </a:r>
-          </a:p>
-          <a:p>
-            <a:r>
-              <a:t>Verificacion dos, roles contra GRANT.</a:t>
+              <a:t>Verificacion tres, procedimientos invocables.</a:t>
+            </a:r>
+          </a:p>
+          <a:p>
+            <a:r>
+              <a:t>La prueba de humo dura un minuto y consiste en pedir dos ejecuciones y no una.</a:t>
+            </a:r>
+          </a:p>
+          <a:p>
+            <a:r>
+              <a:t>Verificacion cuatro, optimizacion.</a:t>
+            </a:r>
+          </a:p>
+          <a:p>
+            <a:r>
+              <a:t>Se exige la consulta original, el plan de ejecucion que la acompanaba, el cambio aplicado (indice creado o consulta reescrita) y el plan despues, mostrando que el motor paso de recorrido completo de tabla a acceso por indice.</a:t>
+            </a:r>
+          </a:p>
+          <a:p>
+            <a:r>
+              <a:t>Fuera de la lamina (habla de la practica): Si el estudiante no puede mostrar la segunda ejecucion, el procedimiento no tiene manejo de errores y eso resta puntos en los 25 de objetos programables.</a:t>
             </a:r>
           </a:p>
         </p:txBody>
@@ -982,37 +1011,32 @@
           </a:p>
           <a:p>
             <a:r>
-              <a:t>La distincion que separa a un estudiante que va bien de uno que va mal es esta: un procedimiento que compila no es un procedimiento que funciona.</a:t>
-            </a:r>
-          </a:p>
-          <a:p>
-            <a:r>
-              <a:t>Primero CALL sp_agendar_cita con datos validos, que debe insertar la cita y devolver confirmacion.</a:t>
-            </a:r>
-          </a:p>
-          <a:p>
-            <a:r>
-              <a:t>Segundo, CALL sp_agendar_cita con el caso invalido que el propio estudiante declaro, es decir una mascota inactiva o un horario ya tomado, que debe devolver el mensaje de negocio y no un error crudo del motor.</a:t>
-            </a:r>
-          </a:p>
-          <a:p>
-            <a:r>
-              <a:t>Si el estudiante no puede mostrar la segunda ejecucion.</a:t>
-            </a:r>
-          </a:p>
-          <a:p>
-            <a:r>
-              <a:t>Un informe de optimizacion sin medicion no es optimizacion, es una opinion.</a:t>
-            </a:r>
-          </a:p>
-          <a:p>
-            <a:r>
-              <a:t>Si el estudiante creo tres indices y no puede senalar cual consulta aprovecha cada uno, el hallazgo es que indexo por costumbre y no por medicion, que es exactamente el error que se analiza como caso real en la Clase 13.</a:t>
-            </a:r>
-          </a:p>
-          <a:p>
-            <a:r>
-              <a:t>Ejemplo: un sp_agendar_cita que compila pero no valida la mascota inactiva pasa la primera ejecucion y falla la segunda, la que deberia haber sido rechazada.</a:t>
+              <a:t>Scope creep es el crecimiento no controlado del alcance: funcionalidad que se va agregando sin que nadie decida agregarla y sin que se quite nada a cambio.</a:t>
+            </a:r>
+          </a:p>
+          <a:p>
+            <a:r>
+              <a:t>En un proyecto de base de datos tiene un sintoma cuantificable, que es el numero de entidades. la clínica pide seis entidades minimas (Dueno, Mascota, Veterinario, Cita</a:t>
+            </a:r>
+          </a:p>
+          <a:p>
+            <a:r>
+              <a:t>Insumo y Factura con su detalle) y el rango sano al llegar a la Clase 11 es de seis a nueve, contando una o dos ampliaciones propias justificadas como Consulta o historial clinico.</a:t>
+            </a:r>
+          </a:p>
+          <a:p>
+            <a:r>
+              <a:t>Un estudiante que llega con quince entidades porque agrego proveedores, inventario multialmacen, portal para duenos y notificaciones no esta adelantado: esta repartiendo el mismo esfuerzo en el doble de superficie</a:t>
+            </a:r>
+          </a:p>
+          <a:p>
+            <a:r>
+              <a:t>Y termina con quince tablas vacias en vez de siete tablas con procedimientos probados.</a:t>
+            </a:r>
+          </a:p>
+          <a:p>
+            <a:r>
+              <a:t>La accion correctiva es explicita y se registra en el acta: las entidades que sobran se mueven a una seccion de alcance futuro del informe, con una frase que diga por que quedaron fuera.</a:t>
             </a:r>
           </a:p>
           <a:p>
@@ -1022,27 +1046,22 @@
           </a:p>
           <a:p>
             <a:r>
-              <a:t>Verificacion tres, procedimientos invocables.</a:t>
-            </a:r>
-          </a:p>
-          <a:p>
-            <a:r>
-              <a:t>La prueba de humo dura un minuto y consiste en pedir dos ejecuciones y no una.</a:t>
-            </a:r>
-          </a:p>
-          <a:p>
-            <a:r>
-              <a:t>Verificacion cuatro, optimizacion.</a:t>
-            </a:r>
-          </a:p>
-          <a:p>
-            <a:r>
-              <a:t>Se exige la consulta original, el plan de ejecucion que la acompanaba, el cambio aplicado (indice creado o consulta reescrita) y el plan despues, mostrando que el motor paso de recorrido completo de tabla a acceso por indice.</a:t>
-            </a:r>
-          </a:p>
-          <a:p>
-            <a:r>
-              <a:t>Fuera de la lamina (habla de la practica): Si el estudiante no puede mostrar la segunda ejecucion, el procedimiento no tiene manejo de errores y eso resta puntos en los 25 de objetos programables.</a:t>
+              <a:t>Existe tambien el problema inverso y menos visible.</a:t>
+            </a:r>
+          </a:p>
+          <a:p>
+            <a:r>
+              <a:t>Fuera de la lamina (habla de la practica): La rubrica no da puntos por cantidad de tablas: da 20 por modelo coherente y 25 por objetos programables con casos de prueba.</a:t>
+            </a:r>
+          </a:p>
+          <a:p>
+            <a:r>
+              <a:t>Fuera de la lamina (habla de la practica): Eso no resta puntos, al contrario, declarar el limite es una senal de madurez que se valora en la sustentacion.</a:t>
+            </a:r>
+          </a:p>
+          <a:p>
+            <a:r>
+              <a:t>Fuera de la lamina (habla de la practica): Existe tambien el problema inverso y menos visible: el estudiante que recorto tanto que ya no tiene material para los 25 puntos de procedimientos, funciones y disparadores, y ese caso tambien es un hallazgo que hay que escribir.</a:t>
             </a:r>
           </a:p>
         </p:txBody>
@@ -1117,32 +1136,47 @@
           </a:p>
           <a:p>
             <a:r>
-              <a:t>Scope creep es el crecimiento no controlado del alcance: funcionalidad que se va agregando sin que nadie decida agregarla y sin que se quite nada a cambio.</a:t>
-            </a:r>
-          </a:p>
-          <a:p>
-            <a:r>
-              <a:t>En un proyecto de base de datos tiene un sintoma cuantificable, que es el numero de entidades. la clínica pide seis entidades minimas (Dueno, Mascota, Veterinario, Cita</a:t>
-            </a:r>
-          </a:p>
-          <a:p>
-            <a:r>
-              <a:t>Insumo y Factura con su detalle) y el rango sano al llegar a la Clase 11 es de seis a nueve, contando una o dos ampliaciones propias justificadas como Consulta o historial clinico.</a:t>
-            </a:r>
-          </a:p>
-          <a:p>
-            <a:r>
-              <a:t>Un estudiante que llega con quince entidades porque agrego proveedores, inventario multialmacen, portal para duenos y notificaciones no esta adelantado: esta repartiendo el mismo esfuerzo en el doble de superficie</a:t>
-            </a:r>
-          </a:p>
-          <a:p>
-            <a:r>
-              <a:t>Y termina con quince tablas vacias en vez de siete tablas con procedimientos probados.</a:t>
-            </a:r>
-          </a:p>
-          <a:p>
-            <a:r>
-              <a:t>La accion correctiva es explicita y se registra en el acta: las entidades que sobran se mueven a una seccion de alcance futuro del informe, con una frase que diga por que quedaron fuera.</a:t>
+              <a:t>La retroalimentacion util tiene una anatomia fija, y conviene que el docente la escriba siempre igual porque asi el acta se vuelve una lista de tareas y no un desahogo.</a:t>
+            </a:r>
+          </a:p>
+          <a:p>
+            <a:r>
+              <a:t>Un hallazgo bien formulado tiene cinco partes: artefacto, observacion verificable, impacto, accion y responsable con fecha.</a:t>
+            </a:r>
+          </a:p>
+          <a:p>
+            <a:r>
+              <a:t>Retroalimentacion inutil: «el modelo esta flojo, mejorenlo»; no dice que mirar ni como saber cuando esta resuelto.</a:t>
+            </a:r>
+          </a:p>
+          <a:p>
+            <a:r>
+              <a:t>Retroalimentacion accionable: «Artefacto: script DDL.</a:t>
+            </a:r>
+          </a:p>
+          <a:p>
+            <a:r>
+              <a:t>Observacion: la tabla detalle_factura no tiene FOREIGN KEY hacia insumo, aunque el ER dibuja la relacion.</a:t>
+            </a:r>
+          </a:p>
+          <a:p>
+            <a:r>
+              <a:t>Impacto: se pueden insertar detalles con insumos que no existen.</a:t>
+            </a:r>
+          </a:p>
+          <a:p>
+            <a:r>
+              <a:t>Accion: agregar la restriccion y volver a ejecutar el script completo desde cero en un entorno limpio.</a:t>
+            </a:r>
+          </a:p>
+          <a:p>
+            <a:r>
+              <a:t>Fecha: antes de la Clase 12.» La diferencia entre las dos no es cortesia, es verificabilidad: el segundo hallazgo se puede cerrar y cualquiera puede comprobar que se cerro.</a:t>
+            </a:r>
+          </a:p>
+          <a:p>
+            <a:r>
+              <a:t>La regla de dosificacion es de tres a cinco hallazgos por estudiante.</a:t>
             </a:r>
           </a:p>
           <a:p>
@@ -1152,22 +1186,22 @@
           </a:p>
           <a:p>
             <a:r>
-              <a:t>Existe tambien el problema inverso y menos visible.</a:t>
-            </a:r>
-          </a:p>
-          <a:p>
-            <a:r>
-              <a:t>Fuera de la lamina (habla de la practica): La rubrica no da puntos por cantidad de tablas: da 20 por modelo coherente y 25 por objetos programables con casos de prueba.</a:t>
-            </a:r>
-          </a:p>
-          <a:p>
-            <a:r>
-              <a:t>Fuera de la lamina (habla de la practica): Eso no resta puntos, al contrario, declarar el limite es una senal de madurez que se valora en la sustentacion.</a:t>
-            </a:r>
-          </a:p>
-          <a:p>
-            <a:r>
-              <a:t>Fuera de la lamina (habla de la practica): Existe tambien el problema inverso y menos visible: el estudiante que recorto tanto que ya no tiene material para los 25 puntos de procedimientos, funciones y disparadores, y ese caso tambien es un hallazgo que hay que escribir.</a:t>
+              <a:t>Comparense los dos extremos.</a:t>
+            </a:r>
+          </a:p>
+          <a:p>
+            <a:r>
+              <a:t>Responsable: Carlos.</a:t>
+            </a:r>
+          </a:p>
+          <a:p>
+            <a:r>
+              <a:t>Fuera de la lamina (habla de la practica): Impacto: se pueden insertar detalles con insumos que no existen; afecta los 20 puntos de modelo coherente.</a:t>
+            </a:r>
+          </a:p>
+          <a:p>
+            <a:r>
+              <a:t>Fuera de la lamina (habla de la practica): La regla de dosificacion es de tres a cinco hallazgos por estudiante, priorizados por puntos de rubrica en riesgo; mas de cinco desmoraliza y nadie los cierra, y menos de tres casi siempre significa que la revision fue superficial.</a:t>
             </a:r>
           </a:p>
         </p:txBody>
@@ -1242,47 +1276,42 @@
           </a:p>
           <a:p>
             <a:r>
-              <a:t>La retroalimentacion util tiene una anatomia fija, y conviene que el docente la escriba siempre igual porque asi el acta se vuelve una lista de tareas y no un desahogo.</a:t>
-            </a:r>
-          </a:p>
-          <a:p>
-            <a:r>
-              <a:t>Un hallazgo bien formulado tiene cinco partes: artefacto, observacion verificable, impacto, accion y responsable con fecha.</a:t>
-            </a:r>
-          </a:p>
-          <a:p>
-            <a:r>
-              <a:t>Retroalimentacion inutil: «el modelo esta flojo, mejorenlo»; no dice que mirar ni como saber cuando esta resuelto.</a:t>
-            </a:r>
-          </a:p>
-          <a:p>
-            <a:r>
-              <a:t>Retroalimentacion accionable: «Artefacto: script DDL.</a:t>
-            </a:r>
-          </a:p>
-          <a:p>
-            <a:r>
-              <a:t>Observacion: la tabla detalle_factura no tiene FOREIGN KEY hacia insumo, aunque el ER dibuja la relacion.</a:t>
-            </a:r>
-          </a:p>
-          <a:p>
-            <a:r>
-              <a:t>Impacto: se pueden insertar detalles con insumos que no existen.</a:t>
-            </a:r>
-          </a:p>
-          <a:p>
-            <a:r>
-              <a:t>Accion: agregar la restriccion y volver a ejecutar el script completo desde cero en un entorno limpio.</a:t>
-            </a:r>
-          </a:p>
-          <a:p>
-            <a:r>
-              <a:t>Fecha: antes de la Clase 12.» La diferencia entre las dos no es cortesia, es verificabilidad: el segundo hallazgo se puede cerrar y cualquiera puede comprobar que se cerro.</a:t>
-            </a:r>
-          </a:p>
-          <a:p>
-            <a:r>
-              <a:t>La regla de dosificacion es de tres a cinco hallazgos por estudiante.</a:t>
+              <a:t>Un checkpoint sin hallazgos concretos es un checkpoint desperdiciado, y esa afirmacion merece justificacion porque suena severa.</a:t>
+            </a:r>
+          </a:p>
+          <a:p>
+            <a:r>
+              <a:t>El unico valor de un punto de control intermedio es que todavia existe tiempo para corregir, y ese valor se realiza solo si de la sesion sale una lista escrita de cosas por corregir.</a:t>
+            </a:r>
+          </a:p>
+          <a:p>
+            <a:r>
+              <a:t>Cuando el docente dice «todo bien, sigan asi», el estudiante interpreta legitimamente que su trabajo esta aprobado, deja de revisarlo, y el defecto reaparece en la entrega final cuando ya no hay clases para arreglarlo: es un costo diferido, no un ahorro.</a:t>
+            </a:r>
+          </a:p>
+          <a:p>
+            <a:r>
+              <a:t>La primera: «esto tiene nota?».</a:t>
+            </a:r>
+          </a:p>
+          <a:p>
+            <a:r>
+              <a:t>La segunda: «si quien me audita encuentra fallas, me baja la nota?».</a:t>
+            </a:r>
+          </a:p>
+          <a:p>
+            <a:r>
+              <a:t>Y revisar el trabajo de otro tiene un beneficio propio bien documentado: los defectos ajenos se ven mucho mas rapido que los propios, y casi siempre quien audita vuelve a su carpeta y arregla en silencio el mismo problema que acaba de senalar.</a:t>
+            </a:r>
+          </a:p>
+          <a:p>
+            <a:r>
+              <a:t>Todo esto se apoya en lo hecho hasta la Clase 10 (el informe de escenarios de concurrencia es una de las evidencias que hoy se audita) y alimenta directamente la Clase 12</a:t>
+            </a:r>
+          </a:p>
+          <a:p>
+            <a:r>
+              <a:t>Donde el contrato de operaciones solo puede escribirse sobre procedimientos que existan y funcionen, y la Clase 15, donde se sustenta.</a:t>
             </a:r>
           </a:p>
           <a:p>
@@ -1292,141 +1321,6 @@
           </a:p>
           <a:p>
             <a:r>
-              <a:t>Comparense los dos extremos.</a:t>
-            </a:r>
-          </a:p>
-          <a:p>
-            <a:r>
-              <a:t>Responsable: Carlos.</a:t>
-            </a:r>
-          </a:p>
-          <a:p>
-            <a:r>
-              <a:t>Fuera de la lamina (habla de la practica): Impacto: se pueden insertar detalles con insumos que no existen; afecta los 20 puntos de modelo coherente.</a:t>
-            </a:r>
-          </a:p>
-          <a:p>
-            <a:r>
-              <a:t>Fuera de la lamina (habla de la practica): La regla de dosificacion es de tres a cinco hallazgos por estudiante, priorizados por puntos de rubrica en riesgo; mas de cinco desmoraliza y nadie los cierra, y menos de tres casi siempre significa que la revision fue superficial.</a:t>
-            </a:r>
-          </a:p>
-        </p:txBody>
-      </p:sp>
-      <p:sp>
-        <p:nvSpPr>
-          <p:cNvPr id="4" name="Slide Number Placeholder 3"/>
-          <p:cNvSpPr>
-            <a:spLocks noGrp="1"/>
-          </p:cNvSpPr>
-          <p:nvPr>
-            <p:ph type="sldNum" idx="5" sz="quarter"/>
-          </p:nvPr>
-        </p:nvSpPr>
-        <p:spPr/>
-      </p:sp>
-    </p:spTree>
-  </p:cSld>
-  <p:clrMapOvr>
-    <a:masterClrMapping/>
-  </p:clrMapOvr>
-</p:notes>
-</file>
-
-<file path=ppt/notesSlides/notesSlide8.xml><?xml version="1.0" encoding="utf-8"?>
-<p:notes xmlns:a="http://schemas.openxmlformats.org/drawingml/2006/main" xmlns:p="http://schemas.openxmlformats.org/presentationml/2006/main" xmlns:r="http://schemas.openxmlformats.org/officeDocument/2006/relationships">
-  <p:cSld>
-    <p:spTree>
-      <p:nvGrpSpPr>
-        <p:cNvPr id="1" name=""/>
-        <p:cNvGrpSpPr/>
-        <p:nvPr/>
-      </p:nvGrpSpPr>
-      <p:grpSpPr>
-        <a:xfrm>
-          <a:off x="0" y="0"/>
-          <a:ext cx="0" cy="0"/>
-          <a:chOff x="0" y="0"/>
-          <a:chExt cx="0" cy="0"/>
-        </a:xfrm>
-      </p:grpSpPr>
-      <p:sp>
-        <p:nvSpPr>
-          <p:cNvPr id="2" name="Slide Image Placeholder 1"/>
-          <p:cNvSpPr>
-            <a:spLocks noGrp="1"/>
-          </p:cNvSpPr>
-          <p:nvPr>
-            <p:ph type="sldImg" idx="2"/>
-          </p:nvPr>
-        </p:nvSpPr>
-        <p:spPr/>
-      </p:sp>
-      <p:sp>
-        <p:nvSpPr>
-          <p:cNvPr id="3" name="Notes Placeholder 2"/>
-          <p:cNvSpPr>
-            <a:spLocks noGrp="1"/>
-          </p:cNvSpPr>
-          <p:nvPr>
-            <p:ph type="body" idx="3" sz="quarter"/>
-          </p:nvPr>
-        </p:nvSpPr>
-        <p:spPr/>
-        <p:txBody>
-          <a:bodyPr/>
-          <a:lstStyle/>
-          <a:p>
-            <a:r>
-              <a:t>DESARROLLO (para explicarlo, no se proyecta):</a:t>
-            </a:r>
-          </a:p>
-          <a:p>
-            <a:r>
-              <a:t>Un checkpoint sin hallazgos concretos es un checkpoint desperdiciado, y esa afirmacion merece justificacion porque suena severa.</a:t>
-            </a:r>
-          </a:p>
-          <a:p>
-            <a:r>
-              <a:t>El unico valor de un punto de control intermedio es que todavia existe tiempo para corregir, y ese valor se realiza solo si de la sesion sale una lista escrita de cosas por corregir.</a:t>
-            </a:r>
-          </a:p>
-          <a:p>
-            <a:r>
-              <a:t>Cuando el docente dice «todo bien, sigan asi», el estudiante interpreta legitimamente que su trabajo esta aprobado, deja de revisarlo, y el defecto reaparece en la entrega final cuando ya no hay clases para arreglarlo: es un costo diferido, no un ahorro.</a:t>
-            </a:r>
-          </a:p>
-          <a:p>
-            <a:r>
-              <a:t>La primera: «esto tiene nota?».</a:t>
-            </a:r>
-          </a:p>
-          <a:p>
-            <a:r>
-              <a:t>La segunda: «si quien me audita encuentra fallas, me baja la nota?».</a:t>
-            </a:r>
-          </a:p>
-          <a:p>
-            <a:r>
-              <a:t>Y revisar el trabajo de otro tiene un beneficio propio bien documentado: los defectos ajenos se ven mucho mas rapido que los propios, y casi siempre quien audita vuelve a su carpeta y arregla en silencio el mismo problema que acaba de senalar.</a:t>
-            </a:r>
-          </a:p>
-          <a:p>
-            <a:r>
-              <a:t>Todo esto se apoya en lo hecho hasta la Clase 10 (el informe de escenarios de concurrencia es una de las evidencias que hoy se audita) y alimenta directamente la Clase 12</a:t>
-            </a:r>
-          </a:p>
-          <a:p>
-            <a:r>
-              <a:t>Donde el contrato de operaciones solo puede escribirse sobre procedimientos que existan y funcionen, y la Clase 15, donde se sustenta.</a:t>
-            </a:r>
-          </a:p>
-          <a:p>
-            <a:r>
-              <a:t>NOTAS:</a:t>
-            </a:r>
-          </a:p>
-          <a:p>
-            <a:r>
               <a:t>Aqui aparecen las dos preguntas previsibles del estudiante.</a:t>
             </a:r>
           </a:p>
@@ -1438,106 +1332,6 @@
           <a:p>
             <a:r>
               <a:t>Fuera de la lamina (habla de la practica): No, porque el auditor par no califica.</a:t>
-            </a:r>
-          </a:p>
-        </p:txBody>
-      </p:sp>
-      <p:sp>
-        <p:nvSpPr>
-          <p:cNvPr id="4" name="Slide Number Placeholder 3"/>
-          <p:cNvSpPr>
-            <a:spLocks noGrp="1"/>
-          </p:cNvSpPr>
-          <p:nvPr>
-            <p:ph type="sldNum" idx="5" sz="quarter"/>
-          </p:nvPr>
-        </p:nvSpPr>
-        <p:spPr/>
-      </p:sp>
-    </p:spTree>
-  </p:cSld>
-  <p:clrMapOvr>
-    <a:masterClrMapping/>
-  </p:clrMapOvr>
-</p:notes>
-</file>
-
-<file path=ppt/notesSlides/notesSlide9.xml><?xml version="1.0" encoding="utf-8"?>
-<p:notes xmlns:a="http://schemas.openxmlformats.org/drawingml/2006/main" xmlns:p="http://schemas.openxmlformats.org/presentationml/2006/main" xmlns:r="http://schemas.openxmlformats.org/officeDocument/2006/relationships">
-  <p:cSld>
-    <p:spTree>
-      <p:nvGrpSpPr>
-        <p:cNvPr id="1" name=""/>
-        <p:cNvGrpSpPr/>
-        <p:nvPr/>
-      </p:nvGrpSpPr>
-      <p:grpSpPr>
-        <a:xfrm>
-          <a:off x="0" y="0"/>
-          <a:ext cx="0" cy="0"/>
-          <a:chOff x="0" y="0"/>
-          <a:chExt cx="0" cy="0"/>
-        </a:xfrm>
-      </p:grpSpPr>
-      <p:sp>
-        <p:nvSpPr>
-          <p:cNvPr id="2" name="Slide Image Placeholder 1"/>
-          <p:cNvSpPr>
-            <a:spLocks noGrp="1"/>
-          </p:cNvSpPr>
-          <p:nvPr>
-            <p:ph type="sldImg" idx="2"/>
-          </p:nvPr>
-        </p:nvSpPr>
-        <p:spPr/>
-      </p:sp>
-      <p:sp>
-        <p:nvSpPr>
-          <p:cNvPr id="3" name="Notes Placeholder 2"/>
-          <p:cNvSpPr>
-            <a:spLocks noGrp="1"/>
-          </p:cNvSpPr>
-          <p:nvPr>
-            <p:ph type="body" idx="3" sz="quarter"/>
-          </p:nvPr>
-        </p:nvSpPr>
-        <p:spPr/>
-        <p:txBody>
-          <a:bodyPr/>
-          <a:lstStyle/>
-          <a:p>
-            <a:r>
-              <a:t>TEXTO COMPLETO DE LA LÁMINA (se proyecta resumido):</a:t>
-            </a:r>
-          </a:p>
-          <a:p/>
-          <a:p>
-            <a:r>
-              <a:t>Herramienta: Live SQL / DB Fiddle + draw.io</a:t>
-            </a:r>
-          </a:p>
-          <a:p/>
-          <a:p>
-            <a:r>
-              <a:t>Demo: Recorrido de checklist + ejemplo demo de 3 min.</a:t>
-            </a:r>
-          </a:p>
-          <a:p/>
-          <a:p>
-            <a:r>
-              <a:t>Sigan el mismo dominio de la clínica (no inventen otro caso).</a:t>
-            </a:r>
-          </a:p>
-          <a:p/>
-          <a:p>
-            <a:r>
-              <a:t>Qué observar: cada hallazgo se demuestra con una ejecucion: el DDL contra el ER y el procedimiento con un caso valido y uno invalido.</a:t>
-            </a:r>
-          </a:p>
-          <a:p/>
-          <a:p>
-            <a:r>
-              <a:t>Qué observar: un hallazgo util nombra el artefacto, el problema, su impacto en la clínica y la accion concreta que lo corrige.</a:t>
             </a:r>
           </a:p>
         </p:txBody>
@@ -7962,118 +7756,14 @@
       </p:sp>
       <p:sp>
         <p:nvSpPr>
-          <p:cNvPr id="5" name="Rounded Rectangle 4"/>
-          <p:cNvSpPr/>
-          <p:nvPr/>
-        </p:nvSpPr>
-        <p:spPr>
-          <a:xfrm>
-            <a:off x="5797149" y="1573813"/>
-            <a:ext cx="6010497" cy="4057845"/>
-          </a:xfrm>
-          <a:prstGeom prst="roundRect">
-            <a:avLst>
-              <a:gd name="adj" fmla="val 4000"/>
-            </a:avLst>
-          </a:prstGeom>
-          <a:solidFill>
-            <a:srgbClr val="E8EEF4"/>
-          </a:solidFill>
-          <a:ln>
-            <a:noFill/>
-          </a:ln>
-        </p:spPr>
-        <p:style>
-          <a:lnRef idx="1">
-            <a:schemeClr val="accent1"/>
-          </a:lnRef>
-          <a:fillRef idx="3">
-            <a:schemeClr val="accent1"/>
-          </a:fillRef>
-          <a:effectRef idx="2">
-            <a:schemeClr val="accent1"/>
-          </a:effectRef>
-          <a:fontRef idx="minor">
-            <a:schemeClr val="lt1"/>
-          </a:fontRef>
-        </p:style>
-        <p:txBody>
-          <a:bodyPr rtlCol="0" anchor="ctr"/>
-          <a:lstStyle/>
-          <a:p>
-            <a:pPr algn="ctr"/>
-          </a:p>
-        </p:txBody>
-      </p:sp>
-      <p:pic>
-        <p:nvPicPr>
-          <p:cNvPr id="6" name="Picture 5" descr="laptop-code-live-demo.jpg"/>
-          <p:cNvPicPr>
-            <a:picLocks noChangeAspect="1"/>
-          </p:cNvPicPr>
-          <p:nvPr/>
-        </p:nvPicPr>
-        <p:blipFill>
-          <a:blip r:embed="rId2"/>
-          <a:stretch>
-            <a:fillRect/>
-          </a:stretch>
-        </p:blipFill>
-        <p:spPr>
-          <a:xfrm>
-            <a:off x="5870301" y="1646965"/>
-            <a:ext cx="5864193" cy="3911541"/>
-          </a:xfrm>
-          <a:prstGeom prst="rect">
-            <a:avLst/>
-          </a:prstGeom>
-        </p:spPr>
-      </p:pic>
-      <p:sp>
-        <p:nvSpPr>
-          <p:cNvPr id="7" name="TextBox 6"/>
+          <p:cNvPr id="5" name="TextBox 4"/>
           <p:cNvSpPr txBox="1"/>
           <p:nvPr/>
         </p:nvSpPr>
         <p:spPr>
           <a:xfrm>
-            <a:off x="5870301" y="5961888"/>
-            <a:ext cx="5864193" cy="320040"/>
-          </a:xfrm>
-          <a:prstGeom prst="rect">
-            <a:avLst/>
-          </a:prstGeom>
-          <a:noFill/>
-        </p:spPr>
-        <p:txBody>
-          <a:bodyPr wrap="square">
-            <a:spAutoFit/>
-          </a:bodyPr>
-          <a:lstStyle/>
-          <a:p>
-            <a:pPr algn="ctr"/>
-            <a:r>
-              <a:rPr sz="1100" b="0" i="1">
-                <a:solidFill>
-                  <a:srgbClr val="666666"/>
-                </a:solidFill>
-                <a:latin typeface="Calibri"/>
-              </a:rPr>
-              <a:t>Foto: olia danilevich · Pexels</a:t>
-            </a:r>
-          </a:p>
-        </p:txBody>
-      </p:sp>
-      <p:sp>
-        <p:nvSpPr>
-          <p:cNvPr id="8" name="TextBox 7"/>
-          <p:cNvSpPr txBox="1"/>
-          <p:nvPr/>
-        </p:nvSpPr>
-        <p:spPr>
-          <a:xfrm>
-            <a:off x="457200" y="1353312"/>
-            <a:ext cx="5093061" cy="5047488"/>
+            <a:off x="457200" y="1170432"/>
+            <a:ext cx="11277295" cy="5230368"/>
           </a:xfrm>
           <a:prstGeom prst="rect">
             <a:avLst/>
@@ -8200,14 +7890,48 @@
                 </a:solidFill>
                 <a:latin typeface="Calibri"/>
               </a:rPr>
-              <a:t> cada hallazgo se demuestra con una ejecucion:</a:t>
-            </a:r>
-          </a:p>
-        </p:txBody>
-      </p:sp>
-      <p:sp>
-        <p:nvSpPr>
-          <p:cNvPr id="9" name="TextBox 8"/>
+              <a:t> cada hallazgo se demuestra con una ejecucion: el DDL contra el ER y el procedimiento con un caso valido y uno invalido.</a:t>
+            </a:r>
+          </a:p>
+          <a:p>
+            <a:pPr>
+              <a:spcAft>
+                <a:spcPts val="800"/>
+              </a:spcAft>
+            </a:pPr>
+            <a:r>
+              <a:rPr sz="2000" b="0" i="0">
+                <a:solidFill>
+                  <a:srgbClr val="333333"/>
+                </a:solidFill>
+                <a:latin typeface="Calibri"/>
+              </a:rPr>
+              <a:t>–   </a:t>
+            </a:r>
+            <a:r>
+              <a:rPr sz="2000" b="1" i="0">
+                <a:solidFill>
+                  <a:srgbClr val="333333"/>
+                </a:solidFill>
+                <a:latin typeface="Calibri"/>
+              </a:rPr>
+              <a:t>Qué observar:</a:t>
+            </a:r>
+            <a:r>
+              <a:rPr sz="2000" b="0" i="0">
+                <a:solidFill>
+                  <a:srgbClr val="333333"/>
+                </a:solidFill>
+                <a:latin typeface="Calibri"/>
+              </a:rPr>
+              <a:t> un hallazgo util nombra el artefacto, el problema, su impacto en la clínica y la accion concreta que lo corrige.</a:t>
+            </a:r>
+          </a:p>
+        </p:txBody>
+      </p:sp>
+      <p:sp>
+        <p:nvSpPr>
+          <p:cNvPr id="6" name="TextBox 5"/>
           <p:cNvSpPr txBox="1"/>
           <p:nvPr/>
         </p:nvSpPr>
@@ -9519,118 +9243,14 @@
       </p:sp>
       <p:sp>
         <p:nvSpPr>
-          <p:cNvPr id="5" name="Rounded Rectangle 4"/>
-          <p:cNvSpPr/>
-          <p:nvPr/>
-        </p:nvSpPr>
-        <p:spPr>
-          <a:xfrm>
-            <a:off x="5797149" y="1573813"/>
-            <a:ext cx="6010497" cy="4057845"/>
-          </a:xfrm>
-          <a:prstGeom prst="roundRect">
-            <a:avLst>
-              <a:gd name="adj" fmla="val 4000"/>
-            </a:avLst>
-          </a:prstGeom>
-          <a:solidFill>
-            <a:srgbClr val="E8EEF4"/>
-          </a:solidFill>
-          <a:ln>
-            <a:noFill/>
-          </a:ln>
-        </p:spPr>
-        <p:style>
-          <a:lnRef idx="1">
-            <a:schemeClr val="accent1"/>
-          </a:lnRef>
-          <a:fillRef idx="3">
-            <a:schemeClr val="accent1"/>
-          </a:fillRef>
-          <a:effectRef idx="2">
-            <a:schemeClr val="accent1"/>
-          </a:effectRef>
-          <a:fontRef idx="minor">
-            <a:schemeClr val="lt1"/>
-          </a:fontRef>
-        </p:style>
-        <p:txBody>
-          <a:bodyPr rtlCol="0" anchor="ctr"/>
-          <a:lstStyle/>
-          <a:p>
-            <a:pPr algn="ctr"/>
-          </a:p>
-        </p:txBody>
-      </p:sp>
-      <p:pic>
-        <p:nvPicPr>
-          <p:cNvPr id="6" name="Picture 5" descr="notebook-planning-desk-coffee.jpg"/>
-          <p:cNvPicPr>
-            <a:picLocks noChangeAspect="1"/>
-          </p:cNvPicPr>
-          <p:nvPr/>
-        </p:nvPicPr>
-        <p:blipFill>
-          <a:blip r:embed="rId2"/>
-          <a:stretch>
-            <a:fillRect/>
-          </a:stretch>
-        </p:blipFill>
-        <p:spPr>
-          <a:xfrm>
-            <a:off x="5870301" y="1646965"/>
-            <a:ext cx="5864193" cy="3911541"/>
-          </a:xfrm>
-          <a:prstGeom prst="rect">
-            <a:avLst/>
-          </a:prstGeom>
-        </p:spPr>
-      </p:pic>
-      <p:sp>
-        <p:nvSpPr>
-          <p:cNvPr id="7" name="TextBox 6"/>
+          <p:cNvPr id="5" name="TextBox 4"/>
           <p:cNvSpPr txBox="1"/>
           <p:nvPr/>
         </p:nvSpPr>
         <p:spPr>
           <a:xfrm>
-            <a:off x="5870301" y="5961888"/>
-            <a:ext cx="5864193" cy="320040"/>
-          </a:xfrm>
-          <a:prstGeom prst="rect">
-            <a:avLst/>
-          </a:prstGeom>
-          <a:noFill/>
-        </p:spPr>
-        <p:txBody>
-          <a:bodyPr wrap="square">
-            <a:spAutoFit/>
-          </a:bodyPr>
-          <a:lstStyle/>
-          <a:p>
-            <a:pPr algn="ctr"/>
-            <a:r>
-              <a:rPr sz="1100" b="0" i="1">
-                <a:solidFill>
-                  <a:srgbClr val="666666"/>
-                </a:solidFill>
-                <a:latin typeface="Calibri"/>
-              </a:rPr>
-              <a:t>Foto: Cup of  Couple · Pexels</a:t>
-            </a:r>
-          </a:p>
-        </p:txBody>
-      </p:sp>
-      <p:sp>
-        <p:nvSpPr>
-          <p:cNvPr id="8" name="TextBox 7"/>
-          <p:cNvSpPr txBox="1"/>
-          <p:nvPr/>
-        </p:nvSpPr>
-        <p:spPr>
-          <a:xfrm>
-            <a:off x="457200" y="1353312"/>
-            <a:ext cx="5093061" cy="5047488"/>
+            <a:off x="457200" y="1170432"/>
+            <a:ext cx="11277295" cy="5230368"/>
           </a:xfrm>
           <a:prstGeom prst="rect">
             <a:avLst/>
@@ -9751,11 +9371,61 @@
               <a:t>–   Recorrido: teoría del tema, una lámina por concepto, y demo del docente sobre la base de la clínica.</a:t>
             </a:r>
           </a:p>
-        </p:txBody>
-      </p:sp>
-      <p:sp>
-        <p:nvSpPr>
-          <p:cNvPr id="9" name="TextBox 8"/>
+          <a:p>
+            <a:pPr>
+              <a:spcAft>
+                <a:spcPts val="800"/>
+              </a:spcAft>
+            </a:pPr>
+            <a:r>
+              <a:rPr sz="2000" b="0" i="0">
+                <a:solidFill>
+                  <a:srgbClr val="333333"/>
+                </a:solidFill>
+                <a:latin typeface="Calibri"/>
+              </a:rPr>
+              <a:t>–   Cada lámina se sostiene sola: sirve para repasar aunque hayas faltado.</a:t>
+            </a:r>
+          </a:p>
+          <a:p>
+            <a:pPr>
+              <a:spcAft>
+                <a:spcPts val="800"/>
+              </a:spcAft>
+            </a:pPr>
+            <a:r>
+              <a:rPr sz="2000" b="0" i="0">
+                <a:solidFill>
+                  <a:srgbClr val="333333"/>
+                </a:solidFill>
+                <a:latin typeface="Calibri"/>
+              </a:rPr>
+              <a:t>–   </a:t>
+            </a:r>
+            <a:r>
+              <a:rPr sz="2000" b="1" i="0">
+                <a:solidFill>
+                  <a:srgbClr val="333333"/>
+                </a:solidFill>
+                <a:latin typeface="Calibri"/>
+              </a:rPr>
+              <a:t>Conceptos de hoy:</a:t>
+            </a:r>
+            <a:r>
+              <a:rPr sz="2000" b="0" i="0">
+                <a:solidFill>
+                  <a:srgbClr val="333333"/>
+                </a:solidFill>
+                <a:latin typeface="Calibri"/>
+              </a:rPr>
+              <a:t> Que es una revision tecnica, y con que producto se sale · Lo que se audita es la coherencia entre piezas · Verificaciones uno y dos · Verificacion tres.</a:t>
+            </a:r>
+          </a:p>
+        </p:txBody>
+      </p:sp>
+      <p:sp>
+        <p:nvSpPr>
+          <p:cNvPr id="6" name="TextBox 5"/>
           <p:cNvSpPr txBox="1"/>
           <p:nvPr/>
         </p:nvSpPr>

--- a/Bases de Datos II/Clases/Clase 11 - Avance del proyecto final/Presentacion.pptx
+++ b/Bases de Datos II/Clases/Clase 11 - Avance del proyecto final/Presentacion.pptx
@@ -516,47 +516,648 @@
           <a:lstStyle/>
           <a:p>
             <a:r>
-              <a:t>DESARROLLO (para explicarlo, no se proyecta):</a:t>
-            </a:r>
-          </a:p>
-          <a:p>
-            <a:r>
-              <a:t>Una revision tecnica es una reunion con un proposito unico: encontrar defectos en un artefacto antes de que cuesten caro, y salir con un producto escrito.</a:t>
-            </a:r>
-          </a:p>
-          <a:p>
-            <a:r>
-              <a:t>No es una reunion de avance, no es una calificacion y no es una demostracion para lucirse.</a:t>
-            </a:r>
-          </a:p>
-          <a:p>
-            <a:r>
-              <a:t>La practica tiene nombres y roles establecidos desde hace decadas en ingenieria de software: el autor presenta, uno o mas revisores buscan defectos, un moderador cuida el tiempo y el tono, y un escriba registra los hallazgos.</a:t>
-            </a:r>
-          </a:p>
-          <a:p>
-            <a:r>
-              <a:t>El estandar clasico, IEEE 1028, distingue la inspeccion (formal, con lista de verificacion y metricas), el walkthrough (el autor guia y explica) y la revision tecnica propiamente dicha (los pares evaluan si el artefacto sirve para su proposito).</a:t>
-            </a:r>
-          </a:p>
-          <a:p>
-            <a:r>
-              <a:t>NOTAS:</a:t>
-            </a:r>
-          </a:p>
-          <a:p>
-            <a:r>
-              <a:t>Lo que se hace hoy es una revision tecnica con lista de verificacion, comprimida a diez minutos por estudiante.</a:t>
-            </a:r>
-          </a:p>
-          <a:p>
-            <a:r>
-              <a:t>Dos reglas gobiernan la sesion y hay que decirlas en voz alta antes de empezar: se revisa el artefacto y no la persona, y no se resuelve el problema dentro de la revision, solo se registra.</a:t>
-            </a:r>
-          </a:p>
-          <a:p>
-            <a:r>
-              <a:t>Un estudiante que se pone a corregir el DDL en vivo consume el tiempo de los demas y sale con un hallazgo menos que si hubiera seguido escuchando.</a:t>
+              <a:t>QUÉ ES (dilo así): Una revisión técnica es una reunión con un solo propósito: encontrar defectos en un producto de trabajo mientras todavía es barato corregirlos, y salir con una lista escrita. No es una reunión de avance, ni una calificación, ni una demostración para lucirse.</a:t>
+            </a:r>
+          </a:p>
+          <a:p/>
+          <a:p>
+            <a:r>
+              <a:t>CÓMO DARLA (≈5 min):</a:t>
+            </a:r>
+          </a:p>
+          <a:p>
+            <a:r>
+              <a:t>  • Al entrar: El objetivo arriba y el artefacto al centro: puede ser el ER, el script DDL, la matriz de roles o un procedimiento. Todo gira alrededor del producto, no de quien lo hizo.</a:t>
+            </a:r>
+          </a:p>
+          <a:p>
+            <a:r>
+              <a:t>  • Clic 1: Los cuatro roles: el autor presenta y responde, los revisores buscan defectos, el moderador cuida tiempo y tono, el escriba anota cada hallazgo. Entre dos personas, una hace de autor y la otra de revisor y escriba.</a:t>
+            </a:r>
+          </a:p>
+          <a:p>
+            <a:r>
+              <a:t>  • Clic 2: El producto es el acta de hallazgos. Si de la reunión no sale nada escrito, no hubo revisión: hubo conversación.</a:t>
+            </a:r>
+          </a:p>
+          <a:p>
+            <a:r>
+              <a:t>  • Clic 3: Las dos reglas, dichas antes de empezar: se revisa el artefacto y no la persona, y el problema no se arregla dentro de la revisión. Quien se pone a corregir el DDL en vivo consume el tiempo de todos.</a:t>
+            </a:r>
+          </a:p>
+          <a:p/>
+          <a:p>
+            <a:r>
+              <a:t>EJEMPLO: El estándar IEEE 1028 distingue la inspección (formal, con lista de verificación y métricas), el walkthrough (el autor guía) y la revisión técnica (los pares evalúan si el artefacto sirve). Hoy se hace una revisión técnica con lista de verificación, de unos diez minutos por persona.</a:t>
+            </a:r>
+          </a:p>
+          <a:p/>
+          <a:p>
+            <a:r>
+              <a:t>SI PREGUNTAN:</a:t>
+            </a:r>
+          </a:p>
+          <a:p>
+            <a:r>
+              <a:t>  • «¿Esto tiene nota?» → La revisión no califica el producto: es la última oportunidad de mover puntos antes de la entrega. Conviene llegar con lo más flojo, no con lo mejor.</a:t>
+            </a:r>
+          </a:p>
+          <a:p>
+            <a:r>
+              <a:t>  • «¿Si el revisor encuentra fallas me bajan la nota?» → No: el revisor par no califica. Encontrar fallas es el objetivo de la sesión.</a:t>
+            </a:r>
+          </a:p>
+          <a:p/>
+          <a:p>
+            <a:r>
+              <a:t>CUIDADO: El error típico del docente es convertir la revisión en «va bien, faltan detalles»: amable, global y sin nada escrito. Sin acta, los defectos llegan intactos a la entrega final.</a:t>
+            </a:r>
+          </a:p>
+          <a:p/>
+          <a:p>
+            <a:r>
+              <a:t>PASA A LA SIGUIENTE: ¿Qué se revisa en una base de datos? No cada pieza: la coherencia entre ellas.</a:t>
+            </a:r>
+          </a:p>
+        </p:txBody>
+      </p:sp>
+      <p:sp>
+        <p:nvSpPr>
+          <p:cNvPr id="4" name="Slide Number Placeholder 3"/>
+          <p:cNvSpPr>
+            <a:spLocks noGrp="1"/>
+          </p:cNvSpPr>
+          <p:nvPr>
+            <p:ph type="sldNum" idx="5" sz="quarter"/>
+          </p:nvPr>
+        </p:nvSpPr>
+        <p:spPr/>
+      </p:sp>
+    </p:spTree>
+  </p:cSld>
+  <p:clrMapOvr>
+    <a:masterClrMapping/>
+  </p:clrMapOvr>
+</p:notes>
+</file>
+
+<file path=ppt/notesSlides/notesSlide10.xml><?xml version="1.0" encoding="utf-8"?>
+<p:notes xmlns:a="http://schemas.openxmlformats.org/drawingml/2006/main" xmlns:p="http://schemas.openxmlformats.org/presentationml/2006/main" xmlns:r="http://schemas.openxmlformats.org/officeDocument/2006/relationships">
+  <p:cSld>
+    <p:spTree>
+      <p:nvGrpSpPr>
+        <p:cNvPr id="1" name=""/>
+        <p:cNvGrpSpPr/>
+        <p:nvPr/>
+      </p:nvGrpSpPr>
+      <p:grpSpPr>
+        <a:xfrm>
+          <a:off x="0" y="0"/>
+          <a:ext cx="0" cy="0"/>
+          <a:chOff x="0" y="0"/>
+          <a:chExt cx="0" cy="0"/>
+        </a:xfrm>
+      </p:grpSpPr>
+      <p:sp>
+        <p:nvSpPr>
+          <p:cNvPr id="2" name="Slide Image Placeholder 1"/>
+          <p:cNvSpPr>
+            <a:spLocks noGrp="1"/>
+          </p:cNvSpPr>
+          <p:nvPr>
+            <p:ph type="sldImg" idx="2"/>
+          </p:nvPr>
+        </p:nvSpPr>
+        <p:spPr/>
+      </p:sp>
+      <p:sp>
+        <p:nvSpPr>
+          <p:cNvPr id="3" name="Notes Placeholder 2"/>
+          <p:cNvSpPr>
+            <a:spLocks noGrp="1"/>
+          </p:cNvSpPr>
+          <p:nvPr>
+            <p:ph type="body" idx="3" sz="quarter"/>
+          </p:nvPr>
+        </p:nvSpPr>
+        <p:spPr/>
+        <p:txBody>
+          <a:bodyPr/>
+          <a:lstStyle/>
+          <a:p>
+            <a:r>
+              <a:t>QUÉ ES (dilo así): El catálogo de la base, information_schema, responde con datos qué tablas existen y cuáles tienen clave primaria. Así se verifica el DDL sin leerlo línea por línea.</a:t>
+            </a:r>
+          </a:p>
+          <a:p/>
+          <a:p>
+            <a:r>
+              <a:t>CÓMO DARLA (≈4 min):</a:t>
+            </a:r>
+          </a:p>
+          <a:p>
+            <a:r>
+              <a:t>  • Líneas 1-3: Lista las tablas del esquema public en orden alfabético. En una base con el modelo completo y la auditoría aparecen 9: audit_cita, cita, consulta, detalle_factura, dueno, factura, insumo, mascota y veterinario. Cualquier otra es una tabla sin entidad que revisar.</a:t>
+            </a:r>
+          </a:p>
+          <a:p>
+            <a:r>
+              <a:t>  • Líneas 5-10: Une cada tabla con sus restricciones PRIMARY KEY mediante LEFT JOIN y se queda con las que no encontraron ninguna (c.constraint_name IS NULL).</a:t>
+            </a:r>
+          </a:p>
+          <a:p>
+            <a:r>
+              <a:t>  • Línea 11: Cero filas significa que todas las tablas tienen clave primaria. Cada fila que aparezca es un hallazgo.</a:t>
+            </a:r>
+          </a:p>
+          <a:p/>
+          <a:p>
+            <a:r>
+              <a:t>EJEMPLO: En la base completa del curso la segunda consulta devuelve 0 filas: todas las tablas, incluida audit_cita, tienen su clave primaria.</a:t>
+            </a:r>
+          </a:p>
+          <a:p/>
+          <a:p>
+            <a:r>
+              <a:t>SI PREGUNTAN:</a:t>
+            </a:r>
+          </a:p>
+          <a:p>
+            <a:r>
+              <a:t>  • «¿Por qué LEFT JOIN y no JOIN?» → Porque se buscan las tablas que NO tienen PK: un JOIN las descartaría; el LEFT JOIN las conserva con NULL en las columnas de la restricción, y el WHERE … IS NULL las deja solas.</a:t>
+            </a:r>
+          </a:p>
+          <a:p>
+            <a:r>
+              <a:t>  • «¿information_schema es de PostgreSQL?» → Es del estándar SQL: también existe en MySQL y SQL Server. PostgreSQL tiene además su catálogo propio, pg_catalog.</a:t>
+            </a:r>
+          </a:p>
+          <a:p/>
+          <a:p>
+            <a:r>
+              <a:t>CUIDADO: Corre las consultas sobre la base que el autor va a entregar, no sobre una copia de prueba: el catálogo describe la base en la que se ejecuta.</a:t>
+            </a:r>
+          </a:p>
+          <a:p/>
+          <a:p>
+            <a:r>
+              <a:t>PASA A LA SIGUIENTE: Una revisión también encuentra lo contrario de lo que falta: lo que sobra.</a:t>
+            </a:r>
+          </a:p>
+        </p:txBody>
+      </p:sp>
+      <p:sp>
+        <p:nvSpPr>
+          <p:cNvPr id="4" name="Slide Number Placeholder 3"/>
+          <p:cNvSpPr>
+            <a:spLocks noGrp="1"/>
+          </p:cNvSpPr>
+          <p:nvPr>
+            <p:ph type="sldNum" idx="5" sz="quarter"/>
+          </p:nvPr>
+        </p:nvSpPr>
+        <p:spPr/>
+      </p:sp>
+    </p:spTree>
+  </p:cSld>
+  <p:clrMapOvr>
+    <a:masterClrMapping/>
+  </p:clrMapOvr>
+</p:notes>
+</file>
+
+<file path=ppt/notesSlides/notesSlide11.xml><?xml version="1.0" encoding="utf-8"?>
+<p:notes xmlns:a="http://schemas.openxmlformats.org/drawingml/2006/main" xmlns:p="http://schemas.openxmlformats.org/presentationml/2006/main" xmlns:r="http://schemas.openxmlformats.org/officeDocument/2006/relationships">
+  <p:cSld>
+    <p:spTree>
+      <p:nvGrpSpPr>
+        <p:cNvPr id="1" name=""/>
+        <p:cNvGrpSpPr/>
+        <p:nvPr/>
+      </p:nvGrpSpPr>
+      <p:grpSpPr>
+        <a:xfrm>
+          <a:off x="0" y="0"/>
+          <a:ext cx="0" cy="0"/>
+          <a:chOff x="0" y="0"/>
+          <a:chExt cx="0" cy="0"/>
+        </a:xfrm>
+      </p:grpSpPr>
+      <p:sp>
+        <p:nvSpPr>
+          <p:cNvPr id="2" name="Slide Image Placeholder 1"/>
+          <p:cNvSpPr>
+            <a:spLocks noGrp="1"/>
+          </p:cNvSpPr>
+          <p:nvPr>
+            <p:ph type="sldImg" idx="2"/>
+          </p:nvPr>
+        </p:nvSpPr>
+        <p:spPr/>
+      </p:sp>
+      <p:sp>
+        <p:nvSpPr>
+          <p:cNvPr id="3" name="Notes Placeholder 2"/>
+          <p:cNvSpPr>
+            <a:spLocks noGrp="1"/>
+          </p:cNvSpPr>
+          <p:nvPr>
+            <p:ph type="body" idx="3" sz="quarter"/>
+          </p:nvPr>
+        </p:nvSpPr>
+        <p:spPr/>
+        <p:txBody>
+          <a:bodyPr/>
+          <a:lstStyle/>
+          <a:p>
+            <a:r>
+              <a:t>QUÉ ES (dilo así): Dos verificaciones más con el catálogo: qué claves foráneas existen y qué procedimientos, funciones y triggers hay de verdad en la base, no en el informe.</a:t>
+            </a:r>
+          </a:p>
+          <a:p/>
+          <a:p>
+            <a:r>
+              <a:t>CÓMO DARLA (≈4 min):</a:t>
+            </a:r>
+          </a:p>
+          <a:p>
+            <a:r>
+              <a:t>  • Líneas 1-9: Une las restricciones FOREIGN KEY con la columna que las lleva (key_column_usage) y con la tabla a la que apuntan (constraint_column_usage). En la base completa devuelve 7 filas: cita→veterinario, cita→mascota, consulta→cita, detalle_factura→factura, detalle_factura→insumo, factura→consulta y mascota→dueno.</a:t>
+            </a:r>
+          </a:p>
+          <a:p>
+            <a:r>
+              <a:t>  • Líneas 11-13: information_schema.routines lista lo que existe con su tipo: con el avance completo aparecen fn_trg_audit_cita (FUNCTION), sp_agendar_cita y sp_facturar (PROCEDURE).</a:t>
+            </a:r>
+          </a:p>
+          <a:p>
+            <a:r>
+              <a:t>  • Línea 14: information_schema.triggers devuelve trg_audit_cita sobre cita. Un trigger aparece una vez por cada evento que lo dispara; este solo escucha UPDATE.</a:t>
+            </a:r>
+          </a:p>
+          <a:p/>
+          <a:p>
+            <a:r>
+              <a:t>EJEMPLO: Si el informe dice «tres procedimientos» y routines devuelve dos, el tercero está en un archivo y no en la base: hallazgo.</a:t>
+            </a:r>
+          </a:p>
+          <a:p/>
+          <a:p>
+            <a:r>
+              <a:t>SI PREGUNTAN:</a:t>
+            </a:r>
+          </a:p>
+          <a:p>
+            <a:r>
+              <a:t>  • «¿Por qué la función del trigger aparece como FUNCTION?» → Porque en PostgreSQL el trigger son dos objetos: la función RETURNS TRIGGER, que es una rutina más, y la asociación CREATE TRIGGER, que está en information_schema.triggers.</a:t>
+            </a:r>
+          </a:p>
+          <a:p/>
+          <a:p>
+            <a:r>
+              <a:t>CUIDADO: La consulta de claves foráneas une solo por nombre de restricción: una FK de dos columnas aparecería repetida. En el modelo del curso todas son de una columna.</a:t>
+            </a:r>
+          </a:p>
+          <a:p/>
+          <a:p>
+            <a:r>
+              <a:t>PASA A LA SIGUIENTE: Ahora todo esto en la demo.</a:t>
+            </a:r>
+          </a:p>
+        </p:txBody>
+      </p:sp>
+      <p:sp>
+        <p:nvSpPr>
+          <p:cNvPr id="4" name="Slide Number Placeholder 3"/>
+          <p:cNvSpPr>
+            <a:spLocks noGrp="1"/>
+          </p:cNvSpPr>
+          <p:nvPr>
+            <p:ph type="sldNum" idx="5" sz="quarter"/>
+          </p:nvPr>
+        </p:nvSpPr>
+        <p:spPr/>
+      </p:sp>
+    </p:spTree>
+  </p:cSld>
+  <p:clrMapOvr>
+    <a:masterClrMapping/>
+  </p:clrMapOvr>
+</p:notes>
+</file>
+
+<file path=ppt/notesSlides/notesSlide12.xml><?xml version="1.0" encoding="utf-8"?>
+<p:notes xmlns:a="http://schemas.openxmlformats.org/drawingml/2006/main" xmlns:p="http://schemas.openxmlformats.org/presentationml/2006/main" xmlns:r="http://schemas.openxmlformats.org/officeDocument/2006/relationships">
+  <p:cSld>
+    <p:spTree>
+      <p:nvGrpSpPr>
+        <p:cNvPr id="1" name=""/>
+        <p:cNvGrpSpPr/>
+        <p:nvPr/>
+      </p:nvGrpSpPr>
+      <p:grpSpPr>
+        <a:xfrm>
+          <a:off x="0" y="0"/>
+          <a:ext cx="0" cy="0"/>
+          <a:chOff x="0" y="0"/>
+          <a:chExt cx="0" cy="0"/>
+        </a:xfrm>
+      </p:grpSpPr>
+      <p:sp>
+        <p:nvSpPr>
+          <p:cNvPr id="2" name="Slide Image Placeholder 1"/>
+          <p:cNvSpPr>
+            <a:spLocks noGrp="1"/>
+          </p:cNvSpPr>
+          <p:nvPr>
+            <p:ph type="sldImg" idx="2"/>
+          </p:nvPr>
+        </p:nvSpPr>
+        <p:spPr/>
+      </p:sp>
+      <p:sp>
+        <p:nvSpPr>
+          <p:cNvPr id="3" name="Notes Placeholder 2"/>
+          <p:cNvSpPr>
+            <a:spLocks noGrp="1"/>
+          </p:cNvSpPr>
+          <p:nvPr>
+            <p:ph type="body" idx="3" sz="quarter"/>
+          </p:nvPr>
+        </p:nvSpPr>
+        <p:spPr/>
+        <p:txBody>
+          <a:bodyPr/>
+          <a:lstStyle/>
+          <a:p>
+            <a:r>
+              <a:t>QUÉ ES (dilo así): La demo es una revisión real de diez minutos sobre una base completa: el docente hace de revisor, ejecuta las verificaciones y escribe los hallazgos en vivo con sus cinco partes.</a:t>
+            </a:r>
+          </a:p>
+          <a:p/>
+          <a:p>
+            <a:r>
+              <a:t>CÓMO DARLA (≈15 min):</a:t>
+            </a:r>
+          </a:p>
+          <a:p>
+            <a:r>
+              <a:t>  • 1 · Catálogo: Ejecuta las consultas de las dos láminas de código: tablas, tablas sin PK (0 filas), claves foráneas (7) y rutinas y triggers. Compara cada resultado con el ER.</a:t>
+            </a:r>
+          </a:p>
+          <a:p>
+            <a:r>
+              <a:t>  • 2 · Procedimiento: CALL sp_agendar_cita(1, 2, TIMESTAMP '2026-11-05 10:00:00') inserta; CALL sp_agendar_cita(3, 2, TIMESTAMP '2026-11-05 09:00:00') responde «ERROR: la mascota 3 esta inactiva; no se agenda cita». Muestra SELECT COUNT(*) FROM cita antes y después de la segunda.</a:t>
+            </a:r>
+          </a:p>
+          <a:p>
+            <a:r>
+              <a:t>  • 3 · Hallazgo: Escribe un hallazgo completo en el acta, en voz alta, parte por parte. Si la base no tiene ninguno real, usa el de detalle_factura sin FK y pruébalo con el INSERT del insumo 999.</a:t>
+            </a:r>
+          </a:p>
+          <a:p>
+            <a:r>
+              <a:t>  • 4 · Cierre: Muestra el acta terminada: de 3 a 5 hallazgos, cada uno con responsable y fecha.</a:t>
+            </a:r>
+          </a:p>
+          <a:p/>
+          <a:p>
+            <a:r>
+              <a:t>EJEMPLO: Tiempos sugeridos: catálogo 5 min, procedimiento 4 min, hallazgo 4 min, cierre 2 min.</a:t>
+            </a:r>
+          </a:p>
+          <a:p/>
+          <a:p>
+            <a:r>
+              <a:t>SI PREGUNTAN:</a:t>
+            </a:r>
+          </a:p>
+          <a:p>
+            <a:r>
+              <a:t>  • «¿Y si la base del estudiante no corre?» → Ese es el primer hallazgo, y el más grave: sin un script que corra de principio a fin en una base vacía no hay sobre qué montar lo demás.</a:t>
+            </a:r>
+          </a:p>
+          <a:p/>
+          <a:p>
+            <a:r>
+              <a:t>CUIDADO: No corrijas en vivo lo que encuentres: anótalo. Corregir dentro de la revisión es la regla que más se rompe.</a:t>
+            </a:r>
+          </a:p>
+          <a:p/>
+          <a:p>
+            <a:r>
+              <a:t>PASA A LA SIGUIENTE: Para el ER del avance: del boceto al código Mermaid.</a:t>
+            </a:r>
+          </a:p>
+        </p:txBody>
+      </p:sp>
+      <p:sp>
+        <p:nvSpPr>
+          <p:cNvPr id="4" name="Slide Number Placeholder 3"/>
+          <p:cNvSpPr>
+            <a:spLocks noGrp="1"/>
+          </p:cNvSpPr>
+          <p:nvPr>
+            <p:ph type="sldNum" idx="5" sz="quarter"/>
+          </p:nvPr>
+        </p:nvSpPr>
+        <p:spPr/>
+      </p:sp>
+    </p:spTree>
+  </p:cSld>
+  <p:clrMapOvr>
+    <a:masterClrMapping/>
+  </p:clrMapOvr>
+</p:notes>
+</file>
+
+<file path=ppt/notesSlides/notesSlide13.xml><?xml version="1.0" encoding="utf-8"?>
+<p:notes xmlns:a="http://schemas.openxmlformats.org/drawingml/2006/main" xmlns:p="http://schemas.openxmlformats.org/presentationml/2006/main" xmlns:r="http://schemas.openxmlformats.org/officeDocument/2006/relationships">
+  <p:cSld>
+    <p:spTree>
+      <p:nvGrpSpPr>
+        <p:cNvPr id="1" name=""/>
+        <p:cNvGrpSpPr/>
+        <p:nvPr/>
+      </p:nvGrpSpPr>
+      <p:grpSpPr>
+        <a:xfrm>
+          <a:off x="0" y="0"/>
+          <a:ext cx="0" cy="0"/>
+          <a:chOff x="0" y="0"/>
+          <a:chExt cx="0" cy="0"/>
+        </a:xfrm>
+      </p:grpSpPr>
+      <p:sp>
+        <p:nvSpPr>
+          <p:cNvPr id="2" name="Slide Image Placeholder 1"/>
+          <p:cNvSpPr>
+            <a:spLocks noGrp="1"/>
+          </p:cNvSpPr>
+          <p:nvPr>
+            <p:ph type="sldImg" idx="2"/>
+          </p:nvPr>
+        </p:nvSpPr>
+        <p:spPr/>
+      </p:sp>
+      <p:sp>
+        <p:nvSpPr>
+          <p:cNvPr id="3" name="Notes Placeholder 2"/>
+          <p:cNvSpPr>
+            <a:spLocks noGrp="1"/>
+          </p:cNvSpPr>
+          <p:nvPr>
+            <p:ph type="body" idx="3" sz="quarter"/>
+          </p:nvPr>
+        </p:nvSpPr>
+        <p:spPr/>
+        <p:txBody>
+          <a:bodyPr/>
+          <a:lstStyle/>
+          <a:p>
+            <a:r>
+              <a:t>QUÉ ES (dilo así): El diagrama se entrega como texto Mermaid, no como imagen: la imagen sale del código. Se piensa dibujando, se traduce a texto, se comprueba que dibuje y se guardan las dos cosas.</a:t>
+            </a:r>
+          </a:p>
+          <a:p/>
+          <a:p>
+            <a:r>
+              <a:t>CÓMO DARLA (≈3 min):</a:t>
+            </a:r>
+          </a:p>
+          <a:p>
+            <a:r>
+              <a:t>  • Paso 1: Diseña visual: en Excalidraw o draw.io arrastrar cajas es más rápido, y ahí se piensa el modelo.</a:t>
+            </a:r>
+          </a:p>
+          <a:p>
+            <a:r>
+              <a:t>  • Paso 2: Traduce con IA: pide el código erDiagram a partir del boceto. Revisa el resultado: la IA acierta la sintaxis, no el modelo; los nombres tienen que ser los del DDL.</a:t>
+            </a:r>
+          </a:p>
+          <a:p>
+            <a:r>
+              <a:t>  • Paso 3: Renderiza y corrige en un visor Mermaid (mermaid.live): si no dibuja, no comunica.</a:t>
+            </a:r>
+          </a:p>
+          <a:p>
+            <a:r>
+              <a:t>  • Paso 4: Guarda el texto Mermaid, que es la fuente, y exporta el PNG.</a:t>
+            </a:r>
+          </a:p>
+          <a:p/>
+          <a:p>
+            <a:r>
+              <a:t>EJEMPLO: Una relación en erDiagram: dueno ||--o{ mascota : tiene (un dueño, cero o muchas mascotas). Cada entidad lleva sus atributos con tipo y PK o FK: int id_mascota PK.</a:t>
+            </a:r>
+          </a:p>
+          <a:p/>
+          <a:p>
+            <a:r>
+              <a:t>SI PREGUNTAN:</a:t>
+            </a:r>
+          </a:p>
+          <a:p>
+            <a:r>
+              <a:t>  • «¿Por qué no basta una imagen del diagrama?» → Porque el texto se puede revisar, comparar con el DDL y versionar; una imagen no se corrige sin volver a dibujarla.</a:t>
+            </a:r>
+          </a:p>
+          <a:p/>
+          <a:p>
+            <a:r>
+              <a:t>CUIDADO: Revisa que los nombres del erDiagram sean exactamente los del DDL (dueno, no Dueño): un diagrama que no coincide con el script es justo el hallazgo de coherencia de hoy.</a:t>
+            </a:r>
+          </a:p>
+          <a:p/>
+          <a:p>
+            <a:r>
+              <a:t>PASA A LA SIGUIENTE: Cierre de la clase.</a:t>
+            </a:r>
+          </a:p>
+        </p:txBody>
+      </p:sp>
+      <p:sp>
+        <p:nvSpPr>
+          <p:cNvPr id="4" name="Slide Number Placeholder 3"/>
+          <p:cNvSpPr>
+            <a:spLocks noGrp="1"/>
+          </p:cNvSpPr>
+          <p:nvPr>
+            <p:ph type="sldNum" idx="5" sz="quarter"/>
+          </p:nvPr>
+        </p:nvSpPr>
+        <p:spPr/>
+      </p:sp>
+    </p:spTree>
+  </p:cSld>
+  <p:clrMapOvr>
+    <a:masterClrMapping/>
+  </p:clrMapOvr>
+</p:notes>
+</file>
+
+<file path=ppt/notesSlides/notesSlide14.xml><?xml version="1.0" encoding="utf-8"?>
+<p:notes xmlns:a="http://schemas.openxmlformats.org/drawingml/2006/main" xmlns:p="http://schemas.openxmlformats.org/presentationml/2006/main" xmlns:r="http://schemas.openxmlformats.org/officeDocument/2006/relationships">
+  <p:cSld>
+    <p:spTree>
+      <p:nvGrpSpPr>
+        <p:cNvPr id="1" name=""/>
+        <p:cNvGrpSpPr/>
+        <p:nvPr/>
+      </p:nvGrpSpPr>
+      <p:grpSpPr>
+        <a:xfrm>
+          <a:off x="0" y="0"/>
+          <a:ext cx="0" cy="0"/>
+          <a:chOff x="0" y="0"/>
+          <a:chExt cx="0" cy="0"/>
+        </a:xfrm>
+      </p:grpSpPr>
+      <p:sp>
+        <p:nvSpPr>
+          <p:cNvPr id="2" name="Slide Image Placeholder 1"/>
+          <p:cNvSpPr>
+            <a:spLocks noGrp="1"/>
+          </p:cNvSpPr>
+          <p:nvPr>
+            <p:ph type="sldImg" idx="2"/>
+          </p:nvPr>
+        </p:nvSpPr>
+        <p:spPr/>
+      </p:sp>
+      <p:sp>
+        <p:nvSpPr>
+          <p:cNvPr id="3" name="Notes Placeholder 2"/>
+          <p:cNvSpPr>
+            <a:spLocks noGrp="1"/>
+          </p:cNvSpPr>
+          <p:nvPr>
+            <p:ph type="body" idx="3" sz="quarter"/>
+          </p:nvPr>
+        </p:nvSpPr>
+        <p:spPr/>
+        <p:txBody>
+          <a:bodyPr/>
+          <a:lstStyle/>
+          <a:p>
+            <a:r>
+              <a:t>QUÉ ES (dilo así): Cierre: una revisión sirve si sale un acta con hallazgos verificables. Lo que se audita es la coherencia entre piezas, y cada hallazgo se demuestra con una ejecución.</a:t>
+            </a:r>
+          </a:p>
+          <a:p/>
+          <a:p>
+            <a:r>
+              <a:t>CÓMO DARLA (≈3 min):</a:t>
+            </a:r>
+          </a:p>
+          <a:p>
+            <a:r>
+              <a:t>  • Al entrar: Pregunta de salida: «nombra un hallazgo de tu propia base con sus cinco partes». Toma dos respuestas y corrige la que no sea verificable.</a:t>
+            </a:r>
+          </a:p>
+          <a:p>
+            <a:r>
+              <a:t>  • Después: Amarre: la Clase 12, en esta misma sesión, escribe el contrato de operaciones, que solo puede apoyarse en procedimientos que existen y funcionan.</a:t>
             </a:r>
           </a:p>
         </p:txBody>
@@ -626,57 +1227,62 @@
           <a:lstStyle/>
           <a:p>
             <a:r>
-              <a:t>DESARROLLO (para explicarlo, no se proyecta):</a:t>
-            </a:r>
-          </a:p>
-          <a:p>
-            <a:r>
-              <a:t>Un artefacto es cualquier producto de trabajo: el diagrama entidad-relacion, el script DDL, la matriz de roles, los procedimientos, el informe de optimizacion.</a:t>
-            </a:r>
-          </a:p>
-          <a:p>
-            <a:r>
-              <a:t>Es perfectamente posible que un estudiante tenga un ER bien dibujado, un DDL que ejecuta sin errores</a:t>
-            </a:r>
-          </a:p>
-          <a:p>
-            <a:r>
-              <a:t>Y que ambos describan bases de datos distintas, porque el ER se dibujo en la Clase 1 y el DDL se fue parchando en las Clases 3 a 8 sin volver a actualizar el diagrama.</a:t>
-            </a:r>
-          </a:p>
-          <a:p>
-            <a:r>
-              <a:t>Cada una toma dos o tres minutos si se ejecuta con criterio.</a:t>
-            </a:r>
-          </a:p>
-          <a:p>
-            <a:r>
-              <a:t>NOTAS:</a:t>
-            </a:r>
-          </a:p>
-          <a:p>
-            <a:r>
-              <a:t>Lo que se audita en una base de datos no es cada pieza por separado sino la coherencia entre piezas.</a:t>
-            </a:r>
-          </a:p>
-          <a:p>
-            <a:r>
-              <a:t>Coherencia significa que todas esas piezas describen el mismo sistema.</a:t>
-            </a:r>
-          </a:p>
-          <a:p>
-            <a:r>
-              <a:t>Esa divergencia es el hallazgo mas comun del checkpoint y tambien el mas facil de detectar si se sabe donde mirar.</a:t>
-            </a:r>
-          </a:p>
-          <a:p>
-            <a:r>
-              <a:t>Las cuatro verificaciones cruzadas que el docente debe correr son: que el DDL corresponda al ER, que los GRANT correspondan a los roles declarados, que los procedimientos listados existan y sean invocables, y que la optimizacion tenga medicion antes y despues.</a:t>
-            </a:r>
-          </a:p>
-          <a:p>
-            <a:r>
-              <a:t>Fuera de la lamina (habla de la practica): Cada una toma dos o tres minutos si se ejecuta con criterio, y juntas cubren los cuatro criterios de rubrica que mas peso tienen.</a:t>
+              <a:t>QUÉ ES (dilo así): En una base de datos no se audita cada pieza por separado sino la coherencia entre piezas: que todas describan el mismo sistema. Un ER bien dibujado y un DDL que ejecuta sin errores pueden describir dos bases distintas, y ninguna de las dos piezas «falla» por sí sola.</a:t>
+            </a:r>
+          </a:p>
+          <a:p/>
+          <a:p>
+            <a:r>
+              <a:t>CÓMO DARLA (≈5 min):</a:t>
+            </a:r>
+          </a:p>
+          <a:p>
+            <a:r>
+              <a:t>  • Al entrar: Las cinco piezas del proyecto, cada una con su visto: el ER, el DDL, la matriz de roles, los procedimientos y el informe de optimización. Revisadas solas, todas pasan.</a:t>
+            </a:r>
+          </a:p>
+          <a:p>
+            <a:r>
+              <a:t>  • Clic 1: El enlace entre el ER y el DDL se rompe: el diagrama se dibujó en la Clase 1 y el DDL se parchó en las Clases 3 a 8 (una tabla de auditoría, una columna nueva) sin volver al diagrama. Es el hallazgo más común y el más fácil de encontrar si se sabe dónde mirar.</a:t>
+            </a:r>
+          </a:p>
+          <a:p>
+            <a:r>
+              <a:t>  • Clic 2: Las cuatro verificaciones cruzadas, cada una entre dos piezas: el ER contra el DDL, la matriz de roles contra los GRANT, los procedimientos contra una llamada real y el informe contra el EXPLAIN de antes y después. Cada una toma dos o tres minutos.</a:t>
+            </a:r>
+          </a:p>
+          <a:p>
+            <a:r>
+              <a:t>  • Clic 3: La frase de la lámina: se audita la coherencia entre piezas, no cada pieza.</a:t>
+            </a:r>
+          </a:p>
+          <a:p/>
+          <a:p>
+            <a:r>
+              <a:t>EJEMPLO: La tabla audit_cita apareció en la Clase 4 con su trigger. Si el ER no la tiene, el DDL describe una base con una tabla más que el diagrama: hallazgo de coherencia, aunque las dos piezas estén bien hechas.</a:t>
+            </a:r>
+          </a:p>
+          <a:p/>
+          <a:p>
+            <a:r>
+              <a:t>SI PREGUNTAN:</a:t>
+            </a:r>
+          </a:p>
+          <a:p>
+            <a:r>
+              <a:t>  • «¿Y si el DDL es el correcto y el ER el viejo?» → Entonces se actualiza el ER: la fuente de verdad es lo que corre. El hallazgo es que no coinciden, no cuál de los dos tiene la culpa.</a:t>
+            </a:r>
+          </a:p>
+          <a:p/>
+          <a:p>
+            <a:r>
+              <a:t>CUIDADO: No aceptes como evidencia lo que el autor dice («sí, está actualizado»): pide abrir las dos piezas lado a lado.</a:t>
+            </a:r>
+          </a:p>
+          <a:p/>
+          <a:p>
+            <a:r>
+              <a:t>PASA A LA SIGUIENTE: Las dos primeras verificaciones, en detalle.</a:t>
             </a:r>
           </a:p>
         </p:txBody>
@@ -746,62 +1352,67 @@
           <a:lstStyle/>
           <a:p>
             <a:r>
-              <a:t>DESARROLLO (para explicarlo, no se proyecta):</a:t>
-            </a:r>
-          </a:p>
-          <a:p>
-            <a:r>
-              <a:t>Se recorre el diagrama entidad por entidad y se busca su CREATE TABLE: toda entidad sin tabla es un hallazgo.</a:t>
-            </a:r>
-          </a:p>
-          <a:p>
-            <a:r>
-              <a:t>Luego se recorre en sentido contrario, porque es el que nadie hace: toda tabla sin entidad en el diagrama tambien es un hallazgo, ya que significa que el modelo crecio sin registrarse.</a:t>
-            </a:r>
-          </a:p>
-          <a:p>
-            <a:r>
-              <a:t>Si el ER dice que una cita pertenece a exactamente una mascota, el DDL debe tener id_mascota con NOT NULL y una FOREIGN KEY hacia Mascota</a:t>
-            </a:r>
-          </a:p>
-          <a:p>
-            <a:r>
-              <a:t>Si dice que un dueno puede tener varias mascotas pero una mascota tiene un solo dueno, la clave foranea vive en Mascota y no en Dueno.</a:t>
-            </a:r>
-          </a:p>
-          <a:p>
-            <a:r>
-              <a:t>Una cardinalidad dibujada que no tiene su restriccion correspondiente en el DDL es decoracion, no modelo.</a:t>
-            </a:r>
-          </a:p>
-          <a:p>
-            <a:r>
-              <a:t>Se toma la matriz de la Clase 2 y se comprueba que los cuatro roles declarados existan en el script y que las celdas se hayan traducido en sentencias.</a:t>
-            </a:r>
-          </a:p>
-          <a:p>
-            <a:r>
-              <a:t>El hallazgo tipico aqui es el rol AUDITOR que en la matriz solo lee y en el script recibio privilegios de escritura, porque alguien copio el bloque de RECEPCION y cambio unicamente el nombre.</a:t>
-            </a:r>
-          </a:p>
-          <a:p>
-            <a:r>
-              <a:t>NOTAS:</a:t>
-            </a:r>
-          </a:p>
-          <a:p>
-            <a:r>
-              <a:t>Verificacion uno, ER contra DDL.</a:t>
-            </a:r>
-          </a:p>
-          <a:p>
-            <a:r>
-              <a:t>Despues se verifican las relaciones.</a:t>
-            </a:r>
-          </a:p>
-          <a:p>
-            <a:r>
-              <a:t>Verificacion dos, roles contra GRANT.</a:t>
+              <a:t>QUÉ ES (dilo así): La verificación uno compara el diagrama con el script en los dos sentidos y después mira las relaciones. La verificación dos compara la matriz de roles de la Clase 2 con los GRANT que de verdad se ejecutaron.</a:t>
+            </a:r>
+          </a:p>
+          <a:p/>
+          <a:p>
+            <a:r>
+              <a:t>CÓMO DARLA (≈6 min):</a:t>
+            </a:r>
+          </a:p>
+          <a:p>
+            <a:r>
+              <a:t>  • Al entrar: De ida: se recorre el ER entidad por entidad buscando su CREATE TABLE. Dueño, mascota y cita lo tienen; insumo no: entidad sin tabla.</a:t>
+            </a:r>
+          </a:p>
+          <a:p>
+            <a:r>
+              <a:t>  • Clic 1: De vuelta: el script tiene CREATE TABLE proveedor y el ER no tiene esa entidad. El modelo creció sin registrarse, y es el sentido que nadie revisa.</a:t>
+            </a:r>
+          </a:p>
+          <a:p>
+            <a:r>
+              <a:t>  • Clic 2: Las relaciones: si el ER dice que una cita pertenece a exactamente una mascota, el DDL debe tener id_mascota INT NOT NULL y REFERENCES mascota(id_mascota). Si dice que un dueño tiene varias mascotas, la clave foránea vive en mascota, no en dueño. Una cardinalidad sin restricción es decoración.</a:t>
+            </a:r>
+          </a:p>
+          <a:p>
+            <a:r>
+              <a:t>  • Clic 3: Verificación dos: la matriz dice que el auditor solo lee cita, pero el script le dio GRANT SELECT, INSERT, UPDATE ON cita TO auditor. Pasa cuando se copia el bloque de recepción y solo se cambia el nombre del rol.</a:t>
+            </a:r>
+          </a:p>
+          <a:p/>
+          <a:p>
+            <a:r>
+              <a:t>EJEMPLO: La consulta del catálogo que lista las claves foráneas devuelve 7 filas en la base completa del curso: una por cada relación del ER (cita con mascota y con veterinario, mascota con dueño, consulta con cita, factura con consulta y detalle_factura con factura y con insumo).</a:t>
+            </a:r>
+          </a:p>
+          <a:p/>
+          <a:p>
+            <a:r>
+              <a:t>SI PREGUNTAN:</a:t>
+            </a:r>
+          </a:p>
+          <a:p>
+            <a:r>
+              <a:t>  • «¿Cómo veo los privilegios reales de un rol?» → Con el catálogo: SELECT grantee, table_name, privilege_type FROM information_schema.role_table_grants WHERE grantee = 'auditor'; con el GRANT del ejemplo devuelve tres filas: INSERT, SELECT y UPDATE sobre cita.</a:t>
+            </a:r>
+          </a:p>
+          <a:p>
+            <a:r>
+              <a:t>  • «¿Una FK sin NOT NULL está mal?» → Depende de la cardinalidad: sin NOT NULL la relación es opcional. Si el ER dice «exactamente una», falta el NOT NULL.</a:t>
+            </a:r>
+          </a:p>
+          <a:p/>
+          <a:p>
+            <a:r>
+              <a:t>CUIDADO: Revisar solo de ida deja pasar las tablas que crecieron sin diagrama, que son justo las que la sustentación pregunta.</a:t>
+            </a:r>
+          </a:p>
+          <a:p/>
+          <a:p>
+            <a:r>
+              <a:t>PASA A LA SIGUIENTE: La verificación tres separa a quien va bien de quien no: que compile no es que sirva.</a:t>
             </a:r>
           </a:p>
         </p:txBody>
@@ -871,72 +1482,67 @@
           <a:lstStyle/>
           <a:p>
             <a:r>
-              <a:t>DESARROLLO (para explicarlo, no se proyecta):</a:t>
-            </a:r>
-          </a:p>
-          <a:p>
-            <a:r>
-              <a:t>La distincion que separa a un estudiante que va bien de uno que va mal es esta: un procedimiento que compila no es un procedimiento que funciona.</a:t>
-            </a:r>
-          </a:p>
-          <a:p>
-            <a:r>
-              <a:t>Primero CALL sp_agendar_cita con datos validos, que debe insertar la cita y devolver confirmacion.</a:t>
-            </a:r>
-          </a:p>
-          <a:p>
-            <a:r>
-              <a:t>Segundo, CALL sp_agendar_cita con el caso invalido que el propio estudiante declaro, es decir una mascota inactiva o un horario ya tomado, que debe devolver el mensaje de negocio y no un error crudo del motor.</a:t>
-            </a:r>
-          </a:p>
-          <a:p>
-            <a:r>
-              <a:t>Si el estudiante no puede mostrar la segunda ejecucion.</a:t>
-            </a:r>
-          </a:p>
-          <a:p>
-            <a:r>
-              <a:t>Un informe de optimizacion sin medicion no es optimizacion, es una opinion.</a:t>
-            </a:r>
-          </a:p>
-          <a:p>
-            <a:r>
-              <a:t>Si el estudiante creo tres indices y no puede senalar cual consulta aprovecha cada uno, el hallazgo es que indexo por costumbre y no por medicion, que es exactamente el error que se analiza como caso real en la Clase 13.</a:t>
-            </a:r>
-          </a:p>
-          <a:p>
-            <a:r>
-              <a:t>Ejemplo: un sp_agendar_cita que compila pero no valida la mascota inactiva pasa la primera ejecucion y falla la segunda, la que deberia haber sido rechazada.</a:t>
-            </a:r>
-          </a:p>
-          <a:p>
-            <a:r>
-              <a:t>NOTAS:</a:t>
-            </a:r>
-          </a:p>
-          <a:p>
-            <a:r>
-              <a:t>Verificacion tres, procedimientos invocables.</a:t>
-            </a:r>
-          </a:p>
-          <a:p>
-            <a:r>
-              <a:t>La prueba de humo dura un minuto y consiste en pedir dos ejecuciones y no una.</a:t>
-            </a:r>
-          </a:p>
-          <a:p>
-            <a:r>
-              <a:t>Verificacion cuatro, optimizacion.</a:t>
-            </a:r>
-          </a:p>
-          <a:p>
-            <a:r>
-              <a:t>Se exige la consulta original, el plan de ejecucion que la acompanaba, el cambio aplicado (indice creado o consulta reescrita) y el plan despues, mostrando que el motor paso de recorrido completo de tabla a acceso por indice.</a:t>
-            </a:r>
-          </a:p>
-          <a:p>
-            <a:r>
-              <a:t>Fuera de la lamina (habla de la practica): Si el estudiante no puede mostrar la segunda ejecucion, el procedimiento no tiene manejo de errores y eso resta puntos en los 25 de objetos programables.</a:t>
+              <a:t>QUÉ ES (dilo así): Las verificaciones tres y cuatro piden ejecuciones, no afirmaciones. Un procedimiento se prueba con dos llamadas: una que debe pasar y una que debe ser rechazada. Una optimización se prueba con el plan de ejecución de antes y de después.</a:t>
+            </a:r>
+          </a:p>
+          <a:p/>
+          <a:p>
+            <a:r>
+              <a:t>CÓMO DARLA (≈5 min):</a:t>
+            </a:r>
+          </a:p>
+          <a:p>
+            <a:r>
+              <a:t>  • Al entrar: CREATE PROCEDURE sp_agendar_cita(…) compiló. Eso solo dice que la sintaxis es correcta; todavía no se sabe si la regla funciona.</a:t>
+            </a:r>
+          </a:p>
+          <a:p>
+            <a:r>
+              <a:t>  • Clic 1: Caso válido: CALL sp_agendar_cita(1, 2, …) con una mascota activa (Firulais) y una franja libre: inserta la cita.</a:t>
+            </a:r>
+          </a:p>
+          <a:p>
+            <a:r>
+              <a:t>  • Clic 2: Caso inválido declarado: CALL sp_agendar_cita(3, 2, …) con Rocky, que está inactiva: el procedimiento aborta con «ERROR: la mascota 3 esta inactiva; no se agenda cita» y no inserta nada. Si el autor no puede mostrar esta segunda ejecución, el procedimiento no tiene manejo de errores.</a:t>
+            </a:r>
+          </a:p>
+          <a:p>
+            <a:r>
+              <a:t>  • Clic 3: Verificación cuatro: se pide la consulta, el plan de antes (Seq Scan on cita), el cambio aplicado y el plan de después (Index Scan using idx_cita_fecha_hora on cita). Sin medición, el informe es una opinión; y un índice que ninguna consulta aprovecha se anota como hallazgo.</a:t>
+            </a:r>
+          </a:p>
+          <a:p/>
+          <a:p>
+            <a:r>
+              <a:t>EJEMPLO: Un sp_agendar_cita que compila pero no valida la mascota inactiva pasa la primera llamada y también la segunda: inserta la cita de Rocky, que debía rechazarse. Solo la segunda ejecución lo delata.</a:t>
+            </a:r>
+          </a:p>
+          <a:p/>
+          <a:p>
+            <a:r>
+              <a:t>SI PREGUNTAN:</a:t>
+            </a:r>
+          </a:p>
+          <a:p>
+            <a:r>
+              <a:t>  • «¿Cómo confirmo que el caso inválido no dejó nada?» → Con SELECT COUNT(*) FROM cita; antes y después: el número no cambia.</a:t>
+            </a:r>
+          </a:p>
+          <a:p>
+            <a:r>
+              <a:t>  • «¿El plan de después siempre muestra Index Scan?» → No necesariamente: con pocas filas el planificador puede preferir Seq Scan aunque el índice exista. Lo que se exige es la medición y que el informe explique lo que muestra.</a:t>
+            </a:r>
+          </a:p>
+          <a:p/>
+          <a:p>
+            <a:r>
+              <a:t>CUIDADO: No marques en verde un procedimiento porque el autor dice que funciona: pide la ejecución del caso inválido en pantalla.</a:t>
+            </a:r>
+          </a:p>
+          <a:p/>
+          <a:p>
+            <a:r>
+              <a:t>PASA A LA SIGUIENTE: Las verificaciones en SQL: el catálogo responde qué existe de verdad.</a:t>
             </a:r>
           </a:p>
         </p:txBody>
@@ -1006,62 +1612,57 @@
           <a:lstStyle/>
           <a:p>
             <a:r>
-              <a:t>DESARROLLO (para explicarlo, no se proyecta):</a:t>
-            </a:r>
-          </a:p>
-          <a:p>
-            <a:r>
-              <a:t>Scope creep es el crecimiento no controlado del alcance: funcionalidad que se va agregando sin que nadie decida agregarla y sin que se quite nada a cambio.</a:t>
-            </a:r>
-          </a:p>
-          <a:p>
-            <a:r>
-              <a:t>En un proyecto de base de datos tiene un sintoma cuantificable, que es el numero de entidades. la clínica pide seis entidades minimas (Dueno, Mascota, Veterinario, Cita</a:t>
-            </a:r>
-          </a:p>
-          <a:p>
-            <a:r>
-              <a:t>Insumo y Factura con su detalle) y el rango sano al llegar a la Clase 11 es de seis a nueve, contando una o dos ampliaciones propias justificadas como Consulta o historial clinico.</a:t>
-            </a:r>
-          </a:p>
-          <a:p>
-            <a:r>
-              <a:t>Un estudiante que llega con quince entidades porque agrego proveedores, inventario multialmacen, portal para duenos y notificaciones no esta adelantado: esta repartiendo el mismo esfuerzo en el doble de superficie</a:t>
-            </a:r>
-          </a:p>
-          <a:p>
-            <a:r>
-              <a:t>Y termina con quince tablas vacias en vez de siete tablas con procedimientos probados.</a:t>
-            </a:r>
-          </a:p>
-          <a:p>
-            <a:r>
-              <a:t>La accion correctiva es explicita y se registra en el acta: las entidades que sobran se mueven a una seccion de alcance futuro del informe, con una frase que diga por que quedaron fuera.</a:t>
-            </a:r>
-          </a:p>
-          <a:p>
-            <a:r>
-              <a:t>NOTAS:</a:t>
-            </a:r>
-          </a:p>
-          <a:p>
-            <a:r>
-              <a:t>Existe tambien el problema inverso y menos visible.</a:t>
-            </a:r>
-          </a:p>
-          <a:p>
-            <a:r>
-              <a:t>Fuera de la lamina (habla de la practica): La rubrica no da puntos por cantidad de tablas: da 20 por modelo coherente y 25 por objetos programables con casos de prueba.</a:t>
-            </a:r>
-          </a:p>
-          <a:p>
-            <a:r>
-              <a:t>Fuera de la lamina (habla de la practica): Eso no resta puntos, al contrario, declarar el limite es una senal de madurez que se valora en la sustentacion.</a:t>
-            </a:r>
-          </a:p>
-          <a:p>
-            <a:r>
-              <a:t>Fuera de la lamina (habla de la practica): Existe tambien el problema inverso y menos visible: el estudiante que recorto tanto que ya no tiene material para los 25 puntos de procedimientos, funciones y disparadores, y ese caso tambien es un hallazgo que hay que escribir.</a:t>
+              <a:t>QUÉ ES (dilo así): Scope creep es el crecimiento no controlado del alcance: se agregan cosas sin decidirlo y sin quitar nada. En un proyecto de base de datos tiene un síntoma que se cuenta: el número de entidades.</a:t>
+            </a:r>
+          </a:p>
+          <a:p/>
+          <a:p>
+            <a:r>
+              <a:t>CÓMO DARLA (≈4 min):</a:t>
+            </a:r>
+          </a:p>
+          <a:p>
+            <a:r>
+              <a:t>  • Al entrar: El mínimo son seis entidades (dueño, mascota, veterinario, cita, insumo y factura con su detalle) y el rango sano llega a nueve con una o dos ampliaciones justificadas, como consulta o un historial clínico. El modelo del curso tiene 8 tablas: dentro del rango.</a:t>
+            </a:r>
+          </a:p>
+          <a:p>
+            <a:r>
+              <a:t>  • Clic 1: Se agregan proveedores, inventario multialmacén, portal de dueños, notificaciones… y se llega a 15. Nadie decidió agregarlas y nada se quitó a cambio.</a:t>
+            </a:r>
+          </a:p>
+          <a:p>
+            <a:r>
+              <a:t>  • Clic 2: Mismo esfuerzo, el doble de superficie: se termina con quince tablas vacías en vez de ocho con procedimientos probados. La acción va al acta: las sobrantes pasan a una sección de alcance futuro, con su porqué.</a:t>
+            </a:r>
+          </a:p>
+          <a:p/>
+          <a:p>
+            <a:r>
+              <a:t>EJEMPLO: Un hallazgo bien escrito: «Artefacto: ER. Observación: 15 entidades, 7 sin procedimientos ni datos. Acción: mover proveedor, almacén, portal y notificación a alcance futuro.»</a:t>
+            </a:r>
+          </a:p>
+          <a:p/>
+          <a:p>
+            <a:r>
+              <a:t>SI PREGUNTAN:</a:t>
+            </a:r>
+          </a:p>
+          <a:p>
+            <a:r>
+              <a:t>  • «¿Mover entidades a alcance futuro no se ve mal?» → Al contrario: declarar el límite con su razón es señal de madurez y se valora al sustentar.</a:t>
+            </a:r>
+          </a:p>
+          <a:p/>
+          <a:p>
+            <a:r>
+              <a:t>CUIDADO: Existe el problema inverso: quien recortó tanto que ya no tiene material para procedimientos, funciones y triggers. También se escribe como hallazgo.</a:t>
+            </a:r>
+          </a:p>
+          <a:p/>
+          <a:p>
+            <a:r>
+              <a:t>PASA A LA SIGUIENTE: ¿Cómo se escribe un hallazgo para que sirva? Tiene una anatomía fija.</a:t>
             </a:r>
           </a:p>
         </p:txBody>
@@ -1131,77 +1732,57 @@
           <a:lstStyle/>
           <a:p>
             <a:r>
-              <a:t>DESARROLLO (para explicarlo, no se proyecta):</a:t>
-            </a:r>
-          </a:p>
-          <a:p>
-            <a:r>
-              <a:t>La retroalimentacion util tiene una anatomia fija, y conviene que el docente la escriba siempre igual porque asi el acta se vuelve una lista de tareas y no un desahogo.</a:t>
-            </a:r>
-          </a:p>
-          <a:p>
-            <a:r>
-              <a:t>Un hallazgo bien formulado tiene cinco partes: artefacto, observacion verificable, impacto, accion y responsable con fecha.</a:t>
-            </a:r>
-          </a:p>
-          <a:p>
-            <a:r>
-              <a:t>Retroalimentacion inutil: «el modelo esta flojo, mejorenlo»; no dice que mirar ni como saber cuando esta resuelto.</a:t>
-            </a:r>
-          </a:p>
-          <a:p>
-            <a:r>
-              <a:t>Retroalimentacion accionable: «Artefacto: script DDL.</a:t>
-            </a:r>
-          </a:p>
-          <a:p>
-            <a:r>
-              <a:t>Observacion: la tabla detalle_factura no tiene FOREIGN KEY hacia insumo, aunque el ER dibuja la relacion.</a:t>
-            </a:r>
-          </a:p>
-          <a:p>
-            <a:r>
-              <a:t>Impacto: se pueden insertar detalles con insumos que no existen.</a:t>
-            </a:r>
-          </a:p>
-          <a:p>
-            <a:r>
-              <a:t>Accion: agregar la restriccion y volver a ejecutar el script completo desde cero en un entorno limpio.</a:t>
-            </a:r>
-          </a:p>
-          <a:p>
-            <a:r>
-              <a:t>Fecha: antes de la Clase 12.» La diferencia entre las dos no es cortesia, es verificabilidad: el segundo hallazgo se puede cerrar y cualquiera puede comprobar que se cerro.</a:t>
-            </a:r>
-          </a:p>
-          <a:p>
-            <a:r>
-              <a:t>La regla de dosificacion es de tres a cinco hallazgos por estudiante.</a:t>
-            </a:r>
-          </a:p>
-          <a:p>
-            <a:r>
-              <a:t>NOTAS:</a:t>
-            </a:r>
-          </a:p>
-          <a:p>
-            <a:r>
-              <a:t>Comparense los dos extremos.</a:t>
-            </a:r>
-          </a:p>
-          <a:p>
-            <a:r>
-              <a:t>Responsable: Carlos.</a:t>
-            </a:r>
-          </a:p>
-          <a:p>
-            <a:r>
-              <a:t>Fuera de la lamina (habla de la practica): Impacto: se pueden insertar detalles con insumos que no existen; afecta los 20 puntos de modelo coherente.</a:t>
-            </a:r>
-          </a:p>
-          <a:p>
-            <a:r>
-              <a:t>Fuera de la lamina (habla de la practica): La regla de dosificacion es de tres a cinco hallazgos por estudiante, priorizados por puntos de rubrica en riesgo; mas de cinco desmoraliza y nadie los cierra, y menos de tres casi siempre significa que la revision fue superficial.</a:t>
+              <a:t>QUÉ ES (dilo así): La retroalimentación útil se escribe siempre con la misma forma, para que el acta sea una lista de tareas y no un desahogo. Cada hallazgo dice qué pieza, qué se observó, por qué importa, qué hacer y quién lo hace para cuándo.</a:t>
+            </a:r>
+          </a:p>
+          <a:p/>
+          <a:p>
+            <a:r>
+              <a:t>CÓMO DARLA (≈5 min):</a:t>
+            </a:r>
+          </a:p>
+          <a:p>
+            <a:r>
+              <a:t>  • Al entrar: La versión inútil: «el modelo está flojo, mejórenlo». No dice qué mirar ni cómo saber cuándo está resuelto.</a:t>
+            </a:r>
+          </a:p>
+          <a:p>
+            <a:r>
+              <a:t>  • Clic 1: La versión accionable, parte por parte: artefacto, el script DDL; observación, detalle_factura no tiene FOREIGN KEY hacia insumo aunque el ER dibuja la relación; impacto, se pueden insertar detalles con insumos que no existen; acción, agregar la restricción y re-ejecutar el script completo desde cero; responsable y fecha, el autor, antes de la próxima sesión.</a:t>
+            </a:r>
+          </a:p>
+          <a:p>
+            <a:r>
+              <a:t>  • Clic 2: La diferencia no es cortesía, es verificabilidad. Y la dosis: de tres a cinco hallazgos por persona; más de cinco desmoraliza y nadie los cierra, menos de tres suele ser una revisión superficial.</a:t>
+            </a:r>
+          </a:p>
+          <a:p/>
+          <a:p>
+            <a:r>
+              <a:t>EJEMPLO: La observación se prueba con SQL: INSERT INTO detalle_factura (id_factura, id_insumo, cantidad, precio_unit) VALUES (1, 999, 1, 1000); si entra, falta la FK; si responde «violates foreign key constraint», el hallazgo está cerrado.</a:t>
+            </a:r>
+          </a:p>
+          <a:p/>
+          <a:p>
+            <a:r>
+              <a:t>SI PREGUNTAN:</a:t>
+            </a:r>
+          </a:p>
+          <a:p>
+            <a:r>
+              <a:t>  • «¿Por qué re-ejecutar todo el script desde cero?» → Porque un ALTER aplicado a mano en la base de uno no queda en el script: la prueba de que quedó es que el script completo corra limpio en una base vacía.</a:t>
+            </a:r>
+          </a:p>
+          <a:p/>
+          <a:p>
+            <a:r>
+              <a:t>CUIDADO: La observación tiene que ser verificable: «la FK no existe» se comprueba; «el modelo está raro», no.</a:t>
+            </a:r>
+          </a:p>
+          <a:p/>
+          <a:p>
+            <a:r>
+              <a:t>PASA A LA SIGUIENTE: ¿Y si la revisión no encuentra nada? Entonces se desperdició.</a:t>
             </a:r>
           </a:p>
         </p:txBody>
@@ -1271,67 +1852,236 @@
           <a:lstStyle/>
           <a:p>
             <a:r>
-              <a:t>DESARROLLO (para explicarlo, no se proyecta):</a:t>
-            </a:r>
-          </a:p>
-          <a:p>
-            <a:r>
-              <a:t>Un checkpoint sin hallazgos concretos es un checkpoint desperdiciado, y esa afirmacion merece justificacion porque suena severa.</a:t>
-            </a:r>
-          </a:p>
-          <a:p>
-            <a:r>
-              <a:t>El unico valor de un punto de control intermedio es que todavia existe tiempo para corregir, y ese valor se realiza solo si de la sesion sale una lista escrita de cosas por corregir.</a:t>
-            </a:r>
-          </a:p>
-          <a:p>
-            <a:r>
-              <a:t>Cuando el docente dice «todo bien, sigan asi», el estudiante interpreta legitimamente que su trabajo esta aprobado, deja de revisarlo, y el defecto reaparece en la entrega final cuando ya no hay clases para arreglarlo: es un costo diferido, no un ahorro.</a:t>
-            </a:r>
-          </a:p>
-          <a:p>
-            <a:r>
-              <a:t>La primera: «esto tiene nota?».</a:t>
-            </a:r>
-          </a:p>
-          <a:p>
-            <a:r>
-              <a:t>La segunda: «si quien me audita encuentra fallas, me baja la nota?».</a:t>
-            </a:r>
-          </a:p>
-          <a:p>
-            <a:r>
-              <a:t>Y revisar el trabajo de otro tiene un beneficio propio bien documentado: los defectos ajenos se ven mucho mas rapido que los propios, y casi siempre quien audita vuelve a su carpeta y arregla en silencio el mismo problema que acaba de senalar.</a:t>
-            </a:r>
-          </a:p>
-          <a:p>
-            <a:r>
-              <a:t>Todo esto se apoya en lo hecho hasta la Clase 10 (el informe de escenarios de concurrencia es una de las evidencias que hoy se audita) y alimenta directamente la Clase 12</a:t>
-            </a:r>
-          </a:p>
-          <a:p>
-            <a:r>
-              <a:t>Donde el contrato de operaciones solo puede escribirse sobre procedimientos que existan y funcionen, y la Clase 15, donde se sustenta.</a:t>
-            </a:r>
-          </a:p>
-          <a:p>
-            <a:r>
-              <a:t>NOTAS:</a:t>
-            </a:r>
-          </a:p>
-          <a:p>
-            <a:r>
-              <a:t>Aqui aparecen las dos preguntas previsibles del estudiante.</a:t>
-            </a:r>
-          </a:p>
-          <a:p>
-            <a:r>
-              <a:t>Fuera de la lamina (habla de la practica): La respuesta es que el checkpoint en si no califica el producto, pero es la ultima oportunidad de mover puntos de la rubrica antes de la entrega, y por eso conviene llegar con lo peor y no con lo mejor: un estudiante que esconde su parte floja para no verse mal pierde justamente la revision que la habria arreglado.</a:t>
-            </a:r>
-          </a:p>
-          <a:p>
-            <a:r>
-              <a:t>Fuera de la lamina (habla de la practica): No, porque el auditor par no califica.</a:t>
+              <a:t>QUÉ ES (dilo así): Un punto de control intermedio solo vale si de él sale una lista de cosas por corregir mientras aún hay clases para hacerlo. Un «todo bien» no ahorra trabajo: lo aplaza al momento en que ya no se puede arreglar.</a:t>
+            </a:r>
+          </a:p>
+          <a:p/>
+          <a:p>
+            <a:r>
+              <a:t>CÓMO DARLA (≈4 min):</a:t>
+            </a:r>
+          </a:p>
+          <a:p>
+            <a:r>
+              <a:t>  • Al entrar: La línea del tiempo: checkpoint y entrega. Entre los dos, la franja verde es el tiempo que queda para corregir.</a:t>
+            </a:r>
+          </a:p>
+          <a:p>
+            <a:r>
+              <a:t>  • Clic 1: Con hallazgos concretos: el defecto aparece en el checkpoint, se anota y se corrige dentro de esa franja.</a:t>
+            </a:r>
+          </a:p>
+          <a:p>
+            <a:r>
+              <a:t>  • Clic 2: Con «todo bien, sigan así»: el estudiante entiende, con razón, que su trabajo está aprobado; deja de revisarlo y el defecto llega intacto a la entrega, cuando ya no hay tiempo. Es un costo diferido, no un ahorro.</a:t>
+            </a:r>
+          </a:p>
+          <a:p/>
+          <a:p>
+            <a:r>
+              <a:t>EJEMPLO: La revisión entre pares tiene un beneficio propio: quien revisa casi siempre vuelve a su carpeta y arregla en silencio el mismo problema que acaba de señalar.</a:t>
+            </a:r>
+          </a:p>
+          <a:p/>
+          <a:p>
+            <a:r>
+              <a:t>SI PREGUNTAN:</a:t>
+            </a:r>
+          </a:p>
+          <a:p>
+            <a:r>
+              <a:t>  • «¿Llego con lo mejor o con lo peor?» → Con lo peor: es lo que la revisión puede arreglar. Esconder la parte floja es perder justo la ayuda que se vino a buscar.</a:t>
+            </a:r>
+          </a:p>
+          <a:p/>
+          <a:p>
+            <a:r>
+              <a:t>CUIDADO: Convertir el checkpoint en una clase de repaso porque incomoda no tener tema nuevo: el tiempo se va explicando y nadie sale con su acta, que era el producto del día.</a:t>
+            </a:r>
+          </a:p>
+          <a:p/>
+          <a:p>
+            <a:r>
+              <a:t>PASA A LA SIGUIENTE: Para que los hallazgos salgan de datos y no de opiniones: más consultas al catálogo.</a:t>
+            </a:r>
+          </a:p>
+        </p:txBody>
+      </p:sp>
+      <p:sp>
+        <p:nvSpPr>
+          <p:cNvPr id="4" name="Slide Number Placeholder 3"/>
+          <p:cNvSpPr>
+            <a:spLocks noGrp="1"/>
+          </p:cNvSpPr>
+          <p:nvPr>
+            <p:ph type="sldNum" idx="5" sz="quarter"/>
+          </p:nvPr>
+        </p:nvSpPr>
+        <p:spPr/>
+      </p:sp>
+    </p:spTree>
+  </p:cSld>
+  <p:clrMapOvr>
+    <a:masterClrMapping/>
+  </p:clrMapOvr>
+</p:notes>
+</file>
+
+<file path=ppt/notesSlides/notesSlide8.xml><?xml version="1.0" encoding="utf-8"?>
+<p:notes xmlns:a="http://schemas.openxmlformats.org/drawingml/2006/main" xmlns:p="http://schemas.openxmlformats.org/presentationml/2006/main" xmlns:r="http://schemas.openxmlformats.org/officeDocument/2006/relationships">
+  <p:cSld>
+    <p:spTree>
+      <p:nvGrpSpPr>
+        <p:cNvPr id="1" name=""/>
+        <p:cNvGrpSpPr/>
+        <p:nvPr/>
+      </p:nvGrpSpPr>
+      <p:grpSpPr>
+        <a:xfrm>
+          <a:off x="0" y="0"/>
+          <a:ext cx="0" cy="0"/>
+          <a:chOff x="0" y="0"/>
+          <a:chExt cx="0" cy="0"/>
+        </a:xfrm>
+      </p:grpSpPr>
+      <p:sp>
+        <p:nvSpPr>
+          <p:cNvPr id="2" name="Slide Image Placeholder 1"/>
+          <p:cNvSpPr>
+            <a:spLocks noGrp="1"/>
+          </p:cNvSpPr>
+          <p:nvPr>
+            <p:ph type="sldImg" idx="2"/>
+          </p:nvPr>
+        </p:nvSpPr>
+        <p:spPr/>
+      </p:sp>
+      <p:sp>
+        <p:nvSpPr>
+          <p:cNvPr id="3" name="Notes Placeholder 2"/>
+          <p:cNvSpPr>
+            <a:spLocks noGrp="1"/>
+          </p:cNvSpPr>
+          <p:nvPr>
+            <p:ph type="body" idx="3" sz="quarter"/>
+          </p:nvPr>
+        </p:nvSpPr>
+        <p:spPr/>
+        <p:txBody>
+          <a:bodyPr/>
+          <a:lstStyle/>
+          <a:p>
+            <a:r>
+              <a:t>QUÉ ES (dilo así): Hoy no hay SQL nuevo: hoy se revisa lo construido. Una revisión técnica bien hecha encuentra los defectos mientras todavía hay tiempo de corregirlos, y deja una lista escrita de qué arreglar.</a:t>
+            </a:r>
+          </a:p>
+          <a:p/>
+          <a:p>
+            <a:r>
+              <a:t>CÓMO DARLA (≈4 min):</a:t>
+            </a:r>
+          </a:p>
+          <a:p>
+            <a:r>
+              <a:t>  • Al entrar: Lee el tema y pregunta: «si hoy alguien abriera su base sin conocerlos, ¿qué sería lo primero que no coincide con lo que dice su diagrama?». Toma dos respuestas.</a:t>
+            </a:r>
+          </a:p>
+          <a:p>
+            <a:r>
+              <a:t>  • Después: Cierra: «al final cada uno sale con su acta de hallazgos; cada hallazgo, demostrado con una ejecución».</a:t>
+            </a:r>
+          </a:p>
+          <a:p/>
+          <a:p>
+            <a:r>
+              <a:t>CUIDADO: Esta sesión es doble: la Clase 11 y la 12 van el mismo día. Cuida el tiempo de la revisión para que la integración no quede comprimida.</a:t>
+            </a:r>
+          </a:p>
+          <a:p/>
+          <a:p>
+            <a:r>
+              <a:t>PASA A LA SIGUIENTE: Primero, qué es una revisión técnica y con qué producto se sale.</a:t>
+            </a:r>
+          </a:p>
+        </p:txBody>
+      </p:sp>
+      <p:sp>
+        <p:nvSpPr>
+          <p:cNvPr id="4" name="Slide Number Placeholder 3"/>
+          <p:cNvSpPr>
+            <a:spLocks noGrp="1"/>
+          </p:cNvSpPr>
+          <p:nvPr>
+            <p:ph type="sldNum" idx="5" sz="quarter"/>
+          </p:nvPr>
+        </p:nvSpPr>
+        <p:spPr/>
+      </p:sp>
+    </p:spTree>
+  </p:cSld>
+  <p:clrMapOvr>
+    <a:masterClrMapping/>
+  </p:clrMapOvr>
+</p:notes>
+</file>
+
+<file path=ppt/notesSlides/notesSlide9.xml><?xml version="1.0" encoding="utf-8"?>
+<p:notes xmlns:a="http://schemas.openxmlformats.org/drawingml/2006/main" xmlns:p="http://schemas.openxmlformats.org/presentationml/2006/main" xmlns:r="http://schemas.openxmlformats.org/officeDocument/2006/relationships">
+  <p:cSld>
+    <p:spTree>
+      <p:nvGrpSpPr>
+        <p:cNvPr id="1" name=""/>
+        <p:cNvGrpSpPr/>
+        <p:nvPr/>
+      </p:nvGrpSpPr>
+      <p:grpSpPr>
+        <a:xfrm>
+          <a:off x="0" y="0"/>
+          <a:ext cx="0" cy="0"/>
+          <a:chOff x="0" y="0"/>
+          <a:chExt cx="0" cy="0"/>
+        </a:xfrm>
+      </p:grpSpPr>
+      <p:sp>
+        <p:nvSpPr>
+          <p:cNvPr id="2" name="Slide Image Placeholder 1"/>
+          <p:cNvSpPr>
+            <a:spLocks noGrp="1"/>
+          </p:cNvSpPr>
+          <p:nvPr>
+            <p:ph type="sldImg" idx="2"/>
+          </p:nvPr>
+        </p:nvSpPr>
+        <p:spPr/>
+      </p:sp>
+      <p:sp>
+        <p:nvSpPr>
+          <p:cNvPr id="3" name="Notes Placeholder 2"/>
+          <p:cNvSpPr>
+            <a:spLocks noGrp="1"/>
+          </p:cNvSpPr>
+          <p:nvPr>
+            <p:ph type="body" idx="3" sz="quarter"/>
+          </p:nvPr>
+        </p:nvSpPr>
+        <p:spPr/>
+        <p:txBody>
+          <a:bodyPr/>
+          <a:lstStyle/>
+          <a:p>
+            <a:r>
+              <a:t>QUÉ ES (dilo así): El recorrido del bloque: teoría con una lámina por concepto, demo de una revisión real y práctica opcional.</a:t>
+            </a:r>
+          </a:p>
+          <a:p/>
+          <a:p>
+            <a:r>
+              <a:t>CÓMO DARLA (≈1 min):</a:t>
+            </a:r>
+          </a:p>
+          <a:p>
+            <a:r>
+              <a:t>  • Al entrar: Señala solo los tramos; no te detengas. La práctica está en la carpeta de la clase y es opcional.</a:t>
             </a:r>
           </a:p>
         </p:txBody>
@@ -5046,7 +5796,25 @@
                 </a:solidFill>
                 <a:latin typeface="Calibri"/>
               </a:rPr>
-              <a:t>–   La retroalimentacion util tiene una anatomia fija, y conviene que el docente la escriba siempre igual porque asi el acta se vuelve una lista de…</a:t>
+              <a:t>–   «El modelo está flojo, mejórenlo» no sirve, porque no dice </a:t>
+            </a:r>
+            <a:r>
+              <a:rPr sz="2000" b="1" i="0">
+                <a:solidFill>
+                  <a:srgbClr val="333333"/>
+                </a:solidFill>
+                <a:latin typeface="Calibri"/>
+              </a:rPr>
+              <a:t>qué mirar</a:t>
+            </a:r>
+            <a:r>
+              <a:rPr sz="2000" b="0" i="0">
+                <a:solidFill>
+                  <a:srgbClr val="333333"/>
+                </a:solidFill>
+                <a:latin typeface="Calibri"/>
+              </a:rPr>
+              <a:t> ni cuándo queda resuelto.</a:t>
             </a:r>
           </a:p>
           <a:p>
@@ -5062,7 +5830,25 @@
                 </a:solidFill>
                 <a:latin typeface="Calibri"/>
               </a:rPr>
-              <a:t>–   Un hallazgo bien formulado tiene cinco partes: artefacto, observacion verificable, impacto, accion y responsable con fecha.</a:t>
+              <a:t>–   Un hallazgo útil tiene cinco partes: </a:t>
+            </a:r>
+            <a:r>
+              <a:rPr sz="2000" b="1" i="0">
+                <a:solidFill>
+                  <a:srgbClr val="333333"/>
+                </a:solidFill>
+                <a:latin typeface="Calibri"/>
+              </a:rPr>
+              <a:t>artefacto, observación, impacto, acción y responsable con fecha</a:t>
+            </a:r>
+            <a:r>
+              <a:rPr sz="2000" b="0" i="0">
+                <a:solidFill>
+                  <a:srgbClr val="333333"/>
+                </a:solidFill>
+                <a:latin typeface="Calibri"/>
+              </a:rPr>
+              <a:t>.</a:t>
             </a:r>
           </a:p>
           <a:p>
@@ -5078,7 +5864,59 @@
                 </a:solidFill>
                 <a:latin typeface="Calibri"/>
               </a:rPr>
-              <a:t>–   Retroalimentacion inutil: «el modelo esta flojo, mejorenlo»; no dice que mirar ni como saber cuando esta resuelto.</a:t>
+              <a:t>–   La diferencia es la </a:t>
+            </a:r>
+            <a:r>
+              <a:rPr sz="2000" b="1" i="0">
+                <a:solidFill>
+                  <a:srgbClr val="333333"/>
+                </a:solidFill>
+                <a:latin typeface="Calibri"/>
+              </a:rPr>
+              <a:t>verificabilidad</a:t>
+            </a:r>
+            <a:r>
+              <a:rPr sz="2000" b="0" i="0">
+                <a:solidFill>
+                  <a:srgbClr val="333333"/>
+                </a:solidFill>
+                <a:latin typeface="Calibri"/>
+              </a:rPr>
+              <a:t>: cualquiera puede comprobar que el hallazgo se cerró.</a:t>
+            </a:r>
+          </a:p>
+          <a:p>
+            <a:pPr>
+              <a:spcAft>
+                <a:spcPts val="800"/>
+              </a:spcAft>
+            </a:pPr>
+            <a:r>
+              <a:rPr sz="2000" b="0" i="0">
+                <a:solidFill>
+                  <a:srgbClr val="333333"/>
+                </a:solidFill>
+                <a:latin typeface="Calibri"/>
+              </a:rPr>
+              <a:t>–   Se escriben de </a:t>
+            </a:r>
+            <a:r>
+              <a:rPr sz="2000" b="1" i="0">
+                <a:solidFill>
+                  <a:srgbClr val="333333"/>
+                </a:solidFill>
+                <a:latin typeface="Calibri"/>
+              </a:rPr>
+              <a:t>3 a 5</a:t>
+            </a:r>
+            <a:r>
+              <a:rPr sz="2000" b="0" i="0">
+                <a:solidFill>
+                  <a:srgbClr val="333333"/>
+                </a:solidFill>
+                <a:latin typeface="Calibri"/>
+              </a:rPr>
+              <a:t> hallazgos por persona, los de más peso primero.</a:t>
             </a:r>
           </a:p>
         </p:txBody>
@@ -5586,7 +6424,25 @@
                 </a:solidFill>
                 <a:latin typeface="Calibri"/>
               </a:rPr>
-              <a:t>–   Un checkpoint sin hallazgos concretos es un checkpoint desperdiciado, y esa afirmacion merece justificacion porque suena severa.</a:t>
+              <a:t>–   El único valor de un </a:t>
+            </a:r>
+            <a:r>
+              <a:rPr sz="2000" b="1" i="0">
+                <a:solidFill>
+                  <a:srgbClr val="333333"/>
+                </a:solidFill>
+                <a:latin typeface="Calibri"/>
+              </a:rPr>
+              <a:t>checkpoint</a:t>
+            </a:r>
+            <a:r>
+              <a:rPr sz="2000" b="0" i="0">
+                <a:solidFill>
+                  <a:srgbClr val="333333"/>
+                </a:solidFill>
+                <a:latin typeface="Calibri"/>
+              </a:rPr>
+              <a:t> es que todavía hay tiempo para corregir.</a:t>
             </a:r>
           </a:p>
           <a:p>
@@ -5602,7 +6458,25 @@
                 </a:solidFill>
                 <a:latin typeface="Calibri"/>
               </a:rPr>
-              <a:t>–   El unico valor de un punto de control intermedio es que todavia existe tiempo para corregir.</a:t>
+              <a:t>–   Con hallazgos escritos, el defecto se </a:t>
+            </a:r>
+            <a:r>
+              <a:rPr sz="2000" b="1" i="0">
+                <a:solidFill>
+                  <a:srgbClr val="333333"/>
+                </a:solidFill>
+                <a:latin typeface="Calibri"/>
+              </a:rPr>
+              <a:t>corrige a tiempo</a:t>
+            </a:r>
+            <a:r>
+              <a:rPr sz="2000" b="0" i="0">
+                <a:solidFill>
+                  <a:srgbClr val="333333"/>
+                </a:solidFill>
+                <a:latin typeface="Calibri"/>
+              </a:rPr>
+              <a:t>, antes de la entrega.</a:t>
             </a:r>
           </a:p>
           <a:p>
@@ -5618,7 +6492,25 @@
                 </a:solidFill>
                 <a:latin typeface="Calibri"/>
               </a:rPr>
-              <a:t>–   Cuando el docente dice «todo bien, sigan asi», el estudiante interpreta legitimamente que su trabajo esta aprobado, deja de revisarlo.</a:t>
+              <a:t>–   «Todo bien, sigan así» hace que se deje de revisar y el defecto </a:t>
+            </a:r>
+            <a:r>
+              <a:rPr sz="2000" b="1" i="0">
+                <a:solidFill>
+                  <a:srgbClr val="333333"/>
+                </a:solidFill>
+                <a:latin typeface="Calibri"/>
+              </a:rPr>
+              <a:t>llega a la entrega</a:t>
+            </a:r>
+            <a:r>
+              <a:rPr sz="2000" b="0" i="0">
+                <a:solidFill>
+                  <a:srgbClr val="333333"/>
+                </a:solidFill>
+                <a:latin typeface="Calibri"/>
+              </a:rPr>
+              <a:t>.</a:t>
             </a:r>
           </a:p>
           <a:p>
@@ -5634,7 +6526,25 @@
                 </a:solidFill>
                 <a:latin typeface="Calibri"/>
               </a:rPr>
-              <a:t>–   La primera: «esto tiene nota?».</a:t>
+              <a:t>–   Revisar el trabajo de otro ayuda: los </a:t>
+            </a:r>
+            <a:r>
+              <a:rPr sz="2000" b="1" i="0">
+                <a:solidFill>
+                  <a:srgbClr val="333333"/>
+                </a:solidFill>
+                <a:latin typeface="Calibri"/>
+              </a:rPr>
+              <a:t>defectos ajenos</a:t>
+            </a:r>
+            <a:r>
+              <a:rPr sz="2000" b="0" i="0">
+                <a:solidFill>
+                  <a:srgbClr val="333333"/>
+                </a:solidFill>
+                <a:latin typeface="Calibri"/>
+              </a:rPr>
+              <a:t> se ven más rápido que los propios.</a:t>
             </a:r>
           </a:p>
         </p:txBody>
@@ -7756,14 +8666,83 @@
       </p:sp>
       <p:sp>
         <p:nvSpPr>
-          <p:cNvPr id="5" name="TextBox 4"/>
+          <p:cNvPr id="5" name="Rounded Rectangle 4"/>
+          <p:cNvSpPr/>
+          <p:nvPr/>
+        </p:nvSpPr>
+        <p:spPr>
+          <a:xfrm>
+            <a:off x="5797149" y="1343926"/>
+            <a:ext cx="6010497" cy="4837658"/>
+          </a:xfrm>
+          <a:prstGeom prst="roundRect">
+            <a:avLst>
+              <a:gd name="adj" fmla="val 4000"/>
+            </a:avLst>
+          </a:prstGeom>
+          <a:solidFill>
+            <a:srgbClr val="E8EEF4"/>
+          </a:solidFill>
+          <a:ln>
+            <a:noFill/>
+          </a:ln>
+        </p:spPr>
+        <p:style>
+          <a:lnRef idx="1">
+            <a:schemeClr val="accent1"/>
+          </a:lnRef>
+          <a:fillRef idx="3">
+            <a:schemeClr val="accent1"/>
+          </a:fillRef>
+          <a:effectRef idx="2">
+            <a:schemeClr val="accent1"/>
+          </a:effectRef>
+          <a:fontRef idx="minor">
+            <a:schemeClr val="lt1"/>
+          </a:fontRef>
+        </p:style>
+        <p:txBody>
+          <a:bodyPr rtlCol="0" anchor="ctr"/>
+          <a:lstStyle/>
+          <a:p>
+            <a:pPr algn="ctr"/>
+          </a:p>
+        </p:txBody>
+      </p:sp>
+      <p:pic>
+        <p:nvPicPr>
+          <p:cNvPr id="6" name="Picture 5" descr="ilus-demo-paso1.png"/>
+          <p:cNvPicPr>
+            <a:picLocks noChangeAspect="1"/>
+          </p:cNvPicPr>
+          <p:nvPr/>
+        </p:nvPicPr>
+        <p:blipFill>
+          <a:blip r:embed="rId2"/>
+          <a:stretch>
+            <a:fillRect/>
+          </a:stretch>
+        </p:blipFill>
+        <p:spPr>
+          <a:xfrm>
+            <a:off x="5870301" y="1417078"/>
+            <a:ext cx="5864193" cy="4691354"/>
+          </a:xfrm>
+          <a:prstGeom prst="rect">
+            <a:avLst/>
+          </a:prstGeom>
+        </p:spPr>
+      </p:pic>
+      <p:sp>
+        <p:nvSpPr>
+          <p:cNvPr id="7" name="TextBox 6"/>
           <p:cNvSpPr txBox="1"/>
           <p:nvPr/>
         </p:nvSpPr>
         <p:spPr>
           <a:xfrm>
-            <a:off x="457200" y="1170432"/>
-            <a:ext cx="11277295" cy="5230368"/>
+            <a:off x="457200" y="1353312"/>
+            <a:ext cx="5093061" cy="5047488"/>
           </a:xfrm>
           <a:prstGeom prst="rect">
             <a:avLst/>
@@ -7788,7 +8767,7 @@
                 </a:solidFill>
                 <a:latin typeface="Calibri"/>
               </a:rPr>
-              <a:t>–   </a:t>
+              <a:t>–   Cada hallazgo sale de una </a:t>
             </a:r>
             <a:r>
               <a:rPr sz="2000" b="1" i="0">
@@ -7797,7 +8776,7 @@
                 </a:solidFill>
                 <a:latin typeface="Calibri"/>
               </a:rPr>
-              <a:t>Herramienta:</a:t>
+              <a:t>ejecución</a:t>
             </a:r>
             <a:r>
               <a:rPr sz="2000" b="0" i="0">
@@ -7806,7 +8785,7 @@
                 </a:solidFill>
                 <a:latin typeface="Calibri"/>
               </a:rPr>
-              <a:t> Live SQL / DB Fiddle + draw.io</a:t>
+              <a:t>: el catálogo, el CALL válido y el CALL inválido.</a:t>
             </a:r>
           </a:p>
           <a:p>
@@ -7822,7 +8801,7 @@
                 </a:solidFill>
                 <a:latin typeface="Calibri"/>
               </a:rPr>
-              <a:t>–   </a:t>
+              <a:t>–   El ER se compara con el </a:t>
             </a:r>
             <a:r>
               <a:rPr sz="2000" b="1" i="0">
@@ -7831,7 +8810,7 @@
                 </a:solidFill>
                 <a:latin typeface="Calibri"/>
               </a:rPr>
-              <a:t>Demo:</a:t>
+              <a:t>DDL real</a:t>
             </a:r>
             <a:r>
               <a:rPr sz="2000" b="0" i="0">
@@ -7840,7 +8819,7 @@
                 </a:solidFill>
                 <a:latin typeface="Calibri"/>
               </a:rPr>
-              <a:t> Recorrido de checklist + ejemplo demo de 3 min.</a:t>
+              <a:t>, en los dos sentidos.</a:t>
             </a:r>
           </a:p>
           <a:p>
@@ -7856,15 +8835,17 @@
                 </a:solidFill>
                 <a:latin typeface="Calibri"/>
               </a:rPr>
-              <a:t>–   Sigan el mismo dominio de la clínica (no inventen otro caso).</a:t>
-            </a:r>
-          </a:p>
-          <a:p>
-            <a:pPr>
-              <a:spcAft>
-                <a:spcPts val="800"/>
-              </a:spcAft>
-            </a:pPr>
+              <a:t>–   Cada hallazgo se escribe con sus </a:t>
+            </a:r>
+            <a:r>
+              <a:rPr sz="2000" b="1" i="0">
+                <a:solidFill>
+                  <a:srgbClr val="333333"/>
+                </a:solidFill>
+                <a:latin typeface="Calibri"/>
+              </a:rPr>
+              <a:t>cinco partes</a:t>
+            </a:r>
             <a:r>
               <a:rPr sz="2000" b="0" i="0">
                 <a:solidFill>
@@ -7872,66 +8853,14 @@
                 </a:solidFill>
                 <a:latin typeface="Calibri"/>
               </a:rPr>
-              <a:t>–   </a:t>
-            </a:r>
-            <a:r>
-              <a:rPr sz="2000" b="1" i="0">
-                <a:solidFill>
-                  <a:srgbClr val="333333"/>
-                </a:solidFill>
-                <a:latin typeface="Calibri"/>
-              </a:rPr>
-              <a:t>Qué observar:</a:t>
-            </a:r>
-            <a:r>
-              <a:rPr sz="2000" b="0" i="0">
-                <a:solidFill>
-                  <a:srgbClr val="333333"/>
-                </a:solidFill>
-                <a:latin typeface="Calibri"/>
-              </a:rPr>
-              <a:t> cada hallazgo se demuestra con una ejecucion: el DDL contra el ER y el procedimiento con un caso valido y uno invalido.</a:t>
-            </a:r>
-          </a:p>
-          <a:p>
-            <a:pPr>
-              <a:spcAft>
-                <a:spcPts val="800"/>
-              </a:spcAft>
-            </a:pPr>
-            <a:r>
-              <a:rPr sz="2000" b="0" i="0">
-                <a:solidFill>
-                  <a:srgbClr val="333333"/>
-                </a:solidFill>
-                <a:latin typeface="Calibri"/>
-              </a:rPr>
-              <a:t>–   </a:t>
-            </a:r>
-            <a:r>
-              <a:rPr sz="2000" b="1" i="0">
-                <a:solidFill>
-                  <a:srgbClr val="333333"/>
-                </a:solidFill>
-                <a:latin typeface="Calibri"/>
-              </a:rPr>
-              <a:t>Qué observar:</a:t>
-            </a:r>
-            <a:r>
-              <a:rPr sz="2000" b="0" i="0">
-                <a:solidFill>
-                  <a:srgbClr val="333333"/>
-                </a:solidFill>
-                <a:latin typeface="Calibri"/>
-              </a:rPr>
-              <a:t> un hallazgo util nombra el artefacto, el problema, su impacto en la clínica y la accion concreta que lo corrige.</a:t>
-            </a:r>
-          </a:p>
-        </p:txBody>
-      </p:sp>
-      <p:sp>
-        <p:nvSpPr>
-          <p:cNvPr id="6" name="TextBox 5"/>
+              <a:t>: artefacto, observación, impacto, acción y responsable.</a:t>
+            </a:r>
+          </a:p>
+        </p:txBody>
+      </p:sp>
+      <p:sp>
+        <p:nvSpPr>
+          <p:cNvPr id="8" name="TextBox 7"/>
           <p:cNvSpPr txBox="1"/>
           <p:nvPr/>
         </p:nvSpPr>
@@ -9293,7 +10222,7 @@
                 </a:solidFill>
                 <a:latin typeface="Calibri"/>
               </a:rPr>
-              <a:t> Avance proyecto · la base de la clínica</a:t>
+              <a:t> la revisión técnica del avance de la base de la clínica.</a:t>
             </a:r>
           </a:p>
           <a:p>
@@ -9318,7 +10247,7 @@
                 </a:solidFill>
                 <a:latin typeface="Calibri"/>
               </a:rPr>
-              <a:t>Live SQL / DB Fiddle + draw.io</a:t>
+              <a:t>PostgreSQL en el navegador</a:t>
             </a:r>
             <a:r>
               <a:rPr sz="2000" b="0" i="0">
@@ -9327,7 +10256,7 @@
                 </a:solidFill>
                 <a:latin typeface="Calibri"/>
               </a:rPr>
-              <a:t> · Bloque </a:t>
+              <a:t> y un editor de diagramas · Bloque </a:t>
             </a:r>
             <a:r>
               <a:rPr sz="2000" b="1" i="0">
@@ -9352,7 +10281,7 @@
                 </a:solidFill>
                 <a:latin typeface="Calibri"/>
               </a:rPr>
-              <a:t>–   Gratis + navegador · free tier · sin software de pago obligatorio.</a:t>
+              <a:t>–   Gratis + navegador · sin software de pago obligatorio.</a:t>
             </a:r>
           </a:p>
           <a:p>
@@ -9418,7 +10347,7 @@
                 </a:solidFill>
                 <a:latin typeface="Calibri"/>
               </a:rPr>
-              <a:t> Que es una revision tecnica, y con que producto se sale · Lo que se audita es la coherencia entre piezas · Verificaciones uno y dos · Verificacion tres.</a:t>
+              <a:t> revisión técnica · coherencia entre piezas · verificaciones cruzadas · control del alcance · el hallazgo útil.</a:t>
             </a:r>
           </a:p>
         </p:txBody>
@@ -10573,9 +11502,33 @@
           </a:prstGeom>
         </p:spPr>
       </p:pic>
-      <p:sp>
-        <p:nvSpPr>
-          <p:cNvPr id="13" name="TextBox 12"/>
+      <p:pic>
+        <p:nvPicPr>
+          <p:cNvPr id="9" name="Picture 8" descr="revision-roles-paso4.png"/>
+          <p:cNvPicPr>
+            <a:picLocks noChangeAspect="1"/>
+          </p:cNvPicPr>
+          <p:nvPr/>
+        </p:nvPicPr>
+        <p:blipFill>
+          <a:blip r:embed="rId5"/>
+          <a:stretch>
+            <a:fillRect/>
+          </a:stretch>
+        </p:blipFill>
+        <p:spPr>
+          <a:xfrm>
+            <a:off x="5876318" y="1261872"/>
+            <a:ext cx="5852160" cy="4681728"/>
+          </a:xfrm>
+          <a:prstGeom prst="rect">
+            <a:avLst/>
+          </a:prstGeom>
+        </p:spPr>
+      </p:pic>
+      <p:sp>
+        <p:nvSpPr>
+          <p:cNvPr id="18" name="TextBox 17"/>
           <p:cNvSpPr txBox="1"/>
           <p:nvPr/>
         </p:nvSpPr>
@@ -10610,7 +11563,7 @@
       </p:sp>
       <p:sp>
         <p:nvSpPr>
-          <p:cNvPr id="14" name="TextBox 13"/>
+          <p:cNvPr id="19" name="TextBox 18"/>
           <p:cNvSpPr txBox="1"/>
           <p:nvPr/>
         </p:nvSpPr>
@@ -10642,7 +11595,25 @@
                 </a:solidFill>
                 <a:latin typeface="Calibri"/>
               </a:rPr>
-              <a:t>–   Una revision tecnica es una reunion con un proposito unico: encontrar defectos en un artefacto antes de que cuesten caro, y salir con un producto…</a:t>
+              <a:t>–   Una </a:t>
+            </a:r>
+            <a:r>
+              <a:rPr sz="2000" b="1" i="0">
+                <a:solidFill>
+                  <a:srgbClr val="333333"/>
+                </a:solidFill>
+                <a:latin typeface="Calibri"/>
+              </a:rPr>
+              <a:t>revisión técnica</a:t>
+            </a:r>
+            <a:r>
+              <a:rPr sz="2000" b="0" i="0">
+                <a:solidFill>
+                  <a:srgbClr val="333333"/>
+                </a:solidFill>
+                <a:latin typeface="Calibri"/>
+              </a:rPr>
+              <a:t> busca defectos en un artefacto antes de que cuesten caro.</a:t>
             </a:r>
           </a:p>
           <a:p>
@@ -10658,7 +11629,79 @@
                 </a:solidFill>
                 <a:latin typeface="Calibri"/>
               </a:rPr>
-              <a:t>–   No es una reunion de avance, no es una calificacion y no es una demostracion para lucirse.</a:t>
+              <a:t>–   Tiene cuatro roles: </a:t>
+            </a:r>
+            <a:r>
+              <a:rPr sz="2000" b="1" i="0">
+                <a:solidFill>
+                  <a:srgbClr val="333333"/>
+                </a:solidFill>
+                <a:latin typeface="Calibri"/>
+              </a:rPr>
+              <a:t>autor</a:t>
+            </a:r>
+            <a:r>
+              <a:rPr sz="2000" b="0" i="0">
+                <a:solidFill>
+                  <a:srgbClr val="333333"/>
+                </a:solidFill>
+                <a:latin typeface="Calibri"/>
+              </a:rPr>
+              <a:t> presenta, </a:t>
+            </a:r>
+            <a:r>
+              <a:rPr sz="2000" b="1" i="0">
+                <a:solidFill>
+                  <a:srgbClr val="333333"/>
+                </a:solidFill>
+                <a:latin typeface="Calibri"/>
+              </a:rPr>
+              <a:t>revisores</a:t>
+            </a:r>
+            <a:r>
+              <a:rPr sz="2000" b="0" i="0">
+                <a:solidFill>
+                  <a:srgbClr val="333333"/>
+                </a:solidFill>
+                <a:latin typeface="Calibri"/>
+              </a:rPr>
+              <a:t> buscan, </a:t>
+            </a:r>
+            <a:r>
+              <a:rPr sz="2000" b="1" i="0">
+                <a:solidFill>
+                  <a:srgbClr val="333333"/>
+                </a:solidFill>
+                <a:latin typeface="Calibri"/>
+              </a:rPr>
+              <a:t>moderador</a:t>
+            </a:r>
+            <a:r>
+              <a:rPr sz="2000" b="0" i="0">
+                <a:solidFill>
+                  <a:srgbClr val="333333"/>
+                </a:solidFill>
+                <a:latin typeface="Calibri"/>
+              </a:rPr>
+              <a:t> cuida el tiempo y </a:t>
+            </a:r>
+            <a:r>
+              <a:rPr sz="2000" b="1" i="0">
+                <a:solidFill>
+                  <a:srgbClr val="333333"/>
+                </a:solidFill>
+                <a:latin typeface="Calibri"/>
+              </a:rPr>
+              <a:t>escriba</a:t>
+            </a:r>
+            <a:r>
+              <a:rPr sz="2000" b="0" i="0">
+                <a:solidFill>
+                  <a:srgbClr val="333333"/>
+                </a:solidFill>
+                <a:latin typeface="Calibri"/>
+              </a:rPr>
+              <a:t> registra.</a:t>
             </a:r>
           </a:p>
           <a:p>
@@ -10674,7 +11717,25 @@
                 </a:solidFill>
                 <a:latin typeface="Calibri"/>
               </a:rPr>
-              <a:t>–   La practica tiene nombres y roles establecidos desde hace decadas en ingenieria de software.</a:t>
+              <a:t>–   Se sale con un producto escrito, el </a:t>
+            </a:r>
+            <a:r>
+              <a:rPr sz="2000" b="1" i="0">
+                <a:solidFill>
+                  <a:srgbClr val="333333"/>
+                </a:solidFill>
+                <a:latin typeface="Calibri"/>
+              </a:rPr>
+              <a:t>acta de hallazgos</a:t>
+            </a:r>
+            <a:r>
+              <a:rPr sz="2000" b="0" i="0">
+                <a:solidFill>
+                  <a:srgbClr val="333333"/>
+                </a:solidFill>
+                <a:latin typeface="Calibri"/>
+              </a:rPr>
+              <a:t>, no con una nota ni con un aplauso.</a:t>
             </a:r>
           </a:p>
           <a:p>
@@ -10690,14 +11751,32 @@
                 </a:solidFill>
                 <a:latin typeface="Calibri"/>
               </a:rPr>
-              <a:t>–   El estandar clasico, IEEE 1028, distingue la inspeccion (formal.</a:t>
-            </a:r>
-          </a:p>
-        </p:txBody>
-      </p:sp>
-      <p:sp>
-        <p:nvSpPr>
-          <p:cNvPr id="15" name="TextBox 14"/>
+              <a:t>–   Se revisa el </a:t>
+            </a:r>
+            <a:r>
+              <a:rPr sz="2000" b="1" i="0">
+                <a:solidFill>
+                  <a:srgbClr val="333333"/>
+                </a:solidFill>
+                <a:latin typeface="Calibri"/>
+              </a:rPr>
+              <a:t>artefacto</a:t>
+            </a:r>
+            <a:r>
+              <a:rPr sz="2000" b="0" i="0">
+                <a:solidFill>
+                  <a:srgbClr val="333333"/>
+                </a:solidFill>
+                <a:latin typeface="Calibri"/>
+              </a:rPr>
+              <a:t>, no la persona, y el problema se registra, no se arregla en la reunión.</a:t>
+            </a:r>
+          </a:p>
+        </p:txBody>
+      </p:sp>
+      <p:sp>
+        <p:nvSpPr>
+          <p:cNvPr id="20" name="TextBox 19"/>
           <p:cNvSpPr txBox="1"/>
           <p:nvPr/>
         </p:nvSpPr>
@@ -10849,6 +11928,59 @@
                       </p:childTnLst>
                     </p:cTn>
                   </p:par>
+                  <p:par>
+                    <p:cTn id="13" fill="hold">
+                      <p:stCondLst>
+                        <p:cond delay="indefinite"/>
+                      </p:stCondLst>
+                      <p:childTnLst>
+                        <p:par>
+                          <p:cTn id="14" fill="hold">
+                            <p:stCondLst>
+                              <p:cond delay="0"/>
+                            </p:stCondLst>
+                            <p:childTnLst>
+                              <p:par>
+                                <p:cTn id="15" presetID="10" presetClass="entr" presetSubtype="0" fill="hold" nodeType="clickEffect">
+                                  <p:stCondLst>
+                                    <p:cond delay="0"/>
+                                  </p:stCondLst>
+                                  <p:childTnLst>
+                                    <p:set>
+                                      <p:cBhvr>
+                                        <p:cTn id="16" dur="1" fill="hold">
+                                          <p:stCondLst>
+                                            <p:cond delay="0"/>
+                                          </p:stCondLst>
+                                        </p:cTn>
+                                        <p:tgtEl>
+                                          <p:spTgt spid="9"/>
+                                        </p:tgtEl>
+                                        <p:attrNameLst>
+                                          <p:attrName>style.visibility</p:attrName>
+                                        </p:attrNameLst>
+                                      </p:cBhvr>
+                                      <p:to>
+                                        <p:strVal val="visible"/>
+                                      </p:to>
+                                    </p:set>
+                                    <p:animEffect transition="in" filter="fade">
+                                      <p:cBhvr>
+                                        <p:cTn id="17" dur="450"/>
+                                        <p:tgtEl>
+                                          <p:spTgt spid="9"/>
+                                        </p:tgtEl>
+                                      </p:cBhvr>
+                                    </p:animEffect>
+                                  </p:childTnLst>
+                                </p:cTn>
+                              </p:par>
+                            </p:childTnLst>
+                          </p:cTn>
+                        </p:par>
+                      </p:childTnLst>
+                    </p:cTn>
+                  </p:par>
                 </p:childTnLst>
               </p:cTn>
               <p:prevCondLst>
@@ -11129,9 +12261,33 @@
           </a:prstGeom>
         </p:spPr>
       </p:pic>
-      <p:sp>
-        <p:nvSpPr>
-          <p:cNvPr id="13" name="TextBox 12"/>
+      <p:pic>
+        <p:nvPicPr>
+          <p:cNvPr id="9" name="Picture 8" descr="coherencia-piezas-paso4.png"/>
+          <p:cNvPicPr>
+            <a:picLocks noChangeAspect="1"/>
+          </p:cNvPicPr>
+          <p:nvPr/>
+        </p:nvPicPr>
+        <p:blipFill>
+          <a:blip r:embed="rId5"/>
+          <a:stretch>
+            <a:fillRect/>
+          </a:stretch>
+        </p:blipFill>
+        <p:spPr>
+          <a:xfrm>
+            <a:off x="5876318" y="1261872"/>
+            <a:ext cx="5852160" cy="4681728"/>
+          </a:xfrm>
+          <a:prstGeom prst="rect">
+            <a:avLst/>
+          </a:prstGeom>
+        </p:spPr>
+      </p:pic>
+      <p:sp>
+        <p:nvSpPr>
+          <p:cNvPr id="18" name="TextBox 17"/>
           <p:cNvSpPr txBox="1"/>
           <p:nvPr/>
         </p:nvSpPr>
@@ -11166,7 +12322,7 @@
       </p:sp>
       <p:sp>
         <p:nvSpPr>
-          <p:cNvPr id="14" name="TextBox 13"/>
+          <p:cNvPr id="19" name="TextBox 18"/>
           <p:cNvSpPr txBox="1"/>
           <p:nvPr/>
         </p:nvSpPr>
@@ -11198,7 +12354,25 @@
                 </a:solidFill>
                 <a:latin typeface="Calibri"/>
               </a:rPr>
-              <a:t>–   Un artefacto es cualquier producto de trabajo: el diagrama entidad-relacion, el script DDL, la matriz de roles, los procedimientos, el informe de…</a:t>
+              <a:t>–   Un </a:t>
+            </a:r>
+            <a:r>
+              <a:rPr sz="2000" b="1" i="0">
+                <a:solidFill>
+                  <a:srgbClr val="333333"/>
+                </a:solidFill>
+                <a:latin typeface="Calibri"/>
+              </a:rPr>
+              <a:t>artefacto</a:t>
+            </a:r>
+            <a:r>
+              <a:rPr sz="2000" b="0" i="0">
+                <a:solidFill>
+                  <a:srgbClr val="333333"/>
+                </a:solidFill>
+                <a:latin typeface="Calibri"/>
+              </a:rPr>
+              <a:t> es cualquier producto de trabajo: el ER, el DDL, la matriz de roles, los procedimientos, el informe.</a:t>
             </a:r>
           </a:p>
           <a:p>
@@ -11214,7 +12388,25 @@
                 </a:solidFill>
                 <a:latin typeface="Calibri"/>
               </a:rPr>
-              <a:t>–   Es perfectamente posible que un estudiante tenga un ER bien dibujado, un DDL que ejecuta sin errores</a:t>
+              <a:t>–   Cada pieza puede estar bien sola y aun así describir, junto a otra, </a:t>
+            </a:r>
+            <a:r>
+              <a:rPr sz="2000" b="1" i="0">
+                <a:solidFill>
+                  <a:srgbClr val="333333"/>
+                </a:solidFill>
+                <a:latin typeface="Calibri"/>
+              </a:rPr>
+              <a:t>bases distintas</a:t>
+            </a:r>
+            <a:r>
+              <a:rPr sz="2000" b="0" i="0">
+                <a:solidFill>
+                  <a:srgbClr val="333333"/>
+                </a:solidFill>
+                <a:latin typeface="Calibri"/>
+              </a:rPr>
+              <a:t>.</a:t>
             </a:r>
           </a:p>
           <a:p>
@@ -11230,14 +12422,66 @@
                 </a:solidFill>
                 <a:latin typeface="Calibri"/>
               </a:rPr>
-              <a:t>–   Y que ambos describan bases de datos distintas, porque el ER se dibujo en la Clase 1 y el DDL se fue parchando en las Clases 3 a 8 sin volver a…</a:t>
-            </a:r>
-          </a:p>
-        </p:txBody>
-      </p:sp>
-      <p:sp>
-        <p:nvSpPr>
-          <p:cNvPr id="15" name="TextBox 14"/>
+              <a:t>–   El caso más común: el ER se dibujó al inicio y el DDL se fue </a:t>
+            </a:r>
+            <a:r>
+              <a:rPr sz="2000" b="1" i="0">
+                <a:solidFill>
+                  <a:srgbClr val="333333"/>
+                </a:solidFill>
+                <a:latin typeface="Calibri"/>
+              </a:rPr>
+              <a:t>parchando</a:t>
+            </a:r>
+            <a:r>
+              <a:rPr sz="2000" b="0" i="0">
+                <a:solidFill>
+                  <a:srgbClr val="333333"/>
+                </a:solidFill>
+                <a:latin typeface="Calibri"/>
+              </a:rPr>
+              <a:t> sin actualizarlo.</a:t>
+            </a:r>
+          </a:p>
+          <a:p>
+            <a:pPr>
+              <a:spcAft>
+                <a:spcPts val="800"/>
+              </a:spcAft>
+            </a:pPr>
+            <a:r>
+              <a:rPr sz="2000" b="0" i="0">
+                <a:solidFill>
+                  <a:srgbClr val="333333"/>
+                </a:solidFill>
+                <a:latin typeface="Calibri"/>
+              </a:rPr>
+              <a:t>–   Por eso se corren </a:t>
+            </a:r>
+            <a:r>
+              <a:rPr sz="2000" b="1" i="0">
+                <a:solidFill>
+                  <a:srgbClr val="333333"/>
+                </a:solidFill>
+                <a:latin typeface="Calibri"/>
+              </a:rPr>
+              <a:t>cuatro verificaciones cruzadas</a:t>
+            </a:r>
+            <a:r>
+              <a:rPr sz="2000" b="0" i="0">
+                <a:solidFill>
+                  <a:srgbClr val="333333"/>
+                </a:solidFill>
+                <a:latin typeface="Calibri"/>
+              </a:rPr>
+              <a:t>, cada una entre dos piezas.</a:t>
+            </a:r>
+          </a:p>
+        </p:txBody>
+      </p:sp>
+      <p:sp>
+        <p:nvSpPr>
+          <p:cNvPr id="20" name="TextBox 19"/>
           <p:cNvSpPr txBox="1"/>
           <p:nvPr/>
         </p:nvSpPr>
@@ -11389,6 +12633,59 @@
                       </p:childTnLst>
                     </p:cTn>
                   </p:par>
+                  <p:par>
+                    <p:cTn id="13" fill="hold">
+                      <p:stCondLst>
+                        <p:cond delay="indefinite"/>
+                      </p:stCondLst>
+                      <p:childTnLst>
+                        <p:par>
+                          <p:cTn id="14" fill="hold">
+                            <p:stCondLst>
+                              <p:cond delay="0"/>
+                            </p:stCondLst>
+                            <p:childTnLst>
+                              <p:par>
+                                <p:cTn id="15" presetID="10" presetClass="entr" presetSubtype="0" fill="hold" nodeType="clickEffect">
+                                  <p:stCondLst>
+                                    <p:cond delay="0"/>
+                                  </p:stCondLst>
+                                  <p:childTnLst>
+                                    <p:set>
+                                      <p:cBhvr>
+                                        <p:cTn id="16" dur="1" fill="hold">
+                                          <p:stCondLst>
+                                            <p:cond delay="0"/>
+                                          </p:stCondLst>
+                                        </p:cTn>
+                                        <p:tgtEl>
+                                          <p:spTgt spid="9"/>
+                                        </p:tgtEl>
+                                        <p:attrNameLst>
+                                          <p:attrName>style.visibility</p:attrName>
+                                        </p:attrNameLst>
+                                      </p:cBhvr>
+                                      <p:to>
+                                        <p:strVal val="visible"/>
+                                      </p:to>
+                                    </p:set>
+                                    <p:animEffect transition="in" filter="fade">
+                                      <p:cBhvr>
+                                        <p:cTn id="17" dur="450"/>
+                                        <p:tgtEl>
+                                          <p:spTgt spid="9"/>
+                                        </p:tgtEl>
+                                      </p:cBhvr>
+                                    </p:animEffect>
+                                  </p:childTnLst>
+                                </p:cTn>
+                              </p:par>
+                            </p:childTnLst>
+                          </p:cTn>
+                        </p:par>
+                      </p:childTnLst>
+                    </p:cTn>
+                  </p:par>
                 </p:childTnLst>
               </p:cTn>
               <p:prevCondLst>
@@ -11669,9 +12966,33 @@
           </a:prstGeom>
         </p:spPr>
       </p:pic>
-      <p:sp>
-        <p:nvSpPr>
-          <p:cNvPr id="13" name="TextBox 12"/>
+      <p:pic>
+        <p:nvPicPr>
+          <p:cNvPr id="9" name="Picture 8" descr="er-contra-ddl-paso4.png"/>
+          <p:cNvPicPr>
+            <a:picLocks noChangeAspect="1"/>
+          </p:cNvPicPr>
+          <p:nvPr/>
+        </p:nvPicPr>
+        <p:blipFill>
+          <a:blip r:embed="rId5"/>
+          <a:stretch>
+            <a:fillRect/>
+          </a:stretch>
+        </p:blipFill>
+        <p:spPr>
+          <a:xfrm>
+            <a:off x="5876318" y="1261872"/>
+            <a:ext cx="5852160" cy="4681728"/>
+          </a:xfrm>
+          <a:prstGeom prst="rect">
+            <a:avLst/>
+          </a:prstGeom>
+        </p:spPr>
+      </p:pic>
+      <p:sp>
+        <p:nvSpPr>
+          <p:cNvPr id="18" name="TextBox 17"/>
           <p:cNvSpPr txBox="1"/>
           <p:nvPr/>
         </p:nvSpPr>
@@ -11706,7 +13027,7 @@
       </p:sp>
       <p:sp>
         <p:nvSpPr>
-          <p:cNvPr id="14" name="TextBox 13"/>
+          <p:cNvPr id="19" name="TextBox 18"/>
           <p:cNvSpPr txBox="1"/>
           <p:nvPr/>
         </p:nvSpPr>
@@ -11738,7 +13059,25 @@
                 </a:solidFill>
                 <a:latin typeface="Calibri"/>
               </a:rPr>
-              <a:t>–   Se recorre el diagrama entidad por entidad y se busca su CREATE TABLE: toda entidad sin tabla es un hallazgo.</a:t>
+              <a:t>–   De ida, cada entidad del ER debe tener su CREATE TABLE: una </a:t>
+            </a:r>
+            <a:r>
+              <a:rPr sz="2000" b="1" i="0">
+                <a:solidFill>
+                  <a:srgbClr val="333333"/>
+                </a:solidFill>
+                <a:latin typeface="Calibri"/>
+              </a:rPr>
+              <a:t>entidad sin tabla</a:t>
+            </a:r>
+            <a:r>
+              <a:rPr sz="2000" b="0" i="0">
+                <a:solidFill>
+                  <a:srgbClr val="333333"/>
+                </a:solidFill>
+                <a:latin typeface="Calibri"/>
+              </a:rPr>
+              <a:t> es un hallazgo.</a:t>
             </a:r>
           </a:p>
           <a:p>
@@ -11754,7 +13093,25 @@
                 </a:solidFill>
                 <a:latin typeface="Calibri"/>
               </a:rPr>
-              <a:t>–   Luego se recorre en sentido contrario, porque es el que nadie hace.</a:t>
+              <a:t>–   De vuelta, una </a:t>
+            </a:r>
+            <a:r>
+              <a:rPr sz="2000" b="1" i="0">
+                <a:solidFill>
+                  <a:srgbClr val="333333"/>
+                </a:solidFill>
+                <a:latin typeface="Calibri"/>
+              </a:rPr>
+              <a:t>tabla sin entidad</a:t>
+            </a:r>
+            <a:r>
+              <a:rPr sz="2000" b="0" i="0">
+                <a:solidFill>
+                  <a:srgbClr val="333333"/>
+                </a:solidFill>
+                <a:latin typeface="Calibri"/>
+              </a:rPr>
+              <a:t> también lo es, y es la revisión que casi nadie hace.</a:t>
             </a:r>
           </a:p>
           <a:p>
@@ -11770,14 +13127,66 @@
                 </a:solidFill>
                 <a:latin typeface="Calibri"/>
               </a:rPr>
-              <a:t>–   Si el ER dice que una cita pertenece a exactamente una mascota, el DDL debe tener id_mascota con NOT NULL y una FOREIGN KEY hacia Mascota</a:t>
-            </a:r>
-          </a:p>
-        </p:txBody>
-      </p:sp>
-      <p:sp>
-        <p:nvSpPr>
-          <p:cNvPr id="15" name="TextBox 14"/>
+              <a:t>–   Una cardinalidad dibujada debe existir como </a:t>
+            </a:r>
+            <a:r>
+              <a:rPr sz="2000" b="1" i="0">
+                <a:solidFill>
+                  <a:srgbClr val="333333"/>
+                </a:solidFill>
+                <a:latin typeface="Calibri"/>
+              </a:rPr>
+              <a:t>NOT NULL y REFERENCES</a:t>
+            </a:r>
+            <a:r>
+              <a:rPr sz="2000" b="0" i="0">
+                <a:solidFill>
+                  <a:srgbClr val="333333"/>
+                </a:solidFill>
+                <a:latin typeface="Calibri"/>
+              </a:rPr>
+              <a:t> en el DDL.</a:t>
+            </a:r>
+          </a:p>
+          <a:p>
+            <a:pPr>
+              <a:spcAft>
+                <a:spcPts val="800"/>
+              </a:spcAft>
+            </a:pPr>
+            <a:r>
+              <a:rPr sz="2000" b="0" i="0">
+                <a:solidFill>
+                  <a:srgbClr val="333333"/>
+                </a:solidFill>
+                <a:latin typeface="Calibri"/>
+              </a:rPr>
+              <a:t>–   Verificación dos: cada celda de la </a:t>
+            </a:r>
+            <a:r>
+              <a:rPr sz="2000" b="1" i="0">
+                <a:solidFill>
+                  <a:srgbClr val="333333"/>
+                </a:solidFill>
+                <a:latin typeface="Calibri"/>
+              </a:rPr>
+              <a:t>matriz de roles</a:t>
+            </a:r>
+            <a:r>
+              <a:rPr sz="2000" b="0" i="0">
+                <a:solidFill>
+                  <a:srgbClr val="333333"/>
+                </a:solidFill>
+                <a:latin typeface="Calibri"/>
+              </a:rPr>
+              <a:t> debe verse en un GRANT, y nada más.</a:t>
+            </a:r>
+          </a:p>
+        </p:txBody>
+      </p:sp>
+      <p:sp>
+        <p:nvSpPr>
+          <p:cNvPr id="20" name="TextBox 19"/>
           <p:cNvSpPr txBox="1"/>
           <p:nvPr/>
         </p:nvSpPr>
@@ -11929,6 +13338,59 @@
                       </p:childTnLst>
                     </p:cTn>
                   </p:par>
+                  <p:par>
+                    <p:cTn id="13" fill="hold">
+                      <p:stCondLst>
+                        <p:cond delay="indefinite"/>
+                      </p:stCondLst>
+                      <p:childTnLst>
+                        <p:par>
+                          <p:cTn id="14" fill="hold">
+                            <p:stCondLst>
+                              <p:cond delay="0"/>
+                            </p:stCondLst>
+                            <p:childTnLst>
+                              <p:par>
+                                <p:cTn id="15" presetID="10" presetClass="entr" presetSubtype="0" fill="hold" nodeType="clickEffect">
+                                  <p:stCondLst>
+                                    <p:cond delay="0"/>
+                                  </p:stCondLst>
+                                  <p:childTnLst>
+                                    <p:set>
+                                      <p:cBhvr>
+                                        <p:cTn id="16" dur="1" fill="hold">
+                                          <p:stCondLst>
+                                            <p:cond delay="0"/>
+                                          </p:stCondLst>
+                                        </p:cTn>
+                                        <p:tgtEl>
+                                          <p:spTgt spid="9"/>
+                                        </p:tgtEl>
+                                        <p:attrNameLst>
+                                          <p:attrName>style.visibility</p:attrName>
+                                        </p:attrNameLst>
+                                      </p:cBhvr>
+                                      <p:to>
+                                        <p:strVal val="visible"/>
+                                      </p:to>
+                                    </p:set>
+                                    <p:animEffect transition="in" filter="fade">
+                                      <p:cBhvr>
+                                        <p:cTn id="17" dur="450"/>
+                                        <p:tgtEl>
+                                          <p:spTgt spid="9"/>
+                                        </p:tgtEl>
+                                      </p:cBhvr>
+                                    </p:animEffect>
+                                  </p:childTnLst>
+                                </p:cTn>
+                              </p:par>
+                            </p:childTnLst>
+                          </p:cTn>
+                        </p:par>
+                      </p:childTnLst>
+                    </p:cTn>
+                  </p:par>
                 </p:childTnLst>
               </p:cTn>
               <p:prevCondLst>
@@ -12209,9 +13671,33 @@
           </a:prstGeom>
         </p:spPr>
       </p:pic>
-      <p:sp>
-        <p:nvSpPr>
-          <p:cNvPr id="13" name="TextBox 12"/>
+      <p:pic>
+        <p:nvPicPr>
+          <p:cNvPr id="9" name="Picture 8" descr="compila-funciona-paso4.png"/>
+          <p:cNvPicPr>
+            <a:picLocks noChangeAspect="1"/>
+          </p:cNvPicPr>
+          <p:nvPr/>
+        </p:nvPicPr>
+        <p:blipFill>
+          <a:blip r:embed="rId5"/>
+          <a:stretch>
+            <a:fillRect/>
+          </a:stretch>
+        </p:blipFill>
+        <p:spPr>
+          <a:xfrm>
+            <a:off x="5876318" y="1261872"/>
+            <a:ext cx="5852160" cy="4681728"/>
+          </a:xfrm>
+          <a:prstGeom prst="rect">
+            <a:avLst/>
+          </a:prstGeom>
+        </p:spPr>
+      </p:pic>
+      <p:sp>
+        <p:nvSpPr>
+          <p:cNvPr id="18" name="TextBox 17"/>
           <p:cNvSpPr txBox="1"/>
           <p:nvPr/>
         </p:nvSpPr>
@@ -12246,7 +13732,7 @@
       </p:sp>
       <p:sp>
         <p:nvSpPr>
-          <p:cNvPr id="14" name="TextBox 13"/>
+          <p:cNvPr id="19" name="TextBox 18"/>
           <p:cNvSpPr txBox="1"/>
           <p:nvPr/>
         </p:nvSpPr>
@@ -12278,7 +13764,43 @@
                 </a:solidFill>
                 <a:latin typeface="Calibri"/>
               </a:rPr>
-              <a:t>–   La distincion que separa a un estudiante que va bien de uno que va mal es esta: un procedimiento que compila no es un procedimiento que funciona.</a:t>
+              <a:t>–   Un procedimiento que </a:t>
+            </a:r>
+            <a:r>
+              <a:rPr sz="2000" b="1" i="0">
+                <a:solidFill>
+                  <a:srgbClr val="333333"/>
+                </a:solidFill>
+                <a:latin typeface="Calibri"/>
+              </a:rPr>
+              <a:t>compila</a:t>
+            </a:r>
+            <a:r>
+              <a:rPr sz="2000" b="0" i="0">
+                <a:solidFill>
+                  <a:srgbClr val="333333"/>
+                </a:solidFill>
+                <a:latin typeface="Calibri"/>
+              </a:rPr>
+              <a:t> no es un procedimiento que </a:t>
+            </a:r>
+            <a:r>
+              <a:rPr sz="2000" b="1" i="0">
+                <a:solidFill>
+                  <a:srgbClr val="333333"/>
+                </a:solidFill>
+                <a:latin typeface="Calibri"/>
+              </a:rPr>
+              <a:t>funciona</a:t>
+            </a:r>
+            <a:r>
+              <a:rPr sz="2000" b="0" i="0">
+                <a:solidFill>
+                  <a:srgbClr val="333333"/>
+                </a:solidFill>
+                <a:latin typeface="Calibri"/>
+              </a:rPr>
+              <a:t>: se piden dos ejecuciones.</a:t>
             </a:r>
           </a:p>
           <a:p>
@@ -12294,7 +13816,43 @@
                 </a:solidFill>
                 <a:latin typeface="Calibri"/>
               </a:rPr>
-              <a:t>–   Primero CALL sp_agendar_cita con datos validos, que debe insertar la cita y devolver confirmacion.</a:t>
+              <a:t>–   El </a:t>
+            </a:r>
+            <a:r>
+              <a:rPr sz="2000" b="1" i="0">
+                <a:solidFill>
+                  <a:srgbClr val="333333"/>
+                </a:solidFill>
+                <a:latin typeface="Calibri"/>
+              </a:rPr>
+              <a:t>caso válido</a:t>
+            </a:r>
+            <a:r>
+              <a:rPr sz="2000" b="0" i="0">
+                <a:solidFill>
+                  <a:srgbClr val="333333"/>
+                </a:solidFill>
+                <a:latin typeface="Calibri"/>
+              </a:rPr>
+              <a:t> inserta la cita, y el </a:t>
+            </a:r>
+            <a:r>
+              <a:rPr sz="2000" b="1" i="0">
+                <a:solidFill>
+                  <a:srgbClr val="333333"/>
+                </a:solidFill>
+                <a:latin typeface="Calibri"/>
+              </a:rPr>
+              <a:t>caso inválido</a:t>
+            </a:r>
+            <a:r>
+              <a:rPr sz="2000" b="0" i="0">
+                <a:solidFill>
+                  <a:srgbClr val="333333"/>
+                </a:solidFill>
+                <a:latin typeface="Calibri"/>
+              </a:rPr>
+              <a:t> declarado responde con su mensaje de negocio.</a:t>
             </a:r>
           </a:p>
           <a:p>
@@ -12310,7 +13868,25 @@
                 </a:solidFill>
                 <a:latin typeface="Calibri"/>
               </a:rPr>
-              <a:t>–   Segundo, CALL sp_agendar_cita con el caso invalido que el propio estudiante declaro, es decir una mascota inactiva o un horario ya tomado.</a:t>
+              <a:t>–   Verificación cuatro: una optimización se demuestra con el </a:t>
+            </a:r>
+            <a:r>
+              <a:rPr sz="2000" b="1" i="0">
+                <a:solidFill>
+                  <a:srgbClr val="333333"/>
+                </a:solidFill>
+                <a:latin typeface="Calibri"/>
+              </a:rPr>
+              <a:t>plan antes y después</a:t>
+            </a:r>
+            <a:r>
+              <a:rPr sz="2000" b="0" i="0">
+                <a:solidFill>
+                  <a:srgbClr val="333333"/>
+                </a:solidFill>
+                <a:latin typeface="Calibri"/>
+              </a:rPr>
+              <a:t>.</a:t>
             </a:r>
           </a:p>
           <a:p>
@@ -12326,14 +13902,32 @@
                 </a:solidFill>
                 <a:latin typeface="Calibri"/>
               </a:rPr>
-              <a:t>–   Si el estudiante no puede mostrar la segunda ejecucion.</a:t>
-            </a:r>
-          </a:p>
-        </p:txBody>
-      </p:sp>
-      <p:sp>
-        <p:nvSpPr>
-          <p:cNvPr id="15" name="TextBox 14"/>
+              <a:t>–   Un índice que ninguna consulta usa es un </a:t>
+            </a:r>
+            <a:r>
+              <a:rPr sz="2000" b="1" i="0">
+                <a:solidFill>
+                  <a:srgbClr val="333333"/>
+                </a:solidFill>
+                <a:latin typeface="Calibri"/>
+              </a:rPr>
+              <a:t>hallazgo</a:t>
+            </a:r>
+            <a:r>
+              <a:rPr sz="2000" b="0" i="0">
+                <a:solidFill>
+                  <a:srgbClr val="333333"/>
+                </a:solidFill>
+                <a:latin typeface="Calibri"/>
+              </a:rPr>
+              <a:t>, no un avance.</a:t>
+            </a:r>
+          </a:p>
+        </p:txBody>
+      </p:sp>
+      <p:sp>
+        <p:nvSpPr>
+          <p:cNvPr id="20" name="TextBox 19"/>
           <p:cNvSpPr txBox="1"/>
           <p:nvPr/>
         </p:nvSpPr>
@@ -12485,6 +14079,59 @@
                       </p:childTnLst>
                     </p:cTn>
                   </p:par>
+                  <p:par>
+                    <p:cTn id="13" fill="hold">
+                      <p:stCondLst>
+                        <p:cond delay="indefinite"/>
+                      </p:stCondLst>
+                      <p:childTnLst>
+                        <p:par>
+                          <p:cTn id="14" fill="hold">
+                            <p:stCondLst>
+                              <p:cond delay="0"/>
+                            </p:stCondLst>
+                            <p:childTnLst>
+                              <p:par>
+                                <p:cTn id="15" presetID="10" presetClass="entr" presetSubtype="0" fill="hold" nodeType="clickEffect">
+                                  <p:stCondLst>
+                                    <p:cond delay="0"/>
+                                  </p:stCondLst>
+                                  <p:childTnLst>
+                                    <p:set>
+                                      <p:cBhvr>
+                                        <p:cTn id="16" dur="1" fill="hold">
+                                          <p:stCondLst>
+                                            <p:cond delay="0"/>
+                                          </p:stCondLst>
+                                        </p:cTn>
+                                        <p:tgtEl>
+                                          <p:spTgt spid="9"/>
+                                        </p:tgtEl>
+                                        <p:attrNameLst>
+                                          <p:attrName>style.visibility</p:attrName>
+                                        </p:attrNameLst>
+                                      </p:cBhvr>
+                                      <p:to>
+                                        <p:strVal val="visible"/>
+                                      </p:to>
+                                    </p:set>
+                                    <p:animEffect transition="in" filter="fade">
+                                      <p:cBhvr>
+                                        <p:cTn id="17" dur="450"/>
+                                        <p:tgtEl>
+                                          <p:spTgt spid="9"/>
+                                        </p:tgtEl>
+                                      </p:cBhvr>
+                                    </p:animEffect>
+                                  </p:childTnLst>
+                                </p:cTn>
+                              </p:par>
+                            </p:childTnLst>
+                          </p:cTn>
+                        </p:par>
+                      </p:childTnLst>
+                    </p:cTn>
+                  </p:par>
                 </p:childTnLst>
               </p:cTn>
               <p:prevCondLst>
@@ -14302,7 +15949,25 @@
                 </a:solidFill>
                 <a:latin typeface="Calibri"/>
               </a:rPr>
-              <a:t>–   Scope creep es el crecimiento no controlado del alcance: funcionalidad que se va agregando sin que nadie decida agregarla y sin que se quite nada a…</a:t>
+              <a:t>–   </a:t>
+            </a:r>
+            <a:r>
+              <a:rPr sz="2000" b="1" i="0">
+                <a:solidFill>
+                  <a:srgbClr val="333333"/>
+                </a:solidFill>
+                <a:latin typeface="Calibri"/>
+              </a:rPr>
+              <a:t>Scope creep</a:t>
+            </a:r>
+            <a:r>
+              <a:rPr sz="2000" b="0" i="0">
+                <a:solidFill>
+                  <a:srgbClr val="333333"/>
+                </a:solidFill>
+                <a:latin typeface="Calibri"/>
+              </a:rPr>
+              <a:t> es agregar funcionalidad sin que nadie lo decida y sin quitar nada a cambio.</a:t>
             </a:r>
           </a:p>
           <a:p>
@@ -14318,7 +15983,25 @@
                 </a:solidFill>
                 <a:latin typeface="Calibri"/>
               </a:rPr>
-              <a:t>–   En un proyecto de base de datos tiene un sintoma cuantificable.</a:t>
+              <a:t>–   En una base de datos se mide en </a:t>
+            </a:r>
+            <a:r>
+              <a:rPr sz="2000" b="1" i="0">
+                <a:solidFill>
+                  <a:srgbClr val="333333"/>
+                </a:solidFill>
+                <a:latin typeface="Calibri"/>
+              </a:rPr>
+              <a:t>entidades</a:t>
+            </a:r>
+            <a:r>
+              <a:rPr sz="2000" b="0" i="0">
+                <a:solidFill>
+                  <a:srgbClr val="333333"/>
+                </a:solidFill>
+                <a:latin typeface="Calibri"/>
+              </a:rPr>
+              <a:t>, y el rango sano a esta altura es de 6 a 9.</a:t>
             </a:r>
           </a:p>
           <a:p>
@@ -14334,7 +16017,59 @@
                 </a:solidFill>
                 <a:latin typeface="Calibri"/>
               </a:rPr>
-              <a:t>–   Insumo y Factura con su detalle) y el rango sano al llegar a la Clase 11 es de seis a nueve.</a:t>
+              <a:t>–   Quince entidades no es ir adelantado: es el mismo esfuerzo en el </a:t>
+            </a:r>
+            <a:r>
+              <a:rPr sz="2000" b="1" i="0">
+                <a:solidFill>
+                  <a:srgbClr val="333333"/>
+                </a:solidFill>
+                <a:latin typeface="Calibri"/>
+              </a:rPr>
+              <a:t>doble de superficie</a:t>
+            </a:r>
+            <a:r>
+              <a:rPr sz="2000" b="0" i="0">
+                <a:solidFill>
+                  <a:srgbClr val="333333"/>
+                </a:solidFill>
+                <a:latin typeface="Calibri"/>
+              </a:rPr>
+              <a:t>.</a:t>
+            </a:r>
+          </a:p>
+          <a:p>
+            <a:pPr>
+              <a:spcAft>
+                <a:spcPts val="800"/>
+              </a:spcAft>
+            </a:pPr>
+            <a:r>
+              <a:rPr sz="2000" b="0" i="0">
+                <a:solidFill>
+                  <a:srgbClr val="333333"/>
+                </a:solidFill>
+                <a:latin typeface="Calibri"/>
+              </a:rPr>
+              <a:t>–   Las que sobran pasan a </a:t>
+            </a:r>
+            <a:r>
+              <a:rPr sz="2000" b="1" i="0">
+                <a:solidFill>
+                  <a:srgbClr val="333333"/>
+                </a:solidFill>
+                <a:latin typeface="Calibri"/>
+              </a:rPr>
+              <a:t>alcance futuro</a:t>
+            </a:r>
+            <a:r>
+              <a:rPr sz="2000" b="0" i="0">
+                <a:solidFill>
+                  <a:srgbClr val="333333"/>
+                </a:solidFill>
+                <a:latin typeface="Calibri"/>
+              </a:rPr>
+              <a:t> del informe, con la razón por la que quedaron fuera.</a:t>
             </a:r>
           </a:p>
         </p:txBody>

--- a/Bases de Datos II/Clases/Clase 11 - Avance del proyecto final/Presentacion.pptx
+++ b/Bases de Datos II/Clases/Clase 11 - Avance del proyecto final/Presentacion.pptx
@@ -1748,7 +1748,7 @@
           </a:p>
           <a:p>
             <a:r>
-              <a:t>  • Clic 1: La versión accionable, parte por parte: artefacto, el script DDL; observación, detalle_factura no tiene FOREIGN KEY hacia insumo aunque el ER dibuja la relación; impacto, se pueden insertar detalles con insumos que no existen; acción, agregar la restricción y re-ejecutar el script completo desde cero; responsable y fecha, el autor, antes de la próxima sesión.</a:t>
+              <a:t>  • Clic 1: La versión concreta, parte por parte: artefacto, el script DDL; observación, detalle_factura no tiene FOREIGN KEY hacia insumo aunque el ER dibuja la relación; impacto, se pueden insertar detalles con insumos que no existen; acción, agregar la restricción y re-ejecutar el script completo desde cero; responsable y fecha, el autor, antes de la próxima sesión.</a:t>
             </a:r>
           </a:p>
           <a:p>
@@ -14304,7 +14304,7 @@
         <p:spPr>
           <a:xfrm>
             <a:off x="457200" y="1261872"/>
-            <a:ext cx="11277295" cy="4568884"/>
+            <a:ext cx="11277295" cy="4398352"/>
           </a:xfrm>
           <a:prstGeom prst="roundRect">
             <a:avLst>
@@ -14554,7 +14554,7 @@
         <p:spPr>
           <a:xfrm>
             <a:off x="685800" y="1719072"/>
-            <a:ext cx="502920" cy="3974524"/>
+            <a:ext cx="502920" cy="3803992"/>
           </a:xfrm>
           <a:prstGeom prst="rect">
             <a:avLst/>
@@ -14569,11 +14569,11 @@
           <a:p>
             <a:pPr algn="r">
               <a:spcAft>
-                <a:spcPts val="428"/>
+                <a:spcPts val="407"/>
               </a:spcAft>
             </a:pPr>
             <a:r>
-              <a:rPr sz="2000" i="0" b="0">
+              <a:rPr sz="1900" i="0" b="0">
                 <a:solidFill>
                   <a:srgbClr val="858585"/>
                 </a:solidFill>
@@ -14585,11 +14585,11 @@
           <a:p>
             <a:pPr algn="r">
               <a:spcAft>
-                <a:spcPts val="428"/>
+                <a:spcPts val="407"/>
               </a:spcAft>
             </a:pPr>
             <a:r>
-              <a:rPr sz="2000" i="0" b="0">
+              <a:rPr sz="1900" i="0" b="0">
                 <a:solidFill>
                   <a:srgbClr val="858585"/>
                 </a:solidFill>
@@ -14601,11 +14601,11 @@
           <a:p>
             <a:pPr algn="r">
               <a:spcAft>
-                <a:spcPts val="428"/>
+                <a:spcPts val="407"/>
               </a:spcAft>
             </a:pPr>
             <a:r>
-              <a:rPr sz="2000" i="0" b="0">
+              <a:rPr sz="1900" i="0" b="0">
                 <a:solidFill>
                   <a:srgbClr val="858585"/>
                 </a:solidFill>
@@ -14617,11 +14617,11 @@
           <a:p>
             <a:pPr algn="r">
               <a:spcAft>
-                <a:spcPts val="428"/>
+                <a:spcPts val="407"/>
               </a:spcAft>
             </a:pPr>
             <a:r>
-              <a:rPr sz="2000" i="0" b="0">
+              <a:rPr sz="1900" i="0" b="0">
                 <a:solidFill>
                   <a:srgbClr val="858585"/>
                 </a:solidFill>
@@ -14633,11 +14633,11 @@
           <a:p>
             <a:pPr algn="r">
               <a:spcAft>
-                <a:spcPts val="428"/>
+                <a:spcPts val="407"/>
               </a:spcAft>
             </a:pPr>
             <a:r>
-              <a:rPr sz="2000" i="0" b="0">
+              <a:rPr sz="1900" i="0" b="0">
                 <a:solidFill>
                   <a:srgbClr val="858585"/>
                 </a:solidFill>
@@ -14649,11 +14649,11 @@
           <a:p>
             <a:pPr algn="r">
               <a:spcAft>
-                <a:spcPts val="428"/>
+                <a:spcPts val="407"/>
               </a:spcAft>
             </a:pPr>
             <a:r>
-              <a:rPr sz="2000" i="0" b="0">
+              <a:rPr sz="1900" i="0" b="0">
                 <a:solidFill>
                   <a:srgbClr val="858585"/>
                 </a:solidFill>
@@ -14665,11 +14665,11 @@
           <a:p>
             <a:pPr algn="r">
               <a:spcAft>
-                <a:spcPts val="428"/>
+                <a:spcPts val="407"/>
               </a:spcAft>
             </a:pPr>
             <a:r>
-              <a:rPr sz="2000" i="0" b="0">
+              <a:rPr sz="1900" i="0" b="0">
                 <a:solidFill>
                   <a:srgbClr val="858585"/>
                 </a:solidFill>
@@ -14681,11 +14681,11 @@
           <a:p>
             <a:pPr algn="r">
               <a:spcAft>
-                <a:spcPts val="428"/>
+                <a:spcPts val="407"/>
               </a:spcAft>
             </a:pPr>
             <a:r>
-              <a:rPr sz="2000" i="0" b="0">
+              <a:rPr sz="1900" i="0" b="0">
                 <a:solidFill>
                   <a:srgbClr val="858585"/>
                 </a:solidFill>
@@ -14697,11 +14697,11 @@
           <a:p>
             <a:pPr algn="r">
               <a:spcAft>
-                <a:spcPts val="428"/>
+                <a:spcPts val="407"/>
               </a:spcAft>
             </a:pPr>
             <a:r>
-              <a:rPr sz="2000" i="0" b="0">
+              <a:rPr sz="1900" i="0" b="0">
                 <a:solidFill>
                   <a:srgbClr val="858585"/>
                 </a:solidFill>
@@ -14713,11 +14713,11 @@
           <a:p>
             <a:pPr algn="r">
               <a:spcAft>
-                <a:spcPts val="428"/>
+                <a:spcPts val="407"/>
               </a:spcAft>
             </a:pPr>
             <a:r>
-              <a:rPr sz="2000" i="0" b="0">
+              <a:rPr sz="1900" i="0" b="0">
                 <a:solidFill>
                   <a:srgbClr val="858585"/>
                 </a:solidFill>
@@ -14729,11 +14729,11 @@
           <a:p>
             <a:pPr algn="r">
               <a:spcAft>
-                <a:spcPts val="428"/>
+                <a:spcPts val="407"/>
               </a:spcAft>
             </a:pPr>
             <a:r>
-              <a:rPr sz="2000" i="0" b="0">
+              <a:rPr sz="1900" i="0" b="0">
                 <a:solidFill>
                   <a:srgbClr val="858585"/>
                 </a:solidFill>
@@ -14753,7 +14753,7 @@
         <p:spPr>
           <a:xfrm>
             <a:off x="1188720" y="1719072"/>
-            <a:ext cx="10271455" cy="3974524"/>
+            <a:ext cx="10271455" cy="3803992"/>
           </a:xfrm>
           <a:prstGeom prst="rect">
             <a:avLst/>
@@ -14768,11 +14768,11 @@
           <a:p>
             <a:pPr>
               <a:spcAft>
-                <a:spcPts val="428"/>
+                <a:spcPts val="407"/>
               </a:spcAft>
             </a:pPr>
             <a:r>
-              <a:rPr sz="2000" i="1" b="0">
+              <a:rPr sz="1900" i="1" b="0">
                 <a:solidFill>
                   <a:srgbClr val="6A9955"/>
                 </a:solidFill>
@@ -14784,11 +14784,11 @@
           <a:p>
             <a:pPr>
               <a:spcAft>
-                <a:spcPts val="428"/>
+                <a:spcPts val="407"/>
               </a:spcAft>
             </a:pPr>
             <a:r>
-              <a:rPr sz="2000" i="0" b="0">
+              <a:rPr sz="1900" i="0" b="0">
                 <a:solidFill>
                   <a:srgbClr val="569CD6"/>
                 </a:solidFill>
@@ -14797,7 +14797,7 @@
               <a:t>SELECT</a:t>
             </a:r>
             <a:r>
-              <a:rPr sz="2000" i="0" b="0">
+              <a:rPr sz="1900" i="0" b="0">
                 <a:solidFill>
                   <a:srgbClr val="D4D4D4"/>
                 </a:solidFill>
@@ -14806,7 +14806,7 @@
               <a:t> </a:t>
             </a:r>
             <a:r>
-              <a:rPr sz="2000" i="0" b="0">
+              <a:rPr sz="1900" i="0" b="0">
                 <a:solidFill>
                   <a:srgbClr val="D4D4D4"/>
                 </a:solidFill>
@@ -14815,7 +14815,7 @@
               <a:t>table_name</a:t>
             </a:r>
             <a:r>
-              <a:rPr sz="2000" i="0" b="0">
+              <a:rPr sz="1900" i="0" b="0">
                 <a:solidFill>
                   <a:srgbClr val="D4D4D4"/>
                 </a:solidFill>
@@ -14824,7 +14824,7 @@
               <a:t> </a:t>
             </a:r>
             <a:r>
-              <a:rPr sz="2000" i="0" b="0">
+              <a:rPr sz="1900" i="0" b="0">
                 <a:solidFill>
                   <a:srgbClr val="569CD6"/>
                 </a:solidFill>
@@ -14833,7 +14833,7 @@
               <a:t>FROM</a:t>
             </a:r>
             <a:r>
-              <a:rPr sz="2000" i="0" b="0">
+              <a:rPr sz="1900" i="0" b="0">
                 <a:solidFill>
                   <a:srgbClr val="D4D4D4"/>
                 </a:solidFill>
@@ -14842,7 +14842,7 @@
               <a:t> </a:t>
             </a:r>
             <a:r>
-              <a:rPr sz="2000" i="0" b="0">
+              <a:rPr sz="1900" i="0" b="0">
                 <a:solidFill>
                   <a:srgbClr val="D4D4D4"/>
                 </a:solidFill>
@@ -14851,7 +14851,7 @@
               <a:t>information_schema</a:t>
             </a:r>
             <a:r>
-              <a:rPr sz="2000" i="0" b="0">
+              <a:rPr sz="1900" i="0" b="0">
                 <a:solidFill>
                   <a:srgbClr val="D4D4D4"/>
                 </a:solidFill>
@@ -14860,7 +14860,7 @@
               <a:t>.</a:t>
             </a:r>
             <a:r>
-              <a:rPr sz="2000" i="0" b="0">
+              <a:rPr sz="1900" i="0" b="0">
                 <a:solidFill>
                   <a:srgbClr val="D4D4D4"/>
                 </a:solidFill>
@@ -14872,11 +14872,11 @@
           <a:p>
             <a:pPr>
               <a:spcAft>
-                <a:spcPts val="428"/>
+                <a:spcPts val="407"/>
               </a:spcAft>
             </a:pPr>
             <a:r>
-              <a:rPr sz="2000" i="0" b="0">
+              <a:rPr sz="1900" i="0" b="0">
                 <a:solidFill>
                   <a:srgbClr val="569CD6"/>
                 </a:solidFill>
@@ -14885,7 +14885,7 @@
               <a:t>WHERE</a:t>
             </a:r>
             <a:r>
-              <a:rPr sz="2000" i="0" b="0">
+              <a:rPr sz="1900" i="0" b="0">
                 <a:solidFill>
                   <a:srgbClr val="D4D4D4"/>
                 </a:solidFill>
@@ -14894,7 +14894,7 @@
               <a:t> </a:t>
             </a:r>
             <a:r>
-              <a:rPr sz="2000" i="0" b="0">
+              <a:rPr sz="1900" i="0" b="0">
                 <a:solidFill>
                   <a:srgbClr val="D4D4D4"/>
                 </a:solidFill>
@@ -14903,7 +14903,7 @@
               <a:t>table_schema</a:t>
             </a:r>
             <a:r>
-              <a:rPr sz="2000" i="0" b="0">
+              <a:rPr sz="1900" i="0" b="0">
                 <a:solidFill>
                   <a:srgbClr val="D4D4D4"/>
                 </a:solidFill>
@@ -14912,7 +14912,7 @@
               <a:t> = </a:t>
             </a:r>
             <a:r>
-              <a:rPr sz="2000" i="0" b="0">
+              <a:rPr sz="1900" i="0" b="0">
                 <a:solidFill>
                   <a:srgbClr val="CE9178"/>
                 </a:solidFill>
@@ -14921,7 +14921,7 @@
               <a:t>'public'</a:t>
             </a:r>
             <a:r>
-              <a:rPr sz="2000" i="0" b="0">
+              <a:rPr sz="1900" i="0" b="0">
                 <a:solidFill>
                   <a:srgbClr val="D4D4D4"/>
                 </a:solidFill>
@@ -14930,7 +14930,7 @@
               <a:t> </a:t>
             </a:r>
             <a:r>
-              <a:rPr sz="2000" i="0" b="0">
+              <a:rPr sz="1900" i="0" b="0">
                 <a:solidFill>
                   <a:srgbClr val="569CD6"/>
                 </a:solidFill>
@@ -14939,7 +14939,7 @@
               <a:t>ORDER</a:t>
             </a:r>
             <a:r>
-              <a:rPr sz="2000" i="0" b="0">
+              <a:rPr sz="1900" i="0" b="0">
                 <a:solidFill>
                   <a:srgbClr val="D4D4D4"/>
                 </a:solidFill>
@@ -14948,7 +14948,7 @@
               <a:t> </a:t>
             </a:r>
             <a:r>
-              <a:rPr sz="2000" i="0" b="0">
+              <a:rPr sz="1900" i="0" b="0">
                 <a:solidFill>
                   <a:srgbClr val="569CD6"/>
                 </a:solidFill>
@@ -14957,7 +14957,7 @@
               <a:t>BY</a:t>
             </a:r>
             <a:r>
-              <a:rPr sz="2000" i="0" b="0">
+              <a:rPr sz="1900" i="0" b="0">
                 <a:solidFill>
                   <a:srgbClr val="D4D4D4"/>
                 </a:solidFill>
@@ -14966,7 +14966,7 @@
               <a:t> </a:t>
             </a:r>
             <a:r>
-              <a:rPr sz="2000" i="0" b="0">
+              <a:rPr sz="1900" i="0" b="0">
                 <a:solidFill>
                   <a:srgbClr val="D4D4D4"/>
                 </a:solidFill>
@@ -14975,7 +14975,7 @@
               <a:t>table_name</a:t>
             </a:r>
             <a:r>
-              <a:rPr sz="2000" i="0" b="0">
+              <a:rPr sz="1900" i="0" b="0">
                 <a:solidFill>
                   <a:srgbClr val="D4D4D4"/>
                 </a:solidFill>
@@ -14987,11 +14987,11 @@
           <a:p>
             <a:pPr>
               <a:spcAft>
-                <a:spcPts val="428"/>
+                <a:spcPts val="407"/>
               </a:spcAft>
             </a:pPr>
             <a:r>
-              <a:rPr sz="2000" i="0" b="0">
+              <a:rPr sz="1900" i="0" b="0">
                 <a:solidFill>
                   <a:srgbClr val="D4D4D4"/>
                 </a:solidFill>
@@ -15003,11 +15003,11 @@
           <a:p>
             <a:pPr>
               <a:spcAft>
-                <a:spcPts val="428"/>
+                <a:spcPts val="407"/>
               </a:spcAft>
             </a:pPr>
             <a:r>
-              <a:rPr sz="2000" i="1" b="0">
+              <a:rPr sz="1900" i="1" b="0">
                 <a:solidFill>
                   <a:srgbClr val="6A9955"/>
                 </a:solidFill>
@@ -15019,11 +15019,11 @@
           <a:p>
             <a:pPr>
               <a:spcAft>
-                <a:spcPts val="428"/>
+                <a:spcPts val="407"/>
               </a:spcAft>
             </a:pPr>
             <a:r>
-              <a:rPr sz="2000" i="0" b="0">
+              <a:rPr sz="1900" i="0" b="0">
                 <a:solidFill>
                   <a:srgbClr val="569CD6"/>
                 </a:solidFill>
@@ -15032,7 +15032,7 @@
               <a:t>SELECT</a:t>
             </a:r>
             <a:r>
-              <a:rPr sz="2000" i="0" b="0">
+              <a:rPr sz="1900" i="0" b="0">
                 <a:solidFill>
                   <a:srgbClr val="D4D4D4"/>
                 </a:solidFill>
@@ -15041,7 +15041,7 @@
               <a:t> </a:t>
             </a:r>
             <a:r>
-              <a:rPr sz="2000" i="0" b="0">
+              <a:rPr sz="1900" i="0" b="0">
                 <a:solidFill>
                   <a:srgbClr val="D4D4D4"/>
                 </a:solidFill>
@@ -15050,7 +15050,7 @@
               <a:t>t</a:t>
             </a:r>
             <a:r>
-              <a:rPr sz="2000" i="0" b="0">
+              <a:rPr sz="1900" i="0" b="0">
                 <a:solidFill>
                   <a:srgbClr val="D4D4D4"/>
                 </a:solidFill>
@@ -15059,7 +15059,7 @@
               <a:t>.</a:t>
             </a:r>
             <a:r>
-              <a:rPr sz="2000" i="0" b="0">
+              <a:rPr sz="1900" i="0" b="0">
                 <a:solidFill>
                   <a:srgbClr val="D4D4D4"/>
                 </a:solidFill>
@@ -15071,11 +15071,11 @@
           <a:p>
             <a:pPr>
               <a:spcAft>
-                <a:spcPts val="428"/>
+                <a:spcPts val="407"/>
               </a:spcAft>
             </a:pPr>
             <a:r>
-              <a:rPr sz="2000" i="0" b="0">
+              <a:rPr sz="1900" i="0" b="0">
                 <a:solidFill>
                   <a:srgbClr val="569CD6"/>
                 </a:solidFill>
@@ -15084,7 +15084,7 @@
               <a:t>FROM</a:t>
             </a:r>
             <a:r>
-              <a:rPr sz="2000" i="0" b="0">
+              <a:rPr sz="1900" i="0" b="0">
                 <a:solidFill>
                   <a:srgbClr val="D4D4D4"/>
                 </a:solidFill>
@@ -15093,7 +15093,7 @@
               <a:t> </a:t>
             </a:r>
             <a:r>
-              <a:rPr sz="2000" i="0" b="0">
+              <a:rPr sz="1900" i="0" b="0">
                 <a:solidFill>
                   <a:srgbClr val="D4D4D4"/>
                 </a:solidFill>
@@ -15102,7 +15102,7 @@
               <a:t>information_schema</a:t>
             </a:r>
             <a:r>
-              <a:rPr sz="2000" i="0" b="0">
+              <a:rPr sz="1900" i="0" b="0">
                 <a:solidFill>
                   <a:srgbClr val="D4D4D4"/>
                 </a:solidFill>
@@ -15111,7 +15111,7 @@
               <a:t>.</a:t>
             </a:r>
             <a:r>
-              <a:rPr sz="2000" i="0" b="0">
+              <a:rPr sz="1900" i="0" b="0">
                 <a:solidFill>
                   <a:srgbClr val="D4D4D4"/>
                 </a:solidFill>
@@ -15120,7 +15120,7 @@
               <a:t>tables</a:t>
             </a:r>
             <a:r>
-              <a:rPr sz="2000" i="0" b="0">
+              <a:rPr sz="1900" i="0" b="0">
                 <a:solidFill>
                   <a:srgbClr val="D4D4D4"/>
                 </a:solidFill>
@@ -15129,7 +15129,7 @@
               <a:t> </a:t>
             </a:r>
             <a:r>
-              <a:rPr sz="2000" i="0" b="0">
+              <a:rPr sz="1900" i="0" b="0">
                 <a:solidFill>
                   <a:srgbClr val="D4D4D4"/>
                 </a:solidFill>
@@ -15141,11 +15141,11 @@
           <a:p>
             <a:pPr>
               <a:spcAft>
-                <a:spcPts val="428"/>
+                <a:spcPts val="407"/>
               </a:spcAft>
             </a:pPr>
             <a:r>
-              <a:rPr sz="2000" i="0" b="0">
+              <a:rPr sz="1900" i="0" b="0">
                 <a:solidFill>
                   <a:srgbClr val="569CD6"/>
                 </a:solidFill>
@@ -15154,7 +15154,7 @@
               <a:t>LEFT</a:t>
             </a:r>
             <a:r>
-              <a:rPr sz="2000" i="0" b="0">
+              <a:rPr sz="1900" i="0" b="0">
                 <a:solidFill>
                   <a:srgbClr val="D4D4D4"/>
                 </a:solidFill>
@@ -15163,7 +15163,7 @@
               <a:t> </a:t>
             </a:r>
             <a:r>
-              <a:rPr sz="2000" i="0" b="0">
+              <a:rPr sz="1900" i="0" b="0">
                 <a:solidFill>
                   <a:srgbClr val="569CD6"/>
                 </a:solidFill>
@@ -15172,7 +15172,7 @@
               <a:t>JOIN</a:t>
             </a:r>
             <a:r>
-              <a:rPr sz="2000" i="0" b="0">
+              <a:rPr sz="1900" i="0" b="0">
                 <a:solidFill>
                   <a:srgbClr val="D4D4D4"/>
                 </a:solidFill>
@@ -15181,7 +15181,7 @@
               <a:t> </a:t>
             </a:r>
             <a:r>
-              <a:rPr sz="2000" i="0" b="0">
+              <a:rPr sz="1900" i="0" b="0">
                 <a:solidFill>
                   <a:srgbClr val="D4D4D4"/>
                 </a:solidFill>
@@ -15190,7 +15190,7 @@
               <a:t>information_schema</a:t>
             </a:r>
             <a:r>
-              <a:rPr sz="2000" i="0" b="0">
+              <a:rPr sz="1900" i="0" b="0">
                 <a:solidFill>
                   <a:srgbClr val="D4D4D4"/>
                 </a:solidFill>
@@ -15199,7 +15199,7 @@
               <a:t>.</a:t>
             </a:r>
             <a:r>
-              <a:rPr sz="2000" i="0" b="0">
+              <a:rPr sz="1900" i="0" b="0">
                 <a:solidFill>
                   <a:srgbClr val="D4D4D4"/>
                 </a:solidFill>
@@ -15208,7 +15208,7 @@
               <a:t>table_constraints</a:t>
             </a:r>
             <a:r>
-              <a:rPr sz="2000" i="0" b="0">
+              <a:rPr sz="1900" i="0" b="0">
                 <a:solidFill>
                   <a:srgbClr val="D4D4D4"/>
                 </a:solidFill>
@@ -15217,7 +15217,7 @@
               <a:t> </a:t>
             </a:r>
             <a:r>
-              <a:rPr sz="2000" i="0" b="0">
+              <a:rPr sz="1900" i="0" b="0">
                 <a:solidFill>
                   <a:srgbClr val="D4D4D4"/>
                 </a:solidFill>
@@ -15229,11 +15229,11 @@
           <a:p>
             <a:pPr>
               <a:spcAft>
-                <a:spcPts val="428"/>
+                <a:spcPts val="407"/>
               </a:spcAft>
             </a:pPr>
             <a:r>
-              <a:rPr sz="2000" i="0" b="0">
+              <a:rPr sz="1900" i="0" b="0">
                 <a:solidFill>
                   <a:srgbClr val="D4D4D4"/>
                 </a:solidFill>
@@ -15242,7 +15242,7 @@
               <a:t>       </a:t>
             </a:r>
             <a:r>
-              <a:rPr sz="2000" i="0" b="0">
+              <a:rPr sz="1900" i="0" b="0">
                 <a:solidFill>
                   <a:srgbClr val="569CD6"/>
                 </a:solidFill>
@@ -15251,7 +15251,7 @@
               <a:t>ON</a:t>
             </a:r>
             <a:r>
-              <a:rPr sz="2000" i="0" b="0">
+              <a:rPr sz="1900" i="0" b="0">
                 <a:solidFill>
                   <a:srgbClr val="D4D4D4"/>
                 </a:solidFill>
@@ -15260,7 +15260,7 @@
               <a:t> </a:t>
             </a:r>
             <a:r>
-              <a:rPr sz="2000" i="0" b="0">
+              <a:rPr sz="1900" i="0" b="0">
                 <a:solidFill>
                   <a:srgbClr val="D4D4D4"/>
                 </a:solidFill>
@@ -15269,7 +15269,7 @@
               <a:t>c</a:t>
             </a:r>
             <a:r>
-              <a:rPr sz="2000" i="0" b="0">
+              <a:rPr sz="1900" i="0" b="0">
                 <a:solidFill>
                   <a:srgbClr val="D4D4D4"/>
                 </a:solidFill>
@@ -15278,7 +15278,7 @@
               <a:t>.</a:t>
             </a:r>
             <a:r>
-              <a:rPr sz="2000" i="0" b="0">
+              <a:rPr sz="1900" i="0" b="0">
                 <a:solidFill>
                   <a:srgbClr val="D4D4D4"/>
                 </a:solidFill>
@@ -15287,7 +15287,7 @@
               <a:t>table_name</a:t>
             </a:r>
             <a:r>
-              <a:rPr sz="2000" i="0" b="0">
+              <a:rPr sz="1900" i="0" b="0">
                 <a:solidFill>
                   <a:srgbClr val="D4D4D4"/>
                 </a:solidFill>
@@ -15296,7 +15296,7 @@
               <a:t> = </a:t>
             </a:r>
             <a:r>
-              <a:rPr sz="2000" i="0" b="0">
+              <a:rPr sz="1900" i="0" b="0">
                 <a:solidFill>
                   <a:srgbClr val="D4D4D4"/>
                 </a:solidFill>
@@ -15305,7 +15305,7 @@
               <a:t>t</a:t>
             </a:r>
             <a:r>
-              <a:rPr sz="2000" i="0" b="0">
+              <a:rPr sz="1900" i="0" b="0">
                 <a:solidFill>
                   <a:srgbClr val="D4D4D4"/>
                 </a:solidFill>
@@ -15314,7 +15314,7 @@
               <a:t>.</a:t>
             </a:r>
             <a:r>
-              <a:rPr sz="2000" i="0" b="0">
+              <a:rPr sz="1900" i="0" b="0">
                 <a:solidFill>
                   <a:srgbClr val="D4D4D4"/>
                 </a:solidFill>
@@ -15323,7 +15323,7 @@
               <a:t>table_name</a:t>
             </a:r>
             <a:r>
-              <a:rPr sz="2000" i="0" b="0">
+              <a:rPr sz="1900" i="0" b="0">
                 <a:solidFill>
                   <a:srgbClr val="D4D4D4"/>
                 </a:solidFill>
@@ -15332,7 +15332,7 @@
               <a:t> </a:t>
             </a:r>
             <a:r>
-              <a:rPr sz="2000" i="0" b="0">
+              <a:rPr sz="1900" i="0" b="0">
                 <a:solidFill>
                   <a:srgbClr val="569CD6"/>
                 </a:solidFill>
@@ -15341,7 +15341,7 @@
               <a:t>AND</a:t>
             </a:r>
             <a:r>
-              <a:rPr sz="2000" i="0" b="0">
+              <a:rPr sz="1900" i="0" b="0">
                 <a:solidFill>
                   <a:srgbClr val="D4D4D4"/>
                 </a:solidFill>
@@ -15350,7 +15350,7 @@
               <a:t> </a:t>
             </a:r>
             <a:r>
-              <a:rPr sz="2000" i="0" b="0">
+              <a:rPr sz="1900" i="0" b="0">
                 <a:solidFill>
                   <a:srgbClr val="D4D4D4"/>
                 </a:solidFill>
@@ -15359,7 +15359,7 @@
               <a:t>c</a:t>
             </a:r>
             <a:r>
-              <a:rPr sz="2000" i="0" b="0">
+              <a:rPr sz="1900" i="0" b="0">
                 <a:solidFill>
                   <a:srgbClr val="D4D4D4"/>
                 </a:solidFill>
@@ -15368,7 +15368,7 @@
               <a:t>.</a:t>
             </a:r>
             <a:r>
-              <a:rPr sz="2000" i="0" b="0">
+              <a:rPr sz="1900" i="0" b="0">
                 <a:solidFill>
                   <a:srgbClr val="D4D4D4"/>
                 </a:solidFill>
@@ -15377,7 +15377,7 @@
               <a:t>constraint_type</a:t>
             </a:r>
             <a:r>
-              <a:rPr sz="2000" i="0" b="0">
+              <a:rPr sz="1900" i="0" b="0">
                 <a:solidFill>
                   <a:srgbClr val="D4D4D4"/>
                 </a:solidFill>
@@ -15386,7 +15386,7 @@
               <a:t> = </a:t>
             </a:r>
             <a:r>
-              <a:rPr sz="2000" i="0" b="0">
+              <a:rPr sz="1900" i="0" b="0">
                 <a:solidFill>
                   <a:srgbClr val="CE9178"/>
                 </a:solidFill>
@@ -15398,11 +15398,11 @@
           <a:p>
             <a:pPr>
               <a:spcAft>
-                <a:spcPts val="428"/>
+                <a:spcPts val="407"/>
               </a:spcAft>
             </a:pPr>
             <a:r>
-              <a:rPr sz="2000" i="0" b="0">
+              <a:rPr sz="1900" i="0" b="0">
                 <a:solidFill>
                   <a:srgbClr val="569CD6"/>
                 </a:solidFill>
@@ -15411,7 +15411,7 @@
               <a:t>WHERE</a:t>
             </a:r>
             <a:r>
-              <a:rPr sz="2000" i="0" b="0">
+              <a:rPr sz="1900" i="0" b="0">
                 <a:solidFill>
                   <a:srgbClr val="D4D4D4"/>
                 </a:solidFill>
@@ -15420,7 +15420,7 @@
               <a:t> </a:t>
             </a:r>
             <a:r>
-              <a:rPr sz="2000" i="0" b="0">
+              <a:rPr sz="1900" i="0" b="0">
                 <a:solidFill>
                   <a:srgbClr val="D4D4D4"/>
                 </a:solidFill>
@@ -15429,7 +15429,7 @@
               <a:t>t</a:t>
             </a:r>
             <a:r>
-              <a:rPr sz="2000" i="0" b="0">
+              <a:rPr sz="1900" i="0" b="0">
                 <a:solidFill>
                   <a:srgbClr val="D4D4D4"/>
                 </a:solidFill>
@@ -15438,7 +15438,7 @@
               <a:t>.</a:t>
             </a:r>
             <a:r>
-              <a:rPr sz="2000" i="0" b="0">
+              <a:rPr sz="1900" i="0" b="0">
                 <a:solidFill>
                   <a:srgbClr val="D4D4D4"/>
                 </a:solidFill>
@@ -15447,7 +15447,7 @@
               <a:t>table_schema</a:t>
             </a:r>
             <a:r>
-              <a:rPr sz="2000" i="0" b="0">
+              <a:rPr sz="1900" i="0" b="0">
                 <a:solidFill>
                   <a:srgbClr val="D4D4D4"/>
                 </a:solidFill>
@@ -15456,7 +15456,7 @@
               <a:t> = </a:t>
             </a:r>
             <a:r>
-              <a:rPr sz="2000" i="0" b="0">
+              <a:rPr sz="1900" i="0" b="0">
                 <a:solidFill>
                   <a:srgbClr val="CE9178"/>
                 </a:solidFill>
@@ -15465,7 +15465,7 @@
               <a:t>'public'</a:t>
             </a:r>
             <a:r>
-              <a:rPr sz="2000" i="0" b="0">
+              <a:rPr sz="1900" i="0" b="0">
                 <a:solidFill>
                   <a:srgbClr val="D4D4D4"/>
                 </a:solidFill>
@@ -15474,7 +15474,7 @@
               <a:t> </a:t>
             </a:r>
             <a:r>
-              <a:rPr sz="2000" i="0" b="0">
+              <a:rPr sz="1900" i="0" b="0">
                 <a:solidFill>
                   <a:srgbClr val="569CD6"/>
                 </a:solidFill>
@@ -15483,7 +15483,7 @@
               <a:t>AND</a:t>
             </a:r>
             <a:r>
-              <a:rPr sz="2000" i="0" b="0">
+              <a:rPr sz="1900" i="0" b="0">
                 <a:solidFill>
                   <a:srgbClr val="D4D4D4"/>
                 </a:solidFill>
@@ -15492,7 +15492,7 @@
               <a:t> </a:t>
             </a:r>
             <a:r>
-              <a:rPr sz="2000" i="0" b="0">
+              <a:rPr sz="1900" i="0" b="0">
                 <a:solidFill>
                   <a:srgbClr val="D4D4D4"/>
                 </a:solidFill>
@@ -15501,7 +15501,7 @@
               <a:t>c</a:t>
             </a:r>
             <a:r>
-              <a:rPr sz="2000" i="0" b="0">
+              <a:rPr sz="1900" i="0" b="0">
                 <a:solidFill>
                   <a:srgbClr val="D4D4D4"/>
                 </a:solidFill>
@@ -15510,7 +15510,7 @@
               <a:t>.</a:t>
             </a:r>
             <a:r>
-              <a:rPr sz="2000" i="0" b="0">
+              <a:rPr sz="1900" i="0" b="0">
                 <a:solidFill>
                   <a:srgbClr val="D4D4D4"/>
                 </a:solidFill>
@@ -15519,7 +15519,7 @@
               <a:t>constraint_name</a:t>
             </a:r>
             <a:r>
-              <a:rPr sz="2000" i="0" b="0">
+              <a:rPr sz="1900" i="0" b="0">
                 <a:solidFill>
                   <a:srgbClr val="D4D4D4"/>
                 </a:solidFill>
@@ -15528,7 +15528,7 @@
               <a:t> </a:t>
             </a:r>
             <a:r>
-              <a:rPr sz="2000" i="0" b="0">
+              <a:rPr sz="1900" i="0" b="0">
                 <a:solidFill>
                   <a:srgbClr val="569CD6"/>
                 </a:solidFill>
@@ -15537,7 +15537,7 @@
               <a:t>IS</a:t>
             </a:r>
             <a:r>
-              <a:rPr sz="2000" i="0" b="0">
+              <a:rPr sz="1900" i="0" b="0">
                 <a:solidFill>
                   <a:srgbClr val="D4D4D4"/>
                 </a:solidFill>
@@ -15546,7 +15546,7 @@
               <a:t> </a:t>
             </a:r>
             <a:r>
-              <a:rPr sz="2000" i="0" b="0">
+              <a:rPr sz="1900" i="0" b="0">
                 <a:solidFill>
                   <a:srgbClr val="569CD6"/>
                 </a:solidFill>
@@ -15555,7 +15555,7 @@
               <a:t>NULL</a:t>
             </a:r>
             <a:r>
-              <a:rPr sz="2000" i="0" b="0">
+              <a:rPr sz="1900" i="0" b="0">
                 <a:solidFill>
                   <a:srgbClr val="D4D4D4"/>
                 </a:solidFill>
@@ -15567,11 +15567,11 @@
           <a:p>
             <a:pPr>
               <a:spcAft>
-                <a:spcPts val="428"/>
+                <a:spcPts val="407"/>
               </a:spcAft>
             </a:pPr>
             <a:r>
-              <a:rPr sz="2000" i="1" b="0">
+              <a:rPr sz="1900" i="1" b="0">
                 <a:solidFill>
                   <a:srgbClr val="6A9955"/>
                 </a:solidFill>
